--- a/docs/Intel/Intelligence_Service_Murders.pptx
+++ b/docs/Intel/Intelligence_Service_Murders.pptx
@@ -5,24 +5,22 @@
     <p:sldMasterId id="2147483648" r:id="rId1"/>
   </p:sldMasterIdLst>
   <p:sldIdLst>
-    <p:sldId id="272" r:id="rId2"/>
-    <p:sldId id="273" r:id="rId3"/>
-    <p:sldId id="274" r:id="rId4"/>
-    <p:sldId id="275" r:id="rId5"/>
-    <p:sldId id="325" r:id="rId6"/>
-    <p:sldId id="276" r:id="rId7"/>
-    <p:sldId id="277" r:id="rId8"/>
-    <p:sldId id="278" r:id="rId9"/>
-    <p:sldId id="279" r:id="rId10"/>
-    <p:sldId id="280" r:id="rId11"/>
-    <p:sldId id="281" r:id="rId12"/>
-    <p:sldId id="282" r:id="rId13"/>
-    <p:sldId id="283" r:id="rId14"/>
-    <p:sldId id="284" r:id="rId15"/>
-    <p:sldId id="285" r:id="rId16"/>
-    <p:sldId id="286" r:id="rId17"/>
-    <p:sldId id="287" r:id="rId18"/>
-    <p:sldId id="288" r:id="rId19"/>
+    <p:sldId id="325" r:id="rId2"/>
+    <p:sldId id="284" r:id="rId3"/>
+    <p:sldId id="296" r:id="rId4"/>
+    <p:sldId id="285" r:id="rId5"/>
+    <p:sldId id="276" r:id="rId6"/>
+    <p:sldId id="279" r:id="rId7"/>
+    <p:sldId id="274" r:id="rId8"/>
+    <p:sldId id="280" r:id="rId9"/>
+    <p:sldId id="278" r:id="rId10"/>
+    <p:sldId id="282" r:id="rId11"/>
+    <p:sldId id="283" r:id="rId12"/>
+    <p:sldId id="286" r:id="rId13"/>
+    <p:sldId id="275" r:id="rId14"/>
+    <p:sldId id="272" r:id="rId15"/>
+    <p:sldId id="287" r:id="rId16"/>
+    <p:sldId id="288" r:id="rId17"/>
   </p:sldIdLst>
   <p:sldSz cx="12192000" cy="6858000"/>
   <p:notesSz cx="6858000" cy="9144000"/>
@@ -3343,464 +3341,9 @@
           <a:chExt cx="0" cy="0"/>
         </a:xfrm>
       </p:grpSpPr>
-      <p:sp>
-        <p:nvSpPr>
-          <p:cNvPr id="15" name="TextBox 14">
-            <a:extLst>
-              <a:ext uri="{FF2B5EF4-FFF2-40B4-BE49-F238E27FC236}">
-                <a16:creationId xmlns:a16="http://schemas.microsoft.com/office/drawing/2014/main" id="{E478240E-251B-5BA6-3C45-7E6620400769}"/>
-              </a:ext>
-            </a:extLst>
-          </p:cNvPr>
-          <p:cNvSpPr txBox="1"/>
-          <p:nvPr/>
-        </p:nvSpPr>
-        <p:spPr>
-          <a:xfrm>
-            <a:off x="312432" y="1288262"/>
-            <a:ext cx="6494294" cy="584775"/>
-          </a:xfrm>
-          <a:prstGeom prst="rect">
-            <a:avLst/>
-          </a:prstGeom>
-          <a:solidFill>
-            <a:schemeClr val="bg1">
-              <a:alpha val="84400"/>
-            </a:schemeClr>
-          </a:solidFill>
-        </p:spPr>
-        <p:txBody>
-          <a:bodyPr wrap="square" rtlCol="0">
-            <a:spAutoFit/>
-          </a:bodyPr>
-          <a:lstStyle/>
-          <a:p>
-            <a:r>
-              <a:rPr lang="en-US" sz="3200" b="1" dirty="0">
-                <a:solidFill>
-                  <a:schemeClr val="accent5"/>
-                </a:solidFill>
-              </a:rPr>
-              <a:t>Why / How they Ahmad Shah Massoud:</a:t>
-            </a:r>
-          </a:p>
-        </p:txBody>
-      </p:sp>
-      <p:sp>
-        <p:nvSpPr>
-          <p:cNvPr id="3" name="Google Shape;170;p31">
-            <a:extLst>
-              <a:ext uri="{FF2B5EF4-FFF2-40B4-BE49-F238E27FC236}">
-                <a16:creationId xmlns:a16="http://schemas.microsoft.com/office/drawing/2014/main" id="{A4695FE5-0AA5-AB05-98B1-B5B8E3FA8CBE}"/>
-              </a:ext>
-            </a:extLst>
-          </p:cNvPr>
-          <p:cNvSpPr/>
-          <p:nvPr/>
-        </p:nvSpPr>
-        <p:spPr>
-          <a:xfrm>
-            <a:off x="191731" y="5732890"/>
-            <a:ext cx="3431270" cy="496760"/>
-          </a:xfrm>
-          <a:prstGeom prst="rect">
-            <a:avLst/>
-          </a:prstGeom>
-          <a:solidFill>
-            <a:schemeClr val="accent5"/>
-          </a:solidFill>
-          <a:ln>
-            <a:noFill/>
-          </a:ln>
-        </p:spPr>
-        <p:txBody>
-          <a:bodyPr spcFirstLastPara="1" wrap="square" lIns="91425" tIns="45700" rIns="91425" bIns="45700" anchor="ctr" anchorCtr="0">
-            <a:noAutofit/>
-          </a:bodyPr>
-          <a:lstStyle/>
-          <a:p>
-            <a:pPr marL="0" marR="0" lvl="0" indent="0" algn="ctr" rtl="0">
-              <a:lnSpc>
-                <a:spcPct val="100000"/>
-              </a:lnSpc>
-              <a:spcBef>
-                <a:spcPts val="0"/>
-              </a:spcBef>
-              <a:spcAft>
-                <a:spcPts val="0"/>
-              </a:spcAft>
-              <a:buClr>
-                <a:srgbClr val="000000"/>
-              </a:buClr>
-              <a:buSzPts val="1600"/>
-              <a:buFont typeface="Arial"/>
-              <a:buNone/>
-            </a:pPr>
-            <a:r>
-              <a:rPr lang="en-US" sz="3600" dirty="0">
-                <a:solidFill>
-                  <a:schemeClr val="lt1"/>
-                </a:solidFill>
-              </a:rPr>
-              <a:t>Read List Here:</a:t>
-            </a:r>
-            <a:endParaRPr sz="2000" b="0" i="0" u="none" strike="noStrike" cap="none" dirty="0">
-              <a:solidFill>
-                <a:srgbClr val="000000"/>
-              </a:solidFill>
-              <a:latin typeface="Arial"/>
-              <a:ea typeface="Arial"/>
-              <a:cs typeface="Arial"/>
-              <a:sym typeface="Arial"/>
-            </a:endParaRPr>
-          </a:p>
-        </p:txBody>
-      </p:sp>
-      <p:sp>
-        <p:nvSpPr>
-          <p:cNvPr id="5" name="Google Shape;170;p31">
-            <a:extLst>
-              <a:ext uri="{FF2B5EF4-FFF2-40B4-BE49-F238E27FC236}">
-                <a16:creationId xmlns:a16="http://schemas.microsoft.com/office/drawing/2014/main" id="{98132413-6ED2-8B36-74B6-3C503B1A4634}"/>
-              </a:ext>
-            </a:extLst>
-          </p:cNvPr>
-          <p:cNvSpPr/>
-          <p:nvPr/>
-        </p:nvSpPr>
-        <p:spPr>
-          <a:xfrm>
-            <a:off x="0" y="-31518"/>
-            <a:ext cx="12192000" cy="1131606"/>
-          </a:xfrm>
-          <a:prstGeom prst="rect">
-            <a:avLst/>
-          </a:prstGeom>
-          <a:solidFill>
-            <a:srgbClr val="C00000"/>
-          </a:solidFill>
-          <a:ln>
-            <a:noFill/>
-          </a:ln>
-        </p:spPr>
-        <p:txBody>
-          <a:bodyPr spcFirstLastPara="1" wrap="square" lIns="91425" tIns="45700" rIns="91425" bIns="45700" anchor="ctr" anchorCtr="0">
-            <a:noAutofit/>
-          </a:bodyPr>
-          <a:lstStyle/>
-          <a:p>
-            <a:pPr marL="0" marR="0" lvl="0" indent="0" rtl="0">
-              <a:lnSpc>
-                <a:spcPct val="100000"/>
-              </a:lnSpc>
-              <a:spcBef>
-                <a:spcPts val="0"/>
-              </a:spcBef>
-              <a:spcAft>
-                <a:spcPts val="0"/>
-              </a:spcAft>
-              <a:buClr>
-                <a:srgbClr val="000000"/>
-              </a:buClr>
-              <a:buSzPts val="1600"/>
-              <a:buFont typeface="Arial"/>
-              <a:buNone/>
-            </a:pPr>
-            <a:r>
-              <a:rPr lang="en-US" sz="4800" dirty="0">
-                <a:solidFill>
-                  <a:schemeClr val="lt1"/>
-                </a:solidFill>
-              </a:rPr>
-              <a:t> 150+ Murdered: by Intelligence Services</a:t>
-            </a:r>
-            <a:endParaRPr sz="3200" b="0" i="0" u="none" strike="noStrike" cap="none" dirty="0">
-              <a:solidFill>
-                <a:srgbClr val="000000"/>
-              </a:solidFill>
-              <a:latin typeface="Arial"/>
-              <a:ea typeface="Arial"/>
-              <a:cs typeface="Arial"/>
-              <a:sym typeface="Arial"/>
-            </a:endParaRPr>
-          </a:p>
-        </p:txBody>
-      </p:sp>
-      <p:sp>
-        <p:nvSpPr>
-          <p:cNvPr id="4" name="TextBox 3">
-            <a:extLst>
-              <a:ext uri="{FF2B5EF4-FFF2-40B4-BE49-F238E27FC236}">
-                <a16:creationId xmlns:a16="http://schemas.microsoft.com/office/drawing/2014/main" id="{50D7621F-9D36-7894-7117-9F831EF5EFA6}"/>
-              </a:ext>
-            </a:extLst>
-          </p:cNvPr>
-          <p:cNvSpPr txBox="1"/>
-          <p:nvPr/>
-        </p:nvSpPr>
-        <p:spPr>
-          <a:xfrm>
-            <a:off x="107300" y="6229650"/>
-            <a:ext cx="11685989" cy="461665"/>
-          </a:xfrm>
-          <a:prstGeom prst="rect">
-            <a:avLst/>
-          </a:prstGeom>
-          <a:solidFill>
-            <a:schemeClr val="bg1">
-              <a:alpha val="84400"/>
-            </a:schemeClr>
-          </a:solidFill>
-        </p:spPr>
-        <p:txBody>
-          <a:bodyPr wrap="square" rtlCol="0">
-            <a:spAutoFit/>
-          </a:bodyPr>
-          <a:lstStyle/>
-          <a:p>
-            <a:r>
-              <a:rPr lang="en-US" sz="2400" dirty="0"/>
-              <a:t>https://intelligencemurders.com/intelligence-service-murders</a:t>
-            </a:r>
-          </a:p>
-        </p:txBody>
-      </p:sp>
-      <p:sp>
-        <p:nvSpPr>
-          <p:cNvPr id="7" name="Google Shape;170;p31">
-            <a:extLst>
-              <a:ext uri="{FF2B5EF4-FFF2-40B4-BE49-F238E27FC236}">
-                <a16:creationId xmlns:a16="http://schemas.microsoft.com/office/drawing/2014/main" id="{4B582382-76AA-B49E-C611-39A37CE591B9}"/>
-              </a:ext>
-            </a:extLst>
-          </p:cNvPr>
-          <p:cNvSpPr/>
-          <p:nvPr/>
-        </p:nvSpPr>
-        <p:spPr>
-          <a:xfrm>
-            <a:off x="7506336" y="4925186"/>
-            <a:ext cx="4550222" cy="869505"/>
-          </a:xfrm>
-          <a:prstGeom prst="rect">
-            <a:avLst/>
-          </a:prstGeom>
-          <a:solidFill>
-            <a:srgbClr val="C00000"/>
-          </a:solidFill>
-          <a:ln>
-            <a:noFill/>
-          </a:ln>
-        </p:spPr>
-        <p:txBody>
-          <a:bodyPr spcFirstLastPara="1" wrap="square" lIns="91425" tIns="45700" rIns="91425" bIns="45700" anchor="ctr" anchorCtr="0">
-            <a:noAutofit/>
-          </a:bodyPr>
-          <a:lstStyle/>
-          <a:p>
-            <a:pPr marL="0" marR="0" lvl="0" indent="0" algn="ctr" rtl="0">
-              <a:lnSpc>
-                <a:spcPct val="100000"/>
-              </a:lnSpc>
-              <a:spcBef>
-                <a:spcPts val="0"/>
-              </a:spcBef>
-              <a:spcAft>
-                <a:spcPts val="0"/>
-              </a:spcAft>
-              <a:buClr>
-                <a:srgbClr val="000000"/>
-              </a:buClr>
-              <a:buSzPts val="1600"/>
-              <a:buFont typeface="Arial"/>
-              <a:buNone/>
-            </a:pPr>
-            <a:r>
-              <a:rPr lang="en-US" sz="4800" dirty="0">
-                <a:solidFill>
-                  <a:schemeClr val="lt1"/>
-                </a:solidFill>
-              </a:rPr>
-              <a:t>Ahmad Shah Massoud</a:t>
-            </a:r>
-            <a:endParaRPr sz="3200" b="0" i="0" u="none" strike="noStrike" cap="none" dirty="0">
-              <a:solidFill>
-                <a:srgbClr val="000000"/>
-              </a:solidFill>
-              <a:latin typeface="Arial"/>
-              <a:ea typeface="Arial"/>
-              <a:cs typeface="Arial"/>
-              <a:sym typeface="Arial"/>
-            </a:endParaRPr>
-          </a:p>
-        </p:txBody>
-      </p:sp>
-      <p:sp>
-        <p:nvSpPr>
-          <p:cNvPr id="8" name="Google Shape;170;p31">
-            <a:extLst>
-              <a:ext uri="{FF2B5EF4-FFF2-40B4-BE49-F238E27FC236}">
-                <a16:creationId xmlns:a16="http://schemas.microsoft.com/office/drawing/2014/main" id="{D328ABDE-E232-3EB7-C3F2-B4BB7B64262F}"/>
-              </a:ext>
-            </a:extLst>
-          </p:cNvPr>
-          <p:cNvSpPr/>
-          <p:nvPr/>
-        </p:nvSpPr>
-        <p:spPr>
-          <a:xfrm>
-            <a:off x="7526107" y="5681420"/>
-            <a:ext cx="4550222" cy="548230"/>
-          </a:xfrm>
-          <a:prstGeom prst="rect">
-            <a:avLst/>
-          </a:prstGeom>
-          <a:solidFill>
-            <a:srgbClr val="C00000"/>
-          </a:solidFill>
-          <a:ln>
-            <a:noFill/>
-          </a:ln>
-        </p:spPr>
-        <p:txBody>
-          <a:bodyPr spcFirstLastPara="1" wrap="square" lIns="91425" tIns="45700" rIns="91425" bIns="45700" anchor="ctr" anchorCtr="0">
-            <a:noAutofit/>
-          </a:bodyPr>
-          <a:lstStyle/>
-          <a:p>
-            <a:pPr marL="0" marR="0" lvl="0" indent="0" algn="ctr" rtl="0">
-              <a:lnSpc>
-                <a:spcPct val="100000"/>
-              </a:lnSpc>
-              <a:spcBef>
-                <a:spcPts val="0"/>
-              </a:spcBef>
-              <a:spcAft>
-                <a:spcPts val="0"/>
-              </a:spcAft>
-              <a:buClr>
-                <a:srgbClr val="000000"/>
-              </a:buClr>
-              <a:buSzPts val="1600"/>
-              <a:buFont typeface="Arial"/>
-              <a:buNone/>
-            </a:pPr>
-            <a:r>
-              <a:rPr lang="en-US" sz="3600" dirty="0">
-                <a:solidFill>
-                  <a:schemeClr val="lt1"/>
-                </a:solidFill>
-              </a:rPr>
-              <a:t>Dead at Age 48</a:t>
-            </a:r>
-            <a:endParaRPr sz="2000" b="0" i="0" u="none" strike="noStrike" cap="none" dirty="0">
-              <a:solidFill>
-                <a:srgbClr val="000000"/>
-              </a:solidFill>
-              <a:latin typeface="Arial"/>
-              <a:ea typeface="Arial"/>
-              <a:cs typeface="Arial"/>
-              <a:sym typeface="Arial"/>
-            </a:endParaRPr>
-          </a:p>
-        </p:txBody>
-      </p:sp>
-      <p:sp>
-        <p:nvSpPr>
-          <p:cNvPr id="10" name="TextBox 9">
-            <a:extLst>
-              <a:ext uri="{FF2B5EF4-FFF2-40B4-BE49-F238E27FC236}">
-                <a16:creationId xmlns:a16="http://schemas.microsoft.com/office/drawing/2014/main" id="{5FA0D8B2-6B55-D3DC-BCBB-6FEAD86B9E72}"/>
-              </a:ext>
-            </a:extLst>
-          </p:cNvPr>
-          <p:cNvSpPr txBox="1"/>
-          <p:nvPr/>
-        </p:nvSpPr>
-        <p:spPr>
-          <a:xfrm>
-            <a:off x="312431" y="2175372"/>
-            <a:ext cx="6987941" cy="3046988"/>
-          </a:xfrm>
-          <a:prstGeom prst="rect">
-            <a:avLst/>
-          </a:prstGeom>
-          <a:solidFill>
-            <a:schemeClr val="bg1">
-              <a:alpha val="84400"/>
-            </a:schemeClr>
-          </a:solidFill>
-        </p:spPr>
-        <p:txBody>
-          <a:bodyPr wrap="square" rtlCol="0">
-            <a:spAutoFit/>
-          </a:bodyPr>
-          <a:lstStyle/>
-          <a:p>
-            <a:pPr marL="285750" indent="-285750">
-              <a:spcBef>
-                <a:spcPts val="1200"/>
-              </a:spcBef>
-              <a:buFont typeface="Arial" panose="020B0604020202020204" pitchFamily="34" charset="0"/>
-              <a:buChar char="•"/>
-            </a:pPr>
-            <a:r>
-              <a:t>Assassinated EXACTLY 2 DAYS before 9/11. Al-Qaeda hid a BOMB inside a stolen TV camera.</a:t>
-            </a:r>
-          </a:p>
-          <a:p>
-            <a:pPr marL="285750" indent="-285750">
-              <a:spcBef>
-                <a:spcPts val="1200"/>
-              </a:spcBef>
-              <a:buFont typeface="Arial" panose="020B0604020202020204" pitchFamily="34" charset="0"/>
-              <a:buChar char="•"/>
-            </a:pPr>
-            <a:r>
-              <a:t>Known as the "LION of Panjshir" — the most feared guerrilla commander the Soviets ever faced.</a:t>
-            </a:r>
-          </a:p>
-          <a:p>
-            <a:pPr marL="285750" indent="-285750">
-              <a:spcBef>
-                <a:spcPts val="1200"/>
-              </a:spcBef>
-              <a:buFont typeface="Arial" panose="020B0604020202020204" pitchFamily="34" charset="0"/>
-              <a:buChar char="•"/>
-            </a:pPr>
-            <a:r>
-              <a:t>WARNED the European Parliament months earlier that a MASSIVE attack on America was coming.</a:t>
-            </a:r>
-          </a:p>
-          <a:p>
-            <a:pPr marL="285750" indent="-285750">
-              <a:spcBef>
-                <a:spcPts val="1200"/>
-              </a:spcBef>
-              <a:buFont typeface="Arial" panose="020B0604020202020204" pitchFamily="34" charset="0"/>
-              <a:buChar char="•"/>
-            </a:pPr>
-            <a:r>
-              <a:t>Killed by fake journalists who asked: "What will you do with Osama bin Laden?" Then DETONATED the bomb.</a:t>
-            </a:r>
-          </a:p>
-          <a:p>
-            <a:pPr marL="285750" indent="-285750">
-              <a:spcBef>
-                <a:spcPts val="1200"/>
-              </a:spcBef>
-              <a:buFont typeface="Arial" panose="020B0604020202020204" pitchFamily="34" charset="0"/>
-              <a:buChar char="•"/>
-            </a:pPr>
-            <a:r>
-              <a:t>His death removed the ONE Afghan leader who could have cooperated with the US response to 9/11.</a:t>
-            </a:r>
-          </a:p>
-        </p:txBody>
-      </p:sp>
       <p:pic>
         <p:nvPicPr>
-          <p:cNvPr id="16" name="Picture 15" descr="Ahmad_Shah_Massoud.jpg"/>
+          <p:cNvPr id="16" name="Picture 15" descr="Robert_F_Kennedy.jpg"/>
           <p:cNvPicPr>
             <a:picLocks noChangeAspect="1"/>
           </p:cNvPicPr>
@@ -3814,14 +3357,463 @@
         </p:blipFill>
         <p:spPr>
           <a:xfrm>
-            <a:off x="8087033" y="1100088"/>
-            <a:ext cx="3107900" cy="3884876"/>
+            <a:off x="8957849" y="1100088"/>
+            <a:ext cx="3126851" cy="3884876"/>
           </a:xfrm>
           <a:prstGeom prst="rect">
             <a:avLst/>
           </a:prstGeom>
         </p:spPr>
       </p:pic>
+      <p:sp>
+        <p:nvSpPr>
+          <p:cNvPr id="15" name="TextBox 14">
+            <a:extLst>
+              <a:ext uri="{FF2B5EF4-FFF2-40B4-BE49-F238E27FC236}">
+                <a16:creationId xmlns:a16="http://schemas.microsoft.com/office/drawing/2014/main" id="{E478240E-251B-5BA6-3C45-7E6620400769}"/>
+              </a:ext>
+            </a:extLst>
+          </p:cNvPr>
+          <p:cNvSpPr txBox="1"/>
+          <p:nvPr/>
+        </p:nvSpPr>
+        <p:spPr>
+          <a:xfrm>
+            <a:off x="312432" y="1288262"/>
+            <a:ext cx="6494294" cy="584775"/>
+          </a:xfrm>
+          <a:prstGeom prst="rect">
+            <a:avLst/>
+          </a:prstGeom>
+          <a:solidFill>
+            <a:schemeClr val="bg1">
+              <a:alpha val="84400"/>
+            </a:schemeClr>
+          </a:solidFill>
+        </p:spPr>
+        <p:txBody>
+          <a:bodyPr wrap="square" rtlCol="0">
+            <a:spAutoFit/>
+          </a:bodyPr>
+          <a:lstStyle/>
+          <a:p>
+            <a:r>
+              <a:rPr lang="en-US" sz="3200" b="1" dirty="0">
+                <a:solidFill>
+                  <a:schemeClr val="accent5"/>
+                </a:solidFill>
+              </a:rPr>
+              <a:t>Why / How they Robert F Kennedy:</a:t>
+            </a:r>
+          </a:p>
+        </p:txBody>
+      </p:sp>
+      <p:sp>
+        <p:nvSpPr>
+          <p:cNvPr id="3" name="Google Shape;170;p31">
+            <a:extLst>
+              <a:ext uri="{FF2B5EF4-FFF2-40B4-BE49-F238E27FC236}">
+                <a16:creationId xmlns:a16="http://schemas.microsoft.com/office/drawing/2014/main" id="{A4695FE5-0AA5-AB05-98B1-B5B8E3FA8CBE}"/>
+              </a:ext>
+            </a:extLst>
+          </p:cNvPr>
+          <p:cNvSpPr/>
+          <p:nvPr/>
+        </p:nvSpPr>
+        <p:spPr>
+          <a:xfrm>
+            <a:off x="191731" y="5732890"/>
+            <a:ext cx="3431270" cy="496760"/>
+          </a:xfrm>
+          <a:prstGeom prst="rect">
+            <a:avLst/>
+          </a:prstGeom>
+          <a:solidFill>
+            <a:schemeClr val="accent5"/>
+          </a:solidFill>
+          <a:ln>
+            <a:noFill/>
+          </a:ln>
+        </p:spPr>
+        <p:txBody>
+          <a:bodyPr spcFirstLastPara="1" wrap="square" lIns="91425" tIns="45700" rIns="91425" bIns="45700" anchor="ctr" anchorCtr="0">
+            <a:noAutofit/>
+          </a:bodyPr>
+          <a:lstStyle/>
+          <a:p>
+            <a:pPr marL="0" marR="0" lvl="0" indent="0" algn="ctr" rtl="0">
+              <a:lnSpc>
+                <a:spcPct val="100000"/>
+              </a:lnSpc>
+              <a:spcBef>
+                <a:spcPts val="0"/>
+              </a:spcBef>
+              <a:spcAft>
+                <a:spcPts val="0"/>
+              </a:spcAft>
+              <a:buClr>
+                <a:srgbClr val="000000"/>
+              </a:buClr>
+              <a:buSzPts val="1600"/>
+              <a:buFont typeface="Arial"/>
+              <a:buNone/>
+            </a:pPr>
+            <a:r>
+              <a:rPr lang="en-US" sz="3600" dirty="0">
+                <a:solidFill>
+                  <a:schemeClr val="lt1"/>
+                </a:solidFill>
+              </a:rPr>
+              <a:t>Read List Here:</a:t>
+            </a:r>
+            <a:endParaRPr sz="2000" b="0" i="0" u="none" strike="noStrike" cap="none" dirty="0">
+              <a:solidFill>
+                <a:srgbClr val="000000"/>
+              </a:solidFill>
+              <a:latin typeface="Arial"/>
+              <a:ea typeface="Arial"/>
+              <a:cs typeface="Arial"/>
+              <a:sym typeface="Arial"/>
+            </a:endParaRPr>
+          </a:p>
+        </p:txBody>
+      </p:sp>
+      <p:sp>
+        <p:nvSpPr>
+          <p:cNvPr id="5" name="Google Shape;170;p31">
+            <a:extLst>
+              <a:ext uri="{FF2B5EF4-FFF2-40B4-BE49-F238E27FC236}">
+                <a16:creationId xmlns:a16="http://schemas.microsoft.com/office/drawing/2014/main" id="{98132413-6ED2-8B36-74B6-3C503B1A4634}"/>
+              </a:ext>
+            </a:extLst>
+          </p:cNvPr>
+          <p:cNvSpPr/>
+          <p:nvPr/>
+        </p:nvSpPr>
+        <p:spPr>
+          <a:xfrm>
+            <a:off x="0" y="-31518"/>
+            <a:ext cx="12192000" cy="1131606"/>
+          </a:xfrm>
+          <a:prstGeom prst="rect">
+            <a:avLst/>
+          </a:prstGeom>
+          <a:solidFill>
+            <a:srgbClr val="C00000"/>
+          </a:solidFill>
+          <a:ln>
+            <a:noFill/>
+          </a:ln>
+        </p:spPr>
+        <p:txBody>
+          <a:bodyPr spcFirstLastPara="1" wrap="square" lIns="91425" tIns="45700" rIns="91425" bIns="45700" anchor="ctr" anchorCtr="0">
+            <a:noAutofit/>
+          </a:bodyPr>
+          <a:lstStyle/>
+          <a:p>
+            <a:pPr lvl="0">
+              <a:buClr>
+                <a:srgbClr val="000000"/>
+              </a:buClr>
+              <a:buSzPts val="1600"/>
+            </a:pPr>
+            <a:r>
+              <a:rPr lang="en-US" sz="4800" dirty="0">
+                <a:solidFill>
+                  <a:schemeClr val="lt1"/>
+                </a:solidFill>
+              </a:rPr>
+              <a:t> 150+ Murdered: by Intelligence Services</a:t>
+            </a:r>
+            <a:endParaRPr lang="en-US" sz="3200" dirty="0">
+              <a:solidFill>
+                <a:srgbClr val="000000"/>
+              </a:solidFill>
+              <a:latin typeface="Arial"/>
+              <a:ea typeface="Arial"/>
+              <a:cs typeface="Arial"/>
+              <a:sym typeface="Arial"/>
+            </a:endParaRPr>
+          </a:p>
+        </p:txBody>
+      </p:sp>
+      <p:sp>
+        <p:nvSpPr>
+          <p:cNvPr id="4" name="TextBox 3">
+            <a:extLst>
+              <a:ext uri="{FF2B5EF4-FFF2-40B4-BE49-F238E27FC236}">
+                <a16:creationId xmlns:a16="http://schemas.microsoft.com/office/drawing/2014/main" id="{50D7621F-9D36-7894-7117-9F831EF5EFA6}"/>
+              </a:ext>
+            </a:extLst>
+          </p:cNvPr>
+          <p:cNvSpPr txBox="1"/>
+          <p:nvPr/>
+        </p:nvSpPr>
+        <p:spPr>
+          <a:xfrm>
+            <a:off x="107300" y="6229650"/>
+            <a:ext cx="11685989" cy="461665"/>
+          </a:xfrm>
+          <a:prstGeom prst="rect">
+            <a:avLst/>
+          </a:prstGeom>
+          <a:solidFill>
+            <a:schemeClr val="bg1">
+              <a:alpha val="84400"/>
+            </a:schemeClr>
+          </a:solidFill>
+        </p:spPr>
+        <p:txBody>
+          <a:bodyPr wrap="square" rtlCol="0">
+            <a:spAutoFit/>
+          </a:bodyPr>
+          <a:lstStyle/>
+          <a:p>
+            <a:r>
+              <a:rPr lang="en-US" sz="2400" dirty="0"/>
+              <a:t>https://intelligencemurders.com/intel</a:t>
+            </a:r>
+          </a:p>
+        </p:txBody>
+      </p:sp>
+      <p:sp>
+        <p:nvSpPr>
+          <p:cNvPr id="7" name="Google Shape;170;p31">
+            <a:extLst>
+              <a:ext uri="{FF2B5EF4-FFF2-40B4-BE49-F238E27FC236}">
+                <a16:creationId xmlns:a16="http://schemas.microsoft.com/office/drawing/2014/main" id="{4B582382-76AA-B49E-C611-39A37CE591B9}"/>
+              </a:ext>
+            </a:extLst>
+          </p:cNvPr>
+          <p:cNvSpPr/>
+          <p:nvPr/>
+        </p:nvSpPr>
+        <p:spPr>
+          <a:xfrm>
+            <a:off x="7506336" y="4925186"/>
+            <a:ext cx="4550222" cy="1419806"/>
+          </a:xfrm>
+          <a:prstGeom prst="rect">
+            <a:avLst/>
+          </a:prstGeom>
+          <a:solidFill>
+            <a:srgbClr val="C00000"/>
+          </a:solidFill>
+          <a:ln>
+            <a:noFill/>
+          </a:ln>
+        </p:spPr>
+        <p:txBody>
+          <a:bodyPr spcFirstLastPara="1" wrap="square" lIns="91425" tIns="45700" rIns="91425" bIns="45700" anchor="ctr" anchorCtr="0">
+            <a:noAutofit/>
+          </a:bodyPr>
+          <a:lstStyle/>
+          <a:p>
+            <a:pPr marL="0" marR="0" lvl="0" indent="0" algn="ctr" rtl="0">
+              <a:lnSpc>
+                <a:spcPct val="100000"/>
+              </a:lnSpc>
+              <a:spcBef>
+                <a:spcPts val="0"/>
+              </a:spcBef>
+              <a:spcAft>
+                <a:spcPts val="0"/>
+              </a:spcAft>
+              <a:buClr>
+                <a:srgbClr val="000000"/>
+              </a:buClr>
+              <a:buSzPts val="1600"/>
+              <a:buFont typeface="Arial"/>
+              <a:buNone/>
+            </a:pPr>
+            <a:r>
+              <a:rPr lang="en-US" sz="4800" dirty="0">
+                <a:solidFill>
+                  <a:schemeClr val="lt1"/>
+                </a:solidFill>
+              </a:rPr>
+              <a:t>Robert F Kennedy</a:t>
+            </a:r>
+            <a:endParaRPr sz="3200" b="0" i="0" u="none" strike="noStrike" cap="none" dirty="0">
+              <a:solidFill>
+                <a:srgbClr val="000000"/>
+              </a:solidFill>
+              <a:latin typeface="Arial"/>
+              <a:ea typeface="Arial"/>
+              <a:cs typeface="Arial"/>
+              <a:sym typeface="Arial"/>
+            </a:endParaRPr>
+          </a:p>
+        </p:txBody>
+      </p:sp>
+      <p:sp>
+        <p:nvSpPr>
+          <p:cNvPr id="8" name="Google Shape;170;p31">
+            <a:extLst>
+              <a:ext uri="{FF2B5EF4-FFF2-40B4-BE49-F238E27FC236}">
+                <a16:creationId xmlns:a16="http://schemas.microsoft.com/office/drawing/2014/main" id="{D328ABDE-E232-3EB7-C3F2-B4BB7B64262F}"/>
+              </a:ext>
+            </a:extLst>
+          </p:cNvPr>
+          <p:cNvSpPr/>
+          <p:nvPr/>
+        </p:nvSpPr>
+        <p:spPr>
+          <a:xfrm>
+            <a:off x="7534478" y="6291451"/>
+            <a:ext cx="4550222" cy="548230"/>
+          </a:xfrm>
+          <a:prstGeom prst="rect">
+            <a:avLst/>
+          </a:prstGeom>
+          <a:solidFill>
+            <a:srgbClr val="C00000"/>
+          </a:solidFill>
+          <a:ln>
+            <a:noFill/>
+          </a:ln>
+        </p:spPr>
+        <p:txBody>
+          <a:bodyPr spcFirstLastPara="1" wrap="square" lIns="91425" tIns="45700" rIns="91425" bIns="45700" anchor="ctr" anchorCtr="0">
+            <a:noAutofit/>
+          </a:bodyPr>
+          <a:lstStyle/>
+          <a:p>
+            <a:pPr marL="0" marR="0" lvl="0" indent="0" algn="ctr" rtl="0">
+              <a:lnSpc>
+                <a:spcPct val="100000"/>
+              </a:lnSpc>
+              <a:spcBef>
+                <a:spcPts val="0"/>
+              </a:spcBef>
+              <a:spcAft>
+                <a:spcPts val="0"/>
+              </a:spcAft>
+              <a:buClr>
+                <a:srgbClr val="000000"/>
+              </a:buClr>
+              <a:buSzPts val="1600"/>
+              <a:buFont typeface="Arial"/>
+              <a:buNone/>
+            </a:pPr>
+            <a:r>
+              <a:rPr lang="en-US" sz="3600" dirty="0">
+                <a:solidFill>
+                  <a:schemeClr val="lt1"/>
+                </a:solidFill>
+              </a:rPr>
+              <a:t>Dead at Age 42</a:t>
+            </a:r>
+            <a:endParaRPr sz="2000" b="0" i="0" u="none" strike="noStrike" cap="none" dirty="0">
+              <a:solidFill>
+                <a:srgbClr val="000000"/>
+              </a:solidFill>
+              <a:latin typeface="Arial"/>
+              <a:ea typeface="Arial"/>
+              <a:cs typeface="Arial"/>
+              <a:sym typeface="Arial"/>
+            </a:endParaRPr>
+          </a:p>
+        </p:txBody>
+      </p:sp>
+      <p:sp>
+        <p:nvSpPr>
+          <p:cNvPr id="10" name="TextBox 9">
+            <a:extLst>
+              <a:ext uri="{FF2B5EF4-FFF2-40B4-BE49-F238E27FC236}">
+                <a16:creationId xmlns:a16="http://schemas.microsoft.com/office/drawing/2014/main" id="{5FA0D8B2-6B55-D3DC-BCBB-6FEAD86B9E72}"/>
+              </a:ext>
+            </a:extLst>
+          </p:cNvPr>
+          <p:cNvSpPr txBox="1"/>
+          <p:nvPr/>
+        </p:nvSpPr>
+        <p:spPr>
+          <a:xfrm>
+            <a:off x="237466" y="1937976"/>
+            <a:ext cx="6987941" cy="3046988"/>
+          </a:xfrm>
+          <a:prstGeom prst="rect">
+            <a:avLst/>
+          </a:prstGeom>
+          <a:solidFill>
+            <a:schemeClr val="bg1">
+              <a:alpha val="84400"/>
+            </a:schemeClr>
+          </a:solidFill>
+        </p:spPr>
+        <p:txBody>
+          <a:bodyPr wrap="square" rtlCol="0">
+            <a:spAutoFit/>
+          </a:bodyPr>
+          <a:lstStyle/>
+          <a:p>
+            <a:pPr marL="285750" indent="-285750">
+              <a:spcBef>
+                <a:spcPts val="1200"/>
+              </a:spcBef>
+              <a:buFont typeface="Arial" panose="020B0604020202020204" pitchFamily="34" charset="0"/>
+              <a:buChar char="•"/>
+            </a:pPr>
+            <a:r>
+              <a:rPr dirty="0"/>
+              <a:t>U.S. Senator and presidential candidate ASSASSINATED at age 42 in Los Angeles — June 1968.</a:t>
+            </a:r>
+          </a:p>
+          <a:p>
+            <a:pPr marL="285750" indent="-285750">
+              <a:spcBef>
+                <a:spcPts val="1200"/>
+              </a:spcBef>
+              <a:buFont typeface="Arial" panose="020B0604020202020204" pitchFamily="34" charset="0"/>
+              <a:buChar char="•"/>
+            </a:pPr>
+            <a:r>
+              <a:rPr dirty="0"/>
+              <a:t>Dean Warwick claimed he was about to name RFK's real killer on stage — then COLLAPSED and DIED mid-sentence.</a:t>
+            </a:r>
+          </a:p>
+          <a:p>
+            <a:pPr marL="285750" indent="-285750">
+              <a:spcBef>
+                <a:spcPts val="1200"/>
+              </a:spcBef>
+              <a:buFont typeface="Arial" panose="020B0604020202020204" pitchFamily="34" charset="0"/>
+              <a:buChar char="•"/>
+            </a:pPr>
+            <a:r>
+              <a:rPr dirty="0"/>
+              <a:t>The official story blames Sirhan Sirhan — but forensic evidence suggests shots from behind, where Sirhan was not.</a:t>
+            </a:r>
+          </a:p>
+          <a:p>
+            <a:pPr marL="285750" indent="-285750">
+              <a:spcBef>
+                <a:spcPts val="1200"/>
+              </a:spcBef>
+              <a:buFont typeface="Arial" panose="020B0604020202020204" pitchFamily="34" charset="0"/>
+              <a:buChar char="•"/>
+            </a:pPr>
+            <a:r>
+              <a:rPr dirty="0"/>
+              <a:t>Some researchers connect his assassination to his potential access to classified UFO programs had he become president.</a:t>
+            </a:r>
+          </a:p>
+          <a:p>
+            <a:pPr marL="285750" indent="-285750">
+              <a:spcBef>
+                <a:spcPts val="1200"/>
+              </a:spcBef>
+              <a:buFont typeface="Arial" panose="020B0604020202020204" pitchFamily="34" charset="0"/>
+              <a:buChar char="•"/>
+            </a:pPr>
+            <a:r>
+              <a:rPr dirty="0"/>
+              <a:t>His brother JFK was killed five years earlier — two Kennedys, both assassinated during the peak of UFO secrecy.</a:t>
+            </a:r>
+          </a:p>
+        </p:txBody>
+      </p:sp>
     </p:spTree>
   </p:cSld>
   <p:clrMapOvr>
@@ -3847,464 +3839,9 @@
           <a:chExt cx="0" cy="0"/>
         </a:xfrm>
       </p:grpSpPr>
-      <p:sp>
-        <p:nvSpPr>
-          <p:cNvPr id="15" name="TextBox 14">
-            <a:extLst>
-              <a:ext uri="{FF2B5EF4-FFF2-40B4-BE49-F238E27FC236}">
-                <a16:creationId xmlns:a16="http://schemas.microsoft.com/office/drawing/2014/main" id="{E478240E-251B-5BA6-3C45-7E6620400769}"/>
-              </a:ext>
-            </a:extLst>
-          </p:cNvPr>
-          <p:cNvSpPr txBox="1"/>
-          <p:nvPr/>
-        </p:nvSpPr>
-        <p:spPr>
-          <a:xfrm>
-            <a:off x="312432" y="1288262"/>
-            <a:ext cx="6494294" cy="584775"/>
-          </a:xfrm>
-          <a:prstGeom prst="rect">
-            <a:avLst/>
-          </a:prstGeom>
-          <a:solidFill>
-            <a:schemeClr val="bg1">
-              <a:alpha val="84400"/>
-            </a:schemeClr>
-          </a:solidFill>
-        </p:spPr>
-        <p:txBody>
-          <a:bodyPr wrap="square" rtlCol="0">
-            <a:spAutoFit/>
-          </a:bodyPr>
-          <a:lstStyle/>
-          <a:p>
-            <a:r>
-              <a:rPr lang="en-US" sz="3200" b="1" dirty="0">
-                <a:solidFill>
-                  <a:schemeClr val="accent5"/>
-                </a:solidFill>
-              </a:rPr>
-              <a:t>Why / How they Jason Thomas:</a:t>
-            </a:r>
-          </a:p>
-        </p:txBody>
-      </p:sp>
-      <p:sp>
-        <p:nvSpPr>
-          <p:cNvPr id="3" name="Google Shape;170;p31">
-            <a:extLst>
-              <a:ext uri="{FF2B5EF4-FFF2-40B4-BE49-F238E27FC236}">
-                <a16:creationId xmlns:a16="http://schemas.microsoft.com/office/drawing/2014/main" id="{A4695FE5-0AA5-AB05-98B1-B5B8E3FA8CBE}"/>
-              </a:ext>
-            </a:extLst>
-          </p:cNvPr>
-          <p:cNvSpPr/>
-          <p:nvPr/>
-        </p:nvSpPr>
-        <p:spPr>
-          <a:xfrm>
-            <a:off x="191731" y="5732890"/>
-            <a:ext cx="3431270" cy="496760"/>
-          </a:xfrm>
-          <a:prstGeom prst="rect">
-            <a:avLst/>
-          </a:prstGeom>
-          <a:solidFill>
-            <a:schemeClr val="accent5"/>
-          </a:solidFill>
-          <a:ln>
-            <a:noFill/>
-          </a:ln>
-        </p:spPr>
-        <p:txBody>
-          <a:bodyPr spcFirstLastPara="1" wrap="square" lIns="91425" tIns="45700" rIns="91425" bIns="45700" anchor="ctr" anchorCtr="0">
-            <a:noAutofit/>
-          </a:bodyPr>
-          <a:lstStyle/>
-          <a:p>
-            <a:pPr marL="0" marR="0" lvl="0" indent="0" algn="ctr" rtl="0">
-              <a:lnSpc>
-                <a:spcPct val="100000"/>
-              </a:lnSpc>
-              <a:spcBef>
-                <a:spcPts val="0"/>
-              </a:spcBef>
-              <a:spcAft>
-                <a:spcPts val="0"/>
-              </a:spcAft>
-              <a:buClr>
-                <a:srgbClr val="000000"/>
-              </a:buClr>
-              <a:buSzPts val="1600"/>
-              <a:buFont typeface="Arial"/>
-              <a:buNone/>
-            </a:pPr>
-            <a:r>
-              <a:rPr lang="en-US" sz="3600" dirty="0">
-                <a:solidFill>
-                  <a:schemeClr val="lt1"/>
-                </a:solidFill>
-              </a:rPr>
-              <a:t>Read List Here:</a:t>
-            </a:r>
-            <a:endParaRPr sz="2000" b="0" i="0" u="none" strike="noStrike" cap="none" dirty="0">
-              <a:solidFill>
-                <a:srgbClr val="000000"/>
-              </a:solidFill>
-              <a:latin typeface="Arial"/>
-              <a:ea typeface="Arial"/>
-              <a:cs typeface="Arial"/>
-              <a:sym typeface="Arial"/>
-            </a:endParaRPr>
-          </a:p>
-        </p:txBody>
-      </p:sp>
-      <p:sp>
-        <p:nvSpPr>
-          <p:cNvPr id="5" name="Google Shape;170;p31">
-            <a:extLst>
-              <a:ext uri="{FF2B5EF4-FFF2-40B4-BE49-F238E27FC236}">
-                <a16:creationId xmlns:a16="http://schemas.microsoft.com/office/drawing/2014/main" id="{98132413-6ED2-8B36-74B6-3C503B1A4634}"/>
-              </a:ext>
-            </a:extLst>
-          </p:cNvPr>
-          <p:cNvSpPr/>
-          <p:nvPr/>
-        </p:nvSpPr>
-        <p:spPr>
-          <a:xfrm>
-            <a:off x="0" y="-31518"/>
-            <a:ext cx="12192000" cy="1131606"/>
-          </a:xfrm>
-          <a:prstGeom prst="rect">
-            <a:avLst/>
-          </a:prstGeom>
-          <a:solidFill>
-            <a:srgbClr val="C00000"/>
-          </a:solidFill>
-          <a:ln>
-            <a:noFill/>
-          </a:ln>
-        </p:spPr>
-        <p:txBody>
-          <a:bodyPr spcFirstLastPara="1" wrap="square" lIns="91425" tIns="45700" rIns="91425" bIns="45700" anchor="ctr" anchorCtr="0">
-            <a:noAutofit/>
-          </a:bodyPr>
-          <a:lstStyle/>
-          <a:p>
-            <a:pPr marL="0" marR="0" lvl="0" indent="0" rtl="0">
-              <a:lnSpc>
-                <a:spcPct val="100000"/>
-              </a:lnSpc>
-              <a:spcBef>
-                <a:spcPts val="0"/>
-              </a:spcBef>
-              <a:spcAft>
-                <a:spcPts val="0"/>
-              </a:spcAft>
-              <a:buClr>
-                <a:srgbClr val="000000"/>
-              </a:buClr>
-              <a:buSzPts val="1600"/>
-              <a:buFont typeface="Arial"/>
-              <a:buNone/>
-            </a:pPr>
-            <a:r>
-              <a:rPr lang="en-US" sz="4800" dirty="0">
-                <a:solidFill>
-                  <a:schemeClr val="lt1"/>
-                </a:solidFill>
-              </a:rPr>
-              <a:t> 150+ Murdered: by Intelligence Services</a:t>
-            </a:r>
-            <a:endParaRPr sz="3200" b="0" i="0" u="none" strike="noStrike" cap="none" dirty="0">
-              <a:solidFill>
-                <a:srgbClr val="000000"/>
-              </a:solidFill>
-              <a:latin typeface="Arial"/>
-              <a:ea typeface="Arial"/>
-              <a:cs typeface="Arial"/>
-              <a:sym typeface="Arial"/>
-            </a:endParaRPr>
-          </a:p>
-        </p:txBody>
-      </p:sp>
-      <p:sp>
-        <p:nvSpPr>
-          <p:cNvPr id="4" name="TextBox 3">
-            <a:extLst>
-              <a:ext uri="{FF2B5EF4-FFF2-40B4-BE49-F238E27FC236}">
-                <a16:creationId xmlns:a16="http://schemas.microsoft.com/office/drawing/2014/main" id="{50D7621F-9D36-7894-7117-9F831EF5EFA6}"/>
-              </a:ext>
-            </a:extLst>
-          </p:cNvPr>
-          <p:cNvSpPr txBox="1"/>
-          <p:nvPr/>
-        </p:nvSpPr>
-        <p:spPr>
-          <a:xfrm>
-            <a:off x="107300" y="6229650"/>
-            <a:ext cx="11685989" cy="461665"/>
-          </a:xfrm>
-          <a:prstGeom prst="rect">
-            <a:avLst/>
-          </a:prstGeom>
-          <a:solidFill>
-            <a:schemeClr val="bg1">
-              <a:alpha val="84400"/>
-            </a:schemeClr>
-          </a:solidFill>
-        </p:spPr>
-        <p:txBody>
-          <a:bodyPr wrap="square" rtlCol="0">
-            <a:spAutoFit/>
-          </a:bodyPr>
-          <a:lstStyle/>
-          <a:p>
-            <a:r>
-              <a:rPr lang="en-US" sz="2400" dirty="0"/>
-              <a:t>https://intelligencemurders.com/intelligence-service-murders</a:t>
-            </a:r>
-          </a:p>
-        </p:txBody>
-      </p:sp>
-      <p:sp>
-        <p:nvSpPr>
-          <p:cNvPr id="7" name="Google Shape;170;p31">
-            <a:extLst>
-              <a:ext uri="{FF2B5EF4-FFF2-40B4-BE49-F238E27FC236}">
-                <a16:creationId xmlns:a16="http://schemas.microsoft.com/office/drawing/2014/main" id="{4B582382-76AA-B49E-C611-39A37CE591B9}"/>
-              </a:ext>
-            </a:extLst>
-          </p:cNvPr>
-          <p:cNvSpPr/>
-          <p:nvPr/>
-        </p:nvSpPr>
-        <p:spPr>
-          <a:xfrm>
-            <a:off x="7506336" y="4925186"/>
-            <a:ext cx="4550222" cy="869505"/>
-          </a:xfrm>
-          <a:prstGeom prst="rect">
-            <a:avLst/>
-          </a:prstGeom>
-          <a:solidFill>
-            <a:srgbClr val="C00000"/>
-          </a:solidFill>
-          <a:ln>
-            <a:noFill/>
-          </a:ln>
-        </p:spPr>
-        <p:txBody>
-          <a:bodyPr spcFirstLastPara="1" wrap="square" lIns="91425" tIns="45700" rIns="91425" bIns="45700" anchor="ctr" anchorCtr="0">
-            <a:noAutofit/>
-          </a:bodyPr>
-          <a:lstStyle/>
-          <a:p>
-            <a:pPr marL="0" marR="0" lvl="0" indent="0" algn="ctr" rtl="0">
-              <a:lnSpc>
-                <a:spcPct val="100000"/>
-              </a:lnSpc>
-              <a:spcBef>
-                <a:spcPts val="0"/>
-              </a:spcBef>
-              <a:spcAft>
-                <a:spcPts val="0"/>
-              </a:spcAft>
-              <a:buClr>
-                <a:srgbClr val="000000"/>
-              </a:buClr>
-              <a:buSzPts val="1600"/>
-              <a:buFont typeface="Arial"/>
-              <a:buNone/>
-            </a:pPr>
-            <a:r>
-              <a:rPr lang="en-US" sz="4800" dirty="0">
-                <a:solidFill>
-                  <a:schemeClr val="lt1"/>
-                </a:solidFill>
-              </a:rPr>
-              <a:t>Jason Thomas</a:t>
-            </a:r>
-            <a:endParaRPr sz="3200" b="0" i="0" u="none" strike="noStrike" cap="none" dirty="0">
-              <a:solidFill>
-                <a:srgbClr val="000000"/>
-              </a:solidFill>
-              <a:latin typeface="Arial"/>
-              <a:ea typeface="Arial"/>
-              <a:cs typeface="Arial"/>
-              <a:sym typeface="Arial"/>
-            </a:endParaRPr>
-          </a:p>
-        </p:txBody>
-      </p:sp>
-      <p:sp>
-        <p:nvSpPr>
-          <p:cNvPr id="8" name="Google Shape;170;p31">
-            <a:extLst>
-              <a:ext uri="{FF2B5EF4-FFF2-40B4-BE49-F238E27FC236}">
-                <a16:creationId xmlns:a16="http://schemas.microsoft.com/office/drawing/2014/main" id="{D328ABDE-E232-3EB7-C3F2-B4BB7B64262F}"/>
-              </a:ext>
-            </a:extLst>
-          </p:cNvPr>
-          <p:cNvSpPr/>
-          <p:nvPr/>
-        </p:nvSpPr>
-        <p:spPr>
-          <a:xfrm>
-            <a:off x="7526107" y="5681420"/>
-            <a:ext cx="4550222" cy="548230"/>
-          </a:xfrm>
-          <a:prstGeom prst="rect">
-            <a:avLst/>
-          </a:prstGeom>
-          <a:solidFill>
-            <a:srgbClr val="C00000"/>
-          </a:solidFill>
-          <a:ln>
-            <a:noFill/>
-          </a:ln>
-        </p:spPr>
-        <p:txBody>
-          <a:bodyPr spcFirstLastPara="1" wrap="square" lIns="91425" tIns="45700" rIns="91425" bIns="45700" anchor="ctr" anchorCtr="0">
-            <a:noAutofit/>
-          </a:bodyPr>
-          <a:lstStyle/>
-          <a:p>
-            <a:pPr marL="0" marR="0" lvl="0" indent="0" algn="ctr" rtl="0">
-              <a:lnSpc>
-                <a:spcPct val="100000"/>
-              </a:lnSpc>
-              <a:spcBef>
-                <a:spcPts val="0"/>
-              </a:spcBef>
-              <a:spcAft>
-                <a:spcPts val="0"/>
-              </a:spcAft>
-              <a:buClr>
-                <a:srgbClr val="000000"/>
-              </a:buClr>
-              <a:buSzPts val="1600"/>
-              <a:buFont typeface="Arial"/>
-              <a:buNone/>
-            </a:pPr>
-            <a:r>
-              <a:rPr lang="en-US" sz="3600" dirty="0">
-                <a:solidFill>
-                  <a:schemeClr val="lt1"/>
-                </a:solidFill>
-              </a:rPr>
-              <a:t>Dead at Age 45</a:t>
-            </a:r>
-            <a:endParaRPr sz="2000" b="0" i="0" u="none" strike="noStrike" cap="none" dirty="0">
-              <a:solidFill>
-                <a:srgbClr val="000000"/>
-              </a:solidFill>
-              <a:latin typeface="Arial"/>
-              <a:ea typeface="Arial"/>
-              <a:cs typeface="Arial"/>
-              <a:sym typeface="Arial"/>
-            </a:endParaRPr>
-          </a:p>
-        </p:txBody>
-      </p:sp>
-      <p:sp>
-        <p:nvSpPr>
-          <p:cNvPr id="10" name="TextBox 9">
-            <a:extLst>
-              <a:ext uri="{FF2B5EF4-FFF2-40B4-BE49-F238E27FC236}">
-                <a16:creationId xmlns:a16="http://schemas.microsoft.com/office/drawing/2014/main" id="{5FA0D8B2-6B55-D3DC-BCBB-6FEAD86B9E72}"/>
-              </a:ext>
-            </a:extLst>
-          </p:cNvPr>
-          <p:cNvSpPr txBox="1"/>
-          <p:nvPr/>
-        </p:nvSpPr>
-        <p:spPr>
-          <a:xfrm>
-            <a:off x="312431" y="2175372"/>
-            <a:ext cx="6987941" cy="3046988"/>
-          </a:xfrm>
-          <a:prstGeom prst="rect">
-            <a:avLst/>
-          </a:prstGeom>
-          <a:solidFill>
-            <a:schemeClr val="bg1">
-              <a:alpha val="84400"/>
-            </a:schemeClr>
-          </a:solidFill>
-        </p:spPr>
-        <p:txBody>
-          <a:bodyPr wrap="square" rtlCol="0">
-            <a:spAutoFit/>
-          </a:bodyPr>
-          <a:lstStyle/>
-          <a:p>
-            <a:pPr marL="285750" indent="-285750">
-              <a:spcBef>
-                <a:spcPts val="1200"/>
-              </a:spcBef>
-              <a:buFont typeface="Arial" panose="020B0604020202020204" pitchFamily="34" charset="0"/>
-              <a:buChar char="•"/>
-            </a:pPr>
-            <a:r>
-              <a:t>Cancer researcher with DEPARTMENT OF DEFENSE contracts through Novartis. Age 45. Found dead in a FROZEN LAKE.</a:t>
-            </a:r>
-          </a:p>
-          <a:p>
-            <a:pPr marL="285750" indent="-285750">
-              <a:spcBef>
-                <a:spcPts val="1200"/>
-              </a:spcBef>
-              <a:buFont typeface="Arial" panose="020B0604020202020204" pitchFamily="34" charset="0"/>
-              <a:buChar char="•"/>
-            </a:pPr>
-            <a:r>
-              <a:t>Disappeared December 2025 after leaving behind his wallet, phone, and Apple Watch — watch was in the MAILBOX.</a:t>
-            </a:r>
-          </a:p>
-          <a:p>
-            <a:pPr marL="285750" indent="-285750">
-              <a:spcBef>
-                <a:spcPts val="1200"/>
-              </a:spcBef>
-              <a:buFont typeface="Arial" panose="020B0604020202020204" pitchFamily="34" charset="0"/>
-              <a:buChar char="•"/>
-            </a:pPr>
-            <a:r>
-              <a:t>His body was submerged in ice for THREE MONTHS, severely limiting forensic evidence.</a:t>
-            </a:r>
-          </a:p>
-          <a:p>
-            <a:pPr marL="285750" indent="-285750">
-              <a:spcBef>
-                <a:spcPts val="1200"/>
-              </a:spcBef>
-              <a:buFont typeface="Arial" panose="020B0604020202020204" pitchFamily="34" charset="0"/>
-              <a:buChar char="•"/>
-            </a:pPr>
-            <a:r>
-              <a:t>Part of a CLUSTER of scientist deaths in 2025-2026 that drew CONGRESSIONAL attention.</a:t>
-            </a:r>
-          </a:p>
-          <a:p>
-            <a:pPr marL="285750" indent="-285750">
-              <a:spcBef>
-                <a:spcPts val="1200"/>
-              </a:spcBef>
-              <a:buFont typeface="Arial" panose="020B0604020202020204" pitchFamily="34" charset="0"/>
-              <a:buChar char="•"/>
-            </a:pPr>
-            <a:r>
-              <a:t>Both parents died within ONE HOUR of each other weeks before. Official cause of death STILL NOT RELEASED.</a:t>
-            </a:r>
-          </a:p>
-        </p:txBody>
-      </p:sp>
       <p:pic>
         <p:nvPicPr>
-          <p:cNvPr id="16" name="Picture 15" descr="Jason_Thomas.jpg"/>
+          <p:cNvPr id="16" name="Picture 15" descr="Omar_Torrijos.jpg"/>
           <p:cNvPicPr>
             <a:picLocks noChangeAspect="1"/>
           </p:cNvPicPr>
@@ -4318,14 +3855,474 @@
         </p:blipFill>
         <p:spPr>
           <a:xfrm>
-            <a:off x="8170539" y="1100088"/>
-            <a:ext cx="2940887" cy="3884876"/>
+            <a:off x="9269160" y="1100088"/>
+            <a:ext cx="2787398" cy="3884876"/>
           </a:xfrm>
           <a:prstGeom prst="rect">
             <a:avLst/>
           </a:prstGeom>
         </p:spPr>
       </p:pic>
+      <p:sp>
+        <p:nvSpPr>
+          <p:cNvPr id="15" name="TextBox 14">
+            <a:extLst>
+              <a:ext uri="{FF2B5EF4-FFF2-40B4-BE49-F238E27FC236}">
+                <a16:creationId xmlns:a16="http://schemas.microsoft.com/office/drawing/2014/main" id="{E478240E-251B-5BA6-3C45-7E6620400769}"/>
+              </a:ext>
+            </a:extLst>
+          </p:cNvPr>
+          <p:cNvSpPr txBox="1"/>
+          <p:nvPr/>
+        </p:nvSpPr>
+        <p:spPr>
+          <a:xfrm>
+            <a:off x="312432" y="1288262"/>
+            <a:ext cx="6494294" cy="584775"/>
+          </a:xfrm>
+          <a:prstGeom prst="rect">
+            <a:avLst/>
+          </a:prstGeom>
+          <a:solidFill>
+            <a:schemeClr val="bg1">
+              <a:alpha val="84400"/>
+            </a:schemeClr>
+          </a:solidFill>
+        </p:spPr>
+        <p:txBody>
+          <a:bodyPr wrap="square" rtlCol="0">
+            <a:spAutoFit/>
+          </a:bodyPr>
+          <a:lstStyle/>
+          <a:p>
+            <a:r>
+              <a:rPr lang="en-US" sz="3200" b="1" dirty="0">
+                <a:solidFill>
+                  <a:schemeClr val="accent5"/>
+                </a:solidFill>
+              </a:rPr>
+              <a:t>Why / How they Omar Torrijos:</a:t>
+            </a:r>
+          </a:p>
+        </p:txBody>
+      </p:sp>
+      <p:sp>
+        <p:nvSpPr>
+          <p:cNvPr id="3" name="Google Shape;170;p31">
+            <a:extLst>
+              <a:ext uri="{FF2B5EF4-FFF2-40B4-BE49-F238E27FC236}">
+                <a16:creationId xmlns:a16="http://schemas.microsoft.com/office/drawing/2014/main" id="{A4695FE5-0AA5-AB05-98B1-B5B8E3FA8CBE}"/>
+              </a:ext>
+            </a:extLst>
+          </p:cNvPr>
+          <p:cNvSpPr/>
+          <p:nvPr/>
+        </p:nvSpPr>
+        <p:spPr>
+          <a:xfrm>
+            <a:off x="191731" y="5732890"/>
+            <a:ext cx="3431270" cy="496760"/>
+          </a:xfrm>
+          <a:prstGeom prst="rect">
+            <a:avLst/>
+          </a:prstGeom>
+          <a:solidFill>
+            <a:schemeClr val="accent5"/>
+          </a:solidFill>
+          <a:ln>
+            <a:noFill/>
+          </a:ln>
+        </p:spPr>
+        <p:txBody>
+          <a:bodyPr spcFirstLastPara="1" wrap="square" lIns="91425" tIns="45700" rIns="91425" bIns="45700" anchor="ctr" anchorCtr="0">
+            <a:noAutofit/>
+          </a:bodyPr>
+          <a:lstStyle/>
+          <a:p>
+            <a:pPr marL="0" marR="0" lvl="0" indent="0" algn="ctr" rtl="0">
+              <a:lnSpc>
+                <a:spcPct val="100000"/>
+              </a:lnSpc>
+              <a:spcBef>
+                <a:spcPts val="0"/>
+              </a:spcBef>
+              <a:spcAft>
+                <a:spcPts val="0"/>
+              </a:spcAft>
+              <a:buClr>
+                <a:srgbClr val="000000"/>
+              </a:buClr>
+              <a:buSzPts val="1600"/>
+              <a:buFont typeface="Arial"/>
+              <a:buNone/>
+            </a:pPr>
+            <a:r>
+              <a:rPr lang="en-US" sz="3600" dirty="0">
+                <a:solidFill>
+                  <a:schemeClr val="lt1"/>
+                </a:solidFill>
+              </a:rPr>
+              <a:t>Read List Here:</a:t>
+            </a:r>
+            <a:endParaRPr sz="2000" b="0" i="0" u="none" strike="noStrike" cap="none" dirty="0">
+              <a:solidFill>
+                <a:srgbClr val="000000"/>
+              </a:solidFill>
+              <a:latin typeface="Arial"/>
+              <a:ea typeface="Arial"/>
+              <a:cs typeface="Arial"/>
+              <a:sym typeface="Arial"/>
+            </a:endParaRPr>
+          </a:p>
+        </p:txBody>
+      </p:sp>
+      <p:sp>
+        <p:nvSpPr>
+          <p:cNvPr id="5" name="Google Shape;170;p31">
+            <a:extLst>
+              <a:ext uri="{FF2B5EF4-FFF2-40B4-BE49-F238E27FC236}">
+                <a16:creationId xmlns:a16="http://schemas.microsoft.com/office/drawing/2014/main" id="{98132413-6ED2-8B36-74B6-3C503B1A4634}"/>
+              </a:ext>
+            </a:extLst>
+          </p:cNvPr>
+          <p:cNvSpPr/>
+          <p:nvPr/>
+        </p:nvSpPr>
+        <p:spPr>
+          <a:xfrm>
+            <a:off x="0" y="-31518"/>
+            <a:ext cx="12192000" cy="1131606"/>
+          </a:xfrm>
+          <a:prstGeom prst="rect">
+            <a:avLst/>
+          </a:prstGeom>
+          <a:solidFill>
+            <a:srgbClr val="C00000"/>
+          </a:solidFill>
+          <a:ln>
+            <a:noFill/>
+          </a:ln>
+        </p:spPr>
+        <p:txBody>
+          <a:bodyPr spcFirstLastPara="1" wrap="square" lIns="91425" tIns="45700" rIns="91425" bIns="45700" anchor="ctr" anchorCtr="0">
+            <a:noAutofit/>
+          </a:bodyPr>
+          <a:lstStyle/>
+          <a:p>
+            <a:pPr marL="0" marR="0" lvl="0" indent="0" rtl="0">
+              <a:lnSpc>
+                <a:spcPct val="100000"/>
+              </a:lnSpc>
+              <a:spcBef>
+                <a:spcPts val="0"/>
+              </a:spcBef>
+              <a:spcAft>
+                <a:spcPts val="0"/>
+              </a:spcAft>
+              <a:buClr>
+                <a:srgbClr val="000000"/>
+              </a:buClr>
+              <a:buSzPts val="1600"/>
+              <a:buFont typeface="Arial"/>
+              <a:buNone/>
+            </a:pPr>
+            <a:r>
+              <a:rPr lang="en-US" sz="4800" dirty="0">
+                <a:solidFill>
+                  <a:schemeClr val="lt1"/>
+                </a:solidFill>
+              </a:rPr>
+              <a:t> 150+ Murdered: by Intelligence Services</a:t>
+            </a:r>
+            <a:endParaRPr sz="3200" b="0" i="0" u="none" strike="noStrike" cap="none" dirty="0">
+              <a:solidFill>
+                <a:srgbClr val="000000"/>
+              </a:solidFill>
+              <a:latin typeface="Arial"/>
+              <a:ea typeface="Arial"/>
+              <a:cs typeface="Arial"/>
+              <a:sym typeface="Arial"/>
+            </a:endParaRPr>
+          </a:p>
+        </p:txBody>
+      </p:sp>
+      <p:sp>
+        <p:nvSpPr>
+          <p:cNvPr id="4" name="TextBox 3">
+            <a:extLst>
+              <a:ext uri="{FF2B5EF4-FFF2-40B4-BE49-F238E27FC236}">
+                <a16:creationId xmlns:a16="http://schemas.microsoft.com/office/drawing/2014/main" id="{50D7621F-9D36-7894-7117-9F831EF5EFA6}"/>
+              </a:ext>
+            </a:extLst>
+          </p:cNvPr>
+          <p:cNvSpPr txBox="1"/>
+          <p:nvPr/>
+        </p:nvSpPr>
+        <p:spPr>
+          <a:xfrm>
+            <a:off x="107300" y="6229650"/>
+            <a:ext cx="11685989" cy="461665"/>
+          </a:xfrm>
+          <a:prstGeom prst="rect">
+            <a:avLst/>
+          </a:prstGeom>
+          <a:solidFill>
+            <a:schemeClr val="bg1">
+              <a:alpha val="84400"/>
+            </a:schemeClr>
+          </a:solidFill>
+        </p:spPr>
+        <p:txBody>
+          <a:bodyPr wrap="square" rtlCol="0">
+            <a:spAutoFit/>
+          </a:bodyPr>
+          <a:lstStyle/>
+          <a:p>
+            <a:r>
+              <a:rPr lang="en-US" sz="2400" dirty="0"/>
+              <a:t>https://intelligencemurders.com/intel</a:t>
+            </a:r>
+          </a:p>
+        </p:txBody>
+      </p:sp>
+      <p:sp>
+        <p:nvSpPr>
+          <p:cNvPr id="7" name="Google Shape;170;p31">
+            <a:extLst>
+              <a:ext uri="{FF2B5EF4-FFF2-40B4-BE49-F238E27FC236}">
+                <a16:creationId xmlns:a16="http://schemas.microsoft.com/office/drawing/2014/main" id="{4B582382-76AA-B49E-C611-39A37CE591B9}"/>
+              </a:ext>
+            </a:extLst>
+          </p:cNvPr>
+          <p:cNvSpPr/>
+          <p:nvPr/>
+        </p:nvSpPr>
+        <p:spPr>
+          <a:xfrm>
+            <a:off x="7506336" y="4925186"/>
+            <a:ext cx="4550222" cy="869505"/>
+          </a:xfrm>
+          <a:prstGeom prst="rect">
+            <a:avLst/>
+          </a:prstGeom>
+          <a:solidFill>
+            <a:srgbClr val="C00000"/>
+          </a:solidFill>
+          <a:ln>
+            <a:noFill/>
+          </a:ln>
+        </p:spPr>
+        <p:txBody>
+          <a:bodyPr spcFirstLastPara="1" wrap="square" lIns="91425" tIns="45700" rIns="91425" bIns="45700" anchor="ctr" anchorCtr="0">
+            <a:noAutofit/>
+          </a:bodyPr>
+          <a:lstStyle/>
+          <a:p>
+            <a:pPr marL="0" marR="0" lvl="0" indent="0" algn="ctr" rtl="0">
+              <a:lnSpc>
+                <a:spcPct val="100000"/>
+              </a:lnSpc>
+              <a:spcBef>
+                <a:spcPts val="0"/>
+              </a:spcBef>
+              <a:spcAft>
+                <a:spcPts val="0"/>
+              </a:spcAft>
+              <a:buClr>
+                <a:srgbClr val="000000"/>
+              </a:buClr>
+              <a:buSzPts val="1600"/>
+              <a:buFont typeface="Arial"/>
+              <a:buNone/>
+            </a:pPr>
+            <a:r>
+              <a:rPr lang="en-US" sz="4800" dirty="0">
+                <a:solidFill>
+                  <a:schemeClr val="lt1"/>
+                </a:solidFill>
+              </a:rPr>
+              <a:t>Omar Torrijos</a:t>
+            </a:r>
+            <a:endParaRPr sz="3200" b="0" i="0" u="none" strike="noStrike" cap="none" dirty="0">
+              <a:solidFill>
+                <a:srgbClr val="000000"/>
+              </a:solidFill>
+              <a:latin typeface="Arial"/>
+              <a:ea typeface="Arial"/>
+              <a:cs typeface="Arial"/>
+              <a:sym typeface="Arial"/>
+            </a:endParaRPr>
+          </a:p>
+        </p:txBody>
+      </p:sp>
+      <p:sp>
+        <p:nvSpPr>
+          <p:cNvPr id="8" name="Google Shape;170;p31">
+            <a:extLst>
+              <a:ext uri="{FF2B5EF4-FFF2-40B4-BE49-F238E27FC236}">
+                <a16:creationId xmlns:a16="http://schemas.microsoft.com/office/drawing/2014/main" id="{D328ABDE-E232-3EB7-C3F2-B4BB7B64262F}"/>
+              </a:ext>
+            </a:extLst>
+          </p:cNvPr>
+          <p:cNvSpPr/>
+          <p:nvPr/>
+        </p:nvSpPr>
+        <p:spPr>
+          <a:xfrm>
+            <a:off x="7526107" y="5681420"/>
+            <a:ext cx="4550222" cy="548230"/>
+          </a:xfrm>
+          <a:prstGeom prst="rect">
+            <a:avLst/>
+          </a:prstGeom>
+          <a:solidFill>
+            <a:srgbClr val="C00000"/>
+          </a:solidFill>
+          <a:ln>
+            <a:noFill/>
+          </a:ln>
+        </p:spPr>
+        <p:txBody>
+          <a:bodyPr spcFirstLastPara="1" wrap="square" lIns="91425" tIns="45700" rIns="91425" bIns="45700" anchor="ctr" anchorCtr="0">
+            <a:noAutofit/>
+          </a:bodyPr>
+          <a:lstStyle/>
+          <a:p>
+            <a:pPr marL="0" marR="0" lvl="0" indent="0" algn="ctr" rtl="0">
+              <a:lnSpc>
+                <a:spcPct val="100000"/>
+              </a:lnSpc>
+              <a:spcBef>
+                <a:spcPts val="0"/>
+              </a:spcBef>
+              <a:spcAft>
+                <a:spcPts val="0"/>
+              </a:spcAft>
+              <a:buClr>
+                <a:srgbClr val="000000"/>
+              </a:buClr>
+              <a:buSzPts val="1600"/>
+              <a:buFont typeface="Arial"/>
+              <a:buNone/>
+            </a:pPr>
+            <a:r>
+              <a:rPr lang="en-US" sz="3600" dirty="0">
+                <a:solidFill>
+                  <a:schemeClr val="lt1"/>
+                </a:solidFill>
+              </a:rPr>
+              <a:t>Dead at Age 52</a:t>
+            </a:r>
+            <a:endParaRPr sz="2000" b="0" i="0" u="none" strike="noStrike" cap="none" dirty="0">
+              <a:solidFill>
+                <a:srgbClr val="000000"/>
+              </a:solidFill>
+              <a:latin typeface="Arial"/>
+              <a:ea typeface="Arial"/>
+              <a:cs typeface="Arial"/>
+              <a:sym typeface="Arial"/>
+            </a:endParaRPr>
+          </a:p>
+        </p:txBody>
+      </p:sp>
+      <p:sp>
+        <p:nvSpPr>
+          <p:cNvPr id="10" name="TextBox 9">
+            <a:extLst>
+              <a:ext uri="{FF2B5EF4-FFF2-40B4-BE49-F238E27FC236}">
+                <a16:creationId xmlns:a16="http://schemas.microsoft.com/office/drawing/2014/main" id="{5FA0D8B2-6B55-D3DC-BCBB-6FEAD86B9E72}"/>
+              </a:ext>
+            </a:extLst>
+          </p:cNvPr>
+          <p:cNvSpPr txBox="1"/>
+          <p:nvPr/>
+        </p:nvSpPr>
+        <p:spPr>
+          <a:xfrm>
+            <a:off x="230865" y="1905506"/>
+            <a:ext cx="8902853" cy="3477875"/>
+          </a:xfrm>
+          <a:prstGeom prst="rect">
+            <a:avLst/>
+          </a:prstGeom>
+          <a:solidFill>
+            <a:schemeClr val="bg1">
+              <a:alpha val="84400"/>
+            </a:schemeClr>
+          </a:solidFill>
+        </p:spPr>
+        <p:txBody>
+          <a:bodyPr wrap="square" rtlCol="0">
+            <a:spAutoFit/>
+          </a:bodyPr>
+          <a:lstStyle/>
+          <a:p>
+            <a:pPr marL="285750" indent="-285750">
+              <a:spcBef>
+                <a:spcPts val="1200"/>
+              </a:spcBef>
+              <a:buFont typeface="Arial" panose="020B0604020202020204" pitchFamily="34" charset="0"/>
+              <a:buChar char="•"/>
+            </a:pPr>
+            <a:r>
+              <a:rPr dirty="0"/>
+              <a:t>Panama's leader who won the CANAL back from America — killed in a plane crash at age 52, just TWO YEARS after signing the treaty.</a:t>
+            </a:r>
+          </a:p>
+          <a:p>
+            <a:pPr marL="285750" indent="-285750">
+              <a:spcBef>
+                <a:spcPts val="1200"/>
+              </a:spcBef>
+              <a:buFont typeface="Arial" panose="020B0604020202020204" pitchFamily="34" charset="0"/>
+              <a:buChar char="•"/>
+            </a:pPr>
+            <a:r>
+              <a:rPr dirty="0"/>
+              <a:t>Ecuador's president died in a NEARLY IDENTICAL plane crash just 68 DAYS earlier — both had defied US economic interests.</a:t>
+            </a:r>
+          </a:p>
+          <a:p>
+            <a:pPr marL="285750" indent="-285750">
+              <a:spcBef>
+                <a:spcPts val="1200"/>
+              </a:spcBef>
+              <a:buFont typeface="Arial" panose="020B0604020202020204" pitchFamily="34" charset="0"/>
+              <a:buChar char="•"/>
+            </a:pPr>
+            <a:r>
+              <a:rPr dirty="0"/>
+              <a:t>A former CIA insider wrote: "When Torrijos refused to be CORRUPTED, the CIA escalated to ASSASSINATION."</a:t>
+            </a:r>
+          </a:p>
+          <a:p>
+            <a:pPr marL="285750" indent="-285750">
+              <a:spcBef>
+                <a:spcPts val="1200"/>
+              </a:spcBef>
+              <a:buFont typeface="Arial" panose="020B0604020202020204" pitchFamily="34" charset="0"/>
+              <a:buChar char="•"/>
+            </a:pPr>
+            <a:r>
+              <a:rPr dirty="0"/>
+              <a:t>Key investigative documents DISAPPEARED during the 1989 US invasion of Panama — when American forces DESTROYED the defense headquarters.</a:t>
+            </a:r>
+          </a:p>
+          <a:p>
+            <a:pPr marL="285750" indent="-285750">
+              <a:spcBef>
+                <a:spcPts val="1200"/>
+              </a:spcBef>
+              <a:buFont typeface="Arial" panose="020B0604020202020204" pitchFamily="34" charset="0"/>
+              <a:buChar char="•"/>
+            </a:pPr>
+            <a:r>
+              <a:rPr dirty="0"/>
+              <a:t>His death cleared the way for CIA asset Manuel NORIEGA to seize power — until the US invaded AGAIN to remove him.</a:t>
+            </a:r>
+          </a:p>
+        </p:txBody>
+      </p:sp>
     </p:spTree>
   </p:cSld>
   <p:clrMapOvr>
@@ -4389,7 +4386,7 @@
                   <a:schemeClr val="accent5"/>
                 </a:solidFill>
               </a:rPr>
-              <a:t>Why / How they Max Spiers:</a:t>
+              <a:t>Why / How they Orlando Letelier:</a:t>
             </a:r>
           </a:p>
         </p:txBody>
@@ -4568,7 +4565,7 @@
           <a:p>
             <a:r>
               <a:rPr lang="en-US" sz="2400" dirty="0"/>
-              <a:t>https://intelligencemurders.com/intelligence-service-murders</a:t>
+              <a:t>https://intelligencemurders.com/intel</a:t>
             </a:r>
           </a:p>
         </p:txBody>
@@ -4629,7 +4626,7 @@
                   <a:schemeClr val="lt1"/>
                 </a:solidFill>
               </a:rPr>
-              <a:t>Max Spiers</a:t>
+              <a:t>Orlando Letelier</a:t>
             </a:r>
             <a:endParaRPr sz="3200" b="0" i="0" u="none" strike="noStrike" cap="none" dirty="0">
               <a:solidFill>
@@ -4699,7 +4696,7 @@
                   <a:schemeClr val="lt1"/>
                 </a:solidFill>
               </a:rPr>
-              <a:t>Dead at Age 39</a:t>
+              <a:t>Dead at Age 44</a:t>
             </a:r>
             <a:endParaRPr sz="2000" b="0" i="0" u="none" strike="noStrike" cap="none" dirty="0">
               <a:solidFill>
@@ -4753,7 +4750,7 @@
               <a:buChar char="•"/>
             </a:pPr>
             <a:r>
-              <a:t>Texted his mother: "Your boy's in TROUBLE. If anything happens to me, INVESTIGATE." Dead TWO DAYS later at age 39.</a:t>
+              <a:t>Chilean diplomat — killed by a CAR BOMB on Embassy Row in Washington, DC, less than 2 km from the WHITE HOUSE.</a:t>
             </a:r>
           </a:p>
           <a:p>
@@ -4765,7 +4762,7 @@
               <a:buChar char="•"/>
             </a:pPr>
             <a:r>
-              <a:t>Vomited TWO LITRES of BLACK FLUID before dying in a Warsaw apartment.</a:t>
+              <a:t>His 25-year-old American colleague Ronni Moffitt DROWNED in her own blood from shrapnel that pierced her throat.</a:t>
             </a:r>
           </a:p>
           <a:p>
@@ -4777,7 +4774,7 @@
               <a:buChar char="•"/>
             </a:pPr>
             <a:r>
-              <a:t>A British coroner called the Polish police investigation "WHOLLY INCOMPETENT" — the body was left overnight with NO examination.</a:t>
+              <a:t>Declassified CIA documents state: "PINOCHET PERSONALLY ORDERED" the assassination.</a:t>
             </a:r>
           </a:p>
           <a:p>
@@ -4789,7 +4786,7 @@
               <a:buChar char="•"/>
             </a:pPr>
             <a:r>
-              <a:t>Was investigating elite PEDOPHILE RINGS and government mind control programs — about to speak at a conference on who REALLY controls the world.</a:t>
+              <a:t>Kissinger BLOCKED a State Department warning to Condor nations FIVE DAYS before the bombing — a warning that could have PREVENTED it.</a:t>
             </a:r>
           </a:p>
           <a:p>
@@ -4801,14 +4798,14 @@
               <a:buChar char="•"/>
             </a:pPr>
             <a:r>
-              <a:t>Lethal opioids and a Turkish sedative were in his system — but the SOURCE of the drugs was never established.</a:t>
+              <a:t>The American-born assassin who BUILT the bomb served only 62 MONTHS in prison and got a new identity through witness protection.</a:t>
             </a:r>
           </a:p>
         </p:txBody>
       </p:sp>
       <p:pic>
         <p:nvPicPr>
-          <p:cNvPr id="16" name="Picture 15" descr="Max_Spiers.jpg"/>
+          <p:cNvPr id="16" name="Picture 15" descr="Orlando_Letelier.jpg"/>
           <p:cNvPicPr>
             <a:picLocks noChangeAspect="1"/>
           </p:cNvPicPr>
@@ -4822,8 +4819,8 @@
         </p:blipFill>
         <p:spPr>
           <a:xfrm>
-            <a:off x="8193563" y="1100088"/>
-            <a:ext cx="2894840" cy="3884876"/>
+            <a:off x="8087033" y="1100088"/>
+            <a:ext cx="3107900" cy="3884876"/>
           </a:xfrm>
           <a:prstGeom prst="rect">
             <a:avLst/>
@@ -4893,7 +4890,7 @@
                   <a:schemeClr val="accent5"/>
                 </a:solidFill>
               </a:rPr>
-              <a:t>Why / How they Omar Torrijos:</a:t>
+              <a:t>Why / How they Rafael Trujillo:</a:t>
             </a:r>
           </a:p>
         </p:txBody>
@@ -5072,7 +5069,7 @@
           <a:p>
             <a:r>
               <a:rPr lang="en-US" sz="2400" dirty="0"/>
-              <a:t>https://intelligencemurders.com/intelligence-service-murders</a:t>
+              <a:t>https://intelligencemurders.com/intel</a:t>
             </a:r>
           </a:p>
         </p:txBody>
@@ -5133,7 +5130,7 @@
                   <a:schemeClr val="lt1"/>
                 </a:solidFill>
               </a:rPr>
-              <a:t>Omar Torrijos</a:t>
+              <a:t>Rafael Trujillo</a:t>
             </a:r>
             <a:endParaRPr sz="3200" b="0" i="0" u="none" strike="noStrike" cap="none" dirty="0">
               <a:solidFill>
@@ -5203,7 +5200,7 @@
                   <a:schemeClr val="lt1"/>
                 </a:solidFill>
               </a:rPr>
-              <a:t>Dead at Age 52</a:t>
+              <a:t>Dead at Age 69</a:t>
             </a:r>
             <a:endParaRPr sz="2000" b="0" i="0" u="none" strike="noStrike" cap="none" dirty="0">
               <a:solidFill>
@@ -5257,7 +5254,7 @@
               <a:buChar char="•"/>
             </a:pPr>
             <a:r>
-              <a:t>Panama's leader who won the CANAL back from America — killed in a plane crash at age 52, just TWO YEARS after signing the treaty.</a:t>
+              <a:t>CIA SUPPLIED the weapons. Dominican dictator ambushed and machine-gunned in his car on a highway.</a:t>
             </a:r>
           </a:p>
           <a:p>
@@ -5269,7 +5266,7 @@
               <a:buChar char="•"/>
             </a:pPr>
             <a:r>
-              <a:t>Ecuador's president died in a NEARLY IDENTICAL plane crash just 68 DAYS earlier — both had defied US economic interests.</a:t>
+              <a:t>Ruled for 31 YEARS. Murdered the Mirabal sisters. Ordered the Parsley Massacre killing up to 30,000 Haitians.</a:t>
             </a:r>
           </a:p>
           <a:p>
@@ -5281,7 +5278,7 @@
               <a:buChar char="•"/>
             </a:pPr>
             <a:r>
-              <a:t>A former CIA insider wrote: "When Torrijos refused to be CORRUPTED, the CIA escalated to ASSASSINATION."</a:t>
+              <a:t>CIA's internal report admitted "quite extensive Agency involvement" — then PUBLICLY claimed only a "faint connection."</a:t>
             </a:r>
           </a:p>
           <a:p>
@@ -5293,7 +5290,7 @@
               <a:buChar char="•"/>
             </a:pPr>
             <a:r>
-              <a:t>Key investigative documents DISAPPEARED during the 1989 US invasion of Panama — when American forces DESTROYED the defense headquarters.</a:t>
+              <a:t>Kennedy sent a cable saying the US "cannot condone assassination" — TWO DAYS before the hit. Weapons already delivered.</a:t>
             </a:r>
           </a:p>
           <a:p>
@@ -5305,14 +5302,14 @@
               <a:buChar char="•"/>
             </a:pPr>
             <a:r>
-              <a:t>His death cleared the way for CIA asset Manuel NORIEGA to seize power — until the US invaded AGAIN to remove him.</a:t>
+              <a:t>Church Committee confirmed this as ONE OF FIVE CIA assassination plots against foreign leaders.</a:t>
             </a:r>
           </a:p>
         </p:txBody>
       </p:sp>
       <p:pic>
         <p:nvPicPr>
-          <p:cNvPr id="16" name="Picture 15" descr="Omar_Torrijos.jpg"/>
+          <p:cNvPr id="16" name="Picture 15" descr="Rafael_Trujillo.jpg"/>
           <p:cNvPicPr>
             <a:picLocks noChangeAspect="1"/>
           </p:cNvPicPr>
@@ -5326,8 +5323,8 @@
         </p:blipFill>
         <p:spPr>
           <a:xfrm>
-            <a:off x="8247284" y="1100088"/>
-            <a:ext cx="2787398" cy="3884876"/>
+            <a:off x="8276420" y="1100088"/>
+            <a:ext cx="2729125" cy="3884876"/>
           </a:xfrm>
           <a:prstGeom prst="rect">
             <a:avLst/>
@@ -5397,7 +5394,7 @@
                   <a:schemeClr val="accent5"/>
                 </a:solidFill>
               </a:rPr>
-              <a:t>Why / How they Orlando Letelier:</a:t>
+              <a:t>Why / How they Alexei Navalny:</a:t>
             </a:r>
           </a:p>
         </p:txBody>
@@ -5576,7 +5573,7 @@
           <a:p>
             <a:r>
               <a:rPr lang="en-US" sz="2400" dirty="0"/>
-              <a:t>https://intelligencemurders.com/intelligence-service-murders</a:t>
+              <a:t>https://intelligencemurders.com/intel</a:t>
             </a:r>
           </a:p>
         </p:txBody>
@@ -5637,7 +5634,7 @@
                   <a:schemeClr val="lt1"/>
                 </a:solidFill>
               </a:rPr>
-              <a:t>Orlando Letelier</a:t>
+              <a:t>Alexei Navalny</a:t>
             </a:r>
             <a:endParaRPr sz="3200" b="0" i="0" u="none" strike="noStrike" cap="none" dirty="0">
               <a:solidFill>
@@ -5707,7 +5704,7 @@
                   <a:schemeClr val="lt1"/>
                 </a:solidFill>
               </a:rPr>
-              <a:t>Dead at Age 44</a:t>
+              <a:t>Dead at Age 47</a:t>
             </a:r>
             <a:endParaRPr sz="2000" b="0" i="0" u="none" strike="noStrike" cap="none" dirty="0">
               <a:solidFill>
@@ -5761,7 +5758,7 @@
               <a:buChar char="•"/>
             </a:pPr>
             <a:r>
-              <a:t>Chilean diplomat — killed by a CAR BOMB on Embassy Row in Washington, DC, less than 2 km from the WHITE HOUSE.</a:t>
+              <a:t>Survived FSB NOVICHOK poisoning in 2020, then TRICKED his assassin into confessing on a recorded phone call.</a:t>
             </a:r>
           </a:p>
           <a:p>
@@ -5773,7 +5770,7 @@
               <a:buChar char="•"/>
             </a:pPr>
             <a:r>
-              <a:t>His 25-year-old American colleague Ronni Moffitt DROWNED in her own blood from shrapnel that pierced her throat.</a:t>
+              <a:t>Died in an ARCTIC prison at age 47. Five European nations confirmed he was poisoned with FROG TOXIN.</a:t>
             </a:r>
           </a:p>
           <a:p>
@@ -5785,7 +5782,7 @@
               <a:buChar char="•"/>
             </a:pPr>
             <a:r>
-              <a:t>Declassified CIA documents state: "PINOCHET PERSONALLY ORDERED" the assassination.</a:t>
+              <a:t>Appeared HEALTHY at a court hearing ONE DAY before his death. Russia claims "cardiac arrhythmia."</a:t>
             </a:r>
           </a:p>
           <a:p>
@@ -5797,7 +5794,7 @@
               <a:buChar char="•"/>
             </a:pPr>
             <a:r>
-              <a:t>Kissinger BLOCKED a State Department warning to Condor nations FIVE DAYS before the bombing — a warning that could have PREVENTED it.</a:t>
+              <a:t>His anti-corruption videos exposing Putin's $1.35 BILLION palace got 130 MILLION views on YouTube.</a:t>
             </a:r>
           </a:p>
           <a:p>
@@ -5809,14 +5806,14 @@
               <a:buChar char="•"/>
             </a:pPr>
             <a:r>
-              <a:t>The American-born assassin who BUILT the bomb served only 62 MONTHS in prison and got a new identity through witness protection.</a:t>
+              <a:t>His wife vowed to continue his work. "If they decide to KILL me, it means we are incredibly STRONG."</a:t>
             </a:r>
           </a:p>
         </p:txBody>
       </p:sp>
       <p:pic>
         <p:nvPicPr>
-          <p:cNvPr id="16" name="Picture 15" descr="Orlando_Letelier.jpg"/>
+          <p:cNvPr id="16" name="Picture 15" descr="Alexei_Navalny.jpg"/>
           <p:cNvPicPr>
             <a:picLocks noChangeAspect="1"/>
           </p:cNvPicPr>
@@ -5830,8 +5827,8 @@
         </p:blipFill>
         <p:spPr>
           <a:xfrm>
-            <a:off x="8087033" y="1100088"/>
-            <a:ext cx="3107900" cy="3884876"/>
+            <a:off x="8223003" y="1100088"/>
+            <a:ext cx="2835959" cy="3884876"/>
           </a:xfrm>
           <a:prstGeom prst="rect">
             <a:avLst/>
@@ -5839,6 +5836,11 @@
         </p:spPr>
       </p:pic>
     </p:spTree>
+    <p:extLst>
+      <p:ext uri="{BB962C8B-B14F-4D97-AF65-F5344CB8AC3E}">
+        <p14:creationId xmlns:p14="http://schemas.microsoft.com/office/powerpoint/2010/main" val="2359462379"/>
+      </p:ext>
+    </p:extLst>
   </p:cSld>
   <p:clrMapOvr>
     <a:masterClrMapping/>
@@ -5863,464 +5865,9 @@
           <a:chExt cx="0" cy="0"/>
         </a:xfrm>
       </p:grpSpPr>
-      <p:sp>
-        <p:nvSpPr>
-          <p:cNvPr id="15" name="TextBox 14">
-            <a:extLst>
-              <a:ext uri="{FF2B5EF4-FFF2-40B4-BE49-F238E27FC236}">
-                <a16:creationId xmlns:a16="http://schemas.microsoft.com/office/drawing/2014/main" id="{E478240E-251B-5BA6-3C45-7E6620400769}"/>
-              </a:ext>
-            </a:extLst>
-          </p:cNvPr>
-          <p:cNvSpPr txBox="1"/>
-          <p:nvPr/>
-        </p:nvSpPr>
-        <p:spPr>
-          <a:xfrm>
-            <a:off x="312432" y="1288262"/>
-            <a:ext cx="6494294" cy="584775"/>
-          </a:xfrm>
-          <a:prstGeom prst="rect">
-            <a:avLst/>
-          </a:prstGeom>
-          <a:solidFill>
-            <a:schemeClr val="bg1">
-              <a:alpha val="84400"/>
-            </a:schemeClr>
-          </a:solidFill>
-        </p:spPr>
-        <p:txBody>
-          <a:bodyPr wrap="square" rtlCol="0">
-            <a:spAutoFit/>
-          </a:bodyPr>
-          <a:lstStyle/>
-          <a:p>
-            <a:r>
-              <a:rPr lang="en-US" sz="3200" b="1" dirty="0">
-                <a:solidFill>
-                  <a:schemeClr val="accent5"/>
-                </a:solidFill>
-              </a:rPr>
-              <a:t>Why / How they Philip Haney:</a:t>
-            </a:r>
-          </a:p>
-        </p:txBody>
-      </p:sp>
-      <p:sp>
-        <p:nvSpPr>
-          <p:cNvPr id="3" name="Google Shape;170;p31">
-            <a:extLst>
-              <a:ext uri="{FF2B5EF4-FFF2-40B4-BE49-F238E27FC236}">
-                <a16:creationId xmlns:a16="http://schemas.microsoft.com/office/drawing/2014/main" id="{A4695FE5-0AA5-AB05-98B1-B5B8E3FA8CBE}"/>
-              </a:ext>
-            </a:extLst>
-          </p:cNvPr>
-          <p:cNvSpPr/>
-          <p:nvPr/>
-        </p:nvSpPr>
-        <p:spPr>
-          <a:xfrm>
-            <a:off x="191731" y="5732890"/>
-            <a:ext cx="3431270" cy="496760"/>
-          </a:xfrm>
-          <a:prstGeom prst="rect">
-            <a:avLst/>
-          </a:prstGeom>
-          <a:solidFill>
-            <a:schemeClr val="accent5"/>
-          </a:solidFill>
-          <a:ln>
-            <a:noFill/>
-          </a:ln>
-        </p:spPr>
-        <p:txBody>
-          <a:bodyPr spcFirstLastPara="1" wrap="square" lIns="91425" tIns="45700" rIns="91425" bIns="45700" anchor="ctr" anchorCtr="0">
-            <a:noAutofit/>
-          </a:bodyPr>
-          <a:lstStyle/>
-          <a:p>
-            <a:pPr marL="0" marR="0" lvl="0" indent="0" algn="ctr" rtl="0">
-              <a:lnSpc>
-                <a:spcPct val="100000"/>
-              </a:lnSpc>
-              <a:spcBef>
-                <a:spcPts val="0"/>
-              </a:spcBef>
-              <a:spcAft>
-                <a:spcPts val="0"/>
-              </a:spcAft>
-              <a:buClr>
-                <a:srgbClr val="000000"/>
-              </a:buClr>
-              <a:buSzPts val="1600"/>
-              <a:buFont typeface="Arial"/>
-              <a:buNone/>
-            </a:pPr>
-            <a:r>
-              <a:rPr lang="en-US" sz="3600" dirty="0">
-                <a:solidFill>
-                  <a:schemeClr val="lt1"/>
-                </a:solidFill>
-              </a:rPr>
-              <a:t>Read List Here:</a:t>
-            </a:r>
-            <a:endParaRPr sz="2000" b="0" i="0" u="none" strike="noStrike" cap="none" dirty="0">
-              <a:solidFill>
-                <a:srgbClr val="000000"/>
-              </a:solidFill>
-              <a:latin typeface="Arial"/>
-              <a:ea typeface="Arial"/>
-              <a:cs typeface="Arial"/>
-              <a:sym typeface="Arial"/>
-            </a:endParaRPr>
-          </a:p>
-        </p:txBody>
-      </p:sp>
-      <p:sp>
-        <p:nvSpPr>
-          <p:cNvPr id="5" name="Google Shape;170;p31">
-            <a:extLst>
-              <a:ext uri="{FF2B5EF4-FFF2-40B4-BE49-F238E27FC236}">
-                <a16:creationId xmlns:a16="http://schemas.microsoft.com/office/drawing/2014/main" id="{98132413-6ED2-8B36-74B6-3C503B1A4634}"/>
-              </a:ext>
-            </a:extLst>
-          </p:cNvPr>
-          <p:cNvSpPr/>
-          <p:nvPr/>
-        </p:nvSpPr>
-        <p:spPr>
-          <a:xfrm>
-            <a:off x="0" y="-31518"/>
-            <a:ext cx="12192000" cy="1131606"/>
-          </a:xfrm>
-          <a:prstGeom prst="rect">
-            <a:avLst/>
-          </a:prstGeom>
-          <a:solidFill>
-            <a:srgbClr val="C00000"/>
-          </a:solidFill>
-          <a:ln>
-            <a:noFill/>
-          </a:ln>
-        </p:spPr>
-        <p:txBody>
-          <a:bodyPr spcFirstLastPara="1" wrap="square" lIns="91425" tIns="45700" rIns="91425" bIns="45700" anchor="ctr" anchorCtr="0">
-            <a:noAutofit/>
-          </a:bodyPr>
-          <a:lstStyle/>
-          <a:p>
-            <a:pPr marL="0" marR="0" lvl="0" indent="0" rtl="0">
-              <a:lnSpc>
-                <a:spcPct val="100000"/>
-              </a:lnSpc>
-              <a:spcBef>
-                <a:spcPts val="0"/>
-              </a:spcBef>
-              <a:spcAft>
-                <a:spcPts val="0"/>
-              </a:spcAft>
-              <a:buClr>
-                <a:srgbClr val="000000"/>
-              </a:buClr>
-              <a:buSzPts val="1600"/>
-              <a:buFont typeface="Arial"/>
-              <a:buNone/>
-            </a:pPr>
-            <a:r>
-              <a:rPr lang="en-US" sz="4800" dirty="0">
-                <a:solidFill>
-                  <a:schemeClr val="lt1"/>
-                </a:solidFill>
-              </a:rPr>
-              <a:t> 150+ Murdered: by Intelligence Services</a:t>
-            </a:r>
-            <a:endParaRPr sz="3200" b="0" i="0" u="none" strike="noStrike" cap="none" dirty="0">
-              <a:solidFill>
-                <a:srgbClr val="000000"/>
-              </a:solidFill>
-              <a:latin typeface="Arial"/>
-              <a:ea typeface="Arial"/>
-              <a:cs typeface="Arial"/>
-              <a:sym typeface="Arial"/>
-            </a:endParaRPr>
-          </a:p>
-        </p:txBody>
-      </p:sp>
-      <p:sp>
-        <p:nvSpPr>
-          <p:cNvPr id="4" name="TextBox 3">
-            <a:extLst>
-              <a:ext uri="{FF2B5EF4-FFF2-40B4-BE49-F238E27FC236}">
-                <a16:creationId xmlns:a16="http://schemas.microsoft.com/office/drawing/2014/main" id="{50D7621F-9D36-7894-7117-9F831EF5EFA6}"/>
-              </a:ext>
-            </a:extLst>
-          </p:cNvPr>
-          <p:cNvSpPr txBox="1"/>
-          <p:nvPr/>
-        </p:nvSpPr>
-        <p:spPr>
-          <a:xfrm>
-            <a:off x="107300" y="6229650"/>
-            <a:ext cx="11685989" cy="461665"/>
-          </a:xfrm>
-          <a:prstGeom prst="rect">
-            <a:avLst/>
-          </a:prstGeom>
-          <a:solidFill>
-            <a:schemeClr val="bg1">
-              <a:alpha val="84400"/>
-            </a:schemeClr>
-          </a:solidFill>
-        </p:spPr>
-        <p:txBody>
-          <a:bodyPr wrap="square" rtlCol="0">
-            <a:spAutoFit/>
-          </a:bodyPr>
-          <a:lstStyle/>
-          <a:p>
-            <a:r>
-              <a:rPr lang="en-US" sz="2400" dirty="0"/>
-              <a:t>https://intelligencemurders.com/intelligence-service-murders</a:t>
-            </a:r>
-          </a:p>
-        </p:txBody>
-      </p:sp>
-      <p:sp>
-        <p:nvSpPr>
-          <p:cNvPr id="7" name="Google Shape;170;p31">
-            <a:extLst>
-              <a:ext uri="{FF2B5EF4-FFF2-40B4-BE49-F238E27FC236}">
-                <a16:creationId xmlns:a16="http://schemas.microsoft.com/office/drawing/2014/main" id="{4B582382-76AA-B49E-C611-39A37CE591B9}"/>
-              </a:ext>
-            </a:extLst>
-          </p:cNvPr>
-          <p:cNvSpPr/>
-          <p:nvPr/>
-        </p:nvSpPr>
-        <p:spPr>
-          <a:xfrm>
-            <a:off x="7506336" y="4925186"/>
-            <a:ext cx="4550222" cy="869505"/>
-          </a:xfrm>
-          <a:prstGeom prst="rect">
-            <a:avLst/>
-          </a:prstGeom>
-          <a:solidFill>
-            <a:srgbClr val="C00000"/>
-          </a:solidFill>
-          <a:ln>
-            <a:noFill/>
-          </a:ln>
-        </p:spPr>
-        <p:txBody>
-          <a:bodyPr spcFirstLastPara="1" wrap="square" lIns="91425" tIns="45700" rIns="91425" bIns="45700" anchor="ctr" anchorCtr="0">
-            <a:noAutofit/>
-          </a:bodyPr>
-          <a:lstStyle/>
-          <a:p>
-            <a:pPr marL="0" marR="0" lvl="0" indent="0" algn="ctr" rtl="0">
-              <a:lnSpc>
-                <a:spcPct val="100000"/>
-              </a:lnSpc>
-              <a:spcBef>
-                <a:spcPts val="0"/>
-              </a:spcBef>
-              <a:spcAft>
-                <a:spcPts val="0"/>
-              </a:spcAft>
-              <a:buClr>
-                <a:srgbClr val="000000"/>
-              </a:buClr>
-              <a:buSzPts val="1600"/>
-              <a:buFont typeface="Arial"/>
-              <a:buNone/>
-            </a:pPr>
-            <a:r>
-              <a:rPr lang="en-US" sz="4800" dirty="0">
-                <a:solidFill>
-                  <a:schemeClr val="lt1"/>
-                </a:solidFill>
-              </a:rPr>
-              <a:t>Philip Haney</a:t>
-            </a:r>
-            <a:endParaRPr sz="3200" b="0" i="0" u="none" strike="noStrike" cap="none" dirty="0">
-              <a:solidFill>
-                <a:srgbClr val="000000"/>
-              </a:solidFill>
-              <a:latin typeface="Arial"/>
-              <a:ea typeface="Arial"/>
-              <a:cs typeface="Arial"/>
-              <a:sym typeface="Arial"/>
-            </a:endParaRPr>
-          </a:p>
-        </p:txBody>
-      </p:sp>
-      <p:sp>
-        <p:nvSpPr>
-          <p:cNvPr id="8" name="Google Shape;170;p31">
-            <a:extLst>
-              <a:ext uri="{FF2B5EF4-FFF2-40B4-BE49-F238E27FC236}">
-                <a16:creationId xmlns:a16="http://schemas.microsoft.com/office/drawing/2014/main" id="{D328ABDE-E232-3EB7-C3F2-B4BB7B64262F}"/>
-              </a:ext>
-            </a:extLst>
-          </p:cNvPr>
-          <p:cNvSpPr/>
-          <p:nvPr/>
-        </p:nvSpPr>
-        <p:spPr>
-          <a:xfrm>
-            <a:off x="7526107" y="5681420"/>
-            <a:ext cx="4550222" cy="548230"/>
-          </a:xfrm>
-          <a:prstGeom prst="rect">
-            <a:avLst/>
-          </a:prstGeom>
-          <a:solidFill>
-            <a:srgbClr val="C00000"/>
-          </a:solidFill>
-          <a:ln>
-            <a:noFill/>
-          </a:ln>
-        </p:spPr>
-        <p:txBody>
-          <a:bodyPr spcFirstLastPara="1" wrap="square" lIns="91425" tIns="45700" rIns="91425" bIns="45700" anchor="ctr" anchorCtr="0">
-            <a:noAutofit/>
-          </a:bodyPr>
-          <a:lstStyle/>
-          <a:p>
-            <a:pPr marL="0" marR="0" lvl="0" indent="0" algn="ctr" rtl="0">
-              <a:lnSpc>
-                <a:spcPct val="100000"/>
-              </a:lnSpc>
-              <a:spcBef>
-                <a:spcPts val="0"/>
-              </a:spcBef>
-              <a:spcAft>
-                <a:spcPts val="0"/>
-              </a:spcAft>
-              <a:buClr>
-                <a:srgbClr val="000000"/>
-              </a:buClr>
-              <a:buSzPts val="1600"/>
-              <a:buFont typeface="Arial"/>
-              <a:buNone/>
-            </a:pPr>
-            <a:r>
-              <a:rPr lang="en-US" sz="3600" dirty="0">
-                <a:solidFill>
-                  <a:schemeClr val="lt1"/>
-                </a:solidFill>
-              </a:rPr>
-              <a:t>Dead at Age 66</a:t>
-            </a:r>
-            <a:endParaRPr sz="2000" b="0" i="0" u="none" strike="noStrike" cap="none" dirty="0">
-              <a:solidFill>
-                <a:srgbClr val="000000"/>
-              </a:solidFill>
-              <a:latin typeface="Arial"/>
-              <a:ea typeface="Arial"/>
-              <a:cs typeface="Arial"/>
-              <a:sym typeface="Arial"/>
-            </a:endParaRPr>
-          </a:p>
-        </p:txBody>
-      </p:sp>
-      <p:sp>
-        <p:nvSpPr>
-          <p:cNvPr id="10" name="TextBox 9">
-            <a:extLst>
-              <a:ext uri="{FF2B5EF4-FFF2-40B4-BE49-F238E27FC236}">
-                <a16:creationId xmlns:a16="http://schemas.microsoft.com/office/drawing/2014/main" id="{5FA0D8B2-6B55-D3DC-BCBB-6FEAD86B9E72}"/>
-              </a:ext>
-            </a:extLst>
-          </p:cNvPr>
-          <p:cNvSpPr txBox="1"/>
-          <p:nvPr/>
-        </p:nvSpPr>
-        <p:spPr>
-          <a:xfrm>
-            <a:off x="312431" y="2175372"/>
-            <a:ext cx="6987941" cy="3046988"/>
-          </a:xfrm>
-          <a:prstGeom prst="rect">
-            <a:avLst/>
-          </a:prstGeom>
-          <a:solidFill>
-            <a:schemeClr val="bg1">
-              <a:alpha val="84400"/>
-            </a:schemeClr>
-          </a:solidFill>
-        </p:spPr>
-        <p:txBody>
-          <a:bodyPr wrap="square" rtlCol="0">
-            <a:spAutoFit/>
-          </a:bodyPr>
-          <a:lstStyle/>
-          <a:p>
-            <a:pPr marL="285750" indent="-285750">
-              <a:spcBef>
-                <a:spcPts val="1200"/>
-              </a:spcBef>
-              <a:buFont typeface="Arial" panose="020B0604020202020204" pitchFamily="34" charset="0"/>
-              <a:buChar char="•"/>
-            </a:pPr>
-            <a:r>
-              <a:t>DHS founding member and terrorism whistleblower — found SHOT DEAD in a California park-and-ride lot at age 66.</a:t>
-            </a:r>
-          </a:p>
-          <a:p>
-            <a:pPr marL="285750" indent="-285750">
-              <a:spcBef>
-                <a:spcPts val="1200"/>
-              </a:spcBef>
-              <a:buFont typeface="Arial" panose="020B0604020202020204" pitchFamily="34" charset="0"/>
-              <a:buChar char="•"/>
-            </a:pPr>
-            <a:r>
-              <a:t>Alleged the Obama administration ordered the DELETION of intelligence records that could have PREVENTED the San Bernardino attack.</a:t>
-            </a:r>
-          </a:p>
-          <a:p>
-            <a:pPr marL="285750" indent="-285750">
-              <a:spcBef>
-                <a:spcPts val="1200"/>
-              </a:spcBef>
-              <a:buFont typeface="Arial" panose="020B0604020202020204" pitchFamily="34" charset="0"/>
-              <a:buChar char="•"/>
-            </a:pPr>
-            <a:r>
-              <a:t>His family "SERIOUSLY DOUBTS" the suicide ruling. Friends say the devout Christian explicitly said he would NEVER take his own life.</a:t>
-            </a:r>
-          </a:p>
-          <a:p>
-            <a:pPr marL="285750" indent="-285750">
-              <a:spcBef>
-                <a:spcPts val="1200"/>
-              </a:spcBef>
-              <a:buFont typeface="Arial" panose="020B0604020202020204" pitchFamily="34" charset="0"/>
-              <a:buChar char="•"/>
-            </a:pPr>
-            <a:r>
-              <a:t>He was ENGAGED to be married and reportedly preparing to reveal ADDITIONAL classified information at the time of his death.</a:t>
-            </a:r>
-          </a:p>
-          <a:p>
-            <a:pPr marL="285750" indent="-285750">
-              <a:spcBef>
-                <a:spcPts val="1200"/>
-              </a:spcBef>
-              <a:buFont typeface="Arial" panose="020B0604020202020204" pitchFamily="34" charset="0"/>
-              <a:buChar char="•"/>
-            </a:pPr>
-            <a:r>
-              <a:t>Ruled suicide after a TWO-YEAR investigation — but investigators found a note with passwords, not a suicide note.</a:t>
-            </a:r>
-          </a:p>
-        </p:txBody>
-      </p:sp>
       <p:pic>
         <p:nvPicPr>
-          <p:cNvPr id="16" name="Picture 15" descr="Philip_Haney.jpg"/>
+          <p:cNvPr id="16" name="Picture 15" descr="Ahmad_Shah_Massoud.jpg"/>
           <p:cNvPicPr>
             <a:picLocks noChangeAspect="1"/>
           </p:cNvPicPr>
@@ -6334,15 +5881,475 @@
         </p:blipFill>
         <p:spPr>
           <a:xfrm>
-            <a:off x="8497027" y="1100088"/>
-            <a:ext cx="2287912" cy="3884876"/>
+            <a:off x="8838300" y="1070199"/>
+            <a:ext cx="3107900" cy="3884876"/>
           </a:xfrm>
           <a:prstGeom prst="rect">
             <a:avLst/>
           </a:prstGeom>
         </p:spPr>
       </p:pic>
+      <p:sp>
+        <p:nvSpPr>
+          <p:cNvPr id="15" name="TextBox 14">
+            <a:extLst>
+              <a:ext uri="{FF2B5EF4-FFF2-40B4-BE49-F238E27FC236}">
+                <a16:creationId xmlns:a16="http://schemas.microsoft.com/office/drawing/2014/main" id="{E478240E-251B-5BA6-3C45-7E6620400769}"/>
+              </a:ext>
+            </a:extLst>
+          </p:cNvPr>
+          <p:cNvSpPr txBox="1"/>
+          <p:nvPr/>
+        </p:nvSpPr>
+        <p:spPr>
+          <a:xfrm>
+            <a:off x="312431" y="1288262"/>
+            <a:ext cx="7651005" cy="584775"/>
+          </a:xfrm>
+          <a:prstGeom prst="rect">
+            <a:avLst/>
+          </a:prstGeom>
+          <a:solidFill>
+            <a:schemeClr val="bg1">
+              <a:alpha val="84400"/>
+            </a:schemeClr>
+          </a:solidFill>
+        </p:spPr>
+        <p:txBody>
+          <a:bodyPr wrap="square" rtlCol="0">
+            <a:spAutoFit/>
+          </a:bodyPr>
+          <a:lstStyle/>
+          <a:p>
+            <a:r>
+              <a:rPr lang="en-US" sz="3200" b="1" dirty="0">
+                <a:solidFill>
+                  <a:schemeClr val="accent5"/>
+                </a:solidFill>
+              </a:rPr>
+              <a:t>Why / How they Ahmad Shah Massoud:</a:t>
+            </a:r>
+          </a:p>
+        </p:txBody>
+      </p:sp>
+      <p:sp>
+        <p:nvSpPr>
+          <p:cNvPr id="3" name="Google Shape;170;p31">
+            <a:extLst>
+              <a:ext uri="{FF2B5EF4-FFF2-40B4-BE49-F238E27FC236}">
+                <a16:creationId xmlns:a16="http://schemas.microsoft.com/office/drawing/2014/main" id="{A4695FE5-0AA5-AB05-98B1-B5B8E3FA8CBE}"/>
+              </a:ext>
+            </a:extLst>
+          </p:cNvPr>
+          <p:cNvSpPr/>
+          <p:nvPr/>
+        </p:nvSpPr>
+        <p:spPr>
+          <a:xfrm>
+            <a:off x="191731" y="5732890"/>
+            <a:ext cx="3431270" cy="496760"/>
+          </a:xfrm>
+          <a:prstGeom prst="rect">
+            <a:avLst/>
+          </a:prstGeom>
+          <a:solidFill>
+            <a:schemeClr val="accent5"/>
+          </a:solidFill>
+          <a:ln>
+            <a:noFill/>
+          </a:ln>
+        </p:spPr>
+        <p:txBody>
+          <a:bodyPr spcFirstLastPara="1" wrap="square" lIns="91425" tIns="45700" rIns="91425" bIns="45700" anchor="ctr" anchorCtr="0">
+            <a:noAutofit/>
+          </a:bodyPr>
+          <a:lstStyle/>
+          <a:p>
+            <a:pPr marL="0" marR="0" lvl="0" indent="0" algn="ctr" rtl="0">
+              <a:lnSpc>
+                <a:spcPct val="100000"/>
+              </a:lnSpc>
+              <a:spcBef>
+                <a:spcPts val="0"/>
+              </a:spcBef>
+              <a:spcAft>
+                <a:spcPts val="0"/>
+              </a:spcAft>
+              <a:buClr>
+                <a:srgbClr val="000000"/>
+              </a:buClr>
+              <a:buSzPts val="1600"/>
+              <a:buFont typeface="Arial"/>
+              <a:buNone/>
+            </a:pPr>
+            <a:r>
+              <a:rPr lang="en-US" sz="3600" dirty="0">
+                <a:solidFill>
+                  <a:schemeClr val="lt1"/>
+                </a:solidFill>
+              </a:rPr>
+              <a:t>Read List Here:</a:t>
+            </a:r>
+            <a:endParaRPr sz="2000" b="0" i="0" u="none" strike="noStrike" cap="none" dirty="0">
+              <a:solidFill>
+                <a:srgbClr val="000000"/>
+              </a:solidFill>
+              <a:latin typeface="Arial"/>
+              <a:ea typeface="Arial"/>
+              <a:cs typeface="Arial"/>
+              <a:sym typeface="Arial"/>
+            </a:endParaRPr>
+          </a:p>
+        </p:txBody>
+      </p:sp>
+      <p:sp>
+        <p:nvSpPr>
+          <p:cNvPr id="5" name="Google Shape;170;p31">
+            <a:extLst>
+              <a:ext uri="{FF2B5EF4-FFF2-40B4-BE49-F238E27FC236}">
+                <a16:creationId xmlns:a16="http://schemas.microsoft.com/office/drawing/2014/main" id="{98132413-6ED2-8B36-74B6-3C503B1A4634}"/>
+              </a:ext>
+            </a:extLst>
+          </p:cNvPr>
+          <p:cNvSpPr/>
+          <p:nvPr/>
+        </p:nvSpPr>
+        <p:spPr>
+          <a:xfrm>
+            <a:off x="0" y="-31518"/>
+            <a:ext cx="12192000" cy="1131606"/>
+          </a:xfrm>
+          <a:prstGeom prst="rect">
+            <a:avLst/>
+          </a:prstGeom>
+          <a:solidFill>
+            <a:srgbClr val="C00000"/>
+          </a:solidFill>
+          <a:ln>
+            <a:noFill/>
+          </a:ln>
+        </p:spPr>
+        <p:txBody>
+          <a:bodyPr spcFirstLastPara="1" wrap="square" lIns="91425" tIns="45700" rIns="91425" bIns="45700" anchor="ctr" anchorCtr="0">
+            <a:noAutofit/>
+          </a:bodyPr>
+          <a:lstStyle/>
+          <a:p>
+            <a:pPr marL="0" marR="0" lvl="0" indent="0" rtl="0">
+              <a:lnSpc>
+                <a:spcPct val="100000"/>
+              </a:lnSpc>
+              <a:spcBef>
+                <a:spcPts val="0"/>
+              </a:spcBef>
+              <a:spcAft>
+                <a:spcPts val="0"/>
+              </a:spcAft>
+              <a:buClr>
+                <a:srgbClr val="000000"/>
+              </a:buClr>
+              <a:buSzPts val="1600"/>
+              <a:buFont typeface="Arial"/>
+              <a:buNone/>
+            </a:pPr>
+            <a:r>
+              <a:rPr lang="en-US" sz="4800" dirty="0">
+                <a:solidFill>
+                  <a:schemeClr val="lt1"/>
+                </a:solidFill>
+              </a:rPr>
+              <a:t> 150+ Murdered: by Intelligence Services</a:t>
+            </a:r>
+            <a:endParaRPr sz="3200" b="0" i="0" u="none" strike="noStrike" cap="none" dirty="0">
+              <a:solidFill>
+                <a:srgbClr val="000000"/>
+              </a:solidFill>
+              <a:latin typeface="Arial"/>
+              <a:ea typeface="Arial"/>
+              <a:cs typeface="Arial"/>
+              <a:sym typeface="Arial"/>
+            </a:endParaRPr>
+          </a:p>
+        </p:txBody>
+      </p:sp>
+      <p:sp>
+        <p:nvSpPr>
+          <p:cNvPr id="4" name="TextBox 3">
+            <a:extLst>
+              <a:ext uri="{FF2B5EF4-FFF2-40B4-BE49-F238E27FC236}">
+                <a16:creationId xmlns:a16="http://schemas.microsoft.com/office/drawing/2014/main" id="{50D7621F-9D36-7894-7117-9F831EF5EFA6}"/>
+              </a:ext>
+            </a:extLst>
+          </p:cNvPr>
+          <p:cNvSpPr txBox="1"/>
+          <p:nvPr/>
+        </p:nvSpPr>
+        <p:spPr>
+          <a:xfrm>
+            <a:off x="107300" y="6229650"/>
+            <a:ext cx="11685989" cy="461665"/>
+          </a:xfrm>
+          <a:prstGeom prst="rect">
+            <a:avLst/>
+          </a:prstGeom>
+          <a:solidFill>
+            <a:schemeClr val="bg1">
+              <a:alpha val="84400"/>
+            </a:schemeClr>
+          </a:solidFill>
+        </p:spPr>
+        <p:txBody>
+          <a:bodyPr wrap="square" rtlCol="0">
+            <a:spAutoFit/>
+          </a:bodyPr>
+          <a:lstStyle/>
+          <a:p>
+            <a:r>
+              <a:rPr lang="en-US" sz="2400" dirty="0"/>
+              <a:t>https://intelligencemurders.com/intel</a:t>
+            </a:r>
+          </a:p>
+        </p:txBody>
+      </p:sp>
+      <p:sp>
+        <p:nvSpPr>
+          <p:cNvPr id="7" name="Google Shape;170;p31">
+            <a:extLst>
+              <a:ext uri="{FF2B5EF4-FFF2-40B4-BE49-F238E27FC236}">
+                <a16:creationId xmlns:a16="http://schemas.microsoft.com/office/drawing/2014/main" id="{4B582382-76AA-B49E-C611-39A37CE591B9}"/>
+              </a:ext>
+            </a:extLst>
+          </p:cNvPr>
+          <p:cNvSpPr/>
+          <p:nvPr/>
+        </p:nvSpPr>
+        <p:spPr>
+          <a:xfrm>
+            <a:off x="7506336" y="4925186"/>
+            <a:ext cx="4550222" cy="1430228"/>
+          </a:xfrm>
+          <a:prstGeom prst="rect">
+            <a:avLst/>
+          </a:prstGeom>
+          <a:solidFill>
+            <a:srgbClr val="C00000"/>
+          </a:solidFill>
+          <a:ln>
+            <a:noFill/>
+          </a:ln>
+        </p:spPr>
+        <p:txBody>
+          <a:bodyPr spcFirstLastPara="1" wrap="square" lIns="91425" tIns="45700" rIns="91425" bIns="45700" anchor="ctr" anchorCtr="0">
+            <a:noAutofit/>
+          </a:bodyPr>
+          <a:lstStyle/>
+          <a:p>
+            <a:pPr marL="0" marR="0" lvl="0" indent="0" algn="ctr" rtl="0">
+              <a:lnSpc>
+                <a:spcPct val="100000"/>
+              </a:lnSpc>
+              <a:spcBef>
+                <a:spcPts val="0"/>
+              </a:spcBef>
+              <a:spcAft>
+                <a:spcPts val="0"/>
+              </a:spcAft>
+              <a:buClr>
+                <a:srgbClr val="000000"/>
+              </a:buClr>
+              <a:buSzPts val="1600"/>
+              <a:buFont typeface="Arial"/>
+              <a:buNone/>
+            </a:pPr>
+            <a:r>
+              <a:rPr lang="en-US" sz="4800" dirty="0">
+                <a:solidFill>
+                  <a:schemeClr val="lt1"/>
+                </a:solidFill>
+              </a:rPr>
+              <a:t>Ahmad Shah Massoud</a:t>
+            </a:r>
+            <a:endParaRPr sz="3200" b="0" i="0" u="none" strike="noStrike" cap="none" dirty="0">
+              <a:solidFill>
+                <a:srgbClr val="000000"/>
+              </a:solidFill>
+              <a:latin typeface="Arial"/>
+              <a:ea typeface="Arial"/>
+              <a:cs typeface="Arial"/>
+              <a:sym typeface="Arial"/>
+            </a:endParaRPr>
+          </a:p>
+        </p:txBody>
+      </p:sp>
+      <p:sp>
+        <p:nvSpPr>
+          <p:cNvPr id="8" name="Google Shape;170;p31">
+            <a:extLst>
+              <a:ext uri="{FF2B5EF4-FFF2-40B4-BE49-F238E27FC236}">
+                <a16:creationId xmlns:a16="http://schemas.microsoft.com/office/drawing/2014/main" id="{D328ABDE-E232-3EB7-C3F2-B4BB7B64262F}"/>
+              </a:ext>
+            </a:extLst>
+          </p:cNvPr>
+          <p:cNvSpPr/>
+          <p:nvPr/>
+        </p:nvSpPr>
+        <p:spPr>
+          <a:xfrm>
+            <a:off x="7534478" y="6355414"/>
+            <a:ext cx="4550222" cy="548230"/>
+          </a:xfrm>
+          <a:prstGeom prst="rect">
+            <a:avLst/>
+          </a:prstGeom>
+          <a:solidFill>
+            <a:srgbClr val="C00000"/>
+          </a:solidFill>
+          <a:ln>
+            <a:noFill/>
+          </a:ln>
+        </p:spPr>
+        <p:txBody>
+          <a:bodyPr spcFirstLastPara="1" wrap="square" lIns="91425" tIns="45700" rIns="91425" bIns="45700" anchor="ctr" anchorCtr="0">
+            <a:noAutofit/>
+          </a:bodyPr>
+          <a:lstStyle/>
+          <a:p>
+            <a:pPr marL="0" marR="0" lvl="0" indent="0" algn="ctr" rtl="0">
+              <a:lnSpc>
+                <a:spcPct val="100000"/>
+              </a:lnSpc>
+              <a:spcBef>
+                <a:spcPts val="0"/>
+              </a:spcBef>
+              <a:spcAft>
+                <a:spcPts val="0"/>
+              </a:spcAft>
+              <a:buClr>
+                <a:srgbClr val="000000"/>
+              </a:buClr>
+              <a:buSzPts val="1600"/>
+              <a:buFont typeface="Arial"/>
+              <a:buNone/>
+            </a:pPr>
+            <a:r>
+              <a:rPr lang="en-US" sz="3600" dirty="0">
+                <a:solidFill>
+                  <a:schemeClr val="lt1"/>
+                </a:solidFill>
+              </a:rPr>
+              <a:t>Dead at Age 48</a:t>
+            </a:r>
+            <a:endParaRPr sz="2000" b="0" i="0" u="none" strike="noStrike" cap="none" dirty="0">
+              <a:solidFill>
+                <a:srgbClr val="000000"/>
+              </a:solidFill>
+              <a:latin typeface="Arial"/>
+              <a:ea typeface="Arial"/>
+              <a:cs typeface="Arial"/>
+              <a:sym typeface="Arial"/>
+            </a:endParaRPr>
+          </a:p>
+        </p:txBody>
+      </p:sp>
+      <p:sp>
+        <p:nvSpPr>
+          <p:cNvPr id="10" name="TextBox 9">
+            <a:extLst>
+              <a:ext uri="{FF2B5EF4-FFF2-40B4-BE49-F238E27FC236}">
+                <a16:creationId xmlns:a16="http://schemas.microsoft.com/office/drawing/2014/main" id="{5FA0D8B2-6B55-D3DC-BCBB-6FEAD86B9E72}"/>
+              </a:ext>
+            </a:extLst>
+          </p:cNvPr>
+          <p:cNvSpPr txBox="1"/>
+          <p:nvPr/>
+        </p:nvSpPr>
+        <p:spPr>
+          <a:xfrm>
+            <a:off x="312431" y="2175372"/>
+            <a:ext cx="6987941" cy="3046988"/>
+          </a:xfrm>
+          <a:prstGeom prst="rect">
+            <a:avLst/>
+          </a:prstGeom>
+          <a:solidFill>
+            <a:schemeClr val="bg1">
+              <a:alpha val="84400"/>
+            </a:schemeClr>
+          </a:solidFill>
+        </p:spPr>
+        <p:txBody>
+          <a:bodyPr wrap="square" rtlCol="0">
+            <a:spAutoFit/>
+          </a:bodyPr>
+          <a:lstStyle/>
+          <a:p>
+            <a:pPr marL="285750" indent="-285750">
+              <a:spcBef>
+                <a:spcPts val="1200"/>
+              </a:spcBef>
+              <a:buFont typeface="Arial" panose="020B0604020202020204" pitchFamily="34" charset="0"/>
+              <a:buChar char="•"/>
+            </a:pPr>
+            <a:r>
+              <a:t>Assassinated EXACTLY 2 DAYS before 9/11. Al-Qaeda hid a BOMB inside a stolen TV camera.</a:t>
+            </a:r>
+          </a:p>
+          <a:p>
+            <a:pPr marL="285750" indent="-285750">
+              <a:spcBef>
+                <a:spcPts val="1200"/>
+              </a:spcBef>
+              <a:buFont typeface="Arial" panose="020B0604020202020204" pitchFamily="34" charset="0"/>
+              <a:buChar char="•"/>
+            </a:pPr>
+            <a:r>
+              <a:t>Known as the "LION of Panjshir" — the most feared guerrilla commander the Soviets ever faced.</a:t>
+            </a:r>
+          </a:p>
+          <a:p>
+            <a:pPr marL="285750" indent="-285750">
+              <a:spcBef>
+                <a:spcPts val="1200"/>
+              </a:spcBef>
+              <a:buFont typeface="Arial" panose="020B0604020202020204" pitchFamily="34" charset="0"/>
+              <a:buChar char="•"/>
+            </a:pPr>
+            <a:r>
+              <a:t>WARNED the European Parliament months earlier that a MASSIVE attack on America was coming.</a:t>
+            </a:r>
+          </a:p>
+          <a:p>
+            <a:pPr marL="285750" indent="-285750">
+              <a:spcBef>
+                <a:spcPts val="1200"/>
+              </a:spcBef>
+              <a:buFont typeface="Arial" panose="020B0604020202020204" pitchFamily="34" charset="0"/>
+              <a:buChar char="•"/>
+            </a:pPr>
+            <a:r>
+              <a:t>Killed by fake journalists who asked: "What will you do with Osama bin Laden?" Then DETONATED the bomb.</a:t>
+            </a:r>
+          </a:p>
+          <a:p>
+            <a:pPr marL="285750" indent="-285750">
+              <a:spcBef>
+                <a:spcPts val="1200"/>
+              </a:spcBef>
+              <a:buFont typeface="Arial" panose="020B0604020202020204" pitchFamily="34" charset="0"/>
+              <a:buChar char="•"/>
+            </a:pPr>
+            <a:r>
+              <a:t>His death removed the ONE Afghan leader who could have cooperated with the US response to 9/11.</a:t>
+            </a:r>
+          </a:p>
+        </p:txBody>
+      </p:sp>
     </p:spTree>
+    <p:extLst>
+      <p:ext uri="{BB962C8B-B14F-4D97-AF65-F5344CB8AC3E}">
+        <p14:creationId xmlns:p14="http://schemas.microsoft.com/office/powerpoint/2010/main" val="3475945285"/>
+      </p:ext>
+    </p:extLst>
   </p:cSld>
   <p:clrMapOvr>
     <a:masterClrMapping/>
@@ -6405,7 +6412,7 @@
                   <a:schemeClr val="accent5"/>
                 </a:solidFill>
               </a:rPr>
-              <a:t>Why / How they Philip Leonard:</a:t>
+              <a:t>Why / How they Vitaly Churkin:</a:t>
             </a:r>
           </a:p>
         </p:txBody>
@@ -6584,7 +6591,7 @@
           <a:p>
             <a:r>
               <a:rPr lang="en-US" sz="2400" dirty="0"/>
-              <a:t>https://intelligencemurders.com/intelligence-service-murders</a:t>
+              <a:t>https://intelligencemurders.com/intel</a:t>
             </a:r>
           </a:p>
         </p:txBody>
@@ -6645,7 +6652,7 @@
                   <a:schemeClr val="lt1"/>
                 </a:solidFill>
               </a:rPr>
-              <a:t>Philip Leonard</a:t>
+              <a:t>Vitaly Churkin</a:t>
             </a:r>
             <a:endParaRPr sz="3200" b="0" i="0" u="none" strike="noStrike" cap="none" dirty="0">
               <a:solidFill>
@@ -6715,7 +6722,7 @@
                   <a:schemeClr val="lt1"/>
                 </a:solidFill>
               </a:rPr>
-              <a:t>Dead at Age 44</a:t>
+              <a:t>Dead at Age 64</a:t>
             </a:r>
             <a:endParaRPr sz="2000" b="0" i="0" u="none" strike="noStrike" cap="none" dirty="0">
               <a:solidFill>
@@ -6769,7 +6776,7 @@
               <a:buChar char="•"/>
             </a:pPr>
             <a:r>
-              <a:t>Los Alamos nuclear weapons lab HIGH-EXPLOSIVES chemist — killed at age 44 in a head-on collision on the road TO the lab.</a:t>
+              <a:t>Russia's UN Ambassador died SUDDENLY in New York, one day before his 65th birthday. Autopsy results SUPPRESSED.</a:t>
             </a:r>
           </a:p>
           <a:p>
@@ -6781,7 +6788,7 @@
               <a:buChar char="•"/>
             </a:pPr>
             <a:r>
-              <a:t>Another driver crossed the DOUBLE YELLOW LINE into his lane. No public explanation for WHY has ever been released.</a:t>
+              <a:t>The NYC Medical Examiner said cause of death needed "further study" — then the US State Department BLOCKED the release.</a:t>
             </a:r>
           </a:p>
           <a:p>
@@ -6793,7 +6800,7 @@
               <a:buChar char="•"/>
             </a:pPr>
             <a:r>
-              <a:t>His specialty was the most CLASSIFIED research at LANL — explosive compounds used in nuclear WARHEAD design.</a:t>
+              <a:t>Russia also opposed disclosure, saying the results could "HURT HIS REPUTATION." A cryptic comment that fuels speculation.</a:t>
             </a:r>
           </a:p>
           <a:p>
@@ -6805,7 +6812,7 @@
               <a:buChar char="•"/>
             </a:pPr>
             <a:r>
-              <a:t>His death came at the START of a cluster of defense scientist deaths in the New Mexico corridor throughout 2024-2025.</a:t>
+              <a:t>His death came during a cluster of at least SIX Russian diplomat deaths in a four-month period.</a:t>
             </a:r>
           </a:p>
           <a:p>
@@ -6817,14 +6824,14 @@
               <a:buChar char="•"/>
             </a:pPr>
             <a:r>
-              <a:t>A SECOND defense scientist in the same New Mexico corridor was MURDERED just weeks later — Christopher Fallen of the Air Force Research Lab.</a:t>
+              <a:t>Two governments — the US AND Russia — actively conspired to keep the public from knowing HOW he died.</a:t>
             </a:r>
           </a:p>
         </p:txBody>
       </p:sp>
       <p:pic>
         <p:nvPicPr>
-          <p:cNvPr id="16" name="Picture 15" descr="Philip_Leonard.jpg"/>
+          <p:cNvPr id="16" name="Picture 15" descr="Vitaly_Churkin.jpg"/>
           <p:cNvPicPr>
             <a:picLocks noChangeAspect="1"/>
           </p:cNvPicPr>
@@ -6838,8 +6845,8 @@
         </p:blipFill>
         <p:spPr>
           <a:xfrm>
-            <a:off x="8267542" y="1100088"/>
-            <a:ext cx="2746882" cy="3884876"/>
+            <a:off x="8368686" y="1100088"/>
+            <a:ext cx="2544593" cy="3884876"/>
           </a:xfrm>
           <a:prstGeom prst="rect">
             <a:avLst/>
@@ -6909,7 +6916,7 @@
                   <a:schemeClr val="accent5"/>
                 </a:solidFill>
               </a:rPr>
-              <a:t>Why / How they Rafael Trujillo:</a:t>
+              <a:t>Why / How they Zelimkhan Yandarbiyev:</a:t>
             </a:r>
           </a:p>
         </p:txBody>
@@ -7088,1015 +7095,7 @@
           <a:p>
             <a:r>
               <a:rPr lang="en-US" sz="2400" dirty="0"/>
-              <a:t>https://intelligencemurders.com/intelligence-service-murders</a:t>
-            </a:r>
-          </a:p>
-        </p:txBody>
-      </p:sp>
-      <p:sp>
-        <p:nvSpPr>
-          <p:cNvPr id="7" name="Google Shape;170;p31">
-            <a:extLst>
-              <a:ext uri="{FF2B5EF4-FFF2-40B4-BE49-F238E27FC236}">
-                <a16:creationId xmlns:a16="http://schemas.microsoft.com/office/drawing/2014/main" id="{4B582382-76AA-B49E-C611-39A37CE591B9}"/>
-              </a:ext>
-            </a:extLst>
-          </p:cNvPr>
-          <p:cNvSpPr/>
-          <p:nvPr/>
-        </p:nvSpPr>
-        <p:spPr>
-          <a:xfrm>
-            <a:off x="7506336" y="4925186"/>
-            <a:ext cx="4550222" cy="869505"/>
-          </a:xfrm>
-          <a:prstGeom prst="rect">
-            <a:avLst/>
-          </a:prstGeom>
-          <a:solidFill>
-            <a:srgbClr val="C00000"/>
-          </a:solidFill>
-          <a:ln>
-            <a:noFill/>
-          </a:ln>
-        </p:spPr>
-        <p:txBody>
-          <a:bodyPr spcFirstLastPara="1" wrap="square" lIns="91425" tIns="45700" rIns="91425" bIns="45700" anchor="ctr" anchorCtr="0">
-            <a:noAutofit/>
-          </a:bodyPr>
-          <a:lstStyle/>
-          <a:p>
-            <a:pPr marL="0" marR="0" lvl="0" indent="0" algn="ctr" rtl="0">
-              <a:lnSpc>
-                <a:spcPct val="100000"/>
-              </a:lnSpc>
-              <a:spcBef>
-                <a:spcPts val="0"/>
-              </a:spcBef>
-              <a:spcAft>
-                <a:spcPts val="0"/>
-              </a:spcAft>
-              <a:buClr>
-                <a:srgbClr val="000000"/>
-              </a:buClr>
-              <a:buSzPts val="1600"/>
-              <a:buFont typeface="Arial"/>
-              <a:buNone/>
-            </a:pPr>
-            <a:r>
-              <a:rPr lang="en-US" sz="4800" dirty="0">
-                <a:solidFill>
-                  <a:schemeClr val="lt1"/>
-                </a:solidFill>
-              </a:rPr>
-              <a:t>Rafael Trujillo</a:t>
-            </a:r>
-            <a:endParaRPr sz="3200" b="0" i="0" u="none" strike="noStrike" cap="none" dirty="0">
-              <a:solidFill>
-                <a:srgbClr val="000000"/>
-              </a:solidFill>
-              <a:latin typeface="Arial"/>
-              <a:ea typeface="Arial"/>
-              <a:cs typeface="Arial"/>
-              <a:sym typeface="Arial"/>
-            </a:endParaRPr>
-          </a:p>
-        </p:txBody>
-      </p:sp>
-      <p:sp>
-        <p:nvSpPr>
-          <p:cNvPr id="8" name="Google Shape;170;p31">
-            <a:extLst>
-              <a:ext uri="{FF2B5EF4-FFF2-40B4-BE49-F238E27FC236}">
-                <a16:creationId xmlns:a16="http://schemas.microsoft.com/office/drawing/2014/main" id="{D328ABDE-E232-3EB7-C3F2-B4BB7B64262F}"/>
-              </a:ext>
-            </a:extLst>
-          </p:cNvPr>
-          <p:cNvSpPr/>
-          <p:nvPr/>
-        </p:nvSpPr>
-        <p:spPr>
-          <a:xfrm>
-            <a:off x="7526107" y="5681420"/>
-            <a:ext cx="4550222" cy="548230"/>
-          </a:xfrm>
-          <a:prstGeom prst="rect">
-            <a:avLst/>
-          </a:prstGeom>
-          <a:solidFill>
-            <a:srgbClr val="C00000"/>
-          </a:solidFill>
-          <a:ln>
-            <a:noFill/>
-          </a:ln>
-        </p:spPr>
-        <p:txBody>
-          <a:bodyPr spcFirstLastPara="1" wrap="square" lIns="91425" tIns="45700" rIns="91425" bIns="45700" anchor="ctr" anchorCtr="0">
-            <a:noAutofit/>
-          </a:bodyPr>
-          <a:lstStyle/>
-          <a:p>
-            <a:pPr marL="0" marR="0" lvl="0" indent="0" algn="ctr" rtl="0">
-              <a:lnSpc>
-                <a:spcPct val="100000"/>
-              </a:lnSpc>
-              <a:spcBef>
-                <a:spcPts val="0"/>
-              </a:spcBef>
-              <a:spcAft>
-                <a:spcPts val="0"/>
-              </a:spcAft>
-              <a:buClr>
-                <a:srgbClr val="000000"/>
-              </a:buClr>
-              <a:buSzPts val="1600"/>
-              <a:buFont typeface="Arial"/>
-              <a:buNone/>
-            </a:pPr>
-            <a:r>
-              <a:rPr lang="en-US" sz="3600" dirty="0">
-                <a:solidFill>
-                  <a:schemeClr val="lt1"/>
-                </a:solidFill>
-              </a:rPr>
-              <a:t>Dead at Age 69</a:t>
-            </a:r>
-            <a:endParaRPr sz="2000" b="0" i="0" u="none" strike="noStrike" cap="none" dirty="0">
-              <a:solidFill>
-                <a:srgbClr val="000000"/>
-              </a:solidFill>
-              <a:latin typeface="Arial"/>
-              <a:ea typeface="Arial"/>
-              <a:cs typeface="Arial"/>
-              <a:sym typeface="Arial"/>
-            </a:endParaRPr>
-          </a:p>
-        </p:txBody>
-      </p:sp>
-      <p:sp>
-        <p:nvSpPr>
-          <p:cNvPr id="10" name="TextBox 9">
-            <a:extLst>
-              <a:ext uri="{FF2B5EF4-FFF2-40B4-BE49-F238E27FC236}">
-                <a16:creationId xmlns:a16="http://schemas.microsoft.com/office/drawing/2014/main" id="{5FA0D8B2-6B55-D3DC-BCBB-6FEAD86B9E72}"/>
-              </a:ext>
-            </a:extLst>
-          </p:cNvPr>
-          <p:cNvSpPr txBox="1"/>
-          <p:nvPr/>
-        </p:nvSpPr>
-        <p:spPr>
-          <a:xfrm>
-            <a:off x="312431" y="2175372"/>
-            <a:ext cx="6987941" cy="3046988"/>
-          </a:xfrm>
-          <a:prstGeom prst="rect">
-            <a:avLst/>
-          </a:prstGeom>
-          <a:solidFill>
-            <a:schemeClr val="bg1">
-              <a:alpha val="84400"/>
-            </a:schemeClr>
-          </a:solidFill>
-        </p:spPr>
-        <p:txBody>
-          <a:bodyPr wrap="square" rtlCol="0">
-            <a:spAutoFit/>
-          </a:bodyPr>
-          <a:lstStyle/>
-          <a:p>
-            <a:pPr marL="285750" indent="-285750">
-              <a:spcBef>
-                <a:spcPts val="1200"/>
-              </a:spcBef>
-              <a:buFont typeface="Arial" panose="020B0604020202020204" pitchFamily="34" charset="0"/>
-              <a:buChar char="•"/>
-            </a:pPr>
-            <a:r>
-              <a:t>CIA SUPPLIED the weapons. Dominican dictator ambushed and machine-gunned in his car on a highway.</a:t>
-            </a:r>
-          </a:p>
-          <a:p>
-            <a:pPr marL="285750" indent="-285750">
-              <a:spcBef>
-                <a:spcPts val="1200"/>
-              </a:spcBef>
-              <a:buFont typeface="Arial" panose="020B0604020202020204" pitchFamily="34" charset="0"/>
-              <a:buChar char="•"/>
-            </a:pPr>
-            <a:r>
-              <a:t>Ruled for 31 YEARS. Murdered the Mirabal sisters. Ordered the Parsley Massacre killing up to 30,000 Haitians.</a:t>
-            </a:r>
-          </a:p>
-          <a:p>
-            <a:pPr marL="285750" indent="-285750">
-              <a:spcBef>
-                <a:spcPts val="1200"/>
-              </a:spcBef>
-              <a:buFont typeface="Arial" panose="020B0604020202020204" pitchFamily="34" charset="0"/>
-              <a:buChar char="•"/>
-            </a:pPr>
-            <a:r>
-              <a:t>CIA's internal report admitted "quite extensive Agency involvement" — then PUBLICLY claimed only a "faint connection."</a:t>
-            </a:r>
-          </a:p>
-          <a:p>
-            <a:pPr marL="285750" indent="-285750">
-              <a:spcBef>
-                <a:spcPts val="1200"/>
-              </a:spcBef>
-              <a:buFont typeface="Arial" panose="020B0604020202020204" pitchFamily="34" charset="0"/>
-              <a:buChar char="•"/>
-            </a:pPr>
-            <a:r>
-              <a:t>Kennedy sent a cable saying the US "cannot condone assassination" — TWO DAYS before the hit. Weapons already delivered.</a:t>
-            </a:r>
-          </a:p>
-          <a:p>
-            <a:pPr marL="285750" indent="-285750">
-              <a:spcBef>
-                <a:spcPts val="1200"/>
-              </a:spcBef>
-              <a:buFont typeface="Arial" panose="020B0604020202020204" pitchFamily="34" charset="0"/>
-              <a:buChar char="•"/>
-            </a:pPr>
-            <a:r>
-              <a:t>Church Committee confirmed this as ONE OF FIVE CIA assassination plots against foreign leaders.</a:t>
-            </a:r>
-          </a:p>
-        </p:txBody>
-      </p:sp>
-      <p:pic>
-        <p:nvPicPr>
-          <p:cNvPr id="16" name="Picture 15" descr="Rafael_Trujillo.jpg"/>
-          <p:cNvPicPr>
-            <a:picLocks noChangeAspect="1"/>
-          </p:cNvPicPr>
-          <p:nvPr/>
-        </p:nvPicPr>
-        <p:blipFill>
-          <a:blip r:embed="rId2"/>
-          <a:stretch>
-            <a:fillRect/>
-          </a:stretch>
-        </p:blipFill>
-        <p:spPr>
-          <a:xfrm>
-            <a:off x="8276420" y="1100088"/>
-            <a:ext cx="2729125" cy="3884876"/>
-          </a:xfrm>
-          <a:prstGeom prst="rect">
-            <a:avLst/>
-          </a:prstGeom>
-        </p:spPr>
-      </p:pic>
-    </p:spTree>
-  </p:cSld>
-  <p:clrMapOvr>
-    <a:masterClrMapping/>
-  </p:clrMapOvr>
-</p:sld>
-</file>
-
-<file path=ppt/slides/slide17.xml><?xml version="1.0" encoding="utf-8"?>
-<p:sld xmlns:a="http://schemas.openxmlformats.org/drawingml/2006/main" xmlns:r="http://schemas.openxmlformats.org/officeDocument/2006/relationships" xmlns:p="http://schemas.openxmlformats.org/presentationml/2006/main">
-  <p:cSld>
-    <p:spTree>
-      <p:nvGrpSpPr>
-        <p:cNvPr id="1" name=""/>
-        <p:cNvGrpSpPr/>
-        <p:nvPr/>
-      </p:nvGrpSpPr>
-      <p:grpSpPr>
-        <a:xfrm>
-          <a:off x="0" y="0"/>
-          <a:ext cx="0" cy="0"/>
-          <a:chOff x="0" y="0"/>
-          <a:chExt cx="0" cy="0"/>
-        </a:xfrm>
-      </p:grpSpPr>
-      <p:sp>
-        <p:nvSpPr>
-          <p:cNvPr id="15" name="TextBox 14">
-            <a:extLst>
-              <a:ext uri="{FF2B5EF4-FFF2-40B4-BE49-F238E27FC236}">
-                <a16:creationId xmlns:a16="http://schemas.microsoft.com/office/drawing/2014/main" id="{E478240E-251B-5BA6-3C45-7E6620400769}"/>
-              </a:ext>
-            </a:extLst>
-          </p:cNvPr>
-          <p:cNvSpPr txBox="1"/>
-          <p:nvPr/>
-        </p:nvSpPr>
-        <p:spPr>
-          <a:xfrm>
-            <a:off x="312432" y="1288262"/>
-            <a:ext cx="6494294" cy="584775"/>
-          </a:xfrm>
-          <a:prstGeom prst="rect">
-            <a:avLst/>
-          </a:prstGeom>
-          <a:solidFill>
-            <a:schemeClr val="bg1">
-              <a:alpha val="84400"/>
-            </a:schemeClr>
-          </a:solidFill>
-        </p:spPr>
-        <p:txBody>
-          <a:bodyPr wrap="square" rtlCol="0">
-            <a:spAutoFit/>
-          </a:bodyPr>
-          <a:lstStyle/>
-          <a:p>
-            <a:r>
-              <a:rPr lang="en-US" sz="3200" b="1" dirty="0">
-                <a:solidFill>
-                  <a:schemeClr val="accent5"/>
-                </a:solidFill>
-              </a:rPr>
-              <a:t>Why / How they Vitaly Churkin:</a:t>
-            </a:r>
-          </a:p>
-        </p:txBody>
-      </p:sp>
-      <p:sp>
-        <p:nvSpPr>
-          <p:cNvPr id="3" name="Google Shape;170;p31">
-            <a:extLst>
-              <a:ext uri="{FF2B5EF4-FFF2-40B4-BE49-F238E27FC236}">
-                <a16:creationId xmlns:a16="http://schemas.microsoft.com/office/drawing/2014/main" id="{A4695FE5-0AA5-AB05-98B1-B5B8E3FA8CBE}"/>
-              </a:ext>
-            </a:extLst>
-          </p:cNvPr>
-          <p:cNvSpPr/>
-          <p:nvPr/>
-        </p:nvSpPr>
-        <p:spPr>
-          <a:xfrm>
-            <a:off x="191731" y="5732890"/>
-            <a:ext cx="3431270" cy="496760"/>
-          </a:xfrm>
-          <a:prstGeom prst="rect">
-            <a:avLst/>
-          </a:prstGeom>
-          <a:solidFill>
-            <a:schemeClr val="accent5"/>
-          </a:solidFill>
-          <a:ln>
-            <a:noFill/>
-          </a:ln>
-        </p:spPr>
-        <p:txBody>
-          <a:bodyPr spcFirstLastPara="1" wrap="square" lIns="91425" tIns="45700" rIns="91425" bIns="45700" anchor="ctr" anchorCtr="0">
-            <a:noAutofit/>
-          </a:bodyPr>
-          <a:lstStyle/>
-          <a:p>
-            <a:pPr marL="0" marR="0" lvl="0" indent="0" algn="ctr" rtl="0">
-              <a:lnSpc>
-                <a:spcPct val="100000"/>
-              </a:lnSpc>
-              <a:spcBef>
-                <a:spcPts val="0"/>
-              </a:spcBef>
-              <a:spcAft>
-                <a:spcPts val="0"/>
-              </a:spcAft>
-              <a:buClr>
-                <a:srgbClr val="000000"/>
-              </a:buClr>
-              <a:buSzPts val="1600"/>
-              <a:buFont typeface="Arial"/>
-              <a:buNone/>
-            </a:pPr>
-            <a:r>
-              <a:rPr lang="en-US" sz="3600" dirty="0">
-                <a:solidFill>
-                  <a:schemeClr val="lt1"/>
-                </a:solidFill>
-              </a:rPr>
-              <a:t>Read List Here:</a:t>
-            </a:r>
-            <a:endParaRPr sz="2000" b="0" i="0" u="none" strike="noStrike" cap="none" dirty="0">
-              <a:solidFill>
-                <a:srgbClr val="000000"/>
-              </a:solidFill>
-              <a:latin typeface="Arial"/>
-              <a:ea typeface="Arial"/>
-              <a:cs typeface="Arial"/>
-              <a:sym typeface="Arial"/>
-            </a:endParaRPr>
-          </a:p>
-        </p:txBody>
-      </p:sp>
-      <p:sp>
-        <p:nvSpPr>
-          <p:cNvPr id="5" name="Google Shape;170;p31">
-            <a:extLst>
-              <a:ext uri="{FF2B5EF4-FFF2-40B4-BE49-F238E27FC236}">
-                <a16:creationId xmlns:a16="http://schemas.microsoft.com/office/drawing/2014/main" id="{98132413-6ED2-8B36-74B6-3C503B1A4634}"/>
-              </a:ext>
-            </a:extLst>
-          </p:cNvPr>
-          <p:cNvSpPr/>
-          <p:nvPr/>
-        </p:nvSpPr>
-        <p:spPr>
-          <a:xfrm>
-            <a:off x="0" y="-31518"/>
-            <a:ext cx="12192000" cy="1131606"/>
-          </a:xfrm>
-          <a:prstGeom prst="rect">
-            <a:avLst/>
-          </a:prstGeom>
-          <a:solidFill>
-            <a:srgbClr val="C00000"/>
-          </a:solidFill>
-          <a:ln>
-            <a:noFill/>
-          </a:ln>
-        </p:spPr>
-        <p:txBody>
-          <a:bodyPr spcFirstLastPara="1" wrap="square" lIns="91425" tIns="45700" rIns="91425" bIns="45700" anchor="ctr" anchorCtr="0">
-            <a:noAutofit/>
-          </a:bodyPr>
-          <a:lstStyle/>
-          <a:p>
-            <a:pPr marL="0" marR="0" lvl="0" indent="0" rtl="0">
-              <a:lnSpc>
-                <a:spcPct val="100000"/>
-              </a:lnSpc>
-              <a:spcBef>
-                <a:spcPts val="0"/>
-              </a:spcBef>
-              <a:spcAft>
-                <a:spcPts val="0"/>
-              </a:spcAft>
-              <a:buClr>
-                <a:srgbClr val="000000"/>
-              </a:buClr>
-              <a:buSzPts val="1600"/>
-              <a:buFont typeface="Arial"/>
-              <a:buNone/>
-            </a:pPr>
-            <a:r>
-              <a:rPr lang="en-US" sz="4800" dirty="0">
-                <a:solidFill>
-                  <a:schemeClr val="lt1"/>
-                </a:solidFill>
-              </a:rPr>
-              <a:t> 150+ Murdered: by Intelligence Services</a:t>
-            </a:r>
-            <a:endParaRPr sz="3200" b="0" i="0" u="none" strike="noStrike" cap="none" dirty="0">
-              <a:solidFill>
-                <a:srgbClr val="000000"/>
-              </a:solidFill>
-              <a:latin typeface="Arial"/>
-              <a:ea typeface="Arial"/>
-              <a:cs typeface="Arial"/>
-              <a:sym typeface="Arial"/>
-            </a:endParaRPr>
-          </a:p>
-        </p:txBody>
-      </p:sp>
-      <p:sp>
-        <p:nvSpPr>
-          <p:cNvPr id="4" name="TextBox 3">
-            <a:extLst>
-              <a:ext uri="{FF2B5EF4-FFF2-40B4-BE49-F238E27FC236}">
-                <a16:creationId xmlns:a16="http://schemas.microsoft.com/office/drawing/2014/main" id="{50D7621F-9D36-7894-7117-9F831EF5EFA6}"/>
-              </a:ext>
-            </a:extLst>
-          </p:cNvPr>
-          <p:cNvSpPr txBox="1"/>
-          <p:nvPr/>
-        </p:nvSpPr>
-        <p:spPr>
-          <a:xfrm>
-            <a:off x="107300" y="6229650"/>
-            <a:ext cx="11685989" cy="461665"/>
-          </a:xfrm>
-          <a:prstGeom prst="rect">
-            <a:avLst/>
-          </a:prstGeom>
-          <a:solidFill>
-            <a:schemeClr val="bg1">
-              <a:alpha val="84400"/>
-            </a:schemeClr>
-          </a:solidFill>
-        </p:spPr>
-        <p:txBody>
-          <a:bodyPr wrap="square" rtlCol="0">
-            <a:spAutoFit/>
-          </a:bodyPr>
-          <a:lstStyle/>
-          <a:p>
-            <a:r>
-              <a:rPr lang="en-US" sz="2400" dirty="0"/>
-              <a:t>https://intelligencemurders.com/intelligence-service-murders</a:t>
-            </a:r>
-          </a:p>
-        </p:txBody>
-      </p:sp>
-      <p:sp>
-        <p:nvSpPr>
-          <p:cNvPr id="7" name="Google Shape;170;p31">
-            <a:extLst>
-              <a:ext uri="{FF2B5EF4-FFF2-40B4-BE49-F238E27FC236}">
-                <a16:creationId xmlns:a16="http://schemas.microsoft.com/office/drawing/2014/main" id="{4B582382-76AA-B49E-C611-39A37CE591B9}"/>
-              </a:ext>
-            </a:extLst>
-          </p:cNvPr>
-          <p:cNvSpPr/>
-          <p:nvPr/>
-        </p:nvSpPr>
-        <p:spPr>
-          <a:xfrm>
-            <a:off x="7506336" y="4925186"/>
-            <a:ext cx="4550222" cy="869505"/>
-          </a:xfrm>
-          <a:prstGeom prst="rect">
-            <a:avLst/>
-          </a:prstGeom>
-          <a:solidFill>
-            <a:srgbClr val="C00000"/>
-          </a:solidFill>
-          <a:ln>
-            <a:noFill/>
-          </a:ln>
-        </p:spPr>
-        <p:txBody>
-          <a:bodyPr spcFirstLastPara="1" wrap="square" lIns="91425" tIns="45700" rIns="91425" bIns="45700" anchor="ctr" anchorCtr="0">
-            <a:noAutofit/>
-          </a:bodyPr>
-          <a:lstStyle/>
-          <a:p>
-            <a:pPr marL="0" marR="0" lvl="0" indent="0" algn="ctr" rtl="0">
-              <a:lnSpc>
-                <a:spcPct val="100000"/>
-              </a:lnSpc>
-              <a:spcBef>
-                <a:spcPts val="0"/>
-              </a:spcBef>
-              <a:spcAft>
-                <a:spcPts val="0"/>
-              </a:spcAft>
-              <a:buClr>
-                <a:srgbClr val="000000"/>
-              </a:buClr>
-              <a:buSzPts val="1600"/>
-              <a:buFont typeface="Arial"/>
-              <a:buNone/>
-            </a:pPr>
-            <a:r>
-              <a:rPr lang="en-US" sz="4800" dirty="0">
-                <a:solidFill>
-                  <a:schemeClr val="lt1"/>
-                </a:solidFill>
-              </a:rPr>
-              <a:t>Vitaly Churkin</a:t>
-            </a:r>
-            <a:endParaRPr sz="3200" b="0" i="0" u="none" strike="noStrike" cap="none" dirty="0">
-              <a:solidFill>
-                <a:srgbClr val="000000"/>
-              </a:solidFill>
-              <a:latin typeface="Arial"/>
-              <a:ea typeface="Arial"/>
-              <a:cs typeface="Arial"/>
-              <a:sym typeface="Arial"/>
-            </a:endParaRPr>
-          </a:p>
-        </p:txBody>
-      </p:sp>
-      <p:sp>
-        <p:nvSpPr>
-          <p:cNvPr id="8" name="Google Shape;170;p31">
-            <a:extLst>
-              <a:ext uri="{FF2B5EF4-FFF2-40B4-BE49-F238E27FC236}">
-                <a16:creationId xmlns:a16="http://schemas.microsoft.com/office/drawing/2014/main" id="{D328ABDE-E232-3EB7-C3F2-B4BB7B64262F}"/>
-              </a:ext>
-            </a:extLst>
-          </p:cNvPr>
-          <p:cNvSpPr/>
-          <p:nvPr/>
-        </p:nvSpPr>
-        <p:spPr>
-          <a:xfrm>
-            <a:off x="7526107" y="5681420"/>
-            <a:ext cx="4550222" cy="548230"/>
-          </a:xfrm>
-          <a:prstGeom prst="rect">
-            <a:avLst/>
-          </a:prstGeom>
-          <a:solidFill>
-            <a:srgbClr val="C00000"/>
-          </a:solidFill>
-          <a:ln>
-            <a:noFill/>
-          </a:ln>
-        </p:spPr>
-        <p:txBody>
-          <a:bodyPr spcFirstLastPara="1" wrap="square" lIns="91425" tIns="45700" rIns="91425" bIns="45700" anchor="ctr" anchorCtr="0">
-            <a:noAutofit/>
-          </a:bodyPr>
-          <a:lstStyle/>
-          <a:p>
-            <a:pPr marL="0" marR="0" lvl="0" indent="0" algn="ctr" rtl="0">
-              <a:lnSpc>
-                <a:spcPct val="100000"/>
-              </a:lnSpc>
-              <a:spcBef>
-                <a:spcPts val="0"/>
-              </a:spcBef>
-              <a:spcAft>
-                <a:spcPts val="0"/>
-              </a:spcAft>
-              <a:buClr>
-                <a:srgbClr val="000000"/>
-              </a:buClr>
-              <a:buSzPts val="1600"/>
-              <a:buFont typeface="Arial"/>
-              <a:buNone/>
-            </a:pPr>
-            <a:r>
-              <a:rPr lang="en-US" sz="3600" dirty="0">
-                <a:solidFill>
-                  <a:schemeClr val="lt1"/>
-                </a:solidFill>
-              </a:rPr>
-              <a:t>Dead at Age 64</a:t>
-            </a:r>
-            <a:endParaRPr sz="2000" b="0" i="0" u="none" strike="noStrike" cap="none" dirty="0">
-              <a:solidFill>
-                <a:srgbClr val="000000"/>
-              </a:solidFill>
-              <a:latin typeface="Arial"/>
-              <a:ea typeface="Arial"/>
-              <a:cs typeface="Arial"/>
-              <a:sym typeface="Arial"/>
-            </a:endParaRPr>
-          </a:p>
-        </p:txBody>
-      </p:sp>
-      <p:sp>
-        <p:nvSpPr>
-          <p:cNvPr id="10" name="TextBox 9">
-            <a:extLst>
-              <a:ext uri="{FF2B5EF4-FFF2-40B4-BE49-F238E27FC236}">
-                <a16:creationId xmlns:a16="http://schemas.microsoft.com/office/drawing/2014/main" id="{5FA0D8B2-6B55-D3DC-BCBB-6FEAD86B9E72}"/>
-              </a:ext>
-            </a:extLst>
-          </p:cNvPr>
-          <p:cNvSpPr txBox="1"/>
-          <p:nvPr/>
-        </p:nvSpPr>
-        <p:spPr>
-          <a:xfrm>
-            <a:off x="312431" y="2175372"/>
-            <a:ext cx="6987941" cy="3046988"/>
-          </a:xfrm>
-          <a:prstGeom prst="rect">
-            <a:avLst/>
-          </a:prstGeom>
-          <a:solidFill>
-            <a:schemeClr val="bg1">
-              <a:alpha val="84400"/>
-            </a:schemeClr>
-          </a:solidFill>
-        </p:spPr>
-        <p:txBody>
-          <a:bodyPr wrap="square" rtlCol="0">
-            <a:spAutoFit/>
-          </a:bodyPr>
-          <a:lstStyle/>
-          <a:p>
-            <a:pPr marL="285750" indent="-285750">
-              <a:spcBef>
-                <a:spcPts val="1200"/>
-              </a:spcBef>
-              <a:buFont typeface="Arial" panose="020B0604020202020204" pitchFamily="34" charset="0"/>
-              <a:buChar char="•"/>
-            </a:pPr>
-            <a:r>
-              <a:t>Russia's UN Ambassador died SUDDENLY in New York, one day before his 65th birthday. Autopsy results SUPPRESSED.</a:t>
-            </a:r>
-          </a:p>
-          <a:p>
-            <a:pPr marL="285750" indent="-285750">
-              <a:spcBef>
-                <a:spcPts val="1200"/>
-              </a:spcBef>
-              <a:buFont typeface="Arial" panose="020B0604020202020204" pitchFamily="34" charset="0"/>
-              <a:buChar char="•"/>
-            </a:pPr>
-            <a:r>
-              <a:t>The NYC Medical Examiner said cause of death needed "further study" — then the US State Department BLOCKED the release.</a:t>
-            </a:r>
-          </a:p>
-          <a:p>
-            <a:pPr marL="285750" indent="-285750">
-              <a:spcBef>
-                <a:spcPts val="1200"/>
-              </a:spcBef>
-              <a:buFont typeface="Arial" panose="020B0604020202020204" pitchFamily="34" charset="0"/>
-              <a:buChar char="•"/>
-            </a:pPr>
-            <a:r>
-              <a:t>Russia also opposed disclosure, saying the results could "HURT HIS REPUTATION." A cryptic comment that fuels speculation.</a:t>
-            </a:r>
-          </a:p>
-          <a:p>
-            <a:pPr marL="285750" indent="-285750">
-              <a:spcBef>
-                <a:spcPts val="1200"/>
-              </a:spcBef>
-              <a:buFont typeface="Arial" panose="020B0604020202020204" pitchFamily="34" charset="0"/>
-              <a:buChar char="•"/>
-            </a:pPr>
-            <a:r>
-              <a:t>His death came during a cluster of at least SIX Russian diplomat deaths in a four-month period.</a:t>
-            </a:r>
-          </a:p>
-          <a:p>
-            <a:pPr marL="285750" indent="-285750">
-              <a:spcBef>
-                <a:spcPts val="1200"/>
-              </a:spcBef>
-              <a:buFont typeface="Arial" panose="020B0604020202020204" pitchFamily="34" charset="0"/>
-              <a:buChar char="•"/>
-            </a:pPr>
-            <a:r>
-              <a:t>Two governments — the US AND Russia — actively conspired to keep the public from knowing HOW he died.</a:t>
-            </a:r>
-          </a:p>
-        </p:txBody>
-      </p:sp>
-      <p:pic>
-        <p:nvPicPr>
-          <p:cNvPr id="16" name="Picture 15" descr="Vitaly_Churkin.jpg"/>
-          <p:cNvPicPr>
-            <a:picLocks noChangeAspect="1"/>
-          </p:cNvPicPr>
-          <p:nvPr/>
-        </p:nvPicPr>
-        <p:blipFill>
-          <a:blip r:embed="rId2"/>
-          <a:stretch>
-            <a:fillRect/>
-          </a:stretch>
-        </p:blipFill>
-        <p:spPr>
-          <a:xfrm>
-            <a:off x="8368686" y="1100088"/>
-            <a:ext cx="2544593" cy="3884876"/>
-          </a:xfrm>
-          <a:prstGeom prst="rect">
-            <a:avLst/>
-          </a:prstGeom>
-        </p:spPr>
-      </p:pic>
-    </p:spTree>
-  </p:cSld>
-  <p:clrMapOvr>
-    <a:masterClrMapping/>
-  </p:clrMapOvr>
-</p:sld>
-</file>
-
-<file path=ppt/slides/slide18.xml><?xml version="1.0" encoding="utf-8"?>
-<p:sld xmlns:a="http://schemas.openxmlformats.org/drawingml/2006/main" xmlns:r="http://schemas.openxmlformats.org/officeDocument/2006/relationships" xmlns:p="http://schemas.openxmlformats.org/presentationml/2006/main">
-  <p:cSld>
-    <p:spTree>
-      <p:nvGrpSpPr>
-        <p:cNvPr id="1" name=""/>
-        <p:cNvGrpSpPr/>
-        <p:nvPr/>
-      </p:nvGrpSpPr>
-      <p:grpSpPr>
-        <a:xfrm>
-          <a:off x="0" y="0"/>
-          <a:ext cx="0" cy="0"/>
-          <a:chOff x="0" y="0"/>
-          <a:chExt cx="0" cy="0"/>
-        </a:xfrm>
-      </p:grpSpPr>
-      <p:sp>
-        <p:nvSpPr>
-          <p:cNvPr id="15" name="TextBox 14">
-            <a:extLst>
-              <a:ext uri="{FF2B5EF4-FFF2-40B4-BE49-F238E27FC236}">
-                <a16:creationId xmlns:a16="http://schemas.microsoft.com/office/drawing/2014/main" id="{E478240E-251B-5BA6-3C45-7E6620400769}"/>
-              </a:ext>
-            </a:extLst>
-          </p:cNvPr>
-          <p:cNvSpPr txBox="1"/>
-          <p:nvPr/>
-        </p:nvSpPr>
-        <p:spPr>
-          <a:xfrm>
-            <a:off x="312432" y="1288262"/>
-            <a:ext cx="6494294" cy="584775"/>
-          </a:xfrm>
-          <a:prstGeom prst="rect">
-            <a:avLst/>
-          </a:prstGeom>
-          <a:solidFill>
-            <a:schemeClr val="bg1">
-              <a:alpha val="84400"/>
-            </a:schemeClr>
-          </a:solidFill>
-        </p:spPr>
-        <p:txBody>
-          <a:bodyPr wrap="square" rtlCol="0">
-            <a:spAutoFit/>
-          </a:bodyPr>
-          <a:lstStyle/>
-          <a:p>
-            <a:r>
-              <a:rPr lang="en-US" sz="3200" b="1" dirty="0">
-                <a:solidFill>
-                  <a:schemeClr val="accent5"/>
-                </a:solidFill>
-              </a:rPr>
-              <a:t>Why / How they Zelimkhan Yandarbiyev:</a:t>
-            </a:r>
-          </a:p>
-        </p:txBody>
-      </p:sp>
-      <p:sp>
-        <p:nvSpPr>
-          <p:cNvPr id="3" name="Google Shape;170;p31">
-            <a:extLst>
-              <a:ext uri="{FF2B5EF4-FFF2-40B4-BE49-F238E27FC236}">
-                <a16:creationId xmlns:a16="http://schemas.microsoft.com/office/drawing/2014/main" id="{A4695FE5-0AA5-AB05-98B1-B5B8E3FA8CBE}"/>
-              </a:ext>
-            </a:extLst>
-          </p:cNvPr>
-          <p:cNvSpPr/>
-          <p:nvPr/>
-        </p:nvSpPr>
-        <p:spPr>
-          <a:xfrm>
-            <a:off x="191731" y="5732890"/>
-            <a:ext cx="3431270" cy="496760"/>
-          </a:xfrm>
-          <a:prstGeom prst="rect">
-            <a:avLst/>
-          </a:prstGeom>
-          <a:solidFill>
-            <a:schemeClr val="accent5"/>
-          </a:solidFill>
-          <a:ln>
-            <a:noFill/>
-          </a:ln>
-        </p:spPr>
-        <p:txBody>
-          <a:bodyPr spcFirstLastPara="1" wrap="square" lIns="91425" tIns="45700" rIns="91425" bIns="45700" anchor="ctr" anchorCtr="0">
-            <a:noAutofit/>
-          </a:bodyPr>
-          <a:lstStyle/>
-          <a:p>
-            <a:pPr marL="0" marR="0" lvl="0" indent="0" algn="ctr" rtl="0">
-              <a:lnSpc>
-                <a:spcPct val="100000"/>
-              </a:lnSpc>
-              <a:spcBef>
-                <a:spcPts val="0"/>
-              </a:spcBef>
-              <a:spcAft>
-                <a:spcPts val="0"/>
-              </a:spcAft>
-              <a:buClr>
-                <a:srgbClr val="000000"/>
-              </a:buClr>
-              <a:buSzPts val="1600"/>
-              <a:buFont typeface="Arial"/>
-              <a:buNone/>
-            </a:pPr>
-            <a:r>
-              <a:rPr lang="en-US" sz="3600" dirty="0">
-                <a:solidFill>
-                  <a:schemeClr val="lt1"/>
-                </a:solidFill>
-              </a:rPr>
-              <a:t>Read List Here:</a:t>
-            </a:r>
-            <a:endParaRPr sz="2000" b="0" i="0" u="none" strike="noStrike" cap="none" dirty="0">
-              <a:solidFill>
-                <a:srgbClr val="000000"/>
-              </a:solidFill>
-              <a:latin typeface="Arial"/>
-              <a:ea typeface="Arial"/>
-              <a:cs typeface="Arial"/>
-              <a:sym typeface="Arial"/>
-            </a:endParaRPr>
-          </a:p>
-        </p:txBody>
-      </p:sp>
-      <p:sp>
-        <p:nvSpPr>
-          <p:cNvPr id="5" name="Google Shape;170;p31">
-            <a:extLst>
-              <a:ext uri="{FF2B5EF4-FFF2-40B4-BE49-F238E27FC236}">
-                <a16:creationId xmlns:a16="http://schemas.microsoft.com/office/drawing/2014/main" id="{98132413-6ED2-8B36-74B6-3C503B1A4634}"/>
-              </a:ext>
-            </a:extLst>
-          </p:cNvPr>
-          <p:cNvSpPr/>
-          <p:nvPr/>
-        </p:nvSpPr>
-        <p:spPr>
-          <a:xfrm>
-            <a:off x="0" y="-31518"/>
-            <a:ext cx="12192000" cy="1131606"/>
-          </a:xfrm>
-          <a:prstGeom prst="rect">
-            <a:avLst/>
-          </a:prstGeom>
-          <a:solidFill>
-            <a:srgbClr val="C00000"/>
-          </a:solidFill>
-          <a:ln>
-            <a:noFill/>
-          </a:ln>
-        </p:spPr>
-        <p:txBody>
-          <a:bodyPr spcFirstLastPara="1" wrap="square" lIns="91425" tIns="45700" rIns="91425" bIns="45700" anchor="ctr" anchorCtr="0">
-            <a:noAutofit/>
-          </a:bodyPr>
-          <a:lstStyle/>
-          <a:p>
-            <a:pPr marL="0" marR="0" lvl="0" indent="0" rtl="0">
-              <a:lnSpc>
-                <a:spcPct val="100000"/>
-              </a:lnSpc>
-              <a:spcBef>
-                <a:spcPts val="0"/>
-              </a:spcBef>
-              <a:spcAft>
-                <a:spcPts val="0"/>
-              </a:spcAft>
-              <a:buClr>
-                <a:srgbClr val="000000"/>
-              </a:buClr>
-              <a:buSzPts val="1600"/>
-              <a:buFont typeface="Arial"/>
-              <a:buNone/>
-            </a:pPr>
-            <a:r>
-              <a:rPr lang="en-US" sz="4800" dirty="0">
-                <a:solidFill>
-                  <a:schemeClr val="lt1"/>
-                </a:solidFill>
-              </a:rPr>
-              <a:t> 150+ Murdered: by Intelligence Services</a:t>
-            </a:r>
-            <a:endParaRPr sz="3200" b="0" i="0" u="none" strike="noStrike" cap="none" dirty="0">
-              <a:solidFill>
-                <a:srgbClr val="000000"/>
-              </a:solidFill>
-              <a:latin typeface="Arial"/>
-              <a:ea typeface="Arial"/>
-              <a:cs typeface="Arial"/>
-              <a:sym typeface="Arial"/>
-            </a:endParaRPr>
-          </a:p>
-        </p:txBody>
-      </p:sp>
-      <p:sp>
-        <p:nvSpPr>
-          <p:cNvPr id="4" name="TextBox 3">
-            <a:extLst>
-              <a:ext uri="{FF2B5EF4-FFF2-40B4-BE49-F238E27FC236}">
-                <a16:creationId xmlns:a16="http://schemas.microsoft.com/office/drawing/2014/main" id="{50D7621F-9D36-7894-7117-9F831EF5EFA6}"/>
-              </a:ext>
-            </a:extLst>
-          </p:cNvPr>
-          <p:cNvSpPr txBox="1"/>
-          <p:nvPr/>
-        </p:nvSpPr>
-        <p:spPr>
-          <a:xfrm>
-            <a:off x="107300" y="6229650"/>
-            <a:ext cx="11685989" cy="461665"/>
-          </a:xfrm>
-          <a:prstGeom prst="rect">
-            <a:avLst/>
-          </a:prstGeom>
-          <a:solidFill>
-            <a:schemeClr val="bg1">
-              <a:alpha val="84400"/>
-            </a:schemeClr>
-          </a:solidFill>
-        </p:spPr>
-        <p:txBody>
-          <a:bodyPr wrap="square" rtlCol="0">
-            <a:spAutoFit/>
-          </a:bodyPr>
-          <a:lstStyle/>
-          <a:p>
-            <a:r>
-              <a:rPr lang="en-US" sz="2400" dirty="0"/>
-              <a:t>https://intelligencemurders.com/intelligence-service-murders</a:t>
+              <a:t>https://intelligencemurders.com/intel</a:t>
             </a:r>
           </a:p>
         </p:txBody>
@@ -8383,6 +7382,53 @@
           <a:chExt cx="0" cy="0"/>
         </a:xfrm>
       </p:grpSpPr>
+      <p:pic>
+        <p:nvPicPr>
+          <p:cNvPr id="2" name="Picture 2" descr="Haney gave numerous TV interviews while promoting his book">
+            <a:extLst>
+              <a:ext uri="{FF2B5EF4-FFF2-40B4-BE49-F238E27FC236}">
+                <a16:creationId xmlns:a16="http://schemas.microsoft.com/office/drawing/2014/main" id="{79F665EB-66F1-D4E9-58C9-5C90B9545F60}"/>
+              </a:ext>
+            </a:extLst>
+          </p:cNvPr>
+          <p:cNvPicPr>
+            <a:picLocks noChangeAspect="1" noChangeArrowheads="1"/>
+          </p:cNvPicPr>
+          <p:nvPr/>
+        </p:nvPicPr>
+        <p:blipFill>
+          <a:blip r:embed="rId2">
+            <a:extLst>
+              <a:ext uri="{28A0092B-C50C-407E-A947-70E740481C1C}">
+                <a14:useLocalDpi xmlns:a14="http://schemas.microsoft.com/office/drawing/2010/main" val="0"/>
+              </a:ext>
+            </a:extLst>
+          </a:blip>
+          <a:srcRect/>
+          <a:stretch>
+            <a:fillRect/>
+          </a:stretch>
+        </p:blipFill>
+        <p:spPr bwMode="auto">
+          <a:xfrm>
+            <a:off x="7100376" y="880999"/>
+            <a:ext cx="6352833" cy="4103965"/>
+          </a:xfrm>
+          <a:prstGeom prst="rect">
+            <a:avLst/>
+          </a:prstGeom>
+          <a:noFill/>
+          <a:extLst>
+            <a:ext uri="{909E8E84-426E-40DD-AFC4-6F175D3DCCD1}">
+              <a14:hiddenFill xmlns:a14="http://schemas.microsoft.com/office/drawing/2010/main">
+                <a:solidFill>
+                  <a:srgbClr val="FFFFFF"/>
+                </a:solidFill>
+              </a14:hiddenFill>
+            </a:ext>
+          </a:extLst>
+        </p:spPr>
+      </p:pic>
       <p:sp>
         <p:nvSpPr>
           <p:cNvPr id="15" name="TextBox 14">
@@ -8421,7 +7467,7 @@
                   <a:schemeClr val="accent5"/>
                 </a:solidFill>
               </a:rPr>
-              <a:t>Why / How they Ahmed Yassin:</a:t>
+              <a:t>Why / How they Philip Haney:</a:t>
             </a:r>
           </a:p>
         </p:txBody>
@@ -8600,7 +7646,7 @@
           <a:p>
             <a:r>
               <a:rPr lang="en-US" sz="2400" dirty="0"/>
-              <a:t>https://intelligencemurders.com/intelligence-service-murders</a:t>
+              <a:t>https://intelligencemurders.com/intel</a:t>
             </a:r>
           </a:p>
         </p:txBody>
@@ -8661,7 +7707,7 @@
                   <a:schemeClr val="lt1"/>
                 </a:solidFill>
               </a:rPr>
-              <a:t>Ahmed Yassin</a:t>
+              <a:t>Philip Haney</a:t>
             </a:r>
             <a:endParaRPr sz="3200" b="0" i="0" u="none" strike="noStrike" cap="none" dirty="0">
               <a:solidFill>
@@ -8731,7 +7777,7 @@
                   <a:schemeClr val="lt1"/>
                 </a:solidFill>
               </a:rPr>
-              <a:t>Dead at Age 67</a:t>
+              <a:t>Dead at Age 66</a:t>
             </a:r>
             <a:endParaRPr sz="2000" b="0" i="0" u="none" strike="noStrike" cap="none" dirty="0">
               <a:solidFill>
@@ -8759,8 +7805,8 @@
         </p:nvSpPr>
         <p:spPr>
           <a:xfrm>
-            <a:off x="312431" y="2175372"/>
-            <a:ext cx="6987941" cy="3046988"/>
+            <a:off x="129030" y="1905506"/>
+            <a:ext cx="8367997" cy="3477875"/>
           </a:xfrm>
           <a:prstGeom prst="rect">
             <a:avLst/>
@@ -8785,7 +7831,8 @@
               <a:buChar char="•"/>
             </a:pPr>
             <a:r>
-              <a:t>WHEELCHAIR-BOUND 67-year-old quadriplegic hit by HELLFIRE MISSILES outside a mosque after morning prayers.</a:t>
+              <a:rPr dirty="0"/>
+              <a:t>DHS founding member and terrorism whistleblower — found SHOT DEAD in a California park-and-ride lot at age 66.</a:t>
             </a:r>
           </a:p>
           <a:p>
@@ -8797,7 +7844,8 @@
               <a:buChar char="•"/>
             </a:pPr>
             <a:r>
-              <a:t>NINE bystanders killed in the same strike, including civilians who had been praying alongside him.</a:t>
+              <a:rPr dirty="0"/>
+              <a:t>Alleged the Obama administration ordered the DELETION of intelligence records that could have PREVENTED the San Bernardino attack.</a:t>
             </a:r>
           </a:p>
           <a:p>
@@ -8809,7 +7857,8 @@
               <a:buChar char="•"/>
             </a:pPr>
             <a:r>
-              <a:t>His successor was killed by Israel just 26 DAYS LATER in a near-identical helicopter strike.</a:t>
+              <a:rPr dirty="0"/>
+              <a:t>His family "SERIOUSLY DOUBTS" the suicide ruling. Friends say the devout Christian explicitly said he would NEVER take his own life.</a:t>
             </a:r>
           </a:p>
           <a:p>
@@ -8821,7 +7870,8 @@
               <a:buChar char="•"/>
             </a:pPr>
             <a:r>
-              <a:t>Founded Hamas in 1987. Had been PARALYZED since adolescence. Used a wheelchair his entire adult life.</a:t>
+              <a:rPr dirty="0"/>
+              <a:t>He was ENGAGED to be married and reportedly preparing to reveal ADDITIONAL classified information at the time of his death.</a:t>
             </a:r>
           </a:p>
           <a:p>
@@ -8833,36 +7883,18 @@
               <a:buChar char="•"/>
             </a:pPr>
             <a:r>
-              <a:t>The UN, EU, and most nations CONDEMNED the strike. The US VETOED the Security Council resolution.</a:t>
-            </a:r>
-          </a:p>
-        </p:txBody>
-      </p:sp>
-      <p:pic>
-        <p:nvPicPr>
-          <p:cNvPr id="16" name="Picture 15" descr="Ahmed_Yassin.jpg"/>
-          <p:cNvPicPr>
-            <a:picLocks noChangeAspect="1"/>
-          </p:cNvPicPr>
-          <p:nvPr/>
-        </p:nvPicPr>
-        <p:blipFill>
-          <a:blip r:embed="rId2"/>
-          <a:stretch>
-            <a:fillRect/>
-          </a:stretch>
-        </p:blipFill>
-        <p:spPr>
-          <a:xfrm>
-            <a:off x="8184154" y="1100088"/>
-            <a:ext cx="2913657" cy="3884876"/>
-          </a:xfrm>
-          <a:prstGeom prst="rect">
-            <a:avLst/>
-          </a:prstGeom>
-        </p:spPr>
-      </p:pic>
+              <a:rPr dirty="0"/>
+              <a:t>Ruled suicide after a TWO-YEAR investigation — but investigators found a note with passwords, not a suicide note.</a:t>
+            </a:r>
+          </a:p>
+        </p:txBody>
+      </p:sp>
     </p:spTree>
+    <p:extLst>
+      <p:ext uri="{BB962C8B-B14F-4D97-AF65-F5344CB8AC3E}">
+        <p14:creationId xmlns:p14="http://schemas.microsoft.com/office/powerpoint/2010/main" val="962546674"/>
+      </p:ext>
+    </p:extLst>
   </p:cSld>
   <p:clrMapOvr>
     <a:masterClrMapping/>
@@ -8892,7 +7924,7 @@
           <p:cNvPr id="15" name="TextBox 14">
             <a:extLst>
               <a:ext uri="{FF2B5EF4-FFF2-40B4-BE49-F238E27FC236}">
-                <a16:creationId xmlns:a16="http://schemas.microsoft.com/office/drawing/2014/main" id="{E478240E-251B-5BA6-3C45-7E6620400769}"/>
+                <a16:creationId xmlns:a16="http://schemas.microsoft.com/office/drawing/2014/main" id="{EAE3A09D-A6E4-5E4F-16F8-6BAFA5E1CD0A}"/>
               </a:ext>
             </a:extLst>
           </p:cNvPr>
@@ -8901,8 +7933,8 @@
         </p:nvSpPr>
         <p:spPr>
           <a:xfrm>
-            <a:off x="312432" y="1288262"/>
-            <a:ext cx="6494294" cy="584775"/>
+            <a:off x="312431" y="1288262"/>
+            <a:ext cx="6987941" cy="584775"/>
           </a:xfrm>
           <a:prstGeom prst="rect">
             <a:avLst/>
@@ -8925,7 +7957,7 @@
                   <a:schemeClr val="accent5"/>
                 </a:solidFill>
               </a:rPr>
-              <a:t>Why / How they Alexander Zakharchenko:</a:t>
+              <a:t>Why / How they Dorothy Kilgallen:</a:t>
             </a:r>
           </a:p>
         </p:txBody>
@@ -8935,7 +7967,7 @@
           <p:cNvPr id="3" name="Google Shape;170;p31">
             <a:extLst>
               <a:ext uri="{FF2B5EF4-FFF2-40B4-BE49-F238E27FC236}">
-                <a16:creationId xmlns:a16="http://schemas.microsoft.com/office/drawing/2014/main" id="{A4695FE5-0AA5-AB05-98B1-B5B8E3FA8CBE}"/>
+                <a16:creationId xmlns:a16="http://schemas.microsoft.com/office/drawing/2014/main" id="{A2CA04A2-27A7-622C-F9FC-36F8F0881ABC}"/>
               </a:ext>
             </a:extLst>
           </p:cNvPr>
@@ -8944,8 +7976,8 @@
         </p:nvSpPr>
         <p:spPr>
           <a:xfrm>
-            <a:off x="191731" y="5732890"/>
-            <a:ext cx="3431270" cy="496760"/>
+            <a:off x="200102" y="5852160"/>
+            <a:ext cx="3431270" cy="494488"/>
           </a:xfrm>
           <a:prstGeom prst="rect">
             <a:avLst/>
@@ -9005,7 +8037,7 @@
           <p:cNvPr id="5" name="Google Shape;170;p31">
             <a:extLst>
               <a:ext uri="{FF2B5EF4-FFF2-40B4-BE49-F238E27FC236}">
-                <a16:creationId xmlns:a16="http://schemas.microsoft.com/office/drawing/2014/main" id="{98132413-6ED2-8B36-74B6-3C503B1A4634}"/>
+                <a16:creationId xmlns:a16="http://schemas.microsoft.com/office/drawing/2014/main" id="{7C736A6F-204D-9BB8-EAA6-837DBF5D4DEB}"/>
               </a:ext>
             </a:extLst>
           </p:cNvPr>
@@ -9033,22 +8065,11 @@
           </a:bodyPr>
           <a:lstStyle/>
           <a:p>
-            <a:pPr marL="0" marR="0" lvl="0" indent="0" rtl="0">
-              <a:lnSpc>
-                <a:spcPct val="100000"/>
-              </a:lnSpc>
-              <a:spcBef>
-                <a:spcPts val="0"/>
-              </a:spcBef>
-              <a:spcAft>
-                <a:spcPts val="0"/>
-              </a:spcAft>
+            <a:pPr lvl="0">
               <a:buClr>
                 <a:srgbClr val="000000"/>
               </a:buClr>
               <a:buSzPts val="1600"/>
-              <a:buFont typeface="Arial"/>
-              <a:buNone/>
             </a:pPr>
             <a:r>
               <a:rPr lang="en-US" sz="4800" dirty="0">
@@ -9058,7 +8079,7 @@
               </a:rPr>
               <a:t> 150+ Murdered: by Intelligence Services</a:t>
             </a:r>
-            <a:endParaRPr sz="3200" b="0" i="0" u="none" strike="noStrike" cap="none" dirty="0">
+            <a:endParaRPr lang="en-US" sz="3200" dirty="0">
               <a:solidFill>
                 <a:srgbClr val="000000"/>
               </a:solidFill>
@@ -9075,7 +8096,7 @@
           <p:cNvPr id="4" name="TextBox 3">
             <a:extLst>
               <a:ext uri="{FF2B5EF4-FFF2-40B4-BE49-F238E27FC236}">
-                <a16:creationId xmlns:a16="http://schemas.microsoft.com/office/drawing/2014/main" id="{50D7621F-9D36-7894-7117-9F831EF5EFA6}"/>
+                <a16:creationId xmlns:a16="http://schemas.microsoft.com/office/drawing/2014/main" id="{14D41900-3932-F065-0A2B-6D119791E2A1}"/>
               </a:ext>
             </a:extLst>
           </p:cNvPr>
@@ -9084,7 +8105,7 @@
         </p:nvSpPr>
         <p:spPr>
           <a:xfrm>
-            <a:off x="107300" y="6229650"/>
+            <a:off x="115671" y="6346648"/>
             <a:ext cx="11685989" cy="461665"/>
           </a:xfrm>
           <a:prstGeom prst="rect">
@@ -9104,17 +8125,17 @@
           <a:p>
             <a:r>
               <a:rPr lang="en-US" sz="2400" dirty="0"/>
-              <a:t>https://intelligencemurders.com/intelligence-service-murders</a:t>
-            </a:r>
-          </a:p>
-        </p:txBody>
-      </p:sp>
-      <p:sp>
-        <p:nvSpPr>
-          <p:cNvPr id="7" name="Google Shape;170;p31">
-            <a:extLst>
-              <a:ext uri="{FF2B5EF4-FFF2-40B4-BE49-F238E27FC236}">
-                <a16:creationId xmlns:a16="http://schemas.microsoft.com/office/drawing/2014/main" id="{4B582382-76AA-B49E-C611-39A37CE591B9}"/>
+              <a:t>https://intelligencemurders.com/intel</a:t>
+            </a:r>
+          </a:p>
+        </p:txBody>
+      </p:sp>
+      <p:sp>
+        <p:nvSpPr>
+          <p:cNvPr id="8" name="Google Shape;170;p31">
+            <a:extLst>
+              <a:ext uri="{FF2B5EF4-FFF2-40B4-BE49-F238E27FC236}">
+                <a16:creationId xmlns:a16="http://schemas.microsoft.com/office/drawing/2014/main" id="{B069CCDF-FA80-D75C-7412-189D5C3D3A16}"/>
               </a:ext>
             </a:extLst>
           </p:cNvPr>
@@ -9123,8 +8144,8 @@
         </p:nvSpPr>
         <p:spPr>
           <a:xfrm>
-            <a:off x="7506336" y="4925186"/>
-            <a:ext cx="4550222" cy="869505"/>
+            <a:off x="7526107" y="5681420"/>
+            <a:ext cx="4550222" cy="548230"/>
           </a:xfrm>
           <a:prstGeom prst="rect">
             <a:avLst/>
@@ -9160,14 +8181,14 @@
               <a:buNone/>
             </a:pPr>
             <a:r>
-              <a:rPr lang="en-US" sz="4800" dirty="0">
+              <a:rPr lang="en-US" sz="3600" dirty="0">
                 <a:solidFill>
                   <a:schemeClr val="lt1"/>
                 </a:solidFill>
               </a:rPr>
-              <a:t>Alexander Zakharchenko</a:t>
-            </a:r>
-            <a:endParaRPr sz="3200" b="0" i="0" u="none" strike="noStrike" cap="none" dirty="0">
+              <a:t>Dead at Age 52</a:t>
+            </a:r>
+            <a:endParaRPr sz="2000" b="0" i="0" u="none" strike="noStrike" cap="none" dirty="0">
               <a:solidFill>
                 <a:srgbClr val="000000"/>
               </a:solidFill>
@@ -9181,80 +8202,10 @@
       </p:sp>
       <p:sp>
         <p:nvSpPr>
-          <p:cNvPr id="8" name="Google Shape;170;p31">
-            <a:extLst>
-              <a:ext uri="{FF2B5EF4-FFF2-40B4-BE49-F238E27FC236}">
-                <a16:creationId xmlns:a16="http://schemas.microsoft.com/office/drawing/2014/main" id="{D328ABDE-E232-3EB7-C3F2-B4BB7B64262F}"/>
-              </a:ext>
-            </a:extLst>
-          </p:cNvPr>
-          <p:cNvSpPr/>
-          <p:nvPr/>
-        </p:nvSpPr>
-        <p:spPr>
-          <a:xfrm>
-            <a:off x="7526107" y="5681420"/>
-            <a:ext cx="4550222" cy="548230"/>
-          </a:xfrm>
-          <a:prstGeom prst="rect">
-            <a:avLst/>
-          </a:prstGeom>
-          <a:solidFill>
-            <a:srgbClr val="C00000"/>
-          </a:solidFill>
-          <a:ln>
-            <a:noFill/>
-          </a:ln>
-        </p:spPr>
-        <p:txBody>
-          <a:bodyPr spcFirstLastPara="1" wrap="square" lIns="91425" tIns="45700" rIns="91425" bIns="45700" anchor="ctr" anchorCtr="0">
-            <a:noAutofit/>
-          </a:bodyPr>
-          <a:lstStyle/>
-          <a:p>
-            <a:pPr marL="0" marR="0" lvl="0" indent="0" algn="ctr" rtl="0">
-              <a:lnSpc>
-                <a:spcPct val="100000"/>
-              </a:lnSpc>
-              <a:spcBef>
-                <a:spcPts val="0"/>
-              </a:spcBef>
-              <a:spcAft>
-                <a:spcPts val="0"/>
-              </a:spcAft>
-              <a:buClr>
-                <a:srgbClr val="000000"/>
-              </a:buClr>
-              <a:buSzPts val="1600"/>
-              <a:buFont typeface="Arial"/>
-              <a:buNone/>
-            </a:pPr>
-            <a:r>
-              <a:rPr lang="en-US" sz="3600" dirty="0">
-                <a:solidFill>
-                  <a:schemeClr val="lt1"/>
-                </a:solidFill>
-              </a:rPr>
-              <a:t>Dead at Age 42</a:t>
-            </a:r>
-            <a:endParaRPr sz="2000" b="0" i="0" u="none" strike="noStrike" cap="none" dirty="0">
-              <a:solidFill>
-                <a:srgbClr val="000000"/>
-              </a:solidFill>
-              <a:latin typeface="Arial"/>
-              <a:ea typeface="Arial"/>
-              <a:cs typeface="Arial"/>
-              <a:sym typeface="Arial"/>
-            </a:endParaRPr>
-          </a:p>
-        </p:txBody>
-      </p:sp>
-      <p:sp>
-        <p:nvSpPr>
           <p:cNvPr id="10" name="TextBox 9">
             <a:extLst>
               <a:ext uri="{FF2B5EF4-FFF2-40B4-BE49-F238E27FC236}">
-                <a16:creationId xmlns:a16="http://schemas.microsoft.com/office/drawing/2014/main" id="{5FA0D8B2-6B55-D3DC-BCBB-6FEAD86B9E72}"/>
+                <a16:creationId xmlns:a16="http://schemas.microsoft.com/office/drawing/2014/main" id="{ABFEA484-AE6A-906E-D59E-C3F7E9DDD90C}"/>
               </a:ext>
             </a:extLst>
           </p:cNvPr>
@@ -9263,8 +8214,8 @@
         </p:nvSpPr>
         <p:spPr>
           <a:xfrm>
-            <a:off x="312431" y="2175372"/>
-            <a:ext cx="6987941" cy="3046988"/>
+            <a:off x="208343" y="1805721"/>
+            <a:ext cx="7816976" cy="4031873"/>
           </a:xfrm>
           <a:prstGeom prst="rect">
             <a:avLst/>
@@ -9289,7 +8240,8 @@
               <a:buChar char="•"/>
             </a:pPr>
             <a:r>
-              <a:t>Blown up by a BOMB hidden inside a cafe he visited DAILY in Donetsk. Age 42.</a:t>
+              <a:rPr dirty="0"/>
+              <a:t>America's most famous journalist — syndicated to 20 MILLION readers. Found dead of a barbiturate overdose at age 52. Ruled "circumstances undetermined."</a:t>
             </a:r>
           </a:p>
           <a:p>
@@ -9301,7 +8253,8 @@
               <a:buChar char="•"/>
             </a:pPr>
             <a:r>
-              <a:t>The bomb was concealed in a LIGHTING FIXTURE above his usual seat — someone knew his exact habits.</a:t>
+              <a:rPr dirty="0"/>
+              <a:t>She was investigating the JFK ASSASSINATION and told friends she was about to "BREAK THE CASE WIDE OPEN."</a:t>
             </a:r>
           </a:p>
           <a:p>
@@ -9313,7 +8266,8 @@
               <a:buChar char="•"/>
             </a:pPr>
             <a:r>
-              <a:t>Both Ukraine AND Russia have been accused. His own security apparatus was likely PENETRATED.</a:t>
+              <a:rPr dirty="0"/>
+              <a:t>She secured the ONLY private interview with Jack Ruby — the man who killed the man accused of killing the President.</a:t>
             </a:r>
           </a:p>
           <a:p>
@@ -9325,7 +8279,8 @@
               <a:buChar char="•"/>
             </a:pPr>
             <a:r>
-              <a:t>His successor was installed within DAYS — someone was READY for his removal.</a:t>
+              <a:rPr dirty="0"/>
+              <a:t>Her INVESTIGATION FILE — described as a thick folder of documents — VANISHED after her death and has NEVER been found.</a:t>
             </a:r>
           </a:p>
           <a:p>
@@ -9337,14 +8292,105 @@
               <a:buChar char="•"/>
             </a:pPr>
             <a:r>
-              <a:t>Part of a pattern: separatist leaders in Donbas were being ELIMINATED one by one.</a:t>
-            </a:r>
+              <a:rPr dirty="0"/>
+              <a:t>Found in a room that WASN'T her bedroom, fully dressed and made up — inconsistent with her known habits. No real investigation was ever conducted.</a:t>
+            </a:r>
+          </a:p>
+        </p:txBody>
+      </p:sp>
+      <p:sp>
+        <p:nvSpPr>
+          <p:cNvPr id="6" name="AutoShape 2" descr="Fundraiser for Sky Roberts by Annie Farmer : Help Virginia Roberts  Giuffre's Family Carry On Her Legacy">
+            <a:extLst>
+              <a:ext uri="{FF2B5EF4-FFF2-40B4-BE49-F238E27FC236}">
+                <a16:creationId xmlns:a16="http://schemas.microsoft.com/office/drawing/2014/main" id="{77876416-18B8-24A2-30FD-8E520F869817}"/>
+              </a:ext>
+            </a:extLst>
+          </p:cNvPr>
+          <p:cNvSpPr>
+            <a:spLocks noChangeAspect="1" noChangeArrowheads="1"/>
+          </p:cNvSpPr>
+          <p:nvPr/>
+        </p:nvSpPr>
+        <p:spPr bwMode="auto">
+          <a:xfrm>
+            <a:off x="5943600" y="3276600"/>
+            <a:ext cx="304800" cy="304800"/>
+          </a:xfrm>
+          <a:prstGeom prst="rect">
+            <a:avLst/>
+          </a:prstGeom>
+          <a:noFill/>
+          <a:extLst>
+            <a:ext uri="{909E8E84-426E-40DD-AFC4-6F175D3DCCD1}">
+              <a14:hiddenFill xmlns:a14="http://schemas.microsoft.com/office/drawing/2010/main">
+                <a:solidFill>
+                  <a:srgbClr val="FFFFFF"/>
+                </a:solidFill>
+              </a14:hiddenFill>
+            </a:ext>
+          </a:extLst>
+        </p:spPr>
+        <p:txBody>
+          <a:bodyPr vert="horz" wrap="square" lIns="91440" tIns="45720" rIns="91440" bIns="45720" numCol="1" anchor="t" anchorCtr="0" compatLnSpc="1">
+            <a:prstTxWarp prst="textNoShape">
+              <a:avLst/>
+            </a:prstTxWarp>
+          </a:bodyPr>
+          <a:lstStyle/>
+          <a:p>
+            <a:endParaRPr lang="en-US"/>
+          </a:p>
+        </p:txBody>
+      </p:sp>
+      <p:sp>
+        <p:nvSpPr>
+          <p:cNvPr id="11" name="AutoShape 4" descr="Fundraiser for Sky Roberts by Annie Farmer : Help Virginia Roberts  Giuffre's Family Carry On Her Legacy">
+            <a:extLst>
+              <a:ext uri="{FF2B5EF4-FFF2-40B4-BE49-F238E27FC236}">
+                <a16:creationId xmlns:a16="http://schemas.microsoft.com/office/drawing/2014/main" id="{414B4E2B-C54A-135F-B3A8-DA7C31104A94}"/>
+              </a:ext>
+            </a:extLst>
+          </p:cNvPr>
+          <p:cNvSpPr>
+            <a:spLocks noChangeAspect="1" noChangeArrowheads="1"/>
+          </p:cNvSpPr>
+          <p:nvPr/>
+        </p:nvSpPr>
+        <p:spPr bwMode="auto">
+          <a:xfrm>
+            <a:off x="6096000" y="3429000"/>
+            <a:ext cx="304800" cy="304800"/>
+          </a:xfrm>
+          <a:prstGeom prst="rect">
+            <a:avLst/>
+          </a:prstGeom>
+          <a:noFill/>
+          <a:extLst>
+            <a:ext uri="{909E8E84-426E-40DD-AFC4-6F175D3DCCD1}">
+              <a14:hiddenFill xmlns:a14="http://schemas.microsoft.com/office/drawing/2010/main">
+                <a:solidFill>
+                  <a:srgbClr val="FFFFFF"/>
+                </a:solidFill>
+              </a14:hiddenFill>
+            </a:ext>
+          </a:extLst>
+        </p:spPr>
+        <p:txBody>
+          <a:bodyPr vert="horz" wrap="square" lIns="91440" tIns="45720" rIns="91440" bIns="45720" numCol="1" anchor="t" anchorCtr="0" compatLnSpc="1">
+            <a:prstTxWarp prst="textNoShape">
+              <a:avLst/>
+            </a:prstTxWarp>
+          </a:bodyPr>
+          <a:lstStyle/>
+          <a:p>
+            <a:endParaRPr lang="en-US"/>
           </a:p>
         </p:txBody>
       </p:sp>
       <p:pic>
         <p:nvPicPr>
-          <p:cNvPr id="16" name="Picture 15" descr="Alexander_Zakharchenko.jpg"/>
+          <p:cNvPr id="16" name="Picture 15" descr="Dorothy_Kilgallen.jpg"/>
           <p:cNvPicPr>
             <a:picLocks noChangeAspect="1"/>
           </p:cNvPicPr>
@@ -9358,14 +8404,84 @@
         </p:blipFill>
         <p:spPr>
           <a:xfrm>
-            <a:off x="8139098" y="1100088"/>
-            <a:ext cx="3003770" cy="3884876"/>
+            <a:off x="8144168" y="1084146"/>
+            <a:ext cx="3882867" cy="3856982"/>
           </a:xfrm>
           <a:prstGeom prst="rect">
             <a:avLst/>
           </a:prstGeom>
         </p:spPr>
       </p:pic>
+      <p:sp>
+        <p:nvSpPr>
+          <p:cNvPr id="7" name="Google Shape;170;p31">
+            <a:extLst>
+              <a:ext uri="{FF2B5EF4-FFF2-40B4-BE49-F238E27FC236}">
+                <a16:creationId xmlns:a16="http://schemas.microsoft.com/office/drawing/2014/main" id="{A2DF07F5-EEA0-8A2E-7E11-3E1CC4C2B695}"/>
+              </a:ext>
+            </a:extLst>
+          </p:cNvPr>
+          <p:cNvSpPr/>
+          <p:nvPr/>
+        </p:nvSpPr>
+        <p:spPr>
+          <a:xfrm>
+            <a:off x="7506336" y="4925186"/>
+            <a:ext cx="4550222" cy="869505"/>
+          </a:xfrm>
+          <a:prstGeom prst="rect">
+            <a:avLst/>
+          </a:prstGeom>
+          <a:solidFill>
+            <a:srgbClr val="C00000"/>
+          </a:solidFill>
+          <a:ln>
+            <a:noFill/>
+          </a:ln>
+        </p:spPr>
+        <p:txBody>
+          <a:bodyPr spcFirstLastPara="1" wrap="square" lIns="91425" tIns="45700" rIns="91425" bIns="45700" anchor="ctr" anchorCtr="0">
+            <a:noAutofit/>
+          </a:bodyPr>
+          <a:lstStyle/>
+          <a:p>
+            <a:pPr marL="0" marR="0" lvl="0" indent="0" algn="ctr" rtl="0">
+              <a:lnSpc>
+                <a:spcPct val="100000"/>
+              </a:lnSpc>
+              <a:spcBef>
+                <a:spcPts val="0"/>
+              </a:spcBef>
+              <a:spcAft>
+                <a:spcPts val="0"/>
+              </a:spcAft>
+              <a:buClr>
+                <a:srgbClr val="000000"/>
+              </a:buClr>
+              <a:buSzPts val="1600"/>
+              <a:buFont typeface="Arial"/>
+              <a:buNone/>
+            </a:pPr>
+            <a:r>
+              <a:rPr lang="en-US" sz="4400" dirty="0">
+                <a:solidFill>
+                  <a:schemeClr val="lt1"/>
+                </a:solidFill>
+              </a:rPr>
+              <a:t>Dorothy Kilgallen</a:t>
+            </a:r>
+            <a:endParaRPr sz="2800" b="0" i="0" u="none" strike="noStrike" cap="none" dirty="0">
+              <a:solidFill>
+                <a:srgbClr val="000000"/>
+              </a:solidFill>
+              <a:latin typeface="Arial"/>
+              <a:ea typeface="Arial"/>
+              <a:cs typeface="Arial"/>
+              <a:sym typeface="Arial"/>
+            </a:endParaRPr>
+          </a:p>
+        </p:txBody>
+      </p:sp>
     </p:spTree>
   </p:cSld>
   <p:clrMapOvr>
@@ -9429,7 +8545,7 @@
                   <a:schemeClr val="accent5"/>
                 </a:solidFill>
               </a:rPr>
-              <a:t>Why / How they Alexei Navalny:</a:t>
+              <a:t>Why / How they Philip Leonard:</a:t>
             </a:r>
           </a:p>
         </p:txBody>
@@ -9608,7 +8724,7 @@
           <a:p>
             <a:r>
               <a:rPr lang="en-US" sz="2400" dirty="0"/>
-              <a:t>https://intelligencemurders.com/intelligence-service-murders</a:t>
+              <a:t>https://intelligencemurders.com/intel</a:t>
             </a:r>
           </a:p>
         </p:txBody>
@@ -9669,7 +8785,7 @@
                   <a:schemeClr val="lt1"/>
                 </a:solidFill>
               </a:rPr>
-              <a:t>Alexei Navalny</a:t>
+              <a:t>Philip Leonard</a:t>
             </a:r>
             <a:endParaRPr sz="3200" b="0" i="0" u="none" strike="noStrike" cap="none" dirty="0">
               <a:solidFill>
@@ -9739,7 +8855,7 @@
                   <a:schemeClr val="lt1"/>
                 </a:solidFill>
               </a:rPr>
-              <a:t>Dead at Age 47</a:t>
+              <a:t>Dead at Age 44</a:t>
             </a:r>
             <a:endParaRPr sz="2000" b="0" i="0" u="none" strike="noStrike" cap="none" dirty="0">
               <a:solidFill>
@@ -9767,8 +8883,8 @@
         </p:nvSpPr>
         <p:spPr>
           <a:xfrm>
-            <a:off x="312431" y="2175372"/>
-            <a:ext cx="6987941" cy="3046988"/>
+            <a:off x="191731" y="1937976"/>
+            <a:ext cx="7648046" cy="3754874"/>
           </a:xfrm>
           <a:prstGeom prst="rect">
             <a:avLst/>
@@ -9793,7 +8909,8 @@
               <a:buChar char="•"/>
             </a:pPr>
             <a:r>
-              <a:t>Survived FSB NOVICHOK poisoning in 2020, then TRICKED his assassin into confessing on a recorded phone call.</a:t>
+              <a:rPr dirty="0"/>
+              <a:t>Los Alamos nuclear weapons lab HIGH-EXPLOSIVES chemist — killed at age 44 in a head-on collision on the road TO the lab.</a:t>
             </a:r>
           </a:p>
           <a:p>
@@ -9805,7 +8922,8 @@
               <a:buChar char="•"/>
             </a:pPr>
             <a:r>
-              <a:t>Died in an ARCTIC prison at age 47. Five European nations confirmed he was poisoned with FROG TOXIN.</a:t>
+              <a:rPr dirty="0"/>
+              <a:t>Another driver crossed the DOUBLE YELLOW LINE into his lane. No public explanation for WHY has ever been released.</a:t>
             </a:r>
           </a:p>
           <a:p>
@@ -9817,7 +8935,8 @@
               <a:buChar char="•"/>
             </a:pPr>
             <a:r>
-              <a:t>Appeared HEALTHY at a court hearing ONE DAY before his death. Russia claims "cardiac arrhythmia."</a:t>
+              <a:rPr dirty="0"/>
+              <a:t>His specialty was the most CLASSIFIED research at LANL — explosive compounds used in nuclear WARHEAD design.</a:t>
             </a:r>
           </a:p>
           <a:p>
@@ -9829,7 +8948,8 @@
               <a:buChar char="•"/>
             </a:pPr>
             <a:r>
-              <a:t>His anti-corruption videos exposing Putin's $1.35 BILLION palace got 130 MILLION views on YouTube.</a:t>
+              <a:rPr dirty="0"/>
+              <a:t>His death came at the START of a cluster of defense scientist deaths in the New Mexico corridor throughout 2024-2025.</a:t>
             </a:r>
           </a:p>
           <a:p>
@@ -9841,14 +8961,15 @@
               <a:buChar char="•"/>
             </a:pPr>
             <a:r>
-              <a:t>His wife vowed to continue his work. "If they decide to KILL me, it means we are incredibly STRONG."</a:t>
+              <a:rPr dirty="0"/>
+              <a:t>A SECOND defense scientist in the same New Mexico corridor was MURDERED just weeks later — Christopher Fallen of the Air Force Research Lab.</a:t>
             </a:r>
           </a:p>
         </p:txBody>
       </p:sp>
       <p:pic>
         <p:nvPicPr>
-          <p:cNvPr id="16" name="Picture 15" descr="Alexei_Navalny.jpg"/>
+          <p:cNvPr id="16" name="Picture 15" descr="Philip_Leonard.jpg"/>
           <p:cNvPicPr>
             <a:picLocks noChangeAspect="1"/>
           </p:cNvPicPr>
@@ -9862,8 +8983,8 @@
         </p:blipFill>
         <p:spPr>
           <a:xfrm>
-            <a:off x="8223003" y="1100088"/>
-            <a:ext cx="2835959" cy="3884876"/>
+            <a:off x="9309676" y="1070199"/>
+            <a:ext cx="2746882" cy="3884876"/>
           </a:xfrm>
           <a:prstGeom prst="rect">
             <a:avLst/>
@@ -9871,6 +8992,11 @@
         </p:spPr>
       </p:pic>
     </p:spTree>
+    <p:extLst>
+      <p:ext uri="{BB962C8B-B14F-4D97-AF65-F5344CB8AC3E}">
+        <p14:creationId xmlns:p14="http://schemas.microsoft.com/office/powerpoint/2010/main" val="917079305"/>
+      </p:ext>
+    </p:extLst>
   </p:cSld>
   <p:clrMapOvr>
     <a:masterClrMapping/>
@@ -9933,7 +9059,7 @@
                   <a:schemeClr val="accent5"/>
                 </a:solidFill>
               </a:rPr>
-              <a:t>Why / How they Robert F Kennedy:</a:t>
+              <a:t>Why / How they Alfred Herrhausen:</a:t>
             </a:r>
           </a:p>
         </p:txBody>
@@ -10064,7 +9190,7 @@
                   <a:schemeClr val="lt1"/>
                 </a:solidFill>
               </a:rPr>
-              <a:t> 80+ Murdered: UAP Experts Exposed</a:t>
+              <a:t> 150+ Murdered: by Intelligence Services</a:t>
             </a:r>
             <a:endParaRPr sz="3200" b="0" i="0" u="none" strike="noStrike" cap="none" dirty="0">
               <a:solidFill>
@@ -10112,7 +9238,7 @@
           <a:p>
             <a:r>
               <a:rPr lang="en-US" sz="2400" dirty="0"/>
-              <a:t>https://uapmurders.com/uaps</a:t>
+              <a:t>https://intelligencemurders.com/intel</a:t>
             </a:r>
           </a:p>
         </p:txBody>
@@ -10173,7 +9299,7 @@
                   <a:schemeClr val="lt1"/>
                 </a:solidFill>
               </a:rPr>
-              <a:t>Robert F Kennedy</a:t>
+              <a:t>Alfred Herrhausen</a:t>
             </a:r>
             <a:endParaRPr sz="3200" b="0" i="0" u="none" strike="noStrike" cap="none" dirty="0">
               <a:solidFill>
@@ -10243,7 +9369,7 @@
                   <a:schemeClr val="lt1"/>
                 </a:solidFill>
               </a:rPr>
-              <a:t>Dead at Age 42</a:t>
+              <a:t>Dead at Age 59</a:t>
             </a:r>
             <a:endParaRPr sz="2000" b="0" i="0" u="none" strike="noStrike" cap="none" dirty="0">
               <a:solidFill>
@@ -10297,7 +9423,7 @@
               <a:buChar char="•"/>
             </a:pPr>
             <a:r>
-              <a:t>U.S. Senator and presidential candidate ASSASSINATED at age 42 in Los Angeles — June 1968.</a:t>
+              <a:t>Chairman of Deutsche Bank killed by a MILITARY-GRADE bomb hidden in a child's knapsack on a bicycle.</a:t>
             </a:r>
           </a:p>
           <a:p>
@@ -10309,7 +9435,7 @@
               <a:buChar char="•"/>
             </a:pPr>
             <a:r>
-              <a:t>Dean Warwick claimed he was about to name RFK's real killer on stage — then COLLAPSED and DIED mid-sentence.</a:t>
+              <a:t>Killed 21 DAYS after the Berlin Wall fell. Was scheduled to present his reunification plan the NEXT DAY.</a:t>
             </a:r>
           </a:p>
           <a:p>
@@ -10321,7 +9447,7 @@
               <a:buChar char="•"/>
             </a:pPr>
             <a:r>
-              <a:t>The official story blames Sirhan Sirhan — but forensic evidence suggests shots from behind, where Sirhan was not.</a:t>
+              <a:t>The bomb used an INFRARED TRIGGER that distinguished his armored car from the lead vehicle — military precision.</a:t>
             </a:r>
           </a:p>
           <a:p>
@@ -10333,7 +9459,7 @@
               <a:buChar char="•"/>
             </a:pPr>
             <a:r>
-              <a:t>Some researchers connect his assassination to his potential access to classified UFO programs had he become president.</a:t>
+              <a:t>He said weeks before: "I know there is a group of people who have an INTEREST in my death."</a:t>
             </a:r>
           </a:p>
           <a:p>
@@ -10345,14 +9471,14 @@
               <a:buChar char="•"/>
             </a:pPr>
             <a:r>
-              <a:t>His brother JFK was killed five years earlier — two Kennedys, both assassinated during the peak of UFO secrecy.</a:t>
+              <a:t>Case remains COMPLETELY UNSOLVED — no arrests, no trial, no accountability after 35+ years.</a:t>
             </a:r>
           </a:p>
         </p:txBody>
       </p:sp>
       <p:pic>
         <p:nvPicPr>
-          <p:cNvPr id="16" name="Picture 15" descr="Robert_F_Kennedy.jpg"/>
+          <p:cNvPr id="16" name="Picture 15" descr="Alfred_Herrhausen.jpg"/>
           <p:cNvPicPr>
             <a:picLocks noChangeAspect="1"/>
           </p:cNvPicPr>
@@ -10366,8 +9492,8 @@
         </p:blipFill>
         <p:spPr>
           <a:xfrm>
-            <a:off x="8077557" y="1100088"/>
-            <a:ext cx="3126851" cy="3884876"/>
+            <a:off x="8339550" y="1100088"/>
+            <a:ext cx="2602866" cy="3884876"/>
           </a:xfrm>
           <a:prstGeom prst="rect">
             <a:avLst/>
@@ -10399,464 +9525,9 @@
           <a:chExt cx="0" cy="0"/>
         </a:xfrm>
       </p:grpSpPr>
-      <p:sp>
-        <p:nvSpPr>
-          <p:cNvPr id="15" name="TextBox 14">
-            <a:extLst>
-              <a:ext uri="{FF2B5EF4-FFF2-40B4-BE49-F238E27FC236}">
-                <a16:creationId xmlns:a16="http://schemas.microsoft.com/office/drawing/2014/main" id="{E478240E-251B-5BA6-3C45-7E6620400769}"/>
-              </a:ext>
-            </a:extLst>
-          </p:cNvPr>
-          <p:cNvSpPr txBox="1"/>
-          <p:nvPr/>
-        </p:nvSpPr>
-        <p:spPr>
-          <a:xfrm>
-            <a:off x="312432" y="1288262"/>
-            <a:ext cx="6494294" cy="584775"/>
-          </a:xfrm>
-          <a:prstGeom prst="rect">
-            <a:avLst/>
-          </a:prstGeom>
-          <a:solidFill>
-            <a:schemeClr val="bg1">
-              <a:alpha val="84400"/>
-            </a:schemeClr>
-          </a:solidFill>
-        </p:spPr>
-        <p:txBody>
-          <a:bodyPr wrap="square" rtlCol="0">
-            <a:spAutoFit/>
-          </a:bodyPr>
-          <a:lstStyle/>
-          <a:p>
-            <a:r>
-              <a:rPr lang="en-US" sz="3200" b="1" dirty="0">
-                <a:solidFill>
-                  <a:schemeClr val="accent5"/>
-                </a:solidFill>
-              </a:rPr>
-              <a:t>Why / How they Alfred Herrhausen:</a:t>
-            </a:r>
-          </a:p>
-        </p:txBody>
-      </p:sp>
-      <p:sp>
-        <p:nvSpPr>
-          <p:cNvPr id="3" name="Google Shape;170;p31">
-            <a:extLst>
-              <a:ext uri="{FF2B5EF4-FFF2-40B4-BE49-F238E27FC236}">
-                <a16:creationId xmlns:a16="http://schemas.microsoft.com/office/drawing/2014/main" id="{A4695FE5-0AA5-AB05-98B1-B5B8E3FA8CBE}"/>
-              </a:ext>
-            </a:extLst>
-          </p:cNvPr>
-          <p:cNvSpPr/>
-          <p:nvPr/>
-        </p:nvSpPr>
-        <p:spPr>
-          <a:xfrm>
-            <a:off x="191731" y="5732890"/>
-            <a:ext cx="3431270" cy="496760"/>
-          </a:xfrm>
-          <a:prstGeom prst="rect">
-            <a:avLst/>
-          </a:prstGeom>
-          <a:solidFill>
-            <a:schemeClr val="accent5"/>
-          </a:solidFill>
-          <a:ln>
-            <a:noFill/>
-          </a:ln>
-        </p:spPr>
-        <p:txBody>
-          <a:bodyPr spcFirstLastPara="1" wrap="square" lIns="91425" tIns="45700" rIns="91425" bIns="45700" anchor="ctr" anchorCtr="0">
-            <a:noAutofit/>
-          </a:bodyPr>
-          <a:lstStyle/>
-          <a:p>
-            <a:pPr marL="0" marR="0" lvl="0" indent="0" algn="ctr" rtl="0">
-              <a:lnSpc>
-                <a:spcPct val="100000"/>
-              </a:lnSpc>
-              <a:spcBef>
-                <a:spcPts val="0"/>
-              </a:spcBef>
-              <a:spcAft>
-                <a:spcPts val="0"/>
-              </a:spcAft>
-              <a:buClr>
-                <a:srgbClr val="000000"/>
-              </a:buClr>
-              <a:buSzPts val="1600"/>
-              <a:buFont typeface="Arial"/>
-              <a:buNone/>
-            </a:pPr>
-            <a:r>
-              <a:rPr lang="en-US" sz="3600" dirty="0">
-                <a:solidFill>
-                  <a:schemeClr val="lt1"/>
-                </a:solidFill>
-              </a:rPr>
-              <a:t>Read List Here:</a:t>
-            </a:r>
-            <a:endParaRPr sz="2000" b="0" i="0" u="none" strike="noStrike" cap="none" dirty="0">
-              <a:solidFill>
-                <a:srgbClr val="000000"/>
-              </a:solidFill>
-              <a:latin typeface="Arial"/>
-              <a:ea typeface="Arial"/>
-              <a:cs typeface="Arial"/>
-              <a:sym typeface="Arial"/>
-            </a:endParaRPr>
-          </a:p>
-        </p:txBody>
-      </p:sp>
-      <p:sp>
-        <p:nvSpPr>
-          <p:cNvPr id="5" name="Google Shape;170;p31">
-            <a:extLst>
-              <a:ext uri="{FF2B5EF4-FFF2-40B4-BE49-F238E27FC236}">
-                <a16:creationId xmlns:a16="http://schemas.microsoft.com/office/drawing/2014/main" id="{98132413-6ED2-8B36-74B6-3C503B1A4634}"/>
-              </a:ext>
-            </a:extLst>
-          </p:cNvPr>
-          <p:cNvSpPr/>
-          <p:nvPr/>
-        </p:nvSpPr>
-        <p:spPr>
-          <a:xfrm>
-            <a:off x="0" y="-31518"/>
-            <a:ext cx="12192000" cy="1131606"/>
-          </a:xfrm>
-          <a:prstGeom prst="rect">
-            <a:avLst/>
-          </a:prstGeom>
-          <a:solidFill>
-            <a:srgbClr val="C00000"/>
-          </a:solidFill>
-          <a:ln>
-            <a:noFill/>
-          </a:ln>
-        </p:spPr>
-        <p:txBody>
-          <a:bodyPr spcFirstLastPara="1" wrap="square" lIns="91425" tIns="45700" rIns="91425" bIns="45700" anchor="ctr" anchorCtr="0">
-            <a:noAutofit/>
-          </a:bodyPr>
-          <a:lstStyle/>
-          <a:p>
-            <a:pPr marL="0" marR="0" lvl="0" indent="0" rtl="0">
-              <a:lnSpc>
-                <a:spcPct val="100000"/>
-              </a:lnSpc>
-              <a:spcBef>
-                <a:spcPts val="0"/>
-              </a:spcBef>
-              <a:spcAft>
-                <a:spcPts val="0"/>
-              </a:spcAft>
-              <a:buClr>
-                <a:srgbClr val="000000"/>
-              </a:buClr>
-              <a:buSzPts val="1600"/>
-              <a:buFont typeface="Arial"/>
-              <a:buNone/>
-            </a:pPr>
-            <a:r>
-              <a:rPr lang="en-US" sz="4800" dirty="0">
-                <a:solidFill>
-                  <a:schemeClr val="lt1"/>
-                </a:solidFill>
-              </a:rPr>
-              <a:t> 150+ Murdered: by Intelligence Services</a:t>
-            </a:r>
-            <a:endParaRPr sz="3200" b="0" i="0" u="none" strike="noStrike" cap="none" dirty="0">
-              <a:solidFill>
-                <a:srgbClr val="000000"/>
-              </a:solidFill>
-              <a:latin typeface="Arial"/>
-              <a:ea typeface="Arial"/>
-              <a:cs typeface="Arial"/>
-              <a:sym typeface="Arial"/>
-            </a:endParaRPr>
-          </a:p>
-        </p:txBody>
-      </p:sp>
-      <p:sp>
-        <p:nvSpPr>
-          <p:cNvPr id="4" name="TextBox 3">
-            <a:extLst>
-              <a:ext uri="{FF2B5EF4-FFF2-40B4-BE49-F238E27FC236}">
-                <a16:creationId xmlns:a16="http://schemas.microsoft.com/office/drawing/2014/main" id="{50D7621F-9D36-7894-7117-9F831EF5EFA6}"/>
-              </a:ext>
-            </a:extLst>
-          </p:cNvPr>
-          <p:cNvSpPr txBox="1"/>
-          <p:nvPr/>
-        </p:nvSpPr>
-        <p:spPr>
-          <a:xfrm>
-            <a:off x="107300" y="6229650"/>
-            <a:ext cx="11685989" cy="461665"/>
-          </a:xfrm>
-          <a:prstGeom prst="rect">
-            <a:avLst/>
-          </a:prstGeom>
-          <a:solidFill>
-            <a:schemeClr val="bg1">
-              <a:alpha val="84400"/>
-            </a:schemeClr>
-          </a:solidFill>
-        </p:spPr>
-        <p:txBody>
-          <a:bodyPr wrap="square" rtlCol="0">
-            <a:spAutoFit/>
-          </a:bodyPr>
-          <a:lstStyle/>
-          <a:p>
-            <a:r>
-              <a:rPr lang="en-US" sz="2400" dirty="0"/>
-              <a:t>https://intelligencemurders.com/intelligence-service-murders</a:t>
-            </a:r>
-          </a:p>
-        </p:txBody>
-      </p:sp>
-      <p:sp>
-        <p:nvSpPr>
-          <p:cNvPr id="7" name="Google Shape;170;p31">
-            <a:extLst>
-              <a:ext uri="{FF2B5EF4-FFF2-40B4-BE49-F238E27FC236}">
-                <a16:creationId xmlns:a16="http://schemas.microsoft.com/office/drawing/2014/main" id="{4B582382-76AA-B49E-C611-39A37CE591B9}"/>
-              </a:ext>
-            </a:extLst>
-          </p:cNvPr>
-          <p:cNvSpPr/>
-          <p:nvPr/>
-        </p:nvSpPr>
-        <p:spPr>
-          <a:xfrm>
-            <a:off x="7506336" y="4925186"/>
-            <a:ext cx="4550222" cy="869505"/>
-          </a:xfrm>
-          <a:prstGeom prst="rect">
-            <a:avLst/>
-          </a:prstGeom>
-          <a:solidFill>
-            <a:srgbClr val="C00000"/>
-          </a:solidFill>
-          <a:ln>
-            <a:noFill/>
-          </a:ln>
-        </p:spPr>
-        <p:txBody>
-          <a:bodyPr spcFirstLastPara="1" wrap="square" lIns="91425" tIns="45700" rIns="91425" bIns="45700" anchor="ctr" anchorCtr="0">
-            <a:noAutofit/>
-          </a:bodyPr>
-          <a:lstStyle/>
-          <a:p>
-            <a:pPr marL="0" marR="0" lvl="0" indent="0" algn="ctr" rtl="0">
-              <a:lnSpc>
-                <a:spcPct val="100000"/>
-              </a:lnSpc>
-              <a:spcBef>
-                <a:spcPts val="0"/>
-              </a:spcBef>
-              <a:spcAft>
-                <a:spcPts val="0"/>
-              </a:spcAft>
-              <a:buClr>
-                <a:srgbClr val="000000"/>
-              </a:buClr>
-              <a:buSzPts val="1600"/>
-              <a:buFont typeface="Arial"/>
-              <a:buNone/>
-            </a:pPr>
-            <a:r>
-              <a:rPr lang="en-US" sz="4800" dirty="0">
-                <a:solidFill>
-                  <a:schemeClr val="lt1"/>
-                </a:solidFill>
-              </a:rPr>
-              <a:t>Alfred Herrhausen</a:t>
-            </a:r>
-            <a:endParaRPr sz="3200" b="0" i="0" u="none" strike="noStrike" cap="none" dirty="0">
-              <a:solidFill>
-                <a:srgbClr val="000000"/>
-              </a:solidFill>
-              <a:latin typeface="Arial"/>
-              <a:ea typeface="Arial"/>
-              <a:cs typeface="Arial"/>
-              <a:sym typeface="Arial"/>
-            </a:endParaRPr>
-          </a:p>
-        </p:txBody>
-      </p:sp>
-      <p:sp>
-        <p:nvSpPr>
-          <p:cNvPr id="8" name="Google Shape;170;p31">
-            <a:extLst>
-              <a:ext uri="{FF2B5EF4-FFF2-40B4-BE49-F238E27FC236}">
-                <a16:creationId xmlns:a16="http://schemas.microsoft.com/office/drawing/2014/main" id="{D328ABDE-E232-3EB7-C3F2-B4BB7B64262F}"/>
-              </a:ext>
-            </a:extLst>
-          </p:cNvPr>
-          <p:cNvSpPr/>
-          <p:nvPr/>
-        </p:nvSpPr>
-        <p:spPr>
-          <a:xfrm>
-            <a:off x="7526107" y="5681420"/>
-            <a:ext cx="4550222" cy="548230"/>
-          </a:xfrm>
-          <a:prstGeom prst="rect">
-            <a:avLst/>
-          </a:prstGeom>
-          <a:solidFill>
-            <a:srgbClr val="C00000"/>
-          </a:solidFill>
-          <a:ln>
-            <a:noFill/>
-          </a:ln>
-        </p:spPr>
-        <p:txBody>
-          <a:bodyPr spcFirstLastPara="1" wrap="square" lIns="91425" tIns="45700" rIns="91425" bIns="45700" anchor="ctr" anchorCtr="0">
-            <a:noAutofit/>
-          </a:bodyPr>
-          <a:lstStyle/>
-          <a:p>
-            <a:pPr marL="0" marR="0" lvl="0" indent="0" algn="ctr" rtl="0">
-              <a:lnSpc>
-                <a:spcPct val="100000"/>
-              </a:lnSpc>
-              <a:spcBef>
-                <a:spcPts val="0"/>
-              </a:spcBef>
-              <a:spcAft>
-                <a:spcPts val="0"/>
-              </a:spcAft>
-              <a:buClr>
-                <a:srgbClr val="000000"/>
-              </a:buClr>
-              <a:buSzPts val="1600"/>
-              <a:buFont typeface="Arial"/>
-              <a:buNone/>
-            </a:pPr>
-            <a:r>
-              <a:rPr lang="en-US" sz="3600" dirty="0">
-                <a:solidFill>
-                  <a:schemeClr val="lt1"/>
-                </a:solidFill>
-              </a:rPr>
-              <a:t>Dead at Age 59</a:t>
-            </a:r>
-            <a:endParaRPr sz="2000" b="0" i="0" u="none" strike="noStrike" cap="none" dirty="0">
-              <a:solidFill>
-                <a:srgbClr val="000000"/>
-              </a:solidFill>
-              <a:latin typeface="Arial"/>
-              <a:ea typeface="Arial"/>
-              <a:cs typeface="Arial"/>
-              <a:sym typeface="Arial"/>
-            </a:endParaRPr>
-          </a:p>
-        </p:txBody>
-      </p:sp>
-      <p:sp>
-        <p:nvSpPr>
-          <p:cNvPr id="10" name="TextBox 9">
-            <a:extLst>
-              <a:ext uri="{FF2B5EF4-FFF2-40B4-BE49-F238E27FC236}">
-                <a16:creationId xmlns:a16="http://schemas.microsoft.com/office/drawing/2014/main" id="{5FA0D8B2-6B55-D3DC-BCBB-6FEAD86B9E72}"/>
-              </a:ext>
-            </a:extLst>
-          </p:cNvPr>
-          <p:cNvSpPr txBox="1"/>
-          <p:nvPr/>
-        </p:nvSpPr>
-        <p:spPr>
-          <a:xfrm>
-            <a:off x="312431" y="2175372"/>
-            <a:ext cx="6987941" cy="3046988"/>
-          </a:xfrm>
-          <a:prstGeom prst="rect">
-            <a:avLst/>
-          </a:prstGeom>
-          <a:solidFill>
-            <a:schemeClr val="bg1">
-              <a:alpha val="84400"/>
-            </a:schemeClr>
-          </a:solidFill>
-        </p:spPr>
-        <p:txBody>
-          <a:bodyPr wrap="square" rtlCol="0">
-            <a:spAutoFit/>
-          </a:bodyPr>
-          <a:lstStyle/>
-          <a:p>
-            <a:pPr marL="285750" indent="-285750">
-              <a:spcBef>
-                <a:spcPts val="1200"/>
-              </a:spcBef>
-              <a:buFont typeface="Arial" panose="020B0604020202020204" pitchFamily="34" charset="0"/>
-              <a:buChar char="•"/>
-            </a:pPr>
-            <a:r>
-              <a:t>Chairman of Deutsche Bank killed by a MILITARY-GRADE bomb hidden in a child's knapsack on a bicycle.</a:t>
-            </a:r>
-          </a:p>
-          <a:p>
-            <a:pPr marL="285750" indent="-285750">
-              <a:spcBef>
-                <a:spcPts val="1200"/>
-              </a:spcBef>
-              <a:buFont typeface="Arial" panose="020B0604020202020204" pitchFamily="34" charset="0"/>
-              <a:buChar char="•"/>
-            </a:pPr>
-            <a:r>
-              <a:t>Killed 21 DAYS after the Berlin Wall fell. Was scheduled to present his reunification plan the NEXT DAY.</a:t>
-            </a:r>
-          </a:p>
-          <a:p>
-            <a:pPr marL="285750" indent="-285750">
-              <a:spcBef>
-                <a:spcPts val="1200"/>
-              </a:spcBef>
-              <a:buFont typeface="Arial" panose="020B0604020202020204" pitchFamily="34" charset="0"/>
-              <a:buChar char="•"/>
-            </a:pPr>
-            <a:r>
-              <a:t>The bomb used an INFRARED TRIGGER that distinguished his armored car from the lead vehicle — military precision.</a:t>
-            </a:r>
-          </a:p>
-          <a:p>
-            <a:pPr marL="285750" indent="-285750">
-              <a:spcBef>
-                <a:spcPts val="1200"/>
-              </a:spcBef>
-              <a:buFont typeface="Arial" panose="020B0604020202020204" pitchFamily="34" charset="0"/>
-              <a:buChar char="•"/>
-            </a:pPr>
-            <a:r>
-              <a:t>He said weeks before: "I know there is a group of people who have an INTEREST in my death."</a:t>
-            </a:r>
-          </a:p>
-          <a:p>
-            <a:pPr marL="285750" indent="-285750">
-              <a:spcBef>
-                <a:spcPts val="1200"/>
-              </a:spcBef>
-              <a:buFont typeface="Arial" panose="020B0604020202020204" pitchFamily="34" charset="0"/>
-              <a:buChar char="•"/>
-            </a:pPr>
-            <a:r>
-              <a:t>Case remains COMPLETELY UNSOLVED — no arrests, no trial, no accountability after 35+ years.</a:t>
-            </a:r>
-          </a:p>
-        </p:txBody>
-      </p:sp>
       <p:pic>
         <p:nvPicPr>
-          <p:cNvPr id="16" name="Picture 15" descr="Alfred_Herrhausen.jpg"/>
+          <p:cNvPr id="16" name="Picture 15" descr="Ilaria_Alpi.jpg"/>
           <p:cNvPicPr>
             <a:picLocks noChangeAspect="1"/>
           </p:cNvPicPr>
@@ -10870,14 +9541,474 @@
         </p:blipFill>
         <p:spPr>
           <a:xfrm>
-            <a:off x="8339550" y="1100088"/>
-            <a:ext cx="2602866" cy="3884876"/>
+            <a:off x="6947091" y="1138842"/>
+            <a:ext cx="5387784" cy="3807367"/>
           </a:xfrm>
           <a:prstGeom prst="rect">
             <a:avLst/>
           </a:prstGeom>
         </p:spPr>
       </p:pic>
+      <p:sp>
+        <p:nvSpPr>
+          <p:cNvPr id="15" name="TextBox 14">
+            <a:extLst>
+              <a:ext uri="{FF2B5EF4-FFF2-40B4-BE49-F238E27FC236}">
+                <a16:creationId xmlns:a16="http://schemas.microsoft.com/office/drawing/2014/main" id="{E478240E-251B-5BA6-3C45-7E6620400769}"/>
+              </a:ext>
+            </a:extLst>
+          </p:cNvPr>
+          <p:cNvSpPr txBox="1"/>
+          <p:nvPr/>
+        </p:nvSpPr>
+        <p:spPr>
+          <a:xfrm>
+            <a:off x="312432" y="1288262"/>
+            <a:ext cx="6494294" cy="584775"/>
+          </a:xfrm>
+          <a:prstGeom prst="rect">
+            <a:avLst/>
+          </a:prstGeom>
+          <a:solidFill>
+            <a:schemeClr val="bg1">
+              <a:alpha val="84400"/>
+            </a:schemeClr>
+          </a:solidFill>
+        </p:spPr>
+        <p:txBody>
+          <a:bodyPr wrap="square" rtlCol="0">
+            <a:spAutoFit/>
+          </a:bodyPr>
+          <a:lstStyle/>
+          <a:p>
+            <a:r>
+              <a:rPr lang="en-US" sz="3200" b="1" dirty="0">
+                <a:solidFill>
+                  <a:schemeClr val="accent5"/>
+                </a:solidFill>
+              </a:rPr>
+              <a:t>Why / How they Ilaria Alpi:</a:t>
+            </a:r>
+          </a:p>
+        </p:txBody>
+      </p:sp>
+      <p:sp>
+        <p:nvSpPr>
+          <p:cNvPr id="3" name="Google Shape;170;p31">
+            <a:extLst>
+              <a:ext uri="{FF2B5EF4-FFF2-40B4-BE49-F238E27FC236}">
+                <a16:creationId xmlns:a16="http://schemas.microsoft.com/office/drawing/2014/main" id="{A4695FE5-0AA5-AB05-98B1-B5B8E3FA8CBE}"/>
+              </a:ext>
+            </a:extLst>
+          </p:cNvPr>
+          <p:cNvSpPr/>
+          <p:nvPr/>
+        </p:nvSpPr>
+        <p:spPr>
+          <a:xfrm>
+            <a:off x="191731" y="5732890"/>
+            <a:ext cx="3431270" cy="496760"/>
+          </a:xfrm>
+          <a:prstGeom prst="rect">
+            <a:avLst/>
+          </a:prstGeom>
+          <a:solidFill>
+            <a:schemeClr val="accent5"/>
+          </a:solidFill>
+          <a:ln>
+            <a:noFill/>
+          </a:ln>
+        </p:spPr>
+        <p:txBody>
+          <a:bodyPr spcFirstLastPara="1" wrap="square" lIns="91425" tIns="45700" rIns="91425" bIns="45700" anchor="ctr" anchorCtr="0">
+            <a:noAutofit/>
+          </a:bodyPr>
+          <a:lstStyle/>
+          <a:p>
+            <a:pPr marL="0" marR="0" lvl="0" indent="0" algn="ctr" rtl="0">
+              <a:lnSpc>
+                <a:spcPct val="100000"/>
+              </a:lnSpc>
+              <a:spcBef>
+                <a:spcPts val="0"/>
+              </a:spcBef>
+              <a:spcAft>
+                <a:spcPts val="0"/>
+              </a:spcAft>
+              <a:buClr>
+                <a:srgbClr val="000000"/>
+              </a:buClr>
+              <a:buSzPts val="1600"/>
+              <a:buFont typeface="Arial"/>
+              <a:buNone/>
+            </a:pPr>
+            <a:r>
+              <a:rPr lang="en-US" sz="3600" dirty="0">
+                <a:solidFill>
+                  <a:schemeClr val="lt1"/>
+                </a:solidFill>
+              </a:rPr>
+              <a:t>Read List Here:</a:t>
+            </a:r>
+            <a:endParaRPr sz="2000" b="0" i="0" u="none" strike="noStrike" cap="none" dirty="0">
+              <a:solidFill>
+                <a:srgbClr val="000000"/>
+              </a:solidFill>
+              <a:latin typeface="Arial"/>
+              <a:ea typeface="Arial"/>
+              <a:cs typeface="Arial"/>
+              <a:sym typeface="Arial"/>
+            </a:endParaRPr>
+          </a:p>
+        </p:txBody>
+      </p:sp>
+      <p:sp>
+        <p:nvSpPr>
+          <p:cNvPr id="5" name="Google Shape;170;p31">
+            <a:extLst>
+              <a:ext uri="{FF2B5EF4-FFF2-40B4-BE49-F238E27FC236}">
+                <a16:creationId xmlns:a16="http://schemas.microsoft.com/office/drawing/2014/main" id="{98132413-6ED2-8B36-74B6-3C503B1A4634}"/>
+              </a:ext>
+            </a:extLst>
+          </p:cNvPr>
+          <p:cNvSpPr/>
+          <p:nvPr/>
+        </p:nvSpPr>
+        <p:spPr>
+          <a:xfrm>
+            <a:off x="0" y="-31518"/>
+            <a:ext cx="12192000" cy="1131606"/>
+          </a:xfrm>
+          <a:prstGeom prst="rect">
+            <a:avLst/>
+          </a:prstGeom>
+          <a:solidFill>
+            <a:srgbClr val="C00000"/>
+          </a:solidFill>
+          <a:ln>
+            <a:noFill/>
+          </a:ln>
+        </p:spPr>
+        <p:txBody>
+          <a:bodyPr spcFirstLastPara="1" wrap="square" lIns="91425" tIns="45700" rIns="91425" bIns="45700" anchor="ctr" anchorCtr="0">
+            <a:noAutofit/>
+          </a:bodyPr>
+          <a:lstStyle/>
+          <a:p>
+            <a:pPr marL="0" marR="0" lvl="0" indent="0" rtl="0">
+              <a:lnSpc>
+                <a:spcPct val="100000"/>
+              </a:lnSpc>
+              <a:spcBef>
+                <a:spcPts val="0"/>
+              </a:spcBef>
+              <a:spcAft>
+                <a:spcPts val="0"/>
+              </a:spcAft>
+              <a:buClr>
+                <a:srgbClr val="000000"/>
+              </a:buClr>
+              <a:buSzPts val="1600"/>
+              <a:buFont typeface="Arial"/>
+              <a:buNone/>
+            </a:pPr>
+            <a:r>
+              <a:rPr lang="en-US" sz="4800" dirty="0">
+                <a:solidFill>
+                  <a:schemeClr val="lt1"/>
+                </a:solidFill>
+              </a:rPr>
+              <a:t> 150+ Murdered: by Intelligence Services</a:t>
+            </a:r>
+            <a:endParaRPr sz="3200" b="0" i="0" u="none" strike="noStrike" cap="none" dirty="0">
+              <a:solidFill>
+                <a:srgbClr val="000000"/>
+              </a:solidFill>
+              <a:latin typeface="Arial"/>
+              <a:ea typeface="Arial"/>
+              <a:cs typeface="Arial"/>
+              <a:sym typeface="Arial"/>
+            </a:endParaRPr>
+          </a:p>
+        </p:txBody>
+      </p:sp>
+      <p:sp>
+        <p:nvSpPr>
+          <p:cNvPr id="4" name="TextBox 3">
+            <a:extLst>
+              <a:ext uri="{FF2B5EF4-FFF2-40B4-BE49-F238E27FC236}">
+                <a16:creationId xmlns:a16="http://schemas.microsoft.com/office/drawing/2014/main" id="{50D7621F-9D36-7894-7117-9F831EF5EFA6}"/>
+              </a:ext>
+            </a:extLst>
+          </p:cNvPr>
+          <p:cNvSpPr txBox="1"/>
+          <p:nvPr/>
+        </p:nvSpPr>
+        <p:spPr>
+          <a:xfrm>
+            <a:off x="107300" y="6229650"/>
+            <a:ext cx="11685989" cy="461665"/>
+          </a:xfrm>
+          <a:prstGeom prst="rect">
+            <a:avLst/>
+          </a:prstGeom>
+          <a:solidFill>
+            <a:schemeClr val="bg1">
+              <a:alpha val="84400"/>
+            </a:schemeClr>
+          </a:solidFill>
+        </p:spPr>
+        <p:txBody>
+          <a:bodyPr wrap="square" rtlCol="0">
+            <a:spAutoFit/>
+          </a:bodyPr>
+          <a:lstStyle/>
+          <a:p>
+            <a:r>
+              <a:rPr lang="en-US" sz="2400" dirty="0"/>
+              <a:t>https://intelligencemurders.com/intel</a:t>
+            </a:r>
+          </a:p>
+        </p:txBody>
+      </p:sp>
+      <p:sp>
+        <p:nvSpPr>
+          <p:cNvPr id="7" name="Google Shape;170;p31">
+            <a:extLst>
+              <a:ext uri="{FF2B5EF4-FFF2-40B4-BE49-F238E27FC236}">
+                <a16:creationId xmlns:a16="http://schemas.microsoft.com/office/drawing/2014/main" id="{4B582382-76AA-B49E-C611-39A37CE591B9}"/>
+              </a:ext>
+            </a:extLst>
+          </p:cNvPr>
+          <p:cNvSpPr/>
+          <p:nvPr/>
+        </p:nvSpPr>
+        <p:spPr>
+          <a:xfrm>
+            <a:off x="7506336" y="4925186"/>
+            <a:ext cx="4550222" cy="869505"/>
+          </a:xfrm>
+          <a:prstGeom prst="rect">
+            <a:avLst/>
+          </a:prstGeom>
+          <a:solidFill>
+            <a:srgbClr val="C00000"/>
+          </a:solidFill>
+          <a:ln>
+            <a:noFill/>
+          </a:ln>
+        </p:spPr>
+        <p:txBody>
+          <a:bodyPr spcFirstLastPara="1" wrap="square" lIns="91425" tIns="45700" rIns="91425" bIns="45700" anchor="ctr" anchorCtr="0">
+            <a:noAutofit/>
+          </a:bodyPr>
+          <a:lstStyle/>
+          <a:p>
+            <a:pPr marL="0" marR="0" lvl="0" indent="0" algn="ctr" rtl="0">
+              <a:lnSpc>
+                <a:spcPct val="100000"/>
+              </a:lnSpc>
+              <a:spcBef>
+                <a:spcPts val="0"/>
+              </a:spcBef>
+              <a:spcAft>
+                <a:spcPts val="0"/>
+              </a:spcAft>
+              <a:buClr>
+                <a:srgbClr val="000000"/>
+              </a:buClr>
+              <a:buSzPts val="1600"/>
+              <a:buFont typeface="Arial"/>
+              <a:buNone/>
+            </a:pPr>
+            <a:r>
+              <a:rPr lang="en-US" sz="4800" dirty="0">
+                <a:solidFill>
+                  <a:schemeClr val="lt1"/>
+                </a:solidFill>
+              </a:rPr>
+              <a:t>Ilaria Alpi</a:t>
+            </a:r>
+            <a:endParaRPr sz="3200" b="0" i="0" u="none" strike="noStrike" cap="none" dirty="0">
+              <a:solidFill>
+                <a:srgbClr val="000000"/>
+              </a:solidFill>
+              <a:latin typeface="Arial"/>
+              <a:ea typeface="Arial"/>
+              <a:cs typeface="Arial"/>
+              <a:sym typeface="Arial"/>
+            </a:endParaRPr>
+          </a:p>
+        </p:txBody>
+      </p:sp>
+      <p:sp>
+        <p:nvSpPr>
+          <p:cNvPr id="8" name="Google Shape;170;p31">
+            <a:extLst>
+              <a:ext uri="{FF2B5EF4-FFF2-40B4-BE49-F238E27FC236}">
+                <a16:creationId xmlns:a16="http://schemas.microsoft.com/office/drawing/2014/main" id="{D328ABDE-E232-3EB7-C3F2-B4BB7B64262F}"/>
+              </a:ext>
+            </a:extLst>
+          </p:cNvPr>
+          <p:cNvSpPr/>
+          <p:nvPr/>
+        </p:nvSpPr>
+        <p:spPr>
+          <a:xfrm>
+            <a:off x="7526107" y="5681420"/>
+            <a:ext cx="4550222" cy="548230"/>
+          </a:xfrm>
+          <a:prstGeom prst="rect">
+            <a:avLst/>
+          </a:prstGeom>
+          <a:solidFill>
+            <a:srgbClr val="C00000"/>
+          </a:solidFill>
+          <a:ln>
+            <a:noFill/>
+          </a:ln>
+        </p:spPr>
+        <p:txBody>
+          <a:bodyPr spcFirstLastPara="1" wrap="square" lIns="91425" tIns="45700" rIns="91425" bIns="45700" anchor="ctr" anchorCtr="0">
+            <a:noAutofit/>
+          </a:bodyPr>
+          <a:lstStyle/>
+          <a:p>
+            <a:pPr marL="0" marR="0" lvl="0" indent="0" algn="ctr" rtl="0">
+              <a:lnSpc>
+                <a:spcPct val="100000"/>
+              </a:lnSpc>
+              <a:spcBef>
+                <a:spcPts val="0"/>
+              </a:spcBef>
+              <a:spcAft>
+                <a:spcPts val="0"/>
+              </a:spcAft>
+              <a:buClr>
+                <a:srgbClr val="000000"/>
+              </a:buClr>
+              <a:buSzPts val="1600"/>
+              <a:buFont typeface="Arial"/>
+              <a:buNone/>
+            </a:pPr>
+            <a:r>
+              <a:rPr lang="en-US" sz="3600" dirty="0">
+                <a:solidFill>
+                  <a:schemeClr val="lt1"/>
+                </a:solidFill>
+              </a:rPr>
+              <a:t>Dead at Age 32</a:t>
+            </a:r>
+            <a:endParaRPr sz="2000" b="0" i="0" u="none" strike="noStrike" cap="none" dirty="0">
+              <a:solidFill>
+                <a:srgbClr val="000000"/>
+              </a:solidFill>
+              <a:latin typeface="Arial"/>
+              <a:ea typeface="Arial"/>
+              <a:cs typeface="Arial"/>
+              <a:sym typeface="Arial"/>
+            </a:endParaRPr>
+          </a:p>
+        </p:txBody>
+      </p:sp>
+      <p:sp>
+        <p:nvSpPr>
+          <p:cNvPr id="10" name="TextBox 9">
+            <a:extLst>
+              <a:ext uri="{FF2B5EF4-FFF2-40B4-BE49-F238E27FC236}">
+                <a16:creationId xmlns:a16="http://schemas.microsoft.com/office/drawing/2014/main" id="{5FA0D8B2-6B55-D3DC-BCBB-6FEAD86B9E72}"/>
+              </a:ext>
+            </a:extLst>
+          </p:cNvPr>
+          <p:cNvSpPr txBox="1"/>
+          <p:nvPr/>
+        </p:nvSpPr>
+        <p:spPr>
+          <a:xfrm>
+            <a:off x="129030" y="1905506"/>
+            <a:ext cx="6987941" cy="3046988"/>
+          </a:xfrm>
+          <a:prstGeom prst="rect">
+            <a:avLst/>
+          </a:prstGeom>
+          <a:solidFill>
+            <a:schemeClr val="bg1">
+              <a:alpha val="84400"/>
+            </a:schemeClr>
+          </a:solidFill>
+        </p:spPr>
+        <p:txBody>
+          <a:bodyPr wrap="square" rtlCol="0">
+            <a:spAutoFit/>
+          </a:bodyPr>
+          <a:lstStyle/>
+          <a:p>
+            <a:pPr marL="285750" indent="-285750">
+              <a:spcBef>
+                <a:spcPts val="1200"/>
+              </a:spcBef>
+              <a:buFont typeface="Arial" panose="020B0604020202020204" pitchFamily="34" charset="0"/>
+              <a:buChar char="•"/>
+            </a:pPr>
+            <a:r>
+              <a:rPr dirty="0"/>
+              <a:t>Italian journalist, age 32. AMBUSHED by a 7-man commando in Mogadishu. Shot EXECUTION-STYLE in the temple.</a:t>
+            </a:r>
+          </a:p>
+          <a:p>
+            <a:pPr marL="285750" indent="-285750">
+              <a:spcBef>
+                <a:spcPts val="1200"/>
+              </a:spcBef>
+              <a:buFont typeface="Arial" panose="020B0604020202020204" pitchFamily="34" charset="0"/>
+              <a:buChar char="•"/>
+            </a:pPr>
+            <a:r>
+              <a:rPr dirty="0"/>
+              <a:t>She was investigating ILLEGAL ARMS trafficking and TOXIC WASTE dumping involving Italian intelligence (SISMI).</a:t>
+            </a:r>
+          </a:p>
+          <a:p>
+            <a:pPr marL="285750" indent="-285750">
+              <a:spcBef>
+                <a:spcPts val="1200"/>
+              </a:spcBef>
+              <a:buFont typeface="Arial" panose="020B0604020202020204" pitchFamily="34" charset="0"/>
+              <a:buChar char="•"/>
+            </a:pPr>
+            <a:r>
+              <a:rPr dirty="0"/>
+              <a:t>The only man convicted served 17 YEARS in prison — then was ACQUITTED and awarded 3.1 MILLION euros.</a:t>
+            </a:r>
+          </a:p>
+          <a:p>
+            <a:pPr marL="285750" indent="-285750">
+              <a:spcBef>
+                <a:spcPts val="1200"/>
+              </a:spcBef>
+              <a:buFont typeface="Arial" panose="020B0604020202020204" pitchFamily="34" charset="0"/>
+              <a:buChar char="•"/>
+            </a:pPr>
+            <a:r>
+              <a:rPr dirty="0"/>
+              <a:t>That wrongfully convicted man was later KILLED BY A CAR BOMB in Mogadishu in 2022.</a:t>
+            </a:r>
+          </a:p>
+          <a:p>
+            <a:pPr marL="285750" indent="-285750">
+              <a:spcBef>
+                <a:spcPts val="1200"/>
+              </a:spcBef>
+              <a:buFont typeface="Arial" panose="020B0604020202020204" pitchFamily="34" charset="0"/>
+              <a:buChar char="•"/>
+            </a:pPr>
+            <a:r>
+              <a:rPr dirty="0"/>
+              <a:t>Her cameraman's final footage has NEVER been recovered — the attackers wanted the evidence destroyed.</a:t>
+            </a:r>
+          </a:p>
+        </p:txBody>
+      </p:sp>
     </p:spTree>
   </p:cSld>
   <p:clrMapOvr>
@@ -10918,7 +10049,7 @@
         <p:spPr>
           <a:xfrm>
             <a:off x="312432" y="1288262"/>
-            <a:ext cx="6494294" cy="584775"/>
+            <a:ext cx="7972976" cy="584775"/>
           </a:xfrm>
           <a:prstGeom prst="rect">
             <a:avLst/>
@@ -10941,7 +10072,7 @@
                   <a:schemeClr val="accent5"/>
                 </a:solidFill>
               </a:rPr>
-              <a:t>Why / How they Christopher Fallen:</a:t>
+              <a:t>Why / How they Alexander Zakharchenko:</a:t>
             </a:r>
           </a:p>
         </p:txBody>
@@ -11120,17 +10251,17 @@
           <a:p>
             <a:r>
               <a:rPr lang="en-US" sz="2400" dirty="0"/>
-              <a:t>https://intelligencemurders.com/intelligence-service-murders</a:t>
-            </a:r>
-          </a:p>
-        </p:txBody>
-      </p:sp>
-      <p:sp>
-        <p:nvSpPr>
-          <p:cNvPr id="7" name="Google Shape;170;p31">
-            <a:extLst>
-              <a:ext uri="{FF2B5EF4-FFF2-40B4-BE49-F238E27FC236}">
-                <a16:creationId xmlns:a16="http://schemas.microsoft.com/office/drawing/2014/main" id="{4B582382-76AA-B49E-C611-39A37CE591B9}"/>
+              <a:t>https://intelligencemurders.com/intel</a:t>
+            </a:r>
+          </a:p>
+        </p:txBody>
+      </p:sp>
+      <p:sp>
+        <p:nvSpPr>
+          <p:cNvPr id="8" name="Google Shape;170;p31">
+            <a:extLst>
+              <a:ext uri="{FF2B5EF4-FFF2-40B4-BE49-F238E27FC236}">
+                <a16:creationId xmlns:a16="http://schemas.microsoft.com/office/drawing/2014/main" id="{D328ABDE-E232-3EB7-C3F2-B4BB7B64262F}"/>
               </a:ext>
             </a:extLst>
           </p:cNvPr>
@@ -11139,8 +10270,8 @@
         </p:nvSpPr>
         <p:spPr>
           <a:xfrm>
-            <a:off x="7506336" y="4925186"/>
-            <a:ext cx="4550222" cy="869505"/>
+            <a:off x="7534478" y="6229650"/>
+            <a:ext cx="4550222" cy="548230"/>
           </a:xfrm>
           <a:prstGeom prst="rect">
             <a:avLst/>
@@ -11176,14 +10307,14 @@
               <a:buNone/>
             </a:pPr>
             <a:r>
-              <a:rPr lang="en-US" sz="4800" dirty="0">
+              <a:rPr lang="en-US" sz="3600" dirty="0">
                 <a:solidFill>
                   <a:schemeClr val="lt1"/>
                 </a:solidFill>
               </a:rPr>
-              <a:t>Christopher Fallen</a:t>
-            </a:r>
-            <a:endParaRPr sz="3200" b="0" i="0" u="none" strike="noStrike" cap="none" dirty="0">
+              <a:t>Dead at Age 42</a:t>
+            </a:r>
+            <a:endParaRPr sz="2000" b="0" i="0" u="none" strike="noStrike" cap="none" dirty="0">
               <a:solidFill>
                 <a:srgbClr val="000000"/>
               </a:solidFill>
@@ -11197,76 +10328,6 @@
       </p:sp>
       <p:sp>
         <p:nvSpPr>
-          <p:cNvPr id="8" name="Google Shape;170;p31">
-            <a:extLst>
-              <a:ext uri="{FF2B5EF4-FFF2-40B4-BE49-F238E27FC236}">
-                <a16:creationId xmlns:a16="http://schemas.microsoft.com/office/drawing/2014/main" id="{D328ABDE-E232-3EB7-C3F2-B4BB7B64262F}"/>
-              </a:ext>
-            </a:extLst>
-          </p:cNvPr>
-          <p:cNvSpPr/>
-          <p:nvPr/>
-        </p:nvSpPr>
-        <p:spPr>
-          <a:xfrm>
-            <a:off x="7526107" y="5681420"/>
-            <a:ext cx="4550222" cy="548230"/>
-          </a:xfrm>
-          <a:prstGeom prst="rect">
-            <a:avLst/>
-          </a:prstGeom>
-          <a:solidFill>
-            <a:srgbClr val="C00000"/>
-          </a:solidFill>
-          <a:ln>
-            <a:noFill/>
-          </a:ln>
-        </p:spPr>
-        <p:txBody>
-          <a:bodyPr spcFirstLastPara="1" wrap="square" lIns="91425" tIns="45700" rIns="91425" bIns="45700" anchor="ctr" anchorCtr="0">
-            <a:noAutofit/>
-          </a:bodyPr>
-          <a:lstStyle/>
-          <a:p>
-            <a:pPr marL="0" marR="0" lvl="0" indent="0" algn="ctr" rtl="0">
-              <a:lnSpc>
-                <a:spcPct val="100000"/>
-              </a:lnSpc>
-              <a:spcBef>
-                <a:spcPts val="0"/>
-              </a:spcBef>
-              <a:spcAft>
-                <a:spcPts val="0"/>
-              </a:spcAft>
-              <a:buClr>
-                <a:srgbClr val="000000"/>
-              </a:buClr>
-              <a:buSzPts val="1600"/>
-              <a:buFont typeface="Arial"/>
-              <a:buNone/>
-            </a:pPr>
-            <a:r>
-              <a:rPr lang="en-US" sz="3600" dirty="0">
-                <a:solidFill>
-                  <a:schemeClr val="lt1"/>
-                </a:solidFill>
-              </a:rPr>
-              <a:t>Dead at Age 48</a:t>
-            </a:r>
-            <a:endParaRPr sz="2000" b="0" i="0" u="none" strike="noStrike" cap="none" dirty="0">
-              <a:solidFill>
-                <a:srgbClr val="000000"/>
-              </a:solidFill>
-              <a:latin typeface="Arial"/>
-              <a:ea typeface="Arial"/>
-              <a:cs typeface="Arial"/>
-              <a:sym typeface="Arial"/>
-            </a:endParaRPr>
-          </a:p>
-        </p:txBody>
-      </p:sp>
-      <p:sp>
-        <p:nvSpPr>
           <p:cNvPr id="10" name="TextBox 9">
             <a:extLst>
               <a:ext uri="{FF2B5EF4-FFF2-40B4-BE49-F238E27FC236}">
@@ -11305,7 +10366,7 @@
               <a:buChar char="•"/>
             </a:pPr>
             <a:r>
-              <a:t>Former HAARP chief scientist found BOUND with duct tape, belt around his neck, head wrapped in tape. ASPHYXIATED in his own home. Age 48.</a:t>
+              <a:t>Blown up by a BOMB hidden inside a cafe he visited DAILY in Donetsk. Age 42.</a:t>
             </a:r>
           </a:p>
           <a:p>
@@ -11317,7 +10378,7 @@
               <a:buChar char="•"/>
             </a:pPr>
             <a:r>
-              <a:t>Senior physicist at the Air Force Research Laboratory working on CLASSIFIED ionospheric and plasma weapons research.</a:t>
+              <a:t>The bomb was concealed in a LIGHTING FIXTURE above his usual seat — someone knew his exact habits.</a:t>
             </a:r>
           </a:p>
           <a:p>
@@ -11329,7 +10390,7 @@
               <a:buChar char="•"/>
             </a:pPr>
             <a:r>
-              <a:t>One suspect convicted of FIRST-DEGREE murder. The co-defendant fled to El Paso and died of an OVERDOSE before trial.</a:t>
+              <a:t>Both Ukraine AND Russia have been accused. His own security apparatus was likely PENETRATED.</a:t>
             </a:r>
           </a:p>
           <a:p>
@@ -11341,7 +10402,7 @@
               <a:buChar char="•"/>
             </a:pPr>
             <a:r>
-              <a:t>His death was the FIRST in a cluster of defense scientist deaths across New Mexico in 2024.</a:t>
+              <a:t>His successor was installed within DAYS — someone was READY for his removal.</a:t>
             </a:r>
           </a:p>
           <a:p>
@@ -11353,14 +10414,14 @@
               <a:buChar char="•"/>
             </a:pPr>
             <a:r>
-              <a:t>Worked at Kirtland Air Force Base — home to directed energy weapons, space vehicles, and some of America's most SECRET programs.</a:t>
+              <a:t>Part of a pattern: separatist leaders in Donbas were being ELIMINATED one by one.</a:t>
             </a:r>
           </a:p>
         </p:txBody>
       </p:sp>
       <p:pic>
         <p:nvPicPr>
-          <p:cNvPr id="16" name="Picture 15" descr="Christopher_Fallen.jpg"/>
+          <p:cNvPr id="16" name="Picture 15" descr="Alexander_Zakharchenko.jpg"/>
           <p:cNvPicPr>
             <a:picLocks noChangeAspect="1"/>
           </p:cNvPicPr>
@@ -11374,15 +10435,90 @@
         </p:blipFill>
         <p:spPr>
           <a:xfrm>
-            <a:off x="8202140" y="1100088"/>
-            <a:ext cx="2877685" cy="3884876"/>
+            <a:off x="8139098" y="1100088"/>
+            <a:ext cx="3003770" cy="3884876"/>
           </a:xfrm>
           <a:prstGeom prst="rect">
             <a:avLst/>
           </a:prstGeom>
         </p:spPr>
       </p:pic>
+      <p:sp>
+        <p:nvSpPr>
+          <p:cNvPr id="7" name="Google Shape;170;p31">
+            <a:extLst>
+              <a:ext uri="{FF2B5EF4-FFF2-40B4-BE49-F238E27FC236}">
+                <a16:creationId xmlns:a16="http://schemas.microsoft.com/office/drawing/2014/main" id="{4B582382-76AA-B49E-C611-39A37CE591B9}"/>
+              </a:ext>
+            </a:extLst>
+          </p:cNvPr>
+          <p:cNvSpPr/>
+          <p:nvPr/>
+        </p:nvSpPr>
+        <p:spPr>
+          <a:xfrm>
+            <a:off x="7506336" y="4925186"/>
+            <a:ext cx="4550222" cy="1304464"/>
+          </a:xfrm>
+          <a:prstGeom prst="rect">
+            <a:avLst/>
+          </a:prstGeom>
+          <a:solidFill>
+            <a:srgbClr val="C00000"/>
+          </a:solidFill>
+          <a:ln>
+            <a:noFill/>
+          </a:ln>
+        </p:spPr>
+        <p:txBody>
+          <a:bodyPr spcFirstLastPara="1" wrap="square" lIns="91425" tIns="45700" rIns="91425" bIns="45700" anchor="ctr" anchorCtr="0">
+            <a:noAutofit/>
+          </a:bodyPr>
+          <a:lstStyle/>
+          <a:p>
+            <a:pPr marL="0" marR="0" lvl="0" indent="0" algn="ctr" rtl="0">
+              <a:lnSpc>
+                <a:spcPct val="100000"/>
+              </a:lnSpc>
+              <a:spcBef>
+                <a:spcPts val="0"/>
+              </a:spcBef>
+              <a:spcAft>
+                <a:spcPts val="0"/>
+              </a:spcAft>
+              <a:buClr>
+                <a:srgbClr val="000000"/>
+              </a:buClr>
+              <a:buSzPts val="1600"/>
+              <a:buFont typeface="Arial"/>
+              <a:buNone/>
+            </a:pPr>
+            <a:r>
+              <a:rPr lang="en-US" sz="4800" dirty="0">
+                <a:solidFill>
+                  <a:schemeClr val="lt1"/>
+                </a:solidFill>
+              </a:rPr>
+              <a:t>Alexander Zakharchenko</a:t>
+            </a:r>
+            <a:endParaRPr sz="3200" b="0" i="0" u="none" strike="noStrike" cap="none" dirty="0">
+              <a:solidFill>
+                <a:srgbClr val="000000"/>
+              </a:solidFill>
+              <a:latin typeface="Arial"/>
+              <a:ea typeface="Arial"/>
+              <a:cs typeface="Arial"/>
+              <a:sym typeface="Arial"/>
+            </a:endParaRPr>
+          </a:p>
+        </p:txBody>
+      </p:sp>
     </p:spTree>
+    <p:extLst>
+      <p:ext uri="{BB962C8B-B14F-4D97-AF65-F5344CB8AC3E}">
+        <p14:creationId xmlns:p14="http://schemas.microsoft.com/office/powerpoint/2010/main" val="1430171334"/>
+      </p:ext>
+    </p:extLst>
   </p:cSld>
   <p:clrMapOvr>
     <a:masterClrMapping/>
@@ -11445,7 +10581,7 @@
                   <a:schemeClr val="accent5"/>
                 </a:solidFill>
               </a:rPr>
-              <a:t>Why / How they George Lincoln Rockwell:</a:t>
+              <a:t>Why / How they Jason Thomas:</a:t>
             </a:r>
           </a:p>
         </p:txBody>
@@ -11624,7 +10760,7 @@
           <a:p>
             <a:r>
               <a:rPr lang="en-US" sz="2400" dirty="0"/>
-              <a:t>https://intelligencemurders.com/intelligence-service-murders</a:t>
+              <a:t>https://intelligencemurders.com/intel</a:t>
             </a:r>
           </a:p>
         </p:txBody>
@@ -11685,7 +10821,7 @@
                   <a:schemeClr val="lt1"/>
                 </a:solidFill>
               </a:rPr>
-              <a:t>George Lincoln Rockwell</a:t>
+              <a:t>Jason Thomas</a:t>
             </a:r>
             <a:endParaRPr sz="3200" b="0" i="0" u="none" strike="noStrike" cap="none" dirty="0">
               <a:solidFill>
@@ -11755,7 +10891,7 @@
                   <a:schemeClr val="lt1"/>
                 </a:solidFill>
               </a:rPr>
-              <a:t>Dead at Age 49</a:t>
+              <a:t>Dead at Age 45</a:t>
             </a:r>
             <a:endParaRPr sz="2000" b="0" i="0" u="none" strike="noStrike" cap="none" dirty="0">
               <a:solidFill>
@@ -11809,7 +10945,7 @@
               <a:buChar char="•"/>
             </a:pPr>
             <a:r>
-              <a:t>American Nazi Party founder SHOT FROM A ROOFTOP at a laundromat parking lot. Age 49. A US Army COUNTERINTELLIGENCE AGENT was an eyewitness.</a:t>
+              <a:t>Cancer researcher with DEPARTMENT OF DEFENSE contracts through Novartis. Age 45. Found dead in a FROZEN LAKE.</a:t>
             </a:r>
           </a:p>
           <a:p>
@@ -11821,7 +10957,7 @@
               <a:buChar char="•"/>
             </a:pPr>
             <a:r>
-              <a:t>The FBI's COINTELPRO-WHITE HATE program was actively INFILTRATING and fomenting INTERNAL CONFLICT in his organization at the time.</a:t>
+              <a:t>Disappeared December 2025 after leaving behind his wallet, phone, and Apple Watch — watch was in the MAILBOX.</a:t>
             </a:r>
           </a:p>
           <a:p>
@@ -11833,7 +10969,7 @@
               <a:buChar char="•"/>
             </a:pPr>
             <a:r>
-              <a:t>The convicted killer was an EXPELLED former member — the exact profile COINTELPRO used to manipulate or frame: volatile, disgruntled, and unstable.</a:t>
+              <a:t>His body was submerged in ice for THREE MONTHS, severely limiting forensic evidence.</a:t>
             </a:r>
           </a:p>
           <a:p>
@@ -11845,7 +10981,7 @@
               <a:buChar char="•"/>
             </a:pPr>
             <a:r>
-              <a:t>The evidence was ENTIRELY CIRCUMSTANTIAL. The killer NEVER confessed.</a:t>
+              <a:t>Part of a CLUSTER of scientist deaths in 2025-2026 that drew CONGRESSIONAL attention.</a:t>
             </a:r>
           </a:p>
           <a:p>
@@ -11857,14 +10993,14 @@
               <a:buChar char="•"/>
             </a:pPr>
             <a:r>
-              <a:t>The same COINTELPRO program coordinated the killing of Black Panther leader Fred Hampton two years later — proving the FBI was willing to FACILITATE assassinations.</a:t>
+              <a:t>Both parents died within ONE HOUR of each other weeks before. Official cause of death STILL NOT RELEASED.</a:t>
             </a:r>
           </a:p>
         </p:txBody>
       </p:sp>
       <p:pic>
         <p:nvPicPr>
-          <p:cNvPr id="16" name="Picture 15" descr="George_Lincoln_Rockwell.jpg"/>
+          <p:cNvPr id="16" name="Picture 15" descr="Jason_Thomas.jpg"/>
           <p:cNvPicPr>
             <a:picLocks noChangeAspect="1"/>
           </p:cNvPicPr>
@@ -11878,8 +11014,8 @@
         </p:blipFill>
         <p:spPr>
           <a:xfrm>
-            <a:off x="8180503" y="1100088"/>
-            <a:ext cx="2920959" cy="3884876"/>
+            <a:off x="8170539" y="1100088"/>
+            <a:ext cx="2940887" cy="3884876"/>
           </a:xfrm>
           <a:prstGeom prst="rect">
             <a:avLst/>
@@ -11926,7 +11062,7 @@
         <p:spPr>
           <a:xfrm>
             <a:off x="312432" y="1288262"/>
-            <a:ext cx="6494294" cy="584775"/>
+            <a:ext cx="7946044" cy="584775"/>
           </a:xfrm>
           <a:prstGeom prst="rect">
             <a:avLst/>
@@ -11949,7 +11085,7 @@
                   <a:schemeClr val="accent5"/>
                 </a:solidFill>
               </a:rPr>
-              <a:t>Why / How they Ilaria Alpi:</a:t>
+              <a:t>Why / How they George Lincoln Rockwell:</a:t>
             </a:r>
           </a:p>
         </p:txBody>
@@ -12128,17 +11264,17 @@
           <a:p>
             <a:r>
               <a:rPr lang="en-US" sz="2400" dirty="0"/>
-              <a:t>https://intelligencemurders.com/intelligence-service-murders</a:t>
-            </a:r>
-          </a:p>
-        </p:txBody>
-      </p:sp>
-      <p:sp>
-        <p:nvSpPr>
-          <p:cNvPr id="7" name="Google Shape;170;p31">
-            <a:extLst>
-              <a:ext uri="{FF2B5EF4-FFF2-40B4-BE49-F238E27FC236}">
-                <a16:creationId xmlns:a16="http://schemas.microsoft.com/office/drawing/2014/main" id="{4B582382-76AA-B49E-C611-39A37CE591B9}"/>
+              <a:t>https://intelligencemurders.com/intel</a:t>
+            </a:r>
+          </a:p>
+        </p:txBody>
+      </p:sp>
+      <p:sp>
+        <p:nvSpPr>
+          <p:cNvPr id="8" name="Google Shape;170;p31">
+            <a:extLst>
+              <a:ext uri="{FF2B5EF4-FFF2-40B4-BE49-F238E27FC236}">
+                <a16:creationId xmlns:a16="http://schemas.microsoft.com/office/drawing/2014/main" id="{D328ABDE-E232-3EB7-C3F2-B4BB7B64262F}"/>
               </a:ext>
             </a:extLst>
           </p:cNvPr>
@@ -12147,8 +11283,8 @@
         </p:nvSpPr>
         <p:spPr>
           <a:xfrm>
-            <a:off x="7506336" y="4925186"/>
-            <a:ext cx="4550222" cy="869505"/>
+            <a:off x="7583859" y="6253751"/>
+            <a:ext cx="4550222" cy="548230"/>
           </a:xfrm>
           <a:prstGeom prst="rect">
             <a:avLst/>
@@ -12184,14 +11320,14 @@
               <a:buNone/>
             </a:pPr>
             <a:r>
-              <a:rPr lang="en-US" sz="4800" dirty="0">
+              <a:rPr lang="en-US" sz="3600" dirty="0">
                 <a:solidFill>
                   <a:schemeClr val="lt1"/>
                 </a:solidFill>
               </a:rPr>
-              <a:t>Ilaria Alpi</a:t>
-            </a:r>
-            <a:endParaRPr sz="3200" b="0" i="0" u="none" strike="noStrike" cap="none" dirty="0">
+              <a:t>Dead at Age 49</a:t>
+            </a:r>
+            <a:endParaRPr sz="2000" b="0" i="0" u="none" strike="noStrike" cap="none" dirty="0">
               <a:solidFill>
                 <a:srgbClr val="000000"/>
               </a:solidFill>
@@ -12205,76 +11341,6 @@
       </p:sp>
       <p:sp>
         <p:nvSpPr>
-          <p:cNvPr id="8" name="Google Shape;170;p31">
-            <a:extLst>
-              <a:ext uri="{FF2B5EF4-FFF2-40B4-BE49-F238E27FC236}">
-                <a16:creationId xmlns:a16="http://schemas.microsoft.com/office/drawing/2014/main" id="{D328ABDE-E232-3EB7-C3F2-B4BB7B64262F}"/>
-              </a:ext>
-            </a:extLst>
-          </p:cNvPr>
-          <p:cNvSpPr/>
-          <p:nvPr/>
-        </p:nvSpPr>
-        <p:spPr>
-          <a:xfrm>
-            <a:off x="7526107" y="5681420"/>
-            <a:ext cx="4550222" cy="548230"/>
-          </a:xfrm>
-          <a:prstGeom prst="rect">
-            <a:avLst/>
-          </a:prstGeom>
-          <a:solidFill>
-            <a:srgbClr val="C00000"/>
-          </a:solidFill>
-          <a:ln>
-            <a:noFill/>
-          </a:ln>
-        </p:spPr>
-        <p:txBody>
-          <a:bodyPr spcFirstLastPara="1" wrap="square" lIns="91425" tIns="45700" rIns="91425" bIns="45700" anchor="ctr" anchorCtr="0">
-            <a:noAutofit/>
-          </a:bodyPr>
-          <a:lstStyle/>
-          <a:p>
-            <a:pPr marL="0" marR="0" lvl="0" indent="0" algn="ctr" rtl="0">
-              <a:lnSpc>
-                <a:spcPct val="100000"/>
-              </a:lnSpc>
-              <a:spcBef>
-                <a:spcPts val="0"/>
-              </a:spcBef>
-              <a:spcAft>
-                <a:spcPts val="0"/>
-              </a:spcAft>
-              <a:buClr>
-                <a:srgbClr val="000000"/>
-              </a:buClr>
-              <a:buSzPts val="1600"/>
-              <a:buFont typeface="Arial"/>
-              <a:buNone/>
-            </a:pPr>
-            <a:r>
-              <a:rPr lang="en-US" sz="3600" dirty="0">
-                <a:solidFill>
-                  <a:schemeClr val="lt1"/>
-                </a:solidFill>
-              </a:rPr>
-              <a:t>Dead at Age 32</a:t>
-            </a:r>
-            <a:endParaRPr sz="2000" b="0" i="0" u="none" strike="noStrike" cap="none" dirty="0">
-              <a:solidFill>
-                <a:srgbClr val="000000"/>
-              </a:solidFill>
-              <a:latin typeface="Arial"/>
-              <a:ea typeface="Arial"/>
-              <a:cs typeface="Arial"/>
-              <a:sym typeface="Arial"/>
-            </a:endParaRPr>
-          </a:p>
-        </p:txBody>
-      </p:sp>
-      <p:sp>
-        <p:nvSpPr>
           <p:cNvPr id="10" name="TextBox 9">
             <a:extLst>
               <a:ext uri="{FF2B5EF4-FFF2-40B4-BE49-F238E27FC236}">
@@ -12287,8 +11353,8 @@
         </p:nvSpPr>
         <p:spPr>
           <a:xfrm>
-            <a:off x="312431" y="2175372"/>
-            <a:ext cx="6987941" cy="3046988"/>
+            <a:off x="135442" y="1937976"/>
+            <a:ext cx="7781792" cy="3754874"/>
           </a:xfrm>
           <a:prstGeom prst="rect">
             <a:avLst/>
@@ -12313,7 +11379,12 @@
               <a:buChar char="•"/>
             </a:pPr>
             <a:r>
-              <a:t>Italian journalist, age 32. AMBUSHED by a 7-man commando in Mogadishu. Shot EXECUTION-STYLE in the temple.</a:t>
+              <a:rPr lang="en-US" dirty="0"/>
+              <a:t>Political assassination &amp; </a:t>
+            </a:r>
+            <a:r>
+              <a:rPr dirty="0"/>
+              <a:t>SHOT FROM A ROOFTOP at a laundromat parking lot. Age 49. A US Army COUNTERINTELLIGENCE AGENT was an eyewitness.</a:t>
             </a:r>
           </a:p>
           <a:p>
@@ -12325,7 +11396,8 @@
               <a:buChar char="•"/>
             </a:pPr>
             <a:r>
-              <a:t>She was investigating ILLEGAL ARMS trafficking and TOXIC WASTE dumping involving Italian intelligence (SISMI).</a:t>
+              <a:rPr dirty="0"/>
+              <a:t>The FBI's COINTELPRO program was actively INFILTRATING and fomenting INTERNAL CONFLICT in his organization at the time.</a:t>
             </a:r>
           </a:p>
           <a:p>
@@ -12337,7 +11409,8 @@
               <a:buChar char="•"/>
             </a:pPr>
             <a:r>
-              <a:t>The only man convicted served 17 YEARS in prison — then was ACQUITTED and awarded 3.1 MILLION euros.</a:t>
+              <a:rPr dirty="0"/>
+              <a:t>The convicted killer was an EXPELLED former member</a:t>
             </a:r>
           </a:p>
           <a:p>
@@ -12349,7 +11422,8 @@
               <a:buChar char="•"/>
             </a:pPr>
             <a:r>
-              <a:t>That wrongfully convicted man was later KILLED BY A CAR BOMB in Mogadishu in 2022.</a:t>
+              <a:rPr dirty="0"/>
+              <a:t>The evidence was ENTIRELY CIRCUMSTANTIAL. The killer NEVER confessed.</a:t>
             </a:r>
           </a:p>
           <a:p>
@@ -12361,14 +11435,15 @@
               <a:buChar char="•"/>
             </a:pPr>
             <a:r>
-              <a:t>Her cameraman's final footage has NEVER been recovered — the attackers wanted the evidence destroyed.</a:t>
+              <a:rPr dirty="0"/>
+              <a:t>The same COINTELPRO program coordinated the killing of Black Panther leader Fred Hampton two years later — proving the FBI was willing to FACILITATE assassinations.</a:t>
             </a:r>
           </a:p>
         </p:txBody>
       </p:sp>
       <p:pic>
         <p:nvPicPr>
-          <p:cNvPr id="16" name="Picture 15" descr="Ilaria_Alpi.jpg"/>
+          <p:cNvPr id="16" name="Picture 15" descr="George_Lincoln_Rockwell.jpg"/>
           <p:cNvPicPr>
             <a:picLocks noChangeAspect="1"/>
           </p:cNvPicPr>
@@ -12382,14 +11457,84 @@
         </p:blipFill>
         <p:spPr>
           <a:xfrm>
-            <a:off x="6947091" y="1138842"/>
-            <a:ext cx="5387784" cy="3807367"/>
+            <a:off x="8180503" y="1100088"/>
+            <a:ext cx="2920959" cy="3884876"/>
           </a:xfrm>
           <a:prstGeom prst="rect">
             <a:avLst/>
           </a:prstGeom>
         </p:spPr>
       </p:pic>
+      <p:sp>
+        <p:nvSpPr>
+          <p:cNvPr id="7" name="Google Shape;170;p31">
+            <a:extLst>
+              <a:ext uri="{FF2B5EF4-FFF2-40B4-BE49-F238E27FC236}">
+                <a16:creationId xmlns:a16="http://schemas.microsoft.com/office/drawing/2014/main" id="{4B582382-76AA-B49E-C611-39A37CE591B9}"/>
+              </a:ext>
+            </a:extLst>
+          </p:cNvPr>
+          <p:cNvSpPr/>
+          <p:nvPr/>
+        </p:nvSpPr>
+        <p:spPr>
+          <a:xfrm>
+            <a:off x="7583859" y="4943025"/>
+            <a:ext cx="4550222" cy="1328565"/>
+          </a:xfrm>
+          <a:prstGeom prst="rect">
+            <a:avLst/>
+          </a:prstGeom>
+          <a:solidFill>
+            <a:srgbClr val="C00000"/>
+          </a:solidFill>
+          <a:ln>
+            <a:noFill/>
+          </a:ln>
+        </p:spPr>
+        <p:txBody>
+          <a:bodyPr spcFirstLastPara="1" wrap="square" lIns="91425" tIns="45700" rIns="91425" bIns="45700" anchor="ctr" anchorCtr="0">
+            <a:noAutofit/>
+          </a:bodyPr>
+          <a:lstStyle/>
+          <a:p>
+            <a:pPr marL="0" marR="0" lvl="0" indent="0" algn="ctr" rtl="0">
+              <a:lnSpc>
+                <a:spcPct val="100000"/>
+              </a:lnSpc>
+              <a:spcBef>
+                <a:spcPts val="0"/>
+              </a:spcBef>
+              <a:spcAft>
+                <a:spcPts val="0"/>
+              </a:spcAft>
+              <a:buClr>
+                <a:srgbClr val="000000"/>
+              </a:buClr>
+              <a:buSzPts val="1600"/>
+              <a:buFont typeface="Arial"/>
+              <a:buNone/>
+            </a:pPr>
+            <a:r>
+              <a:rPr lang="en-US" sz="4800" dirty="0">
+                <a:solidFill>
+                  <a:schemeClr val="lt1"/>
+                </a:solidFill>
+              </a:rPr>
+              <a:t>George Lincoln Rockwell</a:t>
+            </a:r>
+            <a:endParaRPr sz="3200" b="0" i="0" u="none" strike="noStrike" cap="none" dirty="0">
+              <a:solidFill>
+                <a:srgbClr val="000000"/>
+              </a:solidFill>
+              <a:latin typeface="Arial"/>
+              <a:ea typeface="Arial"/>
+              <a:cs typeface="Arial"/>
+              <a:sym typeface="Arial"/>
+            </a:endParaRPr>
+          </a:p>
+        </p:txBody>
+      </p:sp>
     </p:spTree>
   </p:cSld>
   <p:clrMapOvr>

--- a/docs/Intel/Intelligence_Service_Murders.pptx
+++ b/docs/Intel/Intelligence_Service_Murders.pptx
@@ -5,22 +5,23 @@
     <p:sldMasterId id="2147483648" r:id="rId1"/>
   </p:sldMasterIdLst>
   <p:sldIdLst>
-    <p:sldId id="325" r:id="rId2"/>
-    <p:sldId id="284" r:id="rId3"/>
-    <p:sldId id="296" r:id="rId4"/>
-    <p:sldId id="285" r:id="rId5"/>
-    <p:sldId id="276" r:id="rId6"/>
-    <p:sldId id="279" r:id="rId7"/>
-    <p:sldId id="274" r:id="rId8"/>
-    <p:sldId id="280" r:id="rId9"/>
-    <p:sldId id="278" r:id="rId10"/>
-    <p:sldId id="282" r:id="rId11"/>
-    <p:sldId id="283" r:id="rId12"/>
-    <p:sldId id="286" r:id="rId13"/>
-    <p:sldId id="275" r:id="rId14"/>
-    <p:sldId id="272" r:id="rId15"/>
-    <p:sldId id="287" r:id="rId16"/>
-    <p:sldId id="288" r:id="rId17"/>
+    <p:sldId id="323" r:id="rId2"/>
+    <p:sldId id="325" r:id="rId3"/>
+    <p:sldId id="284" r:id="rId4"/>
+    <p:sldId id="296" r:id="rId5"/>
+    <p:sldId id="285" r:id="rId6"/>
+    <p:sldId id="276" r:id="rId7"/>
+    <p:sldId id="279" r:id="rId8"/>
+    <p:sldId id="274" r:id="rId9"/>
+    <p:sldId id="280" r:id="rId10"/>
+    <p:sldId id="278" r:id="rId11"/>
+    <p:sldId id="282" r:id="rId12"/>
+    <p:sldId id="283" r:id="rId13"/>
+    <p:sldId id="286" r:id="rId14"/>
+    <p:sldId id="275" r:id="rId15"/>
+    <p:sldId id="272" r:id="rId16"/>
+    <p:sldId id="287" r:id="rId17"/>
+    <p:sldId id="288" r:id="rId18"/>
   </p:sldIdLst>
   <p:sldSz cx="12192000" cy="6858000"/>
   <p:notesSz cx="6858000" cy="9144000"/>
@@ -3341,480 +3342,552 @@
           <a:chExt cx="0" cy="0"/>
         </a:xfrm>
       </p:grpSpPr>
-      <p:pic>
-        <p:nvPicPr>
-          <p:cNvPr id="16" name="Picture 15" descr="Robert_F_Kennedy.jpg"/>
-          <p:cNvPicPr>
-            <a:picLocks noChangeAspect="1"/>
-          </p:cNvPicPr>
-          <p:nvPr/>
-        </p:nvPicPr>
-        <p:blipFill>
-          <a:blip r:embed="rId2"/>
-          <a:stretch>
-            <a:fillRect/>
-          </a:stretch>
-        </p:blipFill>
-        <p:spPr>
-          <a:xfrm>
-            <a:off x="8957849" y="1100088"/>
-            <a:ext cx="3126851" cy="3884876"/>
-          </a:xfrm>
-          <a:prstGeom prst="rect">
-            <a:avLst/>
-          </a:prstGeom>
-        </p:spPr>
-      </p:pic>
-      <p:sp>
-        <p:nvSpPr>
-          <p:cNvPr id="15" name="TextBox 14">
-            <a:extLst>
-              <a:ext uri="{FF2B5EF4-FFF2-40B4-BE49-F238E27FC236}">
-                <a16:creationId xmlns:a16="http://schemas.microsoft.com/office/drawing/2014/main" id="{E478240E-251B-5BA6-3C45-7E6620400769}"/>
-              </a:ext>
-            </a:extLst>
-          </p:cNvPr>
-          <p:cNvSpPr txBox="1"/>
-          <p:nvPr/>
-        </p:nvSpPr>
-        <p:spPr>
-          <a:xfrm>
-            <a:off x="312432" y="1288262"/>
-            <a:ext cx="6494294" cy="584775"/>
-          </a:xfrm>
-          <a:prstGeom prst="rect">
-            <a:avLst/>
-          </a:prstGeom>
-          <a:solidFill>
-            <a:schemeClr val="bg1">
-              <a:alpha val="84400"/>
-            </a:schemeClr>
-          </a:solidFill>
-        </p:spPr>
-        <p:txBody>
-          <a:bodyPr wrap="square" rtlCol="0">
-            <a:spAutoFit/>
+      <p:sp>
+        <p:nvSpPr>
+          <p:cNvPr id="3" name="Content Placeholder 2">
+            <a:extLst>
+              <a:ext uri="{FF2B5EF4-FFF2-40B4-BE49-F238E27FC236}">
+                <a16:creationId xmlns:a16="http://schemas.microsoft.com/office/drawing/2014/main" id="{3613BEA2-2A1F-1374-02BD-E86A504A5BA9}"/>
+              </a:ext>
+            </a:extLst>
+          </p:cNvPr>
+          <p:cNvSpPr>
+            <a:spLocks noGrp="1"/>
+          </p:cNvSpPr>
+          <p:nvPr>
+            <p:ph idx="1"/>
+          </p:nvPr>
+        </p:nvSpPr>
+        <p:spPr>
+          <a:xfrm>
+            <a:off x="366409" y="113556"/>
+            <a:ext cx="10515600" cy="4351338"/>
+          </a:xfrm>
+        </p:spPr>
+        <p:txBody>
+          <a:bodyPr>
+            <a:normAutofit fontScale="25000" lnSpcReduction="20000"/>
           </a:bodyPr>
           <a:lstStyle/>
           <a:p>
-            <a:r>
-              <a:rPr lang="en-US" sz="3200" b="1" dirty="0">
-                <a:solidFill>
-                  <a:schemeClr val="accent5"/>
-                </a:solidFill>
-              </a:rPr>
-              <a:t>Why / How they Robert F Kennedy:</a:t>
-            </a:r>
-          </a:p>
-        </p:txBody>
-      </p:sp>
-      <p:sp>
-        <p:nvSpPr>
-          <p:cNvPr id="3" name="Google Shape;170;p31">
-            <a:extLst>
-              <a:ext uri="{FF2B5EF4-FFF2-40B4-BE49-F238E27FC236}">
-                <a16:creationId xmlns:a16="http://schemas.microsoft.com/office/drawing/2014/main" id="{A4695FE5-0AA5-AB05-98B1-B5B8E3FA8CBE}"/>
-              </a:ext>
-            </a:extLst>
-          </p:cNvPr>
-          <p:cNvSpPr/>
-          <p:nvPr/>
-        </p:nvSpPr>
-        <p:spPr>
-          <a:xfrm>
-            <a:off x="191731" y="5732890"/>
-            <a:ext cx="3431270" cy="496760"/>
-          </a:xfrm>
-          <a:prstGeom prst="rect">
-            <a:avLst/>
-          </a:prstGeom>
-          <a:solidFill>
-            <a:schemeClr val="accent5"/>
-          </a:solidFill>
-          <a:ln>
-            <a:noFill/>
-          </a:ln>
-        </p:spPr>
-        <p:txBody>
-          <a:bodyPr spcFirstLastPara="1" wrap="square" lIns="91425" tIns="45700" rIns="91425" bIns="45700" anchor="ctr" anchorCtr="0">
-            <a:noAutofit/>
-          </a:bodyPr>
-          <a:lstStyle/>
-          <a:p>
-            <a:pPr marL="0" marR="0" lvl="0" indent="0" algn="ctr" rtl="0">
-              <a:lnSpc>
-                <a:spcPct val="100000"/>
-              </a:lnSpc>
-              <a:spcBef>
-                <a:spcPts val="0"/>
-              </a:spcBef>
-              <a:spcAft>
-                <a:spcPts val="0"/>
-              </a:spcAft>
-              <a:buClr>
-                <a:srgbClr val="000000"/>
-              </a:buClr>
-              <a:buSzPts val="1600"/>
-              <a:buFont typeface="Arial"/>
-              <a:buNone/>
-            </a:pPr>
-            <a:r>
-              <a:rPr lang="en-US" sz="3600" dirty="0">
-                <a:solidFill>
-                  <a:schemeClr val="lt1"/>
-                </a:solidFill>
-              </a:rPr>
-              <a:t>Read List Here:</a:t>
-            </a:r>
-            <a:endParaRPr sz="2000" b="0" i="0" u="none" strike="noStrike" cap="none" dirty="0">
-              <a:solidFill>
-                <a:srgbClr val="000000"/>
-              </a:solidFill>
-              <a:latin typeface="Arial"/>
-              <a:ea typeface="Arial"/>
-              <a:cs typeface="Arial"/>
-              <a:sym typeface="Arial"/>
-            </a:endParaRPr>
-          </a:p>
-        </p:txBody>
-      </p:sp>
-      <p:sp>
-        <p:nvSpPr>
-          <p:cNvPr id="5" name="Google Shape;170;p31">
-            <a:extLst>
-              <a:ext uri="{FF2B5EF4-FFF2-40B4-BE49-F238E27FC236}">
-                <a16:creationId xmlns:a16="http://schemas.microsoft.com/office/drawing/2014/main" id="{98132413-6ED2-8B36-74B6-3C503B1A4634}"/>
-              </a:ext>
-            </a:extLst>
-          </p:cNvPr>
-          <p:cNvSpPr/>
-          <p:nvPr/>
-        </p:nvSpPr>
-        <p:spPr>
-          <a:xfrm>
-            <a:off x="0" y="-31518"/>
-            <a:ext cx="12192000" cy="1131606"/>
-          </a:xfrm>
-          <a:prstGeom prst="rect">
-            <a:avLst/>
-          </a:prstGeom>
-          <a:solidFill>
-            <a:srgbClr val="C00000"/>
-          </a:solidFill>
-          <a:ln>
-            <a:noFill/>
-          </a:ln>
-        </p:spPr>
-        <p:txBody>
-          <a:bodyPr spcFirstLastPara="1" wrap="square" lIns="91425" tIns="45700" rIns="91425" bIns="45700" anchor="ctr" anchorCtr="0">
-            <a:noAutofit/>
-          </a:bodyPr>
-          <a:lstStyle/>
-          <a:p>
-            <a:pPr lvl="0">
-              <a:buClr>
-                <a:srgbClr val="000000"/>
-              </a:buClr>
-              <a:buSzPts val="1600"/>
-            </a:pPr>
-            <a:r>
-              <a:rPr lang="en-US" sz="4800" dirty="0">
-                <a:solidFill>
-                  <a:schemeClr val="lt1"/>
-                </a:solidFill>
-              </a:rPr>
-              <a:t> 150+ Murdered: by Intelligence Services</a:t>
-            </a:r>
-            <a:endParaRPr lang="en-US" sz="3200" dirty="0">
-              <a:solidFill>
-                <a:srgbClr val="000000"/>
-              </a:solidFill>
-              <a:latin typeface="Arial"/>
-              <a:ea typeface="Arial"/>
-              <a:cs typeface="Arial"/>
-              <a:sym typeface="Arial"/>
-            </a:endParaRPr>
-          </a:p>
-        </p:txBody>
-      </p:sp>
-      <p:sp>
-        <p:nvSpPr>
-          <p:cNvPr id="4" name="TextBox 3">
-            <a:extLst>
-              <a:ext uri="{FF2B5EF4-FFF2-40B4-BE49-F238E27FC236}">
-                <a16:creationId xmlns:a16="http://schemas.microsoft.com/office/drawing/2014/main" id="{50D7621F-9D36-7894-7117-9F831EF5EFA6}"/>
-              </a:ext>
-            </a:extLst>
-          </p:cNvPr>
-          <p:cNvSpPr txBox="1"/>
-          <p:nvPr/>
-        </p:nvSpPr>
-        <p:spPr>
-          <a:xfrm>
-            <a:off x="107300" y="6229650"/>
-            <a:ext cx="11685989" cy="461665"/>
-          </a:xfrm>
-          <a:prstGeom prst="rect">
-            <a:avLst/>
-          </a:prstGeom>
-          <a:solidFill>
-            <a:schemeClr val="bg1">
-              <a:alpha val="84400"/>
-            </a:schemeClr>
-          </a:solidFill>
-        </p:spPr>
-        <p:txBody>
-          <a:bodyPr wrap="square" rtlCol="0">
-            <a:spAutoFit/>
-          </a:bodyPr>
-          <a:lstStyle/>
-          <a:p>
-            <a:r>
-              <a:rPr lang="en-US" sz="2400" dirty="0"/>
-              <a:t>https://intelligencemurders.com/intel</a:t>
-            </a:r>
-          </a:p>
-        </p:txBody>
-      </p:sp>
-      <p:sp>
-        <p:nvSpPr>
-          <p:cNvPr id="7" name="Google Shape;170;p31">
-            <a:extLst>
-              <a:ext uri="{FF2B5EF4-FFF2-40B4-BE49-F238E27FC236}">
-                <a16:creationId xmlns:a16="http://schemas.microsoft.com/office/drawing/2014/main" id="{4B582382-76AA-B49E-C611-39A37CE591B9}"/>
-              </a:ext>
-            </a:extLst>
-          </p:cNvPr>
-          <p:cNvSpPr/>
-          <p:nvPr/>
-        </p:nvSpPr>
-        <p:spPr>
-          <a:xfrm>
-            <a:off x="7506336" y="4925186"/>
-            <a:ext cx="4550222" cy="1419806"/>
-          </a:xfrm>
-          <a:prstGeom prst="rect">
-            <a:avLst/>
-          </a:prstGeom>
-          <a:solidFill>
-            <a:srgbClr val="C00000"/>
-          </a:solidFill>
-          <a:ln>
-            <a:noFill/>
-          </a:ln>
-        </p:spPr>
-        <p:txBody>
-          <a:bodyPr spcFirstLastPara="1" wrap="square" lIns="91425" tIns="45700" rIns="91425" bIns="45700" anchor="ctr" anchorCtr="0">
-            <a:noAutofit/>
-          </a:bodyPr>
-          <a:lstStyle/>
-          <a:p>
-            <a:pPr marL="0" marR="0" lvl="0" indent="0" algn="ctr" rtl="0">
-              <a:lnSpc>
-                <a:spcPct val="100000"/>
-              </a:lnSpc>
-              <a:spcBef>
-                <a:spcPts val="0"/>
-              </a:spcBef>
-              <a:spcAft>
-                <a:spcPts val="0"/>
-              </a:spcAft>
-              <a:buClr>
-                <a:srgbClr val="000000"/>
-              </a:buClr>
-              <a:buSzPts val="1600"/>
-              <a:buFont typeface="Arial"/>
-              <a:buNone/>
-            </a:pPr>
-            <a:r>
-              <a:rPr lang="en-US" sz="4800" dirty="0">
-                <a:solidFill>
-                  <a:schemeClr val="lt1"/>
-                </a:solidFill>
-              </a:rPr>
-              <a:t>Robert F Kennedy</a:t>
-            </a:r>
-            <a:endParaRPr sz="3200" b="0" i="0" u="none" strike="noStrike" cap="none" dirty="0">
-              <a:solidFill>
-                <a:srgbClr val="000000"/>
-              </a:solidFill>
-              <a:latin typeface="Arial"/>
-              <a:ea typeface="Arial"/>
-              <a:cs typeface="Arial"/>
-              <a:sym typeface="Arial"/>
-            </a:endParaRPr>
-          </a:p>
-        </p:txBody>
-      </p:sp>
-      <p:sp>
-        <p:nvSpPr>
-          <p:cNvPr id="8" name="Google Shape;170;p31">
-            <a:extLst>
-              <a:ext uri="{FF2B5EF4-FFF2-40B4-BE49-F238E27FC236}">
-                <a16:creationId xmlns:a16="http://schemas.microsoft.com/office/drawing/2014/main" id="{D328ABDE-E232-3EB7-C3F2-B4BB7B64262F}"/>
-              </a:ext>
-            </a:extLst>
-          </p:cNvPr>
-          <p:cNvSpPr/>
-          <p:nvPr/>
-        </p:nvSpPr>
-        <p:spPr>
-          <a:xfrm>
-            <a:off x="7534478" y="6291451"/>
-            <a:ext cx="4550222" cy="548230"/>
-          </a:xfrm>
-          <a:prstGeom prst="rect">
-            <a:avLst/>
-          </a:prstGeom>
-          <a:solidFill>
-            <a:srgbClr val="C00000"/>
-          </a:solidFill>
-          <a:ln>
-            <a:noFill/>
-          </a:ln>
-        </p:spPr>
-        <p:txBody>
-          <a:bodyPr spcFirstLastPara="1" wrap="square" lIns="91425" tIns="45700" rIns="91425" bIns="45700" anchor="ctr" anchorCtr="0">
-            <a:noAutofit/>
-          </a:bodyPr>
-          <a:lstStyle/>
-          <a:p>
-            <a:pPr marL="0" marR="0" lvl="0" indent="0" algn="ctr" rtl="0">
-              <a:lnSpc>
-                <a:spcPct val="100000"/>
-              </a:lnSpc>
-              <a:spcBef>
-                <a:spcPts val="0"/>
-              </a:spcBef>
-              <a:spcAft>
-                <a:spcPts val="0"/>
-              </a:spcAft>
-              <a:buClr>
-                <a:srgbClr val="000000"/>
-              </a:buClr>
-              <a:buSzPts val="1600"/>
-              <a:buFont typeface="Arial"/>
-              <a:buNone/>
-            </a:pPr>
-            <a:r>
-              <a:rPr lang="en-US" sz="3600" dirty="0">
-                <a:solidFill>
-                  <a:schemeClr val="lt1"/>
-                </a:solidFill>
-              </a:rPr>
-              <a:t>Dead at Age 42</a:t>
-            </a:r>
-            <a:endParaRPr sz="2000" b="0" i="0" u="none" strike="noStrike" cap="none" dirty="0">
-              <a:solidFill>
-                <a:srgbClr val="000000"/>
-              </a:solidFill>
-              <a:latin typeface="Arial"/>
-              <a:ea typeface="Arial"/>
-              <a:cs typeface="Arial"/>
-              <a:sym typeface="Arial"/>
-            </a:endParaRPr>
-          </a:p>
-        </p:txBody>
-      </p:sp>
-      <p:sp>
-        <p:nvSpPr>
-          <p:cNvPr id="10" name="TextBox 9">
-            <a:extLst>
-              <a:ext uri="{FF2B5EF4-FFF2-40B4-BE49-F238E27FC236}">
-                <a16:creationId xmlns:a16="http://schemas.microsoft.com/office/drawing/2014/main" id="{5FA0D8B2-6B55-D3DC-BCBB-6FEAD86B9E72}"/>
-              </a:ext>
-            </a:extLst>
-          </p:cNvPr>
-          <p:cNvSpPr txBox="1"/>
-          <p:nvPr/>
-        </p:nvSpPr>
-        <p:spPr>
-          <a:xfrm>
-            <a:off x="237466" y="1937976"/>
-            <a:ext cx="6987941" cy="3046988"/>
-          </a:xfrm>
-          <a:prstGeom prst="rect">
-            <a:avLst/>
-          </a:prstGeom>
-          <a:solidFill>
-            <a:schemeClr val="bg1">
-              <a:alpha val="84400"/>
-            </a:schemeClr>
-          </a:solidFill>
-        </p:spPr>
-        <p:txBody>
-          <a:bodyPr wrap="square" rtlCol="0">
-            <a:spAutoFit/>
-          </a:bodyPr>
-          <a:lstStyle/>
-          <a:p>
-            <a:pPr marL="285750" indent="-285750">
-              <a:spcBef>
-                <a:spcPts val="1200"/>
-              </a:spcBef>
-              <a:buFont typeface="Arial" panose="020B0604020202020204" pitchFamily="34" charset="0"/>
-              <a:buChar char="•"/>
-            </a:pPr>
-            <a:r>
-              <a:rPr dirty="0"/>
-              <a:t>U.S. Senator and presidential candidate ASSASSINATED at age 42 in Los Angeles — June 1968.</a:t>
-            </a:r>
-          </a:p>
-          <a:p>
-            <a:pPr marL="285750" indent="-285750">
-              <a:spcBef>
-                <a:spcPts val="1200"/>
-              </a:spcBef>
-              <a:buFont typeface="Arial" panose="020B0604020202020204" pitchFamily="34" charset="0"/>
-              <a:buChar char="•"/>
-            </a:pPr>
-            <a:r>
-              <a:rPr dirty="0"/>
-              <a:t>Dean Warwick claimed he was about to name RFK's real killer on stage — then COLLAPSED and DIED mid-sentence.</a:t>
-            </a:r>
-          </a:p>
-          <a:p>
-            <a:pPr marL="285750" indent="-285750">
-              <a:spcBef>
-                <a:spcPts val="1200"/>
-              </a:spcBef>
-              <a:buFont typeface="Arial" panose="020B0604020202020204" pitchFamily="34" charset="0"/>
-              <a:buChar char="•"/>
-            </a:pPr>
-            <a:r>
-              <a:rPr dirty="0"/>
-              <a:t>The official story blames Sirhan Sirhan — but forensic evidence suggests shots from behind, where Sirhan was not.</a:t>
-            </a:r>
-          </a:p>
-          <a:p>
-            <a:pPr marL="285750" indent="-285750">
-              <a:spcBef>
-                <a:spcPts val="1200"/>
-              </a:spcBef>
-              <a:buFont typeface="Arial" panose="020B0604020202020204" pitchFamily="34" charset="0"/>
-              <a:buChar char="•"/>
-            </a:pPr>
-            <a:r>
-              <a:rPr dirty="0"/>
-              <a:t>Some researchers connect his assassination to his potential access to classified UFO programs had he become president.</a:t>
-            </a:r>
-          </a:p>
-          <a:p>
-            <a:pPr marL="285750" indent="-285750">
-              <a:spcBef>
-                <a:spcPts val="1200"/>
-              </a:spcBef>
-              <a:buFont typeface="Arial" panose="020B0604020202020204" pitchFamily="34" charset="0"/>
-              <a:buChar char="•"/>
-            </a:pPr>
-            <a:r>
-              <a:rPr dirty="0"/>
-              <a:t>His brother JFK was killed five years earlier — two Kennedys, both assassinated during the peak of UFO secrecy.</a:t>
-            </a:r>
+            <a:endParaRPr lang="en-US" dirty="0"/>
+          </a:p>
+          <a:p>
+            <a:r>
+              <a:rPr lang="en-US" dirty="0"/>
+              <a:t>⏺ Here's the filtered list of Americans, murdered suspiciously (SUSPICIOUS or higher)</a:t>
+            </a:r>
+          </a:p>
+          <a:p>
+            <a:r>
+              <a:rPr lang="en-US" dirty="0"/>
+              <a:t>  within the last 20 years (2006+), with a substantial connection making them a target:</a:t>
+            </a:r>
+          </a:p>
+          <a:p>
+            <a:endParaRPr lang="en-US" dirty="0"/>
+          </a:p>
+          <a:p>
+            <a:r>
+              <a:rPr lang="en-US" dirty="0"/>
+              <a:t>  - Jeffrey Epstein — 2019, HIGHLY SUSPICIOUS. Sex-trafficking kingpin found dead in</a:t>
+            </a:r>
+          </a:p>
+          <a:p>
+            <a:r>
+              <a:rPr lang="en-US" dirty="0"/>
+              <a:t>  federal custody before trial. Both cameras failed, guards asleep.</a:t>
+            </a:r>
+          </a:p>
+          <a:p>
+            <a:r>
+              <a:rPr lang="en-US" dirty="0"/>
+              <a:t>  - Mark Middleton — 2022, HIGHLY SUSPICIOUS. Clinton White House aide who signed Epstein</a:t>
+            </a:r>
+          </a:p>
+          <a:p>
+            <a:r>
+              <a:rPr lang="en-US" dirty="0"/>
+              <a:t>  into the White House. Found hanged at remote Arkansas ranch with shotgun wound.</a:t>
+            </a:r>
+          </a:p>
+          <a:p>
+            <a:r>
+              <a:rPr lang="en-US" dirty="0"/>
+              <a:t>  - Steve Bing — 2020, HIGHLY SUSPICIOUS. Hollywood producer and major Clinton donor who</a:t>
+            </a:r>
+          </a:p>
+          <a:p>
+            <a:r>
+              <a:rPr lang="en-US" dirty="0"/>
+              <a:t>  provided Clinton's personal 737. Fell from 27th floor. Named in Epstein file releases.</a:t>
+            </a:r>
+          </a:p>
+          <a:p>
+            <a:r>
+              <a:rPr lang="en-US" dirty="0"/>
+              <a:t>  - Carolyn Andriano — 2023, HIGHLY SUSPICIOUS. Epstein victim and accuser. Found dead in</a:t>
+            </a:r>
+          </a:p>
+          <a:p>
+            <a:r>
+              <a:rPr lang="en-US" dirty="0"/>
+              <a:t>  West Palm Beach hotel at age 36.</a:t>
+            </a:r>
+          </a:p>
+          <a:p>
+            <a:r>
+              <a:rPr lang="en-US" dirty="0"/>
+              <a:t>  - Leigh Skye Patrick — 2017, HIGHLY SUSPICIOUS. Epstein victim found dead in West Palm</a:t>
+            </a:r>
+          </a:p>
+          <a:p>
+            <a:r>
+              <a:rPr lang="en-US" dirty="0"/>
+              <a:t>  Beach hotel room at age 29.</a:t>
+            </a:r>
+          </a:p>
+          <a:p>
+            <a:r>
+              <a:rPr lang="en-US" dirty="0"/>
+              <a:t>  - Daniel Anderl — 2020, HIGHLY SUSPICIOUS. 20-year-old son of Judge Esther Salas, who had</a:t>
+            </a:r>
+          </a:p>
+          <a:p>
+            <a:r>
+              <a:rPr lang="en-US" dirty="0"/>
+              <a:t>   just been assigned the Epstein-Deutsche Bank case. Gunman came to their home.</a:t>
+            </a:r>
+          </a:p>
+          <a:p>
+            <a:r>
+              <a:rPr lang="en-US" dirty="0"/>
+              <a:t>  - Philip Marshall — 2013, HIGHLY SUSPICIOUS. Author investigating CIA drug running and</a:t>
+            </a:r>
+          </a:p>
+          <a:p>
+            <a:r>
+              <a:rPr lang="en-US" dirty="0"/>
+              <a:t>  9/11. Found shot dead in his California home alongside his two children and dog. Ruled</a:t>
+            </a:r>
+          </a:p>
+          <a:p>
+            <a:r>
+              <a:rPr lang="en-US" dirty="0"/>
+              <a:t>  murder-suicide.</a:t>
+            </a:r>
+          </a:p>
+          <a:p>
+            <a:r>
+              <a:rPr lang="en-US" dirty="0"/>
+              <a:t>  - Michael Hastings — 2013, HIGHLY SUSPICIOUS. Journalist investigating CIA and military.</a:t>
+            </a:r>
+          </a:p>
+          <a:p>
+            <a:r>
+              <a:rPr lang="en-US" dirty="0"/>
+              <a:t>  Told friends he was being investigated by the FBI hours before his car exploded at high</a:t>
+            </a:r>
+          </a:p>
+          <a:p>
+            <a:r>
+              <a:rPr lang="en-US" dirty="0"/>
+              <a:t>  speed in LA.</a:t>
+            </a:r>
+          </a:p>
+          <a:p>
+            <a:r>
+              <a:rPr lang="en-US" dirty="0"/>
+              <a:t>  - Mark McCandlish — 2021, HIGHLY SUSPICIOUS. Aerospace illustrator who testified about</a:t>
+            </a:r>
+          </a:p>
+          <a:p>
+            <a:r>
+              <a:rPr lang="en-US" dirty="0"/>
+              <a:t>  classified antigravity craft. Shot in head at home days before scheduled Senate</a:t>
+            </a:r>
+          </a:p>
+          <a:p>
+            <a:r>
+              <a:rPr lang="en-US" dirty="0"/>
+              <a:t>  Intelligence Committee testimony.</a:t>
+            </a:r>
+          </a:p>
+          <a:p>
+            <a:r>
+              <a:rPr lang="en-US" dirty="0"/>
+              <a:t>  - Amy Eskridge — 2022, HIGHLY SUSPICIOUS. NASA rocket scientist in Huntsville, Alabama</a:t>
+            </a:r>
+          </a:p>
+          <a:p>
+            <a:r>
+              <a:rPr lang="en-US" dirty="0"/>
+              <a:t>  found dead at age 35 under suspicious circumstances.</a:t>
+            </a:r>
+          </a:p>
+          <a:p>
+            <a:r>
+              <a:rPr lang="en-US" dirty="0"/>
+              <a:t>  - John Rossi — 2016, HIGHLY SUSPICIOUS. Aerospace engineer found dead at Redstone Arsenal</a:t>
+            </a:r>
+          </a:p>
+          <a:p>
+            <a:r>
+              <a:rPr lang="en-US" dirty="0"/>
+              <a:t>   in Huntsville, Alabama.</a:t>
+            </a:r>
+          </a:p>
+          <a:p>
+            <a:r>
+              <a:rPr lang="en-US" dirty="0"/>
+              <a:t>  - Michael </a:t>
+            </a:r>
+            <a:r>
+              <a:rPr lang="en-US" dirty="0" err="1"/>
+              <a:t>Zebuhr</a:t>
+            </a:r>
+            <a:r>
+              <a:rPr lang="en-US" dirty="0"/>
+              <a:t> — 2006, HIGHLY SUSPICIOUS. Engineering student researching</a:t>
+            </a:r>
+          </a:p>
+          <a:p>
+            <a:r>
+              <a:rPr lang="en-US" dirty="0"/>
+              <a:t>  unconventional energy. Shot and killed in Minneapolis at age 25.</a:t>
+            </a:r>
+          </a:p>
+          <a:p>
+            <a:r>
+              <a:rPr lang="en-US" dirty="0"/>
+              <a:t>  - Job Price — 2012, HIGHLY SUSPICIOUS. US soldier found dead at forward operating base in</a:t>
+            </a:r>
+          </a:p>
+          <a:p>
+            <a:r>
+              <a:rPr lang="en-US" dirty="0"/>
+              <a:t>   Afghanistan under unexplained circumstances.</a:t>
+            </a:r>
+          </a:p>
+          <a:p>
+            <a:r>
+              <a:rPr lang="en-US" dirty="0"/>
+              <a:t>  - Abdulrahman al-Awlaki — 2011, HIGHLY SUSPICIOUS. 16-year-old American citizen killed by</a:t>
+            </a:r>
+          </a:p>
+          <a:p>
+            <a:r>
+              <a:rPr lang="en-US" dirty="0"/>
+              <a:t>   CIA drone strike in Yemen without charge or trial. Son of Anwar al-Awlaki.</a:t>
+            </a:r>
+          </a:p>
+          <a:p>
+            <a:r>
+              <a:rPr lang="en-US" dirty="0"/>
+              <a:t>  - Anwar al-Awlaki — 2011, CONFIRMED. American citizen killed by CIA drone strike in</a:t>
+            </a:r>
+          </a:p>
+          <a:p>
+            <a:r>
+              <a:rPr lang="en-US" dirty="0"/>
+              <a:t>  Yemen. First known deliberate killing of a US citizen by the US government without trial.</a:t>
+            </a:r>
+          </a:p>
+          <a:p>
+            <a:r>
+              <a:rPr lang="en-US" dirty="0"/>
+              <a:t>  - Andrew Breitbart — 2012, SUSPICIOUS. Conservative media founder who publicly called out</a:t>
+            </a:r>
+          </a:p>
+          <a:p>
+            <a:r>
+              <a:rPr lang="en-US" dirty="0"/>
+              <a:t>   Podesta's connection to underage trafficking. Died at 43 of sudden heart attack.</a:t>
+            </a:r>
+          </a:p>
+          <a:p>
+            <a:r>
+              <a:rPr lang="en-US" dirty="0"/>
+              <a:t>  Coroner's technician died of arsenic poisoning weeks later.</a:t>
+            </a:r>
+          </a:p>
+          <a:p>
+            <a:r>
+              <a:rPr lang="en-US" dirty="0"/>
+              <a:t>  - Christopher Sign — 2021, SUSPICIOUS. ABC News anchor who broke the Clinton-Lynch tarmac</a:t>
+            </a:r>
+          </a:p>
+          <a:p>
+            <a:r>
+              <a:rPr lang="en-US" dirty="0"/>
+              <a:t>   meeting story. Died at 45, ruled suicide. Had received death threats.</a:t>
+            </a:r>
+          </a:p>
+          <a:p>
+            <a:r>
+              <a:rPr lang="en-US" dirty="0"/>
+              <a:t>  - Isaac Kappy — 2019, SUSPICIOUS. Actor who publicly accused Hollywood figures of</a:t>
+            </a:r>
+          </a:p>
+          <a:p>
+            <a:r>
+              <a:rPr lang="en-US" dirty="0"/>
+              <a:t>  pedophilia and claimed to possess Epstein blackmail files. Fell from Arizona bridge 60</a:t>
+            </a:r>
+          </a:p>
+          <a:p>
+            <a:r>
+              <a:rPr lang="en-US" dirty="0"/>
+              <a:t>  days before Epstein's arrest. Repeatedly stated on video "if I die, it wasn't suicide."</a:t>
+            </a:r>
+          </a:p>
+          <a:p>
+            <a:r>
+              <a:rPr lang="en-US" dirty="0"/>
+              <a:t>  - Nancy Schaefer — 2010, SUSPICIOUS. Georgia state senator who exposed CPS child</a:t>
+            </a:r>
+          </a:p>
+          <a:p>
+            <a:r>
+              <a:rPr lang="en-US" dirty="0"/>
+              <a:t>  trafficking networks. Shot in back. Ruled murder-suicide while she was completing a</a:t>
+            </a:r>
+          </a:p>
+          <a:p>
+            <a:r>
+              <a:rPr lang="en-US" dirty="0"/>
+              <a:t>  documentary exposé.</a:t>
+            </a:r>
+          </a:p>
+          <a:p>
+            <a:r>
+              <a:rPr lang="en-US" dirty="0"/>
+              <a:t>  - Seth Rich — 2016, SUSPICIOUS. DNC staffer shot twice in the back in Washington DC.</a:t>
+            </a:r>
+          </a:p>
+          <a:p>
+            <a:r>
+              <a:rPr lang="en-US" dirty="0"/>
+              <a:t>  Nothing stolen. Case remains unsolved.</a:t>
+            </a:r>
+          </a:p>
+          <a:p>
+            <a:r>
+              <a:rPr lang="en-US" dirty="0"/>
+              <a:t>  - Peter Smith — 2017, SUSPICIOUS. Republican operative found dead of helium asphyxiation</a:t>
+            </a:r>
+          </a:p>
+          <a:p>
+            <a:r>
+              <a:rPr lang="en-US" dirty="0"/>
+              <a:t>  in Minnesota hotel 10 days after WSJ interview. Left note saying "NO FOUL PLAY</a:t>
+            </a:r>
+          </a:p>
+          <a:p>
+            <a:r>
+              <a:rPr lang="en-US" dirty="0"/>
+              <a:t>  WHATSOEVER." Mueller investigation sought his testimony.</a:t>
+            </a:r>
+          </a:p>
+          <a:p>
+            <a:r>
+              <a:rPr lang="en-US" dirty="0"/>
+              <a:t>  - Thomas Bowers — 2019, SUSPICIOUS. Deutsche Bank executive who processed Epstein's</a:t>
+            </a:r>
+          </a:p>
+          <a:p>
+            <a:r>
+              <a:rPr lang="en-US" dirty="0"/>
+              <a:t>  financial transactions. Found hanged at his Malibu home.</a:t>
+            </a:r>
+          </a:p>
+          <a:p>
+            <a:r>
+              <a:rPr lang="en-US" dirty="0"/>
+              <a:t>  - Aaron Swartz — 2013, SUSPICIOUS. Reddit co-founder who built </a:t>
+            </a:r>
+            <a:r>
+              <a:rPr lang="en-US" dirty="0" err="1"/>
+              <a:t>SecureDrop</a:t>
+            </a:r>
+            <a:r>
+              <a:rPr lang="en-US" dirty="0"/>
+              <a:t> whistleblower</a:t>
+            </a:r>
+          </a:p>
+          <a:p>
+            <a:r>
+              <a:rPr lang="en-US" dirty="0"/>
+              <a:t>  tool. Found hanged at 26 while facing 35 years in prison for downloading academic</a:t>
+            </a:r>
+          </a:p>
+          <a:p>
+            <a:r>
+              <a:rPr lang="en-US" dirty="0"/>
+              <a:t>  articles. Father said "he was killed by the government."</a:t>
+            </a:r>
+          </a:p>
+          <a:p>
+            <a:r>
+              <a:rPr lang="en-US" dirty="0"/>
+              <a:t>  - Philip Haney — 2020, SUSPICIOUS. DHS whistleblower who exposed the shutdown of Muslim</a:t>
+            </a:r>
+          </a:p>
+          <a:p>
+            <a:r>
+              <a:rPr lang="en-US" dirty="0"/>
+              <a:t>  surveillance programs. Found shot dead in California park-and-ride lot.</a:t>
+            </a:r>
+          </a:p>
+          <a:p>
+            <a:r>
+              <a:rPr lang="en-US" dirty="0"/>
+              <a:t>  - Philip Leonard — 2024, SUSPICIOUS. Los Alamos National Laboratory employee found dead</a:t>
+            </a:r>
+          </a:p>
+          <a:p>
+            <a:r>
+              <a:rPr lang="en-US" dirty="0"/>
+              <a:t>  near the facility. Part of a cluster of suspicious deaths near weapons labs.</a:t>
+            </a:r>
+          </a:p>
+          <a:p>
+            <a:r>
+              <a:rPr lang="en-US" dirty="0"/>
+              <a:t>  - Jonathan Nichols — 2019, SUSPICIOUS. Oklahoma state senator who authored child abuse</a:t>
+            </a:r>
+          </a:p>
+          <a:p>
+            <a:r>
+              <a:rPr lang="en-US" dirty="0"/>
+              <a:t>  protection laws and pushed death penalty for repeat child molesters. Found dead of</a:t>
+            </a:r>
+          </a:p>
+          <a:p>
+            <a:r>
+              <a:rPr lang="en-US" dirty="0"/>
+              <a:t>  gunshot wound to chest.</a:t>
+            </a:r>
+          </a:p>
+          <a:p>
+            <a:r>
+              <a:rPr lang="en-US" dirty="0"/>
+              <a:t>  - Steven Hoffenberg — 2022, SUSPICIOUS. Epstein's early business partner who helped build</a:t>
+            </a:r>
+          </a:p>
+          <a:p>
+            <a:r>
+              <a:rPr lang="en-US" dirty="0"/>
+              <a:t>   the financial fraud operation. Found dead at home in Connecticut.</a:t>
+            </a:r>
+          </a:p>
+          <a:p>
+            <a:r>
+              <a:rPr lang="en-US" dirty="0"/>
+              <a:t>  - Andrew Stewart — 2020, SUSPICIOUS. Epstein's personal chef described as "the holy grail</a:t>
+            </a:r>
+          </a:p>
+          <a:p>
+            <a:r>
+              <a:rPr lang="en-US" dirty="0"/>
+              <a:t>   — he knew everything." Died in his sleep as lawyers sought to subpoena him.</a:t>
+            </a:r>
+          </a:p>
+          <a:p>
+            <a:r>
+              <a:rPr lang="en-US" dirty="0"/>
+              <a:t>  - Joseph Calabrese — 2019, SUSPICIOUS. NYPD detective who allegedly viewed contents of</a:t>
+            </a:r>
+          </a:p>
+          <a:p>
+            <a:r>
+              <a:rPr lang="en-US" dirty="0"/>
+              <a:t>  the Weiner laptop. Part of a cluster of 4+ NYPD deaths in 22 days.</a:t>
+            </a:r>
+          </a:p>
+          <a:p>
+            <a:r>
+              <a:rPr lang="en-US" dirty="0"/>
+              <a:t>  - Steven Silks — 2019, SUSPICIOUS. NYPD Deputy Chief allegedly connected to Weiner laptop</a:t>
+            </a:r>
+          </a:p>
+          <a:p>
+            <a:r>
+              <a:rPr lang="en-US" dirty="0"/>
+              <a:t>   review. First in a rapid cluster of NYPD suicides.</a:t>
+            </a:r>
+          </a:p>
+          <a:p>
+            <a:r>
+              <a:rPr lang="en-US" dirty="0"/>
+              <a:t>  - Karl Wolfe — 2018, SUSPICIOUS. Former Air Force sergeant who testified publicly about</a:t>
+            </a:r>
+          </a:p>
+          <a:p>
+            <a:r>
+              <a:rPr lang="en-US" dirty="0"/>
+              <a:t>  seeing NASA photographs of structures on the far side of the moon.</a:t>
+            </a:r>
+          </a:p>
+          <a:p>
+            <a:r>
+              <a:rPr lang="en-US" dirty="0"/>
+              <a:t>  - Fred Bell — 2011, SUSPICIOUS. Physicist and UAP whistleblower who died two days after</a:t>
+            </a:r>
+          </a:p>
+          <a:p>
+            <a:r>
+              <a:rPr lang="en-US" dirty="0"/>
+              <a:t>  filming an interview about classified programs for Jesse Ventura's show.</a:t>
+            </a:r>
+          </a:p>
+          <a:p>
+            <a:r>
+              <a:rPr lang="en-US" dirty="0"/>
+              <a:t>  - Jacob Prichard — 2025, SUSPICIOUS. Connected to Air Force Research Laboratory. Found</a:t>
+            </a:r>
+          </a:p>
+          <a:p>
+            <a:r>
+              <a:rPr lang="en-US" dirty="0"/>
+              <a:t>  dead in West Milton, Ohio as part of October 2025 AFRL death cluster.</a:t>
+            </a:r>
+          </a:p>
+          <a:p>
+            <a:r>
+              <a:rPr lang="en-US" dirty="0"/>
+              <a:t>  - Jaymee Prichard — 2025, SUSPICIOUS. Connected to AFRL cluster. Found dead in car trunk</a:t>
+            </a:r>
+          </a:p>
+          <a:p>
+            <a:r>
+              <a:rPr lang="en-US" dirty="0"/>
+              <a:t>  at same West Milton location.</a:t>
+            </a:r>
+          </a:p>
+          <a:p>
+            <a:r>
+              <a:rPr lang="en-US" dirty="0"/>
+              <a:t>  - Jaime Gustitus — 2025, SUSPICIOUS. AFRL-connected, found dead in Sugarcreek Township,</a:t>
+            </a:r>
+          </a:p>
+          <a:p>
+            <a:r>
+              <a:rPr lang="en-US" dirty="0"/>
+              <a:t>  Ohio. Part of the same October 2025 cluster.</a:t>
+            </a:r>
+          </a:p>
+          <a:p>
+            <a:endParaRPr lang="en-US" dirty="0"/>
           </a:p>
         </p:txBody>
       </p:sp>
     </p:spTree>
+    <p:extLst>
+      <p:ext uri="{BB962C8B-B14F-4D97-AF65-F5344CB8AC3E}">
+        <p14:creationId xmlns:p14="http://schemas.microsoft.com/office/powerpoint/2010/main" val="645651657"/>
+      </p:ext>
+    </p:extLst>
   </p:cSld>
   <p:clrMapOvr>
     <a:masterClrMapping/>
@@ -3839,9 +3912,403 @@
           <a:chExt cx="0" cy="0"/>
         </a:xfrm>
       </p:grpSpPr>
+      <p:sp>
+        <p:nvSpPr>
+          <p:cNvPr id="15" name="TextBox 14">
+            <a:extLst>
+              <a:ext uri="{FF2B5EF4-FFF2-40B4-BE49-F238E27FC236}">
+                <a16:creationId xmlns:a16="http://schemas.microsoft.com/office/drawing/2014/main" id="{E478240E-251B-5BA6-3C45-7E6620400769}"/>
+              </a:ext>
+            </a:extLst>
+          </p:cNvPr>
+          <p:cNvSpPr txBox="1"/>
+          <p:nvPr/>
+        </p:nvSpPr>
+        <p:spPr>
+          <a:xfrm>
+            <a:off x="312432" y="1288262"/>
+            <a:ext cx="7946044" cy="584775"/>
+          </a:xfrm>
+          <a:prstGeom prst="rect">
+            <a:avLst/>
+          </a:prstGeom>
+          <a:solidFill>
+            <a:schemeClr val="bg1">
+              <a:alpha val="84400"/>
+            </a:schemeClr>
+          </a:solidFill>
+        </p:spPr>
+        <p:txBody>
+          <a:bodyPr wrap="square" rtlCol="0">
+            <a:spAutoFit/>
+          </a:bodyPr>
+          <a:lstStyle/>
+          <a:p>
+            <a:r>
+              <a:rPr lang="en-US" sz="3200" b="1" dirty="0">
+                <a:solidFill>
+                  <a:schemeClr val="accent5"/>
+                </a:solidFill>
+              </a:rPr>
+              <a:t>Why / How they George Lincoln Rockwell:</a:t>
+            </a:r>
+          </a:p>
+        </p:txBody>
+      </p:sp>
+      <p:sp>
+        <p:nvSpPr>
+          <p:cNvPr id="3" name="Google Shape;170;p31">
+            <a:extLst>
+              <a:ext uri="{FF2B5EF4-FFF2-40B4-BE49-F238E27FC236}">
+                <a16:creationId xmlns:a16="http://schemas.microsoft.com/office/drawing/2014/main" id="{A4695FE5-0AA5-AB05-98B1-B5B8E3FA8CBE}"/>
+              </a:ext>
+            </a:extLst>
+          </p:cNvPr>
+          <p:cNvSpPr/>
+          <p:nvPr/>
+        </p:nvSpPr>
+        <p:spPr>
+          <a:xfrm>
+            <a:off x="191731" y="5732890"/>
+            <a:ext cx="3431270" cy="496760"/>
+          </a:xfrm>
+          <a:prstGeom prst="rect">
+            <a:avLst/>
+          </a:prstGeom>
+          <a:solidFill>
+            <a:schemeClr val="accent5"/>
+          </a:solidFill>
+          <a:ln>
+            <a:noFill/>
+          </a:ln>
+        </p:spPr>
+        <p:txBody>
+          <a:bodyPr spcFirstLastPara="1" wrap="square" lIns="91425" tIns="45700" rIns="91425" bIns="45700" anchor="ctr" anchorCtr="0">
+            <a:noAutofit/>
+          </a:bodyPr>
+          <a:lstStyle/>
+          <a:p>
+            <a:pPr marL="0" marR="0" lvl="0" indent="0" algn="ctr" rtl="0">
+              <a:lnSpc>
+                <a:spcPct val="100000"/>
+              </a:lnSpc>
+              <a:spcBef>
+                <a:spcPts val="0"/>
+              </a:spcBef>
+              <a:spcAft>
+                <a:spcPts val="0"/>
+              </a:spcAft>
+              <a:buClr>
+                <a:srgbClr val="000000"/>
+              </a:buClr>
+              <a:buSzPts val="1600"/>
+              <a:buFont typeface="Arial"/>
+              <a:buNone/>
+            </a:pPr>
+            <a:r>
+              <a:rPr lang="en-US" sz="3600" dirty="0">
+                <a:solidFill>
+                  <a:schemeClr val="lt1"/>
+                </a:solidFill>
+              </a:rPr>
+              <a:t>Read List Here:</a:t>
+            </a:r>
+            <a:endParaRPr sz="2000" b="0" i="0" u="none" strike="noStrike" cap="none" dirty="0">
+              <a:solidFill>
+                <a:srgbClr val="000000"/>
+              </a:solidFill>
+              <a:latin typeface="Arial"/>
+              <a:ea typeface="Arial"/>
+              <a:cs typeface="Arial"/>
+              <a:sym typeface="Arial"/>
+            </a:endParaRPr>
+          </a:p>
+        </p:txBody>
+      </p:sp>
+      <p:sp>
+        <p:nvSpPr>
+          <p:cNvPr id="5" name="Google Shape;170;p31">
+            <a:extLst>
+              <a:ext uri="{FF2B5EF4-FFF2-40B4-BE49-F238E27FC236}">
+                <a16:creationId xmlns:a16="http://schemas.microsoft.com/office/drawing/2014/main" id="{98132413-6ED2-8B36-74B6-3C503B1A4634}"/>
+              </a:ext>
+            </a:extLst>
+          </p:cNvPr>
+          <p:cNvSpPr/>
+          <p:nvPr/>
+        </p:nvSpPr>
+        <p:spPr>
+          <a:xfrm>
+            <a:off x="0" y="-31518"/>
+            <a:ext cx="12192000" cy="1131606"/>
+          </a:xfrm>
+          <a:prstGeom prst="rect">
+            <a:avLst/>
+          </a:prstGeom>
+          <a:solidFill>
+            <a:srgbClr val="C00000"/>
+          </a:solidFill>
+          <a:ln>
+            <a:noFill/>
+          </a:ln>
+        </p:spPr>
+        <p:txBody>
+          <a:bodyPr spcFirstLastPara="1" wrap="square" lIns="91425" tIns="45700" rIns="91425" bIns="45700" anchor="ctr" anchorCtr="0">
+            <a:noAutofit/>
+          </a:bodyPr>
+          <a:lstStyle/>
+          <a:p>
+            <a:pPr marL="0" marR="0" lvl="0" indent="0" rtl="0">
+              <a:lnSpc>
+                <a:spcPct val="100000"/>
+              </a:lnSpc>
+              <a:spcBef>
+                <a:spcPts val="0"/>
+              </a:spcBef>
+              <a:spcAft>
+                <a:spcPts val="0"/>
+              </a:spcAft>
+              <a:buClr>
+                <a:srgbClr val="000000"/>
+              </a:buClr>
+              <a:buSzPts val="1600"/>
+              <a:buFont typeface="Arial"/>
+              <a:buNone/>
+            </a:pPr>
+            <a:r>
+              <a:rPr lang="en-US" sz="4800" dirty="0">
+                <a:solidFill>
+                  <a:schemeClr val="lt1"/>
+                </a:solidFill>
+              </a:rPr>
+              <a:t> 150+ Murdered: by Intelligence Services</a:t>
+            </a:r>
+            <a:endParaRPr sz="3200" b="0" i="0" u="none" strike="noStrike" cap="none" dirty="0">
+              <a:solidFill>
+                <a:srgbClr val="000000"/>
+              </a:solidFill>
+              <a:latin typeface="Arial"/>
+              <a:ea typeface="Arial"/>
+              <a:cs typeface="Arial"/>
+              <a:sym typeface="Arial"/>
+            </a:endParaRPr>
+          </a:p>
+        </p:txBody>
+      </p:sp>
+      <p:sp>
+        <p:nvSpPr>
+          <p:cNvPr id="4" name="TextBox 3">
+            <a:extLst>
+              <a:ext uri="{FF2B5EF4-FFF2-40B4-BE49-F238E27FC236}">
+                <a16:creationId xmlns:a16="http://schemas.microsoft.com/office/drawing/2014/main" id="{50D7621F-9D36-7894-7117-9F831EF5EFA6}"/>
+              </a:ext>
+            </a:extLst>
+          </p:cNvPr>
+          <p:cNvSpPr txBox="1"/>
+          <p:nvPr/>
+        </p:nvSpPr>
+        <p:spPr>
+          <a:xfrm>
+            <a:off x="107300" y="6229650"/>
+            <a:ext cx="11685989" cy="461665"/>
+          </a:xfrm>
+          <a:prstGeom prst="rect">
+            <a:avLst/>
+          </a:prstGeom>
+          <a:solidFill>
+            <a:schemeClr val="bg1">
+              <a:alpha val="84400"/>
+            </a:schemeClr>
+          </a:solidFill>
+        </p:spPr>
+        <p:txBody>
+          <a:bodyPr wrap="square" rtlCol="0">
+            <a:spAutoFit/>
+          </a:bodyPr>
+          <a:lstStyle/>
+          <a:p>
+            <a:r>
+              <a:rPr lang="en-US" sz="2400" dirty="0"/>
+              <a:t>https://intelligencemurders.com/intel</a:t>
+            </a:r>
+          </a:p>
+        </p:txBody>
+      </p:sp>
+      <p:sp>
+        <p:nvSpPr>
+          <p:cNvPr id="8" name="Google Shape;170;p31">
+            <a:extLst>
+              <a:ext uri="{FF2B5EF4-FFF2-40B4-BE49-F238E27FC236}">
+                <a16:creationId xmlns:a16="http://schemas.microsoft.com/office/drawing/2014/main" id="{D328ABDE-E232-3EB7-C3F2-B4BB7B64262F}"/>
+              </a:ext>
+            </a:extLst>
+          </p:cNvPr>
+          <p:cNvSpPr/>
+          <p:nvPr/>
+        </p:nvSpPr>
+        <p:spPr>
+          <a:xfrm>
+            <a:off x="7583859" y="6253751"/>
+            <a:ext cx="4550222" cy="548230"/>
+          </a:xfrm>
+          <a:prstGeom prst="rect">
+            <a:avLst/>
+          </a:prstGeom>
+          <a:solidFill>
+            <a:srgbClr val="C00000"/>
+          </a:solidFill>
+          <a:ln>
+            <a:noFill/>
+          </a:ln>
+        </p:spPr>
+        <p:txBody>
+          <a:bodyPr spcFirstLastPara="1" wrap="square" lIns="91425" tIns="45700" rIns="91425" bIns="45700" anchor="ctr" anchorCtr="0">
+            <a:noAutofit/>
+          </a:bodyPr>
+          <a:lstStyle/>
+          <a:p>
+            <a:pPr marL="0" marR="0" lvl="0" indent="0" algn="ctr" rtl="0">
+              <a:lnSpc>
+                <a:spcPct val="100000"/>
+              </a:lnSpc>
+              <a:spcBef>
+                <a:spcPts val="0"/>
+              </a:spcBef>
+              <a:spcAft>
+                <a:spcPts val="0"/>
+              </a:spcAft>
+              <a:buClr>
+                <a:srgbClr val="000000"/>
+              </a:buClr>
+              <a:buSzPts val="1600"/>
+              <a:buFont typeface="Arial"/>
+              <a:buNone/>
+            </a:pPr>
+            <a:r>
+              <a:rPr lang="en-US" sz="3600" dirty="0">
+                <a:solidFill>
+                  <a:schemeClr val="lt1"/>
+                </a:solidFill>
+              </a:rPr>
+              <a:t>Dead at Age 49</a:t>
+            </a:r>
+            <a:endParaRPr sz="2000" b="0" i="0" u="none" strike="noStrike" cap="none" dirty="0">
+              <a:solidFill>
+                <a:srgbClr val="000000"/>
+              </a:solidFill>
+              <a:latin typeface="Arial"/>
+              <a:ea typeface="Arial"/>
+              <a:cs typeface="Arial"/>
+              <a:sym typeface="Arial"/>
+            </a:endParaRPr>
+          </a:p>
+        </p:txBody>
+      </p:sp>
+      <p:sp>
+        <p:nvSpPr>
+          <p:cNvPr id="10" name="TextBox 9">
+            <a:extLst>
+              <a:ext uri="{FF2B5EF4-FFF2-40B4-BE49-F238E27FC236}">
+                <a16:creationId xmlns:a16="http://schemas.microsoft.com/office/drawing/2014/main" id="{5FA0D8B2-6B55-D3DC-BCBB-6FEAD86B9E72}"/>
+              </a:ext>
+            </a:extLst>
+          </p:cNvPr>
+          <p:cNvSpPr txBox="1"/>
+          <p:nvPr/>
+        </p:nvSpPr>
+        <p:spPr>
+          <a:xfrm>
+            <a:off x="135442" y="1937976"/>
+            <a:ext cx="7781792" cy="3754874"/>
+          </a:xfrm>
+          <a:prstGeom prst="rect">
+            <a:avLst/>
+          </a:prstGeom>
+          <a:solidFill>
+            <a:schemeClr val="bg1">
+              <a:alpha val="84400"/>
+            </a:schemeClr>
+          </a:solidFill>
+        </p:spPr>
+        <p:txBody>
+          <a:bodyPr wrap="square" rtlCol="0">
+            <a:spAutoFit/>
+          </a:bodyPr>
+          <a:lstStyle/>
+          <a:p>
+            <a:pPr marL="285750" indent="-285750">
+              <a:spcBef>
+                <a:spcPts val="1200"/>
+              </a:spcBef>
+              <a:buFont typeface="Arial" panose="020B0604020202020204" pitchFamily="34" charset="0"/>
+              <a:buChar char="•"/>
+            </a:pPr>
+            <a:r>
+              <a:rPr lang="en-US" dirty="0"/>
+              <a:t>Political assassination &amp; </a:t>
+            </a:r>
+            <a:r>
+              <a:rPr dirty="0"/>
+              <a:t>SHOT FROM A ROOFTOP at a laundromat parking lot. Age 49. A US Army COUNTERINTELLIGENCE AGENT was an eyewitness.</a:t>
+            </a:r>
+          </a:p>
+          <a:p>
+            <a:pPr marL="285750" indent="-285750">
+              <a:spcBef>
+                <a:spcPts val="1200"/>
+              </a:spcBef>
+              <a:buFont typeface="Arial" panose="020B0604020202020204" pitchFamily="34" charset="0"/>
+              <a:buChar char="•"/>
+            </a:pPr>
+            <a:r>
+              <a:rPr dirty="0"/>
+              <a:t>The FBI's COINTELPRO program was actively INFILTRATING and fomenting INTERNAL CONFLICT in his organization at the time.</a:t>
+            </a:r>
+          </a:p>
+          <a:p>
+            <a:pPr marL="285750" indent="-285750">
+              <a:spcBef>
+                <a:spcPts val="1200"/>
+              </a:spcBef>
+              <a:buFont typeface="Arial" panose="020B0604020202020204" pitchFamily="34" charset="0"/>
+              <a:buChar char="•"/>
+            </a:pPr>
+            <a:r>
+              <a:rPr dirty="0"/>
+              <a:t>The convicted killer was an EXPELLED former member</a:t>
+            </a:r>
+          </a:p>
+          <a:p>
+            <a:pPr marL="285750" indent="-285750">
+              <a:spcBef>
+                <a:spcPts val="1200"/>
+              </a:spcBef>
+              <a:buFont typeface="Arial" panose="020B0604020202020204" pitchFamily="34" charset="0"/>
+              <a:buChar char="•"/>
+            </a:pPr>
+            <a:r>
+              <a:rPr dirty="0"/>
+              <a:t>The evidence was ENTIRELY CIRCUMSTANTIAL. The killer NEVER confessed.</a:t>
+            </a:r>
+          </a:p>
+          <a:p>
+            <a:pPr marL="285750" indent="-285750">
+              <a:spcBef>
+                <a:spcPts val="1200"/>
+              </a:spcBef>
+              <a:buFont typeface="Arial" panose="020B0604020202020204" pitchFamily="34" charset="0"/>
+              <a:buChar char="•"/>
+            </a:pPr>
+            <a:r>
+              <a:rPr dirty="0"/>
+              <a:t>The same COINTELPRO program coordinated the killing of Black Panther leader Fred Hampton two years later — proving the FBI was willing to FACILITATE assassinations.</a:t>
+            </a:r>
+          </a:p>
+        </p:txBody>
+      </p:sp>
       <p:pic>
         <p:nvPicPr>
-          <p:cNvPr id="16" name="Picture 15" descr="Omar_Torrijos.jpg"/>
+          <p:cNvPr id="16" name="Picture 15" descr="George_Lincoln_Rockwell.jpg"/>
           <p:cNvPicPr>
             <a:picLocks noChangeAspect="1"/>
           </p:cNvPicPr>
@@ -3855,8 +4322,8 @@
         </p:blipFill>
         <p:spPr>
           <a:xfrm>
-            <a:off x="9269160" y="1100088"/>
-            <a:ext cx="2787398" cy="3884876"/>
+            <a:off x="8180503" y="1100088"/>
+            <a:ext cx="2920959" cy="3884876"/>
           </a:xfrm>
           <a:prstGeom prst="rect">
             <a:avLst/>
@@ -3865,53 +4332,10 @@
       </p:pic>
       <p:sp>
         <p:nvSpPr>
-          <p:cNvPr id="15" name="TextBox 14">
-            <a:extLst>
-              <a:ext uri="{FF2B5EF4-FFF2-40B4-BE49-F238E27FC236}">
-                <a16:creationId xmlns:a16="http://schemas.microsoft.com/office/drawing/2014/main" id="{E478240E-251B-5BA6-3C45-7E6620400769}"/>
-              </a:ext>
-            </a:extLst>
-          </p:cNvPr>
-          <p:cNvSpPr txBox="1"/>
-          <p:nvPr/>
-        </p:nvSpPr>
-        <p:spPr>
-          <a:xfrm>
-            <a:off x="312432" y="1288262"/>
-            <a:ext cx="6494294" cy="584775"/>
-          </a:xfrm>
-          <a:prstGeom prst="rect">
-            <a:avLst/>
-          </a:prstGeom>
-          <a:solidFill>
-            <a:schemeClr val="bg1">
-              <a:alpha val="84400"/>
-            </a:schemeClr>
-          </a:solidFill>
-        </p:spPr>
-        <p:txBody>
-          <a:bodyPr wrap="square" rtlCol="0">
-            <a:spAutoFit/>
-          </a:bodyPr>
-          <a:lstStyle/>
-          <a:p>
-            <a:r>
-              <a:rPr lang="en-US" sz="3200" b="1" dirty="0">
-                <a:solidFill>
-                  <a:schemeClr val="accent5"/>
-                </a:solidFill>
-              </a:rPr>
-              <a:t>Why / How they Omar Torrijos:</a:t>
-            </a:r>
-          </a:p>
-        </p:txBody>
-      </p:sp>
-      <p:sp>
-        <p:nvSpPr>
-          <p:cNvPr id="3" name="Google Shape;170;p31">
-            <a:extLst>
-              <a:ext uri="{FF2B5EF4-FFF2-40B4-BE49-F238E27FC236}">
-                <a16:creationId xmlns:a16="http://schemas.microsoft.com/office/drawing/2014/main" id="{A4695FE5-0AA5-AB05-98B1-B5B8E3FA8CBE}"/>
+          <p:cNvPr id="7" name="Google Shape;170;p31">
+            <a:extLst>
+              <a:ext uri="{FF2B5EF4-FFF2-40B4-BE49-F238E27FC236}">
+                <a16:creationId xmlns:a16="http://schemas.microsoft.com/office/drawing/2014/main" id="{4B582382-76AA-B49E-C611-39A37CE591B9}"/>
               </a:ext>
             </a:extLst>
           </p:cNvPr>
@@ -3920,14 +4344,14 @@
         </p:nvSpPr>
         <p:spPr>
           <a:xfrm>
-            <a:off x="191731" y="5732890"/>
-            <a:ext cx="3431270" cy="496760"/>
-          </a:xfrm>
-          <a:prstGeom prst="rect">
-            <a:avLst/>
-          </a:prstGeom>
-          <a:solidFill>
-            <a:schemeClr val="accent5"/>
+            <a:off x="7583859" y="4943025"/>
+            <a:ext cx="4550222" cy="1328565"/>
+          </a:xfrm>
+          <a:prstGeom prst="rect">
+            <a:avLst/>
+          </a:prstGeom>
+          <a:solidFill>
+            <a:srgbClr val="C00000"/>
           </a:solidFill>
           <a:ln>
             <a:noFill/>
@@ -3957,14 +4381,14 @@
               <a:buNone/>
             </a:pPr>
             <a:r>
-              <a:rPr lang="en-US" sz="3600" dirty="0">
+              <a:rPr lang="en-US" sz="4800" dirty="0">
                 <a:solidFill>
                   <a:schemeClr val="lt1"/>
                 </a:solidFill>
               </a:rPr>
-              <a:t>Read List Here:</a:t>
-            </a:r>
-            <a:endParaRPr sz="2000" b="0" i="0" u="none" strike="noStrike" cap="none" dirty="0">
+              <a:t>George Lincoln Rockwell</a:t>
+            </a:r>
+            <a:endParaRPr sz="3200" b="0" i="0" u="none" strike="noStrike" cap="none" dirty="0">
               <a:solidFill>
                 <a:srgbClr val="000000"/>
               </a:solidFill>
@@ -3973,353 +4397,6 @@
               <a:cs typeface="Arial"/>
               <a:sym typeface="Arial"/>
             </a:endParaRPr>
-          </a:p>
-        </p:txBody>
-      </p:sp>
-      <p:sp>
-        <p:nvSpPr>
-          <p:cNvPr id="5" name="Google Shape;170;p31">
-            <a:extLst>
-              <a:ext uri="{FF2B5EF4-FFF2-40B4-BE49-F238E27FC236}">
-                <a16:creationId xmlns:a16="http://schemas.microsoft.com/office/drawing/2014/main" id="{98132413-6ED2-8B36-74B6-3C503B1A4634}"/>
-              </a:ext>
-            </a:extLst>
-          </p:cNvPr>
-          <p:cNvSpPr/>
-          <p:nvPr/>
-        </p:nvSpPr>
-        <p:spPr>
-          <a:xfrm>
-            <a:off x="0" y="-31518"/>
-            <a:ext cx="12192000" cy="1131606"/>
-          </a:xfrm>
-          <a:prstGeom prst="rect">
-            <a:avLst/>
-          </a:prstGeom>
-          <a:solidFill>
-            <a:srgbClr val="C00000"/>
-          </a:solidFill>
-          <a:ln>
-            <a:noFill/>
-          </a:ln>
-        </p:spPr>
-        <p:txBody>
-          <a:bodyPr spcFirstLastPara="1" wrap="square" lIns="91425" tIns="45700" rIns="91425" bIns="45700" anchor="ctr" anchorCtr="0">
-            <a:noAutofit/>
-          </a:bodyPr>
-          <a:lstStyle/>
-          <a:p>
-            <a:pPr marL="0" marR="0" lvl="0" indent="0" rtl="0">
-              <a:lnSpc>
-                <a:spcPct val="100000"/>
-              </a:lnSpc>
-              <a:spcBef>
-                <a:spcPts val="0"/>
-              </a:spcBef>
-              <a:spcAft>
-                <a:spcPts val="0"/>
-              </a:spcAft>
-              <a:buClr>
-                <a:srgbClr val="000000"/>
-              </a:buClr>
-              <a:buSzPts val="1600"/>
-              <a:buFont typeface="Arial"/>
-              <a:buNone/>
-            </a:pPr>
-            <a:r>
-              <a:rPr lang="en-US" sz="4800" dirty="0">
-                <a:solidFill>
-                  <a:schemeClr val="lt1"/>
-                </a:solidFill>
-              </a:rPr>
-              <a:t> 150+ Murdered: by Intelligence Services</a:t>
-            </a:r>
-            <a:endParaRPr sz="3200" b="0" i="0" u="none" strike="noStrike" cap="none" dirty="0">
-              <a:solidFill>
-                <a:srgbClr val="000000"/>
-              </a:solidFill>
-              <a:latin typeface="Arial"/>
-              <a:ea typeface="Arial"/>
-              <a:cs typeface="Arial"/>
-              <a:sym typeface="Arial"/>
-            </a:endParaRPr>
-          </a:p>
-        </p:txBody>
-      </p:sp>
-      <p:sp>
-        <p:nvSpPr>
-          <p:cNvPr id="4" name="TextBox 3">
-            <a:extLst>
-              <a:ext uri="{FF2B5EF4-FFF2-40B4-BE49-F238E27FC236}">
-                <a16:creationId xmlns:a16="http://schemas.microsoft.com/office/drawing/2014/main" id="{50D7621F-9D36-7894-7117-9F831EF5EFA6}"/>
-              </a:ext>
-            </a:extLst>
-          </p:cNvPr>
-          <p:cNvSpPr txBox="1"/>
-          <p:nvPr/>
-        </p:nvSpPr>
-        <p:spPr>
-          <a:xfrm>
-            <a:off x="107300" y="6229650"/>
-            <a:ext cx="11685989" cy="461665"/>
-          </a:xfrm>
-          <a:prstGeom prst="rect">
-            <a:avLst/>
-          </a:prstGeom>
-          <a:solidFill>
-            <a:schemeClr val="bg1">
-              <a:alpha val="84400"/>
-            </a:schemeClr>
-          </a:solidFill>
-        </p:spPr>
-        <p:txBody>
-          <a:bodyPr wrap="square" rtlCol="0">
-            <a:spAutoFit/>
-          </a:bodyPr>
-          <a:lstStyle/>
-          <a:p>
-            <a:r>
-              <a:rPr lang="en-US" sz="2400" dirty="0"/>
-              <a:t>https://intelligencemurders.com/intel</a:t>
-            </a:r>
-          </a:p>
-        </p:txBody>
-      </p:sp>
-      <p:sp>
-        <p:nvSpPr>
-          <p:cNvPr id="7" name="Google Shape;170;p31">
-            <a:extLst>
-              <a:ext uri="{FF2B5EF4-FFF2-40B4-BE49-F238E27FC236}">
-                <a16:creationId xmlns:a16="http://schemas.microsoft.com/office/drawing/2014/main" id="{4B582382-76AA-B49E-C611-39A37CE591B9}"/>
-              </a:ext>
-            </a:extLst>
-          </p:cNvPr>
-          <p:cNvSpPr/>
-          <p:nvPr/>
-        </p:nvSpPr>
-        <p:spPr>
-          <a:xfrm>
-            <a:off x="7506336" y="4925186"/>
-            <a:ext cx="4550222" cy="869505"/>
-          </a:xfrm>
-          <a:prstGeom prst="rect">
-            <a:avLst/>
-          </a:prstGeom>
-          <a:solidFill>
-            <a:srgbClr val="C00000"/>
-          </a:solidFill>
-          <a:ln>
-            <a:noFill/>
-          </a:ln>
-        </p:spPr>
-        <p:txBody>
-          <a:bodyPr spcFirstLastPara="1" wrap="square" lIns="91425" tIns="45700" rIns="91425" bIns="45700" anchor="ctr" anchorCtr="0">
-            <a:noAutofit/>
-          </a:bodyPr>
-          <a:lstStyle/>
-          <a:p>
-            <a:pPr marL="0" marR="0" lvl="0" indent="0" algn="ctr" rtl="0">
-              <a:lnSpc>
-                <a:spcPct val="100000"/>
-              </a:lnSpc>
-              <a:spcBef>
-                <a:spcPts val="0"/>
-              </a:spcBef>
-              <a:spcAft>
-                <a:spcPts val="0"/>
-              </a:spcAft>
-              <a:buClr>
-                <a:srgbClr val="000000"/>
-              </a:buClr>
-              <a:buSzPts val="1600"/>
-              <a:buFont typeface="Arial"/>
-              <a:buNone/>
-            </a:pPr>
-            <a:r>
-              <a:rPr lang="en-US" sz="4800" dirty="0">
-                <a:solidFill>
-                  <a:schemeClr val="lt1"/>
-                </a:solidFill>
-              </a:rPr>
-              <a:t>Omar Torrijos</a:t>
-            </a:r>
-            <a:endParaRPr sz="3200" b="0" i="0" u="none" strike="noStrike" cap="none" dirty="0">
-              <a:solidFill>
-                <a:srgbClr val="000000"/>
-              </a:solidFill>
-              <a:latin typeface="Arial"/>
-              <a:ea typeface="Arial"/>
-              <a:cs typeface="Arial"/>
-              <a:sym typeface="Arial"/>
-            </a:endParaRPr>
-          </a:p>
-        </p:txBody>
-      </p:sp>
-      <p:sp>
-        <p:nvSpPr>
-          <p:cNvPr id="8" name="Google Shape;170;p31">
-            <a:extLst>
-              <a:ext uri="{FF2B5EF4-FFF2-40B4-BE49-F238E27FC236}">
-                <a16:creationId xmlns:a16="http://schemas.microsoft.com/office/drawing/2014/main" id="{D328ABDE-E232-3EB7-C3F2-B4BB7B64262F}"/>
-              </a:ext>
-            </a:extLst>
-          </p:cNvPr>
-          <p:cNvSpPr/>
-          <p:nvPr/>
-        </p:nvSpPr>
-        <p:spPr>
-          <a:xfrm>
-            <a:off x="7526107" y="5681420"/>
-            <a:ext cx="4550222" cy="548230"/>
-          </a:xfrm>
-          <a:prstGeom prst="rect">
-            <a:avLst/>
-          </a:prstGeom>
-          <a:solidFill>
-            <a:srgbClr val="C00000"/>
-          </a:solidFill>
-          <a:ln>
-            <a:noFill/>
-          </a:ln>
-        </p:spPr>
-        <p:txBody>
-          <a:bodyPr spcFirstLastPara="1" wrap="square" lIns="91425" tIns="45700" rIns="91425" bIns="45700" anchor="ctr" anchorCtr="0">
-            <a:noAutofit/>
-          </a:bodyPr>
-          <a:lstStyle/>
-          <a:p>
-            <a:pPr marL="0" marR="0" lvl="0" indent="0" algn="ctr" rtl="0">
-              <a:lnSpc>
-                <a:spcPct val="100000"/>
-              </a:lnSpc>
-              <a:spcBef>
-                <a:spcPts val="0"/>
-              </a:spcBef>
-              <a:spcAft>
-                <a:spcPts val="0"/>
-              </a:spcAft>
-              <a:buClr>
-                <a:srgbClr val="000000"/>
-              </a:buClr>
-              <a:buSzPts val="1600"/>
-              <a:buFont typeface="Arial"/>
-              <a:buNone/>
-            </a:pPr>
-            <a:r>
-              <a:rPr lang="en-US" sz="3600" dirty="0">
-                <a:solidFill>
-                  <a:schemeClr val="lt1"/>
-                </a:solidFill>
-              </a:rPr>
-              <a:t>Dead at Age 52</a:t>
-            </a:r>
-            <a:endParaRPr sz="2000" b="0" i="0" u="none" strike="noStrike" cap="none" dirty="0">
-              <a:solidFill>
-                <a:srgbClr val="000000"/>
-              </a:solidFill>
-              <a:latin typeface="Arial"/>
-              <a:ea typeface="Arial"/>
-              <a:cs typeface="Arial"/>
-              <a:sym typeface="Arial"/>
-            </a:endParaRPr>
-          </a:p>
-        </p:txBody>
-      </p:sp>
-      <p:sp>
-        <p:nvSpPr>
-          <p:cNvPr id="10" name="TextBox 9">
-            <a:extLst>
-              <a:ext uri="{FF2B5EF4-FFF2-40B4-BE49-F238E27FC236}">
-                <a16:creationId xmlns:a16="http://schemas.microsoft.com/office/drawing/2014/main" id="{5FA0D8B2-6B55-D3DC-BCBB-6FEAD86B9E72}"/>
-              </a:ext>
-            </a:extLst>
-          </p:cNvPr>
-          <p:cNvSpPr txBox="1"/>
-          <p:nvPr/>
-        </p:nvSpPr>
-        <p:spPr>
-          <a:xfrm>
-            <a:off x="230865" y="1905506"/>
-            <a:ext cx="8902853" cy="3477875"/>
-          </a:xfrm>
-          <a:prstGeom prst="rect">
-            <a:avLst/>
-          </a:prstGeom>
-          <a:solidFill>
-            <a:schemeClr val="bg1">
-              <a:alpha val="84400"/>
-            </a:schemeClr>
-          </a:solidFill>
-        </p:spPr>
-        <p:txBody>
-          <a:bodyPr wrap="square" rtlCol="0">
-            <a:spAutoFit/>
-          </a:bodyPr>
-          <a:lstStyle/>
-          <a:p>
-            <a:pPr marL="285750" indent="-285750">
-              <a:spcBef>
-                <a:spcPts val="1200"/>
-              </a:spcBef>
-              <a:buFont typeface="Arial" panose="020B0604020202020204" pitchFamily="34" charset="0"/>
-              <a:buChar char="•"/>
-            </a:pPr>
-            <a:r>
-              <a:rPr dirty="0"/>
-              <a:t>Panama's leader who won the CANAL back from America — killed in a plane crash at age 52, just TWO YEARS after signing the treaty.</a:t>
-            </a:r>
-          </a:p>
-          <a:p>
-            <a:pPr marL="285750" indent="-285750">
-              <a:spcBef>
-                <a:spcPts val="1200"/>
-              </a:spcBef>
-              <a:buFont typeface="Arial" panose="020B0604020202020204" pitchFamily="34" charset="0"/>
-              <a:buChar char="•"/>
-            </a:pPr>
-            <a:r>
-              <a:rPr dirty="0"/>
-              <a:t>Ecuador's president died in a NEARLY IDENTICAL plane crash just 68 DAYS earlier — both had defied US economic interests.</a:t>
-            </a:r>
-          </a:p>
-          <a:p>
-            <a:pPr marL="285750" indent="-285750">
-              <a:spcBef>
-                <a:spcPts val="1200"/>
-              </a:spcBef>
-              <a:buFont typeface="Arial" panose="020B0604020202020204" pitchFamily="34" charset="0"/>
-              <a:buChar char="•"/>
-            </a:pPr>
-            <a:r>
-              <a:rPr dirty="0"/>
-              <a:t>A former CIA insider wrote: "When Torrijos refused to be CORRUPTED, the CIA escalated to ASSASSINATION."</a:t>
-            </a:r>
-          </a:p>
-          <a:p>
-            <a:pPr marL="285750" indent="-285750">
-              <a:spcBef>
-                <a:spcPts val="1200"/>
-              </a:spcBef>
-              <a:buFont typeface="Arial" panose="020B0604020202020204" pitchFamily="34" charset="0"/>
-              <a:buChar char="•"/>
-            </a:pPr>
-            <a:r>
-              <a:rPr dirty="0"/>
-              <a:t>Key investigative documents DISAPPEARED during the 1989 US invasion of Panama — when American forces DESTROYED the defense headquarters.</a:t>
-            </a:r>
-          </a:p>
-          <a:p>
-            <a:pPr marL="285750" indent="-285750">
-              <a:spcBef>
-                <a:spcPts val="1200"/>
-              </a:spcBef>
-              <a:buFont typeface="Arial" panose="020B0604020202020204" pitchFamily="34" charset="0"/>
-              <a:buChar char="•"/>
-            </a:pPr>
-            <a:r>
-              <a:rPr dirty="0"/>
-              <a:t>His death cleared the way for CIA asset Manuel NORIEGA to seize power — until the US invaded AGAIN to remove him.</a:t>
-            </a:r>
           </a:p>
         </p:txBody>
       </p:sp>
@@ -4348,464 +4425,9 @@
           <a:chExt cx="0" cy="0"/>
         </a:xfrm>
       </p:grpSpPr>
-      <p:sp>
-        <p:nvSpPr>
-          <p:cNvPr id="15" name="TextBox 14">
-            <a:extLst>
-              <a:ext uri="{FF2B5EF4-FFF2-40B4-BE49-F238E27FC236}">
-                <a16:creationId xmlns:a16="http://schemas.microsoft.com/office/drawing/2014/main" id="{E478240E-251B-5BA6-3C45-7E6620400769}"/>
-              </a:ext>
-            </a:extLst>
-          </p:cNvPr>
-          <p:cNvSpPr txBox="1"/>
-          <p:nvPr/>
-        </p:nvSpPr>
-        <p:spPr>
-          <a:xfrm>
-            <a:off x="312432" y="1288262"/>
-            <a:ext cx="6494294" cy="584775"/>
-          </a:xfrm>
-          <a:prstGeom prst="rect">
-            <a:avLst/>
-          </a:prstGeom>
-          <a:solidFill>
-            <a:schemeClr val="bg1">
-              <a:alpha val="84400"/>
-            </a:schemeClr>
-          </a:solidFill>
-        </p:spPr>
-        <p:txBody>
-          <a:bodyPr wrap="square" rtlCol="0">
-            <a:spAutoFit/>
-          </a:bodyPr>
-          <a:lstStyle/>
-          <a:p>
-            <a:r>
-              <a:rPr lang="en-US" sz="3200" b="1" dirty="0">
-                <a:solidFill>
-                  <a:schemeClr val="accent5"/>
-                </a:solidFill>
-              </a:rPr>
-              <a:t>Why / How they Orlando Letelier:</a:t>
-            </a:r>
-          </a:p>
-        </p:txBody>
-      </p:sp>
-      <p:sp>
-        <p:nvSpPr>
-          <p:cNvPr id="3" name="Google Shape;170;p31">
-            <a:extLst>
-              <a:ext uri="{FF2B5EF4-FFF2-40B4-BE49-F238E27FC236}">
-                <a16:creationId xmlns:a16="http://schemas.microsoft.com/office/drawing/2014/main" id="{A4695FE5-0AA5-AB05-98B1-B5B8E3FA8CBE}"/>
-              </a:ext>
-            </a:extLst>
-          </p:cNvPr>
-          <p:cNvSpPr/>
-          <p:nvPr/>
-        </p:nvSpPr>
-        <p:spPr>
-          <a:xfrm>
-            <a:off x="191731" y="5732890"/>
-            <a:ext cx="3431270" cy="496760"/>
-          </a:xfrm>
-          <a:prstGeom prst="rect">
-            <a:avLst/>
-          </a:prstGeom>
-          <a:solidFill>
-            <a:schemeClr val="accent5"/>
-          </a:solidFill>
-          <a:ln>
-            <a:noFill/>
-          </a:ln>
-        </p:spPr>
-        <p:txBody>
-          <a:bodyPr spcFirstLastPara="1" wrap="square" lIns="91425" tIns="45700" rIns="91425" bIns="45700" anchor="ctr" anchorCtr="0">
-            <a:noAutofit/>
-          </a:bodyPr>
-          <a:lstStyle/>
-          <a:p>
-            <a:pPr marL="0" marR="0" lvl="0" indent="0" algn="ctr" rtl="0">
-              <a:lnSpc>
-                <a:spcPct val="100000"/>
-              </a:lnSpc>
-              <a:spcBef>
-                <a:spcPts val="0"/>
-              </a:spcBef>
-              <a:spcAft>
-                <a:spcPts val="0"/>
-              </a:spcAft>
-              <a:buClr>
-                <a:srgbClr val="000000"/>
-              </a:buClr>
-              <a:buSzPts val="1600"/>
-              <a:buFont typeface="Arial"/>
-              <a:buNone/>
-            </a:pPr>
-            <a:r>
-              <a:rPr lang="en-US" sz="3600" dirty="0">
-                <a:solidFill>
-                  <a:schemeClr val="lt1"/>
-                </a:solidFill>
-              </a:rPr>
-              <a:t>Read List Here:</a:t>
-            </a:r>
-            <a:endParaRPr sz="2000" b="0" i="0" u="none" strike="noStrike" cap="none" dirty="0">
-              <a:solidFill>
-                <a:srgbClr val="000000"/>
-              </a:solidFill>
-              <a:latin typeface="Arial"/>
-              <a:ea typeface="Arial"/>
-              <a:cs typeface="Arial"/>
-              <a:sym typeface="Arial"/>
-            </a:endParaRPr>
-          </a:p>
-        </p:txBody>
-      </p:sp>
-      <p:sp>
-        <p:nvSpPr>
-          <p:cNvPr id="5" name="Google Shape;170;p31">
-            <a:extLst>
-              <a:ext uri="{FF2B5EF4-FFF2-40B4-BE49-F238E27FC236}">
-                <a16:creationId xmlns:a16="http://schemas.microsoft.com/office/drawing/2014/main" id="{98132413-6ED2-8B36-74B6-3C503B1A4634}"/>
-              </a:ext>
-            </a:extLst>
-          </p:cNvPr>
-          <p:cNvSpPr/>
-          <p:nvPr/>
-        </p:nvSpPr>
-        <p:spPr>
-          <a:xfrm>
-            <a:off x="0" y="-31518"/>
-            <a:ext cx="12192000" cy="1131606"/>
-          </a:xfrm>
-          <a:prstGeom prst="rect">
-            <a:avLst/>
-          </a:prstGeom>
-          <a:solidFill>
-            <a:srgbClr val="C00000"/>
-          </a:solidFill>
-          <a:ln>
-            <a:noFill/>
-          </a:ln>
-        </p:spPr>
-        <p:txBody>
-          <a:bodyPr spcFirstLastPara="1" wrap="square" lIns="91425" tIns="45700" rIns="91425" bIns="45700" anchor="ctr" anchorCtr="0">
-            <a:noAutofit/>
-          </a:bodyPr>
-          <a:lstStyle/>
-          <a:p>
-            <a:pPr marL="0" marR="0" lvl="0" indent="0" rtl="0">
-              <a:lnSpc>
-                <a:spcPct val="100000"/>
-              </a:lnSpc>
-              <a:spcBef>
-                <a:spcPts val="0"/>
-              </a:spcBef>
-              <a:spcAft>
-                <a:spcPts val="0"/>
-              </a:spcAft>
-              <a:buClr>
-                <a:srgbClr val="000000"/>
-              </a:buClr>
-              <a:buSzPts val="1600"/>
-              <a:buFont typeface="Arial"/>
-              <a:buNone/>
-            </a:pPr>
-            <a:r>
-              <a:rPr lang="en-US" sz="4800" dirty="0">
-                <a:solidFill>
-                  <a:schemeClr val="lt1"/>
-                </a:solidFill>
-              </a:rPr>
-              <a:t> 150+ Murdered: by Intelligence Services</a:t>
-            </a:r>
-            <a:endParaRPr sz="3200" b="0" i="0" u="none" strike="noStrike" cap="none" dirty="0">
-              <a:solidFill>
-                <a:srgbClr val="000000"/>
-              </a:solidFill>
-              <a:latin typeface="Arial"/>
-              <a:ea typeface="Arial"/>
-              <a:cs typeface="Arial"/>
-              <a:sym typeface="Arial"/>
-            </a:endParaRPr>
-          </a:p>
-        </p:txBody>
-      </p:sp>
-      <p:sp>
-        <p:nvSpPr>
-          <p:cNvPr id="4" name="TextBox 3">
-            <a:extLst>
-              <a:ext uri="{FF2B5EF4-FFF2-40B4-BE49-F238E27FC236}">
-                <a16:creationId xmlns:a16="http://schemas.microsoft.com/office/drawing/2014/main" id="{50D7621F-9D36-7894-7117-9F831EF5EFA6}"/>
-              </a:ext>
-            </a:extLst>
-          </p:cNvPr>
-          <p:cNvSpPr txBox="1"/>
-          <p:nvPr/>
-        </p:nvSpPr>
-        <p:spPr>
-          <a:xfrm>
-            <a:off x="107300" y="6229650"/>
-            <a:ext cx="11685989" cy="461665"/>
-          </a:xfrm>
-          <a:prstGeom prst="rect">
-            <a:avLst/>
-          </a:prstGeom>
-          <a:solidFill>
-            <a:schemeClr val="bg1">
-              <a:alpha val="84400"/>
-            </a:schemeClr>
-          </a:solidFill>
-        </p:spPr>
-        <p:txBody>
-          <a:bodyPr wrap="square" rtlCol="0">
-            <a:spAutoFit/>
-          </a:bodyPr>
-          <a:lstStyle/>
-          <a:p>
-            <a:r>
-              <a:rPr lang="en-US" sz="2400" dirty="0"/>
-              <a:t>https://intelligencemurders.com/intel</a:t>
-            </a:r>
-          </a:p>
-        </p:txBody>
-      </p:sp>
-      <p:sp>
-        <p:nvSpPr>
-          <p:cNvPr id="7" name="Google Shape;170;p31">
-            <a:extLst>
-              <a:ext uri="{FF2B5EF4-FFF2-40B4-BE49-F238E27FC236}">
-                <a16:creationId xmlns:a16="http://schemas.microsoft.com/office/drawing/2014/main" id="{4B582382-76AA-B49E-C611-39A37CE591B9}"/>
-              </a:ext>
-            </a:extLst>
-          </p:cNvPr>
-          <p:cNvSpPr/>
-          <p:nvPr/>
-        </p:nvSpPr>
-        <p:spPr>
-          <a:xfrm>
-            <a:off x="7506336" y="4925186"/>
-            <a:ext cx="4550222" cy="869505"/>
-          </a:xfrm>
-          <a:prstGeom prst="rect">
-            <a:avLst/>
-          </a:prstGeom>
-          <a:solidFill>
-            <a:srgbClr val="C00000"/>
-          </a:solidFill>
-          <a:ln>
-            <a:noFill/>
-          </a:ln>
-        </p:spPr>
-        <p:txBody>
-          <a:bodyPr spcFirstLastPara="1" wrap="square" lIns="91425" tIns="45700" rIns="91425" bIns="45700" anchor="ctr" anchorCtr="0">
-            <a:noAutofit/>
-          </a:bodyPr>
-          <a:lstStyle/>
-          <a:p>
-            <a:pPr marL="0" marR="0" lvl="0" indent="0" algn="ctr" rtl="0">
-              <a:lnSpc>
-                <a:spcPct val="100000"/>
-              </a:lnSpc>
-              <a:spcBef>
-                <a:spcPts val="0"/>
-              </a:spcBef>
-              <a:spcAft>
-                <a:spcPts val="0"/>
-              </a:spcAft>
-              <a:buClr>
-                <a:srgbClr val="000000"/>
-              </a:buClr>
-              <a:buSzPts val="1600"/>
-              <a:buFont typeface="Arial"/>
-              <a:buNone/>
-            </a:pPr>
-            <a:r>
-              <a:rPr lang="en-US" sz="4800" dirty="0">
-                <a:solidFill>
-                  <a:schemeClr val="lt1"/>
-                </a:solidFill>
-              </a:rPr>
-              <a:t>Orlando Letelier</a:t>
-            </a:r>
-            <a:endParaRPr sz="3200" b="0" i="0" u="none" strike="noStrike" cap="none" dirty="0">
-              <a:solidFill>
-                <a:srgbClr val="000000"/>
-              </a:solidFill>
-              <a:latin typeface="Arial"/>
-              <a:ea typeface="Arial"/>
-              <a:cs typeface="Arial"/>
-              <a:sym typeface="Arial"/>
-            </a:endParaRPr>
-          </a:p>
-        </p:txBody>
-      </p:sp>
-      <p:sp>
-        <p:nvSpPr>
-          <p:cNvPr id="8" name="Google Shape;170;p31">
-            <a:extLst>
-              <a:ext uri="{FF2B5EF4-FFF2-40B4-BE49-F238E27FC236}">
-                <a16:creationId xmlns:a16="http://schemas.microsoft.com/office/drawing/2014/main" id="{D328ABDE-E232-3EB7-C3F2-B4BB7B64262F}"/>
-              </a:ext>
-            </a:extLst>
-          </p:cNvPr>
-          <p:cNvSpPr/>
-          <p:nvPr/>
-        </p:nvSpPr>
-        <p:spPr>
-          <a:xfrm>
-            <a:off x="7526107" y="5681420"/>
-            <a:ext cx="4550222" cy="548230"/>
-          </a:xfrm>
-          <a:prstGeom prst="rect">
-            <a:avLst/>
-          </a:prstGeom>
-          <a:solidFill>
-            <a:srgbClr val="C00000"/>
-          </a:solidFill>
-          <a:ln>
-            <a:noFill/>
-          </a:ln>
-        </p:spPr>
-        <p:txBody>
-          <a:bodyPr spcFirstLastPara="1" wrap="square" lIns="91425" tIns="45700" rIns="91425" bIns="45700" anchor="ctr" anchorCtr="0">
-            <a:noAutofit/>
-          </a:bodyPr>
-          <a:lstStyle/>
-          <a:p>
-            <a:pPr marL="0" marR="0" lvl="0" indent="0" algn="ctr" rtl="0">
-              <a:lnSpc>
-                <a:spcPct val="100000"/>
-              </a:lnSpc>
-              <a:spcBef>
-                <a:spcPts val="0"/>
-              </a:spcBef>
-              <a:spcAft>
-                <a:spcPts val="0"/>
-              </a:spcAft>
-              <a:buClr>
-                <a:srgbClr val="000000"/>
-              </a:buClr>
-              <a:buSzPts val="1600"/>
-              <a:buFont typeface="Arial"/>
-              <a:buNone/>
-            </a:pPr>
-            <a:r>
-              <a:rPr lang="en-US" sz="3600" dirty="0">
-                <a:solidFill>
-                  <a:schemeClr val="lt1"/>
-                </a:solidFill>
-              </a:rPr>
-              <a:t>Dead at Age 44</a:t>
-            </a:r>
-            <a:endParaRPr sz="2000" b="0" i="0" u="none" strike="noStrike" cap="none" dirty="0">
-              <a:solidFill>
-                <a:srgbClr val="000000"/>
-              </a:solidFill>
-              <a:latin typeface="Arial"/>
-              <a:ea typeface="Arial"/>
-              <a:cs typeface="Arial"/>
-              <a:sym typeface="Arial"/>
-            </a:endParaRPr>
-          </a:p>
-        </p:txBody>
-      </p:sp>
-      <p:sp>
-        <p:nvSpPr>
-          <p:cNvPr id="10" name="TextBox 9">
-            <a:extLst>
-              <a:ext uri="{FF2B5EF4-FFF2-40B4-BE49-F238E27FC236}">
-                <a16:creationId xmlns:a16="http://schemas.microsoft.com/office/drawing/2014/main" id="{5FA0D8B2-6B55-D3DC-BCBB-6FEAD86B9E72}"/>
-              </a:ext>
-            </a:extLst>
-          </p:cNvPr>
-          <p:cNvSpPr txBox="1"/>
-          <p:nvPr/>
-        </p:nvSpPr>
-        <p:spPr>
-          <a:xfrm>
-            <a:off x="312431" y="2175372"/>
-            <a:ext cx="6987941" cy="3046988"/>
-          </a:xfrm>
-          <a:prstGeom prst="rect">
-            <a:avLst/>
-          </a:prstGeom>
-          <a:solidFill>
-            <a:schemeClr val="bg1">
-              <a:alpha val="84400"/>
-            </a:schemeClr>
-          </a:solidFill>
-        </p:spPr>
-        <p:txBody>
-          <a:bodyPr wrap="square" rtlCol="0">
-            <a:spAutoFit/>
-          </a:bodyPr>
-          <a:lstStyle/>
-          <a:p>
-            <a:pPr marL="285750" indent="-285750">
-              <a:spcBef>
-                <a:spcPts val="1200"/>
-              </a:spcBef>
-              <a:buFont typeface="Arial" panose="020B0604020202020204" pitchFamily="34" charset="0"/>
-              <a:buChar char="•"/>
-            </a:pPr>
-            <a:r>
-              <a:t>Chilean diplomat — killed by a CAR BOMB on Embassy Row in Washington, DC, less than 2 km from the WHITE HOUSE.</a:t>
-            </a:r>
-          </a:p>
-          <a:p>
-            <a:pPr marL="285750" indent="-285750">
-              <a:spcBef>
-                <a:spcPts val="1200"/>
-              </a:spcBef>
-              <a:buFont typeface="Arial" panose="020B0604020202020204" pitchFamily="34" charset="0"/>
-              <a:buChar char="•"/>
-            </a:pPr>
-            <a:r>
-              <a:t>His 25-year-old American colleague Ronni Moffitt DROWNED in her own blood from shrapnel that pierced her throat.</a:t>
-            </a:r>
-          </a:p>
-          <a:p>
-            <a:pPr marL="285750" indent="-285750">
-              <a:spcBef>
-                <a:spcPts val="1200"/>
-              </a:spcBef>
-              <a:buFont typeface="Arial" panose="020B0604020202020204" pitchFamily="34" charset="0"/>
-              <a:buChar char="•"/>
-            </a:pPr>
-            <a:r>
-              <a:t>Declassified CIA documents state: "PINOCHET PERSONALLY ORDERED" the assassination.</a:t>
-            </a:r>
-          </a:p>
-          <a:p>
-            <a:pPr marL="285750" indent="-285750">
-              <a:spcBef>
-                <a:spcPts val="1200"/>
-              </a:spcBef>
-              <a:buFont typeface="Arial" panose="020B0604020202020204" pitchFamily="34" charset="0"/>
-              <a:buChar char="•"/>
-            </a:pPr>
-            <a:r>
-              <a:t>Kissinger BLOCKED a State Department warning to Condor nations FIVE DAYS before the bombing — a warning that could have PREVENTED it.</a:t>
-            </a:r>
-          </a:p>
-          <a:p>
-            <a:pPr marL="285750" indent="-285750">
-              <a:spcBef>
-                <a:spcPts val="1200"/>
-              </a:spcBef>
-              <a:buFont typeface="Arial" panose="020B0604020202020204" pitchFamily="34" charset="0"/>
-              <a:buChar char="•"/>
-            </a:pPr>
-            <a:r>
-              <a:t>The American-born assassin who BUILT the bomb served only 62 MONTHS in prison and got a new identity through witness protection.</a:t>
-            </a:r>
-          </a:p>
-        </p:txBody>
-      </p:sp>
       <p:pic>
         <p:nvPicPr>
-          <p:cNvPr id="16" name="Picture 15" descr="Orlando_Letelier.jpg"/>
+          <p:cNvPr id="16" name="Picture 15" descr="Omar_Torrijos.jpg"/>
           <p:cNvPicPr>
             <a:picLocks noChangeAspect="1"/>
           </p:cNvPicPr>
@@ -4819,14 +4441,474 @@
         </p:blipFill>
         <p:spPr>
           <a:xfrm>
-            <a:off x="8087033" y="1100088"/>
-            <a:ext cx="3107900" cy="3884876"/>
+            <a:off x="9269160" y="1100088"/>
+            <a:ext cx="2787398" cy="3884876"/>
           </a:xfrm>
           <a:prstGeom prst="rect">
             <a:avLst/>
           </a:prstGeom>
         </p:spPr>
       </p:pic>
+      <p:sp>
+        <p:nvSpPr>
+          <p:cNvPr id="15" name="TextBox 14">
+            <a:extLst>
+              <a:ext uri="{FF2B5EF4-FFF2-40B4-BE49-F238E27FC236}">
+                <a16:creationId xmlns:a16="http://schemas.microsoft.com/office/drawing/2014/main" id="{E478240E-251B-5BA6-3C45-7E6620400769}"/>
+              </a:ext>
+            </a:extLst>
+          </p:cNvPr>
+          <p:cNvSpPr txBox="1"/>
+          <p:nvPr/>
+        </p:nvSpPr>
+        <p:spPr>
+          <a:xfrm>
+            <a:off x="312432" y="1288262"/>
+            <a:ext cx="6494294" cy="584775"/>
+          </a:xfrm>
+          <a:prstGeom prst="rect">
+            <a:avLst/>
+          </a:prstGeom>
+          <a:solidFill>
+            <a:schemeClr val="bg1">
+              <a:alpha val="84400"/>
+            </a:schemeClr>
+          </a:solidFill>
+        </p:spPr>
+        <p:txBody>
+          <a:bodyPr wrap="square" rtlCol="0">
+            <a:spAutoFit/>
+          </a:bodyPr>
+          <a:lstStyle/>
+          <a:p>
+            <a:r>
+              <a:rPr lang="en-US" sz="3200" b="1" dirty="0">
+                <a:solidFill>
+                  <a:schemeClr val="accent5"/>
+                </a:solidFill>
+              </a:rPr>
+              <a:t>Why / How they Omar Torrijos:</a:t>
+            </a:r>
+          </a:p>
+        </p:txBody>
+      </p:sp>
+      <p:sp>
+        <p:nvSpPr>
+          <p:cNvPr id="3" name="Google Shape;170;p31">
+            <a:extLst>
+              <a:ext uri="{FF2B5EF4-FFF2-40B4-BE49-F238E27FC236}">
+                <a16:creationId xmlns:a16="http://schemas.microsoft.com/office/drawing/2014/main" id="{A4695FE5-0AA5-AB05-98B1-B5B8E3FA8CBE}"/>
+              </a:ext>
+            </a:extLst>
+          </p:cNvPr>
+          <p:cNvSpPr/>
+          <p:nvPr/>
+        </p:nvSpPr>
+        <p:spPr>
+          <a:xfrm>
+            <a:off x="191731" y="5732890"/>
+            <a:ext cx="3431270" cy="496760"/>
+          </a:xfrm>
+          <a:prstGeom prst="rect">
+            <a:avLst/>
+          </a:prstGeom>
+          <a:solidFill>
+            <a:schemeClr val="accent5"/>
+          </a:solidFill>
+          <a:ln>
+            <a:noFill/>
+          </a:ln>
+        </p:spPr>
+        <p:txBody>
+          <a:bodyPr spcFirstLastPara="1" wrap="square" lIns="91425" tIns="45700" rIns="91425" bIns="45700" anchor="ctr" anchorCtr="0">
+            <a:noAutofit/>
+          </a:bodyPr>
+          <a:lstStyle/>
+          <a:p>
+            <a:pPr marL="0" marR="0" lvl="0" indent="0" algn="ctr" rtl="0">
+              <a:lnSpc>
+                <a:spcPct val="100000"/>
+              </a:lnSpc>
+              <a:spcBef>
+                <a:spcPts val="0"/>
+              </a:spcBef>
+              <a:spcAft>
+                <a:spcPts val="0"/>
+              </a:spcAft>
+              <a:buClr>
+                <a:srgbClr val="000000"/>
+              </a:buClr>
+              <a:buSzPts val="1600"/>
+              <a:buFont typeface="Arial"/>
+              <a:buNone/>
+            </a:pPr>
+            <a:r>
+              <a:rPr lang="en-US" sz="3600" dirty="0">
+                <a:solidFill>
+                  <a:schemeClr val="lt1"/>
+                </a:solidFill>
+              </a:rPr>
+              <a:t>Read List Here:</a:t>
+            </a:r>
+            <a:endParaRPr sz="2000" b="0" i="0" u="none" strike="noStrike" cap="none" dirty="0">
+              <a:solidFill>
+                <a:srgbClr val="000000"/>
+              </a:solidFill>
+              <a:latin typeface="Arial"/>
+              <a:ea typeface="Arial"/>
+              <a:cs typeface="Arial"/>
+              <a:sym typeface="Arial"/>
+            </a:endParaRPr>
+          </a:p>
+        </p:txBody>
+      </p:sp>
+      <p:sp>
+        <p:nvSpPr>
+          <p:cNvPr id="5" name="Google Shape;170;p31">
+            <a:extLst>
+              <a:ext uri="{FF2B5EF4-FFF2-40B4-BE49-F238E27FC236}">
+                <a16:creationId xmlns:a16="http://schemas.microsoft.com/office/drawing/2014/main" id="{98132413-6ED2-8B36-74B6-3C503B1A4634}"/>
+              </a:ext>
+            </a:extLst>
+          </p:cNvPr>
+          <p:cNvSpPr/>
+          <p:nvPr/>
+        </p:nvSpPr>
+        <p:spPr>
+          <a:xfrm>
+            <a:off x="0" y="-31518"/>
+            <a:ext cx="12192000" cy="1131606"/>
+          </a:xfrm>
+          <a:prstGeom prst="rect">
+            <a:avLst/>
+          </a:prstGeom>
+          <a:solidFill>
+            <a:srgbClr val="C00000"/>
+          </a:solidFill>
+          <a:ln>
+            <a:noFill/>
+          </a:ln>
+        </p:spPr>
+        <p:txBody>
+          <a:bodyPr spcFirstLastPara="1" wrap="square" lIns="91425" tIns="45700" rIns="91425" bIns="45700" anchor="ctr" anchorCtr="0">
+            <a:noAutofit/>
+          </a:bodyPr>
+          <a:lstStyle/>
+          <a:p>
+            <a:pPr marL="0" marR="0" lvl="0" indent="0" rtl="0">
+              <a:lnSpc>
+                <a:spcPct val="100000"/>
+              </a:lnSpc>
+              <a:spcBef>
+                <a:spcPts val="0"/>
+              </a:spcBef>
+              <a:spcAft>
+                <a:spcPts val="0"/>
+              </a:spcAft>
+              <a:buClr>
+                <a:srgbClr val="000000"/>
+              </a:buClr>
+              <a:buSzPts val="1600"/>
+              <a:buFont typeface="Arial"/>
+              <a:buNone/>
+            </a:pPr>
+            <a:r>
+              <a:rPr lang="en-US" sz="4800" dirty="0">
+                <a:solidFill>
+                  <a:schemeClr val="lt1"/>
+                </a:solidFill>
+              </a:rPr>
+              <a:t> 150+ Murdered: by Intelligence Services</a:t>
+            </a:r>
+            <a:endParaRPr sz="3200" b="0" i="0" u="none" strike="noStrike" cap="none" dirty="0">
+              <a:solidFill>
+                <a:srgbClr val="000000"/>
+              </a:solidFill>
+              <a:latin typeface="Arial"/>
+              <a:ea typeface="Arial"/>
+              <a:cs typeface="Arial"/>
+              <a:sym typeface="Arial"/>
+            </a:endParaRPr>
+          </a:p>
+        </p:txBody>
+      </p:sp>
+      <p:sp>
+        <p:nvSpPr>
+          <p:cNvPr id="4" name="TextBox 3">
+            <a:extLst>
+              <a:ext uri="{FF2B5EF4-FFF2-40B4-BE49-F238E27FC236}">
+                <a16:creationId xmlns:a16="http://schemas.microsoft.com/office/drawing/2014/main" id="{50D7621F-9D36-7894-7117-9F831EF5EFA6}"/>
+              </a:ext>
+            </a:extLst>
+          </p:cNvPr>
+          <p:cNvSpPr txBox="1"/>
+          <p:nvPr/>
+        </p:nvSpPr>
+        <p:spPr>
+          <a:xfrm>
+            <a:off x="107300" y="6229650"/>
+            <a:ext cx="11685989" cy="461665"/>
+          </a:xfrm>
+          <a:prstGeom prst="rect">
+            <a:avLst/>
+          </a:prstGeom>
+          <a:solidFill>
+            <a:schemeClr val="bg1">
+              <a:alpha val="84400"/>
+            </a:schemeClr>
+          </a:solidFill>
+        </p:spPr>
+        <p:txBody>
+          <a:bodyPr wrap="square" rtlCol="0">
+            <a:spAutoFit/>
+          </a:bodyPr>
+          <a:lstStyle/>
+          <a:p>
+            <a:r>
+              <a:rPr lang="en-US" sz="2400" dirty="0"/>
+              <a:t>https://intelligencemurders.com/intel</a:t>
+            </a:r>
+          </a:p>
+        </p:txBody>
+      </p:sp>
+      <p:sp>
+        <p:nvSpPr>
+          <p:cNvPr id="7" name="Google Shape;170;p31">
+            <a:extLst>
+              <a:ext uri="{FF2B5EF4-FFF2-40B4-BE49-F238E27FC236}">
+                <a16:creationId xmlns:a16="http://schemas.microsoft.com/office/drawing/2014/main" id="{4B582382-76AA-B49E-C611-39A37CE591B9}"/>
+              </a:ext>
+            </a:extLst>
+          </p:cNvPr>
+          <p:cNvSpPr/>
+          <p:nvPr/>
+        </p:nvSpPr>
+        <p:spPr>
+          <a:xfrm>
+            <a:off x="7506336" y="4925186"/>
+            <a:ext cx="4550222" cy="869505"/>
+          </a:xfrm>
+          <a:prstGeom prst="rect">
+            <a:avLst/>
+          </a:prstGeom>
+          <a:solidFill>
+            <a:srgbClr val="C00000"/>
+          </a:solidFill>
+          <a:ln>
+            <a:noFill/>
+          </a:ln>
+        </p:spPr>
+        <p:txBody>
+          <a:bodyPr spcFirstLastPara="1" wrap="square" lIns="91425" tIns="45700" rIns="91425" bIns="45700" anchor="ctr" anchorCtr="0">
+            <a:noAutofit/>
+          </a:bodyPr>
+          <a:lstStyle/>
+          <a:p>
+            <a:pPr marL="0" marR="0" lvl="0" indent="0" algn="ctr" rtl="0">
+              <a:lnSpc>
+                <a:spcPct val="100000"/>
+              </a:lnSpc>
+              <a:spcBef>
+                <a:spcPts val="0"/>
+              </a:spcBef>
+              <a:spcAft>
+                <a:spcPts val="0"/>
+              </a:spcAft>
+              <a:buClr>
+                <a:srgbClr val="000000"/>
+              </a:buClr>
+              <a:buSzPts val="1600"/>
+              <a:buFont typeface="Arial"/>
+              <a:buNone/>
+            </a:pPr>
+            <a:r>
+              <a:rPr lang="en-US" sz="4800" dirty="0">
+                <a:solidFill>
+                  <a:schemeClr val="lt1"/>
+                </a:solidFill>
+              </a:rPr>
+              <a:t>Omar Torrijos</a:t>
+            </a:r>
+            <a:endParaRPr sz="3200" b="0" i="0" u="none" strike="noStrike" cap="none" dirty="0">
+              <a:solidFill>
+                <a:srgbClr val="000000"/>
+              </a:solidFill>
+              <a:latin typeface="Arial"/>
+              <a:ea typeface="Arial"/>
+              <a:cs typeface="Arial"/>
+              <a:sym typeface="Arial"/>
+            </a:endParaRPr>
+          </a:p>
+        </p:txBody>
+      </p:sp>
+      <p:sp>
+        <p:nvSpPr>
+          <p:cNvPr id="8" name="Google Shape;170;p31">
+            <a:extLst>
+              <a:ext uri="{FF2B5EF4-FFF2-40B4-BE49-F238E27FC236}">
+                <a16:creationId xmlns:a16="http://schemas.microsoft.com/office/drawing/2014/main" id="{D328ABDE-E232-3EB7-C3F2-B4BB7B64262F}"/>
+              </a:ext>
+            </a:extLst>
+          </p:cNvPr>
+          <p:cNvSpPr/>
+          <p:nvPr/>
+        </p:nvSpPr>
+        <p:spPr>
+          <a:xfrm>
+            <a:off x="7526107" y="5681420"/>
+            <a:ext cx="4550222" cy="548230"/>
+          </a:xfrm>
+          <a:prstGeom prst="rect">
+            <a:avLst/>
+          </a:prstGeom>
+          <a:solidFill>
+            <a:srgbClr val="C00000"/>
+          </a:solidFill>
+          <a:ln>
+            <a:noFill/>
+          </a:ln>
+        </p:spPr>
+        <p:txBody>
+          <a:bodyPr spcFirstLastPara="1" wrap="square" lIns="91425" tIns="45700" rIns="91425" bIns="45700" anchor="ctr" anchorCtr="0">
+            <a:noAutofit/>
+          </a:bodyPr>
+          <a:lstStyle/>
+          <a:p>
+            <a:pPr marL="0" marR="0" lvl="0" indent="0" algn="ctr" rtl="0">
+              <a:lnSpc>
+                <a:spcPct val="100000"/>
+              </a:lnSpc>
+              <a:spcBef>
+                <a:spcPts val="0"/>
+              </a:spcBef>
+              <a:spcAft>
+                <a:spcPts val="0"/>
+              </a:spcAft>
+              <a:buClr>
+                <a:srgbClr val="000000"/>
+              </a:buClr>
+              <a:buSzPts val="1600"/>
+              <a:buFont typeface="Arial"/>
+              <a:buNone/>
+            </a:pPr>
+            <a:r>
+              <a:rPr lang="en-US" sz="3600" dirty="0">
+                <a:solidFill>
+                  <a:schemeClr val="lt1"/>
+                </a:solidFill>
+              </a:rPr>
+              <a:t>Dead at Age 52</a:t>
+            </a:r>
+            <a:endParaRPr sz="2000" b="0" i="0" u="none" strike="noStrike" cap="none" dirty="0">
+              <a:solidFill>
+                <a:srgbClr val="000000"/>
+              </a:solidFill>
+              <a:latin typeface="Arial"/>
+              <a:ea typeface="Arial"/>
+              <a:cs typeface="Arial"/>
+              <a:sym typeface="Arial"/>
+            </a:endParaRPr>
+          </a:p>
+        </p:txBody>
+      </p:sp>
+      <p:sp>
+        <p:nvSpPr>
+          <p:cNvPr id="10" name="TextBox 9">
+            <a:extLst>
+              <a:ext uri="{FF2B5EF4-FFF2-40B4-BE49-F238E27FC236}">
+                <a16:creationId xmlns:a16="http://schemas.microsoft.com/office/drawing/2014/main" id="{5FA0D8B2-6B55-D3DC-BCBB-6FEAD86B9E72}"/>
+              </a:ext>
+            </a:extLst>
+          </p:cNvPr>
+          <p:cNvSpPr txBox="1"/>
+          <p:nvPr/>
+        </p:nvSpPr>
+        <p:spPr>
+          <a:xfrm>
+            <a:off x="230865" y="1905506"/>
+            <a:ext cx="8902853" cy="3477875"/>
+          </a:xfrm>
+          <a:prstGeom prst="rect">
+            <a:avLst/>
+          </a:prstGeom>
+          <a:solidFill>
+            <a:schemeClr val="bg1">
+              <a:alpha val="84400"/>
+            </a:schemeClr>
+          </a:solidFill>
+        </p:spPr>
+        <p:txBody>
+          <a:bodyPr wrap="square" rtlCol="0">
+            <a:spAutoFit/>
+          </a:bodyPr>
+          <a:lstStyle/>
+          <a:p>
+            <a:pPr marL="285750" indent="-285750">
+              <a:spcBef>
+                <a:spcPts val="1200"/>
+              </a:spcBef>
+              <a:buFont typeface="Arial" panose="020B0604020202020204" pitchFamily="34" charset="0"/>
+              <a:buChar char="•"/>
+            </a:pPr>
+            <a:r>
+              <a:rPr dirty="0"/>
+              <a:t>Panama's leader who won the CANAL back from America — killed in a plane crash at age 52, just TWO YEARS after signing the treaty.</a:t>
+            </a:r>
+          </a:p>
+          <a:p>
+            <a:pPr marL="285750" indent="-285750">
+              <a:spcBef>
+                <a:spcPts val="1200"/>
+              </a:spcBef>
+              <a:buFont typeface="Arial" panose="020B0604020202020204" pitchFamily="34" charset="0"/>
+              <a:buChar char="•"/>
+            </a:pPr>
+            <a:r>
+              <a:rPr dirty="0"/>
+              <a:t>Ecuador's president died in a NEARLY IDENTICAL plane crash just 68 DAYS earlier — both had defied US economic interests.</a:t>
+            </a:r>
+          </a:p>
+          <a:p>
+            <a:pPr marL="285750" indent="-285750">
+              <a:spcBef>
+                <a:spcPts val="1200"/>
+              </a:spcBef>
+              <a:buFont typeface="Arial" panose="020B0604020202020204" pitchFamily="34" charset="0"/>
+              <a:buChar char="•"/>
+            </a:pPr>
+            <a:r>
+              <a:rPr dirty="0"/>
+              <a:t>A former CIA insider wrote: "When Torrijos refused to be CORRUPTED, the CIA escalated to ASSASSINATION."</a:t>
+            </a:r>
+          </a:p>
+          <a:p>
+            <a:pPr marL="285750" indent="-285750">
+              <a:spcBef>
+                <a:spcPts val="1200"/>
+              </a:spcBef>
+              <a:buFont typeface="Arial" panose="020B0604020202020204" pitchFamily="34" charset="0"/>
+              <a:buChar char="•"/>
+            </a:pPr>
+            <a:r>
+              <a:rPr dirty="0"/>
+              <a:t>Key investigative documents DISAPPEARED during the 1989 US invasion of Panama — when American forces DESTROYED the defense headquarters.</a:t>
+            </a:r>
+          </a:p>
+          <a:p>
+            <a:pPr marL="285750" indent="-285750">
+              <a:spcBef>
+                <a:spcPts val="1200"/>
+              </a:spcBef>
+              <a:buFont typeface="Arial" panose="020B0604020202020204" pitchFamily="34" charset="0"/>
+              <a:buChar char="•"/>
+            </a:pPr>
+            <a:r>
+              <a:rPr dirty="0"/>
+              <a:t>His death cleared the way for CIA asset Manuel NORIEGA to seize power — until the US invaded AGAIN to remove him.</a:t>
+            </a:r>
+          </a:p>
+        </p:txBody>
+      </p:sp>
     </p:spTree>
   </p:cSld>
   <p:clrMapOvr>
@@ -4890,7 +4972,7 @@
                   <a:schemeClr val="accent5"/>
                 </a:solidFill>
               </a:rPr>
-              <a:t>Why / How they Rafael Trujillo:</a:t>
+              <a:t>Why / How they Orlando Letelier:</a:t>
             </a:r>
           </a:p>
         </p:txBody>
@@ -5130,7 +5212,7 @@
                   <a:schemeClr val="lt1"/>
                 </a:solidFill>
               </a:rPr>
-              <a:t>Rafael Trujillo</a:t>
+              <a:t>Orlando Letelier</a:t>
             </a:r>
             <a:endParaRPr sz="3200" b="0" i="0" u="none" strike="noStrike" cap="none" dirty="0">
               <a:solidFill>
@@ -5200,7 +5282,7 @@
                   <a:schemeClr val="lt1"/>
                 </a:solidFill>
               </a:rPr>
-              <a:t>Dead at Age 69</a:t>
+              <a:t>Dead at Age 44</a:t>
             </a:r>
             <a:endParaRPr sz="2000" b="0" i="0" u="none" strike="noStrike" cap="none" dirty="0">
               <a:solidFill>
@@ -5254,7 +5336,7 @@
               <a:buChar char="•"/>
             </a:pPr>
             <a:r>
-              <a:t>CIA SUPPLIED the weapons. Dominican dictator ambushed and machine-gunned in his car on a highway.</a:t>
+              <a:t>Chilean diplomat — killed by a CAR BOMB on Embassy Row in Washington, DC, less than 2 km from the WHITE HOUSE.</a:t>
             </a:r>
           </a:p>
           <a:p>
@@ -5266,7 +5348,7 @@
               <a:buChar char="•"/>
             </a:pPr>
             <a:r>
-              <a:t>Ruled for 31 YEARS. Murdered the Mirabal sisters. Ordered the Parsley Massacre killing up to 30,000 Haitians.</a:t>
+              <a:t>His 25-year-old American colleague Ronni Moffitt DROWNED in her own blood from shrapnel that pierced her throat.</a:t>
             </a:r>
           </a:p>
           <a:p>
@@ -5278,7 +5360,7 @@
               <a:buChar char="•"/>
             </a:pPr>
             <a:r>
-              <a:t>CIA's internal report admitted "quite extensive Agency involvement" — then PUBLICLY claimed only a "faint connection."</a:t>
+              <a:t>Declassified CIA documents state: "PINOCHET PERSONALLY ORDERED" the assassination.</a:t>
             </a:r>
           </a:p>
           <a:p>
@@ -5290,7 +5372,7 @@
               <a:buChar char="•"/>
             </a:pPr>
             <a:r>
-              <a:t>Kennedy sent a cable saying the US "cannot condone assassination" — TWO DAYS before the hit. Weapons already delivered.</a:t>
+              <a:t>Kissinger BLOCKED a State Department warning to Condor nations FIVE DAYS before the bombing — a warning that could have PREVENTED it.</a:t>
             </a:r>
           </a:p>
           <a:p>
@@ -5302,14 +5384,14 @@
               <a:buChar char="•"/>
             </a:pPr>
             <a:r>
-              <a:t>Church Committee confirmed this as ONE OF FIVE CIA assassination plots against foreign leaders.</a:t>
+              <a:t>The American-born assassin who BUILT the bomb served only 62 MONTHS in prison and got a new identity through witness protection.</a:t>
             </a:r>
           </a:p>
         </p:txBody>
       </p:sp>
       <p:pic>
         <p:nvPicPr>
-          <p:cNvPr id="16" name="Picture 15" descr="Rafael_Trujillo.jpg"/>
+          <p:cNvPr id="16" name="Picture 15" descr="Orlando_Letelier.jpg"/>
           <p:cNvPicPr>
             <a:picLocks noChangeAspect="1"/>
           </p:cNvPicPr>
@@ -5323,8 +5405,8 @@
         </p:blipFill>
         <p:spPr>
           <a:xfrm>
-            <a:off x="8276420" y="1100088"/>
-            <a:ext cx="2729125" cy="3884876"/>
+            <a:off x="8087033" y="1100088"/>
+            <a:ext cx="3107900" cy="3884876"/>
           </a:xfrm>
           <a:prstGeom prst="rect">
             <a:avLst/>
@@ -5394,7 +5476,7 @@
                   <a:schemeClr val="accent5"/>
                 </a:solidFill>
               </a:rPr>
-              <a:t>Why / How they Alexei Navalny:</a:t>
+              <a:t>Why / How they Rafael Trujillo:</a:t>
             </a:r>
           </a:p>
         </p:txBody>
@@ -5634,7 +5716,7 @@
                   <a:schemeClr val="lt1"/>
                 </a:solidFill>
               </a:rPr>
-              <a:t>Alexei Navalny</a:t>
+              <a:t>Rafael Trujillo</a:t>
             </a:r>
             <a:endParaRPr sz="3200" b="0" i="0" u="none" strike="noStrike" cap="none" dirty="0">
               <a:solidFill>
@@ -5704,7 +5786,7 @@
                   <a:schemeClr val="lt1"/>
                 </a:solidFill>
               </a:rPr>
-              <a:t>Dead at Age 47</a:t>
+              <a:t>Dead at Age 69</a:t>
             </a:r>
             <a:endParaRPr sz="2000" b="0" i="0" u="none" strike="noStrike" cap="none" dirty="0">
               <a:solidFill>
@@ -5758,7 +5840,7 @@
               <a:buChar char="•"/>
             </a:pPr>
             <a:r>
-              <a:t>Survived FSB NOVICHOK poisoning in 2020, then TRICKED his assassin into confessing on a recorded phone call.</a:t>
+              <a:t>CIA SUPPLIED the weapons. Dominican dictator ambushed and machine-gunned in his car on a highway.</a:t>
             </a:r>
           </a:p>
           <a:p>
@@ -5770,7 +5852,7 @@
               <a:buChar char="•"/>
             </a:pPr>
             <a:r>
-              <a:t>Died in an ARCTIC prison at age 47. Five European nations confirmed he was poisoned with FROG TOXIN.</a:t>
+              <a:t>Ruled for 31 YEARS. Murdered the Mirabal sisters. Ordered the Parsley Massacre killing up to 30,000 Haitians.</a:t>
             </a:r>
           </a:p>
           <a:p>
@@ -5782,7 +5864,7 @@
               <a:buChar char="•"/>
             </a:pPr>
             <a:r>
-              <a:t>Appeared HEALTHY at a court hearing ONE DAY before his death. Russia claims "cardiac arrhythmia."</a:t>
+              <a:t>CIA's internal report admitted "quite extensive Agency involvement" — then PUBLICLY claimed only a "faint connection."</a:t>
             </a:r>
           </a:p>
           <a:p>
@@ -5794,7 +5876,7 @@
               <a:buChar char="•"/>
             </a:pPr>
             <a:r>
-              <a:t>His anti-corruption videos exposing Putin's $1.35 BILLION palace got 130 MILLION views on YouTube.</a:t>
+              <a:t>Kennedy sent a cable saying the US "cannot condone assassination" — TWO DAYS before the hit. Weapons already delivered.</a:t>
             </a:r>
           </a:p>
           <a:p>
@@ -5806,14 +5888,14 @@
               <a:buChar char="•"/>
             </a:pPr>
             <a:r>
-              <a:t>His wife vowed to continue his work. "If they decide to KILL me, it means we are incredibly STRONG."</a:t>
+              <a:t>Church Committee confirmed this as ONE OF FIVE CIA assassination plots against foreign leaders.</a:t>
             </a:r>
           </a:p>
         </p:txBody>
       </p:sp>
       <p:pic>
         <p:nvPicPr>
-          <p:cNvPr id="16" name="Picture 15" descr="Alexei_Navalny.jpg"/>
+          <p:cNvPr id="16" name="Picture 15" descr="Rafael_Trujillo.jpg"/>
           <p:cNvPicPr>
             <a:picLocks noChangeAspect="1"/>
           </p:cNvPicPr>
@@ -5827,8 +5909,8 @@
         </p:blipFill>
         <p:spPr>
           <a:xfrm>
-            <a:off x="8223003" y="1100088"/>
-            <a:ext cx="2835959" cy="3884876"/>
+            <a:off x="8276420" y="1100088"/>
+            <a:ext cx="2729125" cy="3884876"/>
           </a:xfrm>
           <a:prstGeom prst="rect">
             <a:avLst/>
@@ -5836,11 +5918,6 @@
         </p:spPr>
       </p:pic>
     </p:spTree>
-    <p:extLst>
-      <p:ext uri="{BB962C8B-B14F-4D97-AF65-F5344CB8AC3E}">
-        <p14:creationId xmlns:p14="http://schemas.microsoft.com/office/powerpoint/2010/main" val="2359462379"/>
-      </p:ext>
-    </p:extLst>
   </p:cSld>
   <p:clrMapOvr>
     <a:masterClrMapping/>
@@ -5865,9 +5942,464 @@
           <a:chExt cx="0" cy="0"/>
         </a:xfrm>
       </p:grpSpPr>
+      <p:sp>
+        <p:nvSpPr>
+          <p:cNvPr id="15" name="TextBox 14">
+            <a:extLst>
+              <a:ext uri="{FF2B5EF4-FFF2-40B4-BE49-F238E27FC236}">
+                <a16:creationId xmlns:a16="http://schemas.microsoft.com/office/drawing/2014/main" id="{E478240E-251B-5BA6-3C45-7E6620400769}"/>
+              </a:ext>
+            </a:extLst>
+          </p:cNvPr>
+          <p:cNvSpPr txBox="1"/>
+          <p:nvPr/>
+        </p:nvSpPr>
+        <p:spPr>
+          <a:xfrm>
+            <a:off x="312432" y="1288262"/>
+            <a:ext cx="6494294" cy="584775"/>
+          </a:xfrm>
+          <a:prstGeom prst="rect">
+            <a:avLst/>
+          </a:prstGeom>
+          <a:solidFill>
+            <a:schemeClr val="bg1">
+              <a:alpha val="84400"/>
+            </a:schemeClr>
+          </a:solidFill>
+        </p:spPr>
+        <p:txBody>
+          <a:bodyPr wrap="square" rtlCol="0">
+            <a:spAutoFit/>
+          </a:bodyPr>
+          <a:lstStyle/>
+          <a:p>
+            <a:r>
+              <a:rPr lang="en-US" sz="3200" b="1" dirty="0">
+                <a:solidFill>
+                  <a:schemeClr val="accent5"/>
+                </a:solidFill>
+              </a:rPr>
+              <a:t>Why / How they Alexei Navalny:</a:t>
+            </a:r>
+          </a:p>
+        </p:txBody>
+      </p:sp>
+      <p:sp>
+        <p:nvSpPr>
+          <p:cNvPr id="3" name="Google Shape;170;p31">
+            <a:extLst>
+              <a:ext uri="{FF2B5EF4-FFF2-40B4-BE49-F238E27FC236}">
+                <a16:creationId xmlns:a16="http://schemas.microsoft.com/office/drawing/2014/main" id="{A4695FE5-0AA5-AB05-98B1-B5B8E3FA8CBE}"/>
+              </a:ext>
+            </a:extLst>
+          </p:cNvPr>
+          <p:cNvSpPr/>
+          <p:nvPr/>
+        </p:nvSpPr>
+        <p:spPr>
+          <a:xfrm>
+            <a:off x="191731" y="5732890"/>
+            <a:ext cx="3431270" cy="496760"/>
+          </a:xfrm>
+          <a:prstGeom prst="rect">
+            <a:avLst/>
+          </a:prstGeom>
+          <a:solidFill>
+            <a:schemeClr val="accent5"/>
+          </a:solidFill>
+          <a:ln>
+            <a:noFill/>
+          </a:ln>
+        </p:spPr>
+        <p:txBody>
+          <a:bodyPr spcFirstLastPara="1" wrap="square" lIns="91425" tIns="45700" rIns="91425" bIns="45700" anchor="ctr" anchorCtr="0">
+            <a:noAutofit/>
+          </a:bodyPr>
+          <a:lstStyle/>
+          <a:p>
+            <a:pPr marL="0" marR="0" lvl="0" indent="0" algn="ctr" rtl="0">
+              <a:lnSpc>
+                <a:spcPct val="100000"/>
+              </a:lnSpc>
+              <a:spcBef>
+                <a:spcPts val="0"/>
+              </a:spcBef>
+              <a:spcAft>
+                <a:spcPts val="0"/>
+              </a:spcAft>
+              <a:buClr>
+                <a:srgbClr val="000000"/>
+              </a:buClr>
+              <a:buSzPts val="1600"/>
+              <a:buFont typeface="Arial"/>
+              <a:buNone/>
+            </a:pPr>
+            <a:r>
+              <a:rPr lang="en-US" sz="3600" dirty="0">
+                <a:solidFill>
+                  <a:schemeClr val="lt1"/>
+                </a:solidFill>
+              </a:rPr>
+              <a:t>Read List Here:</a:t>
+            </a:r>
+            <a:endParaRPr sz="2000" b="0" i="0" u="none" strike="noStrike" cap="none" dirty="0">
+              <a:solidFill>
+                <a:srgbClr val="000000"/>
+              </a:solidFill>
+              <a:latin typeface="Arial"/>
+              <a:ea typeface="Arial"/>
+              <a:cs typeface="Arial"/>
+              <a:sym typeface="Arial"/>
+            </a:endParaRPr>
+          </a:p>
+        </p:txBody>
+      </p:sp>
+      <p:sp>
+        <p:nvSpPr>
+          <p:cNvPr id="5" name="Google Shape;170;p31">
+            <a:extLst>
+              <a:ext uri="{FF2B5EF4-FFF2-40B4-BE49-F238E27FC236}">
+                <a16:creationId xmlns:a16="http://schemas.microsoft.com/office/drawing/2014/main" id="{98132413-6ED2-8B36-74B6-3C503B1A4634}"/>
+              </a:ext>
+            </a:extLst>
+          </p:cNvPr>
+          <p:cNvSpPr/>
+          <p:nvPr/>
+        </p:nvSpPr>
+        <p:spPr>
+          <a:xfrm>
+            <a:off x="0" y="-31518"/>
+            <a:ext cx="12192000" cy="1131606"/>
+          </a:xfrm>
+          <a:prstGeom prst="rect">
+            <a:avLst/>
+          </a:prstGeom>
+          <a:solidFill>
+            <a:srgbClr val="C00000"/>
+          </a:solidFill>
+          <a:ln>
+            <a:noFill/>
+          </a:ln>
+        </p:spPr>
+        <p:txBody>
+          <a:bodyPr spcFirstLastPara="1" wrap="square" lIns="91425" tIns="45700" rIns="91425" bIns="45700" anchor="ctr" anchorCtr="0">
+            <a:noAutofit/>
+          </a:bodyPr>
+          <a:lstStyle/>
+          <a:p>
+            <a:pPr marL="0" marR="0" lvl="0" indent="0" rtl="0">
+              <a:lnSpc>
+                <a:spcPct val="100000"/>
+              </a:lnSpc>
+              <a:spcBef>
+                <a:spcPts val="0"/>
+              </a:spcBef>
+              <a:spcAft>
+                <a:spcPts val="0"/>
+              </a:spcAft>
+              <a:buClr>
+                <a:srgbClr val="000000"/>
+              </a:buClr>
+              <a:buSzPts val="1600"/>
+              <a:buFont typeface="Arial"/>
+              <a:buNone/>
+            </a:pPr>
+            <a:r>
+              <a:rPr lang="en-US" sz="4800" dirty="0">
+                <a:solidFill>
+                  <a:schemeClr val="lt1"/>
+                </a:solidFill>
+              </a:rPr>
+              <a:t> 150+ Murdered: by Intelligence Services</a:t>
+            </a:r>
+            <a:endParaRPr sz="3200" b="0" i="0" u="none" strike="noStrike" cap="none" dirty="0">
+              <a:solidFill>
+                <a:srgbClr val="000000"/>
+              </a:solidFill>
+              <a:latin typeface="Arial"/>
+              <a:ea typeface="Arial"/>
+              <a:cs typeface="Arial"/>
+              <a:sym typeface="Arial"/>
+            </a:endParaRPr>
+          </a:p>
+        </p:txBody>
+      </p:sp>
+      <p:sp>
+        <p:nvSpPr>
+          <p:cNvPr id="4" name="TextBox 3">
+            <a:extLst>
+              <a:ext uri="{FF2B5EF4-FFF2-40B4-BE49-F238E27FC236}">
+                <a16:creationId xmlns:a16="http://schemas.microsoft.com/office/drawing/2014/main" id="{50D7621F-9D36-7894-7117-9F831EF5EFA6}"/>
+              </a:ext>
+            </a:extLst>
+          </p:cNvPr>
+          <p:cNvSpPr txBox="1"/>
+          <p:nvPr/>
+        </p:nvSpPr>
+        <p:spPr>
+          <a:xfrm>
+            <a:off x="107300" y="6229650"/>
+            <a:ext cx="11685989" cy="461665"/>
+          </a:xfrm>
+          <a:prstGeom prst="rect">
+            <a:avLst/>
+          </a:prstGeom>
+          <a:solidFill>
+            <a:schemeClr val="bg1">
+              <a:alpha val="84400"/>
+            </a:schemeClr>
+          </a:solidFill>
+        </p:spPr>
+        <p:txBody>
+          <a:bodyPr wrap="square" rtlCol="0">
+            <a:spAutoFit/>
+          </a:bodyPr>
+          <a:lstStyle/>
+          <a:p>
+            <a:r>
+              <a:rPr lang="en-US" sz="2400" dirty="0"/>
+              <a:t>https://intelligencemurders.com/intel</a:t>
+            </a:r>
+          </a:p>
+        </p:txBody>
+      </p:sp>
+      <p:sp>
+        <p:nvSpPr>
+          <p:cNvPr id="7" name="Google Shape;170;p31">
+            <a:extLst>
+              <a:ext uri="{FF2B5EF4-FFF2-40B4-BE49-F238E27FC236}">
+                <a16:creationId xmlns:a16="http://schemas.microsoft.com/office/drawing/2014/main" id="{4B582382-76AA-B49E-C611-39A37CE591B9}"/>
+              </a:ext>
+            </a:extLst>
+          </p:cNvPr>
+          <p:cNvSpPr/>
+          <p:nvPr/>
+        </p:nvSpPr>
+        <p:spPr>
+          <a:xfrm>
+            <a:off x="7506336" y="4925186"/>
+            <a:ext cx="4550222" cy="869505"/>
+          </a:xfrm>
+          <a:prstGeom prst="rect">
+            <a:avLst/>
+          </a:prstGeom>
+          <a:solidFill>
+            <a:srgbClr val="C00000"/>
+          </a:solidFill>
+          <a:ln>
+            <a:noFill/>
+          </a:ln>
+        </p:spPr>
+        <p:txBody>
+          <a:bodyPr spcFirstLastPara="1" wrap="square" lIns="91425" tIns="45700" rIns="91425" bIns="45700" anchor="ctr" anchorCtr="0">
+            <a:noAutofit/>
+          </a:bodyPr>
+          <a:lstStyle/>
+          <a:p>
+            <a:pPr marL="0" marR="0" lvl="0" indent="0" algn="ctr" rtl="0">
+              <a:lnSpc>
+                <a:spcPct val="100000"/>
+              </a:lnSpc>
+              <a:spcBef>
+                <a:spcPts val="0"/>
+              </a:spcBef>
+              <a:spcAft>
+                <a:spcPts val="0"/>
+              </a:spcAft>
+              <a:buClr>
+                <a:srgbClr val="000000"/>
+              </a:buClr>
+              <a:buSzPts val="1600"/>
+              <a:buFont typeface="Arial"/>
+              <a:buNone/>
+            </a:pPr>
+            <a:r>
+              <a:rPr lang="en-US" sz="4800" dirty="0">
+                <a:solidFill>
+                  <a:schemeClr val="lt1"/>
+                </a:solidFill>
+              </a:rPr>
+              <a:t>Alexei Navalny</a:t>
+            </a:r>
+            <a:endParaRPr sz="3200" b="0" i="0" u="none" strike="noStrike" cap="none" dirty="0">
+              <a:solidFill>
+                <a:srgbClr val="000000"/>
+              </a:solidFill>
+              <a:latin typeface="Arial"/>
+              <a:ea typeface="Arial"/>
+              <a:cs typeface="Arial"/>
+              <a:sym typeface="Arial"/>
+            </a:endParaRPr>
+          </a:p>
+        </p:txBody>
+      </p:sp>
+      <p:sp>
+        <p:nvSpPr>
+          <p:cNvPr id="8" name="Google Shape;170;p31">
+            <a:extLst>
+              <a:ext uri="{FF2B5EF4-FFF2-40B4-BE49-F238E27FC236}">
+                <a16:creationId xmlns:a16="http://schemas.microsoft.com/office/drawing/2014/main" id="{D328ABDE-E232-3EB7-C3F2-B4BB7B64262F}"/>
+              </a:ext>
+            </a:extLst>
+          </p:cNvPr>
+          <p:cNvSpPr/>
+          <p:nvPr/>
+        </p:nvSpPr>
+        <p:spPr>
+          <a:xfrm>
+            <a:off x="7526107" y="5681420"/>
+            <a:ext cx="4550222" cy="548230"/>
+          </a:xfrm>
+          <a:prstGeom prst="rect">
+            <a:avLst/>
+          </a:prstGeom>
+          <a:solidFill>
+            <a:srgbClr val="C00000"/>
+          </a:solidFill>
+          <a:ln>
+            <a:noFill/>
+          </a:ln>
+        </p:spPr>
+        <p:txBody>
+          <a:bodyPr spcFirstLastPara="1" wrap="square" lIns="91425" tIns="45700" rIns="91425" bIns="45700" anchor="ctr" anchorCtr="0">
+            <a:noAutofit/>
+          </a:bodyPr>
+          <a:lstStyle/>
+          <a:p>
+            <a:pPr marL="0" marR="0" lvl="0" indent="0" algn="ctr" rtl="0">
+              <a:lnSpc>
+                <a:spcPct val="100000"/>
+              </a:lnSpc>
+              <a:spcBef>
+                <a:spcPts val="0"/>
+              </a:spcBef>
+              <a:spcAft>
+                <a:spcPts val="0"/>
+              </a:spcAft>
+              <a:buClr>
+                <a:srgbClr val="000000"/>
+              </a:buClr>
+              <a:buSzPts val="1600"/>
+              <a:buFont typeface="Arial"/>
+              <a:buNone/>
+            </a:pPr>
+            <a:r>
+              <a:rPr lang="en-US" sz="3600" dirty="0">
+                <a:solidFill>
+                  <a:schemeClr val="lt1"/>
+                </a:solidFill>
+              </a:rPr>
+              <a:t>Dead at Age 47</a:t>
+            </a:r>
+            <a:endParaRPr sz="2000" b="0" i="0" u="none" strike="noStrike" cap="none" dirty="0">
+              <a:solidFill>
+                <a:srgbClr val="000000"/>
+              </a:solidFill>
+              <a:latin typeface="Arial"/>
+              <a:ea typeface="Arial"/>
+              <a:cs typeface="Arial"/>
+              <a:sym typeface="Arial"/>
+            </a:endParaRPr>
+          </a:p>
+        </p:txBody>
+      </p:sp>
+      <p:sp>
+        <p:nvSpPr>
+          <p:cNvPr id="10" name="TextBox 9">
+            <a:extLst>
+              <a:ext uri="{FF2B5EF4-FFF2-40B4-BE49-F238E27FC236}">
+                <a16:creationId xmlns:a16="http://schemas.microsoft.com/office/drawing/2014/main" id="{5FA0D8B2-6B55-D3DC-BCBB-6FEAD86B9E72}"/>
+              </a:ext>
+            </a:extLst>
+          </p:cNvPr>
+          <p:cNvSpPr txBox="1"/>
+          <p:nvPr/>
+        </p:nvSpPr>
+        <p:spPr>
+          <a:xfrm>
+            <a:off x="312431" y="2175372"/>
+            <a:ext cx="6987941" cy="3046988"/>
+          </a:xfrm>
+          <a:prstGeom prst="rect">
+            <a:avLst/>
+          </a:prstGeom>
+          <a:solidFill>
+            <a:schemeClr val="bg1">
+              <a:alpha val="84400"/>
+            </a:schemeClr>
+          </a:solidFill>
+        </p:spPr>
+        <p:txBody>
+          <a:bodyPr wrap="square" rtlCol="0">
+            <a:spAutoFit/>
+          </a:bodyPr>
+          <a:lstStyle/>
+          <a:p>
+            <a:pPr marL="285750" indent="-285750">
+              <a:spcBef>
+                <a:spcPts val="1200"/>
+              </a:spcBef>
+              <a:buFont typeface="Arial" panose="020B0604020202020204" pitchFamily="34" charset="0"/>
+              <a:buChar char="•"/>
+            </a:pPr>
+            <a:r>
+              <a:t>Survived FSB NOVICHOK poisoning in 2020, then TRICKED his assassin into confessing on a recorded phone call.</a:t>
+            </a:r>
+          </a:p>
+          <a:p>
+            <a:pPr marL="285750" indent="-285750">
+              <a:spcBef>
+                <a:spcPts val="1200"/>
+              </a:spcBef>
+              <a:buFont typeface="Arial" panose="020B0604020202020204" pitchFamily="34" charset="0"/>
+              <a:buChar char="•"/>
+            </a:pPr>
+            <a:r>
+              <a:t>Died in an ARCTIC prison at age 47. Five European nations confirmed he was poisoned with FROG TOXIN.</a:t>
+            </a:r>
+          </a:p>
+          <a:p>
+            <a:pPr marL="285750" indent="-285750">
+              <a:spcBef>
+                <a:spcPts val="1200"/>
+              </a:spcBef>
+              <a:buFont typeface="Arial" panose="020B0604020202020204" pitchFamily="34" charset="0"/>
+              <a:buChar char="•"/>
+            </a:pPr>
+            <a:r>
+              <a:t>Appeared HEALTHY at a court hearing ONE DAY before his death. Russia claims "cardiac arrhythmia."</a:t>
+            </a:r>
+          </a:p>
+          <a:p>
+            <a:pPr marL="285750" indent="-285750">
+              <a:spcBef>
+                <a:spcPts val="1200"/>
+              </a:spcBef>
+              <a:buFont typeface="Arial" panose="020B0604020202020204" pitchFamily="34" charset="0"/>
+              <a:buChar char="•"/>
+            </a:pPr>
+            <a:r>
+              <a:t>His anti-corruption videos exposing Putin's $1.35 BILLION palace got 130 MILLION views on YouTube.</a:t>
+            </a:r>
+          </a:p>
+          <a:p>
+            <a:pPr marL="285750" indent="-285750">
+              <a:spcBef>
+                <a:spcPts val="1200"/>
+              </a:spcBef>
+              <a:buFont typeface="Arial" panose="020B0604020202020204" pitchFamily="34" charset="0"/>
+              <a:buChar char="•"/>
+            </a:pPr>
+            <a:r>
+              <a:t>His wife vowed to continue his work. "If they decide to KILL me, it means we are incredibly STRONG."</a:t>
+            </a:r>
+          </a:p>
+        </p:txBody>
+      </p:sp>
       <p:pic>
         <p:nvPicPr>
-          <p:cNvPr id="16" name="Picture 15" descr="Ahmad_Shah_Massoud.jpg"/>
+          <p:cNvPr id="16" name="Picture 15" descr="Alexei_Navalny.jpg"/>
           <p:cNvPicPr>
             <a:picLocks noChangeAspect="1"/>
           </p:cNvPicPr>
@@ -5881,473 +6413,18 @@
         </p:blipFill>
         <p:spPr>
           <a:xfrm>
-            <a:off x="8838300" y="1070199"/>
-            <a:ext cx="3107900" cy="3884876"/>
+            <a:off x="8223003" y="1100088"/>
+            <a:ext cx="2835959" cy="3884876"/>
           </a:xfrm>
           <a:prstGeom prst="rect">
             <a:avLst/>
           </a:prstGeom>
         </p:spPr>
       </p:pic>
-      <p:sp>
-        <p:nvSpPr>
-          <p:cNvPr id="15" name="TextBox 14">
-            <a:extLst>
-              <a:ext uri="{FF2B5EF4-FFF2-40B4-BE49-F238E27FC236}">
-                <a16:creationId xmlns:a16="http://schemas.microsoft.com/office/drawing/2014/main" id="{E478240E-251B-5BA6-3C45-7E6620400769}"/>
-              </a:ext>
-            </a:extLst>
-          </p:cNvPr>
-          <p:cNvSpPr txBox="1"/>
-          <p:nvPr/>
-        </p:nvSpPr>
-        <p:spPr>
-          <a:xfrm>
-            <a:off x="312431" y="1288262"/>
-            <a:ext cx="7651005" cy="584775"/>
-          </a:xfrm>
-          <a:prstGeom prst="rect">
-            <a:avLst/>
-          </a:prstGeom>
-          <a:solidFill>
-            <a:schemeClr val="bg1">
-              <a:alpha val="84400"/>
-            </a:schemeClr>
-          </a:solidFill>
-        </p:spPr>
-        <p:txBody>
-          <a:bodyPr wrap="square" rtlCol="0">
-            <a:spAutoFit/>
-          </a:bodyPr>
-          <a:lstStyle/>
-          <a:p>
-            <a:r>
-              <a:rPr lang="en-US" sz="3200" b="1" dirty="0">
-                <a:solidFill>
-                  <a:schemeClr val="accent5"/>
-                </a:solidFill>
-              </a:rPr>
-              <a:t>Why / How they Ahmad Shah Massoud:</a:t>
-            </a:r>
-          </a:p>
-        </p:txBody>
-      </p:sp>
-      <p:sp>
-        <p:nvSpPr>
-          <p:cNvPr id="3" name="Google Shape;170;p31">
-            <a:extLst>
-              <a:ext uri="{FF2B5EF4-FFF2-40B4-BE49-F238E27FC236}">
-                <a16:creationId xmlns:a16="http://schemas.microsoft.com/office/drawing/2014/main" id="{A4695FE5-0AA5-AB05-98B1-B5B8E3FA8CBE}"/>
-              </a:ext>
-            </a:extLst>
-          </p:cNvPr>
-          <p:cNvSpPr/>
-          <p:nvPr/>
-        </p:nvSpPr>
-        <p:spPr>
-          <a:xfrm>
-            <a:off x="191731" y="5732890"/>
-            <a:ext cx="3431270" cy="496760"/>
-          </a:xfrm>
-          <a:prstGeom prst="rect">
-            <a:avLst/>
-          </a:prstGeom>
-          <a:solidFill>
-            <a:schemeClr val="accent5"/>
-          </a:solidFill>
-          <a:ln>
-            <a:noFill/>
-          </a:ln>
-        </p:spPr>
-        <p:txBody>
-          <a:bodyPr spcFirstLastPara="1" wrap="square" lIns="91425" tIns="45700" rIns="91425" bIns="45700" anchor="ctr" anchorCtr="0">
-            <a:noAutofit/>
-          </a:bodyPr>
-          <a:lstStyle/>
-          <a:p>
-            <a:pPr marL="0" marR="0" lvl="0" indent="0" algn="ctr" rtl="0">
-              <a:lnSpc>
-                <a:spcPct val="100000"/>
-              </a:lnSpc>
-              <a:spcBef>
-                <a:spcPts val="0"/>
-              </a:spcBef>
-              <a:spcAft>
-                <a:spcPts val="0"/>
-              </a:spcAft>
-              <a:buClr>
-                <a:srgbClr val="000000"/>
-              </a:buClr>
-              <a:buSzPts val="1600"/>
-              <a:buFont typeface="Arial"/>
-              <a:buNone/>
-            </a:pPr>
-            <a:r>
-              <a:rPr lang="en-US" sz="3600" dirty="0">
-                <a:solidFill>
-                  <a:schemeClr val="lt1"/>
-                </a:solidFill>
-              </a:rPr>
-              <a:t>Read List Here:</a:t>
-            </a:r>
-            <a:endParaRPr sz="2000" b="0" i="0" u="none" strike="noStrike" cap="none" dirty="0">
-              <a:solidFill>
-                <a:srgbClr val="000000"/>
-              </a:solidFill>
-              <a:latin typeface="Arial"/>
-              <a:ea typeface="Arial"/>
-              <a:cs typeface="Arial"/>
-              <a:sym typeface="Arial"/>
-            </a:endParaRPr>
-          </a:p>
-        </p:txBody>
-      </p:sp>
-      <p:sp>
-        <p:nvSpPr>
-          <p:cNvPr id="5" name="Google Shape;170;p31">
-            <a:extLst>
-              <a:ext uri="{FF2B5EF4-FFF2-40B4-BE49-F238E27FC236}">
-                <a16:creationId xmlns:a16="http://schemas.microsoft.com/office/drawing/2014/main" id="{98132413-6ED2-8B36-74B6-3C503B1A4634}"/>
-              </a:ext>
-            </a:extLst>
-          </p:cNvPr>
-          <p:cNvSpPr/>
-          <p:nvPr/>
-        </p:nvSpPr>
-        <p:spPr>
-          <a:xfrm>
-            <a:off x="0" y="-31518"/>
-            <a:ext cx="12192000" cy="1131606"/>
-          </a:xfrm>
-          <a:prstGeom prst="rect">
-            <a:avLst/>
-          </a:prstGeom>
-          <a:solidFill>
-            <a:srgbClr val="C00000"/>
-          </a:solidFill>
-          <a:ln>
-            <a:noFill/>
-          </a:ln>
-        </p:spPr>
-        <p:txBody>
-          <a:bodyPr spcFirstLastPara="1" wrap="square" lIns="91425" tIns="45700" rIns="91425" bIns="45700" anchor="ctr" anchorCtr="0">
-            <a:noAutofit/>
-          </a:bodyPr>
-          <a:lstStyle/>
-          <a:p>
-            <a:pPr marL="0" marR="0" lvl="0" indent="0" rtl="0">
-              <a:lnSpc>
-                <a:spcPct val="100000"/>
-              </a:lnSpc>
-              <a:spcBef>
-                <a:spcPts val="0"/>
-              </a:spcBef>
-              <a:spcAft>
-                <a:spcPts val="0"/>
-              </a:spcAft>
-              <a:buClr>
-                <a:srgbClr val="000000"/>
-              </a:buClr>
-              <a:buSzPts val="1600"/>
-              <a:buFont typeface="Arial"/>
-              <a:buNone/>
-            </a:pPr>
-            <a:r>
-              <a:rPr lang="en-US" sz="4800" dirty="0">
-                <a:solidFill>
-                  <a:schemeClr val="lt1"/>
-                </a:solidFill>
-              </a:rPr>
-              <a:t> 150+ Murdered: by Intelligence Services</a:t>
-            </a:r>
-            <a:endParaRPr sz="3200" b="0" i="0" u="none" strike="noStrike" cap="none" dirty="0">
-              <a:solidFill>
-                <a:srgbClr val="000000"/>
-              </a:solidFill>
-              <a:latin typeface="Arial"/>
-              <a:ea typeface="Arial"/>
-              <a:cs typeface="Arial"/>
-              <a:sym typeface="Arial"/>
-            </a:endParaRPr>
-          </a:p>
-        </p:txBody>
-      </p:sp>
-      <p:sp>
-        <p:nvSpPr>
-          <p:cNvPr id="4" name="TextBox 3">
-            <a:extLst>
-              <a:ext uri="{FF2B5EF4-FFF2-40B4-BE49-F238E27FC236}">
-                <a16:creationId xmlns:a16="http://schemas.microsoft.com/office/drawing/2014/main" id="{50D7621F-9D36-7894-7117-9F831EF5EFA6}"/>
-              </a:ext>
-            </a:extLst>
-          </p:cNvPr>
-          <p:cNvSpPr txBox="1"/>
-          <p:nvPr/>
-        </p:nvSpPr>
-        <p:spPr>
-          <a:xfrm>
-            <a:off x="107300" y="6229650"/>
-            <a:ext cx="11685989" cy="461665"/>
-          </a:xfrm>
-          <a:prstGeom prst="rect">
-            <a:avLst/>
-          </a:prstGeom>
-          <a:solidFill>
-            <a:schemeClr val="bg1">
-              <a:alpha val="84400"/>
-            </a:schemeClr>
-          </a:solidFill>
-        </p:spPr>
-        <p:txBody>
-          <a:bodyPr wrap="square" rtlCol="0">
-            <a:spAutoFit/>
-          </a:bodyPr>
-          <a:lstStyle/>
-          <a:p>
-            <a:r>
-              <a:rPr lang="en-US" sz="2400" dirty="0"/>
-              <a:t>https://intelligencemurders.com/intel</a:t>
-            </a:r>
-          </a:p>
-        </p:txBody>
-      </p:sp>
-      <p:sp>
-        <p:nvSpPr>
-          <p:cNvPr id="7" name="Google Shape;170;p31">
-            <a:extLst>
-              <a:ext uri="{FF2B5EF4-FFF2-40B4-BE49-F238E27FC236}">
-                <a16:creationId xmlns:a16="http://schemas.microsoft.com/office/drawing/2014/main" id="{4B582382-76AA-B49E-C611-39A37CE591B9}"/>
-              </a:ext>
-            </a:extLst>
-          </p:cNvPr>
-          <p:cNvSpPr/>
-          <p:nvPr/>
-        </p:nvSpPr>
-        <p:spPr>
-          <a:xfrm>
-            <a:off x="7506336" y="4925186"/>
-            <a:ext cx="4550222" cy="1430228"/>
-          </a:xfrm>
-          <a:prstGeom prst="rect">
-            <a:avLst/>
-          </a:prstGeom>
-          <a:solidFill>
-            <a:srgbClr val="C00000"/>
-          </a:solidFill>
-          <a:ln>
-            <a:noFill/>
-          </a:ln>
-        </p:spPr>
-        <p:txBody>
-          <a:bodyPr spcFirstLastPara="1" wrap="square" lIns="91425" tIns="45700" rIns="91425" bIns="45700" anchor="ctr" anchorCtr="0">
-            <a:noAutofit/>
-          </a:bodyPr>
-          <a:lstStyle/>
-          <a:p>
-            <a:pPr marL="0" marR="0" lvl="0" indent="0" algn="ctr" rtl="0">
-              <a:lnSpc>
-                <a:spcPct val="100000"/>
-              </a:lnSpc>
-              <a:spcBef>
-                <a:spcPts val="0"/>
-              </a:spcBef>
-              <a:spcAft>
-                <a:spcPts val="0"/>
-              </a:spcAft>
-              <a:buClr>
-                <a:srgbClr val="000000"/>
-              </a:buClr>
-              <a:buSzPts val="1600"/>
-              <a:buFont typeface="Arial"/>
-              <a:buNone/>
-            </a:pPr>
-            <a:r>
-              <a:rPr lang="en-US" sz="4800" dirty="0">
-                <a:solidFill>
-                  <a:schemeClr val="lt1"/>
-                </a:solidFill>
-              </a:rPr>
-              <a:t>Ahmad Shah Massoud</a:t>
-            </a:r>
-            <a:endParaRPr sz="3200" b="0" i="0" u="none" strike="noStrike" cap="none" dirty="0">
-              <a:solidFill>
-                <a:srgbClr val="000000"/>
-              </a:solidFill>
-              <a:latin typeface="Arial"/>
-              <a:ea typeface="Arial"/>
-              <a:cs typeface="Arial"/>
-              <a:sym typeface="Arial"/>
-            </a:endParaRPr>
-          </a:p>
-        </p:txBody>
-      </p:sp>
-      <p:sp>
-        <p:nvSpPr>
-          <p:cNvPr id="8" name="Google Shape;170;p31">
-            <a:extLst>
-              <a:ext uri="{FF2B5EF4-FFF2-40B4-BE49-F238E27FC236}">
-                <a16:creationId xmlns:a16="http://schemas.microsoft.com/office/drawing/2014/main" id="{D328ABDE-E232-3EB7-C3F2-B4BB7B64262F}"/>
-              </a:ext>
-            </a:extLst>
-          </p:cNvPr>
-          <p:cNvSpPr/>
-          <p:nvPr/>
-        </p:nvSpPr>
-        <p:spPr>
-          <a:xfrm>
-            <a:off x="7534478" y="6355414"/>
-            <a:ext cx="4550222" cy="548230"/>
-          </a:xfrm>
-          <a:prstGeom prst="rect">
-            <a:avLst/>
-          </a:prstGeom>
-          <a:solidFill>
-            <a:srgbClr val="C00000"/>
-          </a:solidFill>
-          <a:ln>
-            <a:noFill/>
-          </a:ln>
-        </p:spPr>
-        <p:txBody>
-          <a:bodyPr spcFirstLastPara="1" wrap="square" lIns="91425" tIns="45700" rIns="91425" bIns="45700" anchor="ctr" anchorCtr="0">
-            <a:noAutofit/>
-          </a:bodyPr>
-          <a:lstStyle/>
-          <a:p>
-            <a:pPr marL="0" marR="0" lvl="0" indent="0" algn="ctr" rtl="0">
-              <a:lnSpc>
-                <a:spcPct val="100000"/>
-              </a:lnSpc>
-              <a:spcBef>
-                <a:spcPts val="0"/>
-              </a:spcBef>
-              <a:spcAft>
-                <a:spcPts val="0"/>
-              </a:spcAft>
-              <a:buClr>
-                <a:srgbClr val="000000"/>
-              </a:buClr>
-              <a:buSzPts val="1600"/>
-              <a:buFont typeface="Arial"/>
-              <a:buNone/>
-            </a:pPr>
-            <a:r>
-              <a:rPr lang="en-US" sz="3600" dirty="0">
-                <a:solidFill>
-                  <a:schemeClr val="lt1"/>
-                </a:solidFill>
-              </a:rPr>
-              <a:t>Dead at Age 48</a:t>
-            </a:r>
-            <a:endParaRPr sz="2000" b="0" i="0" u="none" strike="noStrike" cap="none" dirty="0">
-              <a:solidFill>
-                <a:srgbClr val="000000"/>
-              </a:solidFill>
-              <a:latin typeface="Arial"/>
-              <a:ea typeface="Arial"/>
-              <a:cs typeface="Arial"/>
-              <a:sym typeface="Arial"/>
-            </a:endParaRPr>
-          </a:p>
-        </p:txBody>
-      </p:sp>
-      <p:sp>
-        <p:nvSpPr>
-          <p:cNvPr id="10" name="TextBox 9">
-            <a:extLst>
-              <a:ext uri="{FF2B5EF4-FFF2-40B4-BE49-F238E27FC236}">
-                <a16:creationId xmlns:a16="http://schemas.microsoft.com/office/drawing/2014/main" id="{5FA0D8B2-6B55-D3DC-BCBB-6FEAD86B9E72}"/>
-              </a:ext>
-            </a:extLst>
-          </p:cNvPr>
-          <p:cNvSpPr txBox="1"/>
-          <p:nvPr/>
-        </p:nvSpPr>
-        <p:spPr>
-          <a:xfrm>
-            <a:off x="312431" y="2175372"/>
-            <a:ext cx="6987941" cy="3046988"/>
-          </a:xfrm>
-          <a:prstGeom prst="rect">
-            <a:avLst/>
-          </a:prstGeom>
-          <a:solidFill>
-            <a:schemeClr val="bg1">
-              <a:alpha val="84400"/>
-            </a:schemeClr>
-          </a:solidFill>
-        </p:spPr>
-        <p:txBody>
-          <a:bodyPr wrap="square" rtlCol="0">
-            <a:spAutoFit/>
-          </a:bodyPr>
-          <a:lstStyle/>
-          <a:p>
-            <a:pPr marL="285750" indent="-285750">
-              <a:spcBef>
-                <a:spcPts val="1200"/>
-              </a:spcBef>
-              <a:buFont typeface="Arial" panose="020B0604020202020204" pitchFamily="34" charset="0"/>
-              <a:buChar char="•"/>
-            </a:pPr>
-            <a:r>
-              <a:t>Assassinated EXACTLY 2 DAYS before 9/11. Al-Qaeda hid a BOMB inside a stolen TV camera.</a:t>
-            </a:r>
-          </a:p>
-          <a:p>
-            <a:pPr marL="285750" indent="-285750">
-              <a:spcBef>
-                <a:spcPts val="1200"/>
-              </a:spcBef>
-              <a:buFont typeface="Arial" panose="020B0604020202020204" pitchFamily="34" charset="0"/>
-              <a:buChar char="•"/>
-            </a:pPr>
-            <a:r>
-              <a:t>Known as the "LION of Panjshir" — the most feared guerrilla commander the Soviets ever faced.</a:t>
-            </a:r>
-          </a:p>
-          <a:p>
-            <a:pPr marL="285750" indent="-285750">
-              <a:spcBef>
-                <a:spcPts val="1200"/>
-              </a:spcBef>
-              <a:buFont typeface="Arial" panose="020B0604020202020204" pitchFamily="34" charset="0"/>
-              <a:buChar char="•"/>
-            </a:pPr>
-            <a:r>
-              <a:t>WARNED the European Parliament months earlier that a MASSIVE attack on America was coming.</a:t>
-            </a:r>
-          </a:p>
-          <a:p>
-            <a:pPr marL="285750" indent="-285750">
-              <a:spcBef>
-                <a:spcPts val="1200"/>
-              </a:spcBef>
-              <a:buFont typeface="Arial" panose="020B0604020202020204" pitchFamily="34" charset="0"/>
-              <a:buChar char="•"/>
-            </a:pPr>
-            <a:r>
-              <a:t>Killed by fake journalists who asked: "What will you do with Osama bin Laden?" Then DETONATED the bomb.</a:t>
-            </a:r>
-          </a:p>
-          <a:p>
-            <a:pPr marL="285750" indent="-285750">
-              <a:spcBef>
-                <a:spcPts val="1200"/>
-              </a:spcBef>
-              <a:buFont typeface="Arial" panose="020B0604020202020204" pitchFamily="34" charset="0"/>
-              <a:buChar char="•"/>
-            </a:pPr>
-            <a:r>
-              <a:t>His death removed the ONE Afghan leader who could have cooperated with the US response to 9/11.</a:t>
-            </a:r>
-          </a:p>
-        </p:txBody>
-      </p:sp>
     </p:spTree>
     <p:extLst>
       <p:ext uri="{BB962C8B-B14F-4D97-AF65-F5344CB8AC3E}">
-        <p14:creationId xmlns:p14="http://schemas.microsoft.com/office/powerpoint/2010/main" val="3475945285"/>
+        <p14:creationId xmlns:p14="http://schemas.microsoft.com/office/powerpoint/2010/main" val="2359462379"/>
       </p:ext>
     </p:extLst>
   </p:cSld>
@@ -6374,6 +6451,515 @@
           <a:chExt cx="0" cy="0"/>
         </a:xfrm>
       </p:grpSpPr>
+      <p:pic>
+        <p:nvPicPr>
+          <p:cNvPr id="16" name="Picture 15" descr="Ahmad_Shah_Massoud.jpg"/>
+          <p:cNvPicPr>
+            <a:picLocks noChangeAspect="1"/>
+          </p:cNvPicPr>
+          <p:nvPr/>
+        </p:nvPicPr>
+        <p:blipFill>
+          <a:blip r:embed="rId2"/>
+          <a:stretch>
+            <a:fillRect/>
+          </a:stretch>
+        </p:blipFill>
+        <p:spPr>
+          <a:xfrm>
+            <a:off x="8838300" y="1070199"/>
+            <a:ext cx="3107900" cy="3884876"/>
+          </a:xfrm>
+          <a:prstGeom prst="rect">
+            <a:avLst/>
+          </a:prstGeom>
+        </p:spPr>
+      </p:pic>
+      <p:sp>
+        <p:nvSpPr>
+          <p:cNvPr id="15" name="TextBox 14">
+            <a:extLst>
+              <a:ext uri="{FF2B5EF4-FFF2-40B4-BE49-F238E27FC236}">
+                <a16:creationId xmlns:a16="http://schemas.microsoft.com/office/drawing/2014/main" id="{E478240E-251B-5BA6-3C45-7E6620400769}"/>
+              </a:ext>
+            </a:extLst>
+          </p:cNvPr>
+          <p:cNvSpPr txBox="1"/>
+          <p:nvPr/>
+        </p:nvSpPr>
+        <p:spPr>
+          <a:xfrm>
+            <a:off x="312431" y="1288262"/>
+            <a:ext cx="7651005" cy="584775"/>
+          </a:xfrm>
+          <a:prstGeom prst="rect">
+            <a:avLst/>
+          </a:prstGeom>
+          <a:solidFill>
+            <a:schemeClr val="bg1">
+              <a:alpha val="84400"/>
+            </a:schemeClr>
+          </a:solidFill>
+        </p:spPr>
+        <p:txBody>
+          <a:bodyPr wrap="square" rtlCol="0">
+            <a:spAutoFit/>
+          </a:bodyPr>
+          <a:lstStyle/>
+          <a:p>
+            <a:r>
+              <a:rPr lang="en-US" sz="3200" b="1" dirty="0">
+                <a:solidFill>
+                  <a:schemeClr val="accent5"/>
+                </a:solidFill>
+              </a:rPr>
+              <a:t>Why / How they Ahmad Shah Massoud:</a:t>
+            </a:r>
+          </a:p>
+        </p:txBody>
+      </p:sp>
+      <p:sp>
+        <p:nvSpPr>
+          <p:cNvPr id="3" name="Google Shape;170;p31">
+            <a:extLst>
+              <a:ext uri="{FF2B5EF4-FFF2-40B4-BE49-F238E27FC236}">
+                <a16:creationId xmlns:a16="http://schemas.microsoft.com/office/drawing/2014/main" id="{A4695FE5-0AA5-AB05-98B1-B5B8E3FA8CBE}"/>
+              </a:ext>
+            </a:extLst>
+          </p:cNvPr>
+          <p:cNvSpPr/>
+          <p:nvPr/>
+        </p:nvSpPr>
+        <p:spPr>
+          <a:xfrm>
+            <a:off x="191731" y="5732890"/>
+            <a:ext cx="3431270" cy="496760"/>
+          </a:xfrm>
+          <a:prstGeom prst="rect">
+            <a:avLst/>
+          </a:prstGeom>
+          <a:solidFill>
+            <a:schemeClr val="accent5"/>
+          </a:solidFill>
+          <a:ln>
+            <a:noFill/>
+          </a:ln>
+        </p:spPr>
+        <p:txBody>
+          <a:bodyPr spcFirstLastPara="1" wrap="square" lIns="91425" tIns="45700" rIns="91425" bIns="45700" anchor="ctr" anchorCtr="0">
+            <a:noAutofit/>
+          </a:bodyPr>
+          <a:lstStyle/>
+          <a:p>
+            <a:pPr marL="0" marR="0" lvl="0" indent="0" algn="ctr" rtl="0">
+              <a:lnSpc>
+                <a:spcPct val="100000"/>
+              </a:lnSpc>
+              <a:spcBef>
+                <a:spcPts val="0"/>
+              </a:spcBef>
+              <a:spcAft>
+                <a:spcPts val="0"/>
+              </a:spcAft>
+              <a:buClr>
+                <a:srgbClr val="000000"/>
+              </a:buClr>
+              <a:buSzPts val="1600"/>
+              <a:buFont typeface="Arial"/>
+              <a:buNone/>
+            </a:pPr>
+            <a:r>
+              <a:rPr lang="en-US" sz="3600" dirty="0">
+                <a:solidFill>
+                  <a:schemeClr val="lt1"/>
+                </a:solidFill>
+              </a:rPr>
+              <a:t>Read List Here:</a:t>
+            </a:r>
+            <a:endParaRPr sz="2000" b="0" i="0" u="none" strike="noStrike" cap="none" dirty="0">
+              <a:solidFill>
+                <a:srgbClr val="000000"/>
+              </a:solidFill>
+              <a:latin typeface="Arial"/>
+              <a:ea typeface="Arial"/>
+              <a:cs typeface="Arial"/>
+              <a:sym typeface="Arial"/>
+            </a:endParaRPr>
+          </a:p>
+        </p:txBody>
+      </p:sp>
+      <p:sp>
+        <p:nvSpPr>
+          <p:cNvPr id="5" name="Google Shape;170;p31">
+            <a:extLst>
+              <a:ext uri="{FF2B5EF4-FFF2-40B4-BE49-F238E27FC236}">
+                <a16:creationId xmlns:a16="http://schemas.microsoft.com/office/drawing/2014/main" id="{98132413-6ED2-8B36-74B6-3C503B1A4634}"/>
+              </a:ext>
+            </a:extLst>
+          </p:cNvPr>
+          <p:cNvSpPr/>
+          <p:nvPr/>
+        </p:nvSpPr>
+        <p:spPr>
+          <a:xfrm>
+            <a:off x="0" y="-31518"/>
+            <a:ext cx="12192000" cy="1131606"/>
+          </a:xfrm>
+          <a:prstGeom prst="rect">
+            <a:avLst/>
+          </a:prstGeom>
+          <a:solidFill>
+            <a:srgbClr val="C00000"/>
+          </a:solidFill>
+          <a:ln>
+            <a:noFill/>
+          </a:ln>
+        </p:spPr>
+        <p:txBody>
+          <a:bodyPr spcFirstLastPara="1" wrap="square" lIns="91425" tIns="45700" rIns="91425" bIns="45700" anchor="ctr" anchorCtr="0">
+            <a:noAutofit/>
+          </a:bodyPr>
+          <a:lstStyle/>
+          <a:p>
+            <a:pPr marL="0" marR="0" lvl="0" indent="0" rtl="0">
+              <a:lnSpc>
+                <a:spcPct val="100000"/>
+              </a:lnSpc>
+              <a:spcBef>
+                <a:spcPts val="0"/>
+              </a:spcBef>
+              <a:spcAft>
+                <a:spcPts val="0"/>
+              </a:spcAft>
+              <a:buClr>
+                <a:srgbClr val="000000"/>
+              </a:buClr>
+              <a:buSzPts val="1600"/>
+              <a:buFont typeface="Arial"/>
+              <a:buNone/>
+            </a:pPr>
+            <a:r>
+              <a:rPr lang="en-US" sz="4800" dirty="0">
+                <a:solidFill>
+                  <a:schemeClr val="lt1"/>
+                </a:solidFill>
+              </a:rPr>
+              <a:t> 150+ Murdered: by Intelligence Services</a:t>
+            </a:r>
+            <a:endParaRPr sz="3200" b="0" i="0" u="none" strike="noStrike" cap="none" dirty="0">
+              <a:solidFill>
+                <a:srgbClr val="000000"/>
+              </a:solidFill>
+              <a:latin typeface="Arial"/>
+              <a:ea typeface="Arial"/>
+              <a:cs typeface="Arial"/>
+              <a:sym typeface="Arial"/>
+            </a:endParaRPr>
+          </a:p>
+        </p:txBody>
+      </p:sp>
+      <p:sp>
+        <p:nvSpPr>
+          <p:cNvPr id="4" name="TextBox 3">
+            <a:extLst>
+              <a:ext uri="{FF2B5EF4-FFF2-40B4-BE49-F238E27FC236}">
+                <a16:creationId xmlns:a16="http://schemas.microsoft.com/office/drawing/2014/main" id="{50D7621F-9D36-7894-7117-9F831EF5EFA6}"/>
+              </a:ext>
+            </a:extLst>
+          </p:cNvPr>
+          <p:cNvSpPr txBox="1"/>
+          <p:nvPr/>
+        </p:nvSpPr>
+        <p:spPr>
+          <a:xfrm>
+            <a:off x="107300" y="6229650"/>
+            <a:ext cx="11685989" cy="461665"/>
+          </a:xfrm>
+          <a:prstGeom prst="rect">
+            <a:avLst/>
+          </a:prstGeom>
+          <a:solidFill>
+            <a:schemeClr val="bg1">
+              <a:alpha val="84400"/>
+            </a:schemeClr>
+          </a:solidFill>
+        </p:spPr>
+        <p:txBody>
+          <a:bodyPr wrap="square" rtlCol="0">
+            <a:spAutoFit/>
+          </a:bodyPr>
+          <a:lstStyle/>
+          <a:p>
+            <a:r>
+              <a:rPr lang="en-US" sz="2400" dirty="0"/>
+              <a:t>https://intelligencemurders.com/intel</a:t>
+            </a:r>
+          </a:p>
+        </p:txBody>
+      </p:sp>
+      <p:sp>
+        <p:nvSpPr>
+          <p:cNvPr id="7" name="Google Shape;170;p31">
+            <a:extLst>
+              <a:ext uri="{FF2B5EF4-FFF2-40B4-BE49-F238E27FC236}">
+                <a16:creationId xmlns:a16="http://schemas.microsoft.com/office/drawing/2014/main" id="{4B582382-76AA-B49E-C611-39A37CE591B9}"/>
+              </a:ext>
+            </a:extLst>
+          </p:cNvPr>
+          <p:cNvSpPr/>
+          <p:nvPr/>
+        </p:nvSpPr>
+        <p:spPr>
+          <a:xfrm>
+            <a:off x="7506336" y="4925186"/>
+            <a:ext cx="4550222" cy="1430228"/>
+          </a:xfrm>
+          <a:prstGeom prst="rect">
+            <a:avLst/>
+          </a:prstGeom>
+          <a:solidFill>
+            <a:srgbClr val="C00000"/>
+          </a:solidFill>
+          <a:ln>
+            <a:noFill/>
+          </a:ln>
+        </p:spPr>
+        <p:txBody>
+          <a:bodyPr spcFirstLastPara="1" wrap="square" lIns="91425" tIns="45700" rIns="91425" bIns="45700" anchor="ctr" anchorCtr="0">
+            <a:noAutofit/>
+          </a:bodyPr>
+          <a:lstStyle/>
+          <a:p>
+            <a:pPr marL="0" marR="0" lvl="0" indent="0" algn="ctr" rtl="0">
+              <a:lnSpc>
+                <a:spcPct val="100000"/>
+              </a:lnSpc>
+              <a:spcBef>
+                <a:spcPts val="0"/>
+              </a:spcBef>
+              <a:spcAft>
+                <a:spcPts val="0"/>
+              </a:spcAft>
+              <a:buClr>
+                <a:srgbClr val="000000"/>
+              </a:buClr>
+              <a:buSzPts val="1600"/>
+              <a:buFont typeface="Arial"/>
+              <a:buNone/>
+            </a:pPr>
+            <a:r>
+              <a:rPr lang="en-US" sz="4800" dirty="0">
+                <a:solidFill>
+                  <a:schemeClr val="lt1"/>
+                </a:solidFill>
+              </a:rPr>
+              <a:t>Ahmad Shah Massoud</a:t>
+            </a:r>
+            <a:endParaRPr sz="3200" b="0" i="0" u="none" strike="noStrike" cap="none" dirty="0">
+              <a:solidFill>
+                <a:srgbClr val="000000"/>
+              </a:solidFill>
+              <a:latin typeface="Arial"/>
+              <a:ea typeface="Arial"/>
+              <a:cs typeface="Arial"/>
+              <a:sym typeface="Arial"/>
+            </a:endParaRPr>
+          </a:p>
+        </p:txBody>
+      </p:sp>
+      <p:sp>
+        <p:nvSpPr>
+          <p:cNvPr id="8" name="Google Shape;170;p31">
+            <a:extLst>
+              <a:ext uri="{FF2B5EF4-FFF2-40B4-BE49-F238E27FC236}">
+                <a16:creationId xmlns:a16="http://schemas.microsoft.com/office/drawing/2014/main" id="{D328ABDE-E232-3EB7-C3F2-B4BB7B64262F}"/>
+              </a:ext>
+            </a:extLst>
+          </p:cNvPr>
+          <p:cNvSpPr/>
+          <p:nvPr/>
+        </p:nvSpPr>
+        <p:spPr>
+          <a:xfrm>
+            <a:off x="7534478" y="6355414"/>
+            <a:ext cx="4550222" cy="548230"/>
+          </a:xfrm>
+          <a:prstGeom prst="rect">
+            <a:avLst/>
+          </a:prstGeom>
+          <a:solidFill>
+            <a:srgbClr val="C00000"/>
+          </a:solidFill>
+          <a:ln>
+            <a:noFill/>
+          </a:ln>
+        </p:spPr>
+        <p:txBody>
+          <a:bodyPr spcFirstLastPara="1" wrap="square" lIns="91425" tIns="45700" rIns="91425" bIns="45700" anchor="ctr" anchorCtr="0">
+            <a:noAutofit/>
+          </a:bodyPr>
+          <a:lstStyle/>
+          <a:p>
+            <a:pPr marL="0" marR="0" lvl="0" indent="0" algn="ctr" rtl="0">
+              <a:lnSpc>
+                <a:spcPct val="100000"/>
+              </a:lnSpc>
+              <a:spcBef>
+                <a:spcPts val="0"/>
+              </a:spcBef>
+              <a:spcAft>
+                <a:spcPts val="0"/>
+              </a:spcAft>
+              <a:buClr>
+                <a:srgbClr val="000000"/>
+              </a:buClr>
+              <a:buSzPts val="1600"/>
+              <a:buFont typeface="Arial"/>
+              <a:buNone/>
+            </a:pPr>
+            <a:r>
+              <a:rPr lang="en-US" sz="3600" dirty="0">
+                <a:solidFill>
+                  <a:schemeClr val="lt1"/>
+                </a:solidFill>
+              </a:rPr>
+              <a:t>Dead at Age 48</a:t>
+            </a:r>
+            <a:endParaRPr sz="2000" b="0" i="0" u="none" strike="noStrike" cap="none" dirty="0">
+              <a:solidFill>
+                <a:srgbClr val="000000"/>
+              </a:solidFill>
+              <a:latin typeface="Arial"/>
+              <a:ea typeface="Arial"/>
+              <a:cs typeface="Arial"/>
+              <a:sym typeface="Arial"/>
+            </a:endParaRPr>
+          </a:p>
+        </p:txBody>
+      </p:sp>
+      <p:sp>
+        <p:nvSpPr>
+          <p:cNvPr id="10" name="TextBox 9">
+            <a:extLst>
+              <a:ext uri="{FF2B5EF4-FFF2-40B4-BE49-F238E27FC236}">
+                <a16:creationId xmlns:a16="http://schemas.microsoft.com/office/drawing/2014/main" id="{5FA0D8B2-6B55-D3DC-BCBB-6FEAD86B9E72}"/>
+              </a:ext>
+            </a:extLst>
+          </p:cNvPr>
+          <p:cNvSpPr txBox="1"/>
+          <p:nvPr/>
+        </p:nvSpPr>
+        <p:spPr>
+          <a:xfrm>
+            <a:off x="312431" y="2175372"/>
+            <a:ext cx="6987941" cy="3046988"/>
+          </a:xfrm>
+          <a:prstGeom prst="rect">
+            <a:avLst/>
+          </a:prstGeom>
+          <a:solidFill>
+            <a:schemeClr val="bg1">
+              <a:alpha val="84400"/>
+            </a:schemeClr>
+          </a:solidFill>
+        </p:spPr>
+        <p:txBody>
+          <a:bodyPr wrap="square" rtlCol="0">
+            <a:spAutoFit/>
+          </a:bodyPr>
+          <a:lstStyle/>
+          <a:p>
+            <a:pPr marL="285750" indent="-285750">
+              <a:spcBef>
+                <a:spcPts val="1200"/>
+              </a:spcBef>
+              <a:buFont typeface="Arial" panose="020B0604020202020204" pitchFamily="34" charset="0"/>
+              <a:buChar char="•"/>
+            </a:pPr>
+            <a:r>
+              <a:t>Assassinated EXACTLY 2 DAYS before 9/11. Al-Qaeda hid a BOMB inside a stolen TV camera.</a:t>
+            </a:r>
+          </a:p>
+          <a:p>
+            <a:pPr marL="285750" indent="-285750">
+              <a:spcBef>
+                <a:spcPts val="1200"/>
+              </a:spcBef>
+              <a:buFont typeface="Arial" panose="020B0604020202020204" pitchFamily="34" charset="0"/>
+              <a:buChar char="•"/>
+            </a:pPr>
+            <a:r>
+              <a:t>Known as the "LION of Panjshir" — the most feared guerrilla commander the Soviets ever faced.</a:t>
+            </a:r>
+          </a:p>
+          <a:p>
+            <a:pPr marL="285750" indent="-285750">
+              <a:spcBef>
+                <a:spcPts val="1200"/>
+              </a:spcBef>
+              <a:buFont typeface="Arial" panose="020B0604020202020204" pitchFamily="34" charset="0"/>
+              <a:buChar char="•"/>
+            </a:pPr>
+            <a:r>
+              <a:t>WARNED the European Parliament months earlier that a MASSIVE attack on America was coming.</a:t>
+            </a:r>
+          </a:p>
+          <a:p>
+            <a:pPr marL="285750" indent="-285750">
+              <a:spcBef>
+                <a:spcPts val="1200"/>
+              </a:spcBef>
+              <a:buFont typeface="Arial" panose="020B0604020202020204" pitchFamily="34" charset="0"/>
+              <a:buChar char="•"/>
+            </a:pPr>
+            <a:r>
+              <a:t>Killed by fake journalists who asked: "What will you do with Osama bin Laden?" Then DETONATED the bomb.</a:t>
+            </a:r>
+          </a:p>
+          <a:p>
+            <a:pPr marL="285750" indent="-285750">
+              <a:spcBef>
+                <a:spcPts val="1200"/>
+              </a:spcBef>
+              <a:buFont typeface="Arial" panose="020B0604020202020204" pitchFamily="34" charset="0"/>
+              <a:buChar char="•"/>
+            </a:pPr>
+            <a:r>
+              <a:t>His death removed the ONE Afghan leader who could have cooperated with the US response to 9/11.</a:t>
+            </a:r>
+          </a:p>
+        </p:txBody>
+      </p:sp>
+    </p:spTree>
+    <p:extLst>
+      <p:ext uri="{BB962C8B-B14F-4D97-AF65-F5344CB8AC3E}">
+        <p14:creationId xmlns:p14="http://schemas.microsoft.com/office/powerpoint/2010/main" val="3475945285"/>
+      </p:ext>
+    </p:extLst>
+  </p:cSld>
+  <p:clrMapOvr>
+    <a:masterClrMapping/>
+  </p:clrMapOvr>
+</p:sld>
+</file>
+
+<file path=ppt/slides/slide16.xml><?xml version="1.0" encoding="utf-8"?>
+<p:sld xmlns:a="http://schemas.openxmlformats.org/drawingml/2006/main" xmlns:r="http://schemas.openxmlformats.org/officeDocument/2006/relationships" xmlns:p="http://schemas.openxmlformats.org/presentationml/2006/main">
+  <p:cSld>
+    <p:spTree>
+      <p:nvGrpSpPr>
+        <p:cNvPr id="1" name=""/>
+        <p:cNvGrpSpPr/>
+        <p:nvPr/>
+      </p:nvGrpSpPr>
+      <p:grpSpPr>
+        <a:xfrm>
+          <a:off x="0" y="0"/>
+          <a:ext cx="0" cy="0"/>
+          <a:chOff x="0" y="0"/>
+          <a:chExt cx="0" cy="0"/>
+        </a:xfrm>
+      </p:grpSpPr>
       <p:sp>
         <p:nvSpPr>
           <p:cNvPr id="15" name="TextBox 14">
@@ -6861,7 +7447,7 @@
 </p:sld>
 </file>
 
-<file path=ppt/slides/slide16.xml><?xml version="1.0" encoding="utf-8"?>
+<file path=ppt/slides/slide17.xml><?xml version="1.0" encoding="utf-8"?>
 <p:sld xmlns:a="http://schemas.openxmlformats.org/drawingml/2006/main" xmlns:r="http://schemas.openxmlformats.org/officeDocument/2006/relationships" xmlns:p="http://schemas.openxmlformats.org/presentationml/2006/main">
   <p:cSld>
     <p:spTree>
@@ -7384,49 +7970,26 @@
       </p:grpSpPr>
       <p:pic>
         <p:nvPicPr>
-          <p:cNvPr id="2" name="Picture 2" descr="Haney gave numerous TV interviews while promoting his book">
-            <a:extLst>
-              <a:ext uri="{FF2B5EF4-FFF2-40B4-BE49-F238E27FC236}">
-                <a16:creationId xmlns:a16="http://schemas.microsoft.com/office/drawing/2014/main" id="{79F665EB-66F1-D4E9-58C9-5C90B9545F60}"/>
-              </a:ext>
-            </a:extLst>
-          </p:cNvPr>
+          <p:cNvPr id="16" name="Picture 15" descr="Robert_F_Kennedy.jpg"/>
           <p:cNvPicPr>
-            <a:picLocks noChangeAspect="1" noChangeArrowheads="1"/>
+            <a:picLocks noChangeAspect="1"/>
           </p:cNvPicPr>
           <p:nvPr/>
         </p:nvPicPr>
         <p:blipFill>
-          <a:blip r:embed="rId2">
-            <a:extLst>
-              <a:ext uri="{28A0092B-C50C-407E-A947-70E740481C1C}">
-                <a14:useLocalDpi xmlns:a14="http://schemas.microsoft.com/office/drawing/2010/main" val="0"/>
-              </a:ext>
-            </a:extLst>
-          </a:blip>
-          <a:srcRect/>
+          <a:blip r:embed="rId2"/>
           <a:stretch>
             <a:fillRect/>
           </a:stretch>
         </p:blipFill>
-        <p:spPr bwMode="auto">
-          <a:xfrm>
-            <a:off x="7100376" y="880999"/>
-            <a:ext cx="6352833" cy="4103965"/>
-          </a:xfrm>
-          <a:prstGeom prst="rect">
-            <a:avLst/>
-          </a:prstGeom>
-          <a:noFill/>
-          <a:extLst>
-            <a:ext uri="{909E8E84-426E-40DD-AFC4-6F175D3DCCD1}">
-              <a14:hiddenFill xmlns:a14="http://schemas.microsoft.com/office/drawing/2010/main">
-                <a:solidFill>
-                  <a:srgbClr val="FFFFFF"/>
-                </a:solidFill>
-              </a14:hiddenFill>
-            </a:ext>
-          </a:extLst>
+        <p:spPr>
+          <a:xfrm>
+            <a:off x="8957849" y="1100088"/>
+            <a:ext cx="3126851" cy="3884876"/>
+          </a:xfrm>
+          <a:prstGeom prst="rect">
+            <a:avLst/>
+          </a:prstGeom>
         </p:spPr>
       </p:pic>
       <p:sp>
@@ -7467,7 +8030,7 @@
                   <a:schemeClr val="accent5"/>
                 </a:solidFill>
               </a:rPr>
-              <a:t>Why / How they Philip Haney:</a:t>
+              <a:t>Why / How they Robert F Kennedy:</a:t>
             </a:r>
           </a:p>
         </p:txBody>
@@ -7575,22 +8138,11 @@
           </a:bodyPr>
           <a:lstStyle/>
           <a:p>
-            <a:pPr marL="0" marR="0" lvl="0" indent="0" rtl="0">
-              <a:lnSpc>
-                <a:spcPct val="100000"/>
-              </a:lnSpc>
-              <a:spcBef>
-                <a:spcPts val="0"/>
-              </a:spcBef>
-              <a:spcAft>
-                <a:spcPts val="0"/>
-              </a:spcAft>
+            <a:pPr lvl="0">
               <a:buClr>
                 <a:srgbClr val="000000"/>
               </a:buClr>
               <a:buSzPts val="1600"/>
-              <a:buFont typeface="Arial"/>
-              <a:buNone/>
             </a:pPr>
             <a:r>
               <a:rPr lang="en-US" sz="4800" dirty="0">
@@ -7600,7 +8152,7 @@
               </a:rPr>
               <a:t> 150+ Murdered: by Intelligence Services</a:t>
             </a:r>
-            <a:endParaRPr sz="3200" b="0" i="0" u="none" strike="noStrike" cap="none" dirty="0">
+            <a:endParaRPr lang="en-US" sz="3200" dirty="0">
               <a:solidFill>
                 <a:srgbClr val="000000"/>
               </a:solidFill>
@@ -7666,7 +8218,7 @@
         <p:spPr>
           <a:xfrm>
             <a:off x="7506336" y="4925186"/>
-            <a:ext cx="4550222" cy="869505"/>
+            <a:ext cx="4550222" cy="1419806"/>
           </a:xfrm>
           <a:prstGeom prst="rect">
             <a:avLst/>
@@ -7707,7 +8259,7 @@
                   <a:schemeClr val="lt1"/>
                 </a:solidFill>
               </a:rPr>
-              <a:t>Philip Haney</a:t>
+              <a:t>Robert F Kennedy</a:t>
             </a:r>
             <a:endParaRPr sz="3200" b="0" i="0" u="none" strike="noStrike" cap="none" dirty="0">
               <a:solidFill>
@@ -7735,7 +8287,7 @@
         </p:nvSpPr>
         <p:spPr>
           <a:xfrm>
-            <a:off x="7526107" y="5681420"/>
+            <a:off x="7534478" y="6291451"/>
             <a:ext cx="4550222" cy="548230"/>
           </a:xfrm>
           <a:prstGeom prst="rect">
@@ -7777,7 +8329,7 @@
                   <a:schemeClr val="lt1"/>
                 </a:solidFill>
               </a:rPr>
-              <a:t>Dead at Age 66</a:t>
+              <a:t>Dead at Age 42</a:t>
             </a:r>
             <a:endParaRPr sz="2000" b="0" i="0" u="none" strike="noStrike" cap="none" dirty="0">
               <a:solidFill>
@@ -7805,8 +8357,8 @@
         </p:nvSpPr>
         <p:spPr>
           <a:xfrm>
-            <a:off x="129030" y="1905506"/>
-            <a:ext cx="8367997" cy="3477875"/>
+            <a:off x="237466" y="1937976"/>
+            <a:ext cx="6987941" cy="3046988"/>
           </a:xfrm>
           <a:prstGeom prst="rect">
             <a:avLst/>
@@ -7832,7 +8384,7 @@
             </a:pPr>
             <a:r>
               <a:rPr dirty="0"/>
-              <a:t>DHS founding member and terrorism whistleblower — found SHOT DEAD in a California park-and-ride lot at age 66.</a:t>
+              <a:t>U.S. Senator and presidential candidate ASSASSINATED at age 42 in Los Angeles — June 1968.</a:t>
             </a:r>
           </a:p>
           <a:p>
@@ -7845,7 +8397,7 @@
             </a:pPr>
             <a:r>
               <a:rPr dirty="0"/>
-              <a:t>Alleged the Obama administration ordered the DELETION of intelligence records that could have PREVENTED the San Bernardino attack.</a:t>
+              <a:t>Dean Warwick claimed he was about to name RFK's real killer on stage — then COLLAPSED and DIED mid-sentence.</a:t>
             </a:r>
           </a:p>
           <a:p>
@@ -7858,7 +8410,7 @@
             </a:pPr>
             <a:r>
               <a:rPr dirty="0"/>
-              <a:t>His family "SERIOUSLY DOUBTS" the suicide ruling. Friends say the devout Christian explicitly said he would NEVER take his own life.</a:t>
+              <a:t>The official story blames Sirhan Sirhan — but forensic evidence suggests shots from behind, where Sirhan was not.</a:t>
             </a:r>
           </a:p>
           <a:p>
@@ -7871,7 +8423,7 @@
             </a:pPr>
             <a:r>
               <a:rPr dirty="0"/>
-              <a:t>He was ENGAGED to be married and reportedly preparing to reveal ADDITIONAL classified information at the time of his death.</a:t>
+              <a:t>Some researchers connect his assassination to his potential access to classified UFO programs had he become president.</a:t>
             </a:r>
           </a:p>
           <a:p>
@@ -7884,17 +8436,12 @@
             </a:pPr>
             <a:r>
               <a:rPr dirty="0"/>
-              <a:t>Ruled suicide after a TWO-YEAR investigation — but investigators found a note with passwords, not a suicide note.</a:t>
+              <a:t>His brother JFK was killed five years earlier — two Kennedys, both assassinated during the peak of UFO secrecy.</a:t>
             </a:r>
           </a:p>
         </p:txBody>
       </p:sp>
     </p:spTree>
-    <p:extLst>
-      <p:ext uri="{BB962C8B-B14F-4D97-AF65-F5344CB8AC3E}">
-        <p14:creationId xmlns:p14="http://schemas.microsoft.com/office/powerpoint/2010/main" val="962546674"/>
-      </p:ext>
-    </p:extLst>
   </p:cSld>
   <p:clrMapOvr>
     <a:masterClrMapping/>
@@ -7919,403 +8466,37 @@
           <a:chExt cx="0" cy="0"/>
         </a:xfrm>
       </p:grpSpPr>
-      <p:sp>
-        <p:nvSpPr>
-          <p:cNvPr id="15" name="TextBox 14">
-            <a:extLst>
-              <a:ext uri="{FF2B5EF4-FFF2-40B4-BE49-F238E27FC236}">
-                <a16:creationId xmlns:a16="http://schemas.microsoft.com/office/drawing/2014/main" id="{EAE3A09D-A6E4-5E4F-16F8-6BAFA5E1CD0A}"/>
-              </a:ext>
-            </a:extLst>
-          </p:cNvPr>
-          <p:cNvSpPr txBox="1"/>
-          <p:nvPr/>
-        </p:nvSpPr>
-        <p:spPr>
-          <a:xfrm>
-            <a:off x="312431" y="1288262"/>
-            <a:ext cx="6987941" cy="584775"/>
-          </a:xfrm>
-          <a:prstGeom prst="rect">
-            <a:avLst/>
-          </a:prstGeom>
-          <a:solidFill>
-            <a:schemeClr val="bg1">
-              <a:alpha val="84400"/>
-            </a:schemeClr>
-          </a:solidFill>
-        </p:spPr>
-        <p:txBody>
-          <a:bodyPr wrap="square" rtlCol="0">
-            <a:spAutoFit/>
-          </a:bodyPr>
-          <a:lstStyle/>
-          <a:p>
-            <a:r>
-              <a:rPr lang="en-US" sz="3200" b="1" dirty="0">
-                <a:solidFill>
-                  <a:schemeClr val="accent5"/>
-                </a:solidFill>
-              </a:rPr>
-              <a:t>Why / How they Dorothy Kilgallen:</a:t>
-            </a:r>
-          </a:p>
-        </p:txBody>
-      </p:sp>
-      <p:sp>
-        <p:nvSpPr>
-          <p:cNvPr id="3" name="Google Shape;170;p31">
-            <a:extLst>
-              <a:ext uri="{FF2B5EF4-FFF2-40B4-BE49-F238E27FC236}">
-                <a16:creationId xmlns:a16="http://schemas.microsoft.com/office/drawing/2014/main" id="{A2CA04A2-27A7-622C-F9FC-36F8F0881ABC}"/>
-              </a:ext>
-            </a:extLst>
-          </p:cNvPr>
-          <p:cNvSpPr/>
-          <p:nvPr/>
-        </p:nvSpPr>
-        <p:spPr>
-          <a:xfrm>
-            <a:off x="200102" y="5852160"/>
-            <a:ext cx="3431270" cy="494488"/>
-          </a:xfrm>
-          <a:prstGeom prst="rect">
-            <a:avLst/>
-          </a:prstGeom>
-          <a:solidFill>
-            <a:schemeClr val="accent5"/>
-          </a:solidFill>
-          <a:ln>
-            <a:noFill/>
-          </a:ln>
-        </p:spPr>
-        <p:txBody>
-          <a:bodyPr spcFirstLastPara="1" wrap="square" lIns="91425" tIns="45700" rIns="91425" bIns="45700" anchor="ctr" anchorCtr="0">
-            <a:noAutofit/>
-          </a:bodyPr>
-          <a:lstStyle/>
-          <a:p>
-            <a:pPr marL="0" marR="0" lvl="0" indent="0" algn="ctr" rtl="0">
-              <a:lnSpc>
-                <a:spcPct val="100000"/>
-              </a:lnSpc>
-              <a:spcBef>
-                <a:spcPts val="0"/>
-              </a:spcBef>
-              <a:spcAft>
-                <a:spcPts val="0"/>
-              </a:spcAft>
-              <a:buClr>
-                <a:srgbClr val="000000"/>
-              </a:buClr>
-              <a:buSzPts val="1600"/>
-              <a:buFont typeface="Arial"/>
-              <a:buNone/>
-            </a:pPr>
-            <a:r>
-              <a:rPr lang="en-US" sz="3600" dirty="0">
-                <a:solidFill>
-                  <a:schemeClr val="lt1"/>
-                </a:solidFill>
-              </a:rPr>
-              <a:t>Read List Here:</a:t>
-            </a:r>
-            <a:endParaRPr sz="2000" b="0" i="0" u="none" strike="noStrike" cap="none" dirty="0">
-              <a:solidFill>
-                <a:srgbClr val="000000"/>
-              </a:solidFill>
-              <a:latin typeface="Arial"/>
-              <a:ea typeface="Arial"/>
-              <a:cs typeface="Arial"/>
-              <a:sym typeface="Arial"/>
-            </a:endParaRPr>
-          </a:p>
-        </p:txBody>
-      </p:sp>
-      <p:sp>
-        <p:nvSpPr>
-          <p:cNvPr id="5" name="Google Shape;170;p31">
-            <a:extLst>
-              <a:ext uri="{FF2B5EF4-FFF2-40B4-BE49-F238E27FC236}">
-                <a16:creationId xmlns:a16="http://schemas.microsoft.com/office/drawing/2014/main" id="{7C736A6F-204D-9BB8-EAA6-837DBF5D4DEB}"/>
-              </a:ext>
-            </a:extLst>
-          </p:cNvPr>
-          <p:cNvSpPr/>
-          <p:nvPr/>
-        </p:nvSpPr>
-        <p:spPr>
-          <a:xfrm>
-            <a:off x="0" y="-31518"/>
-            <a:ext cx="12192000" cy="1131606"/>
-          </a:xfrm>
-          <a:prstGeom prst="rect">
-            <a:avLst/>
-          </a:prstGeom>
-          <a:solidFill>
-            <a:srgbClr val="C00000"/>
-          </a:solidFill>
-          <a:ln>
-            <a:noFill/>
-          </a:ln>
-        </p:spPr>
-        <p:txBody>
-          <a:bodyPr spcFirstLastPara="1" wrap="square" lIns="91425" tIns="45700" rIns="91425" bIns="45700" anchor="ctr" anchorCtr="0">
-            <a:noAutofit/>
-          </a:bodyPr>
-          <a:lstStyle/>
-          <a:p>
-            <a:pPr lvl="0">
-              <a:buClr>
-                <a:srgbClr val="000000"/>
-              </a:buClr>
-              <a:buSzPts val="1600"/>
-            </a:pPr>
-            <a:r>
-              <a:rPr lang="en-US" sz="4800" dirty="0">
-                <a:solidFill>
-                  <a:schemeClr val="lt1"/>
-                </a:solidFill>
-              </a:rPr>
-              <a:t> 150+ Murdered: by Intelligence Services</a:t>
-            </a:r>
-            <a:endParaRPr lang="en-US" sz="3200" dirty="0">
-              <a:solidFill>
-                <a:srgbClr val="000000"/>
-              </a:solidFill>
-              <a:latin typeface="Arial"/>
-              <a:ea typeface="Arial"/>
-              <a:cs typeface="Arial"/>
-              <a:sym typeface="Arial"/>
-            </a:endParaRPr>
-          </a:p>
-        </p:txBody>
-      </p:sp>
-      <p:sp>
-        <p:nvSpPr>
-          <p:cNvPr id="4" name="TextBox 3">
-            <a:extLst>
-              <a:ext uri="{FF2B5EF4-FFF2-40B4-BE49-F238E27FC236}">
-                <a16:creationId xmlns:a16="http://schemas.microsoft.com/office/drawing/2014/main" id="{14D41900-3932-F065-0A2B-6D119791E2A1}"/>
-              </a:ext>
-            </a:extLst>
-          </p:cNvPr>
-          <p:cNvSpPr txBox="1"/>
-          <p:nvPr/>
-        </p:nvSpPr>
-        <p:spPr>
-          <a:xfrm>
-            <a:off x="115671" y="6346648"/>
-            <a:ext cx="11685989" cy="461665"/>
-          </a:xfrm>
-          <a:prstGeom prst="rect">
-            <a:avLst/>
-          </a:prstGeom>
-          <a:solidFill>
-            <a:schemeClr val="bg1">
-              <a:alpha val="84400"/>
-            </a:schemeClr>
-          </a:solidFill>
-        </p:spPr>
-        <p:txBody>
-          <a:bodyPr wrap="square" rtlCol="0">
-            <a:spAutoFit/>
-          </a:bodyPr>
-          <a:lstStyle/>
-          <a:p>
-            <a:r>
-              <a:rPr lang="en-US" sz="2400" dirty="0"/>
-              <a:t>https://intelligencemurders.com/intel</a:t>
-            </a:r>
-          </a:p>
-        </p:txBody>
-      </p:sp>
-      <p:sp>
-        <p:nvSpPr>
-          <p:cNvPr id="8" name="Google Shape;170;p31">
-            <a:extLst>
-              <a:ext uri="{FF2B5EF4-FFF2-40B4-BE49-F238E27FC236}">
-                <a16:creationId xmlns:a16="http://schemas.microsoft.com/office/drawing/2014/main" id="{B069CCDF-FA80-D75C-7412-189D5C3D3A16}"/>
-              </a:ext>
-            </a:extLst>
-          </p:cNvPr>
-          <p:cNvSpPr/>
-          <p:nvPr/>
-        </p:nvSpPr>
-        <p:spPr>
-          <a:xfrm>
-            <a:off x="7526107" y="5681420"/>
-            <a:ext cx="4550222" cy="548230"/>
-          </a:xfrm>
-          <a:prstGeom prst="rect">
-            <a:avLst/>
-          </a:prstGeom>
-          <a:solidFill>
-            <a:srgbClr val="C00000"/>
-          </a:solidFill>
-          <a:ln>
-            <a:noFill/>
-          </a:ln>
-        </p:spPr>
-        <p:txBody>
-          <a:bodyPr spcFirstLastPara="1" wrap="square" lIns="91425" tIns="45700" rIns="91425" bIns="45700" anchor="ctr" anchorCtr="0">
-            <a:noAutofit/>
-          </a:bodyPr>
-          <a:lstStyle/>
-          <a:p>
-            <a:pPr marL="0" marR="0" lvl="0" indent="0" algn="ctr" rtl="0">
-              <a:lnSpc>
-                <a:spcPct val="100000"/>
-              </a:lnSpc>
-              <a:spcBef>
-                <a:spcPts val="0"/>
-              </a:spcBef>
-              <a:spcAft>
-                <a:spcPts val="0"/>
-              </a:spcAft>
-              <a:buClr>
-                <a:srgbClr val="000000"/>
-              </a:buClr>
-              <a:buSzPts val="1600"/>
-              <a:buFont typeface="Arial"/>
-              <a:buNone/>
-            </a:pPr>
-            <a:r>
-              <a:rPr lang="en-US" sz="3600" dirty="0">
-                <a:solidFill>
-                  <a:schemeClr val="lt1"/>
-                </a:solidFill>
-              </a:rPr>
-              <a:t>Dead at Age 52</a:t>
-            </a:r>
-            <a:endParaRPr sz="2000" b="0" i="0" u="none" strike="noStrike" cap="none" dirty="0">
-              <a:solidFill>
-                <a:srgbClr val="000000"/>
-              </a:solidFill>
-              <a:latin typeface="Arial"/>
-              <a:ea typeface="Arial"/>
-              <a:cs typeface="Arial"/>
-              <a:sym typeface="Arial"/>
-            </a:endParaRPr>
-          </a:p>
-        </p:txBody>
-      </p:sp>
-      <p:sp>
-        <p:nvSpPr>
-          <p:cNvPr id="10" name="TextBox 9">
-            <a:extLst>
-              <a:ext uri="{FF2B5EF4-FFF2-40B4-BE49-F238E27FC236}">
-                <a16:creationId xmlns:a16="http://schemas.microsoft.com/office/drawing/2014/main" id="{ABFEA484-AE6A-906E-D59E-C3F7E9DDD90C}"/>
-              </a:ext>
-            </a:extLst>
-          </p:cNvPr>
-          <p:cNvSpPr txBox="1"/>
-          <p:nvPr/>
-        </p:nvSpPr>
-        <p:spPr>
-          <a:xfrm>
-            <a:off x="208343" y="1805721"/>
-            <a:ext cx="7816976" cy="4031873"/>
-          </a:xfrm>
-          <a:prstGeom prst="rect">
-            <a:avLst/>
-          </a:prstGeom>
-          <a:solidFill>
-            <a:schemeClr val="bg1">
-              <a:alpha val="84400"/>
-            </a:schemeClr>
-          </a:solidFill>
-        </p:spPr>
-        <p:txBody>
-          <a:bodyPr wrap="square" rtlCol="0">
-            <a:spAutoFit/>
-          </a:bodyPr>
-          <a:lstStyle/>
-          <a:p>
-            <a:pPr marL="285750" indent="-285750">
-              <a:spcBef>
-                <a:spcPts val="1200"/>
-              </a:spcBef>
-              <a:buFont typeface="Arial" panose="020B0604020202020204" pitchFamily="34" charset="0"/>
-              <a:buChar char="•"/>
-            </a:pPr>
-            <a:r>
-              <a:rPr dirty="0"/>
-              <a:t>America's most famous journalist — syndicated to 20 MILLION readers. Found dead of a barbiturate overdose at age 52. Ruled "circumstances undetermined."</a:t>
-            </a:r>
-          </a:p>
-          <a:p>
-            <a:pPr marL="285750" indent="-285750">
-              <a:spcBef>
-                <a:spcPts val="1200"/>
-              </a:spcBef>
-              <a:buFont typeface="Arial" panose="020B0604020202020204" pitchFamily="34" charset="0"/>
-              <a:buChar char="•"/>
-            </a:pPr>
-            <a:r>
-              <a:rPr dirty="0"/>
-              <a:t>She was investigating the JFK ASSASSINATION and told friends she was about to "BREAK THE CASE WIDE OPEN."</a:t>
-            </a:r>
-          </a:p>
-          <a:p>
-            <a:pPr marL="285750" indent="-285750">
-              <a:spcBef>
-                <a:spcPts val="1200"/>
-              </a:spcBef>
-              <a:buFont typeface="Arial" panose="020B0604020202020204" pitchFamily="34" charset="0"/>
-              <a:buChar char="•"/>
-            </a:pPr>
-            <a:r>
-              <a:rPr dirty="0"/>
-              <a:t>She secured the ONLY private interview with Jack Ruby — the man who killed the man accused of killing the President.</a:t>
-            </a:r>
-          </a:p>
-          <a:p>
-            <a:pPr marL="285750" indent="-285750">
-              <a:spcBef>
-                <a:spcPts val="1200"/>
-              </a:spcBef>
-              <a:buFont typeface="Arial" panose="020B0604020202020204" pitchFamily="34" charset="0"/>
-              <a:buChar char="•"/>
-            </a:pPr>
-            <a:r>
-              <a:rPr dirty="0"/>
-              <a:t>Her INVESTIGATION FILE — described as a thick folder of documents — VANISHED after her death and has NEVER been found.</a:t>
-            </a:r>
-          </a:p>
-          <a:p>
-            <a:pPr marL="285750" indent="-285750">
-              <a:spcBef>
-                <a:spcPts val="1200"/>
-              </a:spcBef>
-              <a:buFont typeface="Arial" panose="020B0604020202020204" pitchFamily="34" charset="0"/>
-              <a:buChar char="•"/>
-            </a:pPr>
-            <a:r>
-              <a:rPr dirty="0"/>
-              <a:t>Found in a room that WASN'T her bedroom, fully dressed and made up — inconsistent with her known habits. No real investigation was ever conducted.</a:t>
-            </a:r>
-          </a:p>
-        </p:txBody>
-      </p:sp>
-      <p:sp>
-        <p:nvSpPr>
-          <p:cNvPr id="6" name="AutoShape 2" descr="Fundraiser for Sky Roberts by Annie Farmer : Help Virginia Roberts  Giuffre's Family Carry On Her Legacy">
-            <a:extLst>
-              <a:ext uri="{FF2B5EF4-FFF2-40B4-BE49-F238E27FC236}">
-                <a16:creationId xmlns:a16="http://schemas.microsoft.com/office/drawing/2014/main" id="{77876416-18B8-24A2-30FD-8E520F869817}"/>
-              </a:ext>
-            </a:extLst>
-          </p:cNvPr>
-          <p:cNvSpPr>
-            <a:spLocks noChangeAspect="1" noChangeArrowheads="1"/>
-          </p:cNvSpPr>
-          <p:nvPr/>
-        </p:nvSpPr>
+      <p:pic>
+        <p:nvPicPr>
+          <p:cNvPr id="2" name="Picture 2" descr="Haney gave numerous TV interviews while promoting his book">
+            <a:extLst>
+              <a:ext uri="{FF2B5EF4-FFF2-40B4-BE49-F238E27FC236}">
+                <a16:creationId xmlns:a16="http://schemas.microsoft.com/office/drawing/2014/main" id="{79F665EB-66F1-D4E9-58C9-5C90B9545F60}"/>
+              </a:ext>
+            </a:extLst>
+          </p:cNvPr>
+          <p:cNvPicPr>
+            <a:picLocks noChangeAspect="1" noChangeArrowheads="1"/>
+          </p:cNvPicPr>
+          <p:nvPr/>
+        </p:nvPicPr>
+        <p:blipFill>
+          <a:blip r:embed="rId2">
+            <a:extLst>
+              <a:ext uri="{28A0092B-C50C-407E-A947-70E740481C1C}">
+                <a14:useLocalDpi xmlns:a14="http://schemas.microsoft.com/office/drawing/2010/main" val="0"/>
+              </a:ext>
+            </a:extLst>
+          </a:blip>
+          <a:srcRect/>
+          <a:stretch>
+            <a:fillRect/>
+          </a:stretch>
+        </p:blipFill>
         <p:spPr bwMode="auto">
           <a:xfrm>
-            <a:off x="5943600" y="3276600"/>
-            <a:ext cx="304800" cy="304800"/>
+            <a:off x="7100376" y="880999"/>
+            <a:ext cx="6352833" cy="4103965"/>
           </a:xfrm>
           <a:prstGeom prst="rect">
             <a:avLst/>
@@ -8331,93 +8512,56 @@
             </a:ext>
           </a:extLst>
         </p:spPr>
-        <p:txBody>
-          <a:bodyPr vert="horz" wrap="square" lIns="91440" tIns="45720" rIns="91440" bIns="45720" numCol="1" anchor="t" anchorCtr="0" compatLnSpc="1">
-            <a:prstTxWarp prst="textNoShape">
-              <a:avLst/>
-            </a:prstTxWarp>
+      </p:pic>
+      <p:sp>
+        <p:nvSpPr>
+          <p:cNvPr id="15" name="TextBox 14">
+            <a:extLst>
+              <a:ext uri="{FF2B5EF4-FFF2-40B4-BE49-F238E27FC236}">
+                <a16:creationId xmlns:a16="http://schemas.microsoft.com/office/drawing/2014/main" id="{E478240E-251B-5BA6-3C45-7E6620400769}"/>
+              </a:ext>
+            </a:extLst>
+          </p:cNvPr>
+          <p:cNvSpPr txBox="1"/>
+          <p:nvPr/>
+        </p:nvSpPr>
+        <p:spPr>
+          <a:xfrm>
+            <a:off x="312432" y="1288262"/>
+            <a:ext cx="6494294" cy="584775"/>
+          </a:xfrm>
+          <a:prstGeom prst="rect">
+            <a:avLst/>
+          </a:prstGeom>
+          <a:solidFill>
+            <a:schemeClr val="bg1">
+              <a:alpha val="84400"/>
+            </a:schemeClr>
+          </a:solidFill>
+        </p:spPr>
+        <p:txBody>
+          <a:bodyPr wrap="square" rtlCol="0">
+            <a:spAutoFit/>
           </a:bodyPr>
           <a:lstStyle/>
           <a:p>
-            <a:endParaRPr lang="en-US"/>
-          </a:p>
-        </p:txBody>
-      </p:sp>
-      <p:sp>
-        <p:nvSpPr>
-          <p:cNvPr id="11" name="AutoShape 4" descr="Fundraiser for Sky Roberts by Annie Farmer : Help Virginia Roberts  Giuffre's Family Carry On Her Legacy">
-            <a:extLst>
-              <a:ext uri="{FF2B5EF4-FFF2-40B4-BE49-F238E27FC236}">
-                <a16:creationId xmlns:a16="http://schemas.microsoft.com/office/drawing/2014/main" id="{414B4E2B-C54A-135F-B3A8-DA7C31104A94}"/>
-              </a:ext>
-            </a:extLst>
-          </p:cNvPr>
-          <p:cNvSpPr>
-            <a:spLocks noChangeAspect="1" noChangeArrowheads="1"/>
-          </p:cNvSpPr>
-          <p:nvPr/>
-        </p:nvSpPr>
-        <p:spPr bwMode="auto">
-          <a:xfrm>
-            <a:off x="6096000" y="3429000"/>
-            <a:ext cx="304800" cy="304800"/>
-          </a:xfrm>
-          <a:prstGeom prst="rect">
-            <a:avLst/>
-          </a:prstGeom>
-          <a:noFill/>
-          <a:extLst>
-            <a:ext uri="{909E8E84-426E-40DD-AFC4-6F175D3DCCD1}">
-              <a14:hiddenFill xmlns:a14="http://schemas.microsoft.com/office/drawing/2010/main">
+            <a:r>
+              <a:rPr lang="en-US" sz="3200" b="1" dirty="0">
                 <a:solidFill>
-                  <a:srgbClr val="FFFFFF"/>
+                  <a:schemeClr val="accent5"/>
                 </a:solidFill>
-              </a14:hiddenFill>
-            </a:ext>
-          </a:extLst>
-        </p:spPr>
-        <p:txBody>
-          <a:bodyPr vert="horz" wrap="square" lIns="91440" tIns="45720" rIns="91440" bIns="45720" numCol="1" anchor="t" anchorCtr="0" compatLnSpc="1">
-            <a:prstTxWarp prst="textNoShape">
-              <a:avLst/>
-            </a:prstTxWarp>
-          </a:bodyPr>
-          <a:lstStyle/>
-          <a:p>
-            <a:endParaRPr lang="en-US"/>
-          </a:p>
-        </p:txBody>
-      </p:sp>
-      <p:pic>
-        <p:nvPicPr>
-          <p:cNvPr id="16" name="Picture 15" descr="Dorothy_Kilgallen.jpg"/>
-          <p:cNvPicPr>
-            <a:picLocks noChangeAspect="1"/>
-          </p:cNvPicPr>
-          <p:nvPr/>
-        </p:nvPicPr>
-        <p:blipFill>
-          <a:blip r:embed="rId2"/>
-          <a:stretch>
-            <a:fillRect/>
-          </a:stretch>
-        </p:blipFill>
-        <p:spPr>
-          <a:xfrm>
-            <a:off x="8144168" y="1084146"/>
-            <a:ext cx="3882867" cy="3856982"/>
-          </a:xfrm>
-          <a:prstGeom prst="rect">
-            <a:avLst/>
-          </a:prstGeom>
-        </p:spPr>
-      </p:pic>
-      <p:sp>
-        <p:nvSpPr>
-          <p:cNvPr id="7" name="Google Shape;170;p31">
-            <a:extLst>
-              <a:ext uri="{FF2B5EF4-FFF2-40B4-BE49-F238E27FC236}">
-                <a16:creationId xmlns:a16="http://schemas.microsoft.com/office/drawing/2014/main" id="{A2DF07F5-EEA0-8A2E-7E11-3E1CC4C2B695}"/>
+              </a:rPr>
+              <a:t>Why / How they Philip Haney:</a:t>
+            </a:r>
+          </a:p>
+        </p:txBody>
+      </p:sp>
+      <p:sp>
+        <p:nvSpPr>
+          <p:cNvPr id="3" name="Google Shape;170;p31">
+            <a:extLst>
+              <a:ext uri="{FF2B5EF4-FFF2-40B4-BE49-F238E27FC236}">
+                <a16:creationId xmlns:a16="http://schemas.microsoft.com/office/drawing/2014/main" id="{A4695FE5-0AA5-AB05-98B1-B5B8E3FA8CBE}"/>
               </a:ext>
             </a:extLst>
           </p:cNvPr>
@@ -8426,14 +8570,14 @@
         </p:nvSpPr>
         <p:spPr>
           <a:xfrm>
-            <a:off x="7506336" y="4925186"/>
-            <a:ext cx="4550222" cy="869505"/>
-          </a:xfrm>
-          <a:prstGeom prst="rect">
-            <a:avLst/>
-          </a:prstGeom>
-          <a:solidFill>
-            <a:srgbClr val="C00000"/>
+            <a:off x="191731" y="5732890"/>
+            <a:ext cx="3431270" cy="496760"/>
+          </a:xfrm>
+          <a:prstGeom prst="rect">
+            <a:avLst/>
+          </a:prstGeom>
+          <a:solidFill>
+            <a:schemeClr val="accent5"/>
           </a:solidFill>
           <a:ln>
             <a:noFill/>
@@ -8463,14 +8607,14 @@
               <a:buNone/>
             </a:pPr>
             <a:r>
-              <a:rPr lang="en-US" sz="4400" dirty="0">
+              <a:rPr lang="en-US" sz="3600" dirty="0">
                 <a:solidFill>
                   <a:schemeClr val="lt1"/>
                 </a:solidFill>
               </a:rPr>
-              <a:t>Dorothy Kilgallen</a:t>
-            </a:r>
-            <a:endParaRPr sz="2800" b="0" i="0" u="none" strike="noStrike" cap="none" dirty="0">
+              <a:t>Read List Here:</a:t>
+            </a:r>
+            <a:endParaRPr sz="2000" b="0" i="0" u="none" strike="noStrike" cap="none" dirty="0">
               <a:solidFill>
                 <a:srgbClr val="000000"/>
               </a:solidFill>
@@ -8482,7 +8626,359 @@
           </a:p>
         </p:txBody>
       </p:sp>
+      <p:sp>
+        <p:nvSpPr>
+          <p:cNvPr id="5" name="Google Shape;170;p31">
+            <a:extLst>
+              <a:ext uri="{FF2B5EF4-FFF2-40B4-BE49-F238E27FC236}">
+                <a16:creationId xmlns:a16="http://schemas.microsoft.com/office/drawing/2014/main" id="{98132413-6ED2-8B36-74B6-3C503B1A4634}"/>
+              </a:ext>
+            </a:extLst>
+          </p:cNvPr>
+          <p:cNvSpPr/>
+          <p:nvPr/>
+        </p:nvSpPr>
+        <p:spPr>
+          <a:xfrm>
+            <a:off x="0" y="-31518"/>
+            <a:ext cx="12192000" cy="1131606"/>
+          </a:xfrm>
+          <a:prstGeom prst="rect">
+            <a:avLst/>
+          </a:prstGeom>
+          <a:solidFill>
+            <a:srgbClr val="C00000"/>
+          </a:solidFill>
+          <a:ln>
+            <a:noFill/>
+          </a:ln>
+        </p:spPr>
+        <p:txBody>
+          <a:bodyPr spcFirstLastPara="1" wrap="square" lIns="91425" tIns="45700" rIns="91425" bIns="45700" anchor="ctr" anchorCtr="0">
+            <a:noAutofit/>
+          </a:bodyPr>
+          <a:lstStyle/>
+          <a:p>
+            <a:pPr marL="0" marR="0" lvl="0" indent="0" rtl="0">
+              <a:lnSpc>
+                <a:spcPct val="100000"/>
+              </a:lnSpc>
+              <a:spcBef>
+                <a:spcPts val="0"/>
+              </a:spcBef>
+              <a:spcAft>
+                <a:spcPts val="0"/>
+              </a:spcAft>
+              <a:buClr>
+                <a:srgbClr val="000000"/>
+              </a:buClr>
+              <a:buSzPts val="1600"/>
+              <a:buFont typeface="Arial"/>
+              <a:buNone/>
+            </a:pPr>
+            <a:r>
+              <a:rPr lang="en-US" sz="4800" dirty="0">
+                <a:solidFill>
+                  <a:schemeClr val="lt1"/>
+                </a:solidFill>
+              </a:rPr>
+              <a:t> 150+ Murdered: by Intelligence Services</a:t>
+            </a:r>
+            <a:endParaRPr sz="3200" b="0" i="0" u="none" strike="noStrike" cap="none" dirty="0">
+              <a:solidFill>
+                <a:srgbClr val="000000"/>
+              </a:solidFill>
+              <a:latin typeface="Arial"/>
+              <a:ea typeface="Arial"/>
+              <a:cs typeface="Arial"/>
+              <a:sym typeface="Arial"/>
+            </a:endParaRPr>
+          </a:p>
+        </p:txBody>
+      </p:sp>
+      <p:sp>
+        <p:nvSpPr>
+          <p:cNvPr id="4" name="TextBox 3">
+            <a:extLst>
+              <a:ext uri="{FF2B5EF4-FFF2-40B4-BE49-F238E27FC236}">
+                <a16:creationId xmlns:a16="http://schemas.microsoft.com/office/drawing/2014/main" id="{50D7621F-9D36-7894-7117-9F831EF5EFA6}"/>
+              </a:ext>
+            </a:extLst>
+          </p:cNvPr>
+          <p:cNvSpPr txBox="1"/>
+          <p:nvPr/>
+        </p:nvSpPr>
+        <p:spPr>
+          <a:xfrm>
+            <a:off x="107300" y="6229650"/>
+            <a:ext cx="11685989" cy="461665"/>
+          </a:xfrm>
+          <a:prstGeom prst="rect">
+            <a:avLst/>
+          </a:prstGeom>
+          <a:solidFill>
+            <a:schemeClr val="bg1">
+              <a:alpha val="84400"/>
+            </a:schemeClr>
+          </a:solidFill>
+        </p:spPr>
+        <p:txBody>
+          <a:bodyPr wrap="square" rtlCol="0">
+            <a:spAutoFit/>
+          </a:bodyPr>
+          <a:lstStyle/>
+          <a:p>
+            <a:r>
+              <a:rPr lang="en-US" sz="2400" dirty="0"/>
+              <a:t>https://intelligencemurders.com/intel</a:t>
+            </a:r>
+          </a:p>
+        </p:txBody>
+      </p:sp>
+      <p:sp>
+        <p:nvSpPr>
+          <p:cNvPr id="7" name="Google Shape;170;p31">
+            <a:extLst>
+              <a:ext uri="{FF2B5EF4-FFF2-40B4-BE49-F238E27FC236}">
+                <a16:creationId xmlns:a16="http://schemas.microsoft.com/office/drawing/2014/main" id="{4B582382-76AA-B49E-C611-39A37CE591B9}"/>
+              </a:ext>
+            </a:extLst>
+          </p:cNvPr>
+          <p:cNvSpPr/>
+          <p:nvPr/>
+        </p:nvSpPr>
+        <p:spPr>
+          <a:xfrm>
+            <a:off x="7506336" y="4925186"/>
+            <a:ext cx="4550222" cy="869505"/>
+          </a:xfrm>
+          <a:prstGeom prst="rect">
+            <a:avLst/>
+          </a:prstGeom>
+          <a:solidFill>
+            <a:srgbClr val="C00000"/>
+          </a:solidFill>
+          <a:ln>
+            <a:noFill/>
+          </a:ln>
+        </p:spPr>
+        <p:txBody>
+          <a:bodyPr spcFirstLastPara="1" wrap="square" lIns="91425" tIns="45700" rIns="91425" bIns="45700" anchor="ctr" anchorCtr="0">
+            <a:noAutofit/>
+          </a:bodyPr>
+          <a:lstStyle/>
+          <a:p>
+            <a:pPr marL="0" marR="0" lvl="0" indent="0" algn="ctr" rtl="0">
+              <a:lnSpc>
+                <a:spcPct val="100000"/>
+              </a:lnSpc>
+              <a:spcBef>
+                <a:spcPts val="0"/>
+              </a:spcBef>
+              <a:spcAft>
+                <a:spcPts val="0"/>
+              </a:spcAft>
+              <a:buClr>
+                <a:srgbClr val="000000"/>
+              </a:buClr>
+              <a:buSzPts val="1600"/>
+              <a:buFont typeface="Arial"/>
+              <a:buNone/>
+            </a:pPr>
+            <a:r>
+              <a:rPr lang="en-US" sz="4800" dirty="0">
+                <a:solidFill>
+                  <a:schemeClr val="lt1"/>
+                </a:solidFill>
+              </a:rPr>
+              <a:t>Philip Haney</a:t>
+            </a:r>
+            <a:endParaRPr sz="3200" b="0" i="0" u="none" strike="noStrike" cap="none" dirty="0">
+              <a:solidFill>
+                <a:srgbClr val="000000"/>
+              </a:solidFill>
+              <a:latin typeface="Arial"/>
+              <a:ea typeface="Arial"/>
+              <a:cs typeface="Arial"/>
+              <a:sym typeface="Arial"/>
+            </a:endParaRPr>
+          </a:p>
+        </p:txBody>
+      </p:sp>
+      <p:sp>
+        <p:nvSpPr>
+          <p:cNvPr id="8" name="Google Shape;170;p31">
+            <a:extLst>
+              <a:ext uri="{FF2B5EF4-FFF2-40B4-BE49-F238E27FC236}">
+                <a16:creationId xmlns:a16="http://schemas.microsoft.com/office/drawing/2014/main" id="{D328ABDE-E232-3EB7-C3F2-B4BB7B64262F}"/>
+              </a:ext>
+            </a:extLst>
+          </p:cNvPr>
+          <p:cNvSpPr/>
+          <p:nvPr/>
+        </p:nvSpPr>
+        <p:spPr>
+          <a:xfrm>
+            <a:off x="7526107" y="5681420"/>
+            <a:ext cx="4550222" cy="548230"/>
+          </a:xfrm>
+          <a:prstGeom prst="rect">
+            <a:avLst/>
+          </a:prstGeom>
+          <a:solidFill>
+            <a:srgbClr val="C00000"/>
+          </a:solidFill>
+          <a:ln>
+            <a:noFill/>
+          </a:ln>
+        </p:spPr>
+        <p:txBody>
+          <a:bodyPr spcFirstLastPara="1" wrap="square" lIns="91425" tIns="45700" rIns="91425" bIns="45700" anchor="ctr" anchorCtr="0">
+            <a:noAutofit/>
+          </a:bodyPr>
+          <a:lstStyle/>
+          <a:p>
+            <a:pPr marL="0" marR="0" lvl="0" indent="0" algn="ctr" rtl="0">
+              <a:lnSpc>
+                <a:spcPct val="100000"/>
+              </a:lnSpc>
+              <a:spcBef>
+                <a:spcPts val="0"/>
+              </a:spcBef>
+              <a:spcAft>
+                <a:spcPts val="0"/>
+              </a:spcAft>
+              <a:buClr>
+                <a:srgbClr val="000000"/>
+              </a:buClr>
+              <a:buSzPts val="1600"/>
+              <a:buFont typeface="Arial"/>
+              <a:buNone/>
+            </a:pPr>
+            <a:r>
+              <a:rPr lang="en-US" sz="3600" dirty="0">
+                <a:solidFill>
+                  <a:schemeClr val="lt1"/>
+                </a:solidFill>
+              </a:rPr>
+              <a:t>Dead at Age 66</a:t>
+            </a:r>
+            <a:endParaRPr sz="2000" b="0" i="0" u="none" strike="noStrike" cap="none" dirty="0">
+              <a:solidFill>
+                <a:srgbClr val="000000"/>
+              </a:solidFill>
+              <a:latin typeface="Arial"/>
+              <a:ea typeface="Arial"/>
+              <a:cs typeface="Arial"/>
+              <a:sym typeface="Arial"/>
+            </a:endParaRPr>
+          </a:p>
+        </p:txBody>
+      </p:sp>
+      <p:sp>
+        <p:nvSpPr>
+          <p:cNvPr id="10" name="TextBox 9">
+            <a:extLst>
+              <a:ext uri="{FF2B5EF4-FFF2-40B4-BE49-F238E27FC236}">
+                <a16:creationId xmlns:a16="http://schemas.microsoft.com/office/drawing/2014/main" id="{5FA0D8B2-6B55-D3DC-BCBB-6FEAD86B9E72}"/>
+              </a:ext>
+            </a:extLst>
+          </p:cNvPr>
+          <p:cNvSpPr txBox="1"/>
+          <p:nvPr/>
+        </p:nvSpPr>
+        <p:spPr>
+          <a:xfrm>
+            <a:off x="129030" y="1905506"/>
+            <a:ext cx="8367997" cy="3477875"/>
+          </a:xfrm>
+          <a:prstGeom prst="rect">
+            <a:avLst/>
+          </a:prstGeom>
+          <a:solidFill>
+            <a:schemeClr val="bg1">
+              <a:alpha val="84400"/>
+            </a:schemeClr>
+          </a:solidFill>
+        </p:spPr>
+        <p:txBody>
+          <a:bodyPr wrap="square" rtlCol="0">
+            <a:spAutoFit/>
+          </a:bodyPr>
+          <a:lstStyle/>
+          <a:p>
+            <a:pPr marL="285750" indent="-285750">
+              <a:spcBef>
+                <a:spcPts val="1200"/>
+              </a:spcBef>
+              <a:buFont typeface="Arial" panose="020B0604020202020204" pitchFamily="34" charset="0"/>
+              <a:buChar char="•"/>
+            </a:pPr>
+            <a:r>
+              <a:rPr dirty="0"/>
+              <a:t>DHS founding member and terrorism whistleblower — found SHOT DEAD in a California park-and-ride lot at age 66.</a:t>
+            </a:r>
+          </a:p>
+          <a:p>
+            <a:pPr marL="285750" indent="-285750">
+              <a:spcBef>
+                <a:spcPts val="1200"/>
+              </a:spcBef>
+              <a:buFont typeface="Arial" panose="020B0604020202020204" pitchFamily="34" charset="0"/>
+              <a:buChar char="•"/>
+            </a:pPr>
+            <a:r>
+              <a:rPr dirty="0"/>
+              <a:t>Alleged the Obama administration ordered the DELETION of intelligence records that could have PREVENTED the San Bernardino attack.</a:t>
+            </a:r>
+          </a:p>
+          <a:p>
+            <a:pPr marL="285750" indent="-285750">
+              <a:spcBef>
+                <a:spcPts val="1200"/>
+              </a:spcBef>
+              <a:buFont typeface="Arial" panose="020B0604020202020204" pitchFamily="34" charset="0"/>
+              <a:buChar char="•"/>
+            </a:pPr>
+            <a:r>
+              <a:rPr dirty="0"/>
+              <a:t>His family "SERIOUSLY DOUBTS" the suicide ruling. Friends say the devout Christian explicitly said he would NEVER take his own life.</a:t>
+            </a:r>
+          </a:p>
+          <a:p>
+            <a:pPr marL="285750" indent="-285750">
+              <a:spcBef>
+                <a:spcPts val="1200"/>
+              </a:spcBef>
+              <a:buFont typeface="Arial" panose="020B0604020202020204" pitchFamily="34" charset="0"/>
+              <a:buChar char="•"/>
+            </a:pPr>
+            <a:r>
+              <a:rPr dirty="0"/>
+              <a:t>He was ENGAGED to be married and reportedly preparing to reveal ADDITIONAL classified information at the time of his death.</a:t>
+            </a:r>
+          </a:p>
+          <a:p>
+            <a:pPr marL="285750" indent="-285750">
+              <a:spcBef>
+                <a:spcPts val="1200"/>
+              </a:spcBef>
+              <a:buFont typeface="Arial" panose="020B0604020202020204" pitchFamily="34" charset="0"/>
+              <a:buChar char="•"/>
+            </a:pPr>
+            <a:r>
+              <a:rPr dirty="0"/>
+              <a:t>Ruled suicide after a TWO-YEAR investigation — but investigators found a note with passwords, not a suicide note.</a:t>
+            </a:r>
+          </a:p>
+        </p:txBody>
+      </p:sp>
     </p:spTree>
+    <p:extLst>
+      <p:ext uri="{BB962C8B-B14F-4D97-AF65-F5344CB8AC3E}">
+        <p14:creationId xmlns:p14="http://schemas.microsoft.com/office/powerpoint/2010/main" val="962546674"/>
+      </p:ext>
+    </p:extLst>
   </p:cSld>
   <p:clrMapOvr>
     <a:masterClrMapping/>
@@ -8512,7 +9008,7 @@
           <p:cNvPr id="15" name="TextBox 14">
             <a:extLst>
               <a:ext uri="{FF2B5EF4-FFF2-40B4-BE49-F238E27FC236}">
-                <a16:creationId xmlns:a16="http://schemas.microsoft.com/office/drawing/2014/main" id="{E478240E-251B-5BA6-3C45-7E6620400769}"/>
+                <a16:creationId xmlns:a16="http://schemas.microsoft.com/office/drawing/2014/main" id="{EAE3A09D-A6E4-5E4F-16F8-6BAFA5E1CD0A}"/>
               </a:ext>
             </a:extLst>
           </p:cNvPr>
@@ -8521,8 +9017,8 @@
         </p:nvSpPr>
         <p:spPr>
           <a:xfrm>
-            <a:off x="312432" y="1288262"/>
-            <a:ext cx="6494294" cy="584775"/>
+            <a:off x="312431" y="1288262"/>
+            <a:ext cx="6987941" cy="584775"/>
           </a:xfrm>
           <a:prstGeom prst="rect">
             <a:avLst/>
@@ -8545,7 +9041,7 @@
                   <a:schemeClr val="accent5"/>
                 </a:solidFill>
               </a:rPr>
-              <a:t>Why / How they Philip Leonard:</a:t>
+              <a:t>Why / How they Dorothy Kilgallen:</a:t>
             </a:r>
           </a:p>
         </p:txBody>
@@ -8555,7 +9051,7 @@
           <p:cNvPr id="3" name="Google Shape;170;p31">
             <a:extLst>
               <a:ext uri="{FF2B5EF4-FFF2-40B4-BE49-F238E27FC236}">
-                <a16:creationId xmlns:a16="http://schemas.microsoft.com/office/drawing/2014/main" id="{A4695FE5-0AA5-AB05-98B1-B5B8E3FA8CBE}"/>
+                <a16:creationId xmlns:a16="http://schemas.microsoft.com/office/drawing/2014/main" id="{A2CA04A2-27A7-622C-F9FC-36F8F0881ABC}"/>
               </a:ext>
             </a:extLst>
           </p:cNvPr>
@@ -8564,8 +9060,8 @@
         </p:nvSpPr>
         <p:spPr>
           <a:xfrm>
-            <a:off x="191731" y="5732890"/>
-            <a:ext cx="3431270" cy="496760"/>
+            <a:off x="200102" y="5852160"/>
+            <a:ext cx="3431270" cy="494488"/>
           </a:xfrm>
           <a:prstGeom prst="rect">
             <a:avLst/>
@@ -8625,7 +9121,7 @@
           <p:cNvPr id="5" name="Google Shape;170;p31">
             <a:extLst>
               <a:ext uri="{FF2B5EF4-FFF2-40B4-BE49-F238E27FC236}">
-                <a16:creationId xmlns:a16="http://schemas.microsoft.com/office/drawing/2014/main" id="{98132413-6ED2-8B36-74B6-3C503B1A4634}"/>
+                <a16:creationId xmlns:a16="http://schemas.microsoft.com/office/drawing/2014/main" id="{7C736A6F-204D-9BB8-EAA6-837DBF5D4DEB}"/>
               </a:ext>
             </a:extLst>
           </p:cNvPr>
@@ -8653,22 +9149,11 @@
           </a:bodyPr>
           <a:lstStyle/>
           <a:p>
-            <a:pPr marL="0" marR="0" lvl="0" indent="0" rtl="0">
-              <a:lnSpc>
-                <a:spcPct val="100000"/>
-              </a:lnSpc>
-              <a:spcBef>
-                <a:spcPts val="0"/>
-              </a:spcBef>
-              <a:spcAft>
-                <a:spcPts val="0"/>
-              </a:spcAft>
+            <a:pPr lvl="0">
               <a:buClr>
                 <a:srgbClr val="000000"/>
               </a:buClr>
               <a:buSzPts val="1600"/>
-              <a:buFont typeface="Arial"/>
-              <a:buNone/>
             </a:pPr>
             <a:r>
               <a:rPr lang="en-US" sz="4800" dirty="0">
@@ -8678,7 +9163,7 @@
               </a:rPr>
               <a:t> 150+ Murdered: by Intelligence Services</a:t>
             </a:r>
-            <a:endParaRPr sz="3200" b="0" i="0" u="none" strike="noStrike" cap="none" dirty="0">
+            <a:endParaRPr lang="en-US" sz="3200" dirty="0">
               <a:solidFill>
                 <a:srgbClr val="000000"/>
               </a:solidFill>
@@ -8695,7 +9180,7 @@
           <p:cNvPr id="4" name="TextBox 3">
             <a:extLst>
               <a:ext uri="{FF2B5EF4-FFF2-40B4-BE49-F238E27FC236}">
-                <a16:creationId xmlns:a16="http://schemas.microsoft.com/office/drawing/2014/main" id="{50D7621F-9D36-7894-7117-9F831EF5EFA6}"/>
+                <a16:creationId xmlns:a16="http://schemas.microsoft.com/office/drawing/2014/main" id="{14D41900-3932-F065-0A2B-6D119791E2A1}"/>
               </a:ext>
             </a:extLst>
           </p:cNvPr>
@@ -8704,7 +9189,7 @@
         </p:nvSpPr>
         <p:spPr>
           <a:xfrm>
-            <a:off x="107300" y="6229650"/>
+            <a:off x="115671" y="6346648"/>
             <a:ext cx="11685989" cy="461665"/>
           </a:xfrm>
           <a:prstGeom prst="rect">
@@ -8731,10 +9216,10 @@
       </p:sp>
       <p:sp>
         <p:nvSpPr>
-          <p:cNvPr id="7" name="Google Shape;170;p31">
-            <a:extLst>
-              <a:ext uri="{FF2B5EF4-FFF2-40B4-BE49-F238E27FC236}">
-                <a16:creationId xmlns:a16="http://schemas.microsoft.com/office/drawing/2014/main" id="{4B582382-76AA-B49E-C611-39A37CE591B9}"/>
+          <p:cNvPr id="8" name="Google Shape;170;p31">
+            <a:extLst>
+              <a:ext uri="{FF2B5EF4-FFF2-40B4-BE49-F238E27FC236}">
+                <a16:creationId xmlns:a16="http://schemas.microsoft.com/office/drawing/2014/main" id="{B069CCDF-FA80-D75C-7412-189D5C3D3A16}"/>
               </a:ext>
             </a:extLst>
           </p:cNvPr>
@@ -8743,8 +9228,8 @@
         </p:nvSpPr>
         <p:spPr>
           <a:xfrm>
-            <a:off x="7506336" y="4925186"/>
-            <a:ext cx="4550222" cy="869505"/>
+            <a:off x="7526107" y="5681420"/>
+            <a:ext cx="4550222" cy="548230"/>
           </a:xfrm>
           <a:prstGeom prst="rect">
             <a:avLst/>
@@ -8780,14 +9265,14 @@
               <a:buNone/>
             </a:pPr>
             <a:r>
-              <a:rPr lang="en-US" sz="4800" dirty="0">
+              <a:rPr lang="en-US" sz="3600" dirty="0">
                 <a:solidFill>
                   <a:schemeClr val="lt1"/>
                 </a:solidFill>
               </a:rPr>
-              <a:t>Philip Leonard</a:t>
-            </a:r>
-            <a:endParaRPr sz="3200" b="0" i="0" u="none" strike="noStrike" cap="none" dirty="0">
+              <a:t>Dead at Age 52</a:t>
+            </a:r>
+            <a:endParaRPr sz="2000" b="0" i="0" u="none" strike="noStrike" cap="none" dirty="0">
               <a:solidFill>
                 <a:srgbClr val="000000"/>
               </a:solidFill>
@@ -8801,80 +9286,10 @@
       </p:sp>
       <p:sp>
         <p:nvSpPr>
-          <p:cNvPr id="8" name="Google Shape;170;p31">
-            <a:extLst>
-              <a:ext uri="{FF2B5EF4-FFF2-40B4-BE49-F238E27FC236}">
-                <a16:creationId xmlns:a16="http://schemas.microsoft.com/office/drawing/2014/main" id="{D328ABDE-E232-3EB7-C3F2-B4BB7B64262F}"/>
-              </a:ext>
-            </a:extLst>
-          </p:cNvPr>
-          <p:cNvSpPr/>
-          <p:nvPr/>
-        </p:nvSpPr>
-        <p:spPr>
-          <a:xfrm>
-            <a:off x="7526107" y="5681420"/>
-            <a:ext cx="4550222" cy="548230"/>
-          </a:xfrm>
-          <a:prstGeom prst="rect">
-            <a:avLst/>
-          </a:prstGeom>
-          <a:solidFill>
-            <a:srgbClr val="C00000"/>
-          </a:solidFill>
-          <a:ln>
-            <a:noFill/>
-          </a:ln>
-        </p:spPr>
-        <p:txBody>
-          <a:bodyPr spcFirstLastPara="1" wrap="square" lIns="91425" tIns="45700" rIns="91425" bIns="45700" anchor="ctr" anchorCtr="0">
-            <a:noAutofit/>
-          </a:bodyPr>
-          <a:lstStyle/>
-          <a:p>
-            <a:pPr marL="0" marR="0" lvl="0" indent="0" algn="ctr" rtl="0">
-              <a:lnSpc>
-                <a:spcPct val="100000"/>
-              </a:lnSpc>
-              <a:spcBef>
-                <a:spcPts val="0"/>
-              </a:spcBef>
-              <a:spcAft>
-                <a:spcPts val="0"/>
-              </a:spcAft>
-              <a:buClr>
-                <a:srgbClr val="000000"/>
-              </a:buClr>
-              <a:buSzPts val="1600"/>
-              <a:buFont typeface="Arial"/>
-              <a:buNone/>
-            </a:pPr>
-            <a:r>
-              <a:rPr lang="en-US" sz="3600" dirty="0">
-                <a:solidFill>
-                  <a:schemeClr val="lt1"/>
-                </a:solidFill>
-              </a:rPr>
-              <a:t>Dead at Age 44</a:t>
-            </a:r>
-            <a:endParaRPr sz="2000" b="0" i="0" u="none" strike="noStrike" cap="none" dirty="0">
-              <a:solidFill>
-                <a:srgbClr val="000000"/>
-              </a:solidFill>
-              <a:latin typeface="Arial"/>
-              <a:ea typeface="Arial"/>
-              <a:cs typeface="Arial"/>
-              <a:sym typeface="Arial"/>
-            </a:endParaRPr>
-          </a:p>
-        </p:txBody>
-      </p:sp>
-      <p:sp>
-        <p:nvSpPr>
           <p:cNvPr id="10" name="TextBox 9">
             <a:extLst>
               <a:ext uri="{FF2B5EF4-FFF2-40B4-BE49-F238E27FC236}">
-                <a16:creationId xmlns:a16="http://schemas.microsoft.com/office/drawing/2014/main" id="{5FA0D8B2-6B55-D3DC-BCBB-6FEAD86B9E72}"/>
+                <a16:creationId xmlns:a16="http://schemas.microsoft.com/office/drawing/2014/main" id="{ABFEA484-AE6A-906E-D59E-C3F7E9DDD90C}"/>
               </a:ext>
             </a:extLst>
           </p:cNvPr>
@@ -8883,8 +9298,8 @@
         </p:nvSpPr>
         <p:spPr>
           <a:xfrm>
-            <a:off x="191731" y="1937976"/>
-            <a:ext cx="7648046" cy="3754874"/>
+            <a:off x="208343" y="1805721"/>
+            <a:ext cx="7816976" cy="4031873"/>
           </a:xfrm>
           <a:prstGeom prst="rect">
             <a:avLst/>
@@ -8910,7 +9325,7 @@
             </a:pPr>
             <a:r>
               <a:rPr dirty="0"/>
-              <a:t>Los Alamos nuclear weapons lab HIGH-EXPLOSIVES chemist — killed at age 44 in a head-on collision on the road TO the lab.</a:t>
+              <a:t>America's most famous journalist — syndicated to 20 MILLION readers. Found dead of a barbiturate overdose at age 52. Ruled "circumstances undetermined."</a:t>
             </a:r>
           </a:p>
           <a:p>
@@ -8923,7 +9338,7 @@
             </a:pPr>
             <a:r>
               <a:rPr dirty="0"/>
-              <a:t>Another driver crossed the DOUBLE YELLOW LINE into his lane. No public explanation for WHY has ever been released.</a:t>
+              <a:t>She was investigating the JFK ASSASSINATION and told friends she was about to "BREAK THE CASE WIDE OPEN."</a:t>
             </a:r>
           </a:p>
           <a:p>
@@ -8936,7 +9351,7 @@
             </a:pPr>
             <a:r>
               <a:rPr dirty="0"/>
-              <a:t>His specialty was the most CLASSIFIED research at LANL — explosive compounds used in nuclear WARHEAD design.</a:t>
+              <a:t>She secured the ONLY private interview with Jack Ruby — the man who killed the man accused of killing the President.</a:t>
             </a:r>
           </a:p>
           <a:p>
@@ -8949,7 +9364,7 @@
             </a:pPr>
             <a:r>
               <a:rPr dirty="0"/>
-              <a:t>His death came at the START of a cluster of defense scientist deaths in the New Mexico corridor throughout 2024-2025.</a:t>
+              <a:t>Her INVESTIGATION FILE — described as a thick folder of documents — VANISHED after her death and has NEVER been found.</a:t>
             </a:r>
           </a:p>
           <a:p>
@@ -8962,14 +9377,104 @@
             </a:pPr>
             <a:r>
               <a:rPr dirty="0"/>
-              <a:t>A SECOND defense scientist in the same New Mexico corridor was MURDERED just weeks later — Christopher Fallen of the Air Force Research Lab.</a:t>
-            </a:r>
+              <a:t>Found in a room that WASN'T her bedroom, fully dressed and made up — inconsistent with her known habits. No real investigation was ever conducted.</a:t>
+            </a:r>
+          </a:p>
+        </p:txBody>
+      </p:sp>
+      <p:sp>
+        <p:nvSpPr>
+          <p:cNvPr id="6" name="AutoShape 2" descr="Fundraiser for Sky Roberts by Annie Farmer : Help Virginia Roberts  Giuffre's Family Carry On Her Legacy">
+            <a:extLst>
+              <a:ext uri="{FF2B5EF4-FFF2-40B4-BE49-F238E27FC236}">
+                <a16:creationId xmlns:a16="http://schemas.microsoft.com/office/drawing/2014/main" id="{77876416-18B8-24A2-30FD-8E520F869817}"/>
+              </a:ext>
+            </a:extLst>
+          </p:cNvPr>
+          <p:cNvSpPr>
+            <a:spLocks noChangeAspect="1" noChangeArrowheads="1"/>
+          </p:cNvSpPr>
+          <p:nvPr/>
+        </p:nvSpPr>
+        <p:spPr bwMode="auto">
+          <a:xfrm>
+            <a:off x="5943600" y="3276600"/>
+            <a:ext cx="304800" cy="304800"/>
+          </a:xfrm>
+          <a:prstGeom prst="rect">
+            <a:avLst/>
+          </a:prstGeom>
+          <a:noFill/>
+          <a:extLst>
+            <a:ext uri="{909E8E84-426E-40DD-AFC4-6F175D3DCCD1}">
+              <a14:hiddenFill xmlns:a14="http://schemas.microsoft.com/office/drawing/2010/main">
+                <a:solidFill>
+                  <a:srgbClr val="FFFFFF"/>
+                </a:solidFill>
+              </a14:hiddenFill>
+            </a:ext>
+          </a:extLst>
+        </p:spPr>
+        <p:txBody>
+          <a:bodyPr vert="horz" wrap="square" lIns="91440" tIns="45720" rIns="91440" bIns="45720" numCol="1" anchor="t" anchorCtr="0" compatLnSpc="1">
+            <a:prstTxWarp prst="textNoShape">
+              <a:avLst/>
+            </a:prstTxWarp>
+          </a:bodyPr>
+          <a:lstStyle/>
+          <a:p>
+            <a:endParaRPr lang="en-US"/>
+          </a:p>
+        </p:txBody>
+      </p:sp>
+      <p:sp>
+        <p:nvSpPr>
+          <p:cNvPr id="11" name="AutoShape 4" descr="Fundraiser for Sky Roberts by Annie Farmer : Help Virginia Roberts  Giuffre's Family Carry On Her Legacy">
+            <a:extLst>
+              <a:ext uri="{FF2B5EF4-FFF2-40B4-BE49-F238E27FC236}">
+                <a16:creationId xmlns:a16="http://schemas.microsoft.com/office/drawing/2014/main" id="{414B4E2B-C54A-135F-B3A8-DA7C31104A94}"/>
+              </a:ext>
+            </a:extLst>
+          </p:cNvPr>
+          <p:cNvSpPr>
+            <a:spLocks noChangeAspect="1" noChangeArrowheads="1"/>
+          </p:cNvSpPr>
+          <p:nvPr/>
+        </p:nvSpPr>
+        <p:spPr bwMode="auto">
+          <a:xfrm>
+            <a:off x="6096000" y="3429000"/>
+            <a:ext cx="304800" cy="304800"/>
+          </a:xfrm>
+          <a:prstGeom prst="rect">
+            <a:avLst/>
+          </a:prstGeom>
+          <a:noFill/>
+          <a:extLst>
+            <a:ext uri="{909E8E84-426E-40DD-AFC4-6F175D3DCCD1}">
+              <a14:hiddenFill xmlns:a14="http://schemas.microsoft.com/office/drawing/2010/main">
+                <a:solidFill>
+                  <a:srgbClr val="FFFFFF"/>
+                </a:solidFill>
+              </a14:hiddenFill>
+            </a:ext>
+          </a:extLst>
+        </p:spPr>
+        <p:txBody>
+          <a:bodyPr vert="horz" wrap="square" lIns="91440" tIns="45720" rIns="91440" bIns="45720" numCol="1" anchor="t" anchorCtr="0" compatLnSpc="1">
+            <a:prstTxWarp prst="textNoShape">
+              <a:avLst/>
+            </a:prstTxWarp>
+          </a:bodyPr>
+          <a:lstStyle/>
+          <a:p>
+            <a:endParaRPr lang="en-US"/>
           </a:p>
         </p:txBody>
       </p:sp>
       <p:pic>
         <p:nvPicPr>
-          <p:cNvPr id="16" name="Picture 15" descr="Philip_Leonard.jpg"/>
+          <p:cNvPr id="16" name="Picture 15" descr="Dorothy_Kilgallen.jpg"/>
           <p:cNvPicPr>
             <a:picLocks noChangeAspect="1"/>
           </p:cNvPicPr>
@@ -8983,20 +9488,85 @@
         </p:blipFill>
         <p:spPr>
           <a:xfrm>
-            <a:off x="9309676" y="1070199"/>
-            <a:ext cx="2746882" cy="3884876"/>
+            <a:off x="8144168" y="1084146"/>
+            <a:ext cx="3882867" cy="3856982"/>
           </a:xfrm>
           <a:prstGeom prst="rect">
             <a:avLst/>
           </a:prstGeom>
         </p:spPr>
       </p:pic>
+      <p:sp>
+        <p:nvSpPr>
+          <p:cNvPr id="7" name="Google Shape;170;p31">
+            <a:extLst>
+              <a:ext uri="{FF2B5EF4-FFF2-40B4-BE49-F238E27FC236}">
+                <a16:creationId xmlns:a16="http://schemas.microsoft.com/office/drawing/2014/main" id="{A2DF07F5-EEA0-8A2E-7E11-3E1CC4C2B695}"/>
+              </a:ext>
+            </a:extLst>
+          </p:cNvPr>
+          <p:cNvSpPr/>
+          <p:nvPr/>
+        </p:nvSpPr>
+        <p:spPr>
+          <a:xfrm>
+            <a:off x="7506336" y="4925186"/>
+            <a:ext cx="4550222" cy="869505"/>
+          </a:xfrm>
+          <a:prstGeom prst="rect">
+            <a:avLst/>
+          </a:prstGeom>
+          <a:solidFill>
+            <a:srgbClr val="C00000"/>
+          </a:solidFill>
+          <a:ln>
+            <a:noFill/>
+          </a:ln>
+        </p:spPr>
+        <p:txBody>
+          <a:bodyPr spcFirstLastPara="1" wrap="square" lIns="91425" tIns="45700" rIns="91425" bIns="45700" anchor="ctr" anchorCtr="0">
+            <a:noAutofit/>
+          </a:bodyPr>
+          <a:lstStyle/>
+          <a:p>
+            <a:pPr marL="0" marR="0" lvl="0" indent="0" algn="ctr" rtl="0">
+              <a:lnSpc>
+                <a:spcPct val="100000"/>
+              </a:lnSpc>
+              <a:spcBef>
+                <a:spcPts val="0"/>
+              </a:spcBef>
+              <a:spcAft>
+                <a:spcPts val="0"/>
+              </a:spcAft>
+              <a:buClr>
+                <a:srgbClr val="000000"/>
+              </a:buClr>
+              <a:buSzPts val="1600"/>
+              <a:buFont typeface="Arial"/>
+              <a:buNone/>
+            </a:pPr>
+            <a:r>
+              <a:rPr lang="en-US" sz="4400" dirty="0">
+                <a:solidFill>
+                  <a:schemeClr val="lt1"/>
+                </a:solidFill>
+              </a:rPr>
+              <a:t>Dorothy Kilgallen</a:t>
+            </a:r>
+            <a:endParaRPr sz="2800" b="0" i="0" u="none" strike="noStrike" cap="none" dirty="0">
+              <a:solidFill>
+                <a:srgbClr val="000000"/>
+              </a:solidFill>
+              <a:latin typeface="Arial"/>
+              <a:ea typeface="Arial"/>
+              <a:cs typeface="Arial"/>
+              <a:sym typeface="Arial"/>
+            </a:endParaRPr>
+          </a:p>
+        </p:txBody>
+      </p:sp>
     </p:spTree>
-    <p:extLst>
-      <p:ext uri="{BB962C8B-B14F-4D97-AF65-F5344CB8AC3E}">
-        <p14:creationId xmlns:p14="http://schemas.microsoft.com/office/powerpoint/2010/main" val="917079305"/>
-      </p:ext>
-    </p:extLst>
   </p:cSld>
   <p:clrMapOvr>
     <a:masterClrMapping/>
@@ -9059,7 +9629,7 @@
                   <a:schemeClr val="accent5"/>
                 </a:solidFill>
               </a:rPr>
-              <a:t>Why / How they Alfred Herrhausen:</a:t>
+              <a:t>Why / How they Philip Leonard:</a:t>
             </a:r>
           </a:p>
         </p:txBody>
@@ -9299,7 +9869,7 @@
                   <a:schemeClr val="lt1"/>
                 </a:solidFill>
               </a:rPr>
-              <a:t>Alfred Herrhausen</a:t>
+              <a:t>Philip Leonard</a:t>
             </a:r>
             <a:endParaRPr sz="3200" b="0" i="0" u="none" strike="noStrike" cap="none" dirty="0">
               <a:solidFill>
@@ -9369,7 +9939,7 @@
                   <a:schemeClr val="lt1"/>
                 </a:solidFill>
               </a:rPr>
-              <a:t>Dead at Age 59</a:t>
+              <a:t>Dead at Age 44</a:t>
             </a:r>
             <a:endParaRPr sz="2000" b="0" i="0" u="none" strike="noStrike" cap="none" dirty="0">
               <a:solidFill>
@@ -9397,8 +9967,8 @@
         </p:nvSpPr>
         <p:spPr>
           <a:xfrm>
-            <a:off x="312431" y="2175372"/>
-            <a:ext cx="6987941" cy="3046988"/>
+            <a:off x="191731" y="1937976"/>
+            <a:ext cx="7648046" cy="3754874"/>
           </a:xfrm>
           <a:prstGeom prst="rect">
             <a:avLst/>
@@ -9423,7 +9993,8 @@
               <a:buChar char="•"/>
             </a:pPr>
             <a:r>
-              <a:t>Chairman of Deutsche Bank killed by a MILITARY-GRADE bomb hidden in a child's knapsack on a bicycle.</a:t>
+              <a:rPr dirty="0"/>
+              <a:t>Los Alamos nuclear weapons lab HIGH-EXPLOSIVES chemist — killed at age 44 in a head-on collision on the road TO the lab.</a:t>
             </a:r>
           </a:p>
           <a:p>
@@ -9435,7 +10006,8 @@
               <a:buChar char="•"/>
             </a:pPr>
             <a:r>
-              <a:t>Killed 21 DAYS after the Berlin Wall fell. Was scheduled to present his reunification plan the NEXT DAY.</a:t>
+              <a:rPr dirty="0"/>
+              <a:t>Another driver crossed the DOUBLE YELLOW LINE into his lane. No public explanation for WHY has ever been released.</a:t>
             </a:r>
           </a:p>
           <a:p>
@@ -9447,7 +10019,8 @@
               <a:buChar char="•"/>
             </a:pPr>
             <a:r>
-              <a:t>The bomb used an INFRARED TRIGGER that distinguished his armored car from the lead vehicle — military precision.</a:t>
+              <a:rPr dirty="0"/>
+              <a:t>His specialty was the most CLASSIFIED research at LANL — explosive compounds used in nuclear WARHEAD design.</a:t>
             </a:r>
           </a:p>
           <a:p>
@@ -9459,7 +10032,8 @@
               <a:buChar char="•"/>
             </a:pPr>
             <a:r>
-              <a:t>He said weeks before: "I know there is a group of people who have an INTEREST in my death."</a:t>
+              <a:rPr dirty="0"/>
+              <a:t>His death came at the START of a cluster of defense scientist deaths in the New Mexico corridor throughout 2024-2025.</a:t>
             </a:r>
           </a:p>
           <a:p>
@@ -9471,14 +10045,15 @@
               <a:buChar char="•"/>
             </a:pPr>
             <a:r>
-              <a:t>Case remains COMPLETELY UNSOLVED — no arrests, no trial, no accountability after 35+ years.</a:t>
+              <a:rPr dirty="0"/>
+              <a:t>A SECOND defense scientist in the same New Mexico corridor was MURDERED just weeks later — Christopher Fallen of the Air Force Research Lab.</a:t>
             </a:r>
           </a:p>
         </p:txBody>
       </p:sp>
       <p:pic>
         <p:nvPicPr>
-          <p:cNvPr id="16" name="Picture 15" descr="Alfred_Herrhausen.jpg"/>
+          <p:cNvPr id="16" name="Picture 15" descr="Philip_Leonard.jpg"/>
           <p:cNvPicPr>
             <a:picLocks noChangeAspect="1"/>
           </p:cNvPicPr>
@@ -9492,8 +10067,8 @@
         </p:blipFill>
         <p:spPr>
           <a:xfrm>
-            <a:off x="8339550" y="1100088"/>
-            <a:ext cx="2602866" cy="3884876"/>
+            <a:off x="9309676" y="1070199"/>
+            <a:ext cx="2746882" cy="3884876"/>
           </a:xfrm>
           <a:prstGeom prst="rect">
             <a:avLst/>
@@ -9501,6 +10076,11 @@
         </p:spPr>
       </p:pic>
     </p:spTree>
+    <p:extLst>
+      <p:ext uri="{BB962C8B-B14F-4D97-AF65-F5344CB8AC3E}">
+        <p14:creationId xmlns:p14="http://schemas.microsoft.com/office/powerpoint/2010/main" val="917079305"/>
+      </p:ext>
+    </p:extLst>
   </p:cSld>
   <p:clrMapOvr>
     <a:masterClrMapping/>
@@ -9525,9 +10105,464 @@
           <a:chExt cx="0" cy="0"/>
         </a:xfrm>
       </p:grpSpPr>
+      <p:sp>
+        <p:nvSpPr>
+          <p:cNvPr id="15" name="TextBox 14">
+            <a:extLst>
+              <a:ext uri="{FF2B5EF4-FFF2-40B4-BE49-F238E27FC236}">
+                <a16:creationId xmlns:a16="http://schemas.microsoft.com/office/drawing/2014/main" id="{E478240E-251B-5BA6-3C45-7E6620400769}"/>
+              </a:ext>
+            </a:extLst>
+          </p:cNvPr>
+          <p:cNvSpPr txBox="1"/>
+          <p:nvPr/>
+        </p:nvSpPr>
+        <p:spPr>
+          <a:xfrm>
+            <a:off x="312432" y="1288262"/>
+            <a:ext cx="6494294" cy="584775"/>
+          </a:xfrm>
+          <a:prstGeom prst="rect">
+            <a:avLst/>
+          </a:prstGeom>
+          <a:solidFill>
+            <a:schemeClr val="bg1">
+              <a:alpha val="84400"/>
+            </a:schemeClr>
+          </a:solidFill>
+        </p:spPr>
+        <p:txBody>
+          <a:bodyPr wrap="square" rtlCol="0">
+            <a:spAutoFit/>
+          </a:bodyPr>
+          <a:lstStyle/>
+          <a:p>
+            <a:r>
+              <a:rPr lang="en-US" sz="3200" b="1" dirty="0">
+                <a:solidFill>
+                  <a:schemeClr val="accent5"/>
+                </a:solidFill>
+              </a:rPr>
+              <a:t>Why / How they Alfred Herrhausen:</a:t>
+            </a:r>
+          </a:p>
+        </p:txBody>
+      </p:sp>
+      <p:sp>
+        <p:nvSpPr>
+          <p:cNvPr id="3" name="Google Shape;170;p31">
+            <a:extLst>
+              <a:ext uri="{FF2B5EF4-FFF2-40B4-BE49-F238E27FC236}">
+                <a16:creationId xmlns:a16="http://schemas.microsoft.com/office/drawing/2014/main" id="{A4695FE5-0AA5-AB05-98B1-B5B8E3FA8CBE}"/>
+              </a:ext>
+            </a:extLst>
+          </p:cNvPr>
+          <p:cNvSpPr/>
+          <p:nvPr/>
+        </p:nvSpPr>
+        <p:spPr>
+          <a:xfrm>
+            <a:off x="191731" y="5732890"/>
+            <a:ext cx="3431270" cy="496760"/>
+          </a:xfrm>
+          <a:prstGeom prst="rect">
+            <a:avLst/>
+          </a:prstGeom>
+          <a:solidFill>
+            <a:schemeClr val="accent5"/>
+          </a:solidFill>
+          <a:ln>
+            <a:noFill/>
+          </a:ln>
+        </p:spPr>
+        <p:txBody>
+          <a:bodyPr spcFirstLastPara="1" wrap="square" lIns="91425" tIns="45700" rIns="91425" bIns="45700" anchor="ctr" anchorCtr="0">
+            <a:noAutofit/>
+          </a:bodyPr>
+          <a:lstStyle/>
+          <a:p>
+            <a:pPr marL="0" marR="0" lvl="0" indent="0" algn="ctr" rtl="0">
+              <a:lnSpc>
+                <a:spcPct val="100000"/>
+              </a:lnSpc>
+              <a:spcBef>
+                <a:spcPts val="0"/>
+              </a:spcBef>
+              <a:spcAft>
+                <a:spcPts val="0"/>
+              </a:spcAft>
+              <a:buClr>
+                <a:srgbClr val="000000"/>
+              </a:buClr>
+              <a:buSzPts val="1600"/>
+              <a:buFont typeface="Arial"/>
+              <a:buNone/>
+            </a:pPr>
+            <a:r>
+              <a:rPr lang="en-US" sz="3600" dirty="0">
+                <a:solidFill>
+                  <a:schemeClr val="lt1"/>
+                </a:solidFill>
+              </a:rPr>
+              <a:t>Read List Here:</a:t>
+            </a:r>
+            <a:endParaRPr sz="2000" b="0" i="0" u="none" strike="noStrike" cap="none" dirty="0">
+              <a:solidFill>
+                <a:srgbClr val="000000"/>
+              </a:solidFill>
+              <a:latin typeface="Arial"/>
+              <a:ea typeface="Arial"/>
+              <a:cs typeface="Arial"/>
+              <a:sym typeface="Arial"/>
+            </a:endParaRPr>
+          </a:p>
+        </p:txBody>
+      </p:sp>
+      <p:sp>
+        <p:nvSpPr>
+          <p:cNvPr id="5" name="Google Shape;170;p31">
+            <a:extLst>
+              <a:ext uri="{FF2B5EF4-FFF2-40B4-BE49-F238E27FC236}">
+                <a16:creationId xmlns:a16="http://schemas.microsoft.com/office/drawing/2014/main" id="{98132413-6ED2-8B36-74B6-3C503B1A4634}"/>
+              </a:ext>
+            </a:extLst>
+          </p:cNvPr>
+          <p:cNvSpPr/>
+          <p:nvPr/>
+        </p:nvSpPr>
+        <p:spPr>
+          <a:xfrm>
+            <a:off x="0" y="-31518"/>
+            <a:ext cx="12192000" cy="1131606"/>
+          </a:xfrm>
+          <a:prstGeom prst="rect">
+            <a:avLst/>
+          </a:prstGeom>
+          <a:solidFill>
+            <a:srgbClr val="C00000"/>
+          </a:solidFill>
+          <a:ln>
+            <a:noFill/>
+          </a:ln>
+        </p:spPr>
+        <p:txBody>
+          <a:bodyPr spcFirstLastPara="1" wrap="square" lIns="91425" tIns="45700" rIns="91425" bIns="45700" anchor="ctr" anchorCtr="0">
+            <a:noAutofit/>
+          </a:bodyPr>
+          <a:lstStyle/>
+          <a:p>
+            <a:pPr marL="0" marR="0" lvl="0" indent="0" rtl="0">
+              <a:lnSpc>
+                <a:spcPct val="100000"/>
+              </a:lnSpc>
+              <a:spcBef>
+                <a:spcPts val="0"/>
+              </a:spcBef>
+              <a:spcAft>
+                <a:spcPts val="0"/>
+              </a:spcAft>
+              <a:buClr>
+                <a:srgbClr val="000000"/>
+              </a:buClr>
+              <a:buSzPts val="1600"/>
+              <a:buFont typeface="Arial"/>
+              <a:buNone/>
+            </a:pPr>
+            <a:r>
+              <a:rPr lang="en-US" sz="4800" dirty="0">
+                <a:solidFill>
+                  <a:schemeClr val="lt1"/>
+                </a:solidFill>
+              </a:rPr>
+              <a:t> 150+ Murdered: by Intelligence Services</a:t>
+            </a:r>
+            <a:endParaRPr sz="3200" b="0" i="0" u="none" strike="noStrike" cap="none" dirty="0">
+              <a:solidFill>
+                <a:srgbClr val="000000"/>
+              </a:solidFill>
+              <a:latin typeface="Arial"/>
+              <a:ea typeface="Arial"/>
+              <a:cs typeface="Arial"/>
+              <a:sym typeface="Arial"/>
+            </a:endParaRPr>
+          </a:p>
+        </p:txBody>
+      </p:sp>
+      <p:sp>
+        <p:nvSpPr>
+          <p:cNvPr id="4" name="TextBox 3">
+            <a:extLst>
+              <a:ext uri="{FF2B5EF4-FFF2-40B4-BE49-F238E27FC236}">
+                <a16:creationId xmlns:a16="http://schemas.microsoft.com/office/drawing/2014/main" id="{50D7621F-9D36-7894-7117-9F831EF5EFA6}"/>
+              </a:ext>
+            </a:extLst>
+          </p:cNvPr>
+          <p:cNvSpPr txBox="1"/>
+          <p:nvPr/>
+        </p:nvSpPr>
+        <p:spPr>
+          <a:xfrm>
+            <a:off x="107300" y="6229650"/>
+            <a:ext cx="11685989" cy="461665"/>
+          </a:xfrm>
+          <a:prstGeom prst="rect">
+            <a:avLst/>
+          </a:prstGeom>
+          <a:solidFill>
+            <a:schemeClr val="bg1">
+              <a:alpha val="84400"/>
+            </a:schemeClr>
+          </a:solidFill>
+        </p:spPr>
+        <p:txBody>
+          <a:bodyPr wrap="square" rtlCol="0">
+            <a:spAutoFit/>
+          </a:bodyPr>
+          <a:lstStyle/>
+          <a:p>
+            <a:r>
+              <a:rPr lang="en-US" sz="2400" dirty="0"/>
+              <a:t>https://intelligencemurders.com/intel</a:t>
+            </a:r>
+          </a:p>
+        </p:txBody>
+      </p:sp>
+      <p:sp>
+        <p:nvSpPr>
+          <p:cNvPr id="7" name="Google Shape;170;p31">
+            <a:extLst>
+              <a:ext uri="{FF2B5EF4-FFF2-40B4-BE49-F238E27FC236}">
+                <a16:creationId xmlns:a16="http://schemas.microsoft.com/office/drawing/2014/main" id="{4B582382-76AA-B49E-C611-39A37CE591B9}"/>
+              </a:ext>
+            </a:extLst>
+          </p:cNvPr>
+          <p:cNvSpPr/>
+          <p:nvPr/>
+        </p:nvSpPr>
+        <p:spPr>
+          <a:xfrm>
+            <a:off x="7506336" y="4925186"/>
+            <a:ext cx="4550222" cy="869505"/>
+          </a:xfrm>
+          <a:prstGeom prst="rect">
+            <a:avLst/>
+          </a:prstGeom>
+          <a:solidFill>
+            <a:srgbClr val="C00000"/>
+          </a:solidFill>
+          <a:ln>
+            <a:noFill/>
+          </a:ln>
+        </p:spPr>
+        <p:txBody>
+          <a:bodyPr spcFirstLastPara="1" wrap="square" lIns="91425" tIns="45700" rIns="91425" bIns="45700" anchor="ctr" anchorCtr="0">
+            <a:noAutofit/>
+          </a:bodyPr>
+          <a:lstStyle/>
+          <a:p>
+            <a:pPr marL="0" marR="0" lvl="0" indent="0" algn="ctr" rtl="0">
+              <a:lnSpc>
+                <a:spcPct val="100000"/>
+              </a:lnSpc>
+              <a:spcBef>
+                <a:spcPts val="0"/>
+              </a:spcBef>
+              <a:spcAft>
+                <a:spcPts val="0"/>
+              </a:spcAft>
+              <a:buClr>
+                <a:srgbClr val="000000"/>
+              </a:buClr>
+              <a:buSzPts val="1600"/>
+              <a:buFont typeface="Arial"/>
+              <a:buNone/>
+            </a:pPr>
+            <a:r>
+              <a:rPr lang="en-US" sz="4800" dirty="0">
+                <a:solidFill>
+                  <a:schemeClr val="lt1"/>
+                </a:solidFill>
+              </a:rPr>
+              <a:t>Alfred Herrhausen</a:t>
+            </a:r>
+            <a:endParaRPr sz="3200" b="0" i="0" u="none" strike="noStrike" cap="none" dirty="0">
+              <a:solidFill>
+                <a:srgbClr val="000000"/>
+              </a:solidFill>
+              <a:latin typeface="Arial"/>
+              <a:ea typeface="Arial"/>
+              <a:cs typeface="Arial"/>
+              <a:sym typeface="Arial"/>
+            </a:endParaRPr>
+          </a:p>
+        </p:txBody>
+      </p:sp>
+      <p:sp>
+        <p:nvSpPr>
+          <p:cNvPr id="8" name="Google Shape;170;p31">
+            <a:extLst>
+              <a:ext uri="{FF2B5EF4-FFF2-40B4-BE49-F238E27FC236}">
+                <a16:creationId xmlns:a16="http://schemas.microsoft.com/office/drawing/2014/main" id="{D328ABDE-E232-3EB7-C3F2-B4BB7B64262F}"/>
+              </a:ext>
+            </a:extLst>
+          </p:cNvPr>
+          <p:cNvSpPr/>
+          <p:nvPr/>
+        </p:nvSpPr>
+        <p:spPr>
+          <a:xfrm>
+            <a:off x="7526107" y="5681420"/>
+            <a:ext cx="4550222" cy="548230"/>
+          </a:xfrm>
+          <a:prstGeom prst="rect">
+            <a:avLst/>
+          </a:prstGeom>
+          <a:solidFill>
+            <a:srgbClr val="C00000"/>
+          </a:solidFill>
+          <a:ln>
+            <a:noFill/>
+          </a:ln>
+        </p:spPr>
+        <p:txBody>
+          <a:bodyPr spcFirstLastPara="1" wrap="square" lIns="91425" tIns="45700" rIns="91425" bIns="45700" anchor="ctr" anchorCtr="0">
+            <a:noAutofit/>
+          </a:bodyPr>
+          <a:lstStyle/>
+          <a:p>
+            <a:pPr marL="0" marR="0" lvl="0" indent="0" algn="ctr" rtl="0">
+              <a:lnSpc>
+                <a:spcPct val="100000"/>
+              </a:lnSpc>
+              <a:spcBef>
+                <a:spcPts val="0"/>
+              </a:spcBef>
+              <a:spcAft>
+                <a:spcPts val="0"/>
+              </a:spcAft>
+              <a:buClr>
+                <a:srgbClr val="000000"/>
+              </a:buClr>
+              <a:buSzPts val="1600"/>
+              <a:buFont typeface="Arial"/>
+              <a:buNone/>
+            </a:pPr>
+            <a:r>
+              <a:rPr lang="en-US" sz="3600" dirty="0">
+                <a:solidFill>
+                  <a:schemeClr val="lt1"/>
+                </a:solidFill>
+              </a:rPr>
+              <a:t>Dead at Age 59</a:t>
+            </a:r>
+            <a:endParaRPr sz="2000" b="0" i="0" u="none" strike="noStrike" cap="none" dirty="0">
+              <a:solidFill>
+                <a:srgbClr val="000000"/>
+              </a:solidFill>
+              <a:latin typeface="Arial"/>
+              <a:ea typeface="Arial"/>
+              <a:cs typeface="Arial"/>
+              <a:sym typeface="Arial"/>
+            </a:endParaRPr>
+          </a:p>
+        </p:txBody>
+      </p:sp>
+      <p:sp>
+        <p:nvSpPr>
+          <p:cNvPr id="10" name="TextBox 9">
+            <a:extLst>
+              <a:ext uri="{FF2B5EF4-FFF2-40B4-BE49-F238E27FC236}">
+                <a16:creationId xmlns:a16="http://schemas.microsoft.com/office/drawing/2014/main" id="{5FA0D8B2-6B55-D3DC-BCBB-6FEAD86B9E72}"/>
+              </a:ext>
+            </a:extLst>
+          </p:cNvPr>
+          <p:cNvSpPr txBox="1"/>
+          <p:nvPr/>
+        </p:nvSpPr>
+        <p:spPr>
+          <a:xfrm>
+            <a:off x="312431" y="2175372"/>
+            <a:ext cx="6987941" cy="3046988"/>
+          </a:xfrm>
+          <a:prstGeom prst="rect">
+            <a:avLst/>
+          </a:prstGeom>
+          <a:solidFill>
+            <a:schemeClr val="bg1">
+              <a:alpha val="84400"/>
+            </a:schemeClr>
+          </a:solidFill>
+        </p:spPr>
+        <p:txBody>
+          <a:bodyPr wrap="square" rtlCol="0">
+            <a:spAutoFit/>
+          </a:bodyPr>
+          <a:lstStyle/>
+          <a:p>
+            <a:pPr marL="285750" indent="-285750">
+              <a:spcBef>
+                <a:spcPts val="1200"/>
+              </a:spcBef>
+              <a:buFont typeface="Arial" panose="020B0604020202020204" pitchFamily="34" charset="0"/>
+              <a:buChar char="•"/>
+            </a:pPr>
+            <a:r>
+              <a:t>Chairman of Deutsche Bank killed by a MILITARY-GRADE bomb hidden in a child's knapsack on a bicycle.</a:t>
+            </a:r>
+          </a:p>
+          <a:p>
+            <a:pPr marL="285750" indent="-285750">
+              <a:spcBef>
+                <a:spcPts val="1200"/>
+              </a:spcBef>
+              <a:buFont typeface="Arial" panose="020B0604020202020204" pitchFamily="34" charset="0"/>
+              <a:buChar char="•"/>
+            </a:pPr>
+            <a:r>
+              <a:t>Killed 21 DAYS after the Berlin Wall fell. Was scheduled to present his reunification plan the NEXT DAY.</a:t>
+            </a:r>
+          </a:p>
+          <a:p>
+            <a:pPr marL="285750" indent="-285750">
+              <a:spcBef>
+                <a:spcPts val="1200"/>
+              </a:spcBef>
+              <a:buFont typeface="Arial" panose="020B0604020202020204" pitchFamily="34" charset="0"/>
+              <a:buChar char="•"/>
+            </a:pPr>
+            <a:r>
+              <a:t>The bomb used an INFRARED TRIGGER that distinguished his armored car from the lead vehicle — military precision.</a:t>
+            </a:r>
+          </a:p>
+          <a:p>
+            <a:pPr marL="285750" indent="-285750">
+              <a:spcBef>
+                <a:spcPts val="1200"/>
+              </a:spcBef>
+              <a:buFont typeface="Arial" panose="020B0604020202020204" pitchFamily="34" charset="0"/>
+              <a:buChar char="•"/>
+            </a:pPr>
+            <a:r>
+              <a:t>He said weeks before: "I know there is a group of people who have an INTEREST in my death."</a:t>
+            </a:r>
+          </a:p>
+          <a:p>
+            <a:pPr marL="285750" indent="-285750">
+              <a:spcBef>
+                <a:spcPts val="1200"/>
+              </a:spcBef>
+              <a:buFont typeface="Arial" panose="020B0604020202020204" pitchFamily="34" charset="0"/>
+              <a:buChar char="•"/>
+            </a:pPr>
+            <a:r>
+              <a:t>Case remains COMPLETELY UNSOLVED — no arrests, no trial, no accountability after 35+ years.</a:t>
+            </a:r>
+          </a:p>
+        </p:txBody>
+      </p:sp>
       <p:pic>
         <p:nvPicPr>
-          <p:cNvPr id="16" name="Picture 15" descr="Ilaria_Alpi.jpg"/>
+          <p:cNvPr id="16" name="Picture 15" descr="Alfred_Herrhausen.jpg"/>
           <p:cNvPicPr>
             <a:picLocks noChangeAspect="1"/>
           </p:cNvPicPr>
@@ -9541,474 +10576,14 @@
         </p:blipFill>
         <p:spPr>
           <a:xfrm>
-            <a:off x="6947091" y="1138842"/>
-            <a:ext cx="5387784" cy="3807367"/>
+            <a:off x="8339550" y="1100088"/>
+            <a:ext cx="2602866" cy="3884876"/>
           </a:xfrm>
           <a:prstGeom prst="rect">
             <a:avLst/>
           </a:prstGeom>
         </p:spPr>
       </p:pic>
-      <p:sp>
-        <p:nvSpPr>
-          <p:cNvPr id="15" name="TextBox 14">
-            <a:extLst>
-              <a:ext uri="{FF2B5EF4-FFF2-40B4-BE49-F238E27FC236}">
-                <a16:creationId xmlns:a16="http://schemas.microsoft.com/office/drawing/2014/main" id="{E478240E-251B-5BA6-3C45-7E6620400769}"/>
-              </a:ext>
-            </a:extLst>
-          </p:cNvPr>
-          <p:cNvSpPr txBox="1"/>
-          <p:nvPr/>
-        </p:nvSpPr>
-        <p:spPr>
-          <a:xfrm>
-            <a:off x="312432" y="1288262"/>
-            <a:ext cx="6494294" cy="584775"/>
-          </a:xfrm>
-          <a:prstGeom prst="rect">
-            <a:avLst/>
-          </a:prstGeom>
-          <a:solidFill>
-            <a:schemeClr val="bg1">
-              <a:alpha val="84400"/>
-            </a:schemeClr>
-          </a:solidFill>
-        </p:spPr>
-        <p:txBody>
-          <a:bodyPr wrap="square" rtlCol="0">
-            <a:spAutoFit/>
-          </a:bodyPr>
-          <a:lstStyle/>
-          <a:p>
-            <a:r>
-              <a:rPr lang="en-US" sz="3200" b="1" dirty="0">
-                <a:solidFill>
-                  <a:schemeClr val="accent5"/>
-                </a:solidFill>
-              </a:rPr>
-              <a:t>Why / How they Ilaria Alpi:</a:t>
-            </a:r>
-          </a:p>
-        </p:txBody>
-      </p:sp>
-      <p:sp>
-        <p:nvSpPr>
-          <p:cNvPr id="3" name="Google Shape;170;p31">
-            <a:extLst>
-              <a:ext uri="{FF2B5EF4-FFF2-40B4-BE49-F238E27FC236}">
-                <a16:creationId xmlns:a16="http://schemas.microsoft.com/office/drawing/2014/main" id="{A4695FE5-0AA5-AB05-98B1-B5B8E3FA8CBE}"/>
-              </a:ext>
-            </a:extLst>
-          </p:cNvPr>
-          <p:cNvSpPr/>
-          <p:nvPr/>
-        </p:nvSpPr>
-        <p:spPr>
-          <a:xfrm>
-            <a:off x="191731" y="5732890"/>
-            <a:ext cx="3431270" cy="496760"/>
-          </a:xfrm>
-          <a:prstGeom prst="rect">
-            <a:avLst/>
-          </a:prstGeom>
-          <a:solidFill>
-            <a:schemeClr val="accent5"/>
-          </a:solidFill>
-          <a:ln>
-            <a:noFill/>
-          </a:ln>
-        </p:spPr>
-        <p:txBody>
-          <a:bodyPr spcFirstLastPara="1" wrap="square" lIns="91425" tIns="45700" rIns="91425" bIns="45700" anchor="ctr" anchorCtr="0">
-            <a:noAutofit/>
-          </a:bodyPr>
-          <a:lstStyle/>
-          <a:p>
-            <a:pPr marL="0" marR="0" lvl="0" indent="0" algn="ctr" rtl="0">
-              <a:lnSpc>
-                <a:spcPct val="100000"/>
-              </a:lnSpc>
-              <a:spcBef>
-                <a:spcPts val="0"/>
-              </a:spcBef>
-              <a:spcAft>
-                <a:spcPts val="0"/>
-              </a:spcAft>
-              <a:buClr>
-                <a:srgbClr val="000000"/>
-              </a:buClr>
-              <a:buSzPts val="1600"/>
-              <a:buFont typeface="Arial"/>
-              <a:buNone/>
-            </a:pPr>
-            <a:r>
-              <a:rPr lang="en-US" sz="3600" dirty="0">
-                <a:solidFill>
-                  <a:schemeClr val="lt1"/>
-                </a:solidFill>
-              </a:rPr>
-              <a:t>Read List Here:</a:t>
-            </a:r>
-            <a:endParaRPr sz="2000" b="0" i="0" u="none" strike="noStrike" cap="none" dirty="0">
-              <a:solidFill>
-                <a:srgbClr val="000000"/>
-              </a:solidFill>
-              <a:latin typeface="Arial"/>
-              <a:ea typeface="Arial"/>
-              <a:cs typeface="Arial"/>
-              <a:sym typeface="Arial"/>
-            </a:endParaRPr>
-          </a:p>
-        </p:txBody>
-      </p:sp>
-      <p:sp>
-        <p:nvSpPr>
-          <p:cNvPr id="5" name="Google Shape;170;p31">
-            <a:extLst>
-              <a:ext uri="{FF2B5EF4-FFF2-40B4-BE49-F238E27FC236}">
-                <a16:creationId xmlns:a16="http://schemas.microsoft.com/office/drawing/2014/main" id="{98132413-6ED2-8B36-74B6-3C503B1A4634}"/>
-              </a:ext>
-            </a:extLst>
-          </p:cNvPr>
-          <p:cNvSpPr/>
-          <p:nvPr/>
-        </p:nvSpPr>
-        <p:spPr>
-          <a:xfrm>
-            <a:off x="0" y="-31518"/>
-            <a:ext cx="12192000" cy="1131606"/>
-          </a:xfrm>
-          <a:prstGeom prst="rect">
-            <a:avLst/>
-          </a:prstGeom>
-          <a:solidFill>
-            <a:srgbClr val="C00000"/>
-          </a:solidFill>
-          <a:ln>
-            <a:noFill/>
-          </a:ln>
-        </p:spPr>
-        <p:txBody>
-          <a:bodyPr spcFirstLastPara="1" wrap="square" lIns="91425" tIns="45700" rIns="91425" bIns="45700" anchor="ctr" anchorCtr="0">
-            <a:noAutofit/>
-          </a:bodyPr>
-          <a:lstStyle/>
-          <a:p>
-            <a:pPr marL="0" marR="0" lvl="0" indent="0" rtl="0">
-              <a:lnSpc>
-                <a:spcPct val="100000"/>
-              </a:lnSpc>
-              <a:spcBef>
-                <a:spcPts val="0"/>
-              </a:spcBef>
-              <a:spcAft>
-                <a:spcPts val="0"/>
-              </a:spcAft>
-              <a:buClr>
-                <a:srgbClr val="000000"/>
-              </a:buClr>
-              <a:buSzPts val="1600"/>
-              <a:buFont typeface="Arial"/>
-              <a:buNone/>
-            </a:pPr>
-            <a:r>
-              <a:rPr lang="en-US" sz="4800" dirty="0">
-                <a:solidFill>
-                  <a:schemeClr val="lt1"/>
-                </a:solidFill>
-              </a:rPr>
-              <a:t> 150+ Murdered: by Intelligence Services</a:t>
-            </a:r>
-            <a:endParaRPr sz="3200" b="0" i="0" u="none" strike="noStrike" cap="none" dirty="0">
-              <a:solidFill>
-                <a:srgbClr val="000000"/>
-              </a:solidFill>
-              <a:latin typeface="Arial"/>
-              <a:ea typeface="Arial"/>
-              <a:cs typeface="Arial"/>
-              <a:sym typeface="Arial"/>
-            </a:endParaRPr>
-          </a:p>
-        </p:txBody>
-      </p:sp>
-      <p:sp>
-        <p:nvSpPr>
-          <p:cNvPr id="4" name="TextBox 3">
-            <a:extLst>
-              <a:ext uri="{FF2B5EF4-FFF2-40B4-BE49-F238E27FC236}">
-                <a16:creationId xmlns:a16="http://schemas.microsoft.com/office/drawing/2014/main" id="{50D7621F-9D36-7894-7117-9F831EF5EFA6}"/>
-              </a:ext>
-            </a:extLst>
-          </p:cNvPr>
-          <p:cNvSpPr txBox="1"/>
-          <p:nvPr/>
-        </p:nvSpPr>
-        <p:spPr>
-          <a:xfrm>
-            <a:off x="107300" y="6229650"/>
-            <a:ext cx="11685989" cy="461665"/>
-          </a:xfrm>
-          <a:prstGeom prst="rect">
-            <a:avLst/>
-          </a:prstGeom>
-          <a:solidFill>
-            <a:schemeClr val="bg1">
-              <a:alpha val="84400"/>
-            </a:schemeClr>
-          </a:solidFill>
-        </p:spPr>
-        <p:txBody>
-          <a:bodyPr wrap="square" rtlCol="0">
-            <a:spAutoFit/>
-          </a:bodyPr>
-          <a:lstStyle/>
-          <a:p>
-            <a:r>
-              <a:rPr lang="en-US" sz="2400" dirty="0"/>
-              <a:t>https://intelligencemurders.com/intel</a:t>
-            </a:r>
-          </a:p>
-        </p:txBody>
-      </p:sp>
-      <p:sp>
-        <p:nvSpPr>
-          <p:cNvPr id="7" name="Google Shape;170;p31">
-            <a:extLst>
-              <a:ext uri="{FF2B5EF4-FFF2-40B4-BE49-F238E27FC236}">
-                <a16:creationId xmlns:a16="http://schemas.microsoft.com/office/drawing/2014/main" id="{4B582382-76AA-B49E-C611-39A37CE591B9}"/>
-              </a:ext>
-            </a:extLst>
-          </p:cNvPr>
-          <p:cNvSpPr/>
-          <p:nvPr/>
-        </p:nvSpPr>
-        <p:spPr>
-          <a:xfrm>
-            <a:off x="7506336" y="4925186"/>
-            <a:ext cx="4550222" cy="869505"/>
-          </a:xfrm>
-          <a:prstGeom prst="rect">
-            <a:avLst/>
-          </a:prstGeom>
-          <a:solidFill>
-            <a:srgbClr val="C00000"/>
-          </a:solidFill>
-          <a:ln>
-            <a:noFill/>
-          </a:ln>
-        </p:spPr>
-        <p:txBody>
-          <a:bodyPr spcFirstLastPara="1" wrap="square" lIns="91425" tIns="45700" rIns="91425" bIns="45700" anchor="ctr" anchorCtr="0">
-            <a:noAutofit/>
-          </a:bodyPr>
-          <a:lstStyle/>
-          <a:p>
-            <a:pPr marL="0" marR="0" lvl="0" indent="0" algn="ctr" rtl="0">
-              <a:lnSpc>
-                <a:spcPct val="100000"/>
-              </a:lnSpc>
-              <a:spcBef>
-                <a:spcPts val="0"/>
-              </a:spcBef>
-              <a:spcAft>
-                <a:spcPts val="0"/>
-              </a:spcAft>
-              <a:buClr>
-                <a:srgbClr val="000000"/>
-              </a:buClr>
-              <a:buSzPts val="1600"/>
-              <a:buFont typeface="Arial"/>
-              <a:buNone/>
-            </a:pPr>
-            <a:r>
-              <a:rPr lang="en-US" sz="4800" dirty="0">
-                <a:solidFill>
-                  <a:schemeClr val="lt1"/>
-                </a:solidFill>
-              </a:rPr>
-              <a:t>Ilaria Alpi</a:t>
-            </a:r>
-            <a:endParaRPr sz="3200" b="0" i="0" u="none" strike="noStrike" cap="none" dirty="0">
-              <a:solidFill>
-                <a:srgbClr val="000000"/>
-              </a:solidFill>
-              <a:latin typeface="Arial"/>
-              <a:ea typeface="Arial"/>
-              <a:cs typeface="Arial"/>
-              <a:sym typeface="Arial"/>
-            </a:endParaRPr>
-          </a:p>
-        </p:txBody>
-      </p:sp>
-      <p:sp>
-        <p:nvSpPr>
-          <p:cNvPr id="8" name="Google Shape;170;p31">
-            <a:extLst>
-              <a:ext uri="{FF2B5EF4-FFF2-40B4-BE49-F238E27FC236}">
-                <a16:creationId xmlns:a16="http://schemas.microsoft.com/office/drawing/2014/main" id="{D328ABDE-E232-3EB7-C3F2-B4BB7B64262F}"/>
-              </a:ext>
-            </a:extLst>
-          </p:cNvPr>
-          <p:cNvSpPr/>
-          <p:nvPr/>
-        </p:nvSpPr>
-        <p:spPr>
-          <a:xfrm>
-            <a:off x="7526107" y="5681420"/>
-            <a:ext cx="4550222" cy="548230"/>
-          </a:xfrm>
-          <a:prstGeom prst="rect">
-            <a:avLst/>
-          </a:prstGeom>
-          <a:solidFill>
-            <a:srgbClr val="C00000"/>
-          </a:solidFill>
-          <a:ln>
-            <a:noFill/>
-          </a:ln>
-        </p:spPr>
-        <p:txBody>
-          <a:bodyPr spcFirstLastPara="1" wrap="square" lIns="91425" tIns="45700" rIns="91425" bIns="45700" anchor="ctr" anchorCtr="0">
-            <a:noAutofit/>
-          </a:bodyPr>
-          <a:lstStyle/>
-          <a:p>
-            <a:pPr marL="0" marR="0" lvl="0" indent="0" algn="ctr" rtl="0">
-              <a:lnSpc>
-                <a:spcPct val="100000"/>
-              </a:lnSpc>
-              <a:spcBef>
-                <a:spcPts val="0"/>
-              </a:spcBef>
-              <a:spcAft>
-                <a:spcPts val="0"/>
-              </a:spcAft>
-              <a:buClr>
-                <a:srgbClr val="000000"/>
-              </a:buClr>
-              <a:buSzPts val="1600"/>
-              <a:buFont typeface="Arial"/>
-              <a:buNone/>
-            </a:pPr>
-            <a:r>
-              <a:rPr lang="en-US" sz="3600" dirty="0">
-                <a:solidFill>
-                  <a:schemeClr val="lt1"/>
-                </a:solidFill>
-              </a:rPr>
-              <a:t>Dead at Age 32</a:t>
-            </a:r>
-            <a:endParaRPr sz="2000" b="0" i="0" u="none" strike="noStrike" cap="none" dirty="0">
-              <a:solidFill>
-                <a:srgbClr val="000000"/>
-              </a:solidFill>
-              <a:latin typeface="Arial"/>
-              <a:ea typeface="Arial"/>
-              <a:cs typeface="Arial"/>
-              <a:sym typeface="Arial"/>
-            </a:endParaRPr>
-          </a:p>
-        </p:txBody>
-      </p:sp>
-      <p:sp>
-        <p:nvSpPr>
-          <p:cNvPr id="10" name="TextBox 9">
-            <a:extLst>
-              <a:ext uri="{FF2B5EF4-FFF2-40B4-BE49-F238E27FC236}">
-                <a16:creationId xmlns:a16="http://schemas.microsoft.com/office/drawing/2014/main" id="{5FA0D8B2-6B55-D3DC-BCBB-6FEAD86B9E72}"/>
-              </a:ext>
-            </a:extLst>
-          </p:cNvPr>
-          <p:cNvSpPr txBox="1"/>
-          <p:nvPr/>
-        </p:nvSpPr>
-        <p:spPr>
-          <a:xfrm>
-            <a:off x="129030" y="1905506"/>
-            <a:ext cx="6987941" cy="3046988"/>
-          </a:xfrm>
-          <a:prstGeom prst="rect">
-            <a:avLst/>
-          </a:prstGeom>
-          <a:solidFill>
-            <a:schemeClr val="bg1">
-              <a:alpha val="84400"/>
-            </a:schemeClr>
-          </a:solidFill>
-        </p:spPr>
-        <p:txBody>
-          <a:bodyPr wrap="square" rtlCol="0">
-            <a:spAutoFit/>
-          </a:bodyPr>
-          <a:lstStyle/>
-          <a:p>
-            <a:pPr marL="285750" indent="-285750">
-              <a:spcBef>
-                <a:spcPts val="1200"/>
-              </a:spcBef>
-              <a:buFont typeface="Arial" panose="020B0604020202020204" pitchFamily="34" charset="0"/>
-              <a:buChar char="•"/>
-            </a:pPr>
-            <a:r>
-              <a:rPr dirty="0"/>
-              <a:t>Italian journalist, age 32. AMBUSHED by a 7-man commando in Mogadishu. Shot EXECUTION-STYLE in the temple.</a:t>
-            </a:r>
-          </a:p>
-          <a:p>
-            <a:pPr marL="285750" indent="-285750">
-              <a:spcBef>
-                <a:spcPts val="1200"/>
-              </a:spcBef>
-              <a:buFont typeface="Arial" panose="020B0604020202020204" pitchFamily="34" charset="0"/>
-              <a:buChar char="•"/>
-            </a:pPr>
-            <a:r>
-              <a:rPr dirty="0"/>
-              <a:t>She was investigating ILLEGAL ARMS trafficking and TOXIC WASTE dumping involving Italian intelligence (SISMI).</a:t>
-            </a:r>
-          </a:p>
-          <a:p>
-            <a:pPr marL="285750" indent="-285750">
-              <a:spcBef>
-                <a:spcPts val="1200"/>
-              </a:spcBef>
-              <a:buFont typeface="Arial" panose="020B0604020202020204" pitchFamily="34" charset="0"/>
-              <a:buChar char="•"/>
-            </a:pPr>
-            <a:r>
-              <a:rPr dirty="0"/>
-              <a:t>The only man convicted served 17 YEARS in prison — then was ACQUITTED and awarded 3.1 MILLION euros.</a:t>
-            </a:r>
-          </a:p>
-          <a:p>
-            <a:pPr marL="285750" indent="-285750">
-              <a:spcBef>
-                <a:spcPts val="1200"/>
-              </a:spcBef>
-              <a:buFont typeface="Arial" panose="020B0604020202020204" pitchFamily="34" charset="0"/>
-              <a:buChar char="•"/>
-            </a:pPr>
-            <a:r>
-              <a:rPr dirty="0"/>
-              <a:t>That wrongfully convicted man was later KILLED BY A CAR BOMB in Mogadishu in 2022.</a:t>
-            </a:r>
-          </a:p>
-          <a:p>
-            <a:pPr marL="285750" indent="-285750">
-              <a:spcBef>
-                <a:spcPts val="1200"/>
-              </a:spcBef>
-              <a:buFont typeface="Arial" panose="020B0604020202020204" pitchFamily="34" charset="0"/>
-              <a:buChar char="•"/>
-            </a:pPr>
-            <a:r>
-              <a:rPr dirty="0"/>
-              <a:t>Her cameraman's final footage has NEVER been recovered — the attackers wanted the evidence destroyed.</a:t>
-            </a:r>
-          </a:p>
-        </p:txBody>
-      </p:sp>
     </p:spTree>
   </p:cSld>
   <p:clrMapOvr>
@@ -10034,394 +10609,9 @@
           <a:chExt cx="0" cy="0"/>
         </a:xfrm>
       </p:grpSpPr>
-      <p:sp>
-        <p:nvSpPr>
-          <p:cNvPr id="15" name="TextBox 14">
-            <a:extLst>
-              <a:ext uri="{FF2B5EF4-FFF2-40B4-BE49-F238E27FC236}">
-                <a16:creationId xmlns:a16="http://schemas.microsoft.com/office/drawing/2014/main" id="{E478240E-251B-5BA6-3C45-7E6620400769}"/>
-              </a:ext>
-            </a:extLst>
-          </p:cNvPr>
-          <p:cNvSpPr txBox="1"/>
-          <p:nvPr/>
-        </p:nvSpPr>
-        <p:spPr>
-          <a:xfrm>
-            <a:off x="312432" y="1288262"/>
-            <a:ext cx="7972976" cy="584775"/>
-          </a:xfrm>
-          <a:prstGeom prst="rect">
-            <a:avLst/>
-          </a:prstGeom>
-          <a:solidFill>
-            <a:schemeClr val="bg1">
-              <a:alpha val="84400"/>
-            </a:schemeClr>
-          </a:solidFill>
-        </p:spPr>
-        <p:txBody>
-          <a:bodyPr wrap="square" rtlCol="0">
-            <a:spAutoFit/>
-          </a:bodyPr>
-          <a:lstStyle/>
-          <a:p>
-            <a:r>
-              <a:rPr lang="en-US" sz="3200" b="1" dirty="0">
-                <a:solidFill>
-                  <a:schemeClr val="accent5"/>
-                </a:solidFill>
-              </a:rPr>
-              <a:t>Why / How they Alexander Zakharchenko:</a:t>
-            </a:r>
-          </a:p>
-        </p:txBody>
-      </p:sp>
-      <p:sp>
-        <p:nvSpPr>
-          <p:cNvPr id="3" name="Google Shape;170;p31">
-            <a:extLst>
-              <a:ext uri="{FF2B5EF4-FFF2-40B4-BE49-F238E27FC236}">
-                <a16:creationId xmlns:a16="http://schemas.microsoft.com/office/drawing/2014/main" id="{A4695FE5-0AA5-AB05-98B1-B5B8E3FA8CBE}"/>
-              </a:ext>
-            </a:extLst>
-          </p:cNvPr>
-          <p:cNvSpPr/>
-          <p:nvPr/>
-        </p:nvSpPr>
-        <p:spPr>
-          <a:xfrm>
-            <a:off x="191731" y="5732890"/>
-            <a:ext cx="3431270" cy="496760"/>
-          </a:xfrm>
-          <a:prstGeom prst="rect">
-            <a:avLst/>
-          </a:prstGeom>
-          <a:solidFill>
-            <a:schemeClr val="accent5"/>
-          </a:solidFill>
-          <a:ln>
-            <a:noFill/>
-          </a:ln>
-        </p:spPr>
-        <p:txBody>
-          <a:bodyPr spcFirstLastPara="1" wrap="square" lIns="91425" tIns="45700" rIns="91425" bIns="45700" anchor="ctr" anchorCtr="0">
-            <a:noAutofit/>
-          </a:bodyPr>
-          <a:lstStyle/>
-          <a:p>
-            <a:pPr marL="0" marR="0" lvl="0" indent="0" algn="ctr" rtl="0">
-              <a:lnSpc>
-                <a:spcPct val="100000"/>
-              </a:lnSpc>
-              <a:spcBef>
-                <a:spcPts val="0"/>
-              </a:spcBef>
-              <a:spcAft>
-                <a:spcPts val="0"/>
-              </a:spcAft>
-              <a:buClr>
-                <a:srgbClr val="000000"/>
-              </a:buClr>
-              <a:buSzPts val="1600"/>
-              <a:buFont typeface="Arial"/>
-              <a:buNone/>
-            </a:pPr>
-            <a:r>
-              <a:rPr lang="en-US" sz="3600" dirty="0">
-                <a:solidFill>
-                  <a:schemeClr val="lt1"/>
-                </a:solidFill>
-              </a:rPr>
-              <a:t>Read List Here:</a:t>
-            </a:r>
-            <a:endParaRPr sz="2000" b="0" i="0" u="none" strike="noStrike" cap="none" dirty="0">
-              <a:solidFill>
-                <a:srgbClr val="000000"/>
-              </a:solidFill>
-              <a:latin typeface="Arial"/>
-              <a:ea typeface="Arial"/>
-              <a:cs typeface="Arial"/>
-              <a:sym typeface="Arial"/>
-            </a:endParaRPr>
-          </a:p>
-        </p:txBody>
-      </p:sp>
-      <p:sp>
-        <p:nvSpPr>
-          <p:cNvPr id="5" name="Google Shape;170;p31">
-            <a:extLst>
-              <a:ext uri="{FF2B5EF4-FFF2-40B4-BE49-F238E27FC236}">
-                <a16:creationId xmlns:a16="http://schemas.microsoft.com/office/drawing/2014/main" id="{98132413-6ED2-8B36-74B6-3C503B1A4634}"/>
-              </a:ext>
-            </a:extLst>
-          </p:cNvPr>
-          <p:cNvSpPr/>
-          <p:nvPr/>
-        </p:nvSpPr>
-        <p:spPr>
-          <a:xfrm>
-            <a:off x="0" y="-31518"/>
-            <a:ext cx="12192000" cy="1131606"/>
-          </a:xfrm>
-          <a:prstGeom prst="rect">
-            <a:avLst/>
-          </a:prstGeom>
-          <a:solidFill>
-            <a:srgbClr val="C00000"/>
-          </a:solidFill>
-          <a:ln>
-            <a:noFill/>
-          </a:ln>
-        </p:spPr>
-        <p:txBody>
-          <a:bodyPr spcFirstLastPara="1" wrap="square" lIns="91425" tIns="45700" rIns="91425" bIns="45700" anchor="ctr" anchorCtr="0">
-            <a:noAutofit/>
-          </a:bodyPr>
-          <a:lstStyle/>
-          <a:p>
-            <a:pPr marL="0" marR="0" lvl="0" indent="0" rtl="0">
-              <a:lnSpc>
-                <a:spcPct val="100000"/>
-              </a:lnSpc>
-              <a:spcBef>
-                <a:spcPts val="0"/>
-              </a:spcBef>
-              <a:spcAft>
-                <a:spcPts val="0"/>
-              </a:spcAft>
-              <a:buClr>
-                <a:srgbClr val="000000"/>
-              </a:buClr>
-              <a:buSzPts val="1600"/>
-              <a:buFont typeface="Arial"/>
-              <a:buNone/>
-            </a:pPr>
-            <a:r>
-              <a:rPr lang="en-US" sz="4800" dirty="0">
-                <a:solidFill>
-                  <a:schemeClr val="lt1"/>
-                </a:solidFill>
-              </a:rPr>
-              <a:t> 150+ Murdered: by Intelligence Services</a:t>
-            </a:r>
-            <a:endParaRPr sz="3200" b="0" i="0" u="none" strike="noStrike" cap="none" dirty="0">
-              <a:solidFill>
-                <a:srgbClr val="000000"/>
-              </a:solidFill>
-              <a:latin typeface="Arial"/>
-              <a:ea typeface="Arial"/>
-              <a:cs typeface="Arial"/>
-              <a:sym typeface="Arial"/>
-            </a:endParaRPr>
-          </a:p>
-        </p:txBody>
-      </p:sp>
-      <p:sp>
-        <p:nvSpPr>
-          <p:cNvPr id="4" name="TextBox 3">
-            <a:extLst>
-              <a:ext uri="{FF2B5EF4-FFF2-40B4-BE49-F238E27FC236}">
-                <a16:creationId xmlns:a16="http://schemas.microsoft.com/office/drawing/2014/main" id="{50D7621F-9D36-7894-7117-9F831EF5EFA6}"/>
-              </a:ext>
-            </a:extLst>
-          </p:cNvPr>
-          <p:cNvSpPr txBox="1"/>
-          <p:nvPr/>
-        </p:nvSpPr>
-        <p:spPr>
-          <a:xfrm>
-            <a:off x="107300" y="6229650"/>
-            <a:ext cx="11685989" cy="461665"/>
-          </a:xfrm>
-          <a:prstGeom prst="rect">
-            <a:avLst/>
-          </a:prstGeom>
-          <a:solidFill>
-            <a:schemeClr val="bg1">
-              <a:alpha val="84400"/>
-            </a:schemeClr>
-          </a:solidFill>
-        </p:spPr>
-        <p:txBody>
-          <a:bodyPr wrap="square" rtlCol="0">
-            <a:spAutoFit/>
-          </a:bodyPr>
-          <a:lstStyle/>
-          <a:p>
-            <a:r>
-              <a:rPr lang="en-US" sz="2400" dirty="0"/>
-              <a:t>https://intelligencemurders.com/intel</a:t>
-            </a:r>
-          </a:p>
-        </p:txBody>
-      </p:sp>
-      <p:sp>
-        <p:nvSpPr>
-          <p:cNvPr id="8" name="Google Shape;170;p31">
-            <a:extLst>
-              <a:ext uri="{FF2B5EF4-FFF2-40B4-BE49-F238E27FC236}">
-                <a16:creationId xmlns:a16="http://schemas.microsoft.com/office/drawing/2014/main" id="{D328ABDE-E232-3EB7-C3F2-B4BB7B64262F}"/>
-              </a:ext>
-            </a:extLst>
-          </p:cNvPr>
-          <p:cNvSpPr/>
-          <p:nvPr/>
-        </p:nvSpPr>
-        <p:spPr>
-          <a:xfrm>
-            <a:off x="7534478" y="6229650"/>
-            <a:ext cx="4550222" cy="548230"/>
-          </a:xfrm>
-          <a:prstGeom prst="rect">
-            <a:avLst/>
-          </a:prstGeom>
-          <a:solidFill>
-            <a:srgbClr val="C00000"/>
-          </a:solidFill>
-          <a:ln>
-            <a:noFill/>
-          </a:ln>
-        </p:spPr>
-        <p:txBody>
-          <a:bodyPr spcFirstLastPara="1" wrap="square" lIns="91425" tIns="45700" rIns="91425" bIns="45700" anchor="ctr" anchorCtr="0">
-            <a:noAutofit/>
-          </a:bodyPr>
-          <a:lstStyle/>
-          <a:p>
-            <a:pPr marL="0" marR="0" lvl="0" indent="0" algn="ctr" rtl="0">
-              <a:lnSpc>
-                <a:spcPct val="100000"/>
-              </a:lnSpc>
-              <a:spcBef>
-                <a:spcPts val="0"/>
-              </a:spcBef>
-              <a:spcAft>
-                <a:spcPts val="0"/>
-              </a:spcAft>
-              <a:buClr>
-                <a:srgbClr val="000000"/>
-              </a:buClr>
-              <a:buSzPts val="1600"/>
-              <a:buFont typeface="Arial"/>
-              <a:buNone/>
-            </a:pPr>
-            <a:r>
-              <a:rPr lang="en-US" sz="3600" dirty="0">
-                <a:solidFill>
-                  <a:schemeClr val="lt1"/>
-                </a:solidFill>
-              </a:rPr>
-              <a:t>Dead at Age 42</a:t>
-            </a:r>
-            <a:endParaRPr sz="2000" b="0" i="0" u="none" strike="noStrike" cap="none" dirty="0">
-              <a:solidFill>
-                <a:srgbClr val="000000"/>
-              </a:solidFill>
-              <a:latin typeface="Arial"/>
-              <a:ea typeface="Arial"/>
-              <a:cs typeface="Arial"/>
-              <a:sym typeface="Arial"/>
-            </a:endParaRPr>
-          </a:p>
-        </p:txBody>
-      </p:sp>
-      <p:sp>
-        <p:nvSpPr>
-          <p:cNvPr id="10" name="TextBox 9">
-            <a:extLst>
-              <a:ext uri="{FF2B5EF4-FFF2-40B4-BE49-F238E27FC236}">
-                <a16:creationId xmlns:a16="http://schemas.microsoft.com/office/drawing/2014/main" id="{5FA0D8B2-6B55-D3DC-BCBB-6FEAD86B9E72}"/>
-              </a:ext>
-            </a:extLst>
-          </p:cNvPr>
-          <p:cNvSpPr txBox="1"/>
-          <p:nvPr/>
-        </p:nvSpPr>
-        <p:spPr>
-          <a:xfrm>
-            <a:off x="312431" y="2175372"/>
-            <a:ext cx="6987941" cy="3046988"/>
-          </a:xfrm>
-          <a:prstGeom prst="rect">
-            <a:avLst/>
-          </a:prstGeom>
-          <a:solidFill>
-            <a:schemeClr val="bg1">
-              <a:alpha val="84400"/>
-            </a:schemeClr>
-          </a:solidFill>
-        </p:spPr>
-        <p:txBody>
-          <a:bodyPr wrap="square" rtlCol="0">
-            <a:spAutoFit/>
-          </a:bodyPr>
-          <a:lstStyle/>
-          <a:p>
-            <a:pPr marL="285750" indent="-285750">
-              <a:spcBef>
-                <a:spcPts val="1200"/>
-              </a:spcBef>
-              <a:buFont typeface="Arial" panose="020B0604020202020204" pitchFamily="34" charset="0"/>
-              <a:buChar char="•"/>
-            </a:pPr>
-            <a:r>
-              <a:t>Blown up by a BOMB hidden inside a cafe he visited DAILY in Donetsk. Age 42.</a:t>
-            </a:r>
-          </a:p>
-          <a:p>
-            <a:pPr marL="285750" indent="-285750">
-              <a:spcBef>
-                <a:spcPts val="1200"/>
-              </a:spcBef>
-              <a:buFont typeface="Arial" panose="020B0604020202020204" pitchFamily="34" charset="0"/>
-              <a:buChar char="•"/>
-            </a:pPr>
-            <a:r>
-              <a:t>The bomb was concealed in a LIGHTING FIXTURE above his usual seat — someone knew his exact habits.</a:t>
-            </a:r>
-          </a:p>
-          <a:p>
-            <a:pPr marL="285750" indent="-285750">
-              <a:spcBef>
-                <a:spcPts val="1200"/>
-              </a:spcBef>
-              <a:buFont typeface="Arial" panose="020B0604020202020204" pitchFamily="34" charset="0"/>
-              <a:buChar char="•"/>
-            </a:pPr>
-            <a:r>
-              <a:t>Both Ukraine AND Russia have been accused. His own security apparatus was likely PENETRATED.</a:t>
-            </a:r>
-          </a:p>
-          <a:p>
-            <a:pPr marL="285750" indent="-285750">
-              <a:spcBef>
-                <a:spcPts val="1200"/>
-              </a:spcBef>
-              <a:buFont typeface="Arial" panose="020B0604020202020204" pitchFamily="34" charset="0"/>
-              <a:buChar char="•"/>
-            </a:pPr>
-            <a:r>
-              <a:t>His successor was installed within DAYS — someone was READY for his removal.</a:t>
-            </a:r>
-          </a:p>
-          <a:p>
-            <a:pPr marL="285750" indent="-285750">
-              <a:spcBef>
-                <a:spcPts val="1200"/>
-              </a:spcBef>
-              <a:buFont typeface="Arial" panose="020B0604020202020204" pitchFamily="34" charset="0"/>
-              <a:buChar char="•"/>
-            </a:pPr>
-            <a:r>
-              <a:t>Part of a pattern: separatist leaders in Donbas were being ELIMINATED one by one.</a:t>
-            </a:r>
-          </a:p>
-        </p:txBody>
-      </p:sp>
       <p:pic>
         <p:nvPicPr>
-          <p:cNvPr id="16" name="Picture 15" descr="Alexander_Zakharchenko.jpg"/>
+          <p:cNvPr id="16" name="Picture 15" descr="Ilaria_Alpi.jpg"/>
           <p:cNvPicPr>
             <a:picLocks noChangeAspect="1"/>
           </p:cNvPicPr>
@@ -10435,8 +10625,8 @@
         </p:blipFill>
         <p:spPr>
           <a:xfrm>
-            <a:off x="8139098" y="1100088"/>
-            <a:ext cx="3003770" cy="3884876"/>
+            <a:off x="6947091" y="1138842"/>
+            <a:ext cx="5387784" cy="3807367"/>
           </a:xfrm>
           <a:prstGeom prst="rect">
             <a:avLst/>
@@ -10445,10 +10635,53 @@
       </p:pic>
       <p:sp>
         <p:nvSpPr>
-          <p:cNvPr id="7" name="Google Shape;170;p31">
-            <a:extLst>
-              <a:ext uri="{FF2B5EF4-FFF2-40B4-BE49-F238E27FC236}">
-                <a16:creationId xmlns:a16="http://schemas.microsoft.com/office/drawing/2014/main" id="{4B582382-76AA-B49E-C611-39A37CE591B9}"/>
+          <p:cNvPr id="15" name="TextBox 14">
+            <a:extLst>
+              <a:ext uri="{FF2B5EF4-FFF2-40B4-BE49-F238E27FC236}">
+                <a16:creationId xmlns:a16="http://schemas.microsoft.com/office/drawing/2014/main" id="{E478240E-251B-5BA6-3C45-7E6620400769}"/>
+              </a:ext>
+            </a:extLst>
+          </p:cNvPr>
+          <p:cNvSpPr txBox="1"/>
+          <p:nvPr/>
+        </p:nvSpPr>
+        <p:spPr>
+          <a:xfrm>
+            <a:off x="312432" y="1288262"/>
+            <a:ext cx="6494294" cy="584775"/>
+          </a:xfrm>
+          <a:prstGeom prst="rect">
+            <a:avLst/>
+          </a:prstGeom>
+          <a:solidFill>
+            <a:schemeClr val="bg1">
+              <a:alpha val="84400"/>
+            </a:schemeClr>
+          </a:solidFill>
+        </p:spPr>
+        <p:txBody>
+          <a:bodyPr wrap="square" rtlCol="0">
+            <a:spAutoFit/>
+          </a:bodyPr>
+          <a:lstStyle/>
+          <a:p>
+            <a:r>
+              <a:rPr lang="en-US" sz="3200" b="1" dirty="0">
+                <a:solidFill>
+                  <a:schemeClr val="accent5"/>
+                </a:solidFill>
+              </a:rPr>
+              <a:t>Why / How they Ilaria Alpi:</a:t>
+            </a:r>
+          </a:p>
+        </p:txBody>
+      </p:sp>
+      <p:sp>
+        <p:nvSpPr>
+          <p:cNvPr id="3" name="Google Shape;170;p31">
+            <a:extLst>
+              <a:ext uri="{FF2B5EF4-FFF2-40B4-BE49-F238E27FC236}">
+                <a16:creationId xmlns:a16="http://schemas.microsoft.com/office/drawing/2014/main" id="{A4695FE5-0AA5-AB05-98B1-B5B8E3FA8CBE}"/>
               </a:ext>
             </a:extLst>
           </p:cNvPr>
@@ -10457,14 +10690,14 @@
         </p:nvSpPr>
         <p:spPr>
           <a:xfrm>
-            <a:off x="7506336" y="4925186"/>
-            <a:ext cx="4550222" cy="1304464"/>
-          </a:xfrm>
-          <a:prstGeom prst="rect">
-            <a:avLst/>
-          </a:prstGeom>
-          <a:solidFill>
-            <a:srgbClr val="C00000"/>
+            <a:off x="191731" y="5732890"/>
+            <a:ext cx="3431270" cy="496760"/>
+          </a:xfrm>
+          <a:prstGeom prst="rect">
+            <a:avLst/>
+          </a:prstGeom>
+          <a:solidFill>
+            <a:schemeClr val="accent5"/>
           </a:solidFill>
           <a:ln>
             <a:noFill/>
@@ -10494,14 +10727,14 @@
               <a:buNone/>
             </a:pPr>
             <a:r>
-              <a:rPr lang="en-US" sz="4800" dirty="0">
+              <a:rPr lang="en-US" sz="3600" dirty="0">
                 <a:solidFill>
                   <a:schemeClr val="lt1"/>
                 </a:solidFill>
               </a:rPr>
-              <a:t>Alexander Zakharchenko</a:t>
-            </a:r>
-            <a:endParaRPr sz="3200" b="0" i="0" u="none" strike="noStrike" cap="none" dirty="0">
+              <a:t>Read List Here:</a:t>
+            </a:r>
+            <a:endParaRPr sz="2000" b="0" i="0" u="none" strike="noStrike" cap="none" dirty="0">
               <a:solidFill>
                 <a:srgbClr val="000000"/>
               </a:solidFill>
@@ -10513,12 +10746,354 @@
           </a:p>
         </p:txBody>
       </p:sp>
+      <p:sp>
+        <p:nvSpPr>
+          <p:cNvPr id="5" name="Google Shape;170;p31">
+            <a:extLst>
+              <a:ext uri="{FF2B5EF4-FFF2-40B4-BE49-F238E27FC236}">
+                <a16:creationId xmlns:a16="http://schemas.microsoft.com/office/drawing/2014/main" id="{98132413-6ED2-8B36-74B6-3C503B1A4634}"/>
+              </a:ext>
+            </a:extLst>
+          </p:cNvPr>
+          <p:cNvSpPr/>
+          <p:nvPr/>
+        </p:nvSpPr>
+        <p:spPr>
+          <a:xfrm>
+            <a:off x="0" y="-31518"/>
+            <a:ext cx="12192000" cy="1131606"/>
+          </a:xfrm>
+          <a:prstGeom prst="rect">
+            <a:avLst/>
+          </a:prstGeom>
+          <a:solidFill>
+            <a:srgbClr val="C00000"/>
+          </a:solidFill>
+          <a:ln>
+            <a:noFill/>
+          </a:ln>
+        </p:spPr>
+        <p:txBody>
+          <a:bodyPr spcFirstLastPara="1" wrap="square" lIns="91425" tIns="45700" rIns="91425" bIns="45700" anchor="ctr" anchorCtr="0">
+            <a:noAutofit/>
+          </a:bodyPr>
+          <a:lstStyle/>
+          <a:p>
+            <a:pPr marL="0" marR="0" lvl="0" indent="0" rtl="0">
+              <a:lnSpc>
+                <a:spcPct val="100000"/>
+              </a:lnSpc>
+              <a:spcBef>
+                <a:spcPts val="0"/>
+              </a:spcBef>
+              <a:spcAft>
+                <a:spcPts val="0"/>
+              </a:spcAft>
+              <a:buClr>
+                <a:srgbClr val="000000"/>
+              </a:buClr>
+              <a:buSzPts val="1600"/>
+              <a:buFont typeface="Arial"/>
+              <a:buNone/>
+            </a:pPr>
+            <a:r>
+              <a:rPr lang="en-US" sz="4800" dirty="0">
+                <a:solidFill>
+                  <a:schemeClr val="lt1"/>
+                </a:solidFill>
+              </a:rPr>
+              <a:t> 150+ Murdered: by Intelligence Services</a:t>
+            </a:r>
+            <a:endParaRPr sz="3200" b="0" i="0" u="none" strike="noStrike" cap="none" dirty="0">
+              <a:solidFill>
+                <a:srgbClr val="000000"/>
+              </a:solidFill>
+              <a:latin typeface="Arial"/>
+              <a:ea typeface="Arial"/>
+              <a:cs typeface="Arial"/>
+              <a:sym typeface="Arial"/>
+            </a:endParaRPr>
+          </a:p>
+        </p:txBody>
+      </p:sp>
+      <p:sp>
+        <p:nvSpPr>
+          <p:cNvPr id="4" name="TextBox 3">
+            <a:extLst>
+              <a:ext uri="{FF2B5EF4-FFF2-40B4-BE49-F238E27FC236}">
+                <a16:creationId xmlns:a16="http://schemas.microsoft.com/office/drawing/2014/main" id="{50D7621F-9D36-7894-7117-9F831EF5EFA6}"/>
+              </a:ext>
+            </a:extLst>
+          </p:cNvPr>
+          <p:cNvSpPr txBox="1"/>
+          <p:nvPr/>
+        </p:nvSpPr>
+        <p:spPr>
+          <a:xfrm>
+            <a:off x="107300" y="6229650"/>
+            <a:ext cx="11685989" cy="461665"/>
+          </a:xfrm>
+          <a:prstGeom prst="rect">
+            <a:avLst/>
+          </a:prstGeom>
+          <a:solidFill>
+            <a:schemeClr val="bg1">
+              <a:alpha val="84400"/>
+            </a:schemeClr>
+          </a:solidFill>
+        </p:spPr>
+        <p:txBody>
+          <a:bodyPr wrap="square" rtlCol="0">
+            <a:spAutoFit/>
+          </a:bodyPr>
+          <a:lstStyle/>
+          <a:p>
+            <a:r>
+              <a:rPr lang="en-US" sz="2400" dirty="0"/>
+              <a:t>https://intelligencemurders.com/intel</a:t>
+            </a:r>
+          </a:p>
+        </p:txBody>
+      </p:sp>
+      <p:sp>
+        <p:nvSpPr>
+          <p:cNvPr id="7" name="Google Shape;170;p31">
+            <a:extLst>
+              <a:ext uri="{FF2B5EF4-FFF2-40B4-BE49-F238E27FC236}">
+                <a16:creationId xmlns:a16="http://schemas.microsoft.com/office/drawing/2014/main" id="{4B582382-76AA-B49E-C611-39A37CE591B9}"/>
+              </a:ext>
+            </a:extLst>
+          </p:cNvPr>
+          <p:cNvSpPr/>
+          <p:nvPr/>
+        </p:nvSpPr>
+        <p:spPr>
+          <a:xfrm>
+            <a:off x="7506336" y="4925186"/>
+            <a:ext cx="4550222" cy="869505"/>
+          </a:xfrm>
+          <a:prstGeom prst="rect">
+            <a:avLst/>
+          </a:prstGeom>
+          <a:solidFill>
+            <a:srgbClr val="C00000"/>
+          </a:solidFill>
+          <a:ln>
+            <a:noFill/>
+          </a:ln>
+        </p:spPr>
+        <p:txBody>
+          <a:bodyPr spcFirstLastPara="1" wrap="square" lIns="91425" tIns="45700" rIns="91425" bIns="45700" anchor="ctr" anchorCtr="0">
+            <a:noAutofit/>
+          </a:bodyPr>
+          <a:lstStyle/>
+          <a:p>
+            <a:pPr marL="0" marR="0" lvl="0" indent="0" algn="ctr" rtl="0">
+              <a:lnSpc>
+                <a:spcPct val="100000"/>
+              </a:lnSpc>
+              <a:spcBef>
+                <a:spcPts val="0"/>
+              </a:spcBef>
+              <a:spcAft>
+                <a:spcPts val="0"/>
+              </a:spcAft>
+              <a:buClr>
+                <a:srgbClr val="000000"/>
+              </a:buClr>
+              <a:buSzPts val="1600"/>
+              <a:buFont typeface="Arial"/>
+              <a:buNone/>
+            </a:pPr>
+            <a:r>
+              <a:rPr lang="en-US" sz="4800" dirty="0">
+                <a:solidFill>
+                  <a:schemeClr val="lt1"/>
+                </a:solidFill>
+              </a:rPr>
+              <a:t>Ilaria Alpi</a:t>
+            </a:r>
+            <a:endParaRPr sz="3200" b="0" i="0" u="none" strike="noStrike" cap="none" dirty="0">
+              <a:solidFill>
+                <a:srgbClr val="000000"/>
+              </a:solidFill>
+              <a:latin typeface="Arial"/>
+              <a:ea typeface="Arial"/>
+              <a:cs typeface="Arial"/>
+              <a:sym typeface="Arial"/>
+            </a:endParaRPr>
+          </a:p>
+        </p:txBody>
+      </p:sp>
+      <p:sp>
+        <p:nvSpPr>
+          <p:cNvPr id="8" name="Google Shape;170;p31">
+            <a:extLst>
+              <a:ext uri="{FF2B5EF4-FFF2-40B4-BE49-F238E27FC236}">
+                <a16:creationId xmlns:a16="http://schemas.microsoft.com/office/drawing/2014/main" id="{D328ABDE-E232-3EB7-C3F2-B4BB7B64262F}"/>
+              </a:ext>
+            </a:extLst>
+          </p:cNvPr>
+          <p:cNvSpPr/>
+          <p:nvPr/>
+        </p:nvSpPr>
+        <p:spPr>
+          <a:xfrm>
+            <a:off x="7526107" y="5681420"/>
+            <a:ext cx="4550222" cy="548230"/>
+          </a:xfrm>
+          <a:prstGeom prst="rect">
+            <a:avLst/>
+          </a:prstGeom>
+          <a:solidFill>
+            <a:srgbClr val="C00000"/>
+          </a:solidFill>
+          <a:ln>
+            <a:noFill/>
+          </a:ln>
+        </p:spPr>
+        <p:txBody>
+          <a:bodyPr spcFirstLastPara="1" wrap="square" lIns="91425" tIns="45700" rIns="91425" bIns="45700" anchor="ctr" anchorCtr="0">
+            <a:noAutofit/>
+          </a:bodyPr>
+          <a:lstStyle/>
+          <a:p>
+            <a:pPr marL="0" marR="0" lvl="0" indent="0" algn="ctr" rtl="0">
+              <a:lnSpc>
+                <a:spcPct val="100000"/>
+              </a:lnSpc>
+              <a:spcBef>
+                <a:spcPts val="0"/>
+              </a:spcBef>
+              <a:spcAft>
+                <a:spcPts val="0"/>
+              </a:spcAft>
+              <a:buClr>
+                <a:srgbClr val="000000"/>
+              </a:buClr>
+              <a:buSzPts val="1600"/>
+              <a:buFont typeface="Arial"/>
+              <a:buNone/>
+            </a:pPr>
+            <a:r>
+              <a:rPr lang="en-US" sz="3600" dirty="0">
+                <a:solidFill>
+                  <a:schemeClr val="lt1"/>
+                </a:solidFill>
+              </a:rPr>
+              <a:t>Dead at Age 32</a:t>
+            </a:r>
+            <a:endParaRPr sz="2000" b="0" i="0" u="none" strike="noStrike" cap="none" dirty="0">
+              <a:solidFill>
+                <a:srgbClr val="000000"/>
+              </a:solidFill>
+              <a:latin typeface="Arial"/>
+              <a:ea typeface="Arial"/>
+              <a:cs typeface="Arial"/>
+              <a:sym typeface="Arial"/>
+            </a:endParaRPr>
+          </a:p>
+        </p:txBody>
+      </p:sp>
+      <p:sp>
+        <p:nvSpPr>
+          <p:cNvPr id="10" name="TextBox 9">
+            <a:extLst>
+              <a:ext uri="{FF2B5EF4-FFF2-40B4-BE49-F238E27FC236}">
+                <a16:creationId xmlns:a16="http://schemas.microsoft.com/office/drawing/2014/main" id="{5FA0D8B2-6B55-D3DC-BCBB-6FEAD86B9E72}"/>
+              </a:ext>
+            </a:extLst>
+          </p:cNvPr>
+          <p:cNvSpPr txBox="1"/>
+          <p:nvPr/>
+        </p:nvSpPr>
+        <p:spPr>
+          <a:xfrm>
+            <a:off x="129030" y="1905506"/>
+            <a:ext cx="6987941" cy="3046988"/>
+          </a:xfrm>
+          <a:prstGeom prst="rect">
+            <a:avLst/>
+          </a:prstGeom>
+          <a:solidFill>
+            <a:schemeClr val="bg1">
+              <a:alpha val="84400"/>
+            </a:schemeClr>
+          </a:solidFill>
+        </p:spPr>
+        <p:txBody>
+          <a:bodyPr wrap="square" rtlCol="0">
+            <a:spAutoFit/>
+          </a:bodyPr>
+          <a:lstStyle/>
+          <a:p>
+            <a:pPr marL="285750" indent="-285750">
+              <a:spcBef>
+                <a:spcPts val="1200"/>
+              </a:spcBef>
+              <a:buFont typeface="Arial" panose="020B0604020202020204" pitchFamily="34" charset="0"/>
+              <a:buChar char="•"/>
+            </a:pPr>
+            <a:r>
+              <a:rPr dirty="0"/>
+              <a:t>Italian journalist, age 32. AMBUSHED by a 7-man commando in Mogadishu. Shot EXECUTION-STYLE in the temple.</a:t>
+            </a:r>
+          </a:p>
+          <a:p>
+            <a:pPr marL="285750" indent="-285750">
+              <a:spcBef>
+                <a:spcPts val="1200"/>
+              </a:spcBef>
+              <a:buFont typeface="Arial" panose="020B0604020202020204" pitchFamily="34" charset="0"/>
+              <a:buChar char="•"/>
+            </a:pPr>
+            <a:r>
+              <a:rPr dirty="0"/>
+              <a:t>She was investigating ILLEGAL ARMS trafficking and TOXIC WASTE dumping involving Italian intelligence (SISMI).</a:t>
+            </a:r>
+          </a:p>
+          <a:p>
+            <a:pPr marL="285750" indent="-285750">
+              <a:spcBef>
+                <a:spcPts val="1200"/>
+              </a:spcBef>
+              <a:buFont typeface="Arial" panose="020B0604020202020204" pitchFamily="34" charset="0"/>
+              <a:buChar char="•"/>
+            </a:pPr>
+            <a:r>
+              <a:rPr dirty="0"/>
+              <a:t>The only man convicted served 17 YEARS in prison — then was ACQUITTED and awarded 3.1 MILLION euros.</a:t>
+            </a:r>
+          </a:p>
+          <a:p>
+            <a:pPr marL="285750" indent="-285750">
+              <a:spcBef>
+                <a:spcPts val="1200"/>
+              </a:spcBef>
+              <a:buFont typeface="Arial" panose="020B0604020202020204" pitchFamily="34" charset="0"/>
+              <a:buChar char="•"/>
+            </a:pPr>
+            <a:r>
+              <a:rPr dirty="0"/>
+              <a:t>That wrongfully convicted man was later KILLED BY A CAR BOMB in Mogadishu in 2022.</a:t>
+            </a:r>
+          </a:p>
+          <a:p>
+            <a:pPr marL="285750" indent="-285750">
+              <a:spcBef>
+                <a:spcPts val="1200"/>
+              </a:spcBef>
+              <a:buFont typeface="Arial" panose="020B0604020202020204" pitchFamily="34" charset="0"/>
+              <a:buChar char="•"/>
+            </a:pPr>
+            <a:r>
+              <a:rPr dirty="0"/>
+              <a:t>Her cameraman's final footage has NEVER been recovered — the attackers wanted the evidence destroyed.</a:t>
+            </a:r>
+          </a:p>
+        </p:txBody>
+      </p:sp>
     </p:spTree>
-    <p:extLst>
-      <p:ext uri="{BB962C8B-B14F-4D97-AF65-F5344CB8AC3E}">
-        <p14:creationId xmlns:p14="http://schemas.microsoft.com/office/powerpoint/2010/main" val="1430171334"/>
-      </p:ext>
-    </p:extLst>
   </p:cSld>
   <p:clrMapOvr>
     <a:masterClrMapping/>
@@ -10558,7 +11133,7 @@
         <p:spPr>
           <a:xfrm>
             <a:off x="312432" y="1288262"/>
-            <a:ext cx="6494294" cy="584775"/>
+            <a:ext cx="7972976" cy="584775"/>
           </a:xfrm>
           <a:prstGeom prst="rect">
             <a:avLst/>
@@ -10581,7 +11156,7 @@
                   <a:schemeClr val="accent5"/>
                 </a:solidFill>
               </a:rPr>
-              <a:t>Why / How they Jason Thomas:</a:t>
+              <a:t>Why / How they Alexander Zakharchenko:</a:t>
             </a:r>
           </a:p>
         </p:txBody>
@@ -10767,10 +11342,10 @@
       </p:sp>
       <p:sp>
         <p:nvSpPr>
-          <p:cNvPr id="7" name="Google Shape;170;p31">
-            <a:extLst>
-              <a:ext uri="{FF2B5EF4-FFF2-40B4-BE49-F238E27FC236}">
-                <a16:creationId xmlns:a16="http://schemas.microsoft.com/office/drawing/2014/main" id="{4B582382-76AA-B49E-C611-39A37CE591B9}"/>
+          <p:cNvPr id="8" name="Google Shape;170;p31">
+            <a:extLst>
+              <a:ext uri="{FF2B5EF4-FFF2-40B4-BE49-F238E27FC236}">
+                <a16:creationId xmlns:a16="http://schemas.microsoft.com/office/drawing/2014/main" id="{D328ABDE-E232-3EB7-C3F2-B4BB7B64262F}"/>
               </a:ext>
             </a:extLst>
           </p:cNvPr>
@@ -10779,8 +11354,8 @@
         </p:nvSpPr>
         <p:spPr>
           <a:xfrm>
-            <a:off x="7506336" y="4925186"/>
-            <a:ext cx="4550222" cy="869505"/>
+            <a:off x="7534478" y="6229650"/>
+            <a:ext cx="4550222" cy="548230"/>
           </a:xfrm>
           <a:prstGeom prst="rect">
             <a:avLst/>
@@ -10816,14 +11391,14 @@
               <a:buNone/>
             </a:pPr>
             <a:r>
-              <a:rPr lang="en-US" sz="4800" dirty="0">
+              <a:rPr lang="en-US" sz="3600" dirty="0">
                 <a:solidFill>
                   <a:schemeClr val="lt1"/>
                 </a:solidFill>
               </a:rPr>
-              <a:t>Jason Thomas</a:t>
-            </a:r>
-            <a:endParaRPr sz="3200" b="0" i="0" u="none" strike="noStrike" cap="none" dirty="0">
+              <a:t>Dead at Age 42</a:t>
+            </a:r>
+            <a:endParaRPr sz="2000" b="0" i="0" u="none" strike="noStrike" cap="none" dirty="0">
               <a:solidFill>
                 <a:srgbClr val="000000"/>
               </a:solidFill>
@@ -10837,76 +11412,6 @@
       </p:sp>
       <p:sp>
         <p:nvSpPr>
-          <p:cNvPr id="8" name="Google Shape;170;p31">
-            <a:extLst>
-              <a:ext uri="{FF2B5EF4-FFF2-40B4-BE49-F238E27FC236}">
-                <a16:creationId xmlns:a16="http://schemas.microsoft.com/office/drawing/2014/main" id="{D328ABDE-E232-3EB7-C3F2-B4BB7B64262F}"/>
-              </a:ext>
-            </a:extLst>
-          </p:cNvPr>
-          <p:cNvSpPr/>
-          <p:nvPr/>
-        </p:nvSpPr>
-        <p:spPr>
-          <a:xfrm>
-            <a:off x="7526107" y="5681420"/>
-            <a:ext cx="4550222" cy="548230"/>
-          </a:xfrm>
-          <a:prstGeom prst="rect">
-            <a:avLst/>
-          </a:prstGeom>
-          <a:solidFill>
-            <a:srgbClr val="C00000"/>
-          </a:solidFill>
-          <a:ln>
-            <a:noFill/>
-          </a:ln>
-        </p:spPr>
-        <p:txBody>
-          <a:bodyPr spcFirstLastPara="1" wrap="square" lIns="91425" tIns="45700" rIns="91425" bIns="45700" anchor="ctr" anchorCtr="0">
-            <a:noAutofit/>
-          </a:bodyPr>
-          <a:lstStyle/>
-          <a:p>
-            <a:pPr marL="0" marR="0" lvl="0" indent="0" algn="ctr" rtl="0">
-              <a:lnSpc>
-                <a:spcPct val="100000"/>
-              </a:lnSpc>
-              <a:spcBef>
-                <a:spcPts val="0"/>
-              </a:spcBef>
-              <a:spcAft>
-                <a:spcPts val="0"/>
-              </a:spcAft>
-              <a:buClr>
-                <a:srgbClr val="000000"/>
-              </a:buClr>
-              <a:buSzPts val="1600"/>
-              <a:buFont typeface="Arial"/>
-              <a:buNone/>
-            </a:pPr>
-            <a:r>
-              <a:rPr lang="en-US" sz="3600" dirty="0">
-                <a:solidFill>
-                  <a:schemeClr val="lt1"/>
-                </a:solidFill>
-              </a:rPr>
-              <a:t>Dead at Age 45</a:t>
-            </a:r>
-            <a:endParaRPr sz="2000" b="0" i="0" u="none" strike="noStrike" cap="none" dirty="0">
-              <a:solidFill>
-                <a:srgbClr val="000000"/>
-              </a:solidFill>
-              <a:latin typeface="Arial"/>
-              <a:ea typeface="Arial"/>
-              <a:cs typeface="Arial"/>
-              <a:sym typeface="Arial"/>
-            </a:endParaRPr>
-          </a:p>
-        </p:txBody>
-      </p:sp>
-      <p:sp>
-        <p:nvSpPr>
           <p:cNvPr id="10" name="TextBox 9">
             <a:extLst>
               <a:ext uri="{FF2B5EF4-FFF2-40B4-BE49-F238E27FC236}">
@@ -10945,7 +11450,7 @@
               <a:buChar char="•"/>
             </a:pPr>
             <a:r>
-              <a:t>Cancer researcher with DEPARTMENT OF DEFENSE contracts through Novartis. Age 45. Found dead in a FROZEN LAKE.</a:t>
+              <a:t>Blown up by a BOMB hidden inside a cafe he visited DAILY in Donetsk. Age 42.</a:t>
             </a:r>
           </a:p>
           <a:p>
@@ -10957,7 +11462,7 @@
               <a:buChar char="•"/>
             </a:pPr>
             <a:r>
-              <a:t>Disappeared December 2025 after leaving behind his wallet, phone, and Apple Watch — watch was in the MAILBOX.</a:t>
+              <a:t>The bomb was concealed in a LIGHTING FIXTURE above his usual seat — someone knew his exact habits.</a:t>
             </a:r>
           </a:p>
           <a:p>
@@ -10969,7 +11474,7 @@
               <a:buChar char="•"/>
             </a:pPr>
             <a:r>
-              <a:t>His body was submerged in ice for THREE MONTHS, severely limiting forensic evidence.</a:t>
+              <a:t>Both Ukraine AND Russia have been accused. His own security apparatus was likely PENETRATED.</a:t>
             </a:r>
           </a:p>
           <a:p>
@@ -10981,7 +11486,7 @@
               <a:buChar char="•"/>
             </a:pPr>
             <a:r>
-              <a:t>Part of a CLUSTER of scientist deaths in 2025-2026 that drew CONGRESSIONAL attention.</a:t>
+              <a:t>His successor was installed within DAYS — someone was READY for his removal.</a:t>
             </a:r>
           </a:p>
           <a:p>
@@ -10993,14 +11498,14 @@
               <a:buChar char="•"/>
             </a:pPr>
             <a:r>
-              <a:t>Both parents died within ONE HOUR of each other weeks before. Official cause of death STILL NOT RELEASED.</a:t>
+              <a:t>Part of a pattern: separatist leaders in Donbas were being ELIMINATED one by one.</a:t>
             </a:r>
           </a:p>
         </p:txBody>
       </p:sp>
       <p:pic>
         <p:nvPicPr>
-          <p:cNvPr id="16" name="Picture 15" descr="Jason_Thomas.jpg"/>
+          <p:cNvPr id="16" name="Picture 15" descr="Alexander_Zakharchenko.jpg"/>
           <p:cNvPicPr>
             <a:picLocks noChangeAspect="1"/>
           </p:cNvPicPr>
@@ -11014,15 +11519,90 @@
         </p:blipFill>
         <p:spPr>
           <a:xfrm>
-            <a:off x="8170539" y="1100088"/>
-            <a:ext cx="2940887" cy="3884876"/>
+            <a:off x="8139098" y="1100088"/>
+            <a:ext cx="3003770" cy="3884876"/>
           </a:xfrm>
           <a:prstGeom prst="rect">
             <a:avLst/>
           </a:prstGeom>
         </p:spPr>
       </p:pic>
+      <p:sp>
+        <p:nvSpPr>
+          <p:cNvPr id="7" name="Google Shape;170;p31">
+            <a:extLst>
+              <a:ext uri="{FF2B5EF4-FFF2-40B4-BE49-F238E27FC236}">
+                <a16:creationId xmlns:a16="http://schemas.microsoft.com/office/drawing/2014/main" id="{4B582382-76AA-B49E-C611-39A37CE591B9}"/>
+              </a:ext>
+            </a:extLst>
+          </p:cNvPr>
+          <p:cNvSpPr/>
+          <p:nvPr/>
+        </p:nvSpPr>
+        <p:spPr>
+          <a:xfrm>
+            <a:off x="7506336" y="4925186"/>
+            <a:ext cx="4550222" cy="1304464"/>
+          </a:xfrm>
+          <a:prstGeom prst="rect">
+            <a:avLst/>
+          </a:prstGeom>
+          <a:solidFill>
+            <a:srgbClr val="C00000"/>
+          </a:solidFill>
+          <a:ln>
+            <a:noFill/>
+          </a:ln>
+        </p:spPr>
+        <p:txBody>
+          <a:bodyPr spcFirstLastPara="1" wrap="square" lIns="91425" tIns="45700" rIns="91425" bIns="45700" anchor="ctr" anchorCtr="0">
+            <a:noAutofit/>
+          </a:bodyPr>
+          <a:lstStyle/>
+          <a:p>
+            <a:pPr marL="0" marR="0" lvl="0" indent="0" algn="ctr" rtl="0">
+              <a:lnSpc>
+                <a:spcPct val="100000"/>
+              </a:lnSpc>
+              <a:spcBef>
+                <a:spcPts val="0"/>
+              </a:spcBef>
+              <a:spcAft>
+                <a:spcPts val="0"/>
+              </a:spcAft>
+              <a:buClr>
+                <a:srgbClr val="000000"/>
+              </a:buClr>
+              <a:buSzPts val="1600"/>
+              <a:buFont typeface="Arial"/>
+              <a:buNone/>
+            </a:pPr>
+            <a:r>
+              <a:rPr lang="en-US" sz="4800" dirty="0">
+                <a:solidFill>
+                  <a:schemeClr val="lt1"/>
+                </a:solidFill>
+              </a:rPr>
+              <a:t>Alexander Zakharchenko</a:t>
+            </a:r>
+            <a:endParaRPr sz="3200" b="0" i="0" u="none" strike="noStrike" cap="none" dirty="0">
+              <a:solidFill>
+                <a:srgbClr val="000000"/>
+              </a:solidFill>
+              <a:latin typeface="Arial"/>
+              <a:ea typeface="Arial"/>
+              <a:cs typeface="Arial"/>
+              <a:sym typeface="Arial"/>
+            </a:endParaRPr>
+          </a:p>
+        </p:txBody>
+      </p:sp>
     </p:spTree>
+    <p:extLst>
+      <p:ext uri="{BB962C8B-B14F-4D97-AF65-F5344CB8AC3E}">
+        <p14:creationId xmlns:p14="http://schemas.microsoft.com/office/powerpoint/2010/main" val="1430171334"/>
+      </p:ext>
+    </p:extLst>
   </p:cSld>
   <p:clrMapOvr>
     <a:masterClrMapping/>
@@ -11062,7 +11642,7 @@
         <p:spPr>
           <a:xfrm>
             <a:off x="312432" y="1288262"/>
-            <a:ext cx="7946044" cy="584775"/>
+            <a:ext cx="6494294" cy="584775"/>
           </a:xfrm>
           <a:prstGeom prst="rect">
             <a:avLst/>
@@ -11085,7 +11665,7 @@
                   <a:schemeClr val="accent5"/>
                 </a:solidFill>
               </a:rPr>
-              <a:t>Why / How they George Lincoln Rockwell:</a:t>
+              <a:t>Why / How they Jason Thomas:</a:t>
             </a:r>
           </a:p>
         </p:txBody>
@@ -11271,10 +11851,10 @@
       </p:sp>
       <p:sp>
         <p:nvSpPr>
-          <p:cNvPr id="8" name="Google Shape;170;p31">
-            <a:extLst>
-              <a:ext uri="{FF2B5EF4-FFF2-40B4-BE49-F238E27FC236}">
-                <a16:creationId xmlns:a16="http://schemas.microsoft.com/office/drawing/2014/main" id="{D328ABDE-E232-3EB7-C3F2-B4BB7B64262F}"/>
+          <p:cNvPr id="7" name="Google Shape;170;p31">
+            <a:extLst>
+              <a:ext uri="{FF2B5EF4-FFF2-40B4-BE49-F238E27FC236}">
+                <a16:creationId xmlns:a16="http://schemas.microsoft.com/office/drawing/2014/main" id="{4B582382-76AA-B49E-C611-39A37CE591B9}"/>
               </a:ext>
             </a:extLst>
           </p:cNvPr>
@@ -11283,8 +11863,8 @@
         </p:nvSpPr>
         <p:spPr>
           <a:xfrm>
-            <a:off x="7583859" y="6253751"/>
-            <a:ext cx="4550222" cy="548230"/>
+            <a:off x="7506336" y="4925186"/>
+            <a:ext cx="4550222" cy="869505"/>
           </a:xfrm>
           <a:prstGeom prst="rect">
             <a:avLst/>
@@ -11320,14 +11900,14 @@
               <a:buNone/>
             </a:pPr>
             <a:r>
-              <a:rPr lang="en-US" sz="3600" dirty="0">
+              <a:rPr lang="en-US" sz="4800" dirty="0">
                 <a:solidFill>
                   <a:schemeClr val="lt1"/>
                 </a:solidFill>
               </a:rPr>
-              <a:t>Dead at Age 49</a:t>
-            </a:r>
-            <a:endParaRPr sz="2000" b="0" i="0" u="none" strike="noStrike" cap="none" dirty="0">
+              <a:t>Jason Thomas</a:t>
+            </a:r>
+            <a:endParaRPr sz="3200" b="0" i="0" u="none" strike="noStrike" cap="none" dirty="0">
               <a:solidFill>
                 <a:srgbClr val="000000"/>
               </a:solidFill>
@@ -11341,6 +11921,76 @@
       </p:sp>
       <p:sp>
         <p:nvSpPr>
+          <p:cNvPr id="8" name="Google Shape;170;p31">
+            <a:extLst>
+              <a:ext uri="{FF2B5EF4-FFF2-40B4-BE49-F238E27FC236}">
+                <a16:creationId xmlns:a16="http://schemas.microsoft.com/office/drawing/2014/main" id="{D328ABDE-E232-3EB7-C3F2-B4BB7B64262F}"/>
+              </a:ext>
+            </a:extLst>
+          </p:cNvPr>
+          <p:cNvSpPr/>
+          <p:nvPr/>
+        </p:nvSpPr>
+        <p:spPr>
+          <a:xfrm>
+            <a:off x="7526107" y="5681420"/>
+            <a:ext cx="4550222" cy="548230"/>
+          </a:xfrm>
+          <a:prstGeom prst="rect">
+            <a:avLst/>
+          </a:prstGeom>
+          <a:solidFill>
+            <a:srgbClr val="C00000"/>
+          </a:solidFill>
+          <a:ln>
+            <a:noFill/>
+          </a:ln>
+        </p:spPr>
+        <p:txBody>
+          <a:bodyPr spcFirstLastPara="1" wrap="square" lIns="91425" tIns="45700" rIns="91425" bIns="45700" anchor="ctr" anchorCtr="0">
+            <a:noAutofit/>
+          </a:bodyPr>
+          <a:lstStyle/>
+          <a:p>
+            <a:pPr marL="0" marR="0" lvl="0" indent="0" algn="ctr" rtl="0">
+              <a:lnSpc>
+                <a:spcPct val="100000"/>
+              </a:lnSpc>
+              <a:spcBef>
+                <a:spcPts val="0"/>
+              </a:spcBef>
+              <a:spcAft>
+                <a:spcPts val="0"/>
+              </a:spcAft>
+              <a:buClr>
+                <a:srgbClr val="000000"/>
+              </a:buClr>
+              <a:buSzPts val="1600"/>
+              <a:buFont typeface="Arial"/>
+              <a:buNone/>
+            </a:pPr>
+            <a:r>
+              <a:rPr lang="en-US" sz="3600" dirty="0">
+                <a:solidFill>
+                  <a:schemeClr val="lt1"/>
+                </a:solidFill>
+              </a:rPr>
+              <a:t>Dead at Age 45</a:t>
+            </a:r>
+            <a:endParaRPr sz="2000" b="0" i="0" u="none" strike="noStrike" cap="none" dirty="0">
+              <a:solidFill>
+                <a:srgbClr val="000000"/>
+              </a:solidFill>
+              <a:latin typeface="Arial"/>
+              <a:ea typeface="Arial"/>
+              <a:cs typeface="Arial"/>
+              <a:sym typeface="Arial"/>
+            </a:endParaRPr>
+          </a:p>
+        </p:txBody>
+      </p:sp>
+      <p:sp>
+        <p:nvSpPr>
           <p:cNvPr id="10" name="TextBox 9">
             <a:extLst>
               <a:ext uri="{FF2B5EF4-FFF2-40B4-BE49-F238E27FC236}">
@@ -11353,8 +12003,8 @@
         </p:nvSpPr>
         <p:spPr>
           <a:xfrm>
-            <a:off x="135442" y="1937976"/>
-            <a:ext cx="7781792" cy="3754874"/>
+            <a:off x="312431" y="2175372"/>
+            <a:ext cx="6987941" cy="3046988"/>
           </a:xfrm>
           <a:prstGeom prst="rect">
             <a:avLst/>
@@ -11379,12 +12029,7 @@
               <a:buChar char="•"/>
             </a:pPr>
             <a:r>
-              <a:rPr lang="en-US" dirty="0"/>
-              <a:t>Political assassination &amp; </a:t>
-            </a:r>
-            <a:r>
-              <a:rPr dirty="0"/>
-              <a:t>SHOT FROM A ROOFTOP at a laundromat parking lot. Age 49. A US Army COUNTERINTELLIGENCE AGENT was an eyewitness.</a:t>
+              <a:t>Cancer researcher with DEPARTMENT OF DEFENSE contracts through Novartis. Age 45. Found dead in a FROZEN LAKE.</a:t>
             </a:r>
           </a:p>
           <a:p>
@@ -11396,8 +12041,7 @@
               <a:buChar char="•"/>
             </a:pPr>
             <a:r>
-              <a:rPr dirty="0"/>
-              <a:t>The FBI's COINTELPRO program was actively INFILTRATING and fomenting INTERNAL CONFLICT in his organization at the time.</a:t>
+              <a:t>Disappeared December 2025 after leaving behind his wallet, phone, and Apple Watch — watch was in the MAILBOX.</a:t>
             </a:r>
           </a:p>
           <a:p>
@@ -11409,8 +12053,7 @@
               <a:buChar char="•"/>
             </a:pPr>
             <a:r>
-              <a:rPr dirty="0"/>
-              <a:t>The convicted killer was an EXPELLED former member</a:t>
+              <a:t>His body was submerged in ice for THREE MONTHS, severely limiting forensic evidence.</a:t>
             </a:r>
           </a:p>
           <a:p>
@@ -11422,8 +12065,7 @@
               <a:buChar char="•"/>
             </a:pPr>
             <a:r>
-              <a:rPr dirty="0"/>
-              <a:t>The evidence was ENTIRELY CIRCUMSTANTIAL. The killer NEVER confessed.</a:t>
+              <a:t>Part of a CLUSTER of scientist deaths in 2025-2026 that drew CONGRESSIONAL attention.</a:t>
             </a:r>
           </a:p>
           <a:p>
@@ -11435,15 +12077,14 @@
               <a:buChar char="•"/>
             </a:pPr>
             <a:r>
-              <a:rPr dirty="0"/>
-              <a:t>The same COINTELPRO program coordinated the killing of Black Panther leader Fred Hampton two years later — proving the FBI was willing to FACILITATE assassinations.</a:t>
+              <a:t>Both parents died within ONE HOUR of each other weeks before. Official cause of death STILL NOT RELEASED.</a:t>
             </a:r>
           </a:p>
         </p:txBody>
       </p:sp>
       <p:pic>
         <p:nvPicPr>
-          <p:cNvPr id="16" name="Picture 15" descr="George_Lincoln_Rockwell.jpg"/>
+          <p:cNvPr id="16" name="Picture 15" descr="Jason_Thomas.jpg"/>
           <p:cNvPicPr>
             <a:picLocks noChangeAspect="1"/>
           </p:cNvPicPr>
@@ -11457,84 +12098,14 @@
         </p:blipFill>
         <p:spPr>
           <a:xfrm>
-            <a:off x="8180503" y="1100088"/>
-            <a:ext cx="2920959" cy="3884876"/>
+            <a:off x="8170539" y="1100088"/>
+            <a:ext cx="2940887" cy="3884876"/>
           </a:xfrm>
           <a:prstGeom prst="rect">
             <a:avLst/>
           </a:prstGeom>
         </p:spPr>
       </p:pic>
-      <p:sp>
-        <p:nvSpPr>
-          <p:cNvPr id="7" name="Google Shape;170;p31">
-            <a:extLst>
-              <a:ext uri="{FF2B5EF4-FFF2-40B4-BE49-F238E27FC236}">
-                <a16:creationId xmlns:a16="http://schemas.microsoft.com/office/drawing/2014/main" id="{4B582382-76AA-B49E-C611-39A37CE591B9}"/>
-              </a:ext>
-            </a:extLst>
-          </p:cNvPr>
-          <p:cNvSpPr/>
-          <p:nvPr/>
-        </p:nvSpPr>
-        <p:spPr>
-          <a:xfrm>
-            <a:off x="7583859" y="4943025"/>
-            <a:ext cx="4550222" cy="1328565"/>
-          </a:xfrm>
-          <a:prstGeom prst="rect">
-            <a:avLst/>
-          </a:prstGeom>
-          <a:solidFill>
-            <a:srgbClr val="C00000"/>
-          </a:solidFill>
-          <a:ln>
-            <a:noFill/>
-          </a:ln>
-        </p:spPr>
-        <p:txBody>
-          <a:bodyPr spcFirstLastPara="1" wrap="square" lIns="91425" tIns="45700" rIns="91425" bIns="45700" anchor="ctr" anchorCtr="0">
-            <a:noAutofit/>
-          </a:bodyPr>
-          <a:lstStyle/>
-          <a:p>
-            <a:pPr marL="0" marR="0" lvl="0" indent="0" algn="ctr" rtl="0">
-              <a:lnSpc>
-                <a:spcPct val="100000"/>
-              </a:lnSpc>
-              <a:spcBef>
-                <a:spcPts val="0"/>
-              </a:spcBef>
-              <a:spcAft>
-                <a:spcPts val="0"/>
-              </a:spcAft>
-              <a:buClr>
-                <a:srgbClr val="000000"/>
-              </a:buClr>
-              <a:buSzPts val="1600"/>
-              <a:buFont typeface="Arial"/>
-              <a:buNone/>
-            </a:pPr>
-            <a:r>
-              <a:rPr lang="en-US" sz="4800" dirty="0">
-                <a:solidFill>
-                  <a:schemeClr val="lt1"/>
-                </a:solidFill>
-              </a:rPr>
-              <a:t>George Lincoln Rockwell</a:t>
-            </a:r>
-            <a:endParaRPr sz="3200" b="0" i="0" u="none" strike="noStrike" cap="none" dirty="0">
-              <a:solidFill>
-                <a:srgbClr val="000000"/>
-              </a:solidFill>
-              <a:latin typeface="Arial"/>
-              <a:ea typeface="Arial"/>
-              <a:cs typeface="Arial"/>
-              <a:sym typeface="Arial"/>
-            </a:endParaRPr>
-          </a:p>
-        </p:txBody>
-      </p:sp>
     </p:spTree>
   </p:cSld>
   <p:clrMapOvr>

--- a/docs/Intel/Intelligence_Service_Murders.pptx
+++ b/docs/Intel/Intelligence_Service_Murders.pptx
@@ -4,6 +4,9 @@
   <p:sldMasterIdLst>
     <p:sldMasterId id="2147483648" r:id="rId1"/>
   </p:sldMasterIdLst>
+  <p:notesMasterIdLst>
+    <p:notesMasterId r:id="rId19"/>
+  </p:notesMasterIdLst>
   <p:sldIdLst>
     <p:sldId id="323" r:id="rId2"/>
     <p:sldId id="325" r:id="rId3"/>
@@ -128,6 +131,1363 @@
 </p:presentation>
 </file>
 
+<file path=ppt/notesMasters/notesMaster1.xml><?xml version="1.0" encoding="utf-8"?>
+<p:notesMaster xmlns:a="http://schemas.openxmlformats.org/drawingml/2006/main" xmlns:r="http://schemas.openxmlformats.org/officeDocument/2006/relationships" xmlns:p="http://schemas.openxmlformats.org/presentationml/2006/main">
+  <p:cSld>
+    <p:bg>
+      <p:bgRef idx="1001">
+        <a:schemeClr val="bg1"/>
+      </p:bgRef>
+    </p:bg>
+    <p:spTree>
+      <p:nvGrpSpPr>
+        <p:cNvPr id="1" name=""/>
+        <p:cNvGrpSpPr/>
+        <p:nvPr/>
+      </p:nvGrpSpPr>
+      <p:grpSpPr>
+        <a:xfrm>
+          <a:off x="0" y="0"/>
+          <a:ext cx="0" cy="0"/>
+          <a:chOff x="0" y="0"/>
+          <a:chExt cx="0" cy="0"/>
+        </a:xfrm>
+      </p:grpSpPr>
+      <p:sp>
+        <p:nvSpPr>
+          <p:cNvPr id="2" name="Header Placeholder 1"/>
+          <p:cNvSpPr>
+            <a:spLocks noGrp="1"/>
+          </p:cNvSpPr>
+          <p:nvPr>
+            <p:ph type="hdr" sz="quarter"/>
+          </p:nvPr>
+        </p:nvSpPr>
+        <p:spPr>
+          <a:xfrm>
+            <a:off x="0" y="0"/>
+            <a:ext cx="2971800" cy="458788"/>
+          </a:xfrm>
+          <a:prstGeom prst="rect">
+            <a:avLst/>
+          </a:prstGeom>
+        </p:spPr>
+        <p:txBody>
+          <a:bodyPr vert="horz" lIns="91440" tIns="45720" rIns="91440" bIns="45720" rtlCol="0"/>
+          <a:lstStyle>
+            <a:lvl1pPr algn="l">
+              <a:defRPr sz="1200"/>
+            </a:lvl1pPr>
+          </a:lstStyle>
+          <a:p>
+            <a:endParaRPr lang="en-US"/>
+          </a:p>
+        </p:txBody>
+      </p:sp>
+      <p:sp>
+        <p:nvSpPr>
+          <p:cNvPr id="3" name="Date Placeholder 2"/>
+          <p:cNvSpPr>
+            <a:spLocks noGrp="1"/>
+          </p:cNvSpPr>
+          <p:nvPr>
+            <p:ph type="dt" idx="1"/>
+          </p:nvPr>
+        </p:nvSpPr>
+        <p:spPr>
+          <a:xfrm>
+            <a:off x="3884613" y="0"/>
+            <a:ext cx="2971800" cy="458788"/>
+          </a:xfrm>
+          <a:prstGeom prst="rect">
+            <a:avLst/>
+          </a:prstGeom>
+        </p:spPr>
+        <p:txBody>
+          <a:bodyPr vert="horz" lIns="91440" tIns="45720" rIns="91440" bIns="45720" rtlCol="0"/>
+          <a:lstStyle>
+            <a:lvl1pPr algn="r">
+              <a:defRPr sz="1200"/>
+            </a:lvl1pPr>
+          </a:lstStyle>
+          <a:p>
+            <a:fld id="{7B99E08A-92FC-D944-9193-9B9B35ADF3D2}" type="datetimeFigureOut">
+              <a:rPr lang="en-US" smtClean="0"/>
+              <a:t>3/31/26</a:t>
+            </a:fld>
+            <a:endParaRPr lang="en-US"/>
+          </a:p>
+        </p:txBody>
+      </p:sp>
+      <p:sp>
+        <p:nvSpPr>
+          <p:cNvPr id="4" name="Slide Image Placeholder 3"/>
+          <p:cNvSpPr>
+            <a:spLocks noGrp="1" noRot="1" noChangeAspect="1"/>
+          </p:cNvSpPr>
+          <p:nvPr>
+            <p:ph type="sldImg" idx="2"/>
+          </p:nvPr>
+        </p:nvSpPr>
+        <p:spPr>
+          <a:xfrm>
+            <a:off x="685800" y="1143000"/>
+            <a:ext cx="5486400" cy="3086100"/>
+          </a:xfrm>
+          <a:prstGeom prst="rect">
+            <a:avLst/>
+          </a:prstGeom>
+          <a:noFill/>
+          <a:ln w="12700">
+            <a:solidFill>
+              <a:prstClr val="black"/>
+            </a:solidFill>
+          </a:ln>
+        </p:spPr>
+        <p:txBody>
+          <a:bodyPr vert="horz" lIns="91440" tIns="45720" rIns="91440" bIns="45720" rtlCol="0" anchor="ctr"/>
+          <a:lstStyle/>
+          <a:p>
+            <a:endParaRPr lang="en-US"/>
+          </a:p>
+        </p:txBody>
+      </p:sp>
+      <p:sp>
+        <p:nvSpPr>
+          <p:cNvPr id="5" name="Notes Placeholder 4"/>
+          <p:cNvSpPr>
+            <a:spLocks noGrp="1"/>
+          </p:cNvSpPr>
+          <p:nvPr>
+            <p:ph type="body" sz="quarter" idx="3"/>
+          </p:nvPr>
+        </p:nvSpPr>
+        <p:spPr>
+          <a:xfrm>
+            <a:off x="685800" y="4400550"/>
+            <a:ext cx="5486400" cy="3600450"/>
+          </a:xfrm>
+          <a:prstGeom prst="rect">
+            <a:avLst/>
+          </a:prstGeom>
+        </p:spPr>
+        <p:txBody>
+          <a:bodyPr vert="horz" lIns="91440" tIns="45720" rIns="91440" bIns="45720" rtlCol="0"/>
+          <a:lstStyle/>
+          <a:p>
+            <a:pPr lvl="0"/>
+            <a:r>
+              <a:rPr lang="en-US"/>
+              <a:t>Click to edit Master text styles</a:t>
+            </a:r>
+          </a:p>
+          <a:p>
+            <a:pPr lvl="1"/>
+            <a:r>
+              <a:rPr lang="en-US"/>
+              <a:t>Second level</a:t>
+            </a:r>
+          </a:p>
+          <a:p>
+            <a:pPr lvl="2"/>
+            <a:r>
+              <a:rPr lang="en-US"/>
+              <a:t>Third level</a:t>
+            </a:r>
+          </a:p>
+          <a:p>
+            <a:pPr lvl="3"/>
+            <a:r>
+              <a:rPr lang="en-US"/>
+              <a:t>Fourth level</a:t>
+            </a:r>
+          </a:p>
+          <a:p>
+            <a:pPr lvl="4"/>
+            <a:r>
+              <a:rPr lang="en-US"/>
+              <a:t>Fifth level</a:t>
+            </a:r>
+          </a:p>
+        </p:txBody>
+      </p:sp>
+      <p:sp>
+        <p:nvSpPr>
+          <p:cNvPr id="6" name="Footer Placeholder 5"/>
+          <p:cNvSpPr>
+            <a:spLocks noGrp="1"/>
+          </p:cNvSpPr>
+          <p:nvPr>
+            <p:ph type="ftr" sz="quarter" idx="4"/>
+          </p:nvPr>
+        </p:nvSpPr>
+        <p:spPr>
+          <a:xfrm>
+            <a:off x="0" y="8685213"/>
+            <a:ext cx="2971800" cy="458787"/>
+          </a:xfrm>
+          <a:prstGeom prst="rect">
+            <a:avLst/>
+          </a:prstGeom>
+        </p:spPr>
+        <p:txBody>
+          <a:bodyPr vert="horz" lIns="91440" tIns="45720" rIns="91440" bIns="45720" rtlCol="0" anchor="b"/>
+          <a:lstStyle>
+            <a:lvl1pPr algn="l">
+              <a:defRPr sz="1200"/>
+            </a:lvl1pPr>
+          </a:lstStyle>
+          <a:p>
+            <a:endParaRPr lang="en-US"/>
+          </a:p>
+        </p:txBody>
+      </p:sp>
+      <p:sp>
+        <p:nvSpPr>
+          <p:cNvPr id="7" name="Slide Number Placeholder 6"/>
+          <p:cNvSpPr>
+            <a:spLocks noGrp="1"/>
+          </p:cNvSpPr>
+          <p:nvPr>
+            <p:ph type="sldNum" sz="quarter" idx="5"/>
+          </p:nvPr>
+        </p:nvSpPr>
+        <p:spPr>
+          <a:xfrm>
+            <a:off x="3884613" y="8685213"/>
+            <a:ext cx="2971800" cy="458787"/>
+          </a:xfrm>
+          <a:prstGeom prst="rect">
+            <a:avLst/>
+          </a:prstGeom>
+        </p:spPr>
+        <p:txBody>
+          <a:bodyPr vert="horz" lIns="91440" tIns="45720" rIns="91440" bIns="45720" rtlCol="0" anchor="b"/>
+          <a:lstStyle>
+            <a:lvl1pPr algn="r">
+              <a:defRPr sz="1200"/>
+            </a:lvl1pPr>
+          </a:lstStyle>
+          <a:p>
+            <a:fld id="{A54C56DB-0A14-534F-B434-53937DF20138}" type="slidenum">
+              <a:rPr lang="en-US" smtClean="0"/>
+              <a:t>‹#›</a:t>
+            </a:fld>
+            <a:endParaRPr lang="en-US"/>
+          </a:p>
+        </p:txBody>
+      </p:sp>
+    </p:spTree>
+    <p:extLst>
+      <p:ext uri="{BB962C8B-B14F-4D97-AF65-F5344CB8AC3E}">
+        <p14:creationId xmlns:p14="http://schemas.microsoft.com/office/powerpoint/2010/main" val="980034994"/>
+      </p:ext>
+    </p:extLst>
+  </p:cSld>
+  <p:clrMap bg1="lt1" tx1="dk1" bg2="lt2" tx2="dk2" accent1="accent1" accent2="accent2" accent3="accent3" accent4="accent4" accent5="accent5" accent6="accent6" hlink="hlink" folHlink="folHlink"/>
+  <p:notesStyle>
+    <a:lvl1pPr marL="0" algn="l" defTabSz="914400" rtl="0" eaLnBrk="1" latinLnBrk="0" hangingPunct="1">
+      <a:defRPr sz="1200" kern="1200">
+        <a:solidFill>
+          <a:schemeClr val="tx1"/>
+        </a:solidFill>
+        <a:latin typeface="+mn-lt"/>
+        <a:ea typeface="+mn-ea"/>
+        <a:cs typeface="+mn-cs"/>
+      </a:defRPr>
+    </a:lvl1pPr>
+    <a:lvl2pPr marL="457200" algn="l" defTabSz="914400" rtl="0" eaLnBrk="1" latinLnBrk="0" hangingPunct="1">
+      <a:defRPr sz="1200" kern="1200">
+        <a:solidFill>
+          <a:schemeClr val="tx1"/>
+        </a:solidFill>
+        <a:latin typeface="+mn-lt"/>
+        <a:ea typeface="+mn-ea"/>
+        <a:cs typeface="+mn-cs"/>
+      </a:defRPr>
+    </a:lvl2pPr>
+    <a:lvl3pPr marL="914400" algn="l" defTabSz="914400" rtl="0" eaLnBrk="1" latinLnBrk="0" hangingPunct="1">
+      <a:defRPr sz="1200" kern="1200">
+        <a:solidFill>
+          <a:schemeClr val="tx1"/>
+        </a:solidFill>
+        <a:latin typeface="+mn-lt"/>
+        <a:ea typeface="+mn-ea"/>
+        <a:cs typeface="+mn-cs"/>
+      </a:defRPr>
+    </a:lvl3pPr>
+    <a:lvl4pPr marL="1371600" algn="l" defTabSz="914400" rtl="0" eaLnBrk="1" latinLnBrk="0" hangingPunct="1">
+      <a:defRPr sz="1200" kern="1200">
+        <a:solidFill>
+          <a:schemeClr val="tx1"/>
+        </a:solidFill>
+        <a:latin typeface="+mn-lt"/>
+        <a:ea typeface="+mn-ea"/>
+        <a:cs typeface="+mn-cs"/>
+      </a:defRPr>
+    </a:lvl4pPr>
+    <a:lvl5pPr marL="1828800" algn="l" defTabSz="914400" rtl="0" eaLnBrk="1" latinLnBrk="0" hangingPunct="1">
+      <a:defRPr sz="1200" kern="1200">
+        <a:solidFill>
+          <a:schemeClr val="tx1"/>
+        </a:solidFill>
+        <a:latin typeface="+mn-lt"/>
+        <a:ea typeface="+mn-ea"/>
+        <a:cs typeface="+mn-cs"/>
+      </a:defRPr>
+    </a:lvl5pPr>
+    <a:lvl6pPr marL="2286000" algn="l" defTabSz="914400" rtl="0" eaLnBrk="1" latinLnBrk="0" hangingPunct="1">
+      <a:defRPr sz="1200" kern="1200">
+        <a:solidFill>
+          <a:schemeClr val="tx1"/>
+        </a:solidFill>
+        <a:latin typeface="+mn-lt"/>
+        <a:ea typeface="+mn-ea"/>
+        <a:cs typeface="+mn-cs"/>
+      </a:defRPr>
+    </a:lvl6pPr>
+    <a:lvl7pPr marL="2743200" algn="l" defTabSz="914400" rtl="0" eaLnBrk="1" latinLnBrk="0" hangingPunct="1">
+      <a:defRPr sz="1200" kern="1200">
+        <a:solidFill>
+          <a:schemeClr val="tx1"/>
+        </a:solidFill>
+        <a:latin typeface="+mn-lt"/>
+        <a:ea typeface="+mn-ea"/>
+        <a:cs typeface="+mn-cs"/>
+      </a:defRPr>
+    </a:lvl7pPr>
+    <a:lvl8pPr marL="3200400" algn="l" defTabSz="914400" rtl="0" eaLnBrk="1" latinLnBrk="0" hangingPunct="1">
+      <a:defRPr sz="1200" kern="1200">
+        <a:solidFill>
+          <a:schemeClr val="tx1"/>
+        </a:solidFill>
+        <a:latin typeface="+mn-lt"/>
+        <a:ea typeface="+mn-ea"/>
+        <a:cs typeface="+mn-cs"/>
+      </a:defRPr>
+    </a:lvl8pPr>
+    <a:lvl9pPr marL="3657600" algn="l" defTabSz="914400" rtl="0" eaLnBrk="1" latinLnBrk="0" hangingPunct="1">
+      <a:defRPr sz="1200" kern="1200">
+        <a:solidFill>
+          <a:schemeClr val="tx1"/>
+        </a:solidFill>
+        <a:latin typeface="+mn-lt"/>
+        <a:ea typeface="+mn-ea"/>
+        <a:cs typeface="+mn-cs"/>
+      </a:defRPr>
+    </a:lvl9pPr>
+  </p:notesStyle>
+</p:notesMaster>
+</file>
+
+<file path=ppt/notesSlides/notesSlide1.xml><?xml version="1.0" encoding="utf-8"?>
+<p:notes xmlns:a="http://schemas.openxmlformats.org/drawingml/2006/main" xmlns:r="http://schemas.openxmlformats.org/officeDocument/2006/relationships" xmlns:p="http://schemas.openxmlformats.org/presentationml/2006/main">
+  <p:cSld>
+    <p:spTree>
+      <p:nvGrpSpPr>
+        <p:cNvPr id="1" name=""/>
+        <p:cNvGrpSpPr/>
+        <p:nvPr/>
+      </p:nvGrpSpPr>
+      <p:grpSpPr>
+        <a:xfrm>
+          <a:off x="0" y="0"/>
+          <a:ext cx="0" cy="0"/>
+          <a:chOff x="0" y="0"/>
+          <a:chExt cx="0" cy="0"/>
+        </a:xfrm>
+      </p:grpSpPr>
+      <p:sp>
+        <p:nvSpPr>
+          <p:cNvPr id="2" name="Slide Image Placeholder 1"/>
+          <p:cNvSpPr>
+            <a:spLocks noGrp="1" noRot="1" noChangeAspect="1"/>
+          </p:cNvSpPr>
+          <p:nvPr>
+            <p:ph type="sldImg"/>
+          </p:nvPr>
+        </p:nvSpPr>
+        <p:spPr/>
+      </p:sp>
+      <p:sp>
+        <p:nvSpPr>
+          <p:cNvPr id="3" name="Notes Placeholder 2"/>
+          <p:cNvSpPr>
+            <a:spLocks noGrp="1"/>
+          </p:cNvSpPr>
+          <p:nvPr>
+            <p:ph type="body" idx="1"/>
+          </p:nvPr>
+        </p:nvSpPr>
+        <p:spPr/>
+        <p:txBody>
+          <a:bodyPr/>
+          <a:lstStyle/>
+          <a:p>
+            <a:endParaRPr lang="en-US" dirty="0"/>
+          </a:p>
+        </p:txBody>
+      </p:sp>
+      <p:sp>
+        <p:nvSpPr>
+          <p:cNvPr id="4" name="Slide Number Placeholder 3"/>
+          <p:cNvSpPr>
+            <a:spLocks noGrp="1"/>
+          </p:cNvSpPr>
+          <p:nvPr>
+            <p:ph type="sldNum" sz="quarter" idx="5"/>
+          </p:nvPr>
+        </p:nvSpPr>
+        <p:spPr/>
+        <p:txBody>
+          <a:bodyPr/>
+          <a:lstStyle/>
+          <a:p>
+            <a:fld id="{A54C56DB-0A14-534F-B434-53937DF20138}" type="slidenum">
+              <a:rPr lang="en-US" smtClean="0"/>
+              <a:t>2</a:t>
+            </a:fld>
+            <a:endParaRPr lang="en-US"/>
+          </a:p>
+        </p:txBody>
+      </p:sp>
+    </p:spTree>
+    <p:extLst>
+      <p:ext uri="{BB962C8B-B14F-4D97-AF65-F5344CB8AC3E}">
+        <p14:creationId xmlns:p14="http://schemas.microsoft.com/office/powerpoint/2010/main" val="4013419371"/>
+      </p:ext>
+    </p:extLst>
+  </p:cSld>
+  <p:clrMapOvr>
+    <a:masterClrMapping/>
+  </p:clrMapOvr>
+</p:notes>
+</file>
+
+<file path=ppt/notesSlides/notesSlide10.xml><?xml version="1.0" encoding="utf-8"?>
+<p:notes xmlns:a="http://schemas.openxmlformats.org/drawingml/2006/main" xmlns:r="http://schemas.openxmlformats.org/officeDocument/2006/relationships" xmlns:p="http://schemas.openxmlformats.org/presentationml/2006/main">
+  <p:cSld>
+    <p:spTree>
+      <p:nvGrpSpPr>
+        <p:cNvPr id="1" name=""/>
+        <p:cNvGrpSpPr/>
+        <p:nvPr/>
+      </p:nvGrpSpPr>
+      <p:grpSpPr>
+        <a:xfrm>
+          <a:off x="0" y="0"/>
+          <a:ext cx="0" cy="0"/>
+          <a:chOff x="0" y="0"/>
+          <a:chExt cx="0" cy="0"/>
+        </a:xfrm>
+      </p:grpSpPr>
+      <p:sp>
+        <p:nvSpPr>
+          <p:cNvPr id="2" name="Slide Image Placeholder 1"/>
+          <p:cNvSpPr>
+            <a:spLocks noGrp="1" noRot="1" noChangeAspect="1"/>
+          </p:cNvSpPr>
+          <p:nvPr>
+            <p:ph type="sldImg"/>
+          </p:nvPr>
+        </p:nvSpPr>
+        <p:spPr/>
+      </p:sp>
+      <p:sp>
+        <p:nvSpPr>
+          <p:cNvPr id="3" name="Notes Placeholder 2"/>
+          <p:cNvSpPr>
+            <a:spLocks noGrp="1"/>
+          </p:cNvSpPr>
+          <p:nvPr>
+            <p:ph type="body" idx="1"/>
+          </p:nvPr>
+        </p:nvSpPr>
+        <p:spPr/>
+        <p:txBody>
+          <a:bodyPr/>
+          <a:lstStyle/>
+          <a:p>
+            <a:endParaRPr lang="en-US"/>
+          </a:p>
+        </p:txBody>
+      </p:sp>
+      <p:sp>
+        <p:nvSpPr>
+          <p:cNvPr id="4" name="Slide Number Placeholder 3"/>
+          <p:cNvSpPr>
+            <a:spLocks noGrp="1"/>
+          </p:cNvSpPr>
+          <p:nvPr>
+            <p:ph type="sldNum" sz="quarter" idx="5"/>
+          </p:nvPr>
+        </p:nvSpPr>
+        <p:spPr/>
+        <p:txBody>
+          <a:bodyPr/>
+          <a:lstStyle/>
+          <a:p>
+            <a:fld id="{A54C56DB-0A14-534F-B434-53937DF20138}" type="slidenum">
+              <a:rPr lang="en-US" smtClean="0"/>
+              <a:t>11</a:t>
+            </a:fld>
+            <a:endParaRPr lang="en-US"/>
+          </a:p>
+        </p:txBody>
+      </p:sp>
+    </p:spTree>
+    <p:extLst>
+      <p:ext uri="{BB962C8B-B14F-4D97-AF65-F5344CB8AC3E}">
+        <p14:creationId xmlns:p14="http://schemas.microsoft.com/office/powerpoint/2010/main" val="3728904565"/>
+      </p:ext>
+    </p:extLst>
+  </p:cSld>
+  <p:clrMapOvr>
+    <a:masterClrMapping/>
+  </p:clrMapOvr>
+</p:notes>
+</file>
+
+<file path=ppt/notesSlides/notesSlide11.xml><?xml version="1.0" encoding="utf-8"?>
+<p:notes xmlns:a="http://schemas.openxmlformats.org/drawingml/2006/main" xmlns:r="http://schemas.openxmlformats.org/officeDocument/2006/relationships" xmlns:p="http://schemas.openxmlformats.org/presentationml/2006/main">
+  <p:cSld>
+    <p:spTree>
+      <p:nvGrpSpPr>
+        <p:cNvPr id="1" name=""/>
+        <p:cNvGrpSpPr/>
+        <p:nvPr/>
+      </p:nvGrpSpPr>
+      <p:grpSpPr>
+        <a:xfrm>
+          <a:off x="0" y="0"/>
+          <a:ext cx="0" cy="0"/>
+          <a:chOff x="0" y="0"/>
+          <a:chExt cx="0" cy="0"/>
+        </a:xfrm>
+      </p:grpSpPr>
+      <p:sp>
+        <p:nvSpPr>
+          <p:cNvPr id="2" name="Slide Image Placeholder 1"/>
+          <p:cNvSpPr>
+            <a:spLocks noGrp="1" noRot="1" noChangeAspect="1"/>
+          </p:cNvSpPr>
+          <p:nvPr>
+            <p:ph type="sldImg"/>
+          </p:nvPr>
+        </p:nvSpPr>
+        <p:spPr/>
+      </p:sp>
+      <p:sp>
+        <p:nvSpPr>
+          <p:cNvPr id="3" name="Notes Placeholder 2"/>
+          <p:cNvSpPr>
+            <a:spLocks noGrp="1"/>
+          </p:cNvSpPr>
+          <p:nvPr>
+            <p:ph type="body" idx="1"/>
+          </p:nvPr>
+        </p:nvSpPr>
+        <p:spPr/>
+        <p:txBody>
+          <a:bodyPr/>
+          <a:lstStyle/>
+          <a:p>
+            <a:endParaRPr lang="en-US"/>
+          </a:p>
+        </p:txBody>
+      </p:sp>
+      <p:sp>
+        <p:nvSpPr>
+          <p:cNvPr id="4" name="Slide Number Placeholder 3"/>
+          <p:cNvSpPr>
+            <a:spLocks noGrp="1"/>
+          </p:cNvSpPr>
+          <p:nvPr>
+            <p:ph type="sldNum" sz="quarter" idx="5"/>
+          </p:nvPr>
+        </p:nvSpPr>
+        <p:spPr/>
+        <p:txBody>
+          <a:bodyPr/>
+          <a:lstStyle/>
+          <a:p>
+            <a:fld id="{A54C56DB-0A14-534F-B434-53937DF20138}" type="slidenum">
+              <a:rPr lang="en-US" smtClean="0"/>
+              <a:t>12</a:t>
+            </a:fld>
+            <a:endParaRPr lang="en-US"/>
+          </a:p>
+        </p:txBody>
+      </p:sp>
+    </p:spTree>
+    <p:extLst>
+      <p:ext uri="{BB962C8B-B14F-4D97-AF65-F5344CB8AC3E}">
+        <p14:creationId xmlns:p14="http://schemas.microsoft.com/office/powerpoint/2010/main" val="302834135"/>
+      </p:ext>
+    </p:extLst>
+  </p:cSld>
+  <p:clrMapOvr>
+    <a:masterClrMapping/>
+  </p:clrMapOvr>
+</p:notes>
+</file>
+
+<file path=ppt/notesSlides/notesSlide12.xml><?xml version="1.0" encoding="utf-8"?>
+<p:notes xmlns:a="http://schemas.openxmlformats.org/drawingml/2006/main" xmlns:r="http://schemas.openxmlformats.org/officeDocument/2006/relationships" xmlns:p="http://schemas.openxmlformats.org/presentationml/2006/main">
+  <p:cSld>
+    <p:spTree>
+      <p:nvGrpSpPr>
+        <p:cNvPr id="1" name=""/>
+        <p:cNvGrpSpPr/>
+        <p:nvPr/>
+      </p:nvGrpSpPr>
+      <p:grpSpPr>
+        <a:xfrm>
+          <a:off x="0" y="0"/>
+          <a:ext cx="0" cy="0"/>
+          <a:chOff x="0" y="0"/>
+          <a:chExt cx="0" cy="0"/>
+        </a:xfrm>
+      </p:grpSpPr>
+      <p:sp>
+        <p:nvSpPr>
+          <p:cNvPr id="2" name="Slide Image Placeholder 1"/>
+          <p:cNvSpPr>
+            <a:spLocks noGrp="1" noRot="1" noChangeAspect="1"/>
+          </p:cNvSpPr>
+          <p:nvPr>
+            <p:ph type="sldImg"/>
+          </p:nvPr>
+        </p:nvSpPr>
+        <p:spPr/>
+      </p:sp>
+      <p:sp>
+        <p:nvSpPr>
+          <p:cNvPr id="3" name="Notes Placeholder 2"/>
+          <p:cNvSpPr>
+            <a:spLocks noGrp="1"/>
+          </p:cNvSpPr>
+          <p:nvPr>
+            <p:ph type="body" idx="1"/>
+          </p:nvPr>
+        </p:nvSpPr>
+        <p:spPr/>
+        <p:txBody>
+          <a:bodyPr/>
+          <a:lstStyle/>
+          <a:p>
+            <a:endParaRPr lang="en-US"/>
+          </a:p>
+        </p:txBody>
+      </p:sp>
+      <p:sp>
+        <p:nvSpPr>
+          <p:cNvPr id="4" name="Slide Number Placeholder 3"/>
+          <p:cNvSpPr>
+            <a:spLocks noGrp="1"/>
+          </p:cNvSpPr>
+          <p:nvPr>
+            <p:ph type="sldNum" sz="quarter" idx="5"/>
+          </p:nvPr>
+        </p:nvSpPr>
+        <p:spPr/>
+        <p:txBody>
+          <a:bodyPr/>
+          <a:lstStyle/>
+          <a:p>
+            <a:fld id="{A54C56DB-0A14-534F-B434-53937DF20138}" type="slidenum">
+              <a:rPr lang="en-US" smtClean="0"/>
+              <a:t>13</a:t>
+            </a:fld>
+            <a:endParaRPr lang="en-US"/>
+          </a:p>
+        </p:txBody>
+      </p:sp>
+    </p:spTree>
+    <p:extLst>
+      <p:ext uri="{BB962C8B-B14F-4D97-AF65-F5344CB8AC3E}">
+        <p14:creationId xmlns:p14="http://schemas.microsoft.com/office/powerpoint/2010/main" val="1214065477"/>
+      </p:ext>
+    </p:extLst>
+  </p:cSld>
+  <p:clrMapOvr>
+    <a:masterClrMapping/>
+  </p:clrMapOvr>
+</p:notes>
+</file>
+
+<file path=ppt/notesSlides/notesSlide2.xml><?xml version="1.0" encoding="utf-8"?>
+<p:notes xmlns:a="http://schemas.openxmlformats.org/drawingml/2006/main" xmlns:r="http://schemas.openxmlformats.org/officeDocument/2006/relationships" xmlns:p="http://schemas.openxmlformats.org/presentationml/2006/main">
+  <p:cSld>
+    <p:spTree>
+      <p:nvGrpSpPr>
+        <p:cNvPr id="1" name=""/>
+        <p:cNvGrpSpPr/>
+        <p:nvPr/>
+      </p:nvGrpSpPr>
+      <p:grpSpPr>
+        <a:xfrm>
+          <a:off x="0" y="0"/>
+          <a:ext cx="0" cy="0"/>
+          <a:chOff x="0" y="0"/>
+          <a:chExt cx="0" cy="0"/>
+        </a:xfrm>
+      </p:grpSpPr>
+      <p:sp>
+        <p:nvSpPr>
+          <p:cNvPr id="2" name="Slide Image Placeholder 1"/>
+          <p:cNvSpPr>
+            <a:spLocks noGrp="1" noRot="1" noChangeAspect="1"/>
+          </p:cNvSpPr>
+          <p:nvPr>
+            <p:ph type="sldImg"/>
+          </p:nvPr>
+        </p:nvSpPr>
+        <p:spPr/>
+      </p:sp>
+      <p:sp>
+        <p:nvSpPr>
+          <p:cNvPr id="3" name="Notes Placeholder 2"/>
+          <p:cNvSpPr>
+            <a:spLocks noGrp="1"/>
+          </p:cNvSpPr>
+          <p:nvPr>
+            <p:ph type="body" idx="1"/>
+          </p:nvPr>
+        </p:nvSpPr>
+        <p:spPr/>
+        <p:txBody>
+          <a:bodyPr/>
+          <a:lstStyle/>
+          <a:p>
+            <a:endParaRPr lang="en-US"/>
+          </a:p>
+        </p:txBody>
+      </p:sp>
+      <p:sp>
+        <p:nvSpPr>
+          <p:cNvPr id="4" name="Slide Number Placeholder 3"/>
+          <p:cNvSpPr>
+            <a:spLocks noGrp="1"/>
+          </p:cNvSpPr>
+          <p:nvPr>
+            <p:ph type="sldNum" sz="quarter" idx="5"/>
+          </p:nvPr>
+        </p:nvSpPr>
+        <p:spPr/>
+        <p:txBody>
+          <a:bodyPr/>
+          <a:lstStyle/>
+          <a:p>
+            <a:fld id="{A54C56DB-0A14-534F-B434-53937DF20138}" type="slidenum">
+              <a:rPr lang="en-US" smtClean="0"/>
+              <a:t>3</a:t>
+            </a:fld>
+            <a:endParaRPr lang="en-US"/>
+          </a:p>
+        </p:txBody>
+      </p:sp>
+    </p:spTree>
+    <p:extLst>
+      <p:ext uri="{BB962C8B-B14F-4D97-AF65-F5344CB8AC3E}">
+        <p14:creationId xmlns:p14="http://schemas.microsoft.com/office/powerpoint/2010/main" val="1348881223"/>
+      </p:ext>
+    </p:extLst>
+  </p:cSld>
+  <p:clrMapOvr>
+    <a:masterClrMapping/>
+  </p:clrMapOvr>
+</p:notes>
+</file>
+
+<file path=ppt/notesSlides/notesSlide3.xml><?xml version="1.0" encoding="utf-8"?>
+<p:notes xmlns:a="http://schemas.openxmlformats.org/drawingml/2006/main" xmlns:r="http://schemas.openxmlformats.org/officeDocument/2006/relationships" xmlns:p="http://schemas.openxmlformats.org/presentationml/2006/main">
+  <p:cSld>
+    <p:spTree>
+      <p:nvGrpSpPr>
+        <p:cNvPr id="1" name=""/>
+        <p:cNvGrpSpPr/>
+        <p:nvPr/>
+      </p:nvGrpSpPr>
+      <p:grpSpPr>
+        <a:xfrm>
+          <a:off x="0" y="0"/>
+          <a:ext cx="0" cy="0"/>
+          <a:chOff x="0" y="0"/>
+          <a:chExt cx="0" cy="0"/>
+        </a:xfrm>
+      </p:grpSpPr>
+      <p:sp>
+        <p:nvSpPr>
+          <p:cNvPr id="2" name="Slide Image Placeholder 1"/>
+          <p:cNvSpPr>
+            <a:spLocks noGrp="1" noRot="1" noChangeAspect="1"/>
+          </p:cNvSpPr>
+          <p:nvPr>
+            <p:ph type="sldImg"/>
+          </p:nvPr>
+        </p:nvSpPr>
+        <p:spPr/>
+      </p:sp>
+      <p:sp>
+        <p:nvSpPr>
+          <p:cNvPr id="3" name="Notes Placeholder 2"/>
+          <p:cNvSpPr>
+            <a:spLocks noGrp="1"/>
+          </p:cNvSpPr>
+          <p:nvPr>
+            <p:ph type="body" idx="1"/>
+          </p:nvPr>
+        </p:nvSpPr>
+        <p:spPr/>
+        <p:txBody>
+          <a:bodyPr/>
+          <a:lstStyle/>
+          <a:p>
+            <a:endParaRPr lang="en-US"/>
+          </a:p>
+        </p:txBody>
+      </p:sp>
+      <p:sp>
+        <p:nvSpPr>
+          <p:cNvPr id="4" name="Slide Number Placeholder 3"/>
+          <p:cNvSpPr>
+            <a:spLocks noGrp="1"/>
+          </p:cNvSpPr>
+          <p:nvPr>
+            <p:ph type="sldNum" sz="quarter" idx="5"/>
+          </p:nvPr>
+        </p:nvSpPr>
+        <p:spPr/>
+        <p:txBody>
+          <a:bodyPr/>
+          <a:lstStyle/>
+          <a:p>
+            <a:fld id="{A54C56DB-0A14-534F-B434-53937DF20138}" type="slidenum">
+              <a:rPr lang="en-US" smtClean="0"/>
+              <a:t>4</a:t>
+            </a:fld>
+            <a:endParaRPr lang="en-US"/>
+          </a:p>
+        </p:txBody>
+      </p:sp>
+    </p:spTree>
+    <p:extLst>
+      <p:ext uri="{BB962C8B-B14F-4D97-AF65-F5344CB8AC3E}">
+        <p14:creationId xmlns:p14="http://schemas.microsoft.com/office/powerpoint/2010/main" val="4183682823"/>
+      </p:ext>
+    </p:extLst>
+  </p:cSld>
+  <p:clrMapOvr>
+    <a:masterClrMapping/>
+  </p:clrMapOvr>
+</p:notes>
+</file>
+
+<file path=ppt/notesSlides/notesSlide4.xml><?xml version="1.0" encoding="utf-8"?>
+<p:notes xmlns:a="http://schemas.openxmlformats.org/drawingml/2006/main" xmlns:r="http://schemas.openxmlformats.org/officeDocument/2006/relationships" xmlns:p="http://schemas.openxmlformats.org/presentationml/2006/main">
+  <p:cSld>
+    <p:spTree>
+      <p:nvGrpSpPr>
+        <p:cNvPr id="1" name=""/>
+        <p:cNvGrpSpPr/>
+        <p:nvPr/>
+      </p:nvGrpSpPr>
+      <p:grpSpPr>
+        <a:xfrm>
+          <a:off x="0" y="0"/>
+          <a:ext cx="0" cy="0"/>
+          <a:chOff x="0" y="0"/>
+          <a:chExt cx="0" cy="0"/>
+        </a:xfrm>
+      </p:grpSpPr>
+      <p:sp>
+        <p:nvSpPr>
+          <p:cNvPr id="2" name="Slide Image Placeholder 1"/>
+          <p:cNvSpPr>
+            <a:spLocks noGrp="1" noRot="1" noChangeAspect="1"/>
+          </p:cNvSpPr>
+          <p:nvPr>
+            <p:ph type="sldImg"/>
+          </p:nvPr>
+        </p:nvSpPr>
+        <p:spPr/>
+      </p:sp>
+      <p:sp>
+        <p:nvSpPr>
+          <p:cNvPr id="3" name="Notes Placeholder 2"/>
+          <p:cNvSpPr>
+            <a:spLocks noGrp="1"/>
+          </p:cNvSpPr>
+          <p:nvPr>
+            <p:ph type="body" idx="1"/>
+          </p:nvPr>
+        </p:nvSpPr>
+        <p:spPr/>
+        <p:txBody>
+          <a:bodyPr/>
+          <a:lstStyle/>
+          <a:p>
+            <a:endParaRPr lang="en-US"/>
+          </a:p>
+        </p:txBody>
+      </p:sp>
+      <p:sp>
+        <p:nvSpPr>
+          <p:cNvPr id="4" name="Slide Number Placeholder 3"/>
+          <p:cNvSpPr>
+            <a:spLocks noGrp="1"/>
+          </p:cNvSpPr>
+          <p:nvPr>
+            <p:ph type="sldNum" sz="quarter" idx="5"/>
+          </p:nvPr>
+        </p:nvSpPr>
+        <p:spPr/>
+        <p:txBody>
+          <a:bodyPr/>
+          <a:lstStyle/>
+          <a:p>
+            <a:fld id="{A54C56DB-0A14-534F-B434-53937DF20138}" type="slidenum">
+              <a:rPr lang="en-US" smtClean="0"/>
+              <a:t>5</a:t>
+            </a:fld>
+            <a:endParaRPr lang="en-US"/>
+          </a:p>
+        </p:txBody>
+      </p:sp>
+    </p:spTree>
+    <p:extLst>
+      <p:ext uri="{BB962C8B-B14F-4D97-AF65-F5344CB8AC3E}">
+        <p14:creationId xmlns:p14="http://schemas.microsoft.com/office/powerpoint/2010/main" val="3192273727"/>
+      </p:ext>
+    </p:extLst>
+  </p:cSld>
+  <p:clrMapOvr>
+    <a:masterClrMapping/>
+  </p:clrMapOvr>
+</p:notes>
+</file>
+
+<file path=ppt/notesSlides/notesSlide5.xml><?xml version="1.0" encoding="utf-8"?>
+<p:notes xmlns:a="http://schemas.openxmlformats.org/drawingml/2006/main" xmlns:r="http://schemas.openxmlformats.org/officeDocument/2006/relationships" xmlns:p="http://schemas.openxmlformats.org/presentationml/2006/main">
+  <p:cSld>
+    <p:spTree>
+      <p:nvGrpSpPr>
+        <p:cNvPr id="1" name=""/>
+        <p:cNvGrpSpPr/>
+        <p:nvPr/>
+      </p:nvGrpSpPr>
+      <p:grpSpPr>
+        <a:xfrm>
+          <a:off x="0" y="0"/>
+          <a:ext cx="0" cy="0"/>
+          <a:chOff x="0" y="0"/>
+          <a:chExt cx="0" cy="0"/>
+        </a:xfrm>
+      </p:grpSpPr>
+      <p:sp>
+        <p:nvSpPr>
+          <p:cNvPr id="2" name="Slide Image Placeholder 1"/>
+          <p:cNvSpPr>
+            <a:spLocks noGrp="1" noRot="1" noChangeAspect="1"/>
+          </p:cNvSpPr>
+          <p:nvPr>
+            <p:ph type="sldImg"/>
+          </p:nvPr>
+        </p:nvSpPr>
+        <p:spPr/>
+      </p:sp>
+      <p:sp>
+        <p:nvSpPr>
+          <p:cNvPr id="3" name="Notes Placeholder 2"/>
+          <p:cNvSpPr>
+            <a:spLocks noGrp="1"/>
+          </p:cNvSpPr>
+          <p:nvPr>
+            <p:ph type="body" idx="1"/>
+          </p:nvPr>
+        </p:nvSpPr>
+        <p:spPr/>
+        <p:txBody>
+          <a:bodyPr/>
+          <a:lstStyle/>
+          <a:p>
+            <a:endParaRPr lang="en-US"/>
+          </a:p>
+        </p:txBody>
+      </p:sp>
+      <p:sp>
+        <p:nvSpPr>
+          <p:cNvPr id="4" name="Slide Number Placeholder 3"/>
+          <p:cNvSpPr>
+            <a:spLocks noGrp="1"/>
+          </p:cNvSpPr>
+          <p:nvPr>
+            <p:ph type="sldNum" sz="quarter" idx="5"/>
+          </p:nvPr>
+        </p:nvSpPr>
+        <p:spPr/>
+        <p:txBody>
+          <a:bodyPr/>
+          <a:lstStyle/>
+          <a:p>
+            <a:fld id="{A54C56DB-0A14-534F-B434-53937DF20138}" type="slidenum">
+              <a:rPr lang="en-US" smtClean="0"/>
+              <a:t>6</a:t>
+            </a:fld>
+            <a:endParaRPr lang="en-US"/>
+          </a:p>
+        </p:txBody>
+      </p:sp>
+    </p:spTree>
+    <p:extLst>
+      <p:ext uri="{BB962C8B-B14F-4D97-AF65-F5344CB8AC3E}">
+        <p14:creationId xmlns:p14="http://schemas.microsoft.com/office/powerpoint/2010/main" val="2494785618"/>
+      </p:ext>
+    </p:extLst>
+  </p:cSld>
+  <p:clrMapOvr>
+    <a:masterClrMapping/>
+  </p:clrMapOvr>
+</p:notes>
+</file>
+
+<file path=ppt/notesSlides/notesSlide6.xml><?xml version="1.0" encoding="utf-8"?>
+<p:notes xmlns:a="http://schemas.openxmlformats.org/drawingml/2006/main" xmlns:r="http://schemas.openxmlformats.org/officeDocument/2006/relationships" xmlns:p="http://schemas.openxmlformats.org/presentationml/2006/main">
+  <p:cSld>
+    <p:spTree>
+      <p:nvGrpSpPr>
+        <p:cNvPr id="1" name=""/>
+        <p:cNvGrpSpPr/>
+        <p:nvPr/>
+      </p:nvGrpSpPr>
+      <p:grpSpPr>
+        <a:xfrm>
+          <a:off x="0" y="0"/>
+          <a:ext cx="0" cy="0"/>
+          <a:chOff x="0" y="0"/>
+          <a:chExt cx="0" cy="0"/>
+        </a:xfrm>
+      </p:grpSpPr>
+      <p:sp>
+        <p:nvSpPr>
+          <p:cNvPr id="2" name="Slide Image Placeholder 1"/>
+          <p:cNvSpPr>
+            <a:spLocks noGrp="1" noRot="1" noChangeAspect="1"/>
+          </p:cNvSpPr>
+          <p:nvPr>
+            <p:ph type="sldImg"/>
+          </p:nvPr>
+        </p:nvSpPr>
+        <p:spPr/>
+      </p:sp>
+      <p:sp>
+        <p:nvSpPr>
+          <p:cNvPr id="3" name="Notes Placeholder 2"/>
+          <p:cNvSpPr>
+            <a:spLocks noGrp="1"/>
+          </p:cNvSpPr>
+          <p:nvPr>
+            <p:ph type="body" idx="1"/>
+          </p:nvPr>
+        </p:nvSpPr>
+        <p:spPr/>
+        <p:txBody>
+          <a:bodyPr/>
+          <a:lstStyle/>
+          <a:p>
+            <a:endParaRPr lang="en-US"/>
+          </a:p>
+        </p:txBody>
+      </p:sp>
+      <p:sp>
+        <p:nvSpPr>
+          <p:cNvPr id="4" name="Slide Number Placeholder 3"/>
+          <p:cNvSpPr>
+            <a:spLocks noGrp="1"/>
+          </p:cNvSpPr>
+          <p:nvPr>
+            <p:ph type="sldNum" sz="quarter" idx="5"/>
+          </p:nvPr>
+        </p:nvSpPr>
+        <p:spPr/>
+        <p:txBody>
+          <a:bodyPr/>
+          <a:lstStyle/>
+          <a:p>
+            <a:fld id="{A54C56DB-0A14-534F-B434-53937DF20138}" type="slidenum">
+              <a:rPr lang="en-US" smtClean="0"/>
+              <a:t>7</a:t>
+            </a:fld>
+            <a:endParaRPr lang="en-US"/>
+          </a:p>
+        </p:txBody>
+      </p:sp>
+    </p:spTree>
+    <p:extLst>
+      <p:ext uri="{BB962C8B-B14F-4D97-AF65-F5344CB8AC3E}">
+        <p14:creationId xmlns:p14="http://schemas.microsoft.com/office/powerpoint/2010/main" val="1962048499"/>
+      </p:ext>
+    </p:extLst>
+  </p:cSld>
+  <p:clrMapOvr>
+    <a:masterClrMapping/>
+  </p:clrMapOvr>
+</p:notes>
+</file>
+
+<file path=ppt/notesSlides/notesSlide7.xml><?xml version="1.0" encoding="utf-8"?>
+<p:notes xmlns:a="http://schemas.openxmlformats.org/drawingml/2006/main" xmlns:r="http://schemas.openxmlformats.org/officeDocument/2006/relationships" xmlns:p="http://schemas.openxmlformats.org/presentationml/2006/main">
+  <p:cSld>
+    <p:spTree>
+      <p:nvGrpSpPr>
+        <p:cNvPr id="1" name=""/>
+        <p:cNvGrpSpPr/>
+        <p:nvPr/>
+      </p:nvGrpSpPr>
+      <p:grpSpPr>
+        <a:xfrm>
+          <a:off x="0" y="0"/>
+          <a:ext cx="0" cy="0"/>
+          <a:chOff x="0" y="0"/>
+          <a:chExt cx="0" cy="0"/>
+        </a:xfrm>
+      </p:grpSpPr>
+      <p:sp>
+        <p:nvSpPr>
+          <p:cNvPr id="2" name="Slide Image Placeholder 1"/>
+          <p:cNvSpPr>
+            <a:spLocks noGrp="1" noRot="1" noChangeAspect="1"/>
+          </p:cNvSpPr>
+          <p:nvPr>
+            <p:ph type="sldImg"/>
+          </p:nvPr>
+        </p:nvSpPr>
+        <p:spPr/>
+      </p:sp>
+      <p:sp>
+        <p:nvSpPr>
+          <p:cNvPr id="3" name="Notes Placeholder 2"/>
+          <p:cNvSpPr>
+            <a:spLocks noGrp="1"/>
+          </p:cNvSpPr>
+          <p:nvPr>
+            <p:ph type="body" idx="1"/>
+          </p:nvPr>
+        </p:nvSpPr>
+        <p:spPr/>
+        <p:txBody>
+          <a:bodyPr/>
+          <a:lstStyle/>
+          <a:p>
+            <a:endParaRPr lang="en-US"/>
+          </a:p>
+        </p:txBody>
+      </p:sp>
+      <p:sp>
+        <p:nvSpPr>
+          <p:cNvPr id="4" name="Slide Number Placeholder 3"/>
+          <p:cNvSpPr>
+            <a:spLocks noGrp="1"/>
+          </p:cNvSpPr>
+          <p:nvPr>
+            <p:ph type="sldNum" sz="quarter" idx="5"/>
+          </p:nvPr>
+        </p:nvSpPr>
+        <p:spPr/>
+        <p:txBody>
+          <a:bodyPr/>
+          <a:lstStyle/>
+          <a:p>
+            <a:fld id="{A54C56DB-0A14-534F-B434-53937DF20138}" type="slidenum">
+              <a:rPr lang="en-US" smtClean="0"/>
+              <a:t>8</a:t>
+            </a:fld>
+            <a:endParaRPr lang="en-US"/>
+          </a:p>
+        </p:txBody>
+      </p:sp>
+    </p:spTree>
+    <p:extLst>
+      <p:ext uri="{BB962C8B-B14F-4D97-AF65-F5344CB8AC3E}">
+        <p14:creationId xmlns:p14="http://schemas.microsoft.com/office/powerpoint/2010/main" val="2656142158"/>
+      </p:ext>
+    </p:extLst>
+  </p:cSld>
+  <p:clrMapOvr>
+    <a:masterClrMapping/>
+  </p:clrMapOvr>
+</p:notes>
+</file>
+
+<file path=ppt/notesSlides/notesSlide8.xml><?xml version="1.0" encoding="utf-8"?>
+<p:notes xmlns:a="http://schemas.openxmlformats.org/drawingml/2006/main" xmlns:r="http://schemas.openxmlformats.org/officeDocument/2006/relationships" xmlns:p="http://schemas.openxmlformats.org/presentationml/2006/main">
+  <p:cSld>
+    <p:spTree>
+      <p:nvGrpSpPr>
+        <p:cNvPr id="1" name=""/>
+        <p:cNvGrpSpPr/>
+        <p:nvPr/>
+      </p:nvGrpSpPr>
+      <p:grpSpPr>
+        <a:xfrm>
+          <a:off x="0" y="0"/>
+          <a:ext cx="0" cy="0"/>
+          <a:chOff x="0" y="0"/>
+          <a:chExt cx="0" cy="0"/>
+        </a:xfrm>
+      </p:grpSpPr>
+      <p:sp>
+        <p:nvSpPr>
+          <p:cNvPr id="2" name="Slide Image Placeholder 1"/>
+          <p:cNvSpPr>
+            <a:spLocks noGrp="1" noRot="1" noChangeAspect="1"/>
+          </p:cNvSpPr>
+          <p:nvPr>
+            <p:ph type="sldImg"/>
+          </p:nvPr>
+        </p:nvSpPr>
+        <p:spPr/>
+      </p:sp>
+      <p:sp>
+        <p:nvSpPr>
+          <p:cNvPr id="3" name="Notes Placeholder 2"/>
+          <p:cNvSpPr>
+            <a:spLocks noGrp="1"/>
+          </p:cNvSpPr>
+          <p:nvPr>
+            <p:ph type="body" idx="1"/>
+          </p:nvPr>
+        </p:nvSpPr>
+        <p:spPr/>
+        <p:txBody>
+          <a:bodyPr/>
+          <a:lstStyle/>
+          <a:p>
+            <a:endParaRPr lang="en-US"/>
+          </a:p>
+        </p:txBody>
+      </p:sp>
+      <p:sp>
+        <p:nvSpPr>
+          <p:cNvPr id="4" name="Slide Number Placeholder 3"/>
+          <p:cNvSpPr>
+            <a:spLocks noGrp="1"/>
+          </p:cNvSpPr>
+          <p:nvPr>
+            <p:ph type="sldNum" sz="quarter" idx="5"/>
+          </p:nvPr>
+        </p:nvSpPr>
+        <p:spPr/>
+        <p:txBody>
+          <a:bodyPr/>
+          <a:lstStyle/>
+          <a:p>
+            <a:fld id="{A54C56DB-0A14-534F-B434-53937DF20138}" type="slidenum">
+              <a:rPr lang="en-US" smtClean="0"/>
+              <a:t>9</a:t>
+            </a:fld>
+            <a:endParaRPr lang="en-US"/>
+          </a:p>
+        </p:txBody>
+      </p:sp>
+    </p:spTree>
+    <p:extLst>
+      <p:ext uri="{BB962C8B-B14F-4D97-AF65-F5344CB8AC3E}">
+        <p14:creationId xmlns:p14="http://schemas.microsoft.com/office/powerpoint/2010/main" val="1843919189"/>
+      </p:ext>
+    </p:extLst>
+  </p:cSld>
+  <p:clrMapOvr>
+    <a:masterClrMapping/>
+  </p:clrMapOvr>
+</p:notes>
+</file>
+
+<file path=ppt/notesSlides/notesSlide9.xml><?xml version="1.0" encoding="utf-8"?>
+<p:notes xmlns:a="http://schemas.openxmlformats.org/drawingml/2006/main" xmlns:r="http://schemas.openxmlformats.org/officeDocument/2006/relationships" xmlns:p="http://schemas.openxmlformats.org/presentationml/2006/main">
+  <p:cSld>
+    <p:spTree>
+      <p:nvGrpSpPr>
+        <p:cNvPr id="1" name=""/>
+        <p:cNvGrpSpPr/>
+        <p:nvPr/>
+      </p:nvGrpSpPr>
+      <p:grpSpPr>
+        <a:xfrm>
+          <a:off x="0" y="0"/>
+          <a:ext cx="0" cy="0"/>
+          <a:chOff x="0" y="0"/>
+          <a:chExt cx="0" cy="0"/>
+        </a:xfrm>
+      </p:grpSpPr>
+      <p:sp>
+        <p:nvSpPr>
+          <p:cNvPr id="2" name="Slide Image Placeholder 1"/>
+          <p:cNvSpPr>
+            <a:spLocks noGrp="1" noRot="1" noChangeAspect="1"/>
+          </p:cNvSpPr>
+          <p:nvPr>
+            <p:ph type="sldImg"/>
+          </p:nvPr>
+        </p:nvSpPr>
+        <p:spPr/>
+      </p:sp>
+      <p:sp>
+        <p:nvSpPr>
+          <p:cNvPr id="3" name="Notes Placeholder 2"/>
+          <p:cNvSpPr>
+            <a:spLocks noGrp="1"/>
+          </p:cNvSpPr>
+          <p:nvPr>
+            <p:ph type="body" idx="1"/>
+          </p:nvPr>
+        </p:nvSpPr>
+        <p:spPr/>
+        <p:txBody>
+          <a:bodyPr/>
+          <a:lstStyle/>
+          <a:p>
+            <a:endParaRPr lang="en-US"/>
+          </a:p>
+        </p:txBody>
+      </p:sp>
+      <p:sp>
+        <p:nvSpPr>
+          <p:cNvPr id="4" name="Slide Number Placeholder 3"/>
+          <p:cNvSpPr>
+            <a:spLocks noGrp="1"/>
+          </p:cNvSpPr>
+          <p:nvPr>
+            <p:ph type="sldNum" sz="quarter" idx="5"/>
+          </p:nvPr>
+        </p:nvSpPr>
+        <p:spPr/>
+        <p:txBody>
+          <a:bodyPr/>
+          <a:lstStyle/>
+          <a:p>
+            <a:fld id="{A54C56DB-0A14-534F-B434-53937DF20138}" type="slidenum">
+              <a:rPr lang="en-US" smtClean="0"/>
+              <a:t>10</a:t>
+            </a:fld>
+            <a:endParaRPr lang="en-US"/>
+          </a:p>
+        </p:txBody>
+      </p:sp>
+    </p:spTree>
+    <p:extLst>
+      <p:ext uri="{BB962C8B-B14F-4D97-AF65-F5344CB8AC3E}">
+        <p14:creationId xmlns:p14="http://schemas.microsoft.com/office/powerpoint/2010/main" val="3406902050"/>
+      </p:ext>
+    </p:extLst>
+  </p:cSld>
+  <p:clrMapOvr>
+    <a:masterClrMapping/>
+  </p:clrMapOvr>
+</p:notes>
+</file>
+
 <file path=ppt/slideLayouts/slideLayout1.xml><?xml version="1.0" encoding="utf-8"?>
 <p:sldLayout xmlns:a="http://schemas.openxmlformats.org/drawingml/2006/main" xmlns:r="http://schemas.openxmlformats.org/officeDocument/2006/relationships" xmlns:p="http://schemas.openxmlformats.org/presentationml/2006/main" type="title" preserve="1">
   <p:cSld name="Title Slide">
@@ -275,7 +1635,7 @@
           <a:p>
             <a:fld id="{220BD450-5107-424A-9054-544A25915243}" type="datetimeFigureOut">
               <a:rPr lang="en-US" smtClean="0"/>
-              <a:t>3/30/26</a:t>
+              <a:t>3/31/26</a:t>
             </a:fld>
             <a:endParaRPr lang="en-US"/>
           </a:p>
@@ -473,7 +1833,7 @@
           <a:p>
             <a:fld id="{220BD450-5107-424A-9054-544A25915243}" type="datetimeFigureOut">
               <a:rPr lang="en-US" smtClean="0"/>
-              <a:t>3/30/26</a:t>
+              <a:t>3/31/26</a:t>
             </a:fld>
             <a:endParaRPr lang="en-US"/>
           </a:p>
@@ -681,7 +2041,7 @@
           <a:p>
             <a:fld id="{220BD450-5107-424A-9054-544A25915243}" type="datetimeFigureOut">
               <a:rPr lang="en-US" smtClean="0"/>
-              <a:t>3/30/26</a:t>
+              <a:t>3/31/26</a:t>
             </a:fld>
             <a:endParaRPr lang="en-US"/>
           </a:p>
@@ -879,7 +2239,7 @@
           <a:p>
             <a:fld id="{220BD450-5107-424A-9054-544A25915243}" type="datetimeFigureOut">
               <a:rPr lang="en-US" smtClean="0"/>
-              <a:t>3/30/26</a:t>
+              <a:t>3/31/26</a:t>
             </a:fld>
             <a:endParaRPr lang="en-US"/>
           </a:p>
@@ -1154,7 +2514,7 @@
           <a:p>
             <a:fld id="{220BD450-5107-424A-9054-544A25915243}" type="datetimeFigureOut">
               <a:rPr lang="en-US" smtClean="0"/>
-              <a:t>3/30/26</a:t>
+              <a:t>3/31/26</a:t>
             </a:fld>
             <a:endParaRPr lang="en-US"/>
           </a:p>
@@ -1419,7 +2779,7 @@
           <a:p>
             <a:fld id="{220BD450-5107-424A-9054-544A25915243}" type="datetimeFigureOut">
               <a:rPr lang="en-US" smtClean="0"/>
-              <a:t>3/30/26</a:t>
+              <a:t>3/31/26</a:t>
             </a:fld>
             <a:endParaRPr lang="en-US"/>
           </a:p>
@@ -1831,7 +3191,7 @@
           <a:p>
             <a:fld id="{220BD450-5107-424A-9054-544A25915243}" type="datetimeFigureOut">
               <a:rPr lang="en-US" smtClean="0"/>
-              <a:t>3/30/26</a:t>
+              <a:t>3/31/26</a:t>
             </a:fld>
             <a:endParaRPr lang="en-US"/>
           </a:p>
@@ -1972,7 +3332,7 @@
           <a:p>
             <a:fld id="{220BD450-5107-424A-9054-544A25915243}" type="datetimeFigureOut">
               <a:rPr lang="en-US" smtClean="0"/>
-              <a:t>3/30/26</a:t>
+              <a:t>3/31/26</a:t>
             </a:fld>
             <a:endParaRPr lang="en-US"/>
           </a:p>
@@ -2085,7 +3445,7 @@
           <a:p>
             <a:fld id="{220BD450-5107-424A-9054-544A25915243}" type="datetimeFigureOut">
               <a:rPr lang="en-US" smtClean="0"/>
-              <a:t>3/30/26</a:t>
+              <a:t>3/31/26</a:t>
             </a:fld>
             <a:endParaRPr lang="en-US"/>
           </a:p>
@@ -2396,7 +3756,7 @@
           <a:p>
             <a:fld id="{220BD450-5107-424A-9054-544A25915243}" type="datetimeFigureOut">
               <a:rPr lang="en-US" smtClean="0"/>
-              <a:t>3/30/26</a:t>
+              <a:t>3/31/26</a:t>
             </a:fld>
             <a:endParaRPr lang="en-US"/>
           </a:p>
@@ -2684,7 +4044,7 @@
           <a:p>
             <a:fld id="{220BD450-5107-424A-9054-544A25915243}" type="datetimeFigureOut">
               <a:rPr lang="en-US" smtClean="0"/>
-              <a:t>3/30/26</a:t>
+              <a:t>3/31/26</a:t>
             </a:fld>
             <a:endParaRPr lang="en-US"/>
           </a:p>
@@ -2925,7 +4285,7 @@
           <a:p>
             <a:fld id="{220BD450-5107-424A-9054-544A25915243}" type="datetimeFigureOut">
               <a:rPr lang="en-US" smtClean="0"/>
-              <a:t>3/30/26</a:t>
+              <a:t>3/31/26</a:t>
             </a:fld>
             <a:endParaRPr lang="en-US"/>
           </a:p>
@@ -4315,7 +5675,7 @@
           <p:nvPr/>
         </p:nvPicPr>
         <p:blipFill>
-          <a:blip r:embed="rId2"/>
+          <a:blip r:embed="rId3"/>
           <a:stretch>
             <a:fillRect/>
           </a:stretch>
@@ -4434,7 +5794,7 @@
           <p:nvPr/>
         </p:nvPicPr>
         <p:blipFill>
-          <a:blip r:embed="rId2"/>
+          <a:blip r:embed="rId3"/>
           <a:stretch>
             <a:fillRect/>
           </a:stretch>
@@ -5398,7 +6758,7 @@
           <p:nvPr/>
         </p:nvPicPr>
         <p:blipFill>
-          <a:blip r:embed="rId2"/>
+          <a:blip r:embed="rId3"/>
           <a:stretch>
             <a:fillRect/>
           </a:stretch>
@@ -5902,7 +7262,7 @@
           <p:nvPr/>
         </p:nvPicPr>
         <p:blipFill>
-          <a:blip r:embed="rId2"/>
+          <a:blip r:embed="rId3"/>
           <a:stretch>
             <a:fillRect/>
           </a:stretch>
@@ -7977,7 +9337,7 @@
           <p:nvPr/>
         </p:nvPicPr>
         <p:blipFill>
-          <a:blip r:embed="rId2"/>
+          <a:blip r:embed="rId3"/>
           <a:stretch>
             <a:fillRect/>
           </a:stretch>
@@ -8481,7 +9841,7 @@
           <p:nvPr/>
         </p:nvPicPr>
         <p:blipFill>
-          <a:blip r:embed="rId2">
+          <a:blip r:embed="rId3">
             <a:extLst>
               <a:ext uri="{28A0092B-C50C-407E-A947-70E740481C1C}">
                 <a14:useLocalDpi xmlns:a14="http://schemas.microsoft.com/office/drawing/2010/main" val="0"/>
@@ -9481,7 +10841,7 @@
           <p:nvPr/>
         </p:nvPicPr>
         <p:blipFill>
-          <a:blip r:embed="rId2"/>
+          <a:blip r:embed="rId3"/>
           <a:stretch>
             <a:fillRect/>
           </a:stretch>
@@ -10060,7 +11420,7 @@
           <p:nvPr/>
         </p:nvPicPr>
         <p:blipFill>
-          <a:blip r:embed="rId2"/>
+          <a:blip r:embed="rId3"/>
           <a:stretch>
             <a:fillRect/>
           </a:stretch>
@@ -10569,7 +11929,7 @@
           <p:nvPr/>
         </p:nvPicPr>
         <p:blipFill>
-          <a:blip r:embed="rId2"/>
+          <a:blip r:embed="rId3"/>
           <a:stretch>
             <a:fillRect/>
           </a:stretch>
@@ -10618,7 +11978,7 @@
           <p:nvPr/>
         </p:nvPicPr>
         <p:blipFill>
-          <a:blip r:embed="rId2"/>
+          <a:blip r:embed="rId3"/>
           <a:stretch>
             <a:fillRect/>
           </a:stretch>
@@ -11512,7 +12872,7 @@
           <p:nvPr/>
         </p:nvPicPr>
         <p:blipFill>
-          <a:blip r:embed="rId2"/>
+          <a:blip r:embed="rId3"/>
           <a:stretch>
             <a:fillRect/>
           </a:stretch>
@@ -12091,7 +13451,7 @@
           <p:nvPr/>
         </p:nvPicPr>
         <p:blipFill>
-          <a:blip r:embed="rId2"/>
+          <a:blip r:embed="rId3"/>
           <a:stretch>
             <a:fillRect/>
           </a:stretch>
@@ -12427,4 +13787,319 @@
     </a:ext>
   </a:extLst>
 </a:theme>
+</file>
+
+<file path=ppt/theme/theme2.xml><?xml version="1.0" encoding="utf-8"?>
+<a:theme xmlns:a="http://schemas.openxmlformats.org/drawingml/2006/main" name="Office Theme">
+  <a:themeElements>
+    <a:clrScheme name="Office">
+      <a:dk1>
+        <a:sysClr val="windowText" lastClr="000000"/>
+      </a:dk1>
+      <a:lt1>
+        <a:sysClr val="window" lastClr="FFFFFF"/>
+      </a:lt1>
+      <a:dk2>
+        <a:srgbClr val="0E2841"/>
+      </a:dk2>
+      <a:lt2>
+        <a:srgbClr val="E8E8E8"/>
+      </a:lt2>
+      <a:accent1>
+        <a:srgbClr val="156082"/>
+      </a:accent1>
+      <a:accent2>
+        <a:srgbClr val="E97132"/>
+      </a:accent2>
+      <a:accent3>
+        <a:srgbClr val="196B24"/>
+      </a:accent3>
+      <a:accent4>
+        <a:srgbClr val="0F9ED5"/>
+      </a:accent4>
+      <a:accent5>
+        <a:srgbClr val="A02B93"/>
+      </a:accent5>
+      <a:accent6>
+        <a:srgbClr val="4EA72E"/>
+      </a:accent6>
+      <a:hlink>
+        <a:srgbClr val="467886"/>
+      </a:hlink>
+      <a:folHlink>
+        <a:srgbClr val="96607D"/>
+      </a:folHlink>
+    </a:clrScheme>
+    <a:fontScheme name="Office">
+      <a:majorFont>
+        <a:latin typeface="Aptos Display" panose="02110004020202020204"/>
+        <a:ea typeface=""/>
+        <a:cs typeface=""/>
+        <a:font script="Jpan" typeface="游ゴシック Light"/>
+        <a:font script="Hang" typeface="맑은 고딕"/>
+        <a:font script="Hans" typeface="等线 Light"/>
+        <a:font script="Hant" typeface="新細明體"/>
+        <a:font script="Arab" typeface="Times New Roman"/>
+        <a:font script="Hebr" typeface="Times New Roman"/>
+        <a:font script="Thai" typeface="Angsana New"/>
+        <a:font script="Ethi" typeface="Nyala"/>
+        <a:font script="Beng" typeface="Vrinda"/>
+        <a:font script="Gujr" typeface="Shruti"/>
+        <a:font script="Khmr" typeface="MoolBoran"/>
+        <a:font script="Knda" typeface="Tunga"/>
+        <a:font script="Guru" typeface="Raavi"/>
+        <a:font script="Cans" typeface="Euphemia"/>
+        <a:font script="Cher" typeface="Plantagenet Cherokee"/>
+        <a:font script="Yiii" typeface="Microsoft Yi Baiti"/>
+        <a:font script="Tibt" typeface="Microsoft Himalaya"/>
+        <a:font script="Thaa" typeface="MV Boli"/>
+        <a:font script="Deva" typeface="Mangal"/>
+        <a:font script="Telu" typeface="Gautami"/>
+        <a:font script="Taml" typeface="Latha"/>
+        <a:font script="Syrc" typeface="Estrangelo Edessa"/>
+        <a:font script="Orya" typeface="Kalinga"/>
+        <a:font script="Mlym" typeface="Kartika"/>
+        <a:font script="Laoo" typeface="DokChampa"/>
+        <a:font script="Sinh" typeface="Iskoola Pota"/>
+        <a:font script="Mong" typeface="Mongolian Baiti"/>
+        <a:font script="Viet" typeface="Times New Roman"/>
+        <a:font script="Uigh" typeface="Microsoft Uighur"/>
+        <a:font script="Geor" typeface="Sylfaen"/>
+        <a:font script="Armn" typeface="Arial"/>
+        <a:font script="Bugi" typeface="Leelawadee UI"/>
+        <a:font script="Bopo" typeface="Microsoft JhengHei"/>
+        <a:font script="Java" typeface="Javanese Text"/>
+        <a:font script="Lisu" typeface="Segoe UI"/>
+        <a:font script="Mymr" typeface="Myanmar Text"/>
+        <a:font script="Nkoo" typeface="Ebrima"/>
+        <a:font script="Olck" typeface="Nirmala UI"/>
+        <a:font script="Osma" typeface="Ebrima"/>
+        <a:font script="Phag" typeface="Phagspa"/>
+        <a:font script="Syrn" typeface="Estrangelo Edessa"/>
+        <a:font script="Syrj" typeface="Estrangelo Edessa"/>
+        <a:font script="Syre" typeface="Estrangelo Edessa"/>
+        <a:font script="Sora" typeface="Nirmala UI"/>
+        <a:font script="Tale" typeface="Microsoft Tai Le"/>
+        <a:font script="Talu" typeface="Microsoft New Tai Lue"/>
+        <a:font script="Tfng" typeface="Ebrima"/>
+      </a:majorFont>
+      <a:minorFont>
+        <a:latin typeface="Aptos" panose="02110004020202020204"/>
+        <a:ea typeface=""/>
+        <a:cs typeface=""/>
+        <a:font script="Jpan" typeface="游ゴシック"/>
+        <a:font script="Hang" typeface="맑은 고딕"/>
+        <a:font script="Hans" typeface="等线"/>
+        <a:font script="Hant" typeface="新細明體"/>
+        <a:font script="Arab" typeface="Arial"/>
+        <a:font script="Hebr" typeface="Arial"/>
+        <a:font script="Thai" typeface="Cordia New"/>
+        <a:font script="Ethi" typeface="Nyala"/>
+        <a:font script="Beng" typeface="Vrinda"/>
+        <a:font script="Gujr" typeface="Shruti"/>
+        <a:font script="Khmr" typeface="DaunPenh"/>
+        <a:font script="Knda" typeface="Tunga"/>
+        <a:font script="Guru" typeface="Raavi"/>
+        <a:font script="Cans" typeface="Euphemia"/>
+        <a:font script="Cher" typeface="Plantagenet Cherokee"/>
+        <a:font script="Yiii" typeface="Microsoft Yi Baiti"/>
+        <a:font script="Tibt" typeface="Microsoft Himalaya"/>
+        <a:font script="Thaa" typeface="MV Boli"/>
+        <a:font script="Deva" typeface="Mangal"/>
+        <a:font script="Telu" typeface="Gautami"/>
+        <a:font script="Taml" typeface="Latha"/>
+        <a:font script="Syrc" typeface="Estrangelo Edessa"/>
+        <a:font script="Orya" typeface="Kalinga"/>
+        <a:font script="Mlym" typeface="Kartika"/>
+        <a:font script="Laoo" typeface="DokChampa"/>
+        <a:font script="Sinh" typeface="Iskoola Pota"/>
+        <a:font script="Mong" typeface="Mongolian Baiti"/>
+        <a:font script="Viet" typeface="Arial"/>
+        <a:font script="Uigh" typeface="Microsoft Uighur"/>
+        <a:font script="Geor" typeface="Sylfaen"/>
+        <a:font script="Armn" typeface="Arial"/>
+        <a:font script="Bugi" typeface="Leelawadee UI"/>
+        <a:font script="Bopo" typeface="Microsoft JhengHei"/>
+        <a:font script="Java" typeface="Javanese Text"/>
+        <a:font script="Lisu" typeface="Segoe UI"/>
+        <a:font script="Mymr" typeface="Myanmar Text"/>
+        <a:font script="Nkoo" typeface="Ebrima"/>
+        <a:font script="Olck" typeface="Nirmala UI"/>
+        <a:font script="Osma" typeface="Ebrima"/>
+        <a:font script="Phag" typeface="Phagspa"/>
+        <a:font script="Syrn" typeface="Estrangelo Edessa"/>
+        <a:font script="Syrj" typeface="Estrangelo Edessa"/>
+        <a:font script="Syre" typeface="Estrangelo Edessa"/>
+        <a:font script="Sora" typeface="Nirmala UI"/>
+        <a:font script="Tale" typeface="Microsoft Tai Le"/>
+        <a:font script="Talu" typeface="Microsoft New Tai Lue"/>
+        <a:font script="Tfng" typeface="Ebrima"/>
+      </a:minorFont>
+    </a:fontScheme>
+    <a:fmtScheme name="Office">
+      <a:fillStyleLst>
+        <a:solidFill>
+          <a:schemeClr val="phClr"/>
+        </a:solidFill>
+        <a:gradFill rotWithShape="1">
+          <a:gsLst>
+            <a:gs pos="0">
+              <a:schemeClr val="phClr">
+                <a:lumMod val="110000"/>
+                <a:satMod val="105000"/>
+                <a:tint val="67000"/>
+              </a:schemeClr>
+            </a:gs>
+            <a:gs pos="50000">
+              <a:schemeClr val="phClr">
+                <a:lumMod val="105000"/>
+                <a:satMod val="103000"/>
+                <a:tint val="73000"/>
+              </a:schemeClr>
+            </a:gs>
+            <a:gs pos="100000">
+              <a:schemeClr val="phClr">
+                <a:lumMod val="105000"/>
+                <a:satMod val="109000"/>
+                <a:tint val="81000"/>
+              </a:schemeClr>
+            </a:gs>
+          </a:gsLst>
+          <a:lin ang="5400000" scaled="0"/>
+        </a:gradFill>
+        <a:gradFill rotWithShape="1">
+          <a:gsLst>
+            <a:gs pos="0">
+              <a:schemeClr val="phClr">
+                <a:satMod val="103000"/>
+                <a:lumMod val="102000"/>
+                <a:tint val="94000"/>
+              </a:schemeClr>
+            </a:gs>
+            <a:gs pos="50000">
+              <a:schemeClr val="phClr">
+                <a:satMod val="110000"/>
+                <a:lumMod val="100000"/>
+                <a:shade val="100000"/>
+              </a:schemeClr>
+            </a:gs>
+            <a:gs pos="100000">
+              <a:schemeClr val="phClr">
+                <a:lumMod val="99000"/>
+                <a:satMod val="120000"/>
+                <a:shade val="78000"/>
+              </a:schemeClr>
+            </a:gs>
+          </a:gsLst>
+          <a:lin ang="5400000" scaled="0"/>
+        </a:gradFill>
+      </a:fillStyleLst>
+      <a:lnStyleLst>
+        <a:ln w="12700" cap="flat" cmpd="sng" algn="ctr">
+          <a:solidFill>
+            <a:schemeClr val="phClr"/>
+          </a:solidFill>
+          <a:prstDash val="solid"/>
+          <a:miter lim="800000"/>
+        </a:ln>
+        <a:ln w="19050" cap="flat" cmpd="sng" algn="ctr">
+          <a:solidFill>
+            <a:schemeClr val="phClr"/>
+          </a:solidFill>
+          <a:prstDash val="solid"/>
+          <a:miter lim="800000"/>
+        </a:ln>
+        <a:ln w="25400" cap="flat" cmpd="sng" algn="ctr">
+          <a:solidFill>
+            <a:schemeClr val="phClr"/>
+          </a:solidFill>
+          <a:prstDash val="solid"/>
+          <a:miter lim="800000"/>
+        </a:ln>
+      </a:lnStyleLst>
+      <a:effectStyleLst>
+        <a:effectStyle>
+          <a:effectLst/>
+        </a:effectStyle>
+        <a:effectStyle>
+          <a:effectLst/>
+        </a:effectStyle>
+        <a:effectStyle>
+          <a:effectLst>
+            <a:outerShdw blurRad="57150" dist="19050" dir="5400000" algn="ctr" rotWithShape="0">
+              <a:srgbClr val="000000">
+                <a:alpha val="63000"/>
+              </a:srgbClr>
+            </a:outerShdw>
+          </a:effectLst>
+        </a:effectStyle>
+      </a:effectStyleLst>
+      <a:bgFillStyleLst>
+        <a:solidFill>
+          <a:schemeClr val="phClr"/>
+        </a:solidFill>
+        <a:solidFill>
+          <a:schemeClr val="phClr">
+            <a:tint val="95000"/>
+            <a:satMod val="170000"/>
+          </a:schemeClr>
+        </a:solidFill>
+        <a:gradFill rotWithShape="1">
+          <a:gsLst>
+            <a:gs pos="0">
+              <a:schemeClr val="phClr">
+                <a:tint val="93000"/>
+                <a:satMod val="150000"/>
+                <a:shade val="98000"/>
+                <a:lumMod val="102000"/>
+              </a:schemeClr>
+            </a:gs>
+            <a:gs pos="50000">
+              <a:schemeClr val="phClr">
+                <a:tint val="98000"/>
+                <a:satMod val="130000"/>
+                <a:shade val="90000"/>
+                <a:lumMod val="103000"/>
+              </a:schemeClr>
+            </a:gs>
+            <a:gs pos="100000">
+              <a:schemeClr val="phClr">
+                <a:shade val="63000"/>
+                <a:satMod val="120000"/>
+              </a:schemeClr>
+            </a:gs>
+          </a:gsLst>
+          <a:lin ang="5400000" scaled="0"/>
+        </a:gradFill>
+      </a:bgFillStyleLst>
+    </a:fmtScheme>
+  </a:themeElements>
+  <a:objectDefaults>
+    <a:lnDef>
+      <a:spPr/>
+      <a:bodyPr/>
+      <a:lstStyle/>
+      <a:style>
+        <a:lnRef idx="2">
+          <a:schemeClr val="accent1"/>
+        </a:lnRef>
+        <a:fillRef idx="0">
+          <a:schemeClr val="accent1"/>
+        </a:fillRef>
+        <a:effectRef idx="1">
+          <a:schemeClr val="accent1"/>
+        </a:effectRef>
+        <a:fontRef idx="minor">
+          <a:schemeClr val="tx1"/>
+        </a:fontRef>
+      </a:style>
+    </a:lnDef>
+  </a:objectDefaults>
+  <a:extraClrSchemeLst/>
+  <a:extLst>
+    <a:ext uri="{05A4C25C-085E-4340-85A3-A5531E510DB2}">
+      <thm15:themeFamily xmlns:thm15="http://schemas.microsoft.com/office/thememl/2012/main" name="Office Theme" id="{2E142A2C-CD16-42D6-873A-C26D2A0506FA}" vid="{1BDDFF52-6CD6-40A5-AB3C-68EB2F1E4D0A}"/>
+    </a:ext>
+  </a:extLst>
+</a:theme>
 </file>
--- a/docs/Intel/Intelligence_Service_Murders.pptx
+++ b/docs/Intel/Intelligence_Service_Murders.pptx
@@ -5,26 +5,28 @@
     <p:sldMasterId id="2147483648" r:id="rId1"/>
   </p:sldMasterIdLst>
   <p:notesMasterIdLst>
-    <p:notesMasterId r:id="rId19"/>
+    <p:notesMasterId r:id="rId21"/>
   </p:notesMasterIdLst>
   <p:sldIdLst>
     <p:sldId id="323" r:id="rId2"/>
-    <p:sldId id="325" r:id="rId3"/>
-    <p:sldId id="284" r:id="rId4"/>
-    <p:sldId id="296" r:id="rId5"/>
-    <p:sldId id="285" r:id="rId6"/>
-    <p:sldId id="276" r:id="rId7"/>
-    <p:sldId id="279" r:id="rId8"/>
-    <p:sldId id="274" r:id="rId9"/>
-    <p:sldId id="280" r:id="rId10"/>
-    <p:sldId id="278" r:id="rId11"/>
-    <p:sldId id="282" r:id="rId12"/>
-    <p:sldId id="283" r:id="rId13"/>
-    <p:sldId id="286" r:id="rId14"/>
-    <p:sldId id="275" r:id="rId15"/>
-    <p:sldId id="272" r:id="rId16"/>
-    <p:sldId id="287" r:id="rId17"/>
-    <p:sldId id="288" r:id="rId18"/>
+    <p:sldId id="338" r:id="rId3"/>
+    <p:sldId id="325" r:id="rId4"/>
+    <p:sldId id="284" r:id="rId5"/>
+    <p:sldId id="296" r:id="rId6"/>
+    <p:sldId id="285" r:id="rId7"/>
+    <p:sldId id="276" r:id="rId8"/>
+    <p:sldId id="279" r:id="rId9"/>
+    <p:sldId id="274" r:id="rId10"/>
+    <p:sldId id="280" r:id="rId11"/>
+    <p:sldId id="278" r:id="rId12"/>
+    <p:sldId id="282" r:id="rId13"/>
+    <p:sldId id="326" r:id="rId14"/>
+    <p:sldId id="283" r:id="rId15"/>
+    <p:sldId id="286" r:id="rId16"/>
+    <p:sldId id="275" r:id="rId17"/>
+    <p:sldId id="272" r:id="rId18"/>
+    <p:sldId id="287" r:id="rId19"/>
+    <p:sldId id="288" r:id="rId20"/>
   </p:sldIdLst>
   <p:sldSz cx="12192000" cy="6858000"/>
   <p:notesSz cx="6858000" cy="9144000"/>
@@ -213,7 +215,7 @@
           <a:p>
             <a:fld id="{7B99E08A-92FC-D944-9193-9B9B35ADF3D2}" type="datetimeFigureOut">
               <a:rPr lang="en-US" smtClean="0"/>
-              <a:t>3/31/26</a:t>
+              <a:t>4/2/26</a:t>
             </a:fld>
             <a:endParaRPr lang="en-US"/>
           </a:p>
@@ -545,7 +547,7 @@
           <a:p>
             <a:fld id="{A54C56DB-0A14-534F-B434-53937DF20138}" type="slidenum">
               <a:rPr lang="en-US" smtClean="0"/>
-              <a:t>2</a:t>
+              <a:t>3</a:t>
             </a:fld>
             <a:endParaRPr lang="en-US"/>
           </a:p>
@@ -629,7 +631,7 @@
           <a:p>
             <a:fld id="{A54C56DB-0A14-534F-B434-53937DF20138}" type="slidenum">
               <a:rPr lang="en-US" smtClean="0"/>
-              <a:t>11</a:t>
+              <a:t>12</a:t>
             </a:fld>
             <a:endParaRPr lang="en-US"/>
           </a:p>
@@ -711,9 +713,9 @@
           <a:bodyPr/>
           <a:lstStyle/>
           <a:p>
-            <a:fld id="{A54C56DB-0A14-534F-B434-53937DF20138}" type="slidenum">
+            <a:fld id="{28D5023D-FE11-054C-B5E3-AB75B1BC450A}" type="slidenum">
               <a:rPr lang="en-US" smtClean="0"/>
-              <a:t>12</a:t>
+              <a:t>13</a:t>
             </a:fld>
             <a:endParaRPr lang="en-US"/>
           </a:p>
@@ -722,7 +724,7 @@
     </p:spTree>
     <p:extLst>
       <p:ext uri="{BB962C8B-B14F-4D97-AF65-F5344CB8AC3E}">
-        <p14:creationId xmlns:p14="http://schemas.microsoft.com/office/powerpoint/2010/main" val="302834135"/>
+        <p14:creationId xmlns:p14="http://schemas.microsoft.com/office/powerpoint/2010/main" val="1489907225"/>
       </p:ext>
     </p:extLst>
   </p:cSld>
@@ -797,7 +799,91 @@
           <a:p>
             <a:fld id="{A54C56DB-0A14-534F-B434-53937DF20138}" type="slidenum">
               <a:rPr lang="en-US" smtClean="0"/>
-              <a:t>13</a:t>
+              <a:t>14</a:t>
+            </a:fld>
+            <a:endParaRPr lang="en-US"/>
+          </a:p>
+        </p:txBody>
+      </p:sp>
+    </p:spTree>
+    <p:extLst>
+      <p:ext uri="{BB962C8B-B14F-4D97-AF65-F5344CB8AC3E}">
+        <p14:creationId xmlns:p14="http://schemas.microsoft.com/office/powerpoint/2010/main" val="302834135"/>
+      </p:ext>
+    </p:extLst>
+  </p:cSld>
+  <p:clrMapOvr>
+    <a:masterClrMapping/>
+  </p:clrMapOvr>
+</p:notes>
+</file>
+
+<file path=ppt/notesSlides/notesSlide13.xml><?xml version="1.0" encoding="utf-8"?>
+<p:notes xmlns:a="http://schemas.openxmlformats.org/drawingml/2006/main" xmlns:r="http://schemas.openxmlformats.org/officeDocument/2006/relationships" xmlns:p="http://schemas.openxmlformats.org/presentationml/2006/main">
+  <p:cSld>
+    <p:spTree>
+      <p:nvGrpSpPr>
+        <p:cNvPr id="1" name=""/>
+        <p:cNvGrpSpPr/>
+        <p:nvPr/>
+      </p:nvGrpSpPr>
+      <p:grpSpPr>
+        <a:xfrm>
+          <a:off x="0" y="0"/>
+          <a:ext cx="0" cy="0"/>
+          <a:chOff x="0" y="0"/>
+          <a:chExt cx="0" cy="0"/>
+        </a:xfrm>
+      </p:grpSpPr>
+      <p:sp>
+        <p:nvSpPr>
+          <p:cNvPr id="2" name="Slide Image Placeholder 1"/>
+          <p:cNvSpPr>
+            <a:spLocks noGrp="1" noRot="1" noChangeAspect="1"/>
+          </p:cNvSpPr>
+          <p:nvPr>
+            <p:ph type="sldImg"/>
+          </p:nvPr>
+        </p:nvSpPr>
+        <p:spPr/>
+      </p:sp>
+      <p:sp>
+        <p:nvSpPr>
+          <p:cNvPr id="3" name="Notes Placeholder 2"/>
+          <p:cNvSpPr>
+            <a:spLocks noGrp="1"/>
+          </p:cNvSpPr>
+          <p:nvPr>
+            <p:ph type="body" idx="1"/>
+          </p:nvPr>
+        </p:nvSpPr>
+        <p:spPr/>
+        <p:txBody>
+          <a:bodyPr/>
+          <a:lstStyle/>
+          <a:p>
+            <a:endParaRPr lang="en-US"/>
+          </a:p>
+        </p:txBody>
+      </p:sp>
+      <p:sp>
+        <p:nvSpPr>
+          <p:cNvPr id="4" name="Slide Number Placeholder 3"/>
+          <p:cNvSpPr>
+            <a:spLocks noGrp="1"/>
+          </p:cNvSpPr>
+          <p:nvPr>
+            <p:ph type="sldNum" sz="quarter" idx="5"/>
+          </p:nvPr>
+        </p:nvSpPr>
+        <p:spPr/>
+        <p:txBody>
+          <a:bodyPr/>
+          <a:lstStyle/>
+          <a:p>
+            <a:fld id="{A54C56DB-0A14-534F-B434-53937DF20138}" type="slidenum">
+              <a:rPr lang="en-US" smtClean="0"/>
+              <a:t>15</a:t>
             </a:fld>
             <a:endParaRPr lang="en-US"/>
           </a:p>
@@ -881,7 +967,7 @@
           <a:p>
             <a:fld id="{A54C56DB-0A14-534F-B434-53937DF20138}" type="slidenum">
               <a:rPr lang="en-US" smtClean="0"/>
-              <a:t>3</a:t>
+              <a:t>4</a:t>
             </a:fld>
             <a:endParaRPr lang="en-US"/>
           </a:p>
@@ -965,7 +1051,7 @@
           <a:p>
             <a:fld id="{A54C56DB-0A14-534F-B434-53937DF20138}" type="slidenum">
               <a:rPr lang="en-US" smtClean="0"/>
-              <a:t>4</a:t>
+              <a:t>5</a:t>
             </a:fld>
             <a:endParaRPr lang="en-US"/>
           </a:p>
@@ -1049,7 +1135,7 @@
           <a:p>
             <a:fld id="{A54C56DB-0A14-534F-B434-53937DF20138}" type="slidenum">
               <a:rPr lang="en-US" smtClean="0"/>
-              <a:t>5</a:t>
+              <a:t>6</a:t>
             </a:fld>
             <a:endParaRPr lang="en-US"/>
           </a:p>
@@ -1133,7 +1219,7 @@
           <a:p>
             <a:fld id="{A54C56DB-0A14-534F-B434-53937DF20138}" type="slidenum">
               <a:rPr lang="en-US" smtClean="0"/>
-              <a:t>6</a:t>
+              <a:t>7</a:t>
             </a:fld>
             <a:endParaRPr lang="en-US"/>
           </a:p>
@@ -1217,7 +1303,7 @@
           <a:p>
             <a:fld id="{A54C56DB-0A14-534F-B434-53937DF20138}" type="slidenum">
               <a:rPr lang="en-US" smtClean="0"/>
-              <a:t>7</a:t>
+              <a:t>8</a:t>
             </a:fld>
             <a:endParaRPr lang="en-US"/>
           </a:p>
@@ -1301,7 +1387,7 @@
           <a:p>
             <a:fld id="{A54C56DB-0A14-534F-B434-53937DF20138}" type="slidenum">
               <a:rPr lang="en-US" smtClean="0"/>
-              <a:t>8</a:t>
+              <a:t>9</a:t>
             </a:fld>
             <a:endParaRPr lang="en-US"/>
           </a:p>
@@ -1385,7 +1471,7 @@
           <a:p>
             <a:fld id="{A54C56DB-0A14-534F-B434-53937DF20138}" type="slidenum">
               <a:rPr lang="en-US" smtClean="0"/>
-              <a:t>9</a:t>
+              <a:t>10</a:t>
             </a:fld>
             <a:endParaRPr lang="en-US"/>
           </a:p>
@@ -1469,7 +1555,7 @@
           <a:p>
             <a:fld id="{A54C56DB-0A14-534F-B434-53937DF20138}" type="slidenum">
               <a:rPr lang="en-US" smtClean="0"/>
-              <a:t>10</a:t>
+              <a:t>11</a:t>
             </a:fld>
             <a:endParaRPr lang="en-US"/>
           </a:p>
@@ -1635,7 +1721,7 @@
           <a:p>
             <a:fld id="{220BD450-5107-424A-9054-544A25915243}" type="datetimeFigureOut">
               <a:rPr lang="en-US" smtClean="0"/>
-              <a:t>3/31/26</a:t>
+              <a:t>4/2/26</a:t>
             </a:fld>
             <a:endParaRPr lang="en-US"/>
           </a:p>
@@ -1833,7 +1919,7 @@
           <a:p>
             <a:fld id="{220BD450-5107-424A-9054-544A25915243}" type="datetimeFigureOut">
               <a:rPr lang="en-US" smtClean="0"/>
-              <a:t>3/31/26</a:t>
+              <a:t>4/2/26</a:t>
             </a:fld>
             <a:endParaRPr lang="en-US"/>
           </a:p>
@@ -2041,7 +2127,7 @@
           <a:p>
             <a:fld id="{220BD450-5107-424A-9054-544A25915243}" type="datetimeFigureOut">
               <a:rPr lang="en-US" smtClean="0"/>
-              <a:t>3/31/26</a:t>
+              <a:t>4/2/26</a:t>
             </a:fld>
             <a:endParaRPr lang="en-US"/>
           </a:p>
@@ -2239,7 +2325,7 @@
           <a:p>
             <a:fld id="{220BD450-5107-424A-9054-544A25915243}" type="datetimeFigureOut">
               <a:rPr lang="en-US" smtClean="0"/>
-              <a:t>3/31/26</a:t>
+              <a:t>4/2/26</a:t>
             </a:fld>
             <a:endParaRPr lang="en-US"/>
           </a:p>
@@ -2514,7 +2600,7 @@
           <a:p>
             <a:fld id="{220BD450-5107-424A-9054-544A25915243}" type="datetimeFigureOut">
               <a:rPr lang="en-US" smtClean="0"/>
-              <a:t>3/31/26</a:t>
+              <a:t>4/2/26</a:t>
             </a:fld>
             <a:endParaRPr lang="en-US"/>
           </a:p>
@@ -2779,7 +2865,7 @@
           <a:p>
             <a:fld id="{220BD450-5107-424A-9054-544A25915243}" type="datetimeFigureOut">
               <a:rPr lang="en-US" smtClean="0"/>
-              <a:t>3/31/26</a:t>
+              <a:t>4/2/26</a:t>
             </a:fld>
             <a:endParaRPr lang="en-US"/>
           </a:p>
@@ -3191,7 +3277,7 @@
           <a:p>
             <a:fld id="{220BD450-5107-424A-9054-544A25915243}" type="datetimeFigureOut">
               <a:rPr lang="en-US" smtClean="0"/>
-              <a:t>3/31/26</a:t>
+              <a:t>4/2/26</a:t>
             </a:fld>
             <a:endParaRPr lang="en-US"/>
           </a:p>
@@ -3332,7 +3418,7 @@
           <a:p>
             <a:fld id="{220BD450-5107-424A-9054-544A25915243}" type="datetimeFigureOut">
               <a:rPr lang="en-US" smtClean="0"/>
-              <a:t>3/31/26</a:t>
+              <a:t>4/2/26</a:t>
             </a:fld>
             <a:endParaRPr lang="en-US"/>
           </a:p>
@@ -3445,7 +3531,7 @@
           <a:p>
             <a:fld id="{220BD450-5107-424A-9054-544A25915243}" type="datetimeFigureOut">
               <a:rPr lang="en-US" smtClean="0"/>
-              <a:t>3/31/26</a:t>
+              <a:t>4/2/26</a:t>
             </a:fld>
             <a:endParaRPr lang="en-US"/>
           </a:p>
@@ -3756,7 +3842,7 @@
           <a:p>
             <a:fld id="{220BD450-5107-424A-9054-544A25915243}" type="datetimeFigureOut">
               <a:rPr lang="en-US" smtClean="0"/>
-              <a:t>3/31/26</a:t>
+              <a:t>4/2/26</a:t>
             </a:fld>
             <a:endParaRPr lang="en-US"/>
           </a:p>
@@ -4044,7 +4130,7 @@
           <a:p>
             <a:fld id="{220BD450-5107-424A-9054-544A25915243}" type="datetimeFigureOut">
               <a:rPr lang="en-US" smtClean="0"/>
-              <a:t>3/31/26</a:t>
+              <a:t>4/2/26</a:t>
             </a:fld>
             <a:endParaRPr lang="en-US"/>
           </a:p>
@@ -4285,7 +4371,7 @@
           <a:p>
             <a:fld id="{220BD450-5107-424A-9054-544A25915243}" type="datetimeFigureOut">
               <a:rPr lang="en-US" smtClean="0"/>
-              <a:t>3/31/26</a:t>
+              <a:t>4/2/26</a:t>
             </a:fld>
             <a:endParaRPr lang="en-US"/>
           </a:p>
@@ -5287,6 +5373,510 @@
         <p:spPr>
           <a:xfrm>
             <a:off x="312432" y="1288262"/>
+            <a:ext cx="6494294" cy="584775"/>
+          </a:xfrm>
+          <a:prstGeom prst="rect">
+            <a:avLst/>
+          </a:prstGeom>
+          <a:solidFill>
+            <a:schemeClr val="bg1">
+              <a:alpha val="84400"/>
+            </a:schemeClr>
+          </a:solidFill>
+        </p:spPr>
+        <p:txBody>
+          <a:bodyPr wrap="square" rtlCol="0">
+            <a:spAutoFit/>
+          </a:bodyPr>
+          <a:lstStyle/>
+          <a:p>
+            <a:r>
+              <a:rPr lang="en-US" sz="3200" b="1" dirty="0">
+                <a:solidFill>
+                  <a:schemeClr val="accent5"/>
+                </a:solidFill>
+              </a:rPr>
+              <a:t>Why / How they Jason Thomas:</a:t>
+            </a:r>
+          </a:p>
+        </p:txBody>
+      </p:sp>
+      <p:sp>
+        <p:nvSpPr>
+          <p:cNvPr id="3" name="Google Shape;170;p31">
+            <a:extLst>
+              <a:ext uri="{FF2B5EF4-FFF2-40B4-BE49-F238E27FC236}">
+                <a16:creationId xmlns:a16="http://schemas.microsoft.com/office/drawing/2014/main" id="{A4695FE5-0AA5-AB05-98B1-B5B8E3FA8CBE}"/>
+              </a:ext>
+            </a:extLst>
+          </p:cNvPr>
+          <p:cNvSpPr/>
+          <p:nvPr/>
+        </p:nvSpPr>
+        <p:spPr>
+          <a:xfrm>
+            <a:off x="191731" y="5732890"/>
+            <a:ext cx="3431270" cy="496760"/>
+          </a:xfrm>
+          <a:prstGeom prst="rect">
+            <a:avLst/>
+          </a:prstGeom>
+          <a:solidFill>
+            <a:schemeClr val="accent5"/>
+          </a:solidFill>
+          <a:ln>
+            <a:noFill/>
+          </a:ln>
+        </p:spPr>
+        <p:txBody>
+          <a:bodyPr spcFirstLastPara="1" wrap="square" lIns="91425" tIns="45700" rIns="91425" bIns="45700" anchor="ctr" anchorCtr="0">
+            <a:noAutofit/>
+          </a:bodyPr>
+          <a:lstStyle/>
+          <a:p>
+            <a:pPr marL="0" marR="0" lvl="0" indent="0" algn="ctr" rtl="0">
+              <a:lnSpc>
+                <a:spcPct val="100000"/>
+              </a:lnSpc>
+              <a:spcBef>
+                <a:spcPts val="0"/>
+              </a:spcBef>
+              <a:spcAft>
+                <a:spcPts val="0"/>
+              </a:spcAft>
+              <a:buClr>
+                <a:srgbClr val="000000"/>
+              </a:buClr>
+              <a:buSzPts val="1600"/>
+              <a:buFont typeface="Arial"/>
+              <a:buNone/>
+            </a:pPr>
+            <a:r>
+              <a:rPr lang="en-US" sz="3600" dirty="0">
+                <a:solidFill>
+                  <a:schemeClr val="lt1"/>
+                </a:solidFill>
+              </a:rPr>
+              <a:t>Read List Here:</a:t>
+            </a:r>
+            <a:endParaRPr sz="2000" b="0" i="0" u="none" strike="noStrike" cap="none" dirty="0">
+              <a:solidFill>
+                <a:srgbClr val="000000"/>
+              </a:solidFill>
+              <a:latin typeface="Arial"/>
+              <a:ea typeface="Arial"/>
+              <a:cs typeface="Arial"/>
+              <a:sym typeface="Arial"/>
+            </a:endParaRPr>
+          </a:p>
+        </p:txBody>
+      </p:sp>
+      <p:sp>
+        <p:nvSpPr>
+          <p:cNvPr id="5" name="Google Shape;170;p31">
+            <a:extLst>
+              <a:ext uri="{FF2B5EF4-FFF2-40B4-BE49-F238E27FC236}">
+                <a16:creationId xmlns:a16="http://schemas.microsoft.com/office/drawing/2014/main" id="{98132413-6ED2-8B36-74B6-3C503B1A4634}"/>
+              </a:ext>
+            </a:extLst>
+          </p:cNvPr>
+          <p:cNvSpPr/>
+          <p:nvPr/>
+        </p:nvSpPr>
+        <p:spPr>
+          <a:xfrm>
+            <a:off x="0" y="-31518"/>
+            <a:ext cx="12192000" cy="1131606"/>
+          </a:xfrm>
+          <a:prstGeom prst="rect">
+            <a:avLst/>
+          </a:prstGeom>
+          <a:solidFill>
+            <a:srgbClr val="C00000"/>
+          </a:solidFill>
+          <a:ln>
+            <a:noFill/>
+          </a:ln>
+        </p:spPr>
+        <p:txBody>
+          <a:bodyPr spcFirstLastPara="1" wrap="square" lIns="91425" tIns="45700" rIns="91425" bIns="45700" anchor="ctr" anchorCtr="0">
+            <a:noAutofit/>
+          </a:bodyPr>
+          <a:lstStyle/>
+          <a:p>
+            <a:pPr marL="0" marR="0" lvl="0" indent="0" rtl="0">
+              <a:lnSpc>
+                <a:spcPct val="100000"/>
+              </a:lnSpc>
+              <a:spcBef>
+                <a:spcPts val="0"/>
+              </a:spcBef>
+              <a:spcAft>
+                <a:spcPts val="0"/>
+              </a:spcAft>
+              <a:buClr>
+                <a:srgbClr val="000000"/>
+              </a:buClr>
+              <a:buSzPts val="1600"/>
+              <a:buFont typeface="Arial"/>
+              <a:buNone/>
+            </a:pPr>
+            <a:r>
+              <a:rPr lang="en-US" sz="4800" dirty="0">
+                <a:solidFill>
+                  <a:schemeClr val="lt1"/>
+                </a:solidFill>
+              </a:rPr>
+              <a:t> 150+ Murdered: by Intelligence Services</a:t>
+            </a:r>
+            <a:endParaRPr sz="3200" b="0" i="0" u="none" strike="noStrike" cap="none" dirty="0">
+              <a:solidFill>
+                <a:srgbClr val="000000"/>
+              </a:solidFill>
+              <a:latin typeface="Arial"/>
+              <a:ea typeface="Arial"/>
+              <a:cs typeface="Arial"/>
+              <a:sym typeface="Arial"/>
+            </a:endParaRPr>
+          </a:p>
+        </p:txBody>
+      </p:sp>
+      <p:sp>
+        <p:nvSpPr>
+          <p:cNvPr id="4" name="TextBox 3">
+            <a:extLst>
+              <a:ext uri="{FF2B5EF4-FFF2-40B4-BE49-F238E27FC236}">
+                <a16:creationId xmlns:a16="http://schemas.microsoft.com/office/drawing/2014/main" id="{50D7621F-9D36-7894-7117-9F831EF5EFA6}"/>
+              </a:ext>
+            </a:extLst>
+          </p:cNvPr>
+          <p:cNvSpPr txBox="1"/>
+          <p:nvPr/>
+        </p:nvSpPr>
+        <p:spPr>
+          <a:xfrm>
+            <a:off x="107300" y="6229650"/>
+            <a:ext cx="11685989" cy="461665"/>
+          </a:xfrm>
+          <a:prstGeom prst="rect">
+            <a:avLst/>
+          </a:prstGeom>
+          <a:solidFill>
+            <a:schemeClr val="bg1">
+              <a:alpha val="84400"/>
+            </a:schemeClr>
+          </a:solidFill>
+        </p:spPr>
+        <p:txBody>
+          <a:bodyPr wrap="square" rtlCol="0">
+            <a:spAutoFit/>
+          </a:bodyPr>
+          <a:lstStyle/>
+          <a:p>
+            <a:r>
+              <a:rPr lang="en-US" sz="2400" dirty="0"/>
+              <a:t>https://intelligencemurders.com/intel</a:t>
+            </a:r>
+          </a:p>
+        </p:txBody>
+      </p:sp>
+      <p:sp>
+        <p:nvSpPr>
+          <p:cNvPr id="7" name="Google Shape;170;p31">
+            <a:extLst>
+              <a:ext uri="{FF2B5EF4-FFF2-40B4-BE49-F238E27FC236}">
+                <a16:creationId xmlns:a16="http://schemas.microsoft.com/office/drawing/2014/main" id="{4B582382-76AA-B49E-C611-39A37CE591B9}"/>
+              </a:ext>
+            </a:extLst>
+          </p:cNvPr>
+          <p:cNvSpPr/>
+          <p:nvPr/>
+        </p:nvSpPr>
+        <p:spPr>
+          <a:xfrm>
+            <a:off x="7506336" y="4925186"/>
+            <a:ext cx="4550222" cy="869505"/>
+          </a:xfrm>
+          <a:prstGeom prst="rect">
+            <a:avLst/>
+          </a:prstGeom>
+          <a:solidFill>
+            <a:srgbClr val="C00000"/>
+          </a:solidFill>
+          <a:ln>
+            <a:noFill/>
+          </a:ln>
+        </p:spPr>
+        <p:txBody>
+          <a:bodyPr spcFirstLastPara="1" wrap="square" lIns="91425" tIns="45700" rIns="91425" bIns="45700" anchor="ctr" anchorCtr="0">
+            <a:noAutofit/>
+          </a:bodyPr>
+          <a:lstStyle/>
+          <a:p>
+            <a:pPr marL="0" marR="0" lvl="0" indent="0" algn="ctr" rtl="0">
+              <a:lnSpc>
+                <a:spcPct val="100000"/>
+              </a:lnSpc>
+              <a:spcBef>
+                <a:spcPts val="0"/>
+              </a:spcBef>
+              <a:spcAft>
+                <a:spcPts val="0"/>
+              </a:spcAft>
+              <a:buClr>
+                <a:srgbClr val="000000"/>
+              </a:buClr>
+              <a:buSzPts val="1600"/>
+              <a:buFont typeface="Arial"/>
+              <a:buNone/>
+            </a:pPr>
+            <a:r>
+              <a:rPr lang="en-US" sz="4800" dirty="0">
+                <a:solidFill>
+                  <a:schemeClr val="lt1"/>
+                </a:solidFill>
+              </a:rPr>
+              <a:t>Jason Thomas</a:t>
+            </a:r>
+            <a:endParaRPr sz="3200" b="0" i="0" u="none" strike="noStrike" cap="none" dirty="0">
+              <a:solidFill>
+                <a:srgbClr val="000000"/>
+              </a:solidFill>
+              <a:latin typeface="Arial"/>
+              <a:ea typeface="Arial"/>
+              <a:cs typeface="Arial"/>
+              <a:sym typeface="Arial"/>
+            </a:endParaRPr>
+          </a:p>
+        </p:txBody>
+      </p:sp>
+      <p:sp>
+        <p:nvSpPr>
+          <p:cNvPr id="8" name="Google Shape;170;p31">
+            <a:extLst>
+              <a:ext uri="{FF2B5EF4-FFF2-40B4-BE49-F238E27FC236}">
+                <a16:creationId xmlns:a16="http://schemas.microsoft.com/office/drawing/2014/main" id="{D328ABDE-E232-3EB7-C3F2-B4BB7B64262F}"/>
+              </a:ext>
+            </a:extLst>
+          </p:cNvPr>
+          <p:cNvSpPr/>
+          <p:nvPr/>
+        </p:nvSpPr>
+        <p:spPr>
+          <a:xfrm>
+            <a:off x="7526107" y="5681420"/>
+            <a:ext cx="4550222" cy="548230"/>
+          </a:xfrm>
+          <a:prstGeom prst="rect">
+            <a:avLst/>
+          </a:prstGeom>
+          <a:solidFill>
+            <a:srgbClr val="C00000"/>
+          </a:solidFill>
+          <a:ln>
+            <a:noFill/>
+          </a:ln>
+        </p:spPr>
+        <p:txBody>
+          <a:bodyPr spcFirstLastPara="1" wrap="square" lIns="91425" tIns="45700" rIns="91425" bIns="45700" anchor="ctr" anchorCtr="0">
+            <a:noAutofit/>
+          </a:bodyPr>
+          <a:lstStyle/>
+          <a:p>
+            <a:pPr marL="0" marR="0" lvl="0" indent="0" algn="ctr" rtl="0">
+              <a:lnSpc>
+                <a:spcPct val="100000"/>
+              </a:lnSpc>
+              <a:spcBef>
+                <a:spcPts val="0"/>
+              </a:spcBef>
+              <a:spcAft>
+                <a:spcPts val="0"/>
+              </a:spcAft>
+              <a:buClr>
+                <a:srgbClr val="000000"/>
+              </a:buClr>
+              <a:buSzPts val="1600"/>
+              <a:buFont typeface="Arial"/>
+              <a:buNone/>
+            </a:pPr>
+            <a:r>
+              <a:rPr lang="en-US" sz="3600" dirty="0">
+                <a:solidFill>
+                  <a:schemeClr val="lt1"/>
+                </a:solidFill>
+              </a:rPr>
+              <a:t>Dead at Age 45</a:t>
+            </a:r>
+            <a:endParaRPr sz="2000" b="0" i="0" u="none" strike="noStrike" cap="none" dirty="0">
+              <a:solidFill>
+                <a:srgbClr val="000000"/>
+              </a:solidFill>
+              <a:latin typeface="Arial"/>
+              <a:ea typeface="Arial"/>
+              <a:cs typeface="Arial"/>
+              <a:sym typeface="Arial"/>
+            </a:endParaRPr>
+          </a:p>
+        </p:txBody>
+      </p:sp>
+      <p:sp>
+        <p:nvSpPr>
+          <p:cNvPr id="10" name="TextBox 9">
+            <a:extLst>
+              <a:ext uri="{FF2B5EF4-FFF2-40B4-BE49-F238E27FC236}">
+                <a16:creationId xmlns:a16="http://schemas.microsoft.com/office/drawing/2014/main" id="{5FA0D8B2-6B55-D3DC-BCBB-6FEAD86B9E72}"/>
+              </a:ext>
+            </a:extLst>
+          </p:cNvPr>
+          <p:cNvSpPr txBox="1"/>
+          <p:nvPr/>
+        </p:nvSpPr>
+        <p:spPr>
+          <a:xfrm>
+            <a:off x="312431" y="2175372"/>
+            <a:ext cx="6987941" cy="3046988"/>
+          </a:xfrm>
+          <a:prstGeom prst="rect">
+            <a:avLst/>
+          </a:prstGeom>
+          <a:solidFill>
+            <a:schemeClr val="bg1">
+              <a:alpha val="84400"/>
+            </a:schemeClr>
+          </a:solidFill>
+        </p:spPr>
+        <p:txBody>
+          <a:bodyPr wrap="square" rtlCol="0">
+            <a:spAutoFit/>
+          </a:bodyPr>
+          <a:lstStyle/>
+          <a:p>
+            <a:pPr marL="285750" indent="-285750">
+              <a:spcBef>
+                <a:spcPts val="1200"/>
+              </a:spcBef>
+              <a:buFont typeface="Arial" panose="020B0604020202020204" pitchFamily="34" charset="0"/>
+              <a:buChar char="•"/>
+            </a:pPr>
+            <a:r>
+              <a:t>Cancer researcher with DEPARTMENT OF DEFENSE contracts through Novartis. Age 45. Found dead in a FROZEN LAKE.</a:t>
+            </a:r>
+          </a:p>
+          <a:p>
+            <a:pPr marL="285750" indent="-285750">
+              <a:spcBef>
+                <a:spcPts val="1200"/>
+              </a:spcBef>
+              <a:buFont typeface="Arial" panose="020B0604020202020204" pitchFamily="34" charset="0"/>
+              <a:buChar char="•"/>
+            </a:pPr>
+            <a:r>
+              <a:t>Disappeared December 2025 after leaving behind his wallet, phone, and Apple Watch — watch was in the MAILBOX.</a:t>
+            </a:r>
+          </a:p>
+          <a:p>
+            <a:pPr marL="285750" indent="-285750">
+              <a:spcBef>
+                <a:spcPts val="1200"/>
+              </a:spcBef>
+              <a:buFont typeface="Arial" panose="020B0604020202020204" pitchFamily="34" charset="0"/>
+              <a:buChar char="•"/>
+            </a:pPr>
+            <a:r>
+              <a:t>His body was submerged in ice for THREE MONTHS, severely limiting forensic evidence.</a:t>
+            </a:r>
+          </a:p>
+          <a:p>
+            <a:pPr marL="285750" indent="-285750">
+              <a:spcBef>
+                <a:spcPts val="1200"/>
+              </a:spcBef>
+              <a:buFont typeface="Arial" panose="020B0604020202020204" pitchFamily="34" charset="0"/>
+              <a:buChar char="•"/>
+            </a:pPr>
+            <a:r>
+              <a:t>Part of a CLUSTER of scientist deaths in 2025-2026 that drew CONGRESSIONAL attention.</a:t>
+            </a:r>
+          </a:p>
+          <a:p>
+            <a:pPr marL="285750" indent="-285750">
+              <a:spcBef>
+                <a:spcPts val="1200"/>
+              </a:spcBef>
+              <a:buFont typeface="Arial" panose="020B0604020202020204" pitchFamily="34" charset="0"/>
+              <a:buChar char="•"/>
+            </a:pPr>
+            <a:r>
+              <a:t>Both parents died within ONE HOUR of each other weeks before. Official cause of death STILL NOT RELEASED.</a:t>
+            </a:r>
+          </a:p>
+        </p:txBody>
+      </p:sp>
+      <p:pic>
+        <p:nvPicPr>
+          <p:cNvPr id="16" name="Picture 15" descr="Jason_Thomas.jpg"/>
+          <p:cNvPicPr>
+            <a:picLocks noChangeAspect="1"/>
+          </p:cNvPicPr>
+          <p:nvPr/>
+        </p:nvPicPr>
+        <p:blipFill>
+          <a:blip r:embed="rId3"/>
+          <a:stretch>
+            <a:fillRect/>
+          </a:stretch>
+        </p:blipFill>
+        <p:spPr>
+          <a:xfrm>
+            <a:off x="8170539" y="1100088"/>
+            <a:ext cx="2940887" cy="3884876"/>
+          </a:xfrm>
+          <a:prstGeom prst="rect">
+            <a:avLst/>
+          </a:prstGeom>
+        </p:spPr>
+      </p:pic>
+    </p:spTree>
+  </p:cSld>
+  <p:clrMapOvr>
+    <a:masterClrMapping/>
+  </p:clrMapOvr>
+</p:sld>
+</file>
+
+<file path=ppt/slides/slide11.xml><?xml version="1.0" encoding="utf-8"?>
+<p:sld xmlns:a="http://schemas.openxmlformats.org/drawingml/2006/main" xmlns:r="http://schemas.openxmlformats.org/officeDocument/2006/relationships" xmlns:p="http://schemas.openxmlformats.org/presentationml/2006/main">
+  <p:cSld>
+    <p:spTree>
+      <p:nvGrpSpPr>
+        <p:cNvPr id="1" name=""/>
+        <p:cNvGrpSpPr/>
+        <p:nvPr/>
+      </p:nvGrpSpPr>
+      <p:grpSpPr>
+        <a:xfrm>
+          <a:off x="0" y="0"/>
+          <a:ext cx="0" cy="0"/>
+          <a:chOff x="0" y="0"/>
+          <a:chExt cx="0" cy="0"/>
+        </a:xfrm>
+      </p:grpSpPr>
+      <p:sp>
+        <p:nvSpPr>
+          <p:cNvPr id="15" name="TextBox 14">
+            <a:extLst>
+              <a:ext uri="{FF2B5EF4-FFF2-40B4-BE49-F238E27FC236}">
+                <a16:creationId xmlns:a16="http://schemas.microsoft.com/office/drawing/2014/main" id="{E478240E-251B-5BA6-3C45-7E6620400769}"/>
+              </a:ext>
+            </a:extLst>
+          </p:cNvPr>
+          <p:cNvSpPr txBox="1"/>
+          <p:nvPr/>
+        </p:nvSpPr>
+        <p:spPr>
+          <a:xfrm>
+            <a:off x="312432" y="1288262"/>
             <a:ext cx="7946044" cy="584775"/>
           </a:xfrm>
           <a:prstGeom prst="rect">
@@ -5768,7 +6358,7 @@
 </p:sld>
 </file>
 
-<file path=ppt/slides/slide11.xml><?xml version="1.0" encoding="utf-8"?>
+<file path=ppt/slides/slide12.xml><?xml version="1.0" encoding="utf-8"?>
 <p:sld xmlns:a="http://schemas.openxmlformats.org/drawingml/2006/main" xmlns:r="http://schemas.openxmlformats.org/officeDocument/2006/relationships" xmlns:p="http://schemas.openxmlformats.org/presentationml/2006/main">
   <p:cSld>
     <p:spTree>
@@ -6277,510 +6867,6 @@
 </p:sld>
 </file>
 
-<file path=ppt/slides/slide12.xml><?xml version="1.0" encoding="utf-8"?>
-<p:sld xmlns:a="http://schemas.openxmlformats.org/drawingml/2006/main" xmlns:r="http://schemas.openxmlformats.org/officeDocument/2006/relationships" xmlns:p="http://schemas.openxmlformats.org/presentationml/2006/main">
-  <p:cSld>
-    <p:spTree>
-      <p:nvGrpSpPr>
-        <p:cNvPr id="1" name=""/>
-        <p:cNvGrpSpPr/>
-        <p:nvPr/>
-      </p:nvGrpSpPr>
-      <p:grpSpPr>
-        <a:xfrm>
-          <a:off x="0" y="0"/>
-          <a:ext cx="0" cy="0"/>
-          <a:chOff x="0" y="0"/>
-          <a:chExt cx="0" cy="0"/>
-        </a:xfrm>
-      </p:grpSpPr>
-      <p:sp>
-        <p:nvSpPr>
-          <p:cNvPr id="15" name="TextBox 14">
-            <a:extLst>
-              <a:ext uri="{FF2B5EF4-FFF2-40B4-BE49-F238E27FC236}">
-                <a16:creationId xmlns:a16="http://schemas.microsoft.com/office/drawing/2014/main" id="{E478240E-251B-5BA6-3C45-7E6620400769}"/>
-              </a:ext>
-            </a:extLst>
-          </p:cNvPr>
-          <p:cNvSpPr txBox="1"/>
-          <p:nvPr/>
-        </p:nvSpPr>
-        <p:spPr>
-          <a:xfrm>
-            <a:off x="312432" y="1288262"/>
-            <a:ext cx="6494294" cy="584775"/>
-          </a:xfrm>
-          <a:prstGeom prst="rect">
-            <a:avLst/>
-          </a:prstGeom>
-          <a:solidFill>
-            <a:schemeClr val="bg1">
-              <a:alpha val="84400"/>
-            </a:schemeClr>
-          </a:solidFill>
-        </p:spPr>
-        <p:txBody>
-          <a:bodyPr wrap="square" rtlCol="0">
-            <a:spAutoFit/>
-          </a:bodyPr>
-          <a:lstStyle/>
-          <a:p>
-            <a:r>
-              <a:rPr lang="en-US" sz="3200" b="1" dirty="0">
-                <a:solidFill>
-                  <a:schemeClr val="accent5"/>
-                </a:solidFill>
-              </a:rPr>
-              <a:t>Why / How they Orlando Letelier:</a:t>
-            </a:r>
-          </a:p>
-        </p:txBody>
-      </p:sp>
-      <p:sp>
-        <p:nvSpPr>
-          <p:cNvPr id="3" name="Google Shape;170;p31">
-            <a:extLst>
-              <a:ext uri="{FF2B5EF4-FFF2-40B4-BE49-F238E27FC236}">
-                <a16:creationId xmlns:a16="http://schemas.microsoft.com/office/drawing/2014/main" id="{A4695FE5-0AA5-AB05-98B1-B5B8E3FA8CBE}"/>
-              </a:ext>
-            </a:extLst>
-          </p:cNvPr>
-          <p:cNvSpPr/>
-          <p:nvPr/>
-        </p:nvSpPr>
-        <p:spPr>
-          <a:xfrm>
-            <a:off x="191731" y="5732890"/>
-            <a:ext cx="3431270" cy="496760"/>
-          </a:xfrm>
-          <a:prstGeom prst="rect">
-            <a:avLst/>
-          </a:prstGeom>
-          <a:solidFill>
-            <a:schemeClr val="accent5"/>
-          </a:solidFill>
-          <a:ln>
-            <a:noFill/>
-          </a:ln>
-        </p:spPr>
-        <p:txBody>
-          <a:bodyPr spcFirstLastPara="1" wrap="square" lIns="91425" tIns="45700" rIns="91425" bIns="45700" anchor="ctr" anchorCtr="0">
-            <a:noAutofit/>
-          </a:bodyPr>
-          <a:lstStyle/>
-          <a:p>
-            <a:pPr marL="0" marR="0" lvl="0" indent="0" algn="ctr" rtl="0">
-              <a:lnSpc>
-                <a:spcPct val="100000"/>
-              </a:lnSpc>
-              <a:spcBef>
-                <a:spcPts val="0"/>
-              </a:spcBef>
-              <a:spcAft>
-                <a:spcPts val="0"/>
-              </a:spcAft>
-              <a:buClr>
-                <a:srgbClr val="000000"/>
-              </a:buClr>
-              <a:buSzPts val="1600"/>
-              <a:buFont typeface="Arial"/>
-              <a:buNone/>
-            </a:pPr>
-            <a:r>
-              <a:rPr lang="en-US" sz="3600" dirty="0">
-                <a:solidFill>
-                  <a:schemeClr val="lt1"/>
-                </a:solidFill>
-              </a:rPr>
-              <a:t>Read List Here:</a:t>
-            </a:r>
-            <a:endParaRPr sz="2000" b="0" i="0" u="none" strike="noStrike" cap="none" dirty="0">
-              <a:solidFill>
-                <a:srgbClr val="000000"/>
-              </a:solidFill>
-              <a:latin typeface="Arial"/>
-              <a:ea typeface="Arial"/>
-              <a:cs typeface="Arial"/>
-              <a:sym typeface="Arial"/>
-            </a:endParaRPr>
-          </a:p>
-        </p:txBody>
-      </p:sp>
-      <p:sp>
-        <p:nvSpPr>
-          <p:cNvPr id="5" name="Google Shape;170;p31">
-            <a:extLst>
-              <a:ext uri="{FF2B5EF4-FFF2-40B4-BE49-F238E27FC236}">
-                <a16:creationId xmlns:a16="http://schemas.microsoft.com/office/drawing/2014/main" id="{98132413-6ED2-8B36-74B6-3C503B1A4634}"/>
-              </a:ext>
-            </a:extLst>
-          </p:cNvPr>
-          <p:cNvSpPr/>
-          <p:nvPr/>
-        </p:nvSpPr>
-        <p:spPr>
-          <a:xfrm>
-            <a:off x="0" y="-31518"/>
-            <a:ext cx="12192000" cy="1131606"/>
-          </a:xfrm>
-          <a:prstGeom prst="rect">
-            <a:avLst/>
-          </a:prstGeom>
-          <a:solidFill>
-            <a:srgbClr val="C00000"/>
-          </a:solidFill>
-          <a:ln>
-            <a:noFill/>
-          </a:ln>
-        </p:spPr>
-        <p:txBody>
-          <a:bodyPr spcFirstLastPara="1" wrap="square" lIns="91425" tIns="45700" rIns="91425" bIns="45700" anchor="ctr" anchorCtr="0">
-            <a:noAutofit/>
-          </a:bodyPr>
-          <a:lstStyle/>
-          <a:p>
-            <a:pPr marL="0" marR="0" lvl="0" indent="0" rtl="0">
-              <a:lnSpc>
-                <a:spcPct val="100000"/>
-              </a:lnSpc>
-              <a:spcBef>
-                <a:spcPts val="0"/>
-              </a:spcBef>
-              <a:spcAft>
-                <a:spcPts val="0"/>
-              </a:spcAft>
-              <a:buClr>
-                <a:srgbClr val="000000"/>
-              </a:buClr>
-              <a:buSzPts val="1600"/>
-              <a:buFont typeface="Arial"/>
-              <a:buNone/>
-            </a:pPr>
-            <a:r>
-              <a:rPr lang="en-US" sz="4800" dirty="0">
-                <a:solidFill>
-                  <a:schemeClr val="lt1"/>
-                </a:solidFill>
-              </a:rPr>
-              <a:t> 150+ Murdered: by Intelligence Services</a:t>
-            </a:r>
-            <a:endParaRPr sz="3200" b="0" i="0" u="none" strike="noStrike" cap="none" dirty="0">
-              <a:solidFill>
-                <a:srgbClr val="000000"/>
-              </a:solidFill>
-              <a:latin typeface="Arial"/>
-              <a:ea typeface="Arial"/>
-              <a:cs typeface="Arial"/>
-              <a:sym typeface="Arial"/>
-            </a:endParaRPr>
-          </a:p>
-        </p:txBody>
-      </p:sp>
-      <p:sp>
-        <p:nvSpPr>
-          <p:cNvPr id="4" name="TextBox 3">
-            <a:extLst>
-              <a:ext uri="{FF2B5EF4-FFF2-40B4-BE49-F238E27FC236}">
-                <a16:creationId xmlns:a16="http://schemas.microsoft.com/office/drawing/2014/main" id="{50D7621F-9D36-7894-7117-9F831EF5EFA6}"/>
-              </a:ext>
-            </a:extLst>
-          </p:cNvPr>
-          <p:cNvSpPr txBox="1"/>
-          <p:nvPr/>
-        </p:nvSpPr>
-        <p:spPr>
-          <a:xfrm>
-            <a:off x="107300" y="6229650"/>
-            <a:ext cx="11685989" cy="461665"/>
-          </a:xfrm>
-          <a:prstGeom prst="rect">
-            <a:avLst/>
-          </a:prstGeom>
-          <a:solidFill>
-            <a:schemeClr val="bg1">
-              <a:alpha val="84400"/>
-            </a:schemeClr>
-          </a:solidFill>
-        </p:spPr>
-        <p:txBody>
-          <a:bodyPr wrap="square" rtlCol="0">
-            <a:spAutoFit/>
-          </a:bodyPr>
-          <a:lstStyle/>
-          <a:p>
-            <a:r>
-              <a:rPr lang="en-US" sz="2400" dirty="0"/>
-              <a:t>https://intelligencemurders.com/intel</a:t>
-            </a:r>
-          </a:p>
-        </p:txBody>
-      </p:sp>
-      <p:sp>
-        <p:nvSpPr>
-          <p:cNvPr id="7" name="Google Shape;170;p31">
-            <a:extLst>
-              <a:ext uri="{FF2B5EF4-FFF2-40B4-BE49-F238E27FC236}">
-                <a16:creationId xmlns:a16="http://schemas.microsoft.com/office/drawing/2014/main" id="{4B582382-76AA-B49E-C611-39A37CE591B9}"/>
-              </a:ext>
-            </a:extLst>
-          </p:cNvPr>
-          <p:cNvSpPr/>
-          <p:nvPr/>
-        </p:nvSpPr>
-        <p:spPr>
-          <a:xfrm>
-            <a:off x="7506336" y="4925186"/>
-            <a:ext cx="4550222" cy="869505"/>
-          </a:xfrm>
-          <a:prstGeom prst="rect">
-            <a:avLst/>
-          </a:prstGeom>
-          <a:solidFill>
-            <a:srgbClr val="C00000"/>
-          </a:solidFill>
-          <a:ln>
-            <a:noFill/>
-          </a:ln>
-        </p:spPr>
-        <p:txBody>
-          <a:bodyPr spcFirstLastPara="1" wrap="square" lIns="91425" tIns="45700" rIns="91425" bIns="45700" anchor="ctr" anchorCtr="0">
-            <a:noAutofit/>
-          </a:bodyPr>
-          <a:lstStyle/>
-          <a:p>
-            <a:pPr marL="0" marR="0" lvl="0" indent="0" algn="ctr" rtl="0">
-              <a:lnSpc>
-                <a:spcPct val="100000"/>
-              </a:lnSpc>
-              <a:spcBef>
-                <a:spcPts val="0"/>
-              </a:spcBef>
-              <a:spcAft>
-                <a:spcPts val="0"/>
-              </a:spcAft>
-              <a:buClr>
-                <a:srgbClr val="000000"/>
-              </a:buClr>
-              <a:buSzPts val="1600"/>
-              <a:buFont typeface="Arial"/>
-              <a:buNone/>
-            </a:pPr>
-            <a:r>
-              <a:rPr lang="en-US" sz="4800" dirty="0">
-                <a:solidFill>
-                  <a:schemeClr val="lt1"/>
-                </a:solidFill>
-              </a:rPr>
-              <a:t>Orlando Letelier</a:t>
-            </a:r>
-            <a:endParaRPr sz="3200" b="0" i="0" u="none" strike="noStrike" cap="none" dirty="0">
-              <a:solidFill>
-                <a:srgbClr val="000000"/>
-              </a:solidFill>
-              <a:latin typeface="Arial"/>
-              <a:ea typeface="Arial"/>
-              <a:cs typeface="Arial"/>
-              <a:sym typeface="Arial"/>
-            </a:endParaRPr>
-          </a:p>
-        </p:txBody>
-      </p:sp>
-      <p:sp>
-        <p:nvSpPr>
-          <p:cNvPr id="8" name="Google Shape;170;p31">
-            <a:extLst>
-              <a:ext uri="{FF2B5EF4-FFF2-40B4-BE49-F238E27FC236}">
-                <a16:creationId xmlns:a16="http://schemas.microsoft.com/office/drawing/2014/main" id="{D328ABDE-E232-3EB7-C3F2-B4BB7B64262F}"/>
-              </a:ext>
-            </a:extLst>
-          </p:cNvPr>
-          <p:cNvSpPr/>
-          <p:nvPr/>
-        </p:nvSpPr>
-        <p:spPr>
-          <a:xfrm>
-            <a:off x="7526107" y="5681420"/>
-            <a:ext cx="4550222" cy="548230"/>
-          </a:xfrm>
-          <a:prstGeom prst="rect">
-            <a:avLst/>
-          </a:prstGeom>
-          <a:solidFill>
-            <a:srgbClr val="C00000"/>
-          </a:solidFill>
-          <a:ln>
-            <a:noFill/>
-          </a:ln>
-        </p:spPr>
-        <p:txBody>
-          <a:bodyPr spcFirstLastPara="1" wrap="square" lIns="91425" tIns="45700" rIns="91425" bIns="45700" anchor="ctr" anchorCtr="0">
-            <a:noAutofit/>
-          </a:bodyPr>
-          <a:lstStyle/>
-          <a:p>
-            <a:pPr marL="0" marR="0" lvl="0" indent="0" algn="ctr" rtl="0">
-              <a:lnSpc>
-                <a:spcPct val="100000"/>
-              </a:lnSpc>
-              <a:spcBef>
-                <a:spcPts val="0"/>
-              </a:spcBef>
-              <a:spcAft>
-                <a:spcPts val="0"/>
-              </a:spcAft>
-              <a:buClr>
-                <a:srgbClr val="000000"/>
-              </a:buClr>
-              <a:buSzPts val="1600"/>
-              <a:buFont typeface="Arial"/>
-              <a:buNone/>
-            </a:pPr>
-            <a:r>
-              <a:rPr lang="en-US" sz="3600" dirty="0">
-                <a:solidFill>
-                  <a:schemeClr val="lt1"/>
-                </a:solidFill>
-              </a:rPr>
-              <a:t>Dead at Age 44</a:t>
-            </a:r>
-            <a:endParaRPr sz="2000" b="0" i="0" u="none" strike="noStrike" cap="none" dirty="0">
-              <a:solidFill>
-                <a:srgbClr val="000000"/>
-              </a:solidFill>
-              <a:latin typeface="Arial"/>
-              <a:ea typeface="Arial"/>
-              <a:cs typeface="Arial"/>
-              <a:sym typeface="Arial"/>
-            </a:endParaRPr>
-          </a:p>
-        </p:txBody>
-      </p:sp>
-      <p:sp>
-        <p:nvSpPr>
-          <p:cNvPr id="10" name="TextBox 9">
-            <a:extLst>
-              <a:ext uri="{FF2B5EF4-FFF2-40B4-BE49-F238E27FC236}">
-                <a16:creationId xmlns:a16="http://schemas.microsoft.com/office/drawing/2014/main" id="{5FA0D8B2-6B55-D3DC-BCBB-6FEAD86B9E72}"/>
-              </a:ext>
-            </a:extLst>
-          </p:cNvPr>
-          <p:cNvSpPr txBox="1"/>
-          <p:nvPr/>
-        </p:nvSpPr>
-        <p:spPr>
-          <a:xfrm>
-            <a:off x="312431" y="2175372"/>
-            <a:ext cx="6987941" cy="3046988"/>
-          </a:xfrm>
-          <a:prstGeom prst="rect">
-            <a:avLst/>
-          </a:prstGeom>
-          <a:solidFill>
-            <a:schemeClr val="bg1">
-              <a:alpha val="84400"/>
-            </a:schemeClr>
-          </a:solidFill>
-        </p:spPr>
-        <p:txBody>
-          <a:bodyPr wrap="square" rtlCol="0">
-            <a:spAutoFit/>
-          </a:bodyPr>
-          <a:lstStyle/>
-          <a:p>
-            <a:pPr marL="285750" indent="-285750">
-              <a:spcBef>
-                <a:spcPts val="1200"/>
-              </a:spcBef>
-              <a:buFont typeface="Arial" panose="020B0604020202020204" pitchFamily="34" charset="0"/>
-              <a:buChar char="•"/>
-            </a:pPr>
-            <a:r>
-              <a:t>Chilean diplomat — killed by a CAR BOMB on Embassy Row in Washington, DC, less than 2 km from the WHITE HOUSE.</a:t>
-            </a:r>
-          </a:p>
-          <a:p>
-            <a:pPr marL="285750" indent="-285750">
-              <a:spcBef>
-                <a:spcPts val="1200"/>
-              </a:spcBef>
-              <a:buFont typeface="Arial" panose="020B0604020202020204" pitchFamily="34" charset="0"/>
-              <a:buChar char="•"/>
-            </a:pPr>
-            <a:r>
-              <a:t>His 25-year-old American colleague Ronni Moffitt DROWNED in her own blood from shrapnel that pierced her throat.</a:t>
-            </a:r>
-          </a:p>
-          <a:p>
-            <a:pPr marL="285750" indent="-285750">
-              <a:spcBef>
-                <a:spcPts val="1200"/>
-              </a:spcBef>
-              <a:buFont typeface="Arial" panose="020B0604020202020204" pitchFamily="34" charset="0"/>
-              <a:buChar char="•"/>
-            </a:pPr>
-            <a:r>
-              <a:t>Declassified CIA documents state: "PINOCHET PERSONALLY ORDERED" the assassination.</a:t>
-            </a:r>
-          </a:p>
-          <a:p>
-            <a:pPr marL="285750" indent="-285750">
-              <a:spcBef>
-                <a:spcPts val="1200"/>
-              </a:spcBef>
-              <a:buFont typeface="Arial" panose="020B0604020202020204" pitchFamily="34" charset="0"/>
-              <a:buChar char="•"/>
-            </a:pPr>
-            <a:r>
-              <a:t>Kissinger BLOCKED a State Department warning to Condor nations FIVE DAYS before the bombing — a warning that could have PREVENTED it.</a:t>
-            </a:r>
-          </a:p>
-          <a:p>
-            <a:pPr marL="285750" indent="-285750">
-              <a:spcBef>
-                <a:spcPts val="1200"/>
-              </a:spcBef>
-              <a:buFont typeface="Arial" panose="020B0604020202020204" pitchFamily="34" charset="0"/>
-              <a:buChar char="•"/>
-            </a:pPr>
-            <a:r>
-              <a:t>The American-born assassin who BUILT the bomb served only 62 MONTHS in prison and got a new identity through witness protection.</a:t>
-            </a:r>
-          </a:p>
-        </p:txBody>
-      </p:sp>
-      <p:pic>
-        <p:nvPicPr>
-          <p:cNvPr id="16" name="Picture 15" descr="Orlando_Letelier.jpg"/>
-          <p:cNvPicPr>
-            <a:picLocks noChangeAspect="1"/>
-          </p:cNvPicPr>
-          <p:nvPr/>
-        </p:nvPicPr>
-        <p:blipFill>
-          <a:blip r:embed="rId3"/>
-          <a:stretch>
-            <a:fillRect/>
-          </a:stretch>
-        </p:blipFill>
-        <p:spPr>
-          <a:xfrm>
-            <a:off x="8087033" y="1100088"/>
-            <a:ext cx="3107900" cy="3884876"/>
-          </a:xfrm>
-          <a:prstGeom prst="rect">
-            <a:avLst/>
-          </a:prstGeom>
-        </p:spPr>
-      </p:pic>
-    </p:spTree>
-  </p:cSld>
-  <p:clrMapOvr>
-    <a:masterClrMapping/>
-  </p:clrMapOvr>
-</p:sld>
-</file>
-
 <file path=ppt/slides/slide13.xml><?xml version="1.0" encoding="utf-8"?>
 <p:sld xmlns:a="http://schemas.openxmlformats.org/drawingml/2006/main" xmlns:r="http://schemas.openxmlformats.org/officeDocument/2006/relationships" xmlns:p="http://schemas.openxmlformats.org/presentationml/2006/main">
   <p:cSld>
@@ -6836,7 +6922,7 @@
                   <a:schemeClr val="accent5"/>
                 </a:solidFill>
               </a:rPr>
-              <a:t>Why / How they Rafael Trujillo:</a:t>
+              <a:t>Why / How they Frank Olson:</a:t>
             </a:r>
           </a:p>
         </p:txBody>
@@ -6913,10 +6999,10 @@
       </p:sp>
       <p:sp>
         <p:nvSpPr>
-          <p:cNvPr id="5" name="Google Shape;170;p31">
-            <a:extLst>
-              <a:ext uri="{FF2B5EF4-FFF2-40B4-BE49-F238E27FC236}">
-                <a16:creationId xmlns:a16="http://schemas.microsoft.com/office/drawing/2014/main" id="{98132413-6ED2-8B36-74B6-3C503B1A4634}"/>
+          <p:cNvPr id="7" name="Google Shape;170;p31">
+            <a:extLst>
+              <a:ext uri="{FF2B5EF4-FFF2-40B4-BE49-F238E27FC236}">
+                <a16:creationId xmlns:a16="http://schemas.microsoft.com/office/drawing/2014/main" id="{4B582382-76AA-B49E-C611-39A37CE591B9}"/>
               </a:ext>
             </a:extLst>
           </p:cNvPr>
@@ -6925,8 +7011,8 @@
         </p:nvSpPr>
         <p:spPr>
           <a:xfrm>
-            <a:off x="0" y="-31518"/>
-            <a:ext cx="12192000" cy="1131606"/>
+            <a:off x="7506336" y="4925186"/>
+            <a:ext cx="4550222" cy="869505"/>
           </a:xfrm>
           <a:prstGeom prst="rect">
             <a:avLst/>
@@ -6944,7 +7030,7 @@
           </a:bodyPr>
           <a:lstStyle/>
           <a:p>
-            <a:pPr marL="0" marR="0" lvl="0" indent="0" rtl="0">
+            <a:pPr marL="0" marR="0" lvl="0" indent="0" algn="ctr" rtl="0">
               <a:lnSpc>
                 <a:spcPct val="100000"/>
               </a:lnSpc>
@@ -6967,7 +7053,7 @@
                   <a:schemeClr val="lt1"/>
                 </a:solidFill>
               </a:rPr>
-              <a:t> 150+ Murdered: by Intelligence Services</a:t>
+              <a:t>Frank Olson</a:t>
             </a:r>
             <a:endParaRPr sz="3200" b="0" i="0" u="none" strike="noStrike" cap="none" dirty="0">
               <a:solidFill>
@@ -6983,49 +7069,10 @@
       </p:sp>
       <p:sp>
         <p:nvSpPr>
-          <p:cNvPr id="4" name="TextBox 3">
-            <a:extLst>
-              <a:ext uri="{FF2B5EF4-FFF2-40B4-BE49-F238E27FC236}">
-                <a16:creationId xmlns:a16="http://schemas.microsoft.com/office/drawing/2014/main" id="{50D7621F-9D36-7894-7117-9F831EF5EFA6}"/>
-              </a:ext>
-            </a:extLst>
-          </p:cNvPr>
-          <p:cNvSpPr txBox="1"/>
-          <p:nvPr/>
-        </p:nvSpPr>
-        <p:spPr>
-          <a:xfrm>
-            <a:off x="107300" y="6229650"/>
-            <a:ext cx="11685989" cy="461665"/>
-          </a:xfrm>
-          <a:prstGeom prst="rect">
-            <a:avLst/>
-          </a:prstGeom>
-          <a:solidFill>
-            <a:schemeClr val="bg1">
-              <a:alpha val="84400"/>
-            </a:schemeClr>
-          </a:solidFill>
-        </p:spPr>
-        <p:txBody>
-          <a:bodyPr wrap="square" rtlCol="0">
-            <a:spAutoFit/>
-          </a:bodyPr>
-          <a:lstStyle/>
-          <a:p>
-            <a:r>
-              <a:rPr lang="en-US" sz="2400" dirty="0"/>
-              <a:t>https://intelligencemurders.com/intel</a:t>
-            </a:r>
-          </a:p>
-        </p:txBody>
-      </p:sp>
-      <p:sp>
-        <p:nvSpPr>
-          <p:cNvPr id="7" name="Google Shape;170;p31">
-            <a:extLst>
-              <a:ext uri="{FF2B5EF4-FFF2-40B4-BE49-F238E27FC236}">
-                <a16:creationId xmlns:a16="http://schemas.microsoft.com/office/drawing/2014/main" id="{4B582382-76AA-B49E-C611-39A37CE591B9}"/>
+          <p:cNvPr id="8" name="Google Shape;170;p31">
+            <a:extLst>
+              <a:ext uri="{FF2B5EF4-FFF2-40B4-BE49-F238E27FC236}">
+                <a16:creationId xmlns:a16="http://schemas.microsoft.com/office/drawing/2014/main" id="{D328ABDE-E232-3EB7-C3F2-B4BB7B64262F}"/>
               </a:ext>
             </a:extLst>
           </p:cNvPr>
@@ -7034,8 +7081,8 @@
         </p:nvSpPr>
         <p:spPr>
           <a:xfrm>
-            <a:off x="7506336" y="4925186"/>
-            <a:ext cx="4550222" cy="869505"/>
+            <a:off x="7526107" y="5681420"/>
+            <a:ext cx="4550222" cy="548230"/>
           </a:xfrm>
           <a:prstGeom prst="rect">
             <a:avLst/>
@@ -7071,82 +7118,12 @@
               <a:buNone/>
             </a:pPr>
             <a:r>
-              <a:rPr lang="en-US" sz="4800" dirty="0">
-                <a:solidFill>
-                  <a:schemeClr val="lt1"/>
-                </a:solidFill>
-              </a:rPr>
-              <a:t>Rafael Trujillo</a:t>
-            </a:r>
-            <a:endParaRPr sz="3200" b="0" i="0" u="none" strike="noStrike" cap="none" dirty="0">
-              <a:solidFill>
-                <a:srgbClr val="000000"/>
-              </a:solidFill>
-              <a:latin typeface="Arial"/>
-              <a:ea typeface="Arial"/>
-              <a:cs typeface="Arial"/>
-              <a:sym typeface="Arial"/>
-            </a:endParaRPr>
-          </a:p>
-        </p:txBody>
-      </p:sp>
-      <p:sp>
-        <p:nvSpPr>
-          <p:cNvPr id="8" name="Google Shape;170;p31">
-            <a:extLst>
-              <a:ext uri="{FF2B5EF4-FFF2-40B4-BE49-F238E27FC236}">
-                <a16:creationId xmlns:a16="http://schemas.microsoft.com/office/drawing/2014/main" id="{D328ABDE-E232-3EB7-C3F2-B4BB7B64262F}"/>
-              </a:ext>
-            </a:extLst>
-          </p:cNvPr>
-          <p:cNvSpPr/>
-          <p:nvPr/>
-        </p:nvSpPr>
-        <p:spPr>
-          <a:xfrm>
-            <a:off x="7526107" y="5681420"/>
-            <a:ext cx="4550222" cy="548230"/>
-          </a:xfrm>
-          <a:prstGeom prst="rect">
-            <a:avLst/>
-          </a:prstGeom>
-          <a:solidFill>
-            <a:srgbClr val="C00000"/>
-          </a:solidFill>
-          <a:ln>
-            <a:noFill/>
-          </a:ln>
-        </p:spPr>
-        <p:txBody>
-          <a:bodyPr spcFirstLastPara="1" wrap="square" lIns="91425" tIns="45700" rIns="91425" bIns="45700" anchor="ctr" anchorCtr="0">
-            <a:noAutofit/>
-          </a:bodyPr>
-          <a:lstStyle/>
-          <a:p>
-            <a:pPr marL="0" marR="0" lvl="0" indent="0" algn="ctr" rtl="0">
-              <a:lnSpc>
-                <a:spcPct val="100000"/>
-              </a:lnSpc>
-              <a:spcBef>
-                <a:spcPts val="0"/>
-              </a:spcBef>
-              <a:spcAft>
-                <a:spcPts val="0"/>
-              </a:spcAft>
-              <a:buClr>
-                <a:srgbClr val="000000"/>
-              </a:buClr>
-              <a:buSzPts val="1600"/>
-              <a:buFont typeface="Arial"/>
-              <a:buNone/>
-            </a:pPr>
-            <a:r>
               <a:rPr lang="en-US" sz="3600" dirty="0">
                 <a:solidFill>
                   <a:schemeClr val="lt1"/>
                 </a:solidFill>
               </a:rPr>
-              <a:t>Dead at Age 69</a:t>
+              <a:t>Dead at Age 43</a:t>
             </a:r>
             <a:endParaRPr sz="2000" b="0" i="0" u="none" strike="noStrike" cap="none" dirty="0">
               <a:solidFill>
@@ -7174,8 +7151,8 @@
         </p:nvSpPr>
         <p:spPr>
           <a:xfrm>
-            <a:off x="312431" y="2175372"/>
-            <a:ext cx="6987941" cy="3046988"/>
+            <a:off x="191731" y="1867260"/>
+            <a:ext cx="8597190" cy="3631763"/>
           </a:xfrm>
           <a:prstGeom prst="rect">
             <a:avLst/>
@@ -7200,7 +7177,8 @@
               <a:buChar char="•"/>
             </a:pPr>
             <a:r>
-              <a:t>CIA SUPPLIED the weapons. Dominican dictator ambushed and machine-gunned in his car on a highway.</a:t>
+              <a:rPr dirty="0"/>
+              <a:t>FELL from a 13th-floor hotel window at age 43 — CIA scientist dosed with LSD under MKULTRA nine days earlier.</a:t>
             </a:r>
           </a:p>
           <a:p>
@@ -7212,7 +7190,8 @@
               <a:buChar char="•"/>
             </a:pPr>
             <a:r>
-              <a:t>Ruled for 31 YEARS. Murdered the Mirabal sisters. Ordered the Parsley Massacre killing up to 30,000 Haitians.</a:t>
+              <a:rPr dirty="0"/>
+              <a:t>His family fought for DECADES to prove it was murder, not suicide.</a:t>
             </a:r>
           </a:p>
           <a:p>
@@ -7224,7 +7203,8 @@
               <a:buChar char="•"/>
             </a:pPr>
             <a:r>
-              <a:t>CIA's internal report admitted "quite extensive Agency involvement" — then PUBLICLY claimed only a "faint connection."</a:t>
+              <a:rPr dirty="0"/>
+              <a:t>A 1994 exhumation found a previously undetected CRANIAL INJURY consistent with a blow to the head before the fall.</a:t>
             </a:r>
           </a:p>
           <a:p>
@@ -7236,7 +7216,8 @@
               <a:buChar char="•"/>
             </a:pPr>
             <a:r>
-              <a:t>Kennedy sent a cable saying the US "cannot condone assassination" — TWO DAYS before the hit. Weapons already delivered.</a:t>
+              <a:rPr dirty="0"/>
+              <a:t>The CIA admitted in 1975 they had secretly dosed him with LSD. His "suicide" was the cover story.</a:t>
             </a:r>
           </a:p>
           <a:p>
@@ -7248,14 +7229,28 @@
               <a:buChar char="•"/>
             </a:pPr>
             <a:r>
-              <a:t>Church Committee confirmed this as ONE OF FIVE CIA assassination plots against foreign leaders.</a:t>
+              <a:rPr dirty="0"/>
+              <a:t>Manhattan DA reopened the case as a HOMICIDE investigation in 1996.</a:t>
+            </a:r>
+          </a:p>
+          <a:p>
+            <a:pPr marL="285750" indent="-285750">
+              <a:spcBef>
+                <a:spcPts val="1200"/>
+              </a:spcBef>
+              <a:buFont typeface="Arial" panose="020B0604020202020204" pitchFamily="34" charset="0"/>
+              <a:buChar char="•"/>
+            </a:pPr>
+            <a:r>
+              <a:rPr dirty="0"/>
+              <a:t>Worked on biological weapons at Fort Detrick — knew secrets the CIA could not afford to let out.</a:t>
             </a:r>
           </a:p>
         </p:txBody>
       </p:sp>
       <p:pic>
         <p:nvPicPr>
-          <p:cNvPr id="16" name="Picture 15" descr="Rafael_Trujillo.jpg"/>
+          <p:cNvPr id="16" name="Picture 15" descr="Frank_Olson.jpg"/>
           <p:cNvPicPr>
             <a:picLocks noChangeAspect="1"/>
           </p:cNvPicPr>
@@ -7269,14 +7264,123 @@
         </p:blipFill>
         <p:spPr>
           <a:xfrm>
-            <a:off x="8276420" y="1100088"/>
-            <a:ext cx="2729125" cy="3884876"/>
+            <a:off x="8965911" y="1174201"/>
+            <a:ext cx="2913657" cy="3884876"/>
           </a:xfrm>
           <a:prstGeom prst="rect">
             <a:avLst/>
           </a:prstGeom>
         </p:spPr>
       </p:pic>
+      <p:sp>
+        <p:nvSpPr>
+          <p:cNvPr id="2" name="Google Shape;170;p31">
+            <a:extLst>
+              <a:ext uri="{FF2B5EF4-FFF2-40B4-BE49-F238E27FC236}">
+                <a16:creationId xmlns:a16="http://schemas.microsoft.com/office/drawing/2014/main" id="{C13D3C41-65DE-8D54-DAC5-EEAAE0D5E96C}"/>
+              </a:ext>
+            </a:extLst>
+          </p:cNvPr>
+          <p:cNvSpPr/>
+          <p:nvPr/>
+        </p:nvSpPr>
+        <p:spPr>
+          <a:xfrm>
+            <a:off x="0" y="-31518"/>
+            <a:ext cx="12192000" cy="1131606"/>
+          </a:xfrm>
+          <a:prstGeom prst="rect">
+            <a:avLst/>
+          </a:prstGeom>
+          <a:solidFill>
+            <a:srgbClr val="C00000"/>
+          </a:solidFill>
+          <a:ln>
+            <a:noFill/>
+          </a:ln>
+        </p:spPr>
+        <p:txBody>
+          <a:bodyPr spcFirstLastPara="1" wrap="square" lIns="91425" tIns="45700" rIns="91425" bIns="45700" anchor="ctr" anchorCtr="0">
+            <a:noAutofit/>
+          </a:bodyPr>
+          <a:lstStyle/>
+          <a:p>
+            <a:pPr marL="0" marR="0" lvl="0" indent="0" rtl="0">
+              <a:lnSpc>
+                <a:spcPct val="100000"/>
+              </a:lnSpc>
+              <a:spcBef>
+                <a:spcPts val="0"/>
+              </a:spcBef>
+              <a:spcAft>
+                <a:spcPts val="0"/>
+              </a:spcAft>
+              <a:buClr>
+                <a:srgbClr val="000000"/>
+              </a:buClr>
+              <a:buSzPts val="1600"/>
+              <a:buFont typeface="Arial"/>
+              <a:buNone/>
+            </a:pPr>
+            <a:r>
+              <a:rPr lang="en-US" sz="4800" dirty="0">
+                <a:solidFill>
+                  <a:schemeClr val="lt1"/>
+                </a:solidFill>
+              </a:rPr>
+              <a:t> 150+ Murdered: by Intelligence Services</a:t>
+            </a:r>
+            <a:endParaRPr sz="3200" b="0" i="0" u="none" strike="noStrike" cap="none" dirty="0">
+              <a:solidFill>
+                <a:srgbClr val="000000"/>
+              </a:solidFill>
+              <a:latin typeface="Arial"/>
+              <a:ea typeface="Arial"/>
+              <a:cs typeface="Arial"/>
+              <a:sym typeface="Arial"/>
+            </a:endParaRPr>
+          </a:p>
+        </p:txBody>
+      </p:sp>
+      <p:sp>
+        <p:nvSpPr>
+          <p:cNvPr id="6" name="TextBox 5">
+            <a:extLst>
+              <a:ext uri="{FF2B5EF4-FFF2-40B4-BE49-F238E27FC236}">
+                <a16:creationId xmlns:a16="http://schemas.microsoft.com/office/drawing/2014/main" id="{E4645DA2-C3C9-5A8E-276C-1B0CC022EB5E}"/>
+              </a:ext>
+            </a:extLst>
+          </p:cNvPr>
+          <p:cNvSpPr txBox="1"/>
+          <p:nvPr/>
+        </p:nvSpPr>
+        <p:spPr>
+          <a:xfrm>
+            <a:off x="107300" y="6229650"/>
+            <a:ext cx="11685989" cy="461665"/>
+          </a:xfrm>
+          <a:prstGeom prst="rect">
+            <a:avLst/>
+          </a:prstGeom>
+          <a:solidFill>
+            <a:schemeClr val="bg1">
+              <a:alpha val="84400"/>
+            </a:schemeClr>
+          </a:solidFill>
+        </p:spPr>
+        <p:txBody>
+          <a:bodyPr wrap="square" rtlCol="0">
+            <a:spAutoFit/>
+          </a:bodyPr>
+          <a:lstStyle/>
+          <a:p>
+            <a:r>
+              <a:rPr lang="en-US" sz="2400" dirty="0"/>
+              <a:t>https://intelligencemurders.com/intel</a:t>
+            </a:r>
+          </a:p>
+        </p:txBody>
+      </p:sp>
     </p:spTree>
   </p:cSld>
   <p:clrMapOvr>
@@ -7340,6 +7444,1014 @@
                   <a:schemeClr val="accent5"/>
                 </a:solidFill>
               </a:rPr>
+              <a:t>Why / How they Orlando Letelier:</a:t>
+            </a:r>
+          </a:p>
+        </p:txBody>
+      </p:sp>
+      <p:sp>
+        <p:nvSpPr>
+          <p:cNvPr id="3" name="Google Shape;170;p31">
+            <a:extLst>
+              <a:ext uri="{FF2B5EF4-FFF2-40B4-BE49-F238E27FC236}">
+                <a16:creationId xmlns:a16="http://schemas.microsoft.com/office/drawing/2014/main" id="{A4695FE5-0AA5-AB05-98B1-B5B8E3FA8CBE}"/>
+              </a:ext>
+            </a:extLst>
+          </p:cNvPr>
+          <p:cNvSpPr/>
+          <p:nvPr/>
+        </p:nvSpPr>
+        <p:spPr>
+          <a:xfrm>
+            <a:off x="191731" y="5732890"/>
+            <a:ext cx="3431270" cy="496760"/>
+          </a:xfrm>
+          <a:prstGeom prst="rect">
+            <a:avLst/>
+          </a:prstGeom>
+          <a:solidFill>
+            <a:schemeClr val="accent5"/>
+          </a:solidFill>
+          <a:ln>
+            <a:noFill/>
+          </a:ln>
+        </p:spPr>
+        <p:txBody>
+          <a:bodyPr spcFirstLastPara="1" wrap="square" lIns="91425" tIns="45700" rIns="91425" bIns="45700" anchor="ctr" anchorCtr="0">
+            <a:noAutofit/>
+          </a:bodyPr>
+          <a:lstStyle/>
+          <a:p>
+            <a:pPr marL="0" marR="0" lvl="0" indent="0" algn="ctr" rtl="0">
+              <a:lnSpc>
+                <a:spcPct val="100000"/>
+              </a:lnSpc>
+              <a:spcBef>
+                <a:spcPts val="0"/>
+              </a:spcBef>
+              <a:spcAft>
+                <a:spcPts val="0"/>
+              </a:spcAft>
+              <a:buClr>
+                <a:srgbClr val="000000"/>
+              </a:buClr>
+              <a:buSzPts val="1600"/>
+              <a:buFont typeface="Arial"/>
+              <a:buNone/>
+            </a:pPr>
+            <a:r>
+              <a:rPr lang="en-US" sz="3600" dirty="0">
+                <a:solidFill>
+                  <a:schemeClr val="lt1"/>
+                </a:solidFill>
+              </a:rPr>
+              <a:t>Read List Here:</a:t>
+            </a:r>
+            <a:endParaRPr sz="2000" b="0" i="0" u="none" strike="noStrike" cap="none" dirty="0">
+              <a:solidFill>
+                <a:srgbClr val="000000"/>
+              </a:solidFill>
+              <a:latin typeface="Arial"/>
+              <a:ea typeface="Arial"/>
+              <a:cs typeface="Arial"/>
+              <a:sym typeface="Arial"/>
+            </a:endParaRPr>
+          </a:p>
+        </p:txBody>
+      </p:sp>
+      <p:sp>
+        <p:nvSpPr>
+          <p:cNvPr id="5" name="Google Shape;170;p31">
+            <a:extLst>
+              <a:ext uri="{FF2B5EF4-FFF2-40B4-BE49-F238E27FC236}">
+                <a16:creationId xmlns:a16="http://schemas.microsoft.com/office/drawing/2014/main" id="{98132413-6ED2-8B36-74B6-3C503B1A4634}"/>
+              </a:ext>
+            </a:extLst>
+          </p:cNvPr>
+          <p:cNvSpPr/>
+          <p:nvPr/>
+        </p:nvSpPr>
+        <p:spPr>
+          <a:xfrm>
+            <a:off x="0" y="-31518"/>
+            <a:ext cx="12192000" cy="1131606"/>
+          </a:xfrm>
+          <a:prstGeom prst="rect">
+            <a:avLst/>
+          </a:prstGeom>
+          <a:solidFill>
+            <a:srgbClr val="C00000"/>
+          </a:solidFill>
+          <a:ln>
+            <a:noFill/>
+          </a:ln>
+        </p:spPr>
+        <p:txBody>
+          <a:bodyPr spcFirstLastPara="1" wrap="square" lIns="91425" tIns="45700" rIns="91425" bIns="45700" anchor="ctr" anchorCtr="0">
+            <a:noAutofit/>
+          </a:bodyPr>
+          <a:lstStyle/>
+          <a:p>
+            <a:pPr marL="0" marR="0" lvl="0" indent="0" rtl="0">
+              <a:lnSpc>
+                <a:spcPct val="100000"/>
+              </a:lnSpc>
+              <a:spcBef>
+                <a:spcPts val="0"/>
+              </a:spcBef>
+              <a:spcAft>
+                <a:spcPts val="0"/>
+              </a:spcAft>
+              <a:buClr>
+                <a:srgbClr val="000000"/>
+              </a:buClr>
+              <a:buSzPts val="1600"/>
+              <a:buFont typeface="Arial"/>
+              <a:buNone/>
+            </a:pPr>
+            <a:r>
+              <a:rPr lang="en-US" sz="4800" dirty="0">
+                <a:solidFill>
+                  <a:schemeClr val="lt1"/>
+                </a:solidFill>
+              </a:rPr>
+              <a:t> 150+ Murdered: by Intelligence Services</a:t>
+            </a:r>
+            <a:endParaRPr sz="3200" b="0" i="0" u="none" strike="noStrike" cap="none" dirty="0">
+              <a:solidFill>
+                <a:srgbClr val="000000"/>
+              </a:solidFill>
+              <a:latin typeface="Arial"/>
+              <a:ea typeface="Arial"/>
+              <a:cs typeface="Arial"/>
+              <a:sym typeface="Arial"/>
+            </a:endParaRPr>
+          </a:p>
+        </p:txBody>
+      </p:sp>
+      <p:sp>
+        <p:nvSpPr>
+          <p:cNvPr id="4" name="TextBox 3">
+            <a:extLst>
+              <a:ext uri="{FF2B5EF4-FFF2-40B4-BE49-F238E27FC236}">
+                <a16:creationId xmlns:a16="http://schemas.microsoft.com/office/drawing/2014/main" id="{50D7621F-9D36-7894-7117-9F831EF5EFA6}"/>
+              </a:ext>
+            </a:extLst>
+          </p:cNvPr>
+          <p:cNvSpPr txBox="1"/>
+          <p:nvPr/>
+        </p:nvSpPr>
+        <p:spPr>
+          <a:xfrm>
+            <a:off x="107300" y="6229650"/>
+            <a:ext cx="11685989" cy="461665"/>
+          </a:xfrm>
+          <a:prstGeom prst="rect">
+            <a:avLst/>
+          </a:prstGeom>
+          <a:solidFill>
+            <a:schemeClr val="bg1">
+              <a:alpha val="84400"/>
+            </a:schemeClr>
+          </a:solidFill>
+        </p:spPr>
+        <p:txBody>
+          <a:bodyPr wrap="square" rtlCol="0">
+            <a:spAutoFit/>
+          </a:bodyPr>
+          <a:lstStyle/>
+          <a:p>
+            <a:r>
+              <a:rPr lang="en-US" sz="2400" dirty="0"/>
+              <a:t>https://intelligencemurders.com/intel</a:t>
+            </a:r>
+          </a:p>
+        </p:txBody>
+      </p:sp>
+      <p:sp>
+        <p:nvSpPr>
+          <p:cNvPr id="7" name="Google Shape;170;p31">
+            <a:extLst>
+              <a:ext uri="{FF2B5EF4-FFF2-40B4-BE49-F238E27FC236}">
+                <a16:creationId xmlns:a16="http://schemas.microsoft.com/office/drawing/2014/main" id="{4B582382-76AA-B49E-C611-39A37CE591B9}"/>
+              </a:ext>
+            </a:extLst>
+          </p:cNvPr>
+          <p:cNvSpPr/>
+          <p:nvPr/>
+        </p:nvSpPr>
+        <p:spPr>
+          <a:xfrm>
+            <a:off x="7506336" y="4925186"/>
+            <a:ext cx="4550222" cy="869505"/>
+          </a:xfrm>
+          <a:prstGeom prst="rect">
+            <a:avLst/>
+          </a:prstGeom>
+          <a:solidFill>
+            <a:srgbClr val="C00000"/>
+          </a:solidFill>
+          <a:ln>
+            <a:noFill/>
+          </a:ln>
+        </p:spPr>
+        <p:txBody>
+          <a:bodyPr spcFirstLastPara="1" wrap="square" lIns="91425" tIns="45700" rIns="91425" bIns="45700" anchor="ctr" anchorCtr="0">
+            <a:noAutofit/>
+          </a:bodyPr>
+          <a:lstStyle/>
+          <a:p>
+            <a:pPr marL="0" marR="0" lvl="0" indent="0" algn="ctr" rtl="0">
+              <a:lnSpc>
+                <a:spcPct val="100000"/>
+              </a:lnSpc>
+              <a:spcBef>
+                <a:spcPts val="0"/>
+              </a:spcBef>
+              <a:spcAft>
+                <a:spcPts val="0"/>
+              </a:spcAft>
+              <a:buClr>
+                <a:srgbClr val="000000"/>
+              </a:buClr>
+              <a:buSzPts val="1600"/>
+              <a:buFont typeface="Arial"/>
+              <a:buNone/>
+            </a:pPr>
+            <a:r>
+              <a:rPr lang="en-US" sz="4800" dirty="0">
+                <a:solidFill>
+                  <a:schemeClr val="lt1"/>
+                </a:solidFill>
+              </a:rPr>
+              <a:t>Orlando Letelier</a:t>
+            </a:r>
+            <a:endParaRPr sz="3200" b="0" i="0" u="none" strike="noStrike" cap="none" dirty="0">
+              <a:solidFill>
+                <a:srgbClr val="000000"/>
+              </a:solidFill>
+              <a:latin typeface="Arial"/>
+              <a:ea typeface="Arial"/>
+              <a:cs typeface="Arial"/>
+              <a:sym typeface="Arial"/>
+            </a:endParaRPr>
+          </a:p>
+        </p:txBody>
+      </p:sp>
+      <p:sp>
+        <p:nvSpPr>
+          <p:cNvPr id="8" name="Google Shape;170;p31">
+            <a:extLst>
+              <a:ext uri="{FF2B5EF4-FFF2-40B4-BE49-F238E27FC236}">
+                <a16:creationId xmlns:a16="http://schemas.microsoft.com/office/drawing/2014/main" id="{D328ABDE-E232-3EB7-C3F2-B4BB7B64262F}"/>
+              </a:ext>
+            </a:extLst>
+          </p:cNvPr>
+          <p:cNvSpPr/>
+          <p:nvPr/>
+        </p:nvSpPr>
+        <p:spPr>
+          <a:xfrm>
+            <a:off x="7526107" y="5681420"/>
+            <a:ext cx="4550222" cy="548230"/>
+          </a:xfrm>
+          <a:prstGeom prst="rect">
+            <a:avLst/>
+          </a:prstGeom>
+          <a:solidFill>
+            <a:srgbClr val="C00000"/>
+          </a:solidFill>
+          <a:ln>
+            <a:noFill/>
+          </a:ln>
+        </p:spPr>
+        <p:txBody>
+          <a:bodyPr spcFirstLastPara="1" wrap="square" lIns="91425" tIns="45700" rIns="91425" bIns="45700" anchor="ctr" anchorCtr="0">
+            <a:noAutofit/>
+          </a:bodyPr>
+          <a:lstStyle/>
+          <a:p>
+            <a:pPr marL="0" marR="0" lvl="0" indent="0" algn="ctr" rtl="0">
+              <a:lnSpc>
+                <a:spcPct val="100000"/>
+              </a:lnSpc>
+              <a:spcBef>
+                <a:spcPts val="0"/>
+              </a:spcBef>
+              <a:spcAft>
+                <a:spcPts val="0"/>
+              </a:spcAft>
+              <a:buClr>
+                <a:srgbClr val="000000"/>
+              </a:buClr>
+              <a:buSzPts val="1600"/>
+              <a:buFont typeface="Arial"/>
+              <a:buNone/>
+            </a:pPr>
+            <a:r>
+              <a:rPr lang="en-US" sz="3600" dirty="0">
+                <a:solidFill>
+                  <a:schemeClr val="lt1"/>
+                </a:solidFill>
+              </a:rPr>
+              <a:t>Dead at Age 44</a:t>
+            </a:r>
+            <a:endParaRPr sz="2000" b="0" i="0" u="none" strike="noStrike" cap="none" dirty="0">
+              <a:solidFill>
+                <a:srgbClr val="000000"/>
+              </a:solidFill>
+              <a:latin typeface="Arial"/>
+              <a:ea typeface="Arial"/>
+              <a:cs typeface="Arial"/>
+              <a:sym typeface="Arial"/>
+            </a:endParaRPr>
+          </a:p>
+        </p:txBody>
+      </p:sp>
+      <p:sp>
+        <p:nvSpPr>
+          <p:cNvPr id="10" name="TextBox 9">
+            <a:extLst>
+              <a:ext uri="{FF2B5EF4-FFF2-40B4-BE49-F238E27FC236}">
+                <a16:creationId xmlns:a16="http://schemas.microsoft.com/office/drawing/2014/main" id="{5FA0D8B2-6B55-D3DC-BCBB-6FEAD86B9E72}"/>
+              </a:ext>
+            </a:extLst>
+          </p:cNvPr>
+          <p:cNvSpPr txBox="1"/>
+          <p:nvPr/>
+        </p:nvSpPr>
+        <p:spPr>
+          <a:xfrm>
+            <a:off x="312431" y="2175372"/>
+            <a:ext cx="6987941" cy="3046988"/>
+          </a:xfrm>
+          <a:prstGeom prst="rect">
+            <a:avLst/>
+          </a:prstGeom>
+          <a:solidFill>
+            <a:schemeClr val="bg1">
+              <a:alpha val="84400"/>
+            </a:schemeClr>
+          </a:solidFill>
+        </p:spPr>
+        <p:txBody>
+          <a:bodyPr wrap="square" rtlCol="0">
+            <a:spAutoFit/>
+          </a:bodyPr>
+          <a:lstStyle/>
+          <a:p>
+            <a:pPr marL="285750" indent="-285750">
+              <a:spcBef>
+                <a:spcPts val="1200"/>
+              </a:spcBef>
+              <a:buFont typeface="Arial" panose="020B0604020202020204" pitchFamily="34" charset="0"/>
+              <a:buChar char="•"/>
+            </a:pPr>
+            <a:r>
+              <a:t>Chilean diplomat — killed by a CAR BOMB on Embassy Row in Washington, DC, less than 2 km from the WHITE HOUSE.</a:t>
+            </a:r>
+          </a:p>
+          <a:p>
+            <a:pPr marL="285750" indent="-285750">
+              <a:spcBef>
+                <a:spcPts val="1200"/>
+              </a:spcBef>
+              <a:buFont typeface="Arial" panose="020B0604020202020204" pitchFamily="34" charset="0"/>
+              <a:buChar char="•"/>
+            </a:pPr>
+            <a:r>
+              <a:t>His 25-year-old American colleague Ronni Moffitt DROWNED in her own blood from shrapnel that pierced her throat.</a:t>
+            </a:r>
+          </a:p>
+          <a:p>
+            <a:pPr marL="285750" indent="-285750">
+              <a:spcBef>
+                <a:spcPts val="1200"/>
+              </a:spcBef>
+              <a:buFont typeface="Arial" panose="020B0604020202020204" pitchFamily="34" charset="0"/>
+              <a:buChar char="•"/>
+            </a:pPr>
+            <a:r>
+              <a:t>Declassified CIA documents state: "PINOCHET PERSONALLY ORDERED" the assassination.</a:t>
+            </a:r>
+          </a:p>
+          <a:p>
+            <a:pPr marL="285750" indent="-285750">
+              <a:spcBef>
+                <a:spcPts val="1200"/>
+              </a:spcBef>
+              <a:buFont typeface="Arial" panose="020B0604020202020204" pitchFamily="34" charset="0"/>
+              <a:buChar char="•"/>
+            </a:pPr>
+            <a:r>
+              <a:t>Kissinger BLOCKED a State Department warning to Condor nations FIVE DAYS before the bombing — a warning that could have PREVENTED it.</a:t>
+            </a:r>
+          </a:p>
+          <a:p>
+            <a:pPr marL="285750" indent="-285750">
+              <a:spcBef>
+                <a:spcPts val="1200"/>
+              </a:spcBef>
+              <a:buFont typeface="Arial" panose="020B0604020202020204" pitchFamily="34" charset="0"/>
+              <a:buChar char="•"/>
+            </a:pPr>
+            <a:r>
+              <a:t>The American-born assassin who BUILT the bomb served only 62 MONTHS in prison and got a new identity through witness protection.</a:t>
+            </a:r>
+          </a:p>
+        </p:txBody>
+      </p:sp>
+      <p:pic>
+        <p:nvPicPr>
+          <p:cNvPr id="16" name="Picture 15" descr="Orlando_Letelier.jpg"/>
+          <p:cNvPicPr>
+            <a:picLocks noChangeAspect="1"/>
+          </p:cNvPicPr>
+          <p:nvPr/>
+        </p:nvPicPr>
+        <p:blipFill>
+          <a:blip r:embed="rId3"/>
+          <a:stretch>
+            <a:fillRect/>
+          </a:stretch>
+        </p:blipFill>
+        <p:spPr>
+          <a:xfrm>
+            <a:off x="8087033" y="1100088"/>
+            <a:ext cx="3107900" cy="3884876"/>
+          </a:xfrm>
+          <a:prstGeom prst="rect">
+            <a:avLst/>
+          </a:prstGeom>
+        </p:spPr>
+      </p:pic>
+    </p:spTree>
+  </p:cSld>
+  <p:clrMapOvr>
+    <a:masterClrMapping/>
+  </p:clrMapOvr>
+</p:sld>
+</file>
+
+<file path=ppt/slides/slide15.xml><?xml version="1.0" encoding="utf-8"?>
+<p:sld xmlns:a="http://schemas.openxmlformats.org/drawingml/2006/main" xmlns:r="http://schemas.openxmlformats.org/officeDocument/2006/relationships" xmlns:p="http://schemas.openxmlformats.org/presentationml/2006/main">
+  <p:cSld>
+    <p:spTree>
+      <p:nvGrpSpPr>
+        <p:cNvPr id="1" name=""/>
+        <p:cNvGrpSpPr/>
+        <p:nvPr/>
+      </p:nvGrpSpPr>
+      <p:grpSpPr>
+        <a:xfrm>
+          <a:off x="0" y="0"/>
+          <a:ext cx="0" cy="0"/>
+          <a:chOff x="0" y="0"/>
+          <a:chExt cx="0" cy="0"/>
+        </a:xfrm>
+      </p:grpSpPr>
+      <p:sp>
+        <p:nvSpPr>
+          <p:cNvPr id="15" name="TextBox 14">
+            <a:extLst>
+              <a:ext uri="{FF2B5EF4-FFF2-40B4-BE49-F238E27FC236}">
+                <a16:creationId xmlns:a16="http://schemas.microsoft.com/office/drawing/2014/main" id="{E478240E-251B-5BA6-3C45-7E6620400769}"/>
+              </a:ext>
+            </a:extLst>
+          </p:cNvPr>
+          <p:cNvSpPr txBox="1"/>
+          <p:nvPr/>
+        </p:nvSpPr>
+        <p:spPr>
+          <a:xfrm>
+            <a:off x="312432" y="1288262"/>
+            <a:ext cx="6494294" cy="584775"/>
+          </a:xfrm>
+          <a:prstGeom prst="rect">
+            <a:avLst/>
+          </a:prstGeom>
+          <a:solidFill>
+            <a:schemeClr val="bg1">
+              <a:alpha val="84400"/>
+            </a:schemeClr>
+          </a:solidFill>
+        </p:spPr>
+        <p:txBody>
+          <a:bodyPr wrap="square" rtlCol="0">
+            <a:spAutoFit/>
+          </a:bodyPr>
+          <a:lstStyle/>
+          <a:p>
+            <a:r>
+              <a:rPr lang="en-US" sz="3200" b="1" dirty="0">
+                <a:solidFill>
+                  <a:schemeClr val="accent5"/>
+                </a:solidFill>
+              </a:rPr>
+              <a:t>Why / How they Rafael Trujillo:</a:t>
+            </a:r>
+          </a:p>
+        </p:txBody>
+      </p:sp>
+      <p:sp>
+        <p:nvSpPr>
+          <p:cNvPr id="3" name="Google Shape;170;p31">
+            <a:extLst>
+              <a:ext uri="{FF2B5EF4-FFF2-40B4-BE49-F238E27FC236}">
+                <a16:creationId xmlns:a16="http://schemas.microsoft.com/office/drawing/2014/main" id="{A4695FE5-0AA5-AB05-98B1-B5B8E3FA8CBE}"/>
+              </a:ext>
+            </a:extLst>
+          </p:cNvPr>
+          <p:cNvSpPr/>
+          <p:nvPr/>
+        </p:nvSpPr>
+        <p:spPr>
+          <a:xfrm>
+            <a:off x="191731" y="5732890"/>
+            <a:ext cx="3431270" cy="496760"/>
+          </a:xfrm>
+          <a:prstGeom prst="rect">
+            <a:avLst/>
+          </a:prstGeom>
+          <a:solidFill>
+            <a:schemeClr val="accent5"/>
+          </a:solidFill>
+          <a:ln>
+            <a:noFill/>
+          </a:ln>
+        </p:spPr>
+        <p:txBody>
+          <a:bodyPr spcFirstLastPara="1" wrap="square" lIns="91425" tIns="45700" rIns="91425" bIns="45700" anchor="ctr" anchorCtr="0">
+            <a:noAutofit/>
+          </a:bodyPr>
+          <a:lstStyle/>
+          <a:p>
+            <a:pPr marL="0" marR="0" lvl="0" indent="0" algn="ctr" rtl="0">
+              <a:lnSpc>
+                <a:spcPct val="100000"/>
+              </a:lnSpc>
+              <a:spcBef>
+                <a:spcPts val="0"/>
+              </a:spcBef>
+              <a:spcAft>
+                <a:spcPts val="0"/>
+              </a:spcAft>
+              <a:buClr>
+                <a:srgbClr val="000000"/>
+              </a:buClr>
+              <a:buSzPts val="1600"/>
+              <a:buFont typeface="Arial"/>
+              <a:buNone/>
+            </a:pPr>
+            <a:r>
+              <a:rPr lang="en-US" sz="3600" dirty="0">
+                <a:solidFill>
+                  <a:schemeClr val="lt1"/>
+                </a:solidFill>
+              </a:rPr>
+              <a:t>Read List Here:</a:t>
+            </a:r>
+            <a:endParaRPr sz="2000" b="0" i="0" u="none" strike="noStrike" cap="none" dirty="0">
+              <a:solidFill>
+                <a:srgbClr val="000000"/>
+              </a:solidFill>
+              <a:latin typeface="Arial"/>
+              <a:ea typeface="Arial"/>
+              <a:cs typeface="Arial"/>
+              <a:sym typeface="Arial"/>
+            </a:endParaRPr>
+          </a:p>
+        </p:txBody>
+      </p:sp>
+      <p:sp>
+        <p:nvSpPr>
+          <p:cNvPr id="5" name="Google Shape;170;p31">
+            <a:extLst>
+              <a:ext uri="{FF2B5EF4-FFF2-40B4-BE49-F238E27FC236}">
+                <a16:creationId xmlns:a16="http://schemas.microsoft.com/office/drawing/2014/main" id="{98132413-6ED2-8B36-74B6-3C503B1A4634}"/>
+              </a:ext>
+            </a:extLst>
+          </p:cNvPr>
+          <p:cNvSpPr/>
+          <p:nvPr/>
+        </p:nvSpPr>
+        <p:spPr>
+          <a:xfrm>
+            <a:off x="0" y="-31518"/>
+            <a:ext cx="12192000" cy="1131606"/>
+          </a:xfrm>
+          <a:prstGeom prst="rect">
+            <a:avLst/>
+          </a:prstGeom>
+          <a:solidFill>
+            <a:srgbClr val="C00000"/>
+          </a:solidFill>
+          <a:ln>
+            <a:noFill/>
+          </a:ln>
+        </p:spPr>
+        <p:txBody>
+          <a:bodyPr spcFirstLastPara="1" wrap="square" lIns="91425" tIns="45700" rIns="91425" bIns="45700" anchor="ctr" anchorCtr="0">
+            <a:noAutofit/>
+          </a:bodyPr>
+          <a:lstStyle/>
+          <a:p>
+            <a:pPr marL="0" marR="0" lvl="0" indent="0" rtl="0">
+              <a:lnSpc>
+                <a:spcPct val="100000"/>
+              </a:lnSpc>
+              <a:spcBef>
+                <a:spcPts val="0"/>
+              </a:spcBef>
+              <a:spcAft>
+                <a:spcPts val="0"/>
+              </a:spcAft>
+              <a:buClr>
+                <a:srgbClr val="000000"/>
+              </a:buClr>
+              <a:buSzPts val="1600"/>
+              <a:buFont typeface="Arial"/>
+              <a:buNone/>
+            </a:pPr>
+            <a:r>
+              <a:rPr lang="en-US" sz="4800" dirty="0">
+                <a:solidFill>
+                  <a:schemeClr val="lt1"/>
+                </a:solidFill>
+              </a:rPr>
+              <a:t> 150+ Murdered: by Intelligence Services</a:t>
+            </a:r>
+            <a:endParaRPr sz="3200" b="0" i="0" u="none" strike="noStrike" cap="none" dirty="0">
+              <a:solidFill>
+                <a:srgbClr val="000000"/>
+              </a:solidFill>
+              <a:latin typeface="Arial"/>
+              <a:ea typeface="Arial"/>
+              <a:cs typeface="Arial"/>
+              <a:sym typeface="Arial"/>
+            </a:endParaRPr>
+          </a:p>
+        </p:txBody>
+      </p:sp>
+      <p:sp>
+        <p:nvSpPr>
+          <p:cNvPr id="4" name="TextBox 3">
+            <a:extLst>
+              <a:ext uri="{FF2B5EF4-FFF2-40B4-BE49-F238E27FC236}">
+                <a16:creationId xmlns:a16="http://schemas.microsoft.com/office/drawing/2014/main" id="{50D7621F-9D36-7894-7117-9F831EF5EFA6}"/>
+              </a:ext>
+            </a:extLst>
+          </p:cNvPr>
+          <p:cNvSpPr txBox="1"/>
+          <p:nvPr/>
+        </p:nvSpPr>
+        <p:spPr>
+          <a:xfrm>
+            <a:off x="107300" y="6229650"/>
+            <a:ext cx="11685989" cy="461665"/>
+          </a:xfrm>
+          <a:prstGeom prst="rect">
+            <a:avLst/>
+          </a:prstGeom>
+          <a:solidFill>
+            <a:schemeClr val="bg1">
+              <a:alpha val="84400"/>
+            </a:schemeClr>
+          </a:solidFill>
+        </p:spPr>
+        <p:txBody>
+          <a:bodyPr wrap="square" rtlCol="0">
+            <a:spAutoFit/>
+          </a:bodyPr>
+          <a:lstStyle/>
+          <a:p>
+            <a:r>
+              <a:rPr lang="en-US" sz="2400" dirty="0"/>
+              <a:t>https://intelligencemurders.com/intel</a:t>
+            </a:r>
+          </a:p>
+        </p:txBody>
+      </p:sp>
+      <p:sp>
+        <p:nvSpPr>
+          <p:cNvPr id="7" name="Google Shape;170;p31">
+            <a:extLst>
+              <a:ext uri="{FF2B5EF4-FFF2-40B4-BE49-F238E27FC236}">
+                <a16:creationId xmlns:a16="http://schemas.microsoft.com/office/drawing/2014/main" id="{4B582382-76AA-B49E-C611-39A37CE591B9}"/>
+              </a:ext>
+            </a:extLst>
+          </p:cNvPr>
+          <p:cNvSpPr/>
+          <p:nvPr/>
+        </p:nvSpPr>
+        <p:spPr>
+          <a:xfrm>
+            <a:off x="7506336" y="4925186"/>
+            <a:ext cx="4550222" cy="869505"/>
+          </a:xfrm>
+          <a:prstGeom prst="rect">
+            <a:avLst/>
+          </a:prstGeom>
+          <a:solidFill>
+            <a:srgbClr val="C00000"/>
+          </a:solidFill>
+          <a:ln>
+            <a:noFill/>
+          </a:ln>
+        </p:spPr>
+        <p:txBody>
+          <a:bodyPr spcFirstLastPara="1" wrap="square" lIns="91425" tIns="45700" rIns="91425" bIns="45700" anchor="ctr" anchorCtr="0">
+            <a:noAutofit/>
+          </a:bodyPr>
+          <a:lstStyle/>
+          <a:p>
+            <a:pPr marL="0" marR="0" lvl="0" indent="0" algn="ctr" rtl="0">
+              <a:lnSpc>
+                <a:spcPct val="100000"/>
+              </a:lnSpc>
+              <a:spcBef>
+                <a:spcPts val="0"/>
+              </a:spcBef>
+              <a:spcAft>
+                <a:spcPts val="0"/>
+              </a:spcAft>
+              <a:buClr>
+                <a:srgbClr val="000000"/>
+              </a:buClr>
+              <a:buSzPts val="1600"/>
+              <a:buFont typeface="Arial"/>
+              <a:buNone/>
+            </a:pPr>
+            <a:r>
+              <a:rPr lang="en-US" sz="4800" dirty="0">
+                <a:solidFill>
+                  <a:schemeClr val="lt1"/>
+                </a:solidFill>
+              </a:rPr>
+              <a:t>Rafael Trujillo</a:t>
+            </a:r>
+            <a:endParaRPr sz="3200" b="0" i="0" u="none" strike="noStrike" cap="none" dirty="0">
+              <a:solidFill>
+                <a:srgbClr val="000000"/>
+              </a:solidFill>
+              <a:latin typeface="Arial"/>
+              <a:ea typeface="Arial"/>
+              <a:cs typeface="Arial"/>
+              <a:sym typeface="Arial"/>
+            </a:endParaRPr>
+          </a:p>
+        </p:txBody>
+      </p:sp>
+      <p:sp>
+        <p:nvSpPr>
+          <p:cNvPr id="8" name="Google Shape;170;p31">
+            <a:extLst>
+              <a:ext uri="{FF2B5EF4-FFF2-40B4-BE49-F238E27FC236}">
+                <a16:creationId xmlns:a16="http://schemas.microsoft.com/office/drawing/2014/main" id="{D328ABDE-E232-3EB7-C3F2-B4BB7B64262F}"/>
+              </a:ext>
+            </a:extLst>
+          </p:cNvPr>
+          <p:cNvSpPr/>
+          <p:nvPr/>
+        </p:nvSpPr>
+        <p:spPr>
+          <a:xfrm>
+            <a:off x="7526107" y="5681420"/>
+            <a:ext cx="4550222" cy="548230"/>
+          </a:xfrm>
+          <a:prstGeom prst="rect">
+            <a:avLst/>
+          </a:prstGeom>
+          <a:solidFill>
+            <a:srgbClr val="C00000"/>
+          </a:solidFill>
+          <a:ln>
+            <a:noFill/>
+          </a:ln>
+        </p:spPr>
+        <p:txBody>
+          <a:bodyPr spcFirstLastPara="1" wrap="square" lIns="91425" tIns="45700" rIns="91425" bIns="45700" anchor="ctr" anchorCtr="0">
+            <a:noAutofit/>
+          </a:bodyPr>
+          <a:lstStyle/>
+          <a:p>
+            <a:pPr marL="0" marR="0" lvl="0" indent="0" algn="ctr" rtl="0">
+              <a:lnSpc>
+                <a:spcPct val="100000"/>
+              </a:lnSpc>
+              <a:spcBef>
+                <a:spcPts val="0"/>
+              </a:spcBef>
+              <a:spcAft>
+                <a:spcPts val="0"/>
+              </a:spcAft>
+              <a:buClr>
+                <a:srgbClr val="000000"/>
+              </a:buClr>
+              <a:buSzPts val="1600"/>
+              <a:buFont typeface="Arial"/>
+              <a:buNone/>
+            </a:pPr>
+            <a:r>
+              <a:rPr lang="en-US" sz="3600" dirty="0">
+                <a:solidFill>
+                  <a:schemeClr val="lt1"/>
+                </a:solidFill>
+              </a:rPr>
+              <a:t>Dead at Age 69</a:t>
+            </a:r>
+            <a:endParaRPr sz="2000" b="0" i="0" u="none" strike="noStrike" cap="none" dirty="0">
+              <a:solidFill>
+                <a:srgbClr val="000000"/>
+              </a:solidFill>
+              <a:latin typeface="Arial"/>
+              <a:ea typeface="Arial"/>
+              <a:cs typeface="Arial"/>
+              <a:sym typeface="Arial"/>
+            </a:endParaRPr>
+          </a:p>
+        </p:txBody>
+      </p:sp>
+      <p:sp>
+        <p:nvSpPr>
+          <p:cNvPr id="10" name="TextBox 9">
+            <a:extLst>
+              <a:ext uri="{FF2B5EF4-FFF2-40B4-BE49-F238E27FC236}">
+                <a16:creationId xmlns:a16="http://schemas.microsoft.com/office/drawing/2014/main" id="{5FA0D8B2-6B55-D3DC-BCBB-6FEAD86B9E72}"/>
+              </a:ext>
+            </a:extLst>
+          </p:cNvPr>
+          <p:cNvSpPr txBox="1"/>
+          <p:nvPr/>
+        </p:nvSpPr>
+        <p:spPr>
+          <a:xfrm>
+            <a:off x="312431" y="2175372"/>
+            <a:ext cx="6987941" cy="3046988"/>
+          </a:xfrm>
+          <a:prstGeom prst="rect">
+            <a:avLst/>
+          </a:prstGeom>
+          <a:solidFill>
+            <a:schemeClr val="bg1">
+              <a:alpha val="84400"/>
+            </a:schemeClr>
+          </a:solidFill>
+        </p:spPr>
+        <p:txBody>
+          <a:bodyPr wrap="square" rtlCol="0">
+            <a:spAutoFit/>
+          </a:bodyPr>
+          <a:lstStyle/>
+          <a:p>
+            <a:pPr marL="285750" indent="-285750">
+              <a:spcBef>
+                <a:spcPts val="1200"/>
+              </a:spcBef>
+              <a:buFont typeface="Arial" panose="020B0604020202020204" pitchFamily="34" charset="0"/>
+              <a:buChar char="•"/>
+            </a:pPr>
+            <a:r>
+              <a:t>CIA SUPPLIED the weapons. Dominican dictator ambushed and machine-gunned in his car on a highway.</a:t>
+            </a:r>
+          </a:p>
+          <a:p>
+            <a:pPr marL="285750" indent="-285750">
+              <a:spcBef>
+                <a:spcPts val="1200"/>
+              </a:spcBef>
+              <a:buFont typeface="Arial" panose="020B0604020202020204" pitchFamily="34" charset="0"/>
+              <a:buChar char="•"/>
+            </a:pPr>
+            <a:r>
+              <a:t>Ruled for 31 YEARS. Murdered the Mirabal sisters. Ordered the Parsley Massacre killing up to 30,000 Haitians.</a:t>
+            </a:r>
+          </a:p>
+          <a:p>
+            <a:pPr marL="285750" indent="-285750">
+              <a:spcBef>
+                <a:spcPts val="1200"/>
+              </a:spcBef>
+              <a:buFont typeface="Arial" panose="020B0604020202020204" pitchFamily="34" charset="0"/>
+              <a:buChar char="•"/>
+            </a:pPr>
+            <a:r>
+              <a:t>CIA's internal report admitted "quite extensive Agency involvement" — then PUBLICLY claimed only a "faint connection."</a:t>
+            </a:r>
+          </a:p>
+          <a:p>
+            <a:pPr marL="285750" indent="-285750">
+              <a:spcBef>
+                <a:spcPts val="1200"/>
+              </a:spcBef>
+              <a:buFont typeface="Arial" panose="020B0604020202020204" pitchFamily="34" charset="0"/>
+              <a:buChar char="•"/>
+            </a:pPr>
+            <a:r>
+              <a:t>Kennedy sent a cable saying the US "cannot condone assassination" — TWO DAYS before the hit. Weapons already delivered.</a:t>
+            </a:r>
+          </a:p>
+          <a:p>
+            <a:pPr marL="285750" indent="-285750">
+              <a:spcBef>
+                <a:spcPts val="1200"/>
+              </a:spcBef>
+              <a:buFont typeface="Arial" panose="020B0604020202020204" pitchFamily="34" charset="0"/>
+              <a:buChar char="•"/>
+            </a:pPr>
+            <a:r>
+              <a:t>Church Committee confirmed this as ONE OF FIVE CIA assassination plots against foreign leaders.</a:t>
+            </a:r>
+          </a:p>
+        </p:txBody>
+      </p:sp>
+      <p:pic>
+        <p:nvPicPr>
+          <p:cNvPr id="16" name="Picture 15" descr="Rafael_Trujillo.jpg"/>
+          <p:cNvPicPr>
+            <a:picLocks noChangeAspect="1"/>
+          </p:cNvPicPr>
+          <p:nvPr/>
+        </p:nvPicPr>
+        <p:blipFill>
+          <a:blip r:embed="rId3"/>
+          <a:stretch>
+            <a:fillRect/>
+          </a:stretch>
+        </p:blipFill>
+        <p:spPr>
+          <a:xfrm>
+            <a:off x="8276420" y="1100088"/>
+            <a:ext cx="2729125" cy="3884876"/>
+          </a:xfrm>
+          <a:prstGeom prst="rect">
+            <a:avLst/>
+          </a:prstGeom>
+        </p:spPr>
+      </p:pic>
+    </p:spTree>
+  </p:cSld>
+  <p:clrMapOvr>
+    <a:masterClrMapping/>
+  </p:clrMapOvr>
+</p:sld>
+</file>
+
+<file path=ppt/slides/slide16.xml><?xml version="1.0" encoding="utf-8"?>
+<p:sld xmlns:a="http://schemas.openxmlformats.org/drawingml/2006/main" xmlns:r="http://schemas.openxmlformats.org/officeDocument/2006/relationships" xmlns:p="http://schemas.openxmlformats.org/presentationml/2006/main">
+  <p:cSld>
+    <p:spTree>
+      <p:nvGrpSpPr>
+        <p:cNvPr id="1" name=""/>
+        <p:cNvGrpSpPr/>
+        <p:nvPr/>
+      </p:nvGrpSpPr>
+      <p:grpSpPr>
+        <a:xfrm>
+          <a:off x="0" y="0"/>
+          <a:ext cx="0" cy="0"/>
+          <a:chOff x="0" y="0"/>
+          <a:chExt cx="0" cy="0"/>
+        </a:xfrm>
+      </p:grpSpPr>
+      <p:sp>
+        <p:nvSpPr>
+          <p:cNvPr id="15" name="TextBox 14">
+            <a:extLst>
+              <a:ext uri="{FF2B5EF4-FFF2-40B4-BE49-F238E27FC236}">
+                <a16:creationId xmlns:a16="http://schemas.microsoft.com/office/drawing/2014/main" id="{E478240E-251B-5BA6-3C45-7E6620400769}"/>
+              </a:ext>
+            </a:extLst>
+          </p:cNvPr>
+          <p:cNvSpPr txBox="1"/>
+          <p:nvPr/>
+        </p:nvSpPr>
+        <p:spPr>
+          <a:xfrm>
+            <a:off x="312432" y="1288262"/>
+            <a:ext cx="6494294" cy="584775"/>
+          </a:xfrm>
+          <a:prstGeom prst="rect">
+            <a:avLst/>
+          </a:prstGeom>
+          <a:solidFill>
+            <a:schemeClr val="bg1">
+              <a:alpha val="84400"/>
+            </a:schemeClr>
+          </a:solidFill>
+        </p:spPr>
+        <p:txBody>
+          <a:bodyPr wrap="square" rtlCol="0">
+            <a:spAutoFit/>
+          </a:bodyPr>
+          <a:lstStyle/>
+          <a:p>
+            <a:r>
+              <a:rPr lang="en-US" sz="3200" b="1" dirty="0">
+                <a:solidFill>
+                  <a:schemeClr val="accent5"/>
+                </a:solidFill>
+              </a:rPr>
               <a:t>Why / How they Alexei Navalny:</a:t>
             </a:r>
           </a:p>
@@ -7794,7 +8906,7 @@
 </p:sld>
 </file>
 
-<file path=ppt/slides/slide15.xml><?xml version="1.0" encoding="utf-8"?>
+<file path=ppt/slides/slide17.xml><?xml version="1.0" encoding="utf-8"?>
 <p:sld xmlns:a="http://schemas.openxmlformats.org/drawingml/2006/main" xmlns:r="http://schemas.openxmlformats.org/officeDocument/2006/relationships" xmlns:p="http://schemas.openxmlformats.org/presentationml/2006/main">
   <p:cSld>
     <p:spTree>
@@ -8303,7 +9415,7 @@
 </p:sld>
 </file>
 
-<file path=ppt/slides/slide16.xml><?xml version="1.0" encoding="utf-8"?>
+<file path=ppt/slides/slide18.xml><?xml version="1.0" encoding="utf-8"?>
 <p:sld xmlns:a="http://schemas.openxmlformats.org/drawingml/2006/main" xmlns:r="http://schemas.openxmlformats.org/officeDocument/2006/relationships" xmlns:p="http://schemas.openxmlformats.org/presentationml/2006/main">
   <p:cSld>
     <p:spTree>
@@ -8807,7 +9919,7 @@
 </p:sld>
 </file>
 
-<file path=ppt/slides/slide17.xml><?xml version="1.0" encoding="utf-8"?>
+<file path=ppt/slides/slide19.xml><?xml version="1.0" encoding="utf-8"?>
 <p:sld xmlns:a="http://schemas.openxmlformats.org/drawingml/2006/main" xmlns:r="http://schemas.openxmlformats.org/officeDocument/2006/relationships" xmlns:p="http://schemas.openxmlformats.org/presentationml/2006/main">
   <p:cSld>
     <p:spTree>
@@ -9312,6 +10424,517 @@
 </file>
 
 <file path=ppt/slides/slide2.xml><?xml version="1.0" encoding="utf-8"?>
+<p:sld xmlns:a="http://schemas.openxmlformats.org/drawingml/2006/main" xmlns:r="http://schemas.openxmlformats.org/officeDocument/2006/relationships" xmlns:p="http://schemas.openxmlformats.org/presentationml/2006/main">
+  <p:cSld>
+    <p:spTree>
+      <p:nvGrpSpPr>
+        <p:cNvPr id="1" name=""/>
+        <p:cNvGrpSpPr/>
+        <p:nvPr/>
+      </p:nvGrpSpPr>
+      <p:grpSpPr>
+        <a:xfrm>
+          <a:off x="0" y="0"/>
+          <a:ext cx="0" cy="0"/>
+          <a:chOff x="0" y="0"/>
+          <a:chExt cx="0" cy="0"/>
+        </a:xfrm>
+      </p:grpSpPr>
+      <p:sp>
+        <p:nvSpPr>
+          <p:cNvPr id="15" name="TextBox 14">
+            <a:extLst>
+              <a:ext uri="{FF2B5EF4-FFF2-40B4-BE49-F238E27FC236}">
+                <a16:creationId xmlns:a16="http://schemas.microsoft.com/office/drawing/2014/main" id="{E478240E-251B-5BA6-3C45-7E6620400769}"/>
+              </a:ext>
+            </a:extLst>
+          </p:cNvPr>
+          <p:cNvSpPr txBox="1"/>
+          <p:nvPr/>
+        </p:nvSpPr>
+        <p:spPr>
+          <a:xfrm>
+            <a:off x="312432" y="1288262"/>
+            <a:ext cx="6494294" cy="584775"/>
+          </a:xfrm>
+          <a:prstGeom prst="rect">
+            <a:avLst/>
+          </a:prstGeom>
+          <a:solidFill>
+            <a:schemeClr val="bg1">
+              <a:alpha val="84400"/>
+            </a:schemeClr>
+          </a:solidFill>
+        </p:spPr>
+        <p:txBody>
+          <a:bodyPr wrap="square" rtlCol="0">
+            <a:spAutoFit/>
+          </a:bodyPr>
+          <a:lstStyle/>
+          <a:p>
+            <a:r>
+              <a:rPr lang="en-US" sz="3200" b="1" dirty="0">
+                <a:solidFill>
+                  <a:schemeClr val="accent5"/>
+                </a:solidFill>
+              </a:rPr>
+              <a:t>Why / How they William Cooper:</a:t>
+            </a:r>
+          </a:p>
+        </p:txBody>
+      </p:sp>
+      <p:sp>
+        <p:nvSpPr>
+          <p:cNvPr id="3" name="Google Shape;170;p31">
+            <a:extLst>
+              <a:ext uri="{FF2B5EF4-FFF2-40B4-BE49-F238E27FC236}">
+                <a16:creationId xmlns:a16="http://schemas.microsoft.com/office/drawing/2014/main" id="{A4695FE5-0AA5-AB05-98B1-B5B8E3FA8CBE}"/>
+              </a:ext>
+            </a:extLst>
+          </p:cNvPr>
+          <p:cNvSpPr/>
+          <p:nvPr/>
+        </p:nvSpPr>
+        <p:spPr>
+          <a:xfrm>
+            <a:off x="191731" y="5732890"/>
+            <a:ext cx="3431270" cy="496760"/>
+          </a:xfrm>
+          <a:prstGeom prst="rect">
+            <a:avLst/>
+          </a:prstGeom>
+          <a:solidFill>
+            <a:schemeClr val="accent5"/>
+          </a:solidFill>
+          <a:ln>
+            <a:noFill/>
+          </a:ln>
+        </p:spPr>
+        <p:txBody>
+          <a:bodyPr spcFirstLastPara="1" wrap="square" lIns="91425" tIns="45700" rIns="91425" bIns="45700" anchor="ctr" anchorCtr="0">
+            <a:noAutofit/>
+          </a:bodyPr>
+          <a:lstStyle/>
+          <a:p>
+            <a:pPr marL="0" marR="0" lvl="0" indent="0" algn="ctr" rtl="0">
+              <a:lnSpc>
+                <a:spcPct val="100000"/>
+              </a:lnSpc>
+              <a:spcBef>
+                <a:spcPts val="0"/>
+              </a:spcBef>
+              <a:spcAft>
+                <a:spcPts val="0"/>
+              </a:spcAft>
+              <a:buClr>
+                <a:srgbClr val="000000"/>
+              </a:buClr>
+              <a:buSzPts val="1600"/>
+              <a:buFont typeface="Arial"/>
+              <a:buNone/>
+            </a:pPr>
+            <a:r>
+              <a:rPr lang="en-US" sz="3600" dirty="0">
+                <a:solidFill>
+                  <a:schemeClr val="lt1"/>
+                </a:solidFill>
+              </a:rPr>
+              <a:t>Read List Here:</a:t>
+            </a:r>
+            <a:endParaRPr sz="2000" b="0" i="0" u="none" strike="noStrike" cap="none" dirty="0">
+              <a:solidFill>
+                <a:srgbClr val="000000"/>
+              </a:solidFill>
+              <a:latin typeface="Arial"/>
+              <a:ea typeface="Arial"/>
+              <a:cs typeface="Arial"/>
+              <a:sym typeface="Arial"/>
+            </a:endParaRPr>
+          </a:p>
+        </p:txBody>
+      </p:sp>
+      <p:sp>
+        <p:nvSpPr>
+          <p:cNvPr id="7" name="Google Shape;170;p31">
+            <a:extLst>
+              <a:ext uri="{FF2B5EF4-FFF2-40B4-BE49-F238E27FC236}">
+                <a16:creationId xmlns:a16="http://schemas.microsoft.com/office/drawing/2014/main" id="{4B582382-76AA-B49E-C611-39A37CE591B9}"/>
+              </a:ext>
+            </a:extLst>
+          </p:cNvPr>
+          <p:cNvSpPr/>
+          <p:nvPr/>
+        </p:nvSpPr>
+        <p:spPr>
+          <a:xfrm>
+            <a:off x="7506336" y="4925186"/>
+            <a:ext cx="4550222" cy="869505"/>
+          </a:xfrm>
+          <a:prstGeom prst="rect">
+            <a:avLst/>
+          </a:prstGeom>
+          <a:solidFill>
+            <a:srgbClr val="C00000"/>
+          </a:solidFill>
+          <a:ln>
+            <a:noFill/>
+          </a:ln>
+        </p:spPr>
+        <p:txBody>
+          <a:bodyPr spcFirstLastPara="1" wrap="square" lIns="91425" tIns="45700" rIns="91425" bIns="45700" anchor="ctr" anchorCtr="0">
+            <a:noAutofit/>
+          </a:bodyPr>
+          <a:lstStyle/>
+          <a:p>
+            <a:pPr marL="0" marR="0" lvl="0" indent="0" algn="ctr" rtl="0">
+              <a:lnSpc>
+                <a:spcPct val="100000"/>
+              </a:lnSpc>
+              <a:spcBef>
+                <a:spcPts val="0"/>
+              </a:spcBef>
+              <a:spcAft>
+                <a:spcPts val="0"/>
+              </a:spcAft>
+              <a:buClr>
+                <a:srgbClr val="000000"/>
+              </a:buClr>
+              <a:buSzPts val="1600"/>
+              <a:buFont typeface="Arial"/>
+              <a:buNone/>
+            </a:pPr>
+            <a:r>
+              <a:rPr lang="en-US" sz="4800" dirty="0">
+                <a:solidFill>
+                  <a:schemeClr val="lt1"/>
+                </a:solidFill>
+              </a:rPr>
+              <a:t>William Cooper</a:t>
+            </a:r>
+            <a:endParaRPr sz="3200" b="0" i="0" u="none" strike="noStrike" cap="none" dirty="0">
+              <a:solidFill>
+                <a:srgbClr val="000000"/>
+              </a:solidFill>
+              <a:latin typeface="Arial"/>
+              <a:ea typeface="Arial"/>
+              <a:cs typeface="Arial"/>
+              <a:sym typeface="Arial"/>
+            </a:endParaRPr>
+          </a:p>
+        </p:txBody>
+      </p:sp>
+      <p:sp>
+        <p:nvSpPr>
+          <p:cNvPr id="8" name="Google Shape;170;p31">
+            <a:extLst>
+              <a:ext uri="{FF2B5EF4-FFF2-40B4-BE49-F238E27FC236}">
+                <a16:creationId xmlns:a16="http://schemas.microsoft.com/office/drawing/2014/main" id="{D328ABDE-E232-3EB7-C3F2-B4BB7B64262F}"/>
+              </a:ext>
+            </a:extLst>
+          </p:cNvPr>
+          <p:cNvSpPr/>
+          <p:nvPr/>
+        </p:nvSpPr>
+        <p:spPr>
+          <a:xfrm>
+            <a:off x="7526107" y="5681420"/>
+            <a:ext cx="4550222" cy="548230"/>
+          </a:xfrm>
+          <a:prstGeom prst="rect">
+            <a:avLst/>
+          </a:prstGeom>
+          <a:solidFill>
+            <a:srgbClr val="C00000"/>
+          </a:solidFill>
+          <a:ln>
+            <a:noFill/>
+          </a:ln>
+        </p:spPr>
+        <p:txBody>
+          <a:bodyPr spcFirstLastPara="1" wrap="square" lIns="91425" tIns="45700" rIns="91425" bIns="45700" anchor="ctr" anchorCtr="0">
+            <a:noAutofit/>
+          </a:bodyPr>
+          <a:lstStyle/>
+          <a:p>
+            <a:pPr marL="0" marR="0" lvl="0" indent="0" algn="ctr" rtl="0">
+              <a:lnSpc>
+                <a:spcPct val="100000"/>
+              </a:lnSpc>
+              <a:spcBef>
+                <a:spcPts val="0"/>
+              </a:spcBef>
+              <a:spcAft>
+                <a:spcPts val="0"/>
+              </a:spcAft>
+              <a:buClr>
+                <a:srgbClr val="000000"/>
+              </a:buClr>
+              <a:buSzPts val="1600"/>
+              <a:buFont typeface="Arial"/>
+              <a:buNone/>
+            </a:pPr>
+            <a:r>
+              <a:rPr lang="en-US" sz="3600" dirty="0">
+                <a:solidFill>
+                  <a:schemeClr val="lt1"/>
+                </a:solidFill>
+              </a:rPr>
+              <a:t>Dead at Age 58</a:t>
+            </a:r>
+            <a:endParaRPr sz="2000" b="0" i="0" u="none" strike="noStrike" cap="none" dirty="0">
+              <a:solidFill>
+                <a:srgbClr val="000000"/>
+              </a:solidFill>
+              <a:latin typeface="Arial"/>
+              <a:ea typeface="Arial"/>
+              <a:cs typeface="Arial"/>
+              <a:sym typeface="Arial"/>
+            </a:endParaRPr>
+          </a:p>
+        </p:txBody>
+      </p:sp>
+      <p:sp>
+        <p:nvSpPr>
+          <p:cNvPr id="10" name="TextBox 9">
+            <a:extLst>
+              <a:ext uri="{FF2B5EF4-FFF2-40B4-BE49-F238E27FC236}">
+                <a16:creationId xmlns:a16="http://schemas.microsoft.com/office/drawing/2014/main" id="{5FA0D8B2-6B55-D3DC-BCBB-6FEAD86B9E72}"/>
+              </a:ext>
+            </a:extLst>
+          </p:cNvPr>
+          <p:cNvSpPr txBox="1"/>
+          <p:nvPr/>
+        </p:nvSpPr>
+        <p:spPr>
+          <a:xfrm>
+            <a:off x="135442" y="1892995"/>
+            <a:ext cx="6987941" cy="3046988"/>
+          </a:xfrm>
+          <a:prstGeom prst="rect">
+            <a:avLst/>
+          </a:prstGeom>
+          <a:solidFill>
+            <a:schemeClr val="bg1">
+              <a:alpha val="84400"/>
+            </a:schemeClr>
+          </a:solidFill>
+        </p:spPr>
+        <p:txBody>
+          <a:bodyPr wrap="square" rtlCol="0">
+            <a:spAutoFit/>
+          </a:bodyPr>
+          <a:lstStyle/>
+          <a:p>
+            <a:pPr marL="285750" indent="-285750">
+              <a:spcBef>
+                <a:spcPts val="1200"/>
+              </a:spcBef>
+              <a:buFont typeface="Arial" panose="020B0604020202020204" pitchFamily="34" charset="0"/>
+              <a:buChar char="•"/>
+            </a:pPr>
+            <a:r>
+              <a:rPr dirty="0"/>
+              <a:t>Author of "Behold a Pale Horse" — SHOT and KILLED by sheriff's deputies at age 58 in Eagar, Arizona.</a:t>
+            </a:r>
+          </a:p>
+          <a:p>
+            <a:pPr marL="285750" indent="-285750">
+              <a:spcBef>
+                <a:spcPts val="1200"/>
+              </a:spcBef>
+              <a:buFont typeface="Arial" panose="020B0604020202020204" pitchFamily="34" charset="0"/>
+              <a:buChar char="•"/>
+            </a:pPr>
+            <a:r>
+              <a:rPr dirty="0"/>
+              <a:t>Former Naval intelligence who claimed to have seen classified documents about alien contact and government cover-ups.</a:t>
+            </a:r>
+          </a:p>
+          <a:p>
+            <a:pPr marL="285750" indent="-285750">
+              <a:spcBef>
+                <a:spcPts val="1200"/>
+              </a:spcBef>
+              <a:buFont typeface="Arial" panose="020B0604020202020204" pitchFamily="34" charset="0"/>
+              <a:buChar char="•"/>
+            </a:pPr>
+            <a:r>
+              <a:rPr dirty="0"/>
+              <a:t>Predicted a major terror attack months before 9/11 — naming Osama bin Laden as the likely scapegoat.</a:t>
+            </a:r>
+          </a:p>
+          <a:p>
+            <a:pPr marL="285750" indent="-285750">
+              <a:spcBef>
+                <a:spcPts val="1200"/>
+              </a:spcBef>
+              <a:buFont typeface="Arial" panose="020B0604020202020204" pitchFamily="34" charset="0"/>
+              <a:buChar char="•"/>
+            </a:pPr>
+            <a:r>
+              <a:rPr dirty="0"/>
+              <a:t>Shot during an attempted arrest at his home — but the circumstances of the confrontation are disputed.</a:t>
+            </a:r>
+          </a:p>
+          <a:p>
+            <a:pPr marL="285750" indent="-285750">
+              <a:spcBef>
+                <a:spcPts val="1200"/>
+              </a:spcBef>
+              <a:buFont typeface="Arial" panose="020B0604020202020204" pitchFamily="34" charset="0"/>
+              <a:buChar char="•"/>
+            </a:pPr>
+            <a:r>
+              <a:rPr dirty="0"/>
+              <a:t>Had been broadcasting from his hilltop home for years, exposing what he said was a global conspiracy.</a:t>
+            </a:r>
+          </a:p>
+          <a:p>
+            <a:pPr marL="285750" indent="-285750">
+              <a:spcBef>
+                <a:spcPts val="1200"/>
+              </a:spcBef>
+              <a:buFont typeface="Arial" panose="020B0604020202020204" pitchFamily="34" charset="0"/>
+              <a:buChar char="•"/>
+            </a:pPr>
+            <a:r>
+              <a:rPr dirty="0"/>
+              <a:t>Said for years he expected to be KILLED — and he was right.</a:t>
+            </a:r>
+          </a:p>
+        </p:txBody>
+      </p:sp>
+      <p:pic>
+        <p:nvPicPr>
+          <p:cNvPr id="16" name="Picture 15" descr="William_Cooper.jpg"/>
+          <p:cNvPicPr>
+            <a:picLocks noChangeAspect="1"/>
+          </p:cNvPicPr>
+          <p:nvPr/>
+        </p:nvPicPr>
+        <p:blipFill>
+          <a:blip r:embed="rId2"/>
+          <a:stretch>
+            <a:fillRect/>
+          </a:stretch>
+        </p:blipFill>
+        <p:spPr>
+          <a:xfrm>
+            <a:off x="7847015" y="1151711"/>
+            <a:ext cx="5386592" cy="3884876"/>
+          </a:xfrm>
+          <a:prstGeom prst="rect">
+            <a:avLst/>
+          </a:prstGeom>
+        </p:spPr>
+      </p:pic>
+      <p:sp>
+        <p:nvSpPr>
+          <p:cNvPr id="2" name="Google Shape;170;p31">
+            <a:extLst>
+              <a:ext uri="{FF2B5EF4-FFF2-40B4-BE49-F238E27FC236}">
+                <a16:creationId xmlns:a16="http://schemas.microsoft.com/office/drawing/2014/main" id="{23BD46B3-7405-7B7C-173B-CCC90E6DAEEC}"/>
+              </a:ext>
+            </a:extLst>
+          </p:cNvPr>
+          <p:cNvSpPr/>
+          <p:nvPr/>
+        </p:nvSpPr>
+        <p:spPr>
+          <a:xfrm>
+            <a:off x="0" y="-31518"/>
+            <a:ext cx="12192000" cy="1131606"/>
+          </a:xfrm>
+          <a:prstGeom prst="rect">
+            <a:avLst/>
+          </a:prstGeom>
+          <a:solidFill>
+            <a:srgbClr val="C00000"/>
+          </a:solidFill>
+          <a:ln>
+            <a:noFill/>
+          </a:ln>
+        </p:spPr>
+        <p:txBody>
+          <a:bodyPr spcFirstLastPara="1" wrap="square" lIns="91425" tIns="45700" rIns="91425" bIns="45700" anchor="ctr" anchorCtr="0">
+            <a:noAutofit/>
+          </a:bodyPr>
+          <a:lstStyle/>
+          <a:p>
+            <a:pPr lvl="0">
+              <a:buClr>
+                <a:srgbClr val="000000"/>
+              </a:buClr>
+              <a:buSzPts val="1600"/>
+            </a:pPr>
+            <a:r>
+              <a:rPr lang="en-US" sz="4800" dirty="0">
+                <a:solidFill>
+                  <a:schemeClr val="lt1"/>
+                </a:solidFill>
+              </a:rPr>
+              <a:t> 150+ Murdered: by Intelligence Services</a:t>
+            </a:r>
+            <a:endParaRPr lang="en-US" sz="3200" dirty="0">
+              <a:solidFill>
+                <a:srgbClr val="000000"/>
+              </a:solidFill>
+              <a:latin typeface="Arial"/>
+              <a:ea typeface="Arial"/>
+              <a:cs typeface="Arial"/>
+              <a:sym typeface="Arial"/>
+            </a:endParaRPr>
+          </a:p>
+        </p:txBody>
+      </p:sp>
+      <p:sp>
+        <p:nvSpPr>
+          <p:cNvPr id="6" name="TextBox 5">
+            <a:extLst>
+              <a:ext uri="{FF2B5EF4-FFF2-40B4-BE49-F238E27FC236}">
+                <a16:creationId xmlns:a16="http://schemas.microsoft.com/office/drawing/2014/main" id="{0BC15BF5-63C1-7D4C-5001-995423D85A63}"/>
+              </a:ext>
+            </a:extLst>
+          </p:cNvPr>
+          <p:cNvSpPr txBox="1"/>
+          <p:nvPr/>
+        </p:nvSpPr>
+        <p:spPr>
+          <a:xfrm>
+            <a:off x="107300" y="6229650"/>
+            <a:ext cx="11685989" cy="461665"/>
+          </a:xfrm>
+          <a:prstGeom prst="rect">
+            <a:avLst/>
+          </a:prstGeom>
+          <a:solidFill>
+            <a:schemeClr val="bg1">
+              <a:alpha val="84400"/>
+            </a:schemeClr>
+          </a:solidFill>
+        </p:spPr>
+        <p:txBody>
+          <a:bodyPr wrap="square" rtlCol="0">
+            <a:spAutoFit/>
+          </a:bodyPr>
+          <a:lstStyle/>
+          <a:p>
+            <a:r>
+              <a:rPr lang="en-US" sz="2400" dirty="0"/>
+              <a:t>https://intelligencemurders.com/intel</a:t>
+            </a:r>
+          </a:p>
+        </p:txBody>
+      </p:sp>
+    </p:spTree>
+  </p:cSld>
+  <p:clrMapOvr>
+    <a:masterClrMapping/>
+  </p:clrMapOvr>
+</p:sld>
+</file>
+
+<file path=ppt/slides/slide3.xml><?xml version="1.0" encoding="utf-8"?>
 <p:sld xmlns:a="http://schemas.openxmlformats.org/drawingml/2006/main" xmlns:r="http://schemas.openxmlformats.org/officeDocument/2006/relationships" xmlns:p="http://schemas.openxmlformats.org/presentationml/2006/main">
   <p:cSld>
     <p:spTree>
@@ -9809,7 +11432,7 @@
 </p:sld>
 </file>
 
-<file path=ppt/slides/slide3.xml><?xml version="1.0" encoding="utf-8"?>
+<file path=ppt/slides/slide4.xml><?xml version="1.0" encoding="utf-8"?>
 <p:sld xmlns:a="http://schemas.openxmlformats.org/drawingml/2006/main" xmlns:r="http://schemas.openxmlformats.org/officeDocument/2006/relationships" xmlns:p="http://schemas.openxmlformats.org/presentationml/2006/main">
   <p:cSld>
     <p:spTree>
@@ -10339,594 +11962,6 @@
         <p14:creationId xmlns:p14="http://schemas.microsoft.com/office/powerpoint/2010/main" val="962546674"/>
       </p:ext>
     </p:extLst>
-  </p:cSld>
-  <p:clrMapOvr>
-    <a:masterClrMapping/>
-  </p:clrMapOvr>
-</p:sld>
-</file>
-
-<file path=ppt/slides/slide4.xml><?xml version="1.0" encoding="utf-8"?>
-<p:sld xmlns:a="http://schemas.openxmlformats.org/drawingml/2006/main" xmlns:r="http://schemas.openxmlformats.org/officeDocument/2006/relationships" xmlns:p="http://schemas.openxmlformats.org/presentationml/2006/main">
-  <p:cSld>
-    <p:spTree>
-      <p:nvGrpSpPr>
-        <p:cNvPr id="1" name=""/>
-        <p:cNvGrpSpPr/>
-        <p:nvPr/>
-      </p:nvGrpSpPr>
-      <p:grpSpPr>
-        <a:xfrm>
-          <a:off x="0" y="0"/>
-          <a:ext cx="0" cy="0"/>
-          <a:chOff x="0" y="0"/>
-          <a:chExt cx="0" cy="0"/>
-        </a:xfrm>
-      </p:grpSpPr>
-      <p:sp>
-        <p:nvSpPr>
-          <p:cNvPr id="15" name="TextBox 14">
-            <a:extLst>
-              <a:ext uri="{FF2B5EF4-FFF2-40B4-BE49-F238E27FC236}">
-                <a16:creationId xmlns:a16="http://schemas.microsoft.com/office/drawing/2014/main" id="{EAE3A09D-A6E4-5E4F-16F8-6BAFA5E1CD0A}"/>
-              </a:ext>
-            </a:extLst>
-          </p:cNvPr>
-          <p:cNvSpPr txBox="1"/>
-          <p:nvPr/>
-        </p:nvSpPr>
-        <p:spPr>
-          <a:xfrm>
-            <a:off x="312431" y="1288262"/>
-            <a:ext cx="6987941" cy="584775"/>
-          </a:xfrm>
-          <a:prstGeom prst="rect">
-            <a:avLst/>
-          </a:prstGeom>
-          <a:solidFill>
-            <a:schemeClr val="bg1">
-              <a:alpha val="84400"/>
-            </a:schemeClr>
-          </a:solidFill>
-        </p:spPr>
-        <p:txBody>
-          <a:bodyPr wrap="square" rtlCol="0">
-            <a:spAutoFit/>
-          </a:bodyPr>
-          <a:lstStyle/>
-          <a:p>
-            <a:r>
-              <a:rPr lang="en-US" sz="3200" b="1" dirty="0">
-                <a:solidFill>
-                  <a:schemeClr val="accent5"/>
-                </a:solidFill>
-              </a:rPr>
-              <a:t>Why / How they Dorothy Kilgallen:</a:t>
-            </a:r>
-          </a:p>
-        </p:txBody>
-      </p:sp>
-      <p:sp>
-        <p:nvSpPr>
-          <p:cNvPr id="3" name="Google Shape;170;p31">
-            <a:extLst>
-              <a:ext uri="{FF2B5EF4-FFF2-40B4-BE49-F238E27FC236}">
-                <a16:creationId xmlns:a16="http://schemas.microsoft.com/office/drawing/2014/main" id="{A2CA04A2-27A7-622C-F9FC-36F8F0881ABC}"/>
-              </a:ext>
-            </a:extLst>
-          </p:cNvPr>
-          <p:cNvSpPr/>
-          <p:nvPr/>
-        </p:nvSpPr>
-        <p:spPr>
-          <a:xfrm>
-            <a:off x="200102" y="5852160"/>
-            <a:ext cx="3431270" cy="494488"/>
-          </a:xfrm>
-          <a:prstGeom prst="rect">
-            <a:avLst/>
-          </a:prstGeom>
-          <a:solidFill>
-            <a:schemeClr val="accent5"/>
-          </a:solidFill>
-          <a:ln>
-            <a:noFill/>
-          </a:ln>
-        </p:spPr>
-        <p:txBody>
-          <a:bodyPr spcFirstLastPara="1" wrap="square" lIns="91425" tIns="45700" rIns="91425" bIns="45700" anchor="ctr" anchorCtr="0">
-            <a:noAutofit/>
-          </a:bodyPr>
-          <a:lstStyle/>
-          <a:p>
-            <a:pPr marL="0" marR="0" lvl="0" indent="0" algn="ctr" rtl="0">
-              <a:lnSpc>
-                <a:spcPct val="100000"/>
-              </a:lnSpc>
-              <a:spcBef>
-                <a:spcPts val="0"/>
-              </a:spcBef>
-              <a:spcAft>
-                <a:spcPts val="0"/>
-              </a:spcAft>
-              <a:buClr>
-                <a:srgbClr val="000000"/>
-              </a:buClr>
-              <a:buSzPts val="1600"/>
-              <a:buFont typeface="Arial"/>
-              <a:buNone/>
-            </a:pPr>
-            <a:r>
-              <a:rPr lang="en-US" sz="3600" dirty="0">
-                <a:solidFill>
-                  <a:schemeClr val="lt1"/>
-                </a:solidFill>
-              </a:rPr>
-              <a:t>Read List Here:</a:t>
-            </a:r>
-            <a:endParaRPr sz="2000" b="0" i="0" u="none" strike="noStrike" cap="none" dirty="0">
-              <a:solidFill>
-                <a:srgbClr val="000000"/>
-              </a:solidFill>
-              <a:latin typeface="Arial"/>
-              <a:ea typeface="Arial"/>
-              <a:cs typeface="Arial"/>
-              <a:sym typeface="Arial"/>
-            </a:endParaRPr>
-          </a:p>
-        </p:txBody>
-      </p:sp>
-      <p:sp>
-        <p:nvSpPr>
-          <p:cNvPr id="5" name="Google Shape;170;p31">
-            <a:extLst>
-              <a:ext uri="{FF2B5EF4-FFF2-40B4-BE49-F238E27FC236}">
-                <a16:creationId xmlns:a16="http://schemas.microsoft.com/office/drawing/2014/main" id="{7C736A6F-204D-9BB8-EAA6-837DBF5D4DEB}"/>
-              </a:ext>
-            </a:extLst>
-          </p:cNvPr>
-          <p:cNvSpPr/>
-          <p:nvPr/>
-        </p:nvSpPr>
-        <p:spPr>
-          <a:xfrm>
-            <a:off x="0" y="-31518"/>
-            <a:ext cx="12192000" cy="1131606"/>
-          </a:xfrm>
-          <a:prstGeom prst="rect">
-            <a:avLst/>
-          </a:prstGeom>
-          <a:solidFill>
-            <a:srgbClr val="C00000"/>
-          </a:solidFill>
-          <a:ln>
-            <a:noFill/>
-          </a:ln>
-        </p:spPr>
-        <p:txBody>
-          <a:bodyPr spcFirstLastPara="1" wrap="square" lIns="91425" tIns="45700" rIns="91425" bIns="45700" anchor="ctr" anchorCtr="0">
-            <a:noAutofit/>
-          </a:bodyPr>
-          <a:lstStyle/>
-          <a:p>
-            <a:pPr lvl="0">
-              <a:buClr>
-                <a:srgbClr val="000000"/>
-              </a:buClr>
-              <a:buSzPts val="1600"/>
-            </a:pPr>
-            <a:r>
-              <a:rPr lang="en-US" sz="4800" dirty="0">
-                <a:solidFill>
-                  <a:schemeClr val="lt1"/>
-                </a:solidFill>
-              </a:rPr>
-              <a:t> 150+ Murdered: by Intelligence Services</a:t>
-            </a:r>
-            <a:endParaRPr lang="en-US" sz="3200" dirty="0">
-              <a:solidFill>
-                <a:srgbClr val="000000"/>
-              </a:solidFill>
-              <a:latin typeface="Arial"/>
-              <a:ea typeface="Arial"/>
-              <a:cs typeface="Arial"/>
-              <a:sym typeface="Arial"/>
-            </a:endParaRPr>
-          </a:p>
-        </p:txBody>
-      </p:sp>
-      <p:sp>
-        <p:nvSpPr>
-          <p:cNvPr id="4" name="TextBox 3">
-            <a:extLst>
-              <a:ext uri="{FF2B5EF4-FFF2-40B4-BE49-F238E27FC236}">
-                <a16:creationId xmlns:a16="http://schemas.microsoft.com/office/drawing/2014/main" id="{14D41900-3932-F065-0A2B-6D119791E2A1}"/>
-              </a:ext>
-            </a:extLst>
-          </p:cNvPr>
-          <p:cNvSpPr txBox="1"/>
-          <p:nvPr/>
-        </p:nvSpPr>
-        <p:spPr>
-          <a:xfrm>
-            <a:off x="115671" y="6346648"/>
-            <a:ext cx="11685989" cy="461665"/>
-          </a:xfrm>
-          <a:prstGeom prst="rect">
-            <a:avLst/>
-          </a:prstGeom>
-          <a:solidFill>
-            <a:schemeClr val="bg1">
-              <a:alpha val="84400"/>
-            </a:schemeClr>
-          </a:solidFill>
-        </p:spPr>
-        <p:txBody>
-          <a:bodyPr wrap="square" rtlCol="0">
-            <a:spAutoFit/>
-          </a:bodyPr>
-          <a:lstStyle/>
-          <a:p>
-            <a:r>
-              <a:rPr lang="en-US" sz="2400" dirty="0"/>
-              <a:t>https://intelligencemurders.com/intel</a:t>
-            </a:r>
-          </a:p>
-        </p:txBody>
-      </p:sp>
-      <p:sp>
-        <p:nvSpPr>
-          <p:cNvPr id="8" name="Google Shape;170;p31">
-            <a:extLst>
-              <a:ext uri="{FF2B5EF4-FFF2-40B4-BE49-F238E27FC236}">
-                <a16:creationId xmlns:a16="http://schemas.microsoft.com/office/drawing/2014/main" id="{B069CCDF-FA80-D75C-7412-189D5C3D3A16}"/>
-              </a:ext>
-            </a:extLst>
-          </p:cNvPr>
-          <p:cNvSpPr/>
-          <p:nvPr/>
-        </p:nvSpPr>
-        <p:spPr>
-          <a:xfrm>
-            <a:off x="7526107" y="5681420"/>
-            <a:ext cx="4550222" cy="548230"/>
-          </a:xfrm>
-          <a:prstGeom prst="rect">
-            <a:avLst/>
-          </a:prstGeom>
-          <a:solidFill>
-            <a:srgbClr val="C00000"/>
-          </a:solidFill>
-          <a:ln>
-            <a:noFill/>
-          </a:ln>
-        </p:spPr>
-        <p:txBody>
-          <a:bodyPr spcFirstLastPara="1" wrap="square" lIns="91425" tIns="45700" rIns="91425" bIns="45700" anchor="ctr" anchorCtr="0">
-            <a:noAutofit/>
-          </a:bodyPr>
-          <a:lstStyle/>
-          <a:p>
-            <a:pPr marL="0" marR="0" lvl="0" indent="0" algn="ctr" rtl="0">
-              <a:lnSpc>
-                <a:spcPct val="100000"/>
-              </a:lnSpc>
-              <a:spcBef>
-                <a:spcPts val="0"/>
-              </a:spcBef>
-              <a:spcAft>
-                <a:spcPts val="0"/>
-              </a:spcAft>
-              <a:buClr>
-                <a:srgbClr val="000000"/>
-              </a:buClr>
-              <a:buSzPts val="1600"/>
-              <a:buFont typeface="Arial"/>
-              <a:buNone/>
-            </a:pPr>
-            <a:r>
-              <a:rPr lang="en-US" sz="3600" dirty="0">
-                <a:solidFill>
-                  <a:schemeClr val="lt1"/>
-                </a:solidFill>
-              </a:rPr>
-              <a:t>Dead at Age 52</a:t>
-            </a:r>
-            <a:endParaRPr sz="2000" b="0" i="0" u="none" strike="noStrike" cap="none" dirty="0">
-              <a:solidFill>
-                <a:srgbClr val="000000"/>
-              </a:solidFill>
-              <a:latin typeface="Arial"/>
-              <a:ea typeface="Arial"/>
-              <a:cs typeface="Arial"/>
-              <a:sym typeface="Arial"/>
-            </a:endParaRPr>
-          </a:p>
-        </p:txBody>
-      </p:sp>
-      <p:sp>
-        <p:nvSpPr>
-          <p:cNvPr id="10" name="TextBox 9">
-            <a:extLst>
-              <a:ext uri="{FF2B5EF4-FFF2-40B4-BE49-F238E27FC236}">
-                <a16:creationId xmlns:a16="http://schemas.microsoft.com/office/drawing/2014/main" id="{ABFEA484-AE6A-906E-D59E-C3F7E9DDD90C}"/>
-              </a:ext>
-            </a:extLst>
-          </p:cNvPr>
-          <p:cNvSpPr txBox="1"/>
-          <p:nvPr/>
-        </p:nvSpPr>
-        <p:spPr>
-          <a:xfrm>
-            <a:off x="208343" y="1805721"/>
-            <a:ext cx="7816976" cy="4031873"/>
-          </a:xfrm>
-          <a:prstGeom prst="rect">
-            <a:avLst/>
-          </a:prstGeom>
-          <a:solidFill>
-            <a:schemeClr val="bg1">
-              <a:alpha val="84400"/>
-            </a:schemeClr>
-          </a:solidFill>
-        </p:spPr>
-        <p:txBody>
-          <a:bodyPr wrap="square" rtlCol="0">
-            <a:spAutoFit/>
-          </a:bodyPr>
-          <a:lstStyle/>
-          <a:p>
-            <a:pPr marL="285750" indent="-285750">
-              <a:spcBef>
-                <a:spcPts val="1200"/>
-              </a:spcBef>
-              <a:buFont typeface="Arial" panose="020B0604020202020204" pitchFamily="34" charset="0"/>
-              <a:buChar char="•"/>
-            </a:pPr>
-            <a:r>
-              <a:rPr dirty="0"/>
-              <a:t>America's most famous journalist — syndicated to 20 MILLION readers. Found dead of a barbiturate overdose at age 52. Ruled "circumstances undetermined."</a:t>
-            </a:r>
-          </a:p>
-          <a:p>
-            <a:pPr marL="285750" indent="-285750">
-              <a:spcBef>
-                <a:spcPts val="1200"/>
-              </a:spcBef>
-              <a:buFont typeface="Arial" panose="020B0604020202020204" pitchFamily="34" charset="0"/>
-              <a:buChar char="•"/>
-            </a:pPr>
-            <a:r>
-              <a:rPr dirty="0"/>
-              <a:t>She was investigating the JFK ASSASSINATION and told friends she was about to "BREAK THE CASE WIDE OPEN."</a:t>
-            </a:r>
-          </a:p>
-          <a:p>
-            <a:pPr marL="285750" indent="-285750">
-              <a:spcBef>
-                <a:spcPts val="1200"/>
-              </a:spcBef>
-              <a:buFont typeface="Arial" panose="020B0604020202020204" pitchFamily="34" charset="0"/>
-              <a:buChar char="•"/>
-            </a:pPr>
-            <a:r>
-              <a:rPr dirty="0"/>
-              <a:t>She secured the ONLY private interview with Jack Ruby — the man who killed the man accused of killing the President.</a:t>
-            </a:r>
-          </a:p>
-          <a:p>
-            <a:pPr marL="285750" indent="-285750">
-              <a:spcBef>
-                <a:spcPts val="1200"/>
-              </a:spcBef>
-              <a:buFont typeface="Arial" panose="020B0604020202020204" pitchFamily="34" charset="0"/>
-              <a:buChar char="•"/>
-            </a:pPr>
-            <a:r>
-              <a:rPr dirty="0"/>
-              <a:t>Her INVESTIGATION FILE — described as a thick folder of documents — VANISHED after her death and has NEVER been found.</a:t>
-            </a:r>
-          </a:p>
-          <a:p>
-            <a:pPr marL="285750" indent="-285750">
-              <a:spcBef>
-                <a:spcPts val="1200"/>
-              </a:spcBef>
-              <a:buFont typeface="Arial" panose="020B0604020202020204" pitchFamily="34" charset="0"/>
-              <a:buChar char="•"/>
-            </a:pPr>
-            <a:r>
-              <a:rPr dirty="0"/>
-              <a:t>Found in a room that WASN'T her bedroom, fully dressed and made up — inconsistent with her known habits. No real investigation was ever conducted.</a:t>
-            </a:r>
-          </a:p>
-        </p:txBody>
-      </p:sp>
-      <p:sp>
-        <p:nvSpPr>
-          <p:cNvPr id="6" name="AutoShape 2" descr="Fundraiser for Sky Roberts by Annie Farmer : Help Virginia Roberts  Giuffre's Family Carry On Her Legacy">
-            <a:extLst>
-              <a:ext uri="{FF2B5EF4-FFF2-40B4-BE49-F238E27FC236}">
-                <a16:creationId xmlns:a16="http://schemas.microsoft.com/office/drawing/2014/main" id="{77876416-18B8-24A2-30FD-8E520F869817}"/>
-              </a:ext>
-            </a:extLst>
-          </p:cNvPr>
-          <p:cNvSpPr>
-            <a:spLocks noChangeAspect="1" noChangeArrowheads="1"/>
-          </p:cNvSpPr>
-          <p:nvPr/>
-        </p:nvSpPr>
-        <p:spPr bwMode="auto">
-          <a:xfrm>
-            <a:off x="5943600" y="3276600"/>
-            <a:ext cx="304800" cy="304800"/>
-          </a:xfrm>
-          <a:prstGeom prst="rect">
-            <a:avLst/>
-          </a:prstGeom>
-          <a:noFill/>
-          <a:extLst>
-            <a:ext uri="{909E8E84-426E-40DD-AFC4-6F175D3DCCD1}">
-              <a14:hiddenFill xmlns:a14="http://schemas.microsoft.com/office/drawing/2010/main">
-                <a:solidFill>
-                  <a:srgbClr val="FFFFFF"/>
-                </a:solidFill>
-              </a14:hiddenFill>
-            </a:ext>
-          </a:extLst>
-        </p:spPr>
-        <p:txBody>
-          <a:bodyPr vert="horz" wrap="square" lIns="91440" tIns="45720" rIns="91440" bIns="45720" numCol="1" anchor="t" anchorCtr="0" compatLnSpc="1">
-            <a:prstTxWarp prst="textNoShape">
-              <a:avLst/>
-            </a:prstTxWarp>
-          </a:bodyPr>
-          <a:lstStyle/>
-          <a:p>
-            <a:endParaRPr lang="en-US"/>
-          </a:p>
-        </p:txBody>
-      </p:sp>
-      <p:sp>
-        <p:nvSpPr>
-          <p:cNvPr id="11" name="AutoShape 4" descr="Fundraiser for Sky Roberts by Annie Farmer : Help Virginia Roberts  Giuffre's Family Carry On Her Legacy">
-            <a:extLst>
-              <a:ext uri="{FF2B5EF4-FFF2-40B4-BE49-F238E27FC236}">
-                <a16:creationId xmlns:a16="http://schemas.microsoft.com/office/drawing/2014/main" id="{414B4E2B-C54A-135F-B3A8-DA7C31104A94}"/>
-              </a:ext>
-            </a:extLst>
-          </p:cNvPr>
-          <p:cNvSpPr>
-            <a:spLocks noChangeAspect="1" noChangeArrowheads="1"/>
-          </p:cNvSpPr>
-          <p:nvPr/>
-        </p:nvSpPr>
-        <p:spPr bwMode="auto">
-          <a:xfrm>
-            <a:off x="6096000" y="3429000"/>
-            <a:ext cx="304800" cy="304800"/>
-          </a:xfrm>
-          <a:prstGeom prst="rect">
-            <a:avLst/>
-          </a:prstGeom>
-          <a:noFill/>
-          <a:extLst>
-            <a:ext uri="{909E8E84-426E-40DD-AFC4-6F175D3DCCD1}">
-              <a14:hiddenFill xmlns:a14="http://schemas.microsoft.com/office/drawing/2010/main">
-                <a:solidFill>
-                  <a:srgbClr val="FFFFFF"/>
-                </a:solidFill>
-              </a14:hiddenFill>
-            </a:ext>
-          </a:extLst>
-        </p:spPr>
-        <p:txBody>
-          <a:bodyPr vert="horz" wrap="square" lIns="91440" tIns="45720" rIns="91440" bIns="45720" numCol="1" anchor="t" anchorCtr="0" compatLnSpc="1">
-            <a:prstTxWarp prst="textNoShape">
-              <a:avLst/>
-            </a:prstTxWarp>
-          </a:bodyPr>
-          <a:lstStyle/>
-          <a:p>
-            <a:endParaRPr lang="en-US"/>
-          </a:p>
-        </p:txBody>
-      </p:sp>
-      <p:pic>
-        <p:nvPicPr>
-          <p:cNvPr id="16" name="Picture 15" descr="Dorothy_Kilgallen.jpg"/>
-          <p:cNvPicPr>
-            <a:picLocks noChangeAspect="1"/>
-          </p:cNvPicPr>
-          <p:nvPr/>
-        </p:nvPicPr>
-        <p:blipFill>
-          <a:blip r:embed="rId3"/>
-          <a:stretch>
-            <a:fillRect/>
-          </a:stretch>
-        </p:blipFill>
-        <p:spPr>
-          <a:xfrm>
-            <a:off x="8144168" y="1084146"/>
-            <a:ext cx="3882867" cy="3856982"/>
-          </a:xfrm>
-          <a:prstGeom prst="rect">
-            <a:avLst/>
-          </a:prstGeom>
-        </p:spPr>
-      </p:pic>
-      <p:sp>
-        <p:nvSpPr>
-          <p:cNvPr id="7" name="Google Shape;170;p31">
-            <a:extLst>
-              <a:ext uri="{FF2B5EF4-FFF2-40B4-BE49-F238E27FC236}">
-                <a16:creationId xmlns:a16="http://schemas.microsoft.com/office/drawing/2014/main" id="{A2DF07F5-EEA0-8A2E-7E11-3E1CC4C2B695}"/>
-              </a:ext>
-            </a:extLst>
-          </p:cNvPr>
-          <p:cNvSpPr/>
-          <p:nvPr/>
-        </p:nvSpPr>
-        <p:spPr>
-          <a:xfrm>
-            <a:off x="7506336" y="4925186"/>
-            <a:ext cx="4550222" cy="869505"/>
-          </a:xfrm>
-          <a:prstGeom prst="rect">
-            <a:avLst/>
-          </a:prstGeom>
-          <a:solidFill>
-            <a:srgbClr val="C00000"/>
-          </a:solidFill>
-          <a:ln>
-            <a:noFill/>
-          </a:ln>
-        </p:spPr>
-        <p:txBody>
-          <a:bodyPr spcFirstLastPara="1" wrap="square" lIns="91425" tIns="45700" rIns="91425" bIns="45700" anchor="ctr" anchorCtr="0">
-            <a:noAutofit/>
-          </a:bodyPr>
-          <a:lstStyle/>
-          <a:p>
-            <a:pPr marL="0" marR="0" lvl="0" indent="0" algn="ctr" rtl="0">
-              <a:lnSpc>
-                <a:spcPct val="100000"/>
-              </a:lnSpc>
-              <a:spcBef>
-                <a:spcPts val="0"/>
-              </a:spcBef>
-              <a:spcAft>
-                <a:spcPts val="0"/>
-              </a:spcAft>
-              <a:buClr>
-                <a:srgbClr val="000000"/>
-              </a:buClr>
-              <a:buSzPts val="1600"/>
-              <a:buFont typeface="Arial"/>
-              <a:buNone/>
-            </a:pPr>
-            <a:r>
-              <a:rPr lang="en-US" sz="4400" dirty="0">
-                <a:solidFill>
-                  <a:schemeClr val="lt1"/>
-                </a:solidFill>
-              </a:rPr>
-              <a:t>Dorothy Kilgallen</a:t>
-            </a:r>
-            <a:endParaRPr sz="2800" b="0" i="0" u="none" strike="noStrike" cap="none" dirty="0">
-              <a:solidFill>
-                <a:srgbClr val="000000"/>
-              </a:solidFill>
-              <a:latin typeface="Arial"/>
-              <a:ea typeface="Arial"/>
-              <a:cs typeface="Arial"/>
-              <a:sym typeface="Arial"/>
-            </a:endParaRPr>
-          </a:p>
-        </p:txBody>
-      </p:sp>
-    </p:spTree>
   </p:cSld>
   <p:clrMapOvr>
     <a:masterClrMapping/>
@@ -10956,7 +11991,7 @@
           <p:cNvPr id="15" name="TextBox 14">
             <a:extLst>
               <a:ext uri="{FF2B5EF4-FFF2-40B4-BE49-F238E27FC236}">
-                <a16:creationId xmlns:a16="http://schemas.microsoft.com/office/drawing/2014/main" id="{E478240E-251B-5BA6-3C45-7E6620400769}"/>
+                <a16:creationId xmlns:a16="http://schemas.microsoft.com/office/drawing/2014/main" id="{EAE3A09D-A6E4-5E4F-16F8-6BAFA5E1CD0A}"/>
               </a:ext>
             </a:extLst>
           </p:cNvPr>
@@ -10965,8 +12000,8 @@
         </p:nvSpPr>
         <p:spPr>
           <a:xfrm>
-            <a:off x="312432" y="1288262"/>
-            <a:ext cx="6494294" cy="584775"/>
+            <a:off x="312431" y="1288262"/>
+            <a:ext cx="6987941" cy="584775"/>
           </a:xfrm>
           <a:prstGeom prst="rect">
             <a:avLst/>
@@ -10989,7 +12024,7 @@
                   <a:schemeClr val="accent5"/>
                 </a:solidFill>
               </a:rPr>
-              <a:t>Why / How they Philip Leonard:</a:t>
+              <a:t>Why / How they Dorothy Kilgallen:</a:t>
             </a:r>
           </a:p>
         </p:txBody>
@@ -10999,7 +12034,7 @@
           <p:cNvPr id="3" name="Google Shape;170;p31">
             <a:extLst>
               <a:ext uri="{FF2B5EF4-FFF2-40B4-BE49-F238E27FC236}">
-                <a16:creationId xmlns:a16="http://schemas.microsoft.com/office/drawing/2014/main" id="{A4695FE5-0AA5-AB05-98B1-B5B8E3FA8CBE}"/>
+                <a16:creationId xmlns:a16="http://schemas.microsoft.com/office/drawing/2014/main" id="{A2CA04A2-27A7-622C-F9FC-36F8F0881ABC}"/>
               </a:ext>
             </a:extLst>
           </p:cNvPr>
@@ -11008,8 +12043,8 @@
         </p:nvSpPr>
         <p:spPr>
           <a:xfrm>
-            <a:off x="191731" y="5732890"/>
-            <a:ext cx="3431270" cy="496760"/>
+            <a:off x="200102" y="5852160"/>
+            <a:ext cx="3431270" cy="494488"/>
           </a:xfrm>
           <a:prstGeom prst="rect">
             <a:avLst/>
@@ -11069,7 +12104,7 @@
           <p:cNvPr id="5" name="Google Shape;170;p31">
             <a:extLst>
               <a:ext uri="{FF2B5EF4-FFF2-40B4-BE49-F238E27FC236}">
-                <a16:creationId xmlns:a16="http://schemas.microsoft.com/office/drawing/2014/main" id="{98132413-6ED2-8B36-74B6-3C503B1A4634}"/>
+                <a16:creationId xmlns:a16="http://schemas.microsoft.com/office/drawing/2014/main" id="{7C736A6F-204D-9BB8-EAA6-837DBF5D4DEB}"/>
               </a:ext>
             </a:extLst>
           </p:cNvPr>
@@ -11097,7 +12132,105 @@
           </a:bodyPr>
           <a:lstStyle/>
           <a:p>
-            <a:pPr marL="0" marR="0" lvl="0" indent="0" rtl="0">
+            <a:pPr lvl="0">
+              <a:buClr>
+                <a:srgbClr val="000000"/>
+              </a:buClr>
+              <a:buSzPts val="1600"/>
+            </a:pPr>
+            <a:r>
+              <a:rPr lang="en-US" sz="4800" dirty="0">
+                <a:solidFill>
+                  <a:schemeClr val="lt1"/>
+                </a:solidFill>
+              </a:rPr>
+              <a:t> 150+ Murdered: by Intelligence Services</a:t>
+            </a:r>
+            <a:endParaRPr lang="en-US" sz="3200" dirty="0">
+              <a:solidFill>
+                <a:srgbClr val="000000"/>
+              </a:solidFill>
+              <a:latin typeface="Arial"/>
+              <a:ea typeface="Arial"/>
+              <a:cs typeface="Arial"/>
+              <a:sym typeface="Arial"/>
+            </a:endParaRPr>
+          </a:p>
+        </p:txBody>
+      </p:sp>
+      <p:sp>
+        <p:nvSpPr>
+          <p:cNvPr id="4" name="TextBox 3">
+            <a:extLst>
+              <a:ext uri="{FF2B5EF4-FFF2-40B4-BE49-F238E27FC236}">
+                <a16:creationId xmlns:a16="http://schemas.microsoft.com/office/drawing/2014/main" id="{14D41900-3932-F065-0A2B-6D119791E2A1}"/>
+              </a:ext>
+            </a:extLst>
+          </p:cNvPr>
+          <p:cNvSpPr txBox="1"/>
+          <p:nvPr/>
+        </p:nvSpPr>
+        <p:spPr>
+          <a:xfrm>
+            <a:off x="115671" y="6346648"/>
+            <a:ext cx="11685989" cy="461665"/>
+          </a:xfrm>
+          <a:prstGeom prst="rect">
+            <a:avLst/>
+          </a:prstGeom>
+          <a:solidFill>
+            <a:schemeClr val="bg1">
+              <a:alpha val="84400"/>
+            </a:schemeClr>
+          </a:solidFill>
+        </p:spPr>
+        <p:txBody>
+          <a:bodyPr wrap="square" rtlCol="0">
+            <a:spAutoFit/>
+          </a:bodyPr>
+          <a:lstStyle/>
+          <a:p>
+            <a:r>
+              <a:rPr lang="en-US" sz="2400" dirty="0"/>
+              <a:t>https://intelligencemurders.com/intel</a:t>
+            </a:r>
+          </a:p>
+        </p:txBody>
+      </p:sp>
+      <p:sp>
+        <p:nvSpPr>
+          <p:cNvPr id="8" name="Google Shape;170;p31">
+            <a:extLst>
+              <a:ext uri="{FF2B5EF4-FFF2-40B4-BE49-F238E27FC236}">
+                <a16:creationId xmlns:a16="http://schemas.microsoft.com/office/drawing/2014/main" id="{B069CCDF-FA80-D75C-7412-189D5C3D3A16}"/>
+              </a:ext>
+            </a:extLst>
+          </p:cNvPr>
+          <p:cNvSpPr/>
+          <p:nvPr/>
+        </p:nvSpPr>
+        <p:spPr>
+          <a:xfrm>
+            <a:off x="7526107" y="5681420"/>
+            <a:ext cx="4550222" cy="548230"/>
+          </a:xfrm>
+          <a:prstGeom prst="rect">
+            <a:avLst/>
+          </a:prstGeom>
+          <a:solidFill>
+            <a:srgbClr val="C00000"/>
+          </a:solidFill>
+          <a:ln>
+            <a:noFill/>
+          </a:ln>
+        </p:spPr>
+        <p:txBody>
+          <a:bodyPr spcFirstLastPara="1" wrap="square" lIns="91425" tIns="45700" rIns="91425" bIns="45700" anchor="ctr" anchorCtr="0">
+            <a:noAutofit/>
+          </a:bodyPr>
+          <a:lstStyle/>
+          <a:p>
+            <a:pPr marL="0" marR="0" lvl="0" indent="0" algn="ctr" rtl="0">
               <a:lnSpc>
                 <a:spcPct val="100000"/>
               </a:lnSpc>
@@ -11115,191 +12248,12 @@
               <a:buNone/>
             </a:pPr>
             <a:r>
-              <a:rPr lang="en-US" sz="4800" dirty="0">
-                <a:solidFill>
-                  <a:schemeClr val="lt1"/>
-                </a:solidFill>
-              </a:rPr>
-              <a:t> 150+ Murdered: by Intelligence Services</a:t>
-            </a:r>
-            <a:endParaRPr sz="3200" b="0" i="0" u="none" strike="noStrike" cap="none" dirty="0">
-              <a:solidFill>
-                <a:srgbClr val="000000"/>
-              </a:solidFill>
-              <a:latin typeface="Arial"/>
-              <a:ea typeface="Arial"/>
-              <a:cs typeface="Arial"/>
-              <a:sym typeface="Arial"/>
-            </a:endParaRPr>
-          </a:p>
-        </p:txBody>
-      </p:sp>
-      <p:sp>
-        <p:nvSpPr>
-          <p:cNvPr id="4" name="TextBox 3">
-            <a:extLst>
-              <a:ext uri="{FF2B5EF4-FFF2-40B4-BE49-F238E27FC236}">
-                <a16:creationId xmlns:a16="http://schemas.microsoft.com/office/drawing/2014/main" id="{50D7621F-9D36-7894-7117-9F831EF5EFA6}"/>
-              </a:ext>
-            </a:extLst>
-          </p:cNvPr>
-          <p:cNvSpPr txBox="1"/>
-          <p:nvPr/>
-        </p:nvSpPr>
-        <p:spPr>
-          <a:xfrm>
-            <a:off x="107300" y="6229650"/>
-            <a:ext cx="11685989" cy="461665"/>
-          </a:xfrm>
-          <a:prstGeom prst="rect">
-            <a:avLst/>
-          </a:prstGeom>
-          <a:solidFill>
-            <a:schemeClr val="bg1">
-              <a:alpha val="84400"/>
-            </a:schemeClr>
-          </a:solidFill>
-        </p:spPr>
-        <p:txBody>
-          <a:bodyPr wrap="square" rtlCol="0">
-            <a:spAutoFit/>
-          </a:bodyPr>
-          <a:lstStyle/>
-          <a:p>
-            <a:r>
-              <a:rPr lang="en-US" sz="2400" dirty="0"/>
-              <a:t>https://intelligencemurders.com/intel</a:t>
-            </a:r>
-          </a:p>
-        </p:txBody>
-      </p:sp>
-      <p:sp>
-        <p:nvSpPr>
-          <p:cNvPr id="7" name="Google Shape;170;p31">
-            <a:extLst>
-              <a:ext uri="{FF2B5EF4-FFF2-40B4-BE49-F238E27FC236}">
-                <a16:creationId xmlns:a16="http://schemas.microsoft.com/office/drawing/2014/main" id="{4B582382-76AA-B49E-C611-39A37CE591B9}"/>
-              </a:ext>
-            </a:extLst>
-          </p:cNvPr>
-          <p:cNvSpPr/>
-          <p:nvPr/>
-        </p:nvSpPr>
-        <p:spPr>
-          <a:xfrm>
-            <a:off x="7506336" y="4925186"/>
-            <a:ext cx="4550222" cy="869505"/>
-          </a:xfrm>
-          <a:prstGeom prst="rect">
-            <a:avLst/>
-          </a:prstGeom>
-          <a:solidFill>
-            <a:srgbClr val="C00000"/>
-          </a:solidFill>
-          <a:ln>
-            <a:noFill/>
-          </a:ln>
-        </p:spPr>
-        <p:txBody>
-          <a:bodyPr spcFirstLastPara="1" wrap="square" lIns="91425" tIns="45700" rIns="91425" bIns="45700" anchor="ctr" anchorCtr="0">
-            <a:noAutofit/>
-          </a:bodyPr>
-          <a:lstStyle/>
-          <a:p>
-            <a:pPr marL="0" marR="0" lvl="0" indent="0" algn="ctr" rtl="0">
-              <a:lnSpc>
-                <a:spcPct val="100000"/>
-              </a:lnSpc>
-              <a:spcBef>
-                <a:spcPts val="0"/>
-              </a:spcBef>
-              <a:spcAft>
-                <a:spcPts val="0"/>
-              </a:spcAft>
-              <a:buClr>
-                <a:srgbClr val="000000"/>
-              </a:buClr>
-              <a:buSzPts val="1600"/>
-              <a:buFont typeface="Arial"/>
-              <a:buNone/>
-            </a:pPr>
-            <a:r>
-              <a:rPr lang="en-US" sz="4800" dirty="0">
-                <a:solidFill>
-                  <a:schemeClr val="lt1"/>
-                </a:solidFill>
-              </a:rPr>
-              <a:t>Philip Leonard</a:t>
-            </a:r>
-            <a:endParaRPr sz="3200" b="0" i="0" u="none" strike="noStrike" cap="none" dirty="0">
-              <a:solidFill>
-                <a:srgbClr val="000000"/>
-              </a:solidFill>
-              <a:latin typeface="Arial"/>
-              <a:ea typeface="Arial"/>
-              <a:cs typeface="Arial"/>
-              <a:sym typeface="Arial"/>
-            </a:endParaRPr>
-          </a:p>
-        </p:txBody>
-      </p:sp>
-      <p:sp>
-        <p:nvSpPr>
-          <p:cNvPr id="8" name="Google Shape;170;p31">
-            <a:extLst>
-              <a:ext uri="{FF2B5EF4-FFF2-40B4-BE49-F238E27FC236}">
-                <a16:creationId xmlns:a16="http://schemas.microsoft.com/office/drawing/2014/main" id="{D328ABDE-E232-3EB7-C3F2-B4BB7B64262F}"/>
-              </a:ext>
-            </a:extLst>
-          </p:cNvPr>
-          <p:cNvSpPr/>
-          <p:nvPr/>
-        </p:nvSpPr>
-        <p:spPr>
-          <a:xfrm>
-            <a:off x="7526107" y="5681420"/>
-            <a:ext cx="4550222" cy="548230"/>
-          </a:xfrm>
-          <a:prstGeom prst="rect">
-            <a:avLst/>
-          </a:prstGeom>
-          <a:solidFill>
-            <a:srgbClr val="C00000"/>
-          </a:solidFill>
-          <a:ln>
-            <a:noFill/>
-          </a:ln>
-        </p:spPr>
-        <p:txBody>
-          <a:bodyPr spcFirstLastPara="1" wrap="square" lIns="91425" tIns="45700" rIns="91425" bIns="45700" anchor="ctr" anchorCtr="0">
-            <a:noAutofit/>
-          </a:bodyPr>
-          <a:lstStyle/>
-          <a:p>
-            <a:pPr marL="0" marR="0" lvl="0" indent="0" algn="ctr" rtl="0">
-              <a:lnSpc>
-                <a:spcPct val="100000"/>
-              </a:lnSpc>
-              <a:spcBef>
-                <a:spcPts val="0"/>
-              </a:spcBef>
-              <a:spcAft>
-                <a:spcPts val="0"/>
-              </a:spcAft>
-              <a:buClr>
-                <a:srgbClr val="000000"/>
-              </a:buClr>
-              <a:buSzPts val="1600"/>
-              <a:buFont typeface="Arial"/>
-              <a:buNone/>
-            </a:pPr>
-            <a:r>
               <a:rPr lang="en-US" sz="3600" dirty="0">
                 <a:solidFill>
                   <a:schemeClr val="lt1"/>
                 </a:solidFill>
               </a:rPr>
-              <a:t>Dead at Age 44</a:t>
+              <a:t>Dead at Age 52</a:t>
             </a:r>
             <a:endParaRPr sz="2000" b="0" i="0" u="none" strike="noStrike" cap="none" dirty="0">
               <a:solidFill>
@@ -11318,7 +12272,7 @@
           <p:cNvPr id="10" name="TextBox 9">
             <a:extLst>
               <a:ext uri="{FF2B5EF4-FFF2-40B4-BE49-F238E27FC236}">
-                <a16:creationId xmlns:a16="http://schemas.microsoft.com/office/drawing/2014/main" id="{5FA0D8B2-6B55-D3DC-BCBB-6FEAD86B9E72}"/>
+                <a16:creationId xmlns:a16="http://schemas.microsoft.com/office/drawing/2014/main" id="{ABFEA484-AE6A-906E-D59E-C3F7E9DDD90C}"/>
               </a:ext>
             </a:extLst>
           </p:cNvPr>
@@ -11327,8 +12281,8 @@
         </p:nvSpPr>
         <p:spPr>
           <a:xfrm>
-            <a:off x="191731" y="1937976"/>
-            <a:ext cx="7648046" cy="3754874"/>
+            <a:off x="208343" y="1805721"/>
+            <a:ext cx="7816976" cy="4031873"/>
           </a:xfrm>
           <a:prstGeom prst="rect">
             <a:avLst/>
@@ -11354,7 +12308,7 @@
             </a:pPr>
             <a:r>
               <a:rPr dirty="0"/>
-              <a:t>Los Alamos nuclear weapons lab HIGH-EXPLOSIVES chemist — killed at age 44 in a head-on collision on the road TO the lab.</a:t>
+              <a:t>America's most famous journalist — syndicated to 20 MILLION readers. Found dead of a barbiturate overdose at age 52. Ruled "circumstances undetermined."</a:t>
             </a:r>
           </a:p>
           <a:p>
@@ -11367,7 +12321,7 @@
             </a:pPr>
             <a:r>
               <a:rPr dirty="0"/>
-              <a:t>Another driver crossed the DOUBLE YELLOW LINE into his lane. No public explanation for WHY has ever been released.</a:t>
+              <a:t>She was investigating the JFK ASSASSINATION and told friends she was about to "BREAK THE CASE WIDE OPEN."</a:t>
             </a:r>
           </a:p>
           <a:p>
@@ -11380,7 +12334,7 @@
             </a:pPr>
             <a:r>
               <a:rPr dirty="0"/>
-              <a:t>His specialty was the most CLASSIFIED research at LANL — explosive compounds used in nuclear WARHEAD design.</a:t>
+              <a:t>She secured the ONLY private interview with Jack Ruby — the man who killed the man accused of killing the President.</a:t>
             </a:r>
           </a:p>
           <a:p>
@@ -11393,7 +12347,7 @@
             </a:pPr>
             <a:r>
               <a:rPr dirty="0"/>
-              <a:t>His death came at the START of a cluster of defense scientist deaths in the New Mexico corridor throughout 2024-2025.</a:t>
+              <a:t>Her INVESTIGATION FILE — described as a thick folder of documents — VANISHED after her death and has NEVER been found.</a:t>
             </a:r>
           </a:p>
           <a:p>
@@ -11406,14 +12360,104 @@
             </a:pPr>
             <a:r>
               <a:rPr dirty="0"/>
-              <a:t>A SECOND defense scientist in the same New Mexico corridor was MURDERED just weeks later — Christopher Fallen of the Air Force Research Lab.</a:t>
-            </a:r>
+              <a:t>Found in a room that WASN'T her bedroom, fully dressed and made up — inconsistent with her known habits. No real investigation was ever conducted.</a:t>
+            </a:r>
+          </a:p>
+        </p:txBody>
+      </p:sp>
+      <p:sp>
+        <p:nvSpPr>
+          <p:cNvPr id="6" name="AutoShape 2" descr="Fundraiser for Sky Roberts by Annie Farmer : Help Virginia Roberts  Giuffre's Family Carry On Her Legacy">
+            <a:extLst>
+              <a:ext uri="{FF2B5EF4-FFF2-40B4-BE49-F238E27FC236}">
+                <a16:creationId xmlns:a16="http://schemas.microsoft.com/office/drawing/2014/main" id="{77876416-18B8-24A2-30FD-8E520F869817}"/>
+              </a:ext>
+            </a:extLst>
+          </p:cNvPr>
+          <p:cNvSpPr>
+            <a:spLocks noChangeAspect="1" noChangeArrowheads="1"/>
+          </p:cNvSpPr>
+          <p:nvPr/>
+        </p:nvSpPr>
+        <p:spPr bwMode="auto">
+          <a:xfrm>
+            <a:off x="5943600" y="3276600"/>
+            <a:ext cx="304800" cy="304800"/>
+          </a:xfrm>
+          <a:prstGeom prst="rect">
+            <a:avLst/>
+          </a:prstGeom>
+          <a:noFill/>
+          <a:extLst>
+            <a:ext uri="{909E8E84-426E-40DD-AFC4-6F175D3DCCD1}">
+              <a14:hiddenFill xmlns:a14="http://schemas.microsoft.com/office/drawing/2010/main">
+                <a:solidFill>
+                  <a:srgbClr val="FFFFFF"/>
+                </a:solidFill>
+              </a14:hiddenFill>
+            </a:ext>
+          </a:extLst>
+        </p:spPr>
+        <p:txBody>
+          <a:bodyPr vert="horz" wrap="square" lIns="91440" tIns="45720" rIns="91440" bIns="45720" numCol="1" anchor="t" anchorCtr="0" compatLnSpc="1">
+            <a:prstTxWarp prst="textNoShape">
+              <a:avLst/>
+            </a:prstTxWarp>
+          </a:bodyPr>
+          <a:lstStyle/>
+          <a:p>
+            <a:endParaRPr lang="en-US"/>
+          </a:p>
+        </p:txBody>
+      </p:sp>
+      <p:sp>
+        <p:nvSpPr>
+          <p:cNvPr id="11" name="AutoShape 4" descr="Fundraiser for Sky Roberts by Annie Farmer : Help Virginia Roberts  Giuffre's Family Carry On Her Legacy">
+            <a:extLst>
+              <a:ext uri="{FF2B5EF4-FFF2-40B4-BE49-F238E27FC236}">
+                <a16:creationId xmlns:a16="http://schemas.microsoft.com/office/drawing/2014/main" id="{414B4E2B-C54A-135F-B3A8-DA7C31104A94}"/>
+              </a:ext>
+            </a:extLst>
+          </p:cNvPr>
+          <p:cNvSpPr>
+            <a:spLocks noChangeAspect="1" noChangeArrowheads="1"/>
+          </p:cNvSpPr>
+          <p:nvPr/>
+        </p:nvSpPr>
+        <p:spPr bwMode="auto">
+          <a:xfrm>
+            <a:off x="6096000" y="3429000"/>
+            <a:ext cx="304800" cy="304800"/>
+          </a:xfrm>
+          <a:prstGeom prst="rect">
+            <a:avLst/>
+          </a:prstGeom>
+          <a:noFill/>
+          <a:extLst>
+            <a:ext uri="{909E8E84-426E-40DD-AFC4-6F175D3DCCD1}">
+              <a14:hiddenFill xmlns:a14="http://schemas.microsoft.com/office/drawing/2010/main">
+                <a:solidFill>
+                  <a:srgbClr val="FFFFFF"/>
+                </a:solidFill>
+              </a14:hiddenFill>
+            </a:ext>
+          </a:extLst>
+        </p:spPr>
+        <p:txBody>
+          <a:bodyPr vert="horz" wrap="square" lIns="91440" tIns="45720" rIns="91440" bIns="45720" numCol="1" anchor="t" anchorCtr="0" compatLnSpc="1">
+            <a:prstTxWarp prst="textNoShape">
+              <a:avLst/>
+            </a:prstTxWarp>
+          </a:bodyPr>
+          <a:lstStyle/>
+          <a:p>
+            <a:endParaRPr lang="en-US"/>
           </a:p>
         </p:txBody>
       </p:sp>
       <p:pic>
         <p:nvPicPr>
-          <p:cNvPr id="16" name="Picture 15" descr="Philip_Leonard.jpg"/>
+          <p:cNvPr id="16" name="Picture 15" descr="Dorothy_Kilgallen.jpg"/>
           <p:cNvPicPr>
             <a:picLocks noChangeAspect="1"/>
           </p:cNvPicPr>
@@ -11427,20 +12471,85 @@
         </p:blipFill>
         <p:spPr>
           <a:xfrm>
-            <a:off x="9309676" y="1070199"/>
-            <a:ext cx="2746882" cy="3884876"/>
+            <a:off x="8144168" y="1084146"/>
+            <a:ext cx="3882867" cy="3856982"/>
           </a:xfrm>
           <a:prstGeom prst="rect">
             <a:avLst/>
           </a:prstGeom>
         </p:spPr>
       </p:pic>
+      <p:sp>
+        <p:nvSpPr>
+          <p:cNvPr id="7" name="Google Shape;170;p31">
+            <a:extLst>
+              <a:ext uri="{FF2B5EF4-FFF2-40B4-BE49-F238E27FC236}">
+                <a16:creationId xmlns:a16="http://schemas.microsoft.com/office/drawing/2014/main" id="{A2DF07F5-EEA0-8A2E-7E11-3E1CC4C2B695}"/>
+              </a:ext>
+            </a:extLst>
+          </p:cNvPr>
+          <p:cNvSpPr/>
+          <p:nvPr/>
+        </p:nvSpPr>
+        <p:spPr>
+          <a:xfrm>
+            <a:off x="7506336" y="4925186"/>
+            <a:ext cx="4550222" cy="869505"/>
+          </a:xfrm>
+          <a:prstGeom prst="rect">
+            <a:avLst/>
+          </a:prstGeom>
+          <a:solidFill>
+            <a:srgbClr val="C00000"/>
+          </a:solidFill>
+          <a:ln>
+            <a:noFill/>
+          </a:ln>
+        </p:spPr>
+        <p:txBody>
+          <a:bodyPr spcFirstLastPara="1" wrap="square" lIns="91425" tIns="45700" rIns="91425" bIns="45700" anchor="ctr" anchorCtr="0">
+            <a:noAutofit/>
+          </a:bodyPr>
+          <a:lstStyle/>
+          <a:p>
+            <a:pPr marL="0" marR="0" lvl="0" indent="0" algn="ctr" rtl="0">
+              <a:lnSpc>
+                <a:spcPct val="100000"/>
+              </a:lnSpc>
+              <a:spcBef>
+                <a:spcPts val="0"/>
+              </a:spcBef>
+              <a:spcAft>
+                <a:spcPts val="0"/>
+              </a:spcAft>
+              <a:buClr>
+                <a:srgbClr val="000000"/>
+              </a:buClr>
+              <a:buSzPts val="1600"/>
+              <a:buFont typeface="Arial"/>
+              <a:buNone/>
+            </a:pPr>
+            <a:r>
+              <a:rPr lang="en-US" sz="4400" dirty="0">
+                <a:solidFill>
+                  <a:schemeClr val="lt1"/>
+                </a:solidFill>
+              </a:rPr>
+              <a:t>Dorothy Kilgallen</a:t>
+            </a:r>
+            <a:endParaRPr sz="2800" b="0" i="0" u="none" strike="noStrike" cap="none" dirty="0">
+              <a:solidFill>
+                <a:srgbClr val="000000"/>
+              </a:solidFill>
+              <a:latin typeface="Arial"/>
+              <a:ea typeface="Arial"/>
+              <a:cs typeface="Arial"/>
+              <a:sym typeface="Arial"/>
+            </a:endParaRPr>
+          </a:p>
+        </p:txBody>
+      </p:sp>
     </p:spTree>
-    <p:extLst>
-      <p:ext uri="{BB962C8B-B14F-4D97-AF65-F5344CB8AC3E}">
-        <p14:creationId xmlns:p14="http://schemas.microsoft.com/office/powerpoint/2010/main" val="917079305"/>
-      </p:ext>
-    </p:extLst>
   </p:cSld>
   <p:clrMapOvr>
     <a:masterClrMapping/>
@@ -11503,6 +12612,520 @@
                   <a:schemeClr val="accent5"/>
                 </a:solidFill>
               </a:rPr>
+              <a:t>Why / How they Philip Leonard:</a:t>
+            </a:r>
+          </a:p>
+        </p:txBody>
+      </p:sp>
+      <p:sp>
+        <p:nvSpPr>
+          <p:cNvPr id="3" name="Google Shape;170;p31">
+            <a:extLst>
+              <a:ext uri="{FF2B5EF4-FFF2-40B4-BE49-F238E27FC236}">
+                <a16:creationId xmlns:a16="http://schemas.microsoft.com/office/drawing/2014/main" id="{A4695FE5-0AA5-AB05-98B1-B5B8E3FA8CBE}"/>
+              </a:ext>
+            </a:extLst>
+          </p:cNvPr>
+          <p:cNvSpPr/>
+          <p:nvPr/>
+        </p:nvSpPr>
+        <p:spPr>
+          <a:xfrm>
+            <a:off x="191731" y="5732890"/>
+            <a:ext cx="3431270" cy="496760"/>
+          </a:xfrm>
+          <a:prstGeom prst="rect">
+            <a:avLst/>
+          </a:prstGeom>
+          <a:solidFill>
+            <a:schemeClr val="accent5"/>
+          </a:solidFill>
+          <a:ln>
+            <a:noFill/>
+          </a:ln>
+        </p:spPr>
+        <p:txBody>
+          <a:bodyPr spcFirstLastPara="1" wrap="square" lIns="91425" tIns="45700" rIns="91425" bIns="45700" anchor="ctr" anchorCtr="0">
+            <a:noAutofit/>
+          </a:bodyPr>
+          <a:lstStyle/>
+          <a:p>
+            <a:pPr marL="0" marR="0" lvl="0" indent="0" algn="ctr" rtl="0">
+              <a:lnSpc>
+                <a:spcPct val="100000"/>
+              </a:lnSpc>
+              <a:spcBef>
+                <a:spcPts val="0"/>
+              </a:spcBef>
+              <a:spcAft>
+                <a:spcPts val="0"/>
+              </a:spcAft>
+              <a:buClr>
+                <a:srgbClr val="000000"/>
+              </a:buClr>
+              <a:buSzPts val="1600"/>
+              <a:buFont typeface="Arial"/>
+              <a:buNone/>
+            </a:pPr>
+            <a:r>
+              <a:rPr lang="en-US" sz="3600" dirty="0">
+                <a:solidFill>
+                  <a:schemeClr val="lt1"/>
+                </a:solidFill>
+              </a:rPr>
+              <a:t>Read List Here:</a:t>
+            </a:r>
+            <a:endParaRPr sz="2000" b="0" i="0" u="none" strike="noStrike" cap="none" dirty="0">
+              <a:solidFill>
+                <a:srgbClr val="000000"/>
+              </a:solidFill>
+              <a:latin typeface="Arial"/>
+              <a:ea typeface="Arial"/>
+              <a:cs typeface="Arial"/>
+              <a:sym typeface="Arial"/>
+            </a:endParaRPr>
+          </a:p>
+        </p:txBody>
+      </p:sp>
+      <p:sp>
+        <p:nvSpPr>
+          <p:cNvPr id="5" name="Google Shape;170;p31">
+            <a:extLst>
+              <a:ext uri="{FF2B5EF4-FFF2-40B4-BE49-F238E27FC236}">
+                <a16:creationId xmlns:a16="http://schemas.microsoft.com/office/drawing/2014/main" id="{98132413-6ED2-8B36-74B6-3C503B1A4634}"/>
+              </a:ext>
+            </a:extLst>
+          </p:cNvPr>
+          <p:cNvSpPr/>
+          <p:nvPr/>
+        </p:nvSpPr>
+        <p:spPr>
+          <a:xfrm>
+            <a:off x="0" y="-31518"/>
+            <a:ext cx="12192000" cy="1131606"/>
+          </a:xfrm>
+          <a:prstGeom prst="rect">
+            <a:avLst/>
+          </a:prstGeom>
+          <a:solidFill>
+            <a:srgbClr val="C00000"/>
+          </a:solidFill>
+          <a:ln>
+            <a:noFill/>
+          </a:ln>
+        </p:spPr>
+        <p:txBody>
+          <a:bodyPr spcFirstLastPara="1" wrap="square" lIns="91425" tIns="45700" rIns="91425" bIns="45700" anchor="ctr" anchorCtr="0">
+            <a:noAutofit/>
+          </a:bodyPr>
+          <a:lstStyle/>
+          <a:p>
+            <a:pPr marL="0" marR="0" lvl="0" indent="0" rtl="0">
+              <a:lnSpc>
+                <a:spcPct val="100000"/>
+              </a:lnSpc>
+              <a:spcBef>
+                <a:spcPts val="0"/>
+              </a:spcBef>
+              <a:spcAft>
+                <a:spcPts val="0"/>
+              </a:spcAft>
+              <a:buClr>
+                <a:srgbClr val="000000"/>
+              </a:buClr>
+              <a:buSzPts val="1600"/>
+              <a:buFont typeface="Arial"/>
+              <a:buNone/>
+            </a:pPr>
+            <a:r>
+              <a:rPr lang="en-US" sz="4800" dirty="0">
+                <a:solidFill>
+                  <a:schemeClr val="lt1"/>
+                </a:solidFill>
+              </a:rPr>
+              <a:t> 150+ Murdered: by Intelligence Services</a:t>
+            </a:r>
+            <a:endParaRPr sz="3200" b="0" i="0" u="none" strike="noStrike" cap="none" dirty="0">
+              <a:solidFill>
+                <a:srgbClr val="000000"/>
+              </a:solidFill>
+              <a:latin typeface="Arial"/>
+              <a:ea typeface="Arial"/>
+              <a:cs typeface="Arial"/>
+              <a:sym typeface="Arial"/>
+            </a:endParaRPr>
+          </a:p>
+        </p:txBody>
+      </p:sp>
+      <p:sp>
+        <p:nvSpPr>
+          <p:cNvPr id="4" name="TextBox 3">
+            <a:extLst>
+              <a:ext uri="{FF2B5EF4-FFF2-40B4-BE49-F238E27FC236}">
+                <a16:creationId xmlns:a16="http://schemas.microsoft.com/office/drawing/2014/main" id="{50D7621F-9D36-7894-7117-9F831EF5EFA6}"/>
+              </a:ext>
+            </a:extLst>
+          </p:cNvPr>
+          <p:cNvSpPr txBox="1"/>
+          <p:nvPr/>
+        </p:nvSpPr>
+        <p:spPr>
+          <a:xfrm>
+            <a:off x="107300" y="6229650"/>
+            <a:ext cx="11685989" cy="461665"/>
+          </a:xfrm>
+          <a:prstGeom prst="rect">
+            <a:avLst/>
+          </a:prstGeom>
+          <a:solidFill>
+            <a:schemeClr val="bg1">
+              <a:alpha val="84400"/>
+            </a:schemeClr>
+          </a:solidFill>
+        </p:spPr>
+        <p:txBody>
+          <a:bodyPr wrap="square" rtlCol="0">
+            <a:spAutoFit/>
+          </a:bodyPr>
+          <a:lstStyle/>
+          <a:p>
+            <a:r>
+              <a:rPr lang="en-US" sz="2400" dirty="0"/>
+              <a:t>https://intelligencemurders.com/intel</a:t>
+            </a:r>
+          </a:p>
+        </p:txBody>
+      </p:sp>
+      <p:sp>
+        <p:nvSpPr>
+          <p:cNvPr id="7" name="Google Shape;170;p31">
+            <a:extLst>
+              <a:ext uri="{FF2B5EF4-FFF2-40B4-BE49-F238E27FC236}">
+                <a16:creationId xmlns:a16="http://schemas.microsoft.com/office/drawing/2014/main" id="{4B582382-76AA-B49E-C611-39A37CE591B9}"/>
+              </a:ext>
+            </a:extLst>
+          </p:cNvPr>
+          <p:cNvSpPr/>
+          <p:nvPr/>
+        </p:nvSpPr>
+        <p:spPr>
+          <a:xfrm>
+            <a:off x="7506336" y="4925186"/>
+            <a:ext cx="4550222" cy="869505"/>
+          </a:xfrm>
+          <a:prstGeom prst="rect">
+            <a:avLst/>
+          </a:prstGeom>
+          <a:solidFill>
+            <a:srgbClr val="C00000"/>
+          </a:solidFill>
+          <a:ln>
+            <a:noFill/>
+          </a:ln>
+        </p:spPr>
+        <p:txBody>
+          <a:bodyPr spcFirstLastPara="1" wrap="square" lIns="91425" tIns="45700" rIns="91425" bIns="45700" anchor="ctr" anchorCtr="0">
+            <a:noAutofit/>
+          </a:bodyPr>
+          <a:lstStyle/>
+          <a:p>
+            <a:pPr marL="0" marR="0" lvl="0" indent="0" algn="ctr" rtl="0">
+              <a:lnSpc>
+                <a:spcPct val="100000"/>
+              </a:lnSpc>
+              <a:spcBef>
+                <a:spcPts val="0"/>
+              </a:spcBef>
+              <a:spcAft>
+                <a:spcPts val="0"/>
+              </a:spcAft>
+              <a:buClr>
+                <a:srgbClr val="000000"/>
+              </a:buClr>
+              <a:buSzPts val="1600"/>
+              <a:buFont typeface="Arial"/>
+              <a:buNone/>
+            </a:pPr>
+            <a:r>
+              <a:rPr lang="en-US" sz="4800" dirty="0">
+                <a:solidFill>
+                  <a:schemeClr val="lt1"/>
+                </a:solidFill>
+              </a:rPr>
+              <a:t>Philip Leonard</a:t>
+            </a:r>
+            <a:endParaRPr sz="3200" b="0" i="0" u="none" strike="noStrike" cap="none" dirty="0">
+              <a:solidFill>
+                <a:srgbClr val="000000"/>
+              </a:solidFill>
+              <a:latin typeface="Arial"/>
+              <a:ea typeface="Arial"/>
+              <a:cs typeface="Arial"/>
+              <a:sym typeface="Arial"/>
+            </a:endParaRPr>
+          </a:p>
+        </p:txBody>
+      </p:sp>
+      <p:sp>
+        <p:nvSpPr>
+          <p:cNvPr id="8" name="Google Shape;170;p31">
+            <a:extLst>
+              <a:ext uri="{FF2B5EF4-FFF2-40B4-BE49-F238E27FC236}">
+                <a16:creationId xmlns:a16="http://schemas.microsoft.com/office/drawing/2014/main" id="{D328ABDE-E232-3EB7-C3F2-B4BB7B64262F}"/>
+              </a:ext>
+            </a:extLst>
+          </p:cNvPr>
+          <p:cNvSpPr/>
+          <p:nvPr/>
+        </p:nvSpPr>
+        <p:spPr>
+          <a:xfrm>
+            <a:off x="7526107" y="5681420"/>
+            <a:ext cx="4550222" cy="548230"/>
+          </a:xfrm>
+          <a:prstGeom prst="rect">
+            <a:avLst/>
+          </a:prstGeom>
+          <a:solidFill>
+            <a:srgbClr val="C00000"/>
+          </a:solidFill>
+          <a:ln>
+            <a:noFill/>
+          </a:ln>
+        </p:spPr>
+        <p:txBody>
+          <a:bodyPr spcFirstLastPara="1" wrap="square" lIns="91425" tIns="45700" rIns="91425" bIns="45700" anchor="ctr" anchorCtr="0">
+            <a:noAutofit/>
+          </a:bodyPr>
+          <a:lstStyle/>
+          <a:p>
+            <a:pPr marL="0" marR="0" lvl="0" indent="0" algn="ctr" rtl="0">
+              <a:lnSpc>
+                <a:spcPct val="100000"/>
+              </a:lnSpc>
+              <a:spcBef>
+                <a:spcPts val="0"/>
+              </a:spcBef>
+              <a:spcAft>
+                <a:spcPts val="0"/>
+              </a:spcAft>
+              <a:buClr>
+                <a:srgbClr val="000000"/>
+              </a:buClr>
+              <a:buSzPts val="1600"/>
+              <a:buFont typeface="Arial"/>
+              <a:buNone/>
+            </a:pPr>
+            <a:r>
+              <a:rPr lang="en-US" sz="3600" dirty="0">
+                <a:solidFill>
+                  <a:schemeClr val="lt1"/>
+                </a:solidFill>
+              </a:rPr>
+              <a:t>Dead at Age 44</a:t>
+            </a:r>
+            <a:endParaRPr sz="2000" b="0" i="0" u="none" strike="noStrike" cap="none" dirty="0">
+              <a:solidFill>
+                <a:srgbClr val="000000"/>
+              </a:solidFill>
+              <a:latin typeface="Arial"/>
+              <a:ea typeface="Arial"/>
+              <a:cs typeface="Arial"/>
+              <a:sym typeface="Arial"/>
+            </a:endParaRPr>
+          </a:p>
+        </p:txBody>
+      </p:sp>
+      <p:sp>
+        <p:nvSpPr>
+          <p:cNvPr id="10" name="TextBox 9">
+            <a:extLst>
+              <a:ext uri="{FF2B5EF4-FFF2-40B4-BE49-F238E27FC236}">
+                <a16:creationId xmlns:a16="http://schemas.microsoft.com/office/drawing/2014/main" id="{5FA0D8B2-6B55-D3DC-BCBB-6FEAD86B9E72}"/>
+              </a:ext>
+            </a:extLst>
+          </p:cNvPr>
+          <p:cNvSpPr txBox="1"/>
+          <p:nvPr/>
+        </p:nvSpPr>
+        <p:spPr>
+          <a:xfrm>
+            <a:off x="191731" y="1937976"/>
+            <a:ext cx="7648046" cy="3754874"/>
+          </a:xfrm>
+          <a:prstGeom prst="rect">
+            <a:avLst/>
+          </a:prstGeom>
+          <a:solidFill>
+            <a:schemeClr val="bg1">
+              <a:alpha val="84400"/>
+            </a:schemeClr>
+          </a:solidFill>
+        </p:spPr>
+        <p:txBody>
+          <a:bodyPr wrap="square" rtlCol="0">
+            <a:spAutoFit/>
+          </a:bodyPr>
+          <a:lstStyle/>
+          <a:p>
+            <a:pPr marL="285750" indent="-285750">
+              <a:spcBef>
+                <a:spcPts val="1200"/>
+              </a:spcBef>
+              <a:buFont typeface="Arial" panose="020B0604020202020204" pitchFamily="34" charset="0"/>
+              <a:buChar char="•"/>
+            </a:pPr>
+            <a:r>
+              <a:rPr dirty="0"/>
+              <a:t>Los Alamos nuclear weapons lab HIGH-EXPLOSIVES chemist — killed at age 44 in a head-on collision on the road TO the lab.</a:t>
+            </a:r>
+          </a:p>
+          <a:p>
+            <a:pPr marL="285750" indent="-285750">
+              <a:spcBef>
+                <a:spcPts val="1200"/>
+              </a:spcBef>
+              <a:buFont typeface="Arial" panose="020B0604020202020204" pitchFamily="34" charset="0"/>
+              <a:buChar char="•"/>
+            </a:pPr>
+            <a:r>
+              <a:rPr dirty="0"/>
+              <a:t>Another driver crossed the DOUBLE YELLOW LINE into his lane. No public explanation for WHY has ever been released.</a:t>
+            </a:r>
+          </a:p>
+          <a:p>
+            <a:pPr marL="285750" indent="-285750">
+              <a:spcBef>
+                <a:spcPts val="1200"/>
+              </a:spcBef>
+              <a:buFont typeface="Arial" panose="020B0604020202020204" pitchFamily="34" charset="0"/>
+              <a:buChar char="•"/>
+            </a:pPr>
+            <a:r>
+              <a:rPr dirty="0"/>
+              <a:t>His specialty was the most CLASSIFIED research at LANL — explosive compounds used in nuclear WARHEAD design.</a:t>
+            </a:r>
+          </a:p>
+          <a:p>
+            <a:pPr marL="285750" indent="-285750">
+              <a:spcBef>
+                <a:spcPts val="1200"/>
+              </a:spcBef>
+              <a:buFont typeface="Arial" panose="020B0604020202020204" pitchFamily="34" charset="0"/>
+              <a:buChar char="•"/>
+            </a:pPr>
+            <a:r>
+              <a:rPr dirty="0"/>
+              <a:t>His death came at the START of a cluster of defense scientist deaths in the New Mexico corridor throughout 2024-2025.</a:t>
+            </a:r>
+          </a:p>
+          <a:p>
+            <a:pPr marL="285750" indent="-285750">
+              <a:spcBef>
+                <a:spcPts val="1200"/>
+              </a:spcBef>
+              <a:buFont typeface="Arial" panose="020B0604020202020204" pitchFamily="34" charset="0"/>
+              <a:buChar char="•"/>
+            </a:pPr>
+            <a:r>
+              <a:rPr dirty="0"/>
+              <a:t>A SECOND defense scientist in the same New Mexico corridor was MURDERED just weeks later — Christopher Fallen of the Air Force Research Lab.</a:t>
+            </a:r>
+          </a:p>
+        </p:txBody>
+      </p:sp>
+      <p:pic>
+        <p:nvPicPr>
+          <p:cNvPr id="16" name="Picture 15" descr="Philip_Leonard.jpg"/>
+          <p:cNvPicPr>
+            <a:picLocks noChangeAspect="1"/>
+          </p:cNvPicPr>
+          <p:nvPr/>
+        </p:nvPicPr>
+        <p:blipFill>
+          <a:blip r:embed="rId3"/>
+          <a:stretch>
+            <a:fillRect/>
+          </a:stretch>
+        </p:blipFill>
+        <p:spPr>
+          <a:xfrm>
+            <a:off x="9309676" y="1070199"/>
+            <a:ext cx="2746882" cy="3884876"/>
+          </a:xfrm>
+          <a:prstGeom prst="rect">
+            <a:avLst/>
+          </a:prstGeom>
+        </p:spPr>
+      </p:pic>
+    </p:spTree>
+    <p:extLst>
+      <p:ext uri="{BB962C8B-B14F-4D97-AF65-F5344CB8AC3E}">
+        <p14:creationId xmlns:p14="http://schemas.microsoft.com/office/powerpoint/2010/main" val="917079305"/>
+      </p:ext>
+    </p:extLst>
+  </p:cSld>
+  <p:clrMapOvr>
+    <a:masterClrMapping/>
+  </p:clrMapOvr>
+</p:sld>
+</file>
+
+<file path=ppt/slides/slide7.xml><?xml version="1.0" encoding="utf-8"?>
+<p:sld xmlns:a="http://schemas.openxmlformats.org/drawingml/2006/main" xmlns:r="http://schemas.openxmlformats.org/officeDocument/2006/relationships" xmlns:p="http://schemas.openxmlformats.org/presentationml/2006/main">
+  <p:cSld>
+    <p:spTree>
+      <p:nvGrpSpPr>
+        <p:cNvPr id="1" name=""/>
+        <p:cNvGrpSpPr/>
+        <p:nvPr/>
+      </p:nvGrpSpPr>
+      <p:grpSpPr>
+        <a:xfrm>
+          <a:off x="0" y="0"/>
+          <a:ext cx="0" cy="0"/>
+          <a:chOff x="0" y="0"/>
+          <a:chExt cx="0" cy="0"/>
+        </a:xfrm>
+      </p:grpSpPr>
+      <p:sp>
+        <p:nvSpPr>
+          <p:cNvPr id="15" name="TextBox 14">
+            <a:extLst>
+              <a:ext uri="{FF2B5EF4-FFF2-40B4-BE49-F238E27FC236}">
+                <a16:creationId xmlns:a16="http://schemas.microsoft.com/office/drawing/2014/main" id="{E478240E-251B-5BA6-3C45-7E6620400769}"/>
+              </a:ext>
+            </a:extLst>
+          </p:cNvPr>
+          <p:cNvSpPr txBox="1"/>
+          <p:nvPr/>
+        </p:nvSpPr>
+        <p:spPr>
+          <a:xfrm>
+            <a:off x="312432" y="1288262"/>
+            <a:ext cx="6494294" cy="584775"/>
+          </a:xfrm>
+          <a:prstGeom prst="rect">
+            <a:avLst/>
+          </a:prstGeom>
+          <a:solidFill>
+            <a:schemeClr val="bg1">
+              <a:alpha val="84400"/>
+            </a:schemeClr>
+          </a:solidFill>
+        </p:spPr>
+        <p:txBody>
+          <a:bodyPr wrap="square" rtlCol="0">
+            <a:spAutoFit/>
+          </a:bodyPr>
+          <a:lstStyle/>
+          <a:p>
+            <a:r>
+              <a:rPr lang="en-US" sz="3200" b="1" dirty="0">
+                <a:solidFill>
+                  <a:schemeClr val="accent5"/>
+                </a:solidFill>
+              </a:rPr>
               <a:t>Why / How they Alfred Herrhausen:</a:t>
             </a:r>
           </a:p>
@@ -11952,7 +13575,7 @@
 </p:sld>
 </file>
 
-<file path=ppt/slides/slide7.xml><?xml version="1.0" encoding="utf-8"?>
+<file path=ppt/slides/slide8.xml><?xml version="1.0" encoding="utf-8"?>
 <p:sld xmlns:a="http://schemas.openxmlformats.org/drawingml/2006/main" xmlns:r="http://schemas.openxmlformats.org/officeDocument/2006/relationships" xmlns:p="http://schemas.openxmlformats.org/presentationml/2006/main">
   <p:cSld>
     <p:spTree>
@@ -12461,515 +14084,6 @@
 </p:sld>
 </file>
 
-<file path=ppt/slides/slide8.xml><?xml version="1.0" encoding="utf-8"?>
-<p:sld xmlns:a="http://schemas.openxmlformats.org/drawingml/2006/main" xmlns:r="http://schemas.openxmlformats.org/officeDocument/2006/relationships" xmlns:p="http://schemas.openxmlformats.org/presentationml/2006/main">
-  <p:cSld>
-    <p:spTree>
-      <p:nvGrpSpPr>
-        <p:cNvPr id="1" name=""/>
-        <p:cNvGrpSpPr/>
-        <p:nvPr/>
-      </p:nvGrpSpPr>
-      <p:grpSpPr>
-        <a:xfrm>
-          <a:off x="0" y="0"/>
-          <a:ext cx="0" cy="0"/>
-          <a:chOff x="0" y="0"/>
-          <a:chExt cx="0" cy="0"/>
-        </a:xfrm>
-      </p:grpSpPr>
-      <p:sp>
-        <p:nvSpPr>
-          <p:cNvPr id="15" name="TextBox 14">
-            <a:extLst>
-              <a:ext uri="{FF2B5EF4-FFF2-40B4-BE49-F238E27FC236}">
-                <a16:creationId xmlns:a16="http://schemas.microsoft.com/office/drawing/2014/main" id="{E478240E-251B-5BA6-3C45-7E6620400769}"/>
-              </a:ext>
-            </a:extLst>
-          </p:cNvPr>
-          <p:cNvSpPr txBox="1"/>
-          <p:nvPr/>
-        </p:nvSpPr>
-        <p:spPr>
-          <a:xfrm>
-            <a:off x="312432" y="1288262"/>
-            <a:ext cx="7972976" cy="584775"/>
-          </a:xfrm>
-          <a:prstGeom prst="rect">
-            <a:avLst/>
-          </a:prstGeom>
-          <a:solidFill>
-            <a:schemeClr val="bg1">
-              <a:alpha val="84400"/>
-            </a:schemeClr>
-          </a:solidFill>
-        </p:spPr>
-        <p:txBody>
-          <a:bodyPr wrap="square" rtlCol="0">
-            <a:spAutoFit/>
-          </a:bodyPr>
-          <a:lstStyle/>
-          <a:p>
-            <a:r>
-              <a:rPr lang="en-US" sz="3200" b="1" dirty="0">
-                <a:solidFill>
-                  <a:schemeClr val="accent5"/>
-                </a:solidFill>
-              </a:rPr>
-              <a:t>Why / How they Alexander Zakharchenko:</a:t>
-            </a:r>
-          </a:p>
-        </p:txBody>
-      </p:sp>
-      <p:sp>
-        <p:nvSpPr>
-          <p:cNvPr id="3" name="Google Shape;170;p31">
-            <a:extLst>
-              <a:ext uri="{FF2B5EF4-FFF2-40B4-BE49-F238E27FC236}">
-                <a16:creationId xmlns:a16="http://schemas.microsoft.com/office/drawing/2014/main" id="{A4695FE5-0AA5-AB05-98B1-B5B8E3FA8CBE}"/>
-              </a:ext>
-            </a:extLst>
-          </p:cNvPr>
-          <p:cNvSpPr/>
-          <p:nvPr/>
-        </p:nvSpPr>
-        <p:spPr>
-          <a:xfrm>
-            <a:off x="191731" y="5732890"/>
-            <a:ext cx="3431270" cy="496760"/>
-          </a:xfrm>
-          <a:prstGeom prst="rect">
-            <a:avLst/>
-          </a:prstGeom>
-          <a:solidFill>
-            <a:schemeClr val="accent5"/>
-          </a:solidFill>
-          <a:ln>
-            <a:noFill/>
-          </a:ln>
-        </p:spPr>
-        <p:txBody>
-          <a:bodyPr spcFirstLastPara="1" wrap="square" lIns="91425" tIns="45700" rIns="91425" bIns="45700" anchor="ctr" anchorCtr="0">
-            <a:noAutofit/>
-          </a:bodyPr>
-          <a:lstStyle/>
-          <a:p>
-            <a:pPr marL="0" marR="0" lvl="0" indent="0" algn="ctr" rtl="0">
-              <a:lnSpc>
-                <a:spcPct val="100000"/>
-              </a:lnSpc>
-              <a:spcBef>
-                <a:spcPts val="0"/>
-              </a:spcBef>
-              <a:spcAft>
-                <a:spcPts val="0"/>
-              </a:spcAft>
-              <a:buClr>
-                <a:srgbClr val="000000"/>
-              </a:buClr>
-              <a:buSzPts val="1600"/>
-              <a:buFont typeface="Arial"/>
-              <a:buNone/>
-            </a:pPr>
-            <a:r>
-              <a:rPr lang="en-US" sz="3600" dirty="0">
-                <a:solidFill>
-                  <a:schemeClr val="lt1"/>
-                </a:solidFill>
-              </a:rPr>
-              <a:t>Read List Here:</a:t>
-            </a:r>
-            <a:endParaRPr sz="2000" b="0" i="0" u="none" strike="noStrike" cap="none" dirty="0">
-              <a:solidFill>
-                <a:srgbClr val="000000"/>
-              </a:solidFill>
-              <a:latin typeface="Arial"/>
-              <a:ea typeface="Arial"/>
-              <a:cs typeface="Arial"/>
-              <a:sym typeface="Arial"/>
-            </a:endParaRPr>
-          </a:p>
-        </p:txBody>
-      </p:sp>
-      <p:sp>
-        <p:nvSpPr>
-          <p:cNvPr id="5" name="Google Shape;170;p31">
-            <a:extLst>
-              <a:ext uri="{FF2B5EF4-FFF2-40B4-BE49-F238E27FC236}">
-                <a16:creationId xmlns:a16="http://schemas.microsoft.com/office/drawing/2014/main" id="{98132413-6ED2-8B36-74B6-3C503B1A4634}"/>
-              </a:ext>
-            </a:extLst>
-          </p:cNvPr>
-          <p:cNvSpPr/>
-          <p:nvPr/>
-        </p:nvSpPr>
-        <p:spPr>
-          <a:xfrm>
-            <a:off x="0" y="-31518"/>
-            <a:ext cx="12192000" cy="1131606"/>
-          </a:xfrm>
-          <a:prstGeom prst="rect">
-            <a:avLst/>
-          </a:prstGeom>
-          <a:solidFill>
-            <a:srgbClr val="C00000"/>
-          </a:solidFill>
-          <a:ln>
-            <a:noFill/>
-          </a:ln>
-        </p:spPr>
-        <p:txBody>
-          <a:bodyPr spcFirstLastPara="1" wrap="square" lIns="91425" tIns="45700" rIns="91425" bIns="45700" anchor="ctr" anchorCtr="0">
-            <a:noAutofit/>
-          </a:bodyPr>
-          <a:lstStyle/>
-          <a:p>
-            <a:pPr marL="0" marR="0" lvl="0" indent="0" rtl="0">
-              <a:lnSpc>
-                <a:spcPct val="100000"/>
-              </a:lnSpc>
-              <a:spcBef>
-                <a:spcPts val="0"/>
-              </a:spcBef>
-              <a:spcAft>
-                <a:spcPts val="0"/>
-              </a:spcAft>
-              <a:buClr>
-                <a:srgbClr val="000000"/>
-              </a:buClr>
-              <a:buSzPts val="1600"/>
-              <a:buFont typeface="Arial"/>
-              <a:buNone/>
-            </a:pPr>
-            <a:r>
-              <a:rPr lang="en-US" sz="4800" dirty="0">
-                <a:solidFill>
-                  <a:schemeClr val="lt1"/>
-                </a:solidFill>
-              </a:rPr>
-              <a:t> 150+ Murdered: by Intelligence Services</a:t>
-            </a:r>
-            <a:endParaRPr sz="3200" b="0" i="0" u="none" strike="noStrike" cap="none" dirty="0">
-              <a:solidFill>
-                <a:srgbClr val="000000"/>
-              </a:solidFill>
-              <a:latin typeface="Arial"/>
-              <a:ea typeface="Arial"/>
-              <a:cs typeface="Arial"/>
-              <a:sym typeface="Arial"/>
-            </a:endParaRPr>
-          </a:p>
-        </p:txBody>
-      </p:sp>
-      <p:sp>
-        <p:nvSpPr>
-          <p:cNvPr id="4" name="TextBox 3">
-            <a:extLst>
-              <a:ext uri="{FF2B5EF4-FFF2-40B4-BE49-F238E27FC236}">
-                <a16:creationId xmlns:a16="http://schemas.microsoft.com/office/drawing/2014/main" id="{50D7621F-9D36-7894-7117-9F831EF5EFA6}"/>
-              </a:ext>
-            </a:extLst>
-          </p:cNvPr>
-          <p:cNvSpPr txBox="1"/>
-          <p:nvPr/>
-        </p:nvSpPr>
-        <p:spPr>
-          <a:xfrm>
-            <a:off x="107300" y="6229650"/>
-            <a:ext cx="11685989" cy="461665"/>
-          </a:xfrm>
-          <a:prstGeom prst="rect">
-            <a:avLst/>
-          </a:prstGeom>
-          <a:solidFill>
-            <a:schemeClr val="bg1">
-              <a:alpha val="84400"/>
-            </a:schemeClr>
-          </a:solidFill>
-        </p:spPr>
-        <p:txBody>
-          <a:bodyPr wrap="square" rtlCol="0">
-            <a:spAutoFit/>
-          </a:bodyPr>
-          <a:lstStyle/>
-          <a:p>
-            <a:r>
-              <a:rPr lang="en-US" sz="2400" dirty="0"/>
-              <a:t>https://intelligencemurders.com/intel</a:t>
-            </a:r>
-          </a:p>
-        </p:txBody>
-      </p:sp>
-      <p:sp>
-        <p:nvSpPr>
-          <p:cNvPr id="8" name="Google Shape;170;p31">
-            <a:extLst>
-              <a:ext uri="{FF2B5EF4-FFF2-40B4-BE49-F238E27FC236}">
-                <a16:creationId xmlns:a16="http://schemas.microsoft.com/office/drawing/2014/main" id="{D328ABDE-E232-3EB7-C3F2-B4BB7B64262F}"/>
-              </a:ext>
-            </a:extLst>
-          </p:cNvPr>
-          <p:cNvSpPr/>
-          <p:nvPr/>
-        </p:nvSpPr>
-        <p:spPr>
-          <a:xfrm>
-            <a:off x="7534478" y="6229650"/>
-            <a:ext cx="4550222" cy="548230"/>
-          </a:xfrm>
-          <a:prstGeom prst="rect">
-            <a:avLst/>
-          </a:prstGeom>
-          <a:solidFill>
-            <a:srgbClr val="C00000"/>
-          </a:solidFill>
-          <a:ln>
-            <a:noFill/>
-          </a:ln>
-        </p:spPr>
-        <p:txBody>
-          <a:bodyPr spcFirstLastPara="1" wrap="square" lIns="91425" tIns="45700" rIns="91425" bIns="45700" anchor="ctr" anchorCtr="0">
-            <a:noAutofit/>
-          </a:bodyPr>
-          <a:lstStyle/>
-          <a:p>
-            <a:pPr marL="0" marR="0" lvl="0" indent="0" algn="ctr" rtl="0">
-              <a:lnSpc>
-                <a:spcPct val="100000"/>
-              </a:lnSpc>
-              <a:spcBef>
-                <a:spcPts val="0"/>
-              </a:spcBef>
-              <a:spcAft>
-                <a:spcPts val="0"/>
-              </a:spcAft>
-              <a:buClr>
-                <a:srgbClr val="000000"/>
-              </a:buClr>
-              <a:buSzPts val="1600"/>
-              <a:buFont typeface="Arial"/>
-              <a:buNone/>
-            </a:pPr>
-            <a:r>
-              <a:rPr lang="en-US" sz="3600" dirty="0">
-                <a:solidFill>
-                  <a:schemeClr val="lt1"/>
-                </a:solidFill>
-              </a:rPr>
-              <a:t>Dead at Age 42</a:t>
-            </a:r>
-            <a:endParaRPr sz="2000" b="0" i="0" u="none" strike="noStrike" cap="none" dirty="0">
-              <a:solidFill>
-                <a:srgbClr val="000000"/>
-              </a:solidFill>
-              <a:latin typeface="Arial"/>
-              <a:ea typeface="Arial"/>
-              <a:cs typeface="Arial"/>
-              <a:sym typeface="Arial"/>
-            </a:endParaRPr>
-          </a:p>
-        </p:txBody>
-      </p:sp>
-      <p:sp>
-        <p:nvSpPr>
-          <p:cNvPr id="10" name="TextBox 9">
-            <a:extLst>
-              <a:ext uri="{FF2B5EF4-FFF2-40B4-BE49-F238E27FC236}">
-                <a16:creationId xmlns:a16="http://schemas.microsoft.com/office/drawing/2014/main" id="{5FA0D8B2-6B55-D3DC-BCBB-6FEAD86B9E72}"/>
-              </a:ext>
-            </a:extLst>
-          </p:cNvPr>
-          <p:cNvSpPr txBox="1"/>
-          <p:nvPr/>
-        </p:nvSpPr>
-        <p:spPr>
-          <a:xfrm>
-            <a:off x="312431" y="2175372"/>
-            <a:ext cx="6987941" cy="3046988"/>
-          </a:xfrm>
-          <a:prstGeom prst="rect">
-            <a:avLst/>
-          </a:prstGeom>
-          <a:solidFill>
-            <a:schemeClr val="bg1">
-              <a:alpha val="84400"/>
-            </a:schemeClr>
-          </a:solidFill>
-        </p:spPr>
-        <p:txBody>
-          <a:bodyPr wrap="square" rtlCol="0">
-            <a:spAutoFit/>
-          </a:bodyPr>
-          <a:lstStyle/>
-          <a:p>
-            <a:pPr marL="285750" indent="-285750">
-              <a:spcBef>
-                <a:spcPts val="1200"/>
-              </a:spcBef>
-              <a:buFont typeface="Arial" panose="020B0604020202020204" pitchFamily="34" charset="0"/>
-              <a:buChar char="•"/>
-            </a:pPr>
-            <a:r>
-              <a:t>Blown up by a BOMB hidden inside a cafe he visited DAILY in Donetsk. Age 42.</a:t>
-            </a:r>
-          </a:p>
-          <a:p>
-            <a:pPr marL="285750" indent="-285750">
-              <a:spcBef>
-                <a:spcPts val="1200"/>
-              </a:spcBef>
-              <a:buFont typeface="Arial" panose="020B0604020202020204" pitchFamily="34" charset="0"/>
-              <a:buChar char="•"/>
-            </a:pPr>
-            <a:r>
-              <a:t>The bomb was concealed in a LIGHTING FIXTURE above his usual seat — someone knew his exact habits.</a:t>
-            </a:r>
-          </a:p>
-          <a:p>
-            <a:pPr marL="285750" indent="-285750">
-              <a:spcBef>
-                <a:spcPts val="1200"/>
-              </a:spcBef>
-              <a:buFont typeface="Arial" panose="020B0604020202020204" pitchFamily="34" charset="0"/>
-              <a:buChar char="•"/>
-            </a:pPr>
-            <a:r>
-              <a:t>Both Ukraine AND Russia have been accused. His own security apparatus was likely PENETRATED.</a:t>
-            </a:r>
-          </a:p>
-          <a:p>
-            <a:pPr marL="285750" indent="-285750">
-              <a:spcBef>
-                <a:spcPts val="1200"/>
-              </a:spcBef>
-              <a:buFont typeface="Arial" panose="020B0604020202020204" pitchFamily="34" charset="0"/>
-              <a:buChar char="•"/>
-            </a:pPr>
-            <a:r>
-              <a:t>His successor was installed within DAYS — someone was READY for his removal.</a:t>
-            </a:r>
-          </a:p>
-          <a:p>
-            <a:pPr marL="285750" indent="-285750">
-              <a:spcBef>
-                <a:spcPts val="1200"/>
-              </a:spcBef>
-              <a:buFont typeface="Arial" panose="020B0604020202020204" pitchFamily="34" charset="0"/>
-              <a:buChar char="•"/>
-            </a:pPr>
-            <a:r>
-              <a:t>Part of a pattern: separatist leaders in Donbas were being ELIMINATED one by one.</a:t>
-            </a:r>
-          </a:p>
-        </p:txBody>
-      </p:sp>
-      <p:pic>
-        <p:nvPicPr>
-          <p:cNvPr id="16" name="Picture 15" descr="Alexander_Zakharchenko.jpg"/>
-          <p:cNvPicPr>
-            <a:picLocks noChangeAspect="1"/>
-          </p:cNvPicPr>
-          <p:nvPr/>
-        </p:nvPicPr>
-        <p:blipFill>
-          <a:blip r:embed="rId3"/>
-          <a:stretch>
-            <a:fillRect/>
-          </a:stretch>
-        </p:blipFill>
-        <p:spPr>
-          <a:xfrm>
-            <a:off x="8139098" y="1100088"/>
-            <a:ext cx="3003770" cy="3884876"/>
-          </a:xfrm>
-          <a:prstGeom prst="rect">
-            <a:avLst/>
-          </a:prstGeom>
-        </p:spPr>
-      </p:pic>
-      <p:sp>
-        <p:nvSpPr>
-          <p:cNvPr id="7" name="Google Shape;170;p31">
-            <a:extLst>
-              <a:ext uri="{FF2B5EF4-FFF2-40B4-BE49-F238E27FC236}">
-                <a16:creationId xmlns:a16="http://schemas.microsoft.com/office/drawing/2014/main" id="{4B582382-76AA-B49E-C611-39A37CE591B9}"/>
-              </a:ext>
-            </a:extLst>
-          </p:cNvPr>
-          <p:cNvSpPr/>
-          <p:nvPr/>
-        </p:nvSpPr>
-        <p:spPr>
-          <a:xfrm>
-            <a:off x="7506336" y="4925186"/>
-            <a:ext cx="4550222" cy="1304464"/>
-          </a:xfrm>
-          <a:prstGeom prst="rect">
-            <a:avLst/>
-          </a:prstGeom>
-          <a:solidFill>
-            <a:srgbClr val="C00000"/>
-          </a:solidFill>
-          <a:ln>
-            <a:noFill/>
-          </a:ln>
-        </p:spPr>
-        <p:txBody>
-          <a:bodyPr spcFirstLastPara="1" wrap="square" lIns="91425" tIns="45700" rIns="91425" bIns="45700" anchor="ctr" anchorCtr="0">
-            <a:noAutofit/>
-          </a:bodyPr>
-          <a:lstStyle/>
-          <a:p>
-            <a:pPr marL="0" marR="0" lvl="0" indent="0" algn="ctr" rtl="0">
-              <a:lnSpc>
-                <a:spcPct val="100000"/>
-              </a:lnSpc>
-              <a:spcBef>
-                <a:spcPts val="0"/>
-              </a:spcBef>
-              <a:spcAft>
-                <a:spcPts val="0"/>
-              </a:spcAft>
-              <a:buClr>
-                <a:srgbClr val="000000"/>
-              </a:buClr>
-              <a:buSzPts val="1600"/>
-              <a:buFont typeface="Arial"/>
-              <a:buNone/>
-            </a:pPr>
-            <a:r>
-              <a:rPr lang="en-US" sz="4800" dirty="0">
-                <a:solidFill>
-                  <a:schemeClr val="lt1"/>
-                </a:solidFill>
-              </a:rPr>
-              <a:t>Alexander Zakharchenko</a:t>
-            </a:r>
-            <a:endParaRPr sz="3200" b="0" i="0" u="none" strike="noStrike" cap="none" dirty="0">
-              <a:solidFill>
-                <a:srgbClr val="000000"/>
-              </a:solidFill>
-              <a:latin typeface="Arial"/>
-              <a:ea typeface="Arial"/>
-              <a:cs typeface="Arial"/>
-              <a:sym typeface="Arial"/>
-            </a:endParaRPr>
-          </a:p>
-        </p:txBody>
-      </p:sp>
-    </p:spTree>
-    <p:extLst>
-      <p:ext uri="{BB962C8B-B14F-4D97-AF65-F5344CB8AC3E}">
-        <p14:creationId xmlns:p14="http://schemas.microsoft.com/office/powerpoint/2010/main" val="1430171334"/>
-      </p:ext>
-    </p:extLst>
-  </p:cSld>
-  <p:clrMapOvr>
-    <a:masterClrMapping/>
-  </p:clrMapOvr>
-</p:sld>
-</file>
-
 <file path=ppt/slides/slide9.xml><?xml version="1.0" encoding="utf-8"?>
 <p:sld xmlns:a="http://schemas.openxmlformats.org/drawingml/2006/main" xmlns:r="http://schemas.openxmlformats.org/officeDocument/2006/relationships" xmlns:p="http://schemas.openxmlformats.org/presentationml/2006/main">
   <p:cSld>
@@ -13002,7 +14116,7 @@
         <p:spPr>
           <a:xfrm>
             <a:off x="312432" y="1288262"/>
-            <a:ext cx="6494294" cy="584775"/>
+            <a:ext cx="7972976" cy="584775"/>
           </a:xfrm>
           <a:prstGeom prst="rect">
             <a:avLst/>
@@ -13025,7 +14139,7 @@
                   <a:schemeClr val="accent5"/>
                 </a:solidFill>
               </a:rPr>
-              <a:t>Why / How they Jason Thomas:</a:t>
+              <a:t>Why / How they Alexander Zakharchenko:</a:t>
             </a:r>
           </a:p>
         </p:txBody>
@@ -13211,10 +14325,10 @@
       </p:sp>
       <p:sp>
         <p:nvSpPr>
-          <p:cNvPr id="7" name="Google Shape;170;p31">
-            <a:extLst>
-              <a:ext uri="{FF2B5EF4-FFF2-40B4-BE49-F238E27FC236}">
-                <a16:creationId xmlns:a16="http://schemas.microsoft.com/office/drawing/2014/main" id="{4B582382-76AA-B49E-C611-39A37CE591B9}"/>
+          <p:cNvPr id="8" name="Google Shape;170;p31">
+            <a:extLst>
+              <a:ext uri="{FF2B5EF4-FFF2-40B4-BE49-F238E27FC236}">
+                <a16:creationId xmlns:a16="http://schemas.microsoft.com/office/drawing/2014/main" id="{D328ABDE-E232-3EB7-C3F2-B4BB7B64262F}"/>
               </a:ext>
             </a:extLst>
           </p:cNvPr>
@@ -13223,8 +14337,8 @@
         </p:nvSpPr>
         <p:spPr>
           <a:xfrm>
-            <a:off x="7506336" y="4925186"/>
-            <a:ext cx="4550222" cy="869505"/>
+            <a:off x="7534478" y="6229650"/>
+            <a:ext cx="4550222" cy="548230"/>
           </a:xfrm>
           <a:prstGeom prst="rect">
             <a:avLst/>
@@ -13260,82 +14374,12 @@
               <a:buNone/>
             </a:pPr>
             <a:r>
-              <a:rPr lang="en-US" sz="4800" dirty="0">
-                <a:solidFill>
-                  <a:schemeClr val="lt1"/>
-                </a:solidFill>
-              </a:rPr>
-              <a:t>Jason Thomas</a:t>
-            </a:r>
-            <a:endParaRPr sz="3200" b="0" i="0" u="none" strike="noStrike" cap="none" dirty="0">
-              <a:solidFill>
-                <a:srgbClr val="000000"/>
-              </a:solidFill>
-              <a:latin typeface="Arial"/>
-              <a:ea typeface="Arial"/>
-              <a:cs typeface="Arial"/>
-              <a:sym typeface="Arial"/>
-            </a:endParaRPr>
-          </a:p>
-        </p:txBody>
-      </p:sp>
-      <p:sp>
-        <p:nvSpPr>
-          <p:cNvPr id="8" name="Google Shape;170;p31">
-            <a:extLst>
-              <a:ext uri="{FF2B5EF4-FFF2-40B4-BE49-F238E27FC236}">
-                <a16:creationId xmlns:a16="http://schemas.microsoft.com/office/drawing/2014/main" id="{D328ABDE-E232-3EB7-C3F2-B4BB7B64262F}"/>
-              </a:ext>
-            </a:extLst>
-          </p:cNvPr>
-          <p:cNvSpPr/>
-          <p:nvPr/>
-        </p:nvSpPr>
-        <p:spPr>
-          <a:xfrm>
-            <a:off x="7526107" y="5681420"/>
-            <a:ext cx="4550222" cy="548230"/>
-          </a:xfrm>
-          <a:prstGeom prst="rect">
-            <a:avLst/>
-          </a:prstGeom>
-          <a:solidFill>
-            <a:srgbClr val="C00000"/>
-          </a:solidFill>
-          <a:ln>
-            <a:noFill/>
-          </a:ln>
-        </p:spPr>
-        <p:txBody>
-          <a:bodyPr spcFirstLastPara="1" wrap="square" lIns="91425" tIns="45700" rIns="91425" bIns="45700" anchor="ctr" anchorCtr="0">
-            <a:noAutofit/>
-          </a:bodyPr>
-          <a:lstStyle/>
-          <a:p>
-            <a:pPr marL="0" marR="0" lvl="0" indent="0" algn="ctr" rtl="0">
-              <a:lnSpc>
-                <a:spcPct val="100000"/>
-              </a:lnSpc>
-              <a:spcBef>
-                <a:spcPts val="0"/>
-              </a:spcBef>
-              <a:spcAft>
-                <a:spcPts val="0"/>
-              </a:spcAft>
-              <a:buClr>
-                <a:srgbClr val="000000"/>
-              </a:buClr>
-              <a:buSzPts val="1600"/>
-              <a:buFont typeface="Arial"/>
-              <a:buNone/>
-            </a:pPr>
-            <a:r>
               <a:rPr lang="en-US" sz="3600" dirty="0">
                 <a:solidFill>
                   <a:schemeClr val="lt1"/>
                 </a:solidFill>
               </a:rPr>
-              <a:t>Dead at Age 45</a:t>
+              <a:t>Dead at Age 42</a:t>
             </a:r>
             <a:endParaRPr sz="2000" b="0" i="0" u="none" strike="noStrike" cap="none" dirty="0">
               <a:solidFill>
@@ -13389,7 +14433,7 @@
               <a:buChar char="•"/>
             </a:pPr>
             <a:r>
-              <a:t>Cancer researcher with DEPARTMENT OF DEFENSE contracts through Novartis. Age 45. Found dead in a FROZEN LAKE.</a:t>
+              <a:t>Blown up by a BOMB hidden inside a cafe he visited DAILY in Donetsk. Age 42.</a:t>
             </a:r>
           </a:p>
           <a:p>
@@ -13401,7 +14445,7 @@
               <a:buChar char="•"/>
             </a:pPr>
             <a:r>
-              <a:t>Disappeared December 2025 after leaving behind his wallet, phone, and Apple Watch — watch was in the MAILBOX.</a:t>
+              <a:t>The bomb was concealed in a LIGHTING FIXTURE above his usual seat — someone knew his exact habits.</a:t>
             </a:r>
           </a:p>
           <a:p>
@@ -13413,7 +14457,7 @@
               <a:buChar char="•"/>
             </a:pPr>
             <a:r>
-              <a:t>His body was submerged in ice for THREE MONTHS, severely limiting forensic evidence.</a:t>
+              <a:t>Both Ukraine AND Russia have been accused. His own security apparatus was likely PENETRATED.</a:t>
             </a:r>
           </a:p>
           <a:p>
@@ -13425,7 +14469,7 @@
               <a:buChar char="•"/>
             </a:pPr>
             <a:r>
-              <a:t>Part of a CLUSTER of scientist deaths in 2025-2026 that drew CONGRESSIONAL attention.</a:t>
+              <a:t>His successor was installed within DAYS — someone was READY for his removal.</a:t>
             </a:r>
           </a:p>
           <a:p>
@@ -13437,14 +14481,14 @@
               <a:buChar char="•"/>
             </a:pPr>
             <a:r>
-              <a:t>Both parents died within ONE HOUR of each other weeks before. Official cause of death STILL NOT RELEASED.</a:t>
+              <a:t>Part of a pattern: separatist leaders in Donbas were being ELIMINATED one by one.</a:t>
             </a:r>
           </a:p>
         </p:txBody>
       </p:sp>
       <p:pic>
         <p:nvPicPr>
-          <p:cNvPr id="16" name="Picture 15" descr="Jason_Thomas.jpg"/>
+          <p:cNvPr id="16" name="Picture 15" descr="Alexander_Zakharchenko.jpg"/>
           <p:cNvPicPr>
             <a:picLocks noChangeAspect="1"/>
           </p:cNvPicPr>
@@ -13458,15 +14502,90 @@
         </p:blipFill>
         <p:spPr>
           <a:xfrm>
-            <a:off x="8170539" y="1100088"/>
-            <a:ext cx="2940887" cy="3884876"/>
+            <a:off x="8139098" y="1100088"/>
+            <a:ext cx="3003770" cy="3884876"/>
           </a:xfrm>
           <a:prstGeom prst="rect">
             <a:avLst/>
           </a:prstGeom>
         </p:spPr>
       </p:pic>
+      <p:sp>
+        <p:nvSpPr>
+          <p:cNvPr id="7" name="Google Shape;170;p31">
+            <a:extLst>
+              <a:ext uri="{FF2B5EF4-FFF2-40B4-BE49-F238E27FC236}">
+                <a16:creationId xmlns:a16="http://schemas.microsoft.com/office/drawing/2014/main" id="{4B582382-76AA-B49E-C611-39A37CE591B9}"/>
+              </a:ext>
+            </a:extLst>
+          </p:cNvPr>
+          <p:cNvSpPr/>
+          <p:nvPr/>
+        </p:nvSpPr>
+        <p:spPr>
+          <a:xfrm>
+            <a:off x="7506336" y="4925186"/>
+            <a:ext cx="4550222" cy="1304464"/>
+          </a:xfrm>
+          <a:prstGeom prst="rect">
+            <a:avLst/>
+          </a:prstGeom>
+          <a:solidFill>
+            <a:srgbClr val="C00000"/>
+          </a:solidFill>
+          <a:ln>
+            <a:noFill/>
+          </a:ln>
+        </p:spPr>
+        <p:txBody>
+          <a:bodyPr spcFirstLastPara="1" wrap="square" lIns="91425" tIns="45700" rIns="91425" bIns="45700" anchor="ctr" anchorCtr="0">
+            <a:noAutofit/>
+          </a:bodyPr>
+          <a:lstStyle/>
+          <a:p>
+            <a:pPr marL="0" marR="0" lvl="0" indent="0" algn="ctr" rtl="0">
+              <a:lnSpc>
+                <a:spcPct val="100000"/>
+              </a:lnSpc>
+              <a:spcBef>
+                <a:spcPts val="0"/>
+              </a:spcBef>
+              <a:spcAft>
+                <a:spcPts val="0"/>
+              </a:spcAft>
+              <a:buClr>
+                <a:srgbClr val="000000"/>
+              </a:buClr>
+              <a:buSzPts val="1600"/>
+              <a:buFont typeface="Arial"/>
+              <a:buNone/>
+            </a:pPr>
+            <a:r>
+              <a:rPr lang="en-US" sz="4800" dirty="0">
+                <a:solidFill>
+                  <a:schemeClr val="lt1"/>
+                </a:solidFill>
+              </a:rPr>
+              <a:t>Alexander Zakharchenko</a:t>
+            </a:r>
+            <a:endParaRPr sz="3200" b="0" i="0" u="none" strike="noStrike" cap="none" dirty="0">
+              <a:solidFill>
+                <a:srgbClr val="000000"/>
+              </a:solidFill>
+              <a:latin typeface="Arial"/>
+              <a:ea typeface="Arial"/>
+              <a:cs typeface="Arial"/>
+              <a:sym typeface="Arial"/>
+            </a:endParaRPr>
+          </a:p>
+        </p:txBody>
+      </p:sp>
     </p:spTree>
+    <p:extLst>
+      <p:ext uri="{BB962C8B-B14F-4D97-AF65-F5344CB8AC3E}">
+        <p14:creationId xmlns:p14="http://schemas.microsoft.com/office/powerpoint/2010/main" val="1430171334"/>
+      </p:ext>
+    </p:extLst>
   </p:cSld>
   <p:clrMapOvr>
     <a:masterClrMapping/>
